--- a/04-bias-variance-and-cross-validation/slides.pptx
+++ b/04-bias-variance-and-cross-validation/slides.pptx
@@ -23,6 +23,14 @@
     <p:sldId id="271" r:id="rId17"/>
     <p:sldId id="272" r:id="rId18"/>
     <p:sldId id="273" r:id="rId19"/>
+    <p:sldId id="274" r:id="rId20"/>
+    <p:sldId id="275" r:id="rId21"/>
+    <p:sldId id="276" r:id="rId22"/>
+    <p:sldId id="277" r:id="rId23"/>
+    <p:sldId id="278" r:id="rId24"/>
+    <p:sldId id="279" r:id="rId25"/>
+    <p:sldId id="280" r:id="rId26"/>
+    <p:sldId id="281" r:id="rId27"/>
   </p:sldIdLst>
   <p:sldSz cx="9144000" cy="5143500" type="screen16x9"/>
   <p:notesSz cx="6858000" cy="9144000"/>
@@ -3240,248 +3248,247 @@
             </a:pPr>
             <a:r>
               <a:rPr/>
-              <a:t>The data</a:t>
-            </a:r>
-          </a:p>
-        </p:txBody>
-      </p:sp>
-      <p:sp>
-        <p:nvSpPr>
-          <p:cNvPr id="3" name="Content Placeholder 2"/>
-          <p:cNvSpPr>
-            <a:spLocks noGrp="1"/>
-          </p:cNvSpPr>
+              <a:t>Three splits, three questions</a:t>
+            </a:r>
+          </a:p>
+        </p:txBody>
+      </p:sp>
+      <p:graphicFrame>
+        <p:nvGraphicFramePr>
+          <p:cNvPr id="6" name="Content Placeholder 5"/>
+          <p:cNvGraphicFramePr>
+            <a:graphicFrameLocks noGrp="1"/>
+          </p:cNvGraphicFramePr>
           <p:nvPr>
             <p:ph idx="1"/>
           </p:nvPr>
-        </p:nvSpPr>
-        <p:spPr/>
-        <p:txBody>
-          <a:bodyPr/>
-          <a:lstStyle/>
-          <a:p>
-            <a:pPr lvl="0" indent="0">
-              <a:buNone/>
-            </a:pPr>
-            <a:r>
-              <a:rPr b="1">
-                <a:solidFill>
-                  <a:srgbClr val="008000"/>
-                </a:solidFill>
-                <a:latin typeface="Courier"/>
-              </a:rPr>
-              <a:t>import</a:t>
-            </a:r>
-            <a:r>
-              <a:rPr>
-                <a:latin typeface="Courier"/>
-              </a:rPr>
-              <a:t> pandas </a:t>
-            </a:r>
-            <a:r>
-              <a:rPr b="1">
-                <a:solidFill>
-                  <a:srgbClr val="008000"/>
-                </a:solidFill>
-                <a:latin typeface="Courier"/>
-              </a:rPr>
-              <a:t>as</a:t>
-            </a:r>
-            <a:r>
-              <a:rPr>
-                <a:latin typeface="Courier"/>
-              </a:rPr>
-              <a:t> pd</a:t>
-            </a:r>
-            <a:br/>
-            <a:br/>
-            <a:r>
-              <a:rPr>
-                <a:latin typeface="Courier"/>
-              </a:rPr>
-              <a:t>core </a:t>
-            </a:r>
-            <a:r>
-              <a:rPr>
-                <a:solidFill>
-                  <a:srgbClr val="666666"/>
-                </a:solidFill>
-                <a:latin typeface="Courier"/>
-              </a:rPr>
-              <a:t>=</a:t>
-            </a:r>
-            <a:r>
-              <a:rPr>
-                <a:latin typeface="Courier"/>
-              </a:rPr>
-              <a:t> pd.read_parquet(</a:t>
-            </a:r>
-            <a:r>
-              <a:rPr>
-                <a:solidFill>
-                  <a:srgbClr val="4070A0"/>
-                </a:solidFill>
-                <a:latin typeface="Courier"/>
-              </a:rPr>
-              <a:t>"data/spine/core.parquet"</a:t>
-            </a:r>
-            <a:r>
-              <a:rPr>
-                <a:latin typeface="Courier"/>
-              </a:rPr>
-              <a:t>)</a:t>
-            </a:r>
-            <a:br/>
-            <a:r>
-              <a:rPr>
-                <a:latin typeface="Courier"/>
-              </a:rPr>
-              <a:t>d </a:t>
-            </a:r>
-            <a:r>
-              <a:rPr>
-                <a:solidFill>
-                  <a:srgbClr val="666666"/>
-                </a:solidFill>
-                <a:latin typeface="Courier"/>
-              </a:rPr>
-              <a:t>=</a:t>
-            </a:r>
-            <a:r>
-              <a:rPr>
-                <a:latin typeface="Courier"/>
-              </a:rPr>
-              <a:t> core.dropna(subset</a:t>
-            </a:r>
-            <a:r>
-              <a:rPr>
-                <a:solidFill>
-                  <a:srgbClr val="666666"/>
-                </a:solidFill>
-                <a:latin typeface="Courier"/>
-              </a:rPr>
-              <a:t>=</a:t>
-            </a:r>
-            <a:r>
-              <a:rPr>
-                <a:latin typeface="Courier"/>
-              </a:rPr>
-              <a:t>[</a:t>
-            </a:r>
-            <a:r>
-              <a:rPr>
-                <a:solidFill>
-                  <a:srgbClr val="4070A0"/>
-                </a:solidFill>
-                <a:latin typeface="Courier"/>
-              </a:rPr>
-              <a:t>"prod_growth"</a:t>
-            </a:r>
-            <a:r>
-              <a:rPr>
-                <a:latin typeface="Courier"/>
-              </a:rPr>
-              <a:t>]).copy()</a:t>
-            </a:r>
-            <a:br/>
-            <a:br/>
-            <a:r>
-              <a:rPr>
-                <a:solidFill>
-                  <a:srgbClr val="008000"/>
-                </a:solidFill>
-                <a:latin typeface="Courier"/>
-              </a:rPr>
-              <a:t>print</a:t>
-            </a:r>
-            <a:r>
-              <a:rPr>
-                <a:latin typeface="Courier"/>
-              </a:rPr>
-              <a:t>(d.shape)                    </a:t>
-            </a:r>
-            <a:r>
-              <a:rPr i="1">
-                <a:solidFill>
-                  <a:srgbClr val="60A0B0"/>
-                </a:solidFill>
-                <a:latin typeface="Courier"/>
-              </a:rPr>
-              <a:t># ~420 rows (first year per country has no growth)</a:t>
-            </a:r>
-            <a:br/>
-            <a:r>
-              <a:rPr>
-                <a:solidFill>
-                  <a:srgbClr val="008000"/>
-                </a:solidFill>
-                <a:latin typeface="Courier"/>
-              </a:rPr>
-              <a:t>print</a:t>
-            </a:r>
-            <a:r>
-              <a:rPr>
-                <a:latin typeface="Courier"/>
-              </a:rPr>
-              <a:t>(d.geo.nunique(), d.time.</a:t>
-            </a:r>
-            <a:r>
-              <a:rPr>
-                <a:solidFill>
-                  <a:srgbClr val="008000"/>
-                </a:solidFill>
-                <a:latin typeface="Courier"/>
-              </a:rPr>
-              <a:t>min</a:t>
-            </a:r>
-            <a:r>
-              <a:rPr>
-                <a:latin typeface="Courier"/>
-              </a:rPr>
-              <a:t>(), d.time.</a:t>
-            </a:r>
-            <a:r>
-              <a:rPr>
-                <a:solidFill>
-                  <a:srgbClr val="008000"/>
-                </a:solidFill>
-                <a:latin typeface="Courier"/>
-              </a:rPr>
-              <a:t>max</a:t>
-            </a:r>
-            <a:r>
-              <a:rPr>
-                <a:latin typeface="Courier"/>
-              </a:rPr>
-              <a:t>())   </a:t>
-            </a:r>
-            <a:r>
-              <a:rPr i="1">
-                <a:solidFill>
-                  <a:srgbClr val="60A0B0"/>
-                </a:solidFill>
-                <a:latin typeface="Courier"/>
-              </a:rPr>
-              <a:t># 30 countries, 2010-2024</a:t>
-            </a:r>
-          </a:p>
-          <a:p>
-            <a:pPr lvl="0" indent="0" marL="0">
-              <a:buNone/>
-            </a:pPr>
-            <a:r>
-              <a:rPr>
-                <a:latin typeface="Courier"/>
-              </a:rPr>
-              <a:t>prod_growth</a:t>
-            </a:r>
-            <a:r>
-              <a:rPr/>
-              <a:t> is NaN in each country’s first year. That is arithmetic, not missing data — you cannot difference what has no predecessor.</a:t>
-            </a:r>
-          </a:p>
-        </p:txBody>
-      </p:sp>
+        </p:nvGraphicFramePr>
+        <p:xfrm>
+          <a:off x="457200" y="1193800"/>
+          <a:ext cx="8229600" cy="3390900"/>
+        </p:xfrm>
+        <a:graphic>
+          <a:graphicData uri="http://schemas.openxmlformats.org/drawingml/2006/table">
+            <a:tbl>
+              <a:tblPr firstRow="1" bandRow="1">
+                <a:tableStyleId>{5C22544A-7EE6-4342-B048-85BDC9FD1C3A}</a:tableStyleId>
+              </a:tblPr>
+              <a:tblGrid>
+                <a:gridCol w="2743200"/>
+                <a:gridCol w="2743200"/>
+                <a:gridCol w="2743200"/>
+              </a:tblGrid>
+              <a:tr h="0">
+                <a:tc>
+                  <a:txBody>
+                    <a:bodyPr/>
+                    <a:lstStyle/>
+                    <a:p>
+                      <a:pPr lvl="0" indent="0" marL="0">
+                        <a:buNone/>
+                      </a:pPr>
+                      <a:r>
+                        <a:rPr/>
+                        <a:t>Split</a:t>
+                      </a:r>
+                    </a:p>
+                  </a:txBody>
+                  <a:tcPr/>
+                </a:tc>
+                <a:tc>
+                  <a:txBody>
+                    <a:bodyPr/>
+                    <a:lstStyle/>
+                    <a:p>
+                      <a:pPr lvl="0" indent="0" marL="0">
+                        <a:buNone/>
+                      </a:pPr>
+                      <a:r>
+                        <a:rPr/>
+                        <a:t>Answers</a:t>
+                      </a:r>
+                    </a:p>
+                  </a:txBody>
+                  <a:tcPr/>
+                </a:tc>
+                <a:tc>
+                  <a:txBody>
+                    <a:bodyPr/>
+                    <a:lstStyle/>
+                    <a:p>
+                      <a:pPr lvl="0" indent="0" marL="0">
+                        <a:buNone/>
+                      </a:pPr>
+                      <a:r>
+                        <a:rPr/>
+                        <a:t>Use</a:t>
+                      </a:r>
+                    </a:p>
+                  </a:txBody>
+                  <a:tcPr/>
+                </a:tc>
+              </a:tr>
+              <a:tr h="0">
+                <a:tc>
+                  <a:txBody>
+                    <a:bodyPr/>
+                    <a:lstStyle/>
+                    <a:p>
+                      <a:pPr lvl="0" indent="0" marL="0">
+                        <a:buNone/>
+                      </a:pPr>
+                      <a:r>
+                        <a:rPr b="1"/>
+                        <a:t>Random K-fold</a:t>
+                      </a:r>
+                    </a:p>
+                  </a:txBody>
+                </a:tc>
+                <a:tc>
+                  <a:txBody>
+                    <a:bodyPr/>
+                    <a:lstStyle/>
+                    <a:p>
+                      <a:pPr lvl="0" indent="0" marL="0">
+                        <a:buNone/>
+                      </a:pPr>
+                      <a:r>
+                        <a:rPr/>
+                        <a:t>“New row from the same countries and years”</a:t>
+                      </a:r>
+                    </a:p>
+                  </a:txBody>
+                </a:tc>
+                <a:tc>
+                  <a:txBody>
+                    <a:bodyPr/>
+                    <a:lstStyle/>
+                    <a:p>
+                      <a:pPr lvl="0" indent="0" marL="0">
+                        <a:buNone/>
+                      </a:pPr>
+                      <a:r>
+                        <a:rPr/>
+                        <a:t>Almost never here</a:t>
+                      </a:r>
+                    </a:p>
+                  </a:txBody>
+                </a:tc>
+              </a:tr>
+              <a:tr h="0">
+                <a:tc>
+                  <a:txBody>
+                    <a:bodyPr/>
+                    <a:lstStyle/>
+                    <a:p>
+                      <a:pPr lvl="0" indent="0" marL="0">
+                        <a:buNone/>
+                      </a:pPr>
+                      <a:r>
+                        <a:rPr b="1"/>
+                        <a:t>GroupKFold by </a:t>
+                      </a:r>
+                      <a:r>
+                        <a:rPr b="1">
+                          <a:latin typeface="Courier"/>
+                        </a:rPr>
+                        <a:t>geo</a:t>
+                      </a:r>
+                    </a:p>
+                  </a:txBody>
+                </a:tc>
+                <a:tc>
+                  <a:txBody>
+                    <a:bodyPr/>
+                    <a:lstStyle/>
+                    <a:p>
+                      <a:pPr lvl="0" indent="0" marL="0">
+                        <a:buNone/>
+                      </a:pPr>
+                      <a:r>
+                        <a:rPr/>
+                        <a:t>“A country I have never seen”</a:t>
+                      </a:r>
+                    </a:p>
+                  </a:txBody>
+                </a:tc>
+                <a:tc>
+                  <a:txBody>
+                    <a:bodyPr/>
+                    <a:lstStyle/>
+                    <a:p>
+                      <a:pPr lvl="0" indent="0" marL="0">
+                        <a:buNone/>
+                      </a:pPr>
+                      <a:r>
+                        <a:rPr/>
+                        <a:t>Transfer across countries</a:t>
+                      </a:r>
+                    </a:p>
+                  </a:txBody>
+                </a:tc>
+              </a:tr>
+              <a:tr h="0">
+                <a:tc>
+                  <a:txBody>
+                    <a:bodyPr/>
+                    <a:lstStyle/>
+                    <a:p>
+                      <a:pPr lvl="0" indent="0" marL="0">
+                        <a:buNone/>
+                      </a:pPr>
+                      <a:r>
+                        <a:rPr b="1"/>
+                        <a:t>TimeSeriesSplit</a:t>
+                      </a:r>
+                      <a:r>
+                        <a:rPr/>
+                        <a:t> by </a:t>
+                      </a:r>
+                      <a:r>
+                        <a:rPr>
+                          <a:latin typeface="Courier"/>
+                        </a:rPr>
+                        <a:t>time</a:t>
+                      </a:r>
+                    </a:p>
+                  </a:txBody>
+                </a:tc>
+                <a:tc>
+                  <a:txBody>
+                    <a:bodyPr/>
+                    <a:lstStyle/>
+                    <a:p>
+                      <a:pPr lvl="0" indent="0" marL="0">
+                        <a:buNone/>
+                      </a:pPr>
+                      <a:r>
+                        <a:rPr/>
+                        <a:t>“Next year”</a:t>
+                      </a:r>
+                    </a:p>
+                  </a:txBody>
+                </a:tc>
+                <a:tc>
+                  <a:txBody>
+                    <a:bodyPr/>
+                    <a:lstStyle/>
+                    <a:p>
+                      <a:pPr lvl="0" indent="0" marL="0">
+                        <a:buNone/>
+                      </a:pPr>
+                      <a:r>
+                        <a:rPr/>
+                        <a:t>Forecasting — Session 11</a:t>
+                      </a:r>
+                    </a:p>
+                  </a:txBody>
+                </a:tc>
+              </a:tr>
+            </a:tbl>
+          </a:graphicData>
+        </a:graphic>
+      </p:graphicFrame>
     </p:spTree>
   </p:cSld>
 </p:sld>
@@ -3506,12 +3513,12 @@
       </p:grpSpPr>
       <p:sp>
         <p:nvSpPr>
-          <p:cNvPr id="2" name="Title 1"/>
-          <p:cNvSpPr>
-            <a:spLocks noGrp="1"/>
-          </p:cNvSpPr>
-          <p:nvPr>
-            <p:ph type="title"/>
+          <p:cNvPr id="3" name="Content Placeholder 2"/>
+          <p:cNvSpPr>
+            <a:spLocks noGrp="1"/>
+          </p:cNvSpPr>
+          <p:nvPr>
+            <p:ph idx="1"/>
           </p:nvPr>
         </p:nvSpPr>
         <p:spPr/>
@@ -3524,333 +3531,7 @@
             </a:pPr>
             <a:r>
               <a:rPr/>
-              <a:t>Set up the comparison</a:t>
-            </a:r>
-          </a:p>
-        </p:txBody>
-      </p:sp>
-      <p:sp>
-        <p:nvSpPr>
-          <p:cNvPr id="3" name="Content Placeholder 2"/>
-          <p:cNvSpPr>
-            <a:spLocks noGrp="1"/>
-          </p:cNvSpPr>
-          <p:nvPr>
-            <p:ph idx="1"/>
-          </p:nvPr>
-        </p:nvSpPr>
-        <p:spPr/>
-        <p:txBody>
-          <a:bodyPr/>
-          <a:lstStyle/>
-          <a:p>
-            <a:pPr lvl="0" indent="0">
-              <a:buNone/>
-            </a:pPr>
-            <a:r>
-              <a:rPr b="1">
-                <a:solidFill>
-                  <a:srgbClr val="008000"/>
-                </a:solidFill>
-                <a:latin typeface="Courier"/>
-              </a:rPr>
-              <a:t>from</a:t>
-            </a:r>
-            <a:r>
-              <a:rPr>
-                <a:latin typeface="Courier"/>
-              </a:rPr>
-              <a:t> sklearn.ensemble </a:t>
-            </a:r>
-            <a:r>
-              <a:rPr b="1">
-                <a:solidFill>
-                  <a:srgbClr val="008000"/>
-                </a:solidFill>
-                <a:latin typeface="Courier"/>
-              </a:rPr>
-              <a:t>import</a:t>
-            </a:r>
-            <a:r>
-              <a:rPr>
-                <a:latin typeface="Courier"/>
-              </a:rPr>
-              <a:t> RandomForestRegressor</a:t>
-            </a:r>
-            <a:br/>
-            <a:r>
-              <a:rPr b="1">
-                <a:solidFill>
-                  <a:srgbClr val="008000"/>
-                </a:solidFill>
-                <a:latin typeface="Courier"/>
-              </a:rPr>
-              <a:t>from</a:t>
-            </a:r>
-            <a:r>
-              <a:rPr>
-                <a:latin typeface="Courier"/>
-              </a:rPr>
-              <a:t> sklearn.model_selection </a:t>
-            </a:r>
-            <a:r>
-              <a:rPr b="1">
-                <a:solidFill>
-                  <a:srgbClr val="008000"/>
-                </a:solidFill>
-                <a:latin typeface="Courier"/>
-              </a:rPr>
-              <a:t>import</a:t>
-            </a:r>
-            <a:r>
-              <a:rPr>
-                <a:latin typeface="Courier"/>
-              </a:rPr>
-              <a:t> (cross_val_score, KFold,</a:t>
-            </a:r>
-            <a:br/>
-            <a:r>
-              <a:rPr>
-                <a:latin typeface="Courier"/>
-              </a:rPr>
-              <a:t>                                     GroupKFold, TimeSeriesSplit)</a:t>
-            </a:r>
-            <a:br/>
-            <a:br/>
-            <a:r>
-              <a:rPr>
-                <a:latin typeface="Courier"/>
-              </a:rPr>
-              <a:t>X </a:t>
-            </a:r>
-            <a:r>
-              <a:rPr>
-                <a:solidFill>
-                  <a:srgbClr val="666666"/>
-                </a:solidFill>
-                <a:latin typeface="Courier"/>
-              </a:rPr>
-              <a:t>=</a:t>
-            </a:r>
-            <a:r>
-              <a:rPr>
-                <a:latin typeface="Courier"/>
-              </a:rPr>
-              <a:t> d[[</a:t>
-            </a:r>
-            <a:r>
-              <a:rPr>
-                <a:solidFill>
-                  <a:srgbClr val="4070A0"/>
-                </a:solidFill>
-                <a:latin typeface="Courier"/>
-              </a:rPr>
-              <a:t>"gdp_pc_eur"</a:t>
-            </a:r>
-            <a:r>
-              <a:rPr>
-                <a:latin typeface="Courier"/>
-              </a:rPr>
-              <a:t>, </a:t>
-            </a:r>
-            <a:r>
-              <a:rPr>
-                <a:solidFill>
-                  <a:srgbClr val="4070A0"/>
-                </a:solidFill>
-                <a:latin typeface="Courier"/>
-              </a:rPr>
-              <a:t>"population"</a:t>
-            </a:r>
-            <a:r>
-              <a:rPr>
-                <a:latin typeface="Courier"/>
-              </a:rPr>
-              <a:t>, </a:t>
-            </a:r>
-            <a:r>
-              <a:rPr>
-                <a:solidFill>
-                  <a:srgbClr val="4070A0"/>
-                </a:solidFill>
-                <a:latin typeface="Courier"/>
-              </a:rPr>
-              <a:t>"employment_ths"</a:t>
-            </a:r>
-            <a:r>
-              <a:rPr>
-                <a:latin typeface="Courier"/>
-              </a:rPr>
-              <a:t>, </a:t>
-            </a:r>
-            <a:r>
-              <a:rPr>
-                <a:solidFill>
-                  <a:srgbClr val="4070A0"/>
-                </a:solidFill>
-                <a:latin typeface="Courier"/>
-              </a:rPr>
-              <a:t>"gfcf_meur"</a:t>
-            </a:r>
-            <a:r>
-              <a:rPr>
-                <a:latin typeface="Courier"/>
-              </a:rPr>
-              <a:t>]].fillna(</a:t>
-            </a:r>
-            <a:r>
-              <a:rPr>
-                <a:solidFill>
-                  <a:srgbClr val="40A070"/>
-                </a:solidFill>
-                <a:latin typeface="Courier"/>
-              </a:rPr>
-              <a:t>0</a:t>
-            </a:r>
-            <a:r>
-              <a:rPr>
-                <a:latin typeface="Courier"/>
-              </a:rPr>
-              <a:t>)</a:t>
-            </a:r>
-            <a:br/>
-            <a:r>
-              <a:rPr>
-                <a:latin typeface="Courier"/>
-              </a:rPr>
-              <a:t>y </a:t>
-            </a:r>
-            <a:r>
-              <a:rPr>
-                <a:solidFill>
-                  <a:srgbClr val="666666"/>
-                </a:solidFill>
-                <a:latin typeface="Courier"/>
-              </a:rPr>
-              <a:t>=</a:t>
-            </a:r>
-            <a:r>
-              <a:rPr>
-                <a:latin typeface="Courier"/>
-              </a:rPr>
-              <a:t> d[</a:t>
-            </a:r>
-            <a:r>
-              <a:rPr>
-                <a:solidFill>
-                  <a:srgbClr val="4070A0"/>
-                </a:solidFill>
-                <a:latin typeface="Courier"/>
-              </a:rPr>
-              <a:t>"prod_growth"</a:t>
-            </a:r>
-            <a:r>
-              <a:rPr>
-                <a:latin typeface="Courier"/>
-              </a:rPr>
-              <a:t>]</a:t>
-            </a:r>
-            <a:br/>
-            <a:r>
-              <a:rPr>
-                <a:latin typeface="Courier"/>
-              </a:rPr>
-              <a:t>m </a:t>
-            </a:r>
-            <a:r>
-              <a:rPr>
-                <a:solidFill>
-                  <a:srgbClr val="666666"/>
-                </a:solidFill>
-                <a:latin typeface="Courier"/>
-              </a:rPr>
-              <a:t>=</a:t>
-            </a:r>
-            <a:r>
-              <a:rPr>
-                <a:latin typeface="Courier"/>
-              </a:rPr>
-              <a:t> RandomForestRegressor(n_estimators</a:t>
-            </a:r>
-            <a:r>
-              <a:rPr>
-                <a:solidFill>
-                  <a:srgbClr val="666666"/>
-                </a:solidFill>
-                <a:latin typeface="Courier"/>
-              </a:rPr>
-              <a:t>=</a:t>
-            </a:r>
-            <a:r>
-              <a:rPr>
-                <a:solidFill>
-                  <a:srgbClr val="40A070"/>
-                </a:solidFill>
-                <a:latin typeface="Courier"/>
-              </a:rPr>
-              <a:t>300</a:t>
-            </a:r>
-            <a:r>
-              <a:rPr>
-                <a:latin typeface="Courier"/>
-              </a:rPr>
-              <a:t>, random_state</a:t>
-            </a:r>
-            <a:r>
-              <a:rPr>
-                <a:solidFill>
-                  <a:srgbClr val="666666"/>
-                </a:solidFill>
-                <a:latin typeface="Courier"/>
-              </a:rPr>
-              <a:t>=</a:t>
-            </a:r>
-            <a:r>
-              <a:rPr>
-                <a:solidFill>
-                  <a:srgbClr val="40A070"/>
-                </a:solidFill>
-                <a:latin typeface="Courier"/>
-              </a:rPr>
-              <a:t>60033</a:t>
-            </a:r>
-            <a:r>
-              <a:rPr>
-                <a:latin typeface="Courier"/>
-              </a:rPr>
-              <a:t>)</a:t>
-            </a:r>
-            <a:br/>
-            <a:br/>
-            <a:r>
-              <a:rPr>
-                <a:latin typeface="Courier"/>
-              </a:rPr>
-              <a:t>RMSE </a:t>
-            </a:r>
-            <a:r>
-              <a:rPr>
-                <a:solidFill>
-                  <a:srgbClr val="666666"/>
-                </a:solidFill>
-                <a:latin typeface="Courier"/>
-              </a:rPr>
-              <a:t>=</a:t>
-            </a:r>
-            <a:r>
-              <a:rPr>
-                <a:latin typeface="Courier"/>
-              </a:rPr>
-              <a:t> </a:t>
-            </a:r>
-            <a:r>
-              <a:rPr>
-                <a:solidFill>
-                  <a:srgbClr val="4070A0"/>
-                </a:solidFill>
-                <a:latin typeface="Courier"/>
-              </a:rPr>
-              <a:t>"neg_root_mean_squared_error"</a:t>
+              <a:t>Choose the split that matches the sentence you intend to write in your conclusion. Then say which you used.</a:t>
             </a:r>
           </a:p>
         </p:txBody>
@@ -3887,7 +3568,12 @@
             <p:ph type="title"/>
           </p:nvPr>
         </p:nvSpPr>
-        <p:spPr/>
+        <p:spPr>
+          <a:xfrm>
+            <a:off x="722313" y="3305176"/>
+            <a:ext cx="7772400" cy="1021556"/>
+          </a:xfrm>
+        </p:spPr>
         <p:txBody>
           <a:bodyPr/>
           <a:lstStyle/>
@@ -3897,570 +3583,7 @@
             </a:pPr>
             <a:r>
               <a:rPr/>
-              <a:t>Three schemes, three answers</a:t>
-            </a:r>
-          </a:p>
-        </p:txBody>
-      </p:sp>
-      <p:sp>
-        <p:nvSpPr>
-          <p:cNvPr id="3" name="Content Placeholder 2"/>
-          <p:cNvSpPr>
-            <a:spLocks noGrp="1"/>
-          </p:cNvSpPr>
-          <p:nvPr>
-            <p:ph idx="1"/>
-          </p:nvPr>
-        </p:nvSpPr>
-        <p:spPr/>
-        <p:txBody>
-          <a:bodyPr/>
-          <a:lstStyle/>
-          <a:p>
-            <a:pPr lvl="0" indent="0">
-              <a:buNone/>
-            </a:pPr>
-            <a:r>
-              <a:rPr>
-                <a:latin typeface="Courier"/>
-              </a:rPr>
-              <a:t>rand  </a:t>
-            </a:r>
-            <a:r>
-              <a:rPr>
-                <a:solidFill>
-                  <a:srgbClr val="666666"/>
-                </a:solidFill>
-                <a:latin typeface="Courier"/>
-              </a:rPr>
-              <a:t>=</a:t>
-            </a:r>
-            <a:r>
-              <a:rPr>
-                <a:latin typeface="Courier"/>
-              </a:rPr>
-              <a:t> cross_val_score(m, X, y, scoring</a:t>
-            </a:r>
-            <a:r>
-              <a:rPr>
-                <a:solidFill>
-                  <a:srgbClr val="666666"/>
-                </a:solidFill>
-                <a:latin typeface="Courier"/>
-              </a:rPr>
-              <a:t>=</a:t>
-            </a:r>
-            <a:r>
-              <a:rPr>
-                <a:latin typeface="Courier"/>
-              </a:rPr>
-              <a:t>RMSE,</a:t>
-            </a:r>
-            <a:br/>
-            <a:r>
-              <a:rPr>
-                <a:latin typeface="Courier"/>
-              </a:rPr>
-              <a:t>                        cv</a:t>
-            </a:r>
-            <a:r>
-              <a:rPr>
-                <a:solidFill>
-                  <a:srgbClr val="666666"/>
-                </a:solidFill>
-                <a:latin typeface="Courier"/>
-              </a:rPr>
-              <a:t>=</a:t>
-            </a:r>
-            <a:r>
-              <a:rPr>
-                <a:latin typeface="Courier"/>
-              </a:rPr>
-              <a:t>KFold(</a:t>
-            </a:r>
-            <a:r>
-              <a:rPr>
-                <a:solidFill>
-                  <a:srgbClr val="40A070"/>
-                </a:solidFill>
-                <a:latin typeface="Courier"/>
-              </a:rPr>
-              <a:t>5</a:t>
-            </a:r>
-            <a:r>
-              <a:rPr>
-                <a:latin typeface="Courier"/>
-              </a:rPr>
-              <a:t>, shuffle</a:t>
-            </a:r>
-            <a:r>
-              <a:rPr>
-                <a:solidFill>
-                  <a:srgbClr val="666666"/>
-                </a:solidFill>
-                <a:latin typeface="Courier"/>
-              </a:rPr>
-              <a:t>=</a:t>
-            </a:r>
-            <a:r>
-              <a:rPr>
-                <a:solidFill>
-                  <a:srgbClr val="19177C"/>
-                </a:solidFill>
-                <a:latin typeface="Courier"/>
-              </a:rPr>
-              <a:t>True</a:t>
-            </a:r>
-            <a:r>
-              <a:rPr>
-                <a:latin typeface="Courier"/>
-              </a:rPr>
-              <a:t>, random_state</a:t>
-            </a:r>
-            <a:r>
-              <a:rPr>
-                <a:solidFill>
-                  <a:srgbClr val="666666"/>
-                </a:solidFill>
-                <a:latin typeface="Courier"/>
-              </a:rPr>
-              <a:t>=</a:t>
-            </a:r>
-            <a:r>
-              <a:rPr>
-                <a:solidFill>
-                  <a:srgbClr val="40A070"/>
-                </a:solidFill>
-                <a:latin typeface="Courier"/>
-              </a:rPr>
-              <a:t>60033</a:t>
-            </a:r>
-            <a:r>
-              <a:rPr>
-                <a:latin typeface="Courier"/>
-              </a:rPr>
-              <a:t>))</a:t>
-            </a:r>
-            <a:br/>
-            <a:br/>
-            <a:r>
-              <a:rPr>
-                <a:latin typeface="Courier"/>
-              </a:rPr>
-              <a:t>group </a:t>
-            </a:r>
-            <a:r>
-              <a:rPr>
-                <a:solidFill>
-                  <a:srgbClr val="666666"/>
-                </a:solidFill>
-                <a:latin typeface="Courier"/>
-              </a:rPr>
-              <a:t>=</a:t>
-            </a:r>
-            <a:r>
-              <a:rPr>
-                <a:latin typeface="Courier"/>
-              </a:rPr>
-              <a:t> cross_val_score(m, X, y, scoring</a:t>
-            </a:r>
-            <a:r>
-              <a:rPr>
-                <a:solidFill>
-                  <a:srgbClr val="666666"/>
-                </a:solidFill>
-                <a:latin typeface="Courier"/>
-              </a:rPr>
-              <a:t>=</a:t>
-            </a:r>
-            <a:r>
-              <a:rPr>
-                <a:latin typeface="Courier"/>
-              </a:rPr>
-              <a:t>RMSE,</a:t>
-            </a:r>
-            <a:br/>
-            <a:r>
-              <a:rPr>
-                <a:latin typeface="Courier"/>
-              </a:rPr>
-              <a:t>                        cv</a:t>
-            </a:r>
-            <a:r>
-              <a:rPr>
-                <a:solidFill>
-                  <a:srgbClr val="666666"/>
-                </a:solidFill>
-                <a:latin typeface="Courier"/>
-              </a:rPr>
-              <a:t>=</a:t>
-            </a:r>
-            <a:r>
-              <a:rPr>
-                <a:latin typeface="Courier"/>
-              </a:rPr>
-              <a:t>GroupKFold(</a:t>
-            </a:r>
-            <a:r>
-              <a:rPr>
-                <a:solidFill>
-                  <a:srgbClr val="40A070"/>
-                </a:solidFill>
-                <a:latin typeface="Courier"/>
-              </a:rPr>
-              <a:t>5</a:t>
-            </a:r>
-            <a:r>
-              <a:rPr>
-                <a:latin typeface="Courier"/>
-              </a:rPr>
-              <a:t>), groups</a:t>
-            </a:r>
-            <a:r>
-              <a:rPr>
-                <a:solidFill>
-                  <a:srgbClr val="666666"/>
-                </a:solidFill>
-                <a:latin typeface="Courier"/>
-              </a:rPr>
-              <a:t>=</a:t>
-            </a:r>
-            <a:r>
-              <a:rPr>
-                <a:latin typeface="Courier"/>
-              </a:rPr>
-              <a:t>d[</a:t>
-            </a:r>
-            <a:r>
-              <a:rPr>
-                <a:solidFill>
-                  <a:srgbClr val="4070A0"/>
-                </a:solidFill>
-                <a:latin typeface="Courier"/>
-              </a:rPr>
-              <a:t>"geo"</a:t>
-            </a:r>
-            <a:r>
-              <a:rPr>
-                <a:latin typeface="Courier"/>
-              </a:rPr>
-              <a:t>])</a:t>
-            </a:r>
-            <a:br/>
-            <a:br/>
-            <a:r>
-              <a:rPr>
-                <a:latin typeface="Courier"/>
-              </a:rPr>
-              <a:t>d_s </a:t>
-            </a:r>
-            <a:r>
-              <a:rPr>
-                <a:solidFill>
-                  <a:srgbClr val="666666"/>
-                </a:solidFill>
-                <a:latin typeface="Courier"/>
-              </a:rPr>
-              <a:t>=</a:t>
-            </a:r>
-            <a:r>
-              <a:rPr>
-                <a:latin typeface="Courier"/>
-              </a:rPr>
-              <a:t> d.sort_values(</a:t>
-            </a:r>
-            <a:r>
-              <a:rPr>
-                <a:solidFill>
-                  <a:srgbClr val="4070A0"/>
-                </a:solidFill>
-                <a:latin typeface="Courier"/>
-              </a:rPr>
-              <a:t>"time"</a:t>
-            </a:r>
-            <a:r>
-              <a:rPr>
-                <a:latin typeface="Courier"/>
-              </a:rPr>
-              <a:t>)</a:t>
-            </a:r>
-            <a:br/>
-            <a:r>
-              <a:rPr>
-                <a:latin typeface="Courier"/>
-              </a:rPr>
-              <a:t>time_ </a:t>
-            </a:r>
-            <a:r>
-              <a:rPr>
-                <a:solidFill>
-                  <a:srgbClr val="666666"/>
-                </a:solidFill>
-                <a:latin typeface="Courier"/>
-              </a:rPr>
-              <a:t>=</a:t>
-            </a:r>
-            <a:r>
-              <a:rPr>
-                <a:latin typeface="Courier"/>
-              </a:rPr>
-              <a:t> cross_val_score(m, X.loc[d_s.index], y.loc[d_s.index],</a:t>
-            </a:r>
-            <a:br/>
-            <a:r>
-              <a:rPr>
-                <a:latin typeface="Courier"/>
-              </a:rPr>
-              <a:t>                        scoring</a:t>
-            </a:r>
-            <a:r>
-              <a:rPr>
-                <a:solidFill>
-                  <a:srgbClr val="666666"/>
-                </a:solidFill>
-                <a:latin typeface="Courier"/>
-              </a:rPr>
-              <a:t>=</a:t>
-            </a:r>
-            <a:r>
-              <a:rPr>
-                <a:latin typeface="Courier"/>
-              </a:rPr>
-              <a:t>RMSE, cv</a:t>
-            </a:r>
-            <a:r>
-              <a:rPr>
-                <a:solidFill>
-                  <a:srgbClr val="666666"/>
-                </a:solidFill>
-                <a:latin typeface="Courier"/>
-              </a:rPr>
-              <a:t>=</a:t>
-            </a:r>
-            <a:r>
-              <a:rPr>
-                <a:latin typeface="Courier"/>
-              </a:rPr>
-              <a:t>TimeSeriesSplit(</a:t>
-            </a:r>
-            <a:r>
-              <a:rPr>
-                <a:solidFill>
-                  <a:srgbClr val="40A070"/>
-                </a:solidFill>
-                <a:latin typeface="Courier"/>
-              </a:rPr>
-              <a:t>5</a:t>
-            </a:r>
-            <a:r>
-              <a:rPr>
-                <a:latin typeface="Courier"/>
-              </a:rPr>
-              <a:t>))</a:t>
-            </a:r>
-            <a:br/>
-            <a:br/>
-            <a:r>
-              <a:rPr b="1">
-                <a:solidFill>
-                  <a:srgbClr val="007020"/>
-                </a:solidFill>
-                <a:latin typeface="Courier"/>
-              </a:rPr>
-              <a:t>for</a:t>
-            </a:r>
-            <a:r>
-              <a:rPr>
-                <a:latin typeface="Courier"/>
-              </a:rPr>
-              <a:t> n, s </a:t>
-            </a:r>
-            <a:r>
-              <a:rPr b="1">
-                <a:solidFill>
-                  <a:srgbClr val="007020"/>
-                </a:solidFill>
-                <a:latin typeface="Courier"/>
-              </a:rPr>
-              <a:t>in</a:t>
-            </a:r>
-            <a:r>
-              <a:rPr>
-                <a:latin typeface="Courier"/>
-              </a:rPr>
-              <a:t> [(</a:t>
-            </a:r>
-            <a:r>
-              <a:rPr>
-                <a:solidFill>
-                  <a:srgbClr val="4070A0"/>
-                </a:solidFill>
-                <a:latin typeface="Courier"/>
-              </a:rPr>
-              <a:t>"random"</a:t>
-            </a:r>
-            <a:r>
-              <a:rPr>
-                <a:latin typeface="Courier"/>
-              </a:rPr>
-              <a:t>, rand), (</a:t>
-            </a:r>
-            <a:r>
-              <a:rPr>
-                <a:solidFill>
-                  <a:srgbClr val="4070A0"/>
-                </a:solidFill>
-                <a:latin typeface="Courier"/>
-              </a:rPr>
-              <a:t>"by country"</a:t>
-            </a:r>
-            <a:r>
-              <a:rPr>
-                <a:latin typeface="Courier"/>
-              </a:rPr>
-              <a:t>, group), (</a:t>
-            </a:r>
-            <a:r>
-              <a:rPr>
-                <a:solidFill>
-                  <a:srgbClr val="4070A0"/>
-                </a:solidFill>
-                <a:latin typeface="Courier"/>
-              </a:rPr>
-              <a:t>"by time"</a:t>
-            </a:r>
-            <a:r>
-              <a:rPr>
-                <a:latin typeface="Courier"/>
-              </a:rPr>
-              <a:t>, time_)]:</a:t>
-            </a:r>
-            <a:br/>
-            <a:r>
-              <a:rPr>
-                <a:latin typeface="Courier"/>
-              </a:rPr>
-              <a:t>    </a:t>
-            </a:r>
-            <a:r>
-              <a:rPr>
-                <a:solidFill>
-                  <a:srgbClr val="008000"/>
-                </a:solidFill>
-                <a:latin typeface="Courier"/>
-              </a:rPr>
-              <a:t>print</a:t>
-            </a:r>
-            <a:r>
-              <a:rPr>
-                <a:latin typeface="Courier"/>
-              </a:rPr>
-              <a:t>(</a:t>
-            </a:r>
-            <a:r>
-              <a:rPr>
-                <a:solidFill>
-                  <a:srgbClr val="BB6688"/>
-                </a:solidFill>
-                <a:latin typeface="Courier"/>
-              </a:rPr>
-              <a:t>f"</a:t>
-            </a:r>
-            <a:r>
-              <a:rPr>
-                <a:solidFill>
-                  <a:srgbClr val="4070A0"/>
-                </a:solidFill>
-                <a:latin typeface="Courier"/>
-              </a:rPr>
-              <a:t>{</a:t>
-            </a:r>
-            <a:r>
-              <a:rPr>
-                <a:latin typeface="Courier"/>
-              </a:rPr>
-              <a:t>n</a:t>
-            </a:r>
-            <a:r>
-              <a:rPr>
-                <a:solidFill>
-                  <a:srgbClr val="4070A0"/>
-                </a:solidFill>
-                <a:latin typeface="Courier"/>
-              </a:rPr>
-              <a:t>:12s}</a:t>
-            </a:r>
-            <a:r>
-              <a:rPr>
-                <a:solidFill>
-                  <a:srgbClr val="BB6688"/>
-                </a:solidFill>
-                <a:latin typeface="Courier"/>
-              </a:rPr>
-              <a:t> RMSE </a:t>
-            </a:r>
-            <a:r>
-              <a:rPr>
-                <a:solidFill>
-                  <a:srgbClr val="4070A0"/>
-                </a:solidFill>
-                <a:latin typeface="Courier"/>
-              </a:rPr>
-              <a:t>{</a:t>
-            </a:r>
-            <a:r>
-              <a:rPr>
-                <a:solidFill>
-                  <a:srgbClr val="666666"/>
-                </a:solidFill>
-                <a:latin typeface="Courier"/>
-              </a:rPr>
-              <a:t>-</a:t>
-            </a:r>
-            <a:r>
-              <a:rPr>
-                <a:latin typeface="Courier"/>
-              </a:rPr>
-              <a:t>s</a:t>
-            </a:r>
-            <a:r>
-              <a:rPr>
-                <a:solidFill>
-                  <a:srgbClr val="4070A0"/>
-                </a:solidFill>
-                <a:latin typeface="Courier"/>
-              </a:rPr>
-              <a:t>.</a:t>
-            </a:r>
-            <a:r>
-              <a:rPr>
-                <a:latin typeface="Courier"/>
-              </a:rPr>
-              <a:t>mean()</a:t>
-            </a:r>
-            <a:r>
-              <a:rPr>
-                <a:solidFill>
-                  <a:srgbClr val="4070A0"/>
-                </a:solidFill>
-                <a:latin typeface="Courier"/>
-              </a:rPr>
-              <a:t>:.3f}</a:t>
-            </a:r>
-            <a:r>
-              <a:rPr>
-                <a:solidFill>
-                  <a:srgbClr val="BB6688"/>
-                </a:solidFill>
-                <a:latin typeface="Courier"/>
-              </a:rPr>
-              <a:t>"</a:t>
-            </a:r>
-            <a:r>
-              <a:rPr>
-                <a:latin typeface="Courier"/>
-              </a:rPr>
-              <a:t>)</a:t>
+              <a:t>Doing it</a:t>
             </a:r>
           </a:p>
         </p:txBody>
@@ -4507,7 +3630,7 @@
             </a:pPr>
             <a:r>
               <a:rPr/>
-              <a:t>What you should see</a:t>
+              <a:t>The data</a:t>
             </a:r>
           </a:p>
         </p:txBody>
@@ -4527,46 +3650,275 @@
           <a:bodyPr/>
           <a:lstStyle/>
           <a:p>
+            <a:pPr lvl="0" indent="0">
+              <a:buNone/>
+            </a:pPr>
+            <a:r>
+              <a:rPr b="1">
+                <a:solidFill>
+                  <a:srgbClr val="008000"/>
+                </a:solidFill>
+                <a:latin typeface="Courier"/>
+              </a:rPr>
+              <a:t>import</a:t>
+            </a:r>
+            <a:r>
+              <a:rPr>
+                <a:latin typeface="Courier"/>
+              </a:rPr>
+              <a:t> pandas </a:t>
+            </a:r>
+            <a:r>
+              <a:rPr b="1">
+                <a:solidFill>
+                  <a:srgbClr val="008000"/>
+                </a:solidFill>
+                <a:latin typeface="Courier"/>
+              </a:rPr>
+              <a:t>as</a:t>
+            </a:r>
+            <a:r>
+              <a:rPr>
+                <a:latin typeface="Courier"/>
+              </a:rPr>
+              <a:t> pd</a:t>
+            </a:r>
+            <a:br/>
+            <a:br/>
+            <a:r>
+              <a:rPr>
+                <a:latin typeface="Courier"/>
+              </a:rPr>
+              <a:t>core </a:t>
+            </a:r>
+            <a:r>
+              <a:rPr>
+                <a:solidFill>
+                  <a:srgbClr val="666666"/>
+                </a:solidFill>
+                <a:latin typeface="Courier"/>
+              </a:rPr>
+              <a:t>=</a:t>
+            </a:r>
+            <a:r>
+              <a:rPr>
+                <a:latin typeface="Courier"/>
+              </a:rPr>
+              <a:t> pd.read_parquet(</a:t>
+            </a:r>
+            <a:r>
+              <a:rPr>
+                <a:solidFill>
+                  <a:srgbClr val="4070A0"/>
+                </a:solidFill>
+                <a:latin typeface="Courier"/>
+              </a:rPr>
+              <a:t>"data/spine/core.parquet"</a:t>
+            </a:r>
+            <a:r>
+              <a:rPr>
+                <a:latin typeface="Courier"/>
+              </a:rPr>
+              <a:t>)</a:t>
+            </a:r>
+            <a:br/>
+            <a:r>
+              <a:rPr>
+                <a:latin typeface="Courier"/>
+              </a:rPr>
+              <a:t>cols </a:t>
+            </a:r>
+            <a:r>
+              <a:rPr>
+                <a:solidFill>
+                  <a:srgbClr val="666666"/>
+                </a:solidFill>
+                <a:latin typeface="Courier"/>
+              </a:rPr>
+              <a:t>=</a:t>
+            </a:r>
+            <a:r>
+              <a:rPr>
+                <a:latin typeface="Courier"/>
+              </a:rPr>
+              <a:t> [</a:t>
+            </a:r>
+            <a:r>
+              <a:rPr>
+                <a:solidFill>
+                  <a:srgbClr val="4070A0"/>
+                </a:solidFill>
+                <a:latin typeface="Courier"/>
+              </a:rPr>
+              <a:t>"gdp_pc_eur"</a:t>
+            </a:r>
+            <a:r>
+              <a:rPr>
+                <a:latin typeface="Courier"/>
+              </a:rPr>
+              <a:t>, </a:t>
+            </a:r>
+            <a:r>
+              <a:rPr>
+                <a:solidFill>
+                  <a:srgbClr val="4070A0"/>
+                </a:solidFill>
+                <a:latin typeface="Courier"/>
+              </a:rPr>
+              <a:t>"population"</a:t>
+            </a:r>
+            <a:r>
+              <a:rPr>
+                <a:latin typeface="Courier"/>
+              </a:rPr>
+              <a:t>, </a:t>
+            </a:r>
+            <a:r>
+              <a:rPr>
+                <a:solidFill>
+                  <a:srgbClr val="4070A0"/>
+                </a:solidFill>
+                <a:latin typeface="Courier"/>
+              </a:rPr>
+              <a:t>"employment_ths"</a:t>
+            </a:r>
+            <a:r>
+              <a:rPr>
+                <a:latin typeface="Courier"/>
+              </a:rPr>
+              <a:t>, </a:t>
+            </a:r>
+            <a:r>
+              <a:rPr>
+                <a:solidFill>
+                  <a:srgbClr val="4070A0"/>
+                </a:solidFill>
+                <a:latin typeface="Courier"/>
+              </a:rPr>
+              <a:t>"gfcf_meur"</a:t>
+            </a:r>
+            <a:r>
+              <a:rPr>
+                <a:latin typeface="Courier"/>
+              </a:rPr>
+              <a:t>]</a:t>
+            </a:r>
+            <a:br/>
+            <a:r>
+              <a:rPr>
+                <a:latin typeface="Courier"/>
+              </a:rPr>
+              <a:t>d </a:t>
+            </a:r>
+            <a:r>
+              <a:rPr>
+                <a:solidFill>
+                  <a:srgbClr val="666666"/>
+                </a:solidFill>
+                <a:latin typeface="Courier"/>
+              </a:rPr>
+              <a:t>=</a:t>
+            </a:r>
+            <a:r>
+              <a:rPr>
+                <a:latin typeface="Courier"/>
+              </a:rPr>
+              <a:t> core.dropna(subset</a:t>
+            </a:r>
+            <a:r>
+              <a:rPr>
+                <a:solidFill>
+                  <a:srgbClr val="666666"/>
+                </a:solidFill>
+                <a:latin typeface="Courier"/>
+              </a:rPr>
+              <a:t>=</a:t>
+            </a:r>
+            <a:r>
+              <a:rPr>
+                <a:latin typeface="Courier"/>
+              </a:rPr>
+              <a:t>cols).copy()</a:t>
+            </a:r>
+            <a:br/>
+            <a:br/>
+            <a:r>
+              <a:rPr>
+                <a:solidFill>
+                  <a:srgbClr val="008000"/>
+                </a:solidFill>
+                <a:latin typeface="Courier"/>
+              </a:rPr>
+              <a:t>print</a:t>
+            </a:r>
+            <a:r>
+              <a:rPr>
+                <a:latin typeface="Courier"/>
+              </a:rPr>
+              <a:t>(d.shape, d.geo.nunique(), d.time.</a:t>
+            </a:r>
+            <a:r>
+              <a:rPr>
+                <a:solidFill>
+                  <a:srgbClr val="008000"/>
+                </a:solidFill>
+                <a:latin typeface="Courier"/>
+              </a:rPr>
+              <a:t>min</a:t>
+            </a:r>
+            <a:r>
+              <a:rPr>
+                <a:latin typeface="Courier"/>
+              </a:rPr>
+              <a:t>(), d.time.</a:t>
+            </a:r>
+            <a:r>
+              <a:rPr>
+                <a:solidFill>
+                  <a:srgbClr val="008000"/>
+                </a:solidFill>
+                <a:latin typeface="Courier"/>
+              </a:rPr>
+              <a:t>max</a:t>
+            </a:r>
+            <a:r>
+              <a:rPr>
+                <a:latin typeface="Courier"/>
+              </a:rPr>
+              <a:t>())</a:t>
+            </a:r>
+            <a:br/>
+            <a:r>
+              <a:rPr i="1">
+                <a:solidFill>
+                  <a:srgbClr val="60A0B0"/>
+                </a:solidFill>
+                <a:latin typeface="Courier"/>
+              </a:rPr>
+              <a:t># 30 countries, 2010-2024</a:t>
+            </a:r>
+          </a:p>
+          <a:p>
             <a:pPr lvl="0" indent="0" marL="0">
               <a:buNone/>
             </a:pPr>
             <a:r>
               <a:rPr/>
-              <a:t>Random K-fold reports the </a:t>
+              <a:t>We predict </a:t>
+            </a:r>
+            <a:r>
+              <a:rPr b="1">
+                <a:latin typeface="Courier"/>
+              </a:rPr>
+              <a:t>gdp_pc_eur</a:t>
             </a:r>
             <a:r>
               <a:rPr b="1"/>
-              <a:t>best</a:t>
+              <a:t> from the other levels</a:t>
             </a:r>
             <a:r>
               <a:rPr/>
-              <a:t> error. It is also the only one answering a question nobody asked.</a:t>
-            </a:r>
-          </a:p>
-          <a:p>
-            <a:pPr lvl="0" indent="0" marL="0">
-              <a:buNone/>
-            </a:pPr>
-            <a:r>
-              <a:rPr/>
-              <a:t>The gap between random and grouped is a </a:t>
-            </a:r>
-            <a:r>
-              <a:rPr b="1"/>
-              <a:t>direct measure of how much your model is leaning on country identity</a:t>
-            </a:r>
-            <a:r>
-              <a:rPr/>
-              <a:t> rather than on the economics.</a:t>
-            </a:r>
-          </a:p>
-          <a:p>
-            <a:pPr lvl="0" indent="0" marL="0">
-              <a:buNone/>
-            </a:pPr>
-            <a:r>
-              <a:rPr/>
-              <a:t>If grouped error is far worse, your model has learned “this is Germany”, not “this is what raises productivity”.</a:t>
+              <a:t>. Levels are highly persistent within a country, which is exactly the setting where the choice of split bites.</a:t>
             </a:r>
           </a:p>
         </p:txBody>
@@ -4613,7 +3965,7 @@
             </a:pPr>
             <a:r>
               <a:rPr/>
-              <a:t>Flexibility, drawn</a:t>
+              <a:t>Set up the comparison</a:t>
             </a:r>
           </a:p>
         </p:txBody>
@@ -4649,7 +4001,7 @@
               <a:rPr>
                 <a:latin typeface="Courier"/>
               </a:rPr>
-              <a:t> sklearn.tree </a:t>
+              <a:t> sklearn.ensemble </a:t>
             </a:r>
             <a:r>
               <a:rPr b="1">
@@ -4664,7 +4016,45 @@
               <a:rPr>
                 <a:latin typeface="Courier"/>
               </a:rPr>
-              <a:t> DecisionTreeRegressor</a:t>
+              <a:t> RandomForestRegressor</a:t>
+            </a:r>
+            <a:br/>
+            <a:r>
+              <a:rPr b="1">
+                <a:solidFill>
+                  <a:srgbClr val="008000"/>
+                </a:solidFill>
+                <a:latin typeface="Courier"/>
+              </a:rPr>
+              <a:t>from</a:t>
+            </a:r>
+            <a:r>
+              <a:rPr>
+                <a:latin typeface="Courier"/>
+              </a:rPr>
+              <a:t> sklearn.model_selection </a:t>
+            </a:r>
+            <a:r>
+              <a:rPr b="1">
+                <a:solidFill>
+                  <a:srgbClr val="008000"/>
+                </a:solidFill>
+                <a:latin typeface="Courier"/>
+              </a:rPr>
+              <a:t>import</a:t>
+            </a:r>
+            <a:r>
+              <a:rPr>
+                <a:latin typeface="Courier"/>
+              </a:rPr>
+              <a:t> (cross_val_score, KFold,</a:t>
+            </a:r>
+            <a:br/>
+            <a:r>
+              <a:rPr>
+                <a:latin typeface="Courier"/>
+              </a:rPr>
+              <a:t>                                     GroupKFold, TimeSeriesSplit)</a:t>
             </a:r>
             <a:br/>
             <a:br/>
@@ -4672,7 +4062,7 @@
               <a:rPr>
                 <a:latin typeface="Courier"/>
               </a:rPr>
-              <a:t>rows </a:t>
+              <a:t>X </a:t>
             </a:r>
             <a:r>
               <a:rPr>
@@ -4687,32 +4077,176 @@
               <a:rPr>
                 <a:latin typeface="Courier"/>
               </a:rPr>
-              <a:t> []</a:t>
+              <a:t> d[[</a:t>
+            </a:r>
+            <a:r>
+              <a:rPr>
+                <a:solidFill>
+                  <a:srgbClr val="4070A0"/>
+                </a:solidFill>
+                <a:latin typeface="Courier"/>
+              </a:rPr>
+              <a:t>"population"</a:t>
+            </a:r>
+            <a:r>
+              <a:rPr>
+                <a:latin typeface="Courier"/>
+              </a:rPr>
+              <a:t>, </a:t>
+            </a:r>
+            <a:r>
+              <a:rPr>
+                <a:solidFill>
+                  <a:srgbClr val="4070A0"/>
+                </a:solidFill>
+                <a:latin typeface="Courier"/>
+              </a:rPr>
+              <a:t>"employment_ths"</a:t>
+            </a:r>
+            <a:r>
+              <a:rPr>
+                <a:latin typeface="Courier"/>
+              </a:rPr>
+              <a:t>, </a:t>
+            </a:r>
+            <a:r>
+              <a:rPr>
+                <a:solidFill>
+                  <a:srgbClr val="4070A0"/>
+                </a:solidFill>
+                <a:latin typeface="Courier"/>
+              </a:rPr>
+              <a:t>"gfcf_meur"</a:t>
+            </a:r>
+            <a:r>
+              <a:rPr>
+                <a:latin typeface="Courier"/>
+              </a:rPr>
+              <a:t>]]</a:t>
             </a:r>
             <a:br/>
             <a:r>
-              <a:rPr b="1">
-                <a:solidFill>
-                  <a:srgbClr val="007020"/>
-                </a:solidFill>
-                <a:latin typeface="Courier"/>
-              </a:rPr>
-              <a:t>for</a:t>
-            </a:r>
-            <a:r>
-              <a:rPr>
-                <a:latin typeface="Courier"/>
-              </a:rPr>
-              <a:t> depth </a:t>
-            </a:r>
-            <a:r>
-              <a:rPr b="1">
-                <a:solidFill>
-                  <a:srgbClr val="007020"/>
-                </a:solidFill>
-                <a:latin typeface="Courier"/>
-              </a:rPr>
-              <a:t>in</a:t>
+              <a:rPr>
+                <a:latin typeface="Courier"/>
+              </a:rPr>
+              <a:t>y </a:t>
+            </a:r>
+            <a:r>
+              <a:rPr>
+                <a:solidFill>
+                  <a:srgbClr val="666666"/>
+                </a:solidFill>
+                <a:latin typeface="Courier"/>
+              </a:rPr>
+              <a:t>=</a:t>
+            </a:r>
+            <a:r>
+              <a:rPr>
+                <a:latin typeface="Courier"/>
+              </a:rPr>
+              <a:t> d[</a:t>
+            </a:r>
+            <a:r>
+              <a:rPr>
+                <a:solidFill>
+                  <a:srgbClr val="4070A0"/>
+                </a:solidFill>
+                <a:latin typeface="Courier"/>
+              </a:rPr>
+              <a:t>"gdp_pc_eur"</a:t>
+            </a:r>
+            <a:r>
+              <a:rPr>
+                <a:latin typeface="Courier"/>
+              </a:rPr>
+              <a:t>]</a:t>
+            </a:r>
+            <a:br/>
+            <a:r>
+              <a:rPr>
+                <a:latin typeface="Courier"/>
+              </a:rPr>
+              <a:t>m </a:t>
+            </a:r>
+            <a:r>
+              <a:rPr>
+                <a:solidFill>
+                  <a:srgbClr val="666666"/>
+                </a:solidFill>
+                <a:latin typeface="Courier"/>
+              </a:rPr>
+              <a:t>=</a:t>
+            </a:r>
+            <a:r>
+              <a:rPr>
+                <a:latin typeface="Courier"/>
+              </a:rPr>
+              <a:t> RandomForestRegressor(n_estimators</a:t>
+            </a:r>
+            <a:r>
+              <a:rPr>
+                <a:solidFill>
+                  <a:srgbClr val="666666"/>
+                </a:solidFill>
+                <a:latin typeface="Courier"/>
+              </a:rPr>
+              <a:t>=</a:t>
+            </a:r>
+            <a:r>
+              <a:rPr>
+                <a:solidFill>
+                  <a:srgbClr val="40A070"/>
+                </a:solidFill>
+                <a:latin typeface="Courier"/>
+              </a:rPr>
+              <a:t>300</a:t>
+            </a:r>
+            <a:r>
+              <a:rPr>
+                <a:latin typeface="Courier"/>
+              </a:rPr>
+              <a:t>, random_state</a:t>
+            </a:r>
+            <a:r>
+              <a:rPr>
+                <a:solidFill>
+                  <a:srgbClr val="666666"/>
+                </a:solidFill>
+                <a:latin typeface="Courier"/>
+              </a:rPr>
+              <a:t>=</a:t>
+            </a:r>
+            <a:r>
+              <a:rPr>
+                <a:solidFill>
+                  <a:srgbClr val="40A070"/>
+                </a:solidFill>
+                <a:latin typeface="Courier"/>
+              </a:rPr>
+              <a:t>60033</a:t>
+            </a:r>
+            <a:r>
+              <a:rPr>
+                <a:latin typeface="Courier"/>
+              </a:rPr>
+              <a:t>)</a:t>
+            </a:r>
+            <a:br/>
+            <a:br/>
+            <a:r>
+              <a:rPr>
+                <a:latin typeface="Courier"/>
+              </a:rPr>
+              <a:t>RMSE </a:t>
+            </a:r>
+            <a:r>
+              <a:rPr>
+                <a:solidFill>
+                  <a:srgbClr val="666666"/>
+                </a:solidFill>
+                <a:latin typeface="Courier"/>
+              </a:rPr>
+              <a:t>=</a:t>
             </a:r>
             <a:r>
               <a:rPr>
@@ -4723,335 +4257,11 @@
             <a:r>
               <a:rPr>
                 <a:solidFill>
-                  <a:srgbClr val="008000"/>
-                </a:solidFill>
-                <a:latin typeface="Courier"/>
-              </a:rPr>
-              <a:t>range</a:t>
-            </a:r>
-            <a:r>
-              <a:rPr>
-                <a:latin typeface="Courier"/>
-              </a:rPr>
-              <a:t>(</a:t>
-            </a:r>
-            <a:r>
-              <a:rPr>
-                <a:solidFill>
-                  <a:srgbClr val="40A070"/>
-                </a:solidFill>
-                <a:latin typeface="Courier"/>
-              </a:rPr>
-              <a:t>1</a:t>
-            </a:r>
-            <a:r>
-              <a:rPr>
-                <a:latin typeface="Courier"/>
-              </a:rPr>
-              <a:t>, </a:t>
-            </a:r>
-            <a:r>
-              <a:rPr>
-                <a:solidFill>
-                  <a:srgbClr val="40A070"/>
-                </a:solidFill>
-                <a:latin typeface="Courier"/>
-              </a:rPr>
-              <a:t>16</a:t>
-            </a:r>
-            <a:r>
-              <a:rPr>
-                <a:latin typeface="Courier"/>
-              </a:rPr>
-              <a:t>):</a:t>
-            </a:r>
-            <a:br/>
-            <a:r>
-              <a:rPr>
-                <a:latin typeface="Courier"/>
-              </a:rPr>
-              <a:t>    t </a:t>
-            </a:r>
-            <a:r>
-              <a:rPr>
-                <a:solidFill>
-                  <a:srgbClr val="666666"/>
-                </a:solidFill>
-                <a:latin typeface="Courier"/>
-              </a:rPr>
-              <a:t>=</a:t>
-            </a:r>
-            <a:r>
-              <a:rPr>
-                <a:latin typeface="Courier"/>
-              </a:rPr>
-              <a:t> DecisionTreeRegressor(max_depth</a:t>
-            </a:r>
-            <a:r>
-              <a:rPr>
-                <a:solidFill>
-                  <a:srgbClr val="666666"/>
-                </a:solidFill>
-                <a:latin typeface="Courier"/>
-              </a:rPr>
-              <a:t>=</a:t>
-            </a:r>
-            <a:r>
-              <a:rPr>
-                <a:latin typeface="Courier"/>
-              </a:rPr>
-              <a:t>depth, random_state</a:t>
-            </a:r>
-            <a:r>
-              <a:rPr>
-                <a:solidFill>
-                  <a:srgbClr val="666666"/>
-                </a:solidFill>
-                <a:latin typeface="Courier"/>
-              </a:rPr>
-              <a:t>=</a:t>
-            </a:r>
-            <a:r>
-              <a:rPr>
-                <a:solidFill>
-                  <a:srgbClr val="40A070"/>
-                </a:solidFill>
-                <a:latin typeface="Courier"/>
-              </a:rPr>
-              <a:t>60033</a:t>
-            </a:r>
-            <a:r>
-              <a:rPr>
-                <a:latin typeface="Courier"/>
-              </a:rPr>
-              <a:t>)</a:t>
-            </a:r>
-            <a:br/>
-            <a:r>
-              <a:rPr>
-                <a:latin typeface="Courier"/>
-              </a:rPr>
-              <a:t>    cv </a:t>
-            </a:r>
-            <a:r>
-              <a:rPr>
-                <a:solidFill>
-                  <a:srgbClr val="666666"/>
-                </a:solidFill>
-                <a:latin typeface="Courier"/>
-              </a:rPr>
-              <a:t>=</a:t>
-            </a:r>
-            <a:r>
-              <a:rPr>
-                <a:latin typeface="Courier"/>
-              </a:rPr>
-              <a:t> </a:t>
-            </a:r>
-            <a:r>
-              <a:rPr>
-                <a:solidFill>
-                  <a:srgbClr val="666666"/>
-                </a:solidFill>
-                <a:latin typeface="Courier"/>
-              </a:rPr>
-              <a:t>-</a:t>
-            </a:r>
-            <a:r>
-              <a:rPr>
-                <a:latin typeface="Courier"/>
-              </a:rPr>
-              <a:t>cross_val_score(t, X, y, cv</a:t>
-            </a:r>
-            <a:r>
-              <a:rPr>
-                <a:solidFill>
-                  <a:srgbClr val="666666"/>
-                </a:solidFill>
-                <a:latin typeface="Courier"/>
-              </a:rPr>
-              <a:t>=</a:t>
-            </a:r>
-            <a:r>
-              <a:rPr>
-                <a:latin typeface="Courier"/>
-              </a:rPr>
-              <a:t>GroupKFold(</a:t>
-            </a:r>
-            <a:r>
-              <a:rPr>
-                <a:solidFill>
-                  <a:srgbClr val="40A070"/>
-                </a:solidFill>
-                <a:latin typeface="Courier"/>
-              </a:rPr>
-              <a:t>5</a:t>
-            </a:r>
-            <a:r>
-              <a:rPr>
-                <a:latin typeface="Courier"/>
-              </a:rPr>
-              <a:t>), groups</a:t>
-            </a:r>
-            <a:r>
-              <a:rPr>
-                <a:solidFill>
-                  <a:srgbClr val="666666"/>
-                </a:solidFill>
-                <a:latin typeface="Courier"/>
-              </a:rPr>
-              <a:t>=</a:t>
-            </a:r>
-            <a:r>
-              <a:rPr>
-                <a:latin typeface="Courier"/>
-              </a:rPr>
-              <a:t>d[</a:t>
-            </a:r>
-            <a:r>
-              <a:rPr>
-                <a:solidFill>
                   <a:srgbClr val="4070A0"/>
                 </a:solidFill>
                 <a:latin typeface="Courier"/>
               </a:rPr>
-              <a:t>"geo"</a:t>
-            </a:r>
-            <a:r>
-              <a:rPr>
-                <a:latin typeface="Courier"/>
-              </a:rPr>
-              <a:t>],</a:t>
-            </a:r>
-            <a:br/>
-            <a:r>
-              <a:rPr>
-                <a:latin typeface="Courier"/>
-              </a:rPr>
-              <a:t>                          scoring</a:t>
-            </a:r>
-            <a:r>
-              <a:rPr>
-                <a:solidFill>
-                  <a:srgbClr val="666666"/>
-                </a:solidFill>
-                <a:latin typeface="Courier"/>
-              </a:rPr>
-              <a:t>=</a:t>
-            </a:r>
-            <a:r>
-              <a:rPr>
-                <a:solidFill>
-                  <a:srgbClr val="4070A0"/>
-                </a:solidFill>
-                <a:latin typeface="Courier"/>
-              </a:rPr>
               <a:t>"neg_root_mean_squared_error"</a:t>
-            </a:r>
-            <a:r>
-              <a:rPr>
-                <a:latin typeface="Courier"/>
-              </a:rPr>
-              <a:t>).mean()</a:t>
-            </a:r>
-            <a:br/>
-            <a:r>
-              <a:rPr>
-                <a:latin typeface="Courier"/>
-              </a:rPr>
-              <a:t>    t.fit(X, y)</a:t>
-            </a:r>
-            <a:br/>
-            <a:r>
-              <a:rPr>
-                <a:latin typeface="Courier"/>
-              </a:rPr>
-              <a:t>    train </a:t>
-            </a:r>
-            <a:r>
-              <a:rPr>
-                <a:solidFill>
-                  <a:srgbClr val="666666"/>
-                </a:solidFill>
-                <a:latin typeface="Courier"/>
-              </a:rPr>
-              <a:t>=</a:t>
-            </a:r>
-            <a:r>
-              <a:rPr>
-                <a:latin typeface="Courier"/>
-              </a:rPr>
-              <a:t> np.sqrt(((y </a:t>
-            </a:r>
-            <a:r>
-              <a:rPr>
-                <a:solidFill>
-                  <a:srgbClr val="666666"/>
-                </a:solidFill>
-                <a:latin typeface="Courier"/>
-              </a:rPr>
-              <a:t>-</a:t>
-            </a:r>
-            <a:r>
-              <a:rPr>
-                <a:latin typeface="Courier"/>
-              </a:rPr>
-              <a:t> t.predict(X)) </a:t>
-            </a:r>
-            <a:r>
-              <a:rPr>
-                <a:solidFill>
-                  <a:srgbClr val="666666"/>
-                </a:solidFill>
-                <a:latin typeface="Courier"/>
-              </a:rPr>
-              <a:t>**</a:t>
-            </a:r>
-            <a:r>
-              <a:rPr>
-                <a:latin typeface="Courier"/>
-              </a:rPr>
-              <a:t> </a:t>
-            </a:r>
-            <a:r>
-              <a:rPr>
-                <a:solidFill>
-                  <a:srgbClr val="40A070"/>
-                </a:solidFill>
-                <a:latin typeface="Courier"/>
-              </a:rPr>
-              <a:t>2</a:t>
-            </a:r>
-            <a:r>
-              <a:rPr>
-                <a:latin typeface="Courier"/>
-              </a:rPr>
-              <a:t>).mean())</a:t>
-            </a:r>
-            <a:br/>
-            <a:r>
-              <a:rPr>
-                <a:latin typeface="Courier"/>
-              </a:rPr>
-              <a:t>    rows.append((depth, train, cv))</a:t>
-            </a:r>
-          </a:p>
-          <a:p>
-            <a:pPr lvl="0" indent="0" marL="0">
-              <a:buNone/>
-            </a:pPr>
-            <a:r>
-              <a:rPr/>
-              <a:t>Plot both curves against depth.</a:t>
-            </a:r>
-          </a:p>
-          <a:p>
-            <a:pPr lvl="0" indent="0" marL="0">
-              <a:buNone/>
-            </a:pPr>
-            <a:r>
-              <a:rPr/>
-              <a:t>Training error falls monotonically. Validation error falls, then turns. The turn is the bias–variance tradeoff, and it is the only one of the two curves that tells you anything.</a:t>
             </a:r>
           </a:p>
         </p:txBody>
@@ -5098,7 +4308,7 @@
             </a:pPr>
             <a:r>
               <a:rPr/>
-              <a:t>Leakage, the practical form</a:t>
+              <a:t>Three schemes, three answers</a:t>
             </a:r>
           </a:p>
         </p:txBody>
@@ -5122,105 +4332,170 @@
               <a:buNone/>
             </a:pPr>
             <a:r>
-              <a:rPr b="1">
-                <a:solidFill>
-                  <a:srgbClr val="008000"/>
-                </a:solidFill>
-                <a:latin typeface="Courier"/>
-              </a:rPr>
-              <a:t>from</a:t>
-            </a:r>
-            <a:r>
-              <a:rPr>
-                <a:latin typeface="Courier"/>
-              </a:rPr>
-              <a:t> sklearn.pipeline </a:t>
-            </a:r>
-            <a:r>
-              <a:rPr b="1">
-                <a:solidFill>
-                  <a:srgbClr val="008000"/>
-                </a:solidFill>
-                <a:latin typeface="Courier"/>
-              </a:rPr>
-              <a:t>import</a:t>
-            </a:r>
-            <a:r>
-              <a:rPr>
-                <a:latin typeface="Courier"/>
-              </a:rPr>
-              <a:t> make_pipeline</a:t>
+              <a:rPr>
+                <a:latin typeface="Courier"/>
+              </a:rPr>
+              <a:t>rand  </a:t>
+            </a:r>
+            <a:r>
+              <a:rPr>
+                <a:solidFill>
+                  <a:srgbClr val="666666"/>
+                </a:solidFill>
+                <a:latin typeface="Courier"/>
+              </a:rPr>
+              <a:t>=</a:t>
+            </a:r>
+            <a:r>
+              <a:rPr>
+                <a:latin typeface="Courier"/>
+              </a:rPr>
+              <a:t> cross_val_score(m, X, y, scoring</a:t>
+            </a:r>
+            <a:r>
+              <a:rPr>
+                <a:solidFill>
+                  <a:srgbClr val="666666"/>
+                </a:solidFill>
+                <a:latin typeface="Courier"/>
+              </a:rPr>
+              <a:t>=</a:t>
+            </a:r>
+            <a:r>
+              <a:rPr>
+                <a:latin typeface="Courier"/>
+              </a:rPr>
+              <a:t>RMSE,</a:t>
             </a:r>
             <a:br/>
             <a:r>
-              <a:rPr b="1">
-                <a:solidFill>
-                  <a:srgbClr val="008000"/>
-                </a:solidFill>
-                <a:latin typeface="Courier"/>
-              </a:rPr>
-              <a:t>from</a:t>
-            </a:r>
-            <a:r>
-              <a:rPr>
-                <a:latin typeface="Courier"/>
-              </a:rPr>
-              <a:t> sklearn.preprocessing </a:t>
-            </a:r>
-            <a:r>
-              <a:rPr b="1">
-                <a:solidFill>
-                  <a:srgbClr val="008000"/>
-                </a:solidFill>
-                <a:latin typeface="Courier"/>
-              </a:rPr>
-              <a:t>import</a:t>
-            </a:r>
-            <a:r>
-              <a:rPr>
-                <a:latin typeface="Courier"/>
-              </a:rPr>
-              <a:t> StandardScaler</a:t>
+              <a:rPr>
+                <a:latin typeface="Courier"/>
+              </a:rPr>
+              <a:t>                        cv</a:t>
+            </a:r>
+            <a:r>
+              <a:rPr>
+                <a:solidFill>
+                  <a:srgbClr val="666666"/>
+                </a:solidFill>
+                <a:latin typeface="Courier"/>
+              </a:rPr>
+              <a:t>=</a:t>
+            </a:r>
+            <a:r>
+              <a:rPr>
+                <a:latin typeface="Courier"/>
+              </a:rPr>
+              <a:t>KFold(</a:t>
+            </a:r>
+            <a:r>
+              <a:rPr>
+                <a:solidFill>
+                  <a:srgbClr val="40A070"/>
+                </a:solidFill>
+                <a:latin typeface="Courier"/>
+              </a:rPr>
+              <a:t>5</a:t>
+            </a:r>
+            <a:r>
+              <a:rPr>
+                <a:latin typeface="Courier"/>
+              </a:rPr>
+              <a:t>, shuffle</a:t>
+            </a:r>
+            <a:r>
+              <a:rPr>
+                <a:solidFill>
+                  <a:srgbClr val="666666"/>
+                </a:solidFill>
+                <a:latin typeface="Courier"/>
+              </a:rPr>
+              <a:t>=</a:t>
+            </a:r>
+            <a:r>
+              <a:rPr>
+                <a:solidFill>
+                  <a:srgbClr val="19177C"/>
+                </a:solidFill>
+                <a:latin typeface="Courier"/>
+              </a:rPr>
+              <a:t>True</a:t>
+            </a:r>
+            <a:r>
+              <a:rPr>
+                <a:latin typeface="Courier"/>
+              </a:rPr>
+              <a:t>, random_state</a:t>
+            </a:r>
+            <a:r>
+              <a:rPr>
+                <a:solidFill>
+                  <a:srgbClr val="666666"/>
+                </a:solidFill>
+                <a:latin typeface="Courier"/>
+              </a:rPr>
+              <a:t>=</a:t>
+            </a:r>
+            <a:r>
+              <a:rPr>
+                <a:solidFill>
+                  <a:srgbClr val="40A070"/>
+                </a:solidFill>
+                <a:latin typeface="Courier"/>
+              </a:rPr>
+              <a:t>60033</a:t>
+            </a:r>
+            <a:r>
+              <a:rPr>
+                <a:latin typeface="Courier"/>
+              </a:rPr>
+              <a:t>))</a:t>
             </a:r>
             <a:br/>
             <a:br/>
             <a:r>
-              <a:rPr i="1">
-                <a:solidFill>
-                  <a:srgbClr val="60A0B0"/>
-                </a:solidFill>
-                <a:latin typeface="Courier"/>
-              </a:rPr>
-              <a:t>#  WRONG — the scaler has already seen the test fold</a:t>
+              <a:rPr>
+                <a:latin typeface="Courier"/>
+              </a:rPr>
+              <a:t>group </a:t>
+            </a:r>
+            <a:r>
+              <a:rPr>
+                <a:solidFill>
+                  <a:srgbClr val="666666"/>
+                </a:solidFill>
+                <a:latin typeface="Courier"/>
+              </a:rPr>
+              <a:t>=</a:t>
+            </a:r>
+            <a:r>
+              <a:rPr>
+                <a:latin typeface="Courier"/>
+              </a:rPr>
+              <a:t> cross_val_score(m, X, y, scoring</a:t>
+            </a:r>
+            <a:r>
+              <a:rPr>
+                <a:solidFill>
+                  <a:srgbClr val="666666"/>
+                </a:solidFill>
+                <a:latin typeface="Courier"/>
+              </a:rPr>
+              <a:t>=</a:t>
+            </a:r>
+            <a:r>
+              <a:rPr>
+                <a:latin typeface="Courier"/>
+              </a:rPr>
+              <a:t>RMSE,</a:t>
             </a:r>
             <a:br/>
             <a:r>
               <a:rPr>
                 <a:latin typeface="Courier"/>
               </a:rPr>
-              <a:t>X_scaled </a:t>
-            </a:r>
-            <a:r>
-              <a:rPr>
-                <a:solidFill>
-                  <a:srgbClr val="666666"/>
-                </a:solidFill>
-                <a:latin typeface="Courier"/>
-              </a:rPr>
-              <a:t>=</a:t>
-            </a:r>
-            <a:r>
-              <a:rPr>
-                <a:latin typeface="Courier"/>
-              </a:rPr>
-              <a:t> StandardScaler().fit_transform(X)</a:t>
-            </a:r>
-            <a:br/>
-            <a:r>
-              <a:rPr>
-                <a:latin typeface="Courier"/>
-              </a:rPr>
-              <a:t>cross_val_score(m, X_scaled, y, cv</a:t>
+              <a:t>                        cv</a:t>
             </a:r>
             <a:r>
               <a:rPr>
@@ -5285,20 +4560,47 @@
             <a:br/>
             <a:br/>
             <a:r>
-              <a:rPr i="1">
-                <a:solidFill>
-                  <a:srgbClr val="60A0B0"/>
-                </a:solidFill>
-                <a:latin typeface="Courier"/>
-              </a:rPr>
-              <a:t>#  RIGHT — every preprocessing step re-fits inside each fold</a:t>
+              <a:rPr>
+                <a:latin typeface="Courier"/>
+              </a:rPr>
+              <a:t>d_s </a:t>
+            </a:r>
+            <a:r>
+              <a:rPr>
+                <a:solidFill>
+                  <a:srgbClr val="666666"/>
+                </a:solidFill>
+                <a:latin typeface="Courier"/>
+              </a:rPr>
+              <a:t>=</a:t>
+            </a:r>
+            <a:r>
+              <a:rPr>
+                <a:latin typeface="Courier"/>
+              </a:rPr>
+              <a:t> d.sort_values(</a:t>
+            </a:r>
+            <a:r>
+              <a:rPr>
+                <a:solidFill>
+                  <a:srgbClr val="4070A0"/>
+                </a:solidFill>
+                <a:latin typeface="Courier"/>
+              </a:rPr>
+              <a:t>"time"</a:t>
+            </a:r>
+            <a:r>
+              <a:rPr>
+                <a:latin typeface="Courier"/>
+              </a:rPr>
+              <a:t>)</a:t>
             </a:r>
             <a:br/>
             <a:r>
               <a:rPr>
                 <a:latin typeface="Courier"/>
               </a:rPr>
-              <a:t>pipe </a:t>
+              <a:t>time_ </a:t>
             </a:r>
             <a:r>
               <a:rPr>
@@ -5313,14 +4615,14 @@
               <a:rPr>
                 <a:latin typeface="Courier"/>
               </a:rPr>
-              <a:t> make_pipeline(StandardScaler(), m)</a:t>
+              <a:t> cross_val_score(m, X.loc[d_s.index], y.loc[d_s.index],</a:t>
             </a:r>
             <a:br/>
             <a:r>
               <a:rPr>
                 <a:latin typeface="Courier"/>
               </a:rPr>
-              <a:t>cross_val_score(pipe, X, y, cv</a:t>
+              <a:t>                        scoring</a:t>
             </a:r>
             <a:r>
               <a:rPr>
@@ -5335,7 +4637,22 @@
               <a:rPr>
                 <a:latin typeface="Courier"/>
               </a:rPr>
-              <a:t>GroupKFold(</a:t>
+              <a:t>RMSE, cv</a:t>
+            </a:r>
+            <a:r>
+              <a:rPr>
+                <a:solidFill>
+                  <a:srgbClr val="666666"/>
+                </a:solidFill>
+                <a:latin typeface="Courier"/>
+              </a:rPr>
+              <a:t>=</a:t>
+            </a:r>
+            <a:r>
+              <a:rPr>
+                <a:latin typeface="Courier"/>
+              </a:rPr>
+              <a:t>TimeSeriesSplit(</a:t>
             </a:r>
             <a:r>
               <a:rPr>
@@ -5350,7 +4667,157 @@
               <a:rPr>
                 <a:latin typeface="Courier"/>
               </a:rPr>
-              <a:t>), groups</a:t>
+              <a:t>))</a:t>
+            </a:r>
+            <a:br/>
+            <a:br/>
+            <a:r>
+              <a:rPr b="1">
+                <a:solidFill>
+                  <a:srgbClr val="007020"/>
+                </a:solidFill>
+                <a:latin typeface="Courier"/>
+              </a:rPr>
+              <a:t>for</a:t>
+            </a:r>
+            <a:r>
+              <a:rPr>
+                <a:latin typeface="Courier"/>
+              </a:rPr>
+              <a:t> n, s </a:t>
+            </a:r>
+            <a:r>
+              <a:rPr b="1">
+                <a:solidFill>
+                  <a:srgbClr val="007020"/>
+                </a:solidFill>
+                <a:latin typeface="Courier"/>
+              </a:rPr>
+              <a:t>in</a:t>
+            </a:r>
+            <a:r>
+              <a:rPr>
+                <a:latin typeface="Courier"/>
+              </a:rPr>
+              <a:t> [(</a:t>
+            </a:r>
+            <a:r>
+              <a:rPr>
+                <a:solidFill>
+                  <a:srgbClr val="4070A0"/>
+                </a:solidFill>
+                <a:latin typeface="Courier"/>
+              </a:rPr>
+              <a:t>"random"</a:t>
+            </a:r>
+            <a:r>
+              <a:rPr>
+                <a:latin typeface="Courier"/>
+              </a:rPr>
+              <a:t>, rand), (</a:t>
+            </a:r>
+            <a:r>
+              <a:rPr>
+                <a:solidFill>
+                  <a:srgbClr val="4070A0"/>
+                </a:solidFill>
+                <a:latin typeface="Courier"/>
+              </a:rPr>
+              <a:t>"by country"</a:t>
+            </a:r>
+            <a:r>
+              <a:rPr>
+                <a:latin typeface="Courier"/>
+              </a:rPr>
+              <a:t>, group), (</a:t>
+            </a:r>
+            <a:r>
+              <a:rPr>
+                <a:solidFill>
+                  <a:srgbClr val="4070A0"/>
+                </a:solidFill>
+                <a:latin typeface="Courier"/>
+              </a:rPr>
+              <a:t>"by time"</a:t>
+            </a:r>
+            <a:r>
+              <a:rPr>
+                <a:latin typeface="Courier"/>
+              </a:rPr>
+              <a:t>, time_)]:</a:t>
+            </a:r>
+            <a:br/>
+            <a:r>
+              <a:rPr>
+                <a:latin typeface="Courier"/>
+              </a:rPr>
+              <a:t>    </a:t>
+            </a:r>
+            <a:r>
+              <a:rPr>
+                <a:solidFill>
+                  <a:srgbClr val="008000"/>
+                </a:solidFill>
+                <a:latin typeface="Courier"/>
+              </a:rPr>
+              <a:t>print</a:t>
+            </a:r>
+            <a:r>
+              <a:rPr>
+                <a:latin typeface="Courier"/>
+              </a:rPr>
+              <a:t>(</a:t>
+            </a:r>
+            <a:r>
+              <a:rPr>
+                <a:solidFill>
+                  <a:srgbClr val="BB6688"/>
+                </a:solidFill>
+                <a:latin typeface="Courier"/>
+              </a:rPr>
+              <a:t>f"</a:t>
+            </a:r>
+            <a:r>
+              <a:rPr>
+                <a:solidFill>
+                  <a:srgbClr val="4070A0"/>
+                </a:solidFill>
+                <a:latin typeface="Courier"/>
+              </a:rPr>
+              <a:t>{</a:t>
+            </a:r>
+            <a:r>
+              <a:rPr>
+                <a:latin typeface="Courier"/>
+              </a:rPr>
+              <a:t>n</a:t>
+            </a:r>
+            <a:r>
+              <a:rPr>
+                <a:solidFill>
+                  <a:srgbClr val="4070A0"/>
+                </a:solidFill>
+                <a:latin typeface="Courier"/>
+              </a:rPr>
+              <a:t>:12s}</a:t>
+            </a:r>
+            <a:r>
+              <a:rPr>
+                <a:solidFill>
+                  <a:srgbClr val="BB6688"/>
+                </a:solidFill>
+                <a:latin typeface="Courier"/>
+              </a:rPr>
+              <a:t> RMSE </a:t>
+            </a:r>
+            <a:r>
+              <a:rPr>
+                <a:solidFill>
+                  <a:srgbClr val="4070A0"/>
+                </a:solidFill>
+                <a:latin typeface="Courier"/>
+              </a:rPr>
+              <a:t>{</a:t>
             </a:r>
             <a:r>
               <a:rPr>
@@ -5359,13 +4826,13 @@
                 </a:solidFill>
                 <a:latin typeface="Courier"/>
               </a:rPr>
-              <a:t>=</a:t>
-            </a:r>
-            <a:r>
-              <a:rPr>
-                <a:latin typeface="Courier"/>
-              </a:rPr>
-              <a:t>d[</a:t>
+              <a:t>-</a:t>
+            </a:r>
+            <a:r>
+              <a:rPr>
+                <a:latin typeface="Courier"/>
+              </a:rPr>
+              <a:t>s</a:t>
             </a:r>
             <a:r>
               <a:rPr>
@@ -5374,30 +4841,37 @@
                 </a:solidFill>
                 <a:latin typeface="Courier"/>
               </a:rPr>
-              <a:t>"geo"</a:t>
-            </a:r>
-            <a:r>
-              <a:rPr>
-                <a:latin typeface="Courier"/>
-              </a:rPr>
-              <a:t>])</a:t>
-            </a:r>
-          </a:p>
-          <a:p>
-            <a:pPr lvl="0" indent="0" marL="0">
-              <a:buNone/>
-            </a:pPr>
-            <a:r>
-              <a:rPr/>
-              <a:t>Any step that </a:t>
-            </a:r>
-            <a:r>
-              <a:rPr b="1"/>
-              <a:t>learns from the data</a:t>
-            </a:r>
-            <a:r>
-              <a:rPr/>
-              <a:t> — scaling, imputation, feature selection, target encoding — must live inside the pipeline. This is the single most common error in applied machine learning, and it always flatters you.</a:t>
+              <a:t>.</a:t>
+            </a:r>
+            <a:r>
+              <a:rPr>
+                <a:latin typeface="Courier"/>
+              </a:rPr>
+              <a:t>mean()</a:t>
+            </a:r>
+            <a:r>
+              <a:rPr>
+                <a:solidFill>
+                  <a:srgbClr val="4070A0"/>
+                </a:solidFill>
+                <a:latin typeface="Courier"/>
+              </a:rPr>
+              <a:t>:.3f}</a:t>
+            </a:r>
+            <a:r>
+              <a:rPr>
+                <a:solidFill>
+                  <a:srgbClr val="BB6688"/>
+                </a:solidFill>
+                <a:latin typeface="Courier"/>
+              </a:rPr>
+              <a:t>"</a:t>
+            </a:r>
+            <a:r>
+              <a:rPr>
+                <a:latin typeface="Courier"/>
+              </a:rPr>
+              <a:t>)</a:t>
             </a:r>
           </a:p>
         </p:txBody>
@@ -5408,6 +4882,1300 @@
 </file>
 
 <file path=ppt/slides/slide16.xml><?xml version="1.0" encoding="utf-8"?>
+<p:sld xmlns:a="http://schemas.openxmlformats.org/drawingml/2006/main" xmlns:r="http://schemas.openxmlformats.org/officeDocument/2006/relationships" xmlns:p="http://schemas.openxmlformats.org/presentationml/2006/main">
+  <p:cSld>
+    <p:spTree>
+      <p:nvGrpSpPr>
+        <p:cNvPr id="1" name=""/>
+        <p:cNvGrpSpPr/>
+        <p:nvPr/>
+      </p:nvGrpSpPr>
+      <p:grpSpPr>
+        <a:xfrm>
+          <a:off x="0" y="0"/>
+          <a:ext cx="0" cy="0"/>
+          <a:chOff x="0" y="0"/>
+          <a:chExt cx="0" cy="0"/>
+        </a:xfrm>
+      </p:grpSpPr>
+      <p:sp>
+        <p:nvSpPr>
+          <p:cNvPr id="2" name="Title 1"/>
+          <p:cNvSpPr>
+            <a:spLocks noGrp="1"/>
+          </p:cNvSpPr>
+          <p:nvPr>
+            <p:ph type="title"/>
+          </p:nvPr>
+        </p:nvSpPr>
+        <p:spPr>
+          <a:xfrm>
+            <a:off x="457201" y="204787"/>
+            <a:ext cx="3008313" cy="871538"/>
+          </a:xfrm>
+        </p:spPr>
+        <p:txBody>
+          <a:bodyPr/>
+          <a:lstStyle/>
+          <a:p>
+            <a:pPr lvl="0" indent="0" marL="0">
+              <a:buNone/>
+            </a:pPr>
+            <a:r>
+              <a:rPr/>
+              <a:t>What you should see</a:t>
+            </a:r>
+          </a:p>
+        </p:txBody>
+      </p:sp>
+      <p:sp>
+        <p:nvSpPr>
+          <p:cNvPr id="4" name="Text Placeholder 3"/>
+          <p:cNvSpPr>
+            <a:spLocks noGrp="1"/>
+          </p:cNvSpPr>
+          <p:nvPr>
+            <p:ph idx="2" sz="half" type="body"/>
+          </p:nvPr>
+        </p:nvSpPr>
+        <p:spPr/>
+        <p:txBody>
+          <a:bodyPr/>
+          <a:lstStyle/>
+          <a:p>
+            <a:pPr lvl="0" indent="0" marL="0">
+              <a:buNone/>
+            </a:pPr>
+            <a:r>
+              <a:rPr/>
+              <a:t>Roughly:</a:t>
+            </a:r>
+          </a:p>
+        </p:txBody>
+      </p:sp>
+      <p:graphicFrame>
+        <p:nvGraphicFramePr>
+          <p:cNvPr id="6" name="Content Placeholder 5"/>
+          <p:cNvGraphicFramePr>
+            <a:graphicFrameLocks noGrp="1"/>
+          </p:cNvGraphicFramePr>
+          <p:nvPr>
+            <p:ph idx="1"/>
+          </p:nvPr>
+        </p:nvGraphicFramePr>
+        <p:xfrm>
+          <a:off x="3568700" y="203200"/>
+          <a:ext cx="5105400" cy="4381500"/>
+        </p:xfrm>
+        <a:graphic>
+          <a:graphicData uri="http://schemas.openxmlformats.org/drawingml/2006/table">
+            <a:tbl>
+              <a:tblPr firstRow="1" bandRow="1">
+                <a:tableStyleId>{5C22544A-7EE6-4342-B048-85BDC9FD1C3A}</a:tableStyleId>
+              </a:tblPr>
+              <a:tblGrid>
+                <a:gridCol w="2552700"/>
+                <a:gridCol w="2552700"/>
+              </a:tblGrid>
+              <a:tr h="0">
+                <a:tc>
+                  <a:txBody>
+                    <a:bodyPr/>
+                    <a:lstStyle/>
+                    <a:p>
+                      <a:pPr lvl="0" indent="0" marL="0">
+                        <a:buNone/>
+                      </a:pPr>
+                      <a:r>
+                        <a:rPr/>
+                        <a:t>Split</a:t>
+                      </a:r>
+                    </a:p>
+                  </a:txBody>
+                  <a:tcPr/>
+                </a:tc>
+                <a:tc>
+                  <a:txBody>
+                    <a:bodyPr/>
+                    <a:lstStyle/>
+                    <a:p>
+                      <a:pPr lvl="0" indent="0" marL="0">
+                        <a:buNone/>
+                      </a:pPr>
+                      <a:r>
+                        <a:rPr/>
+                        <a:t>RMSE (EUR)</a:t>
+                      </a:r>
+                    </a:p>
+                  </a:txBody>
+                  <a:tcPr/>
+                </a:tc>
+              </a:tr>
+              <a:tr h="0">
+                <a:tc>
+                  <a:txBody>
+                    <a:bodyPr/>
+                    <a:lstStyle/>
+                    <a:p>
+                      <a:pPr lvl="0" indent="0" marL="0">
+                        <a:buNone/>
+                      </a:pPr>
+                      <a:r>
+                        <a:rPr/>
+                        <a:t>Random K-fold</a:t>
+                      </a:r>
+                    </a:p>
+                  </a:txBody>
+                </a:tc>
+                <a:tc>
+                  <a:txBody>
+                    <a:bodyPr/>
+                    <a:lstStyle/>
+                    <a:p>
+                      <a:pPr lvl="0" indent="0" marL="0">
+                        <a:buNone/>
+                      </a:pPr>
+                      <a:r>
+                        <a:rPr/>
+                        <a:t>~3,200</a:t>
+                      </a:r>
+                    </a:p>
+                  </a:txBody>
+                </a:tc>
+              </a:tr>
+              <a:tr h="0">
+                <a:tc>
+                  <a:txBody>
+                    <a:bodyPr/>
+                    <a:lstStyle/>
+                    <a:p>
+                      <a:pPr lvl="0" indent="0" marL="0">
+                        <a:buNone/>
+                      </a:pPr>
+                      <a:r>
+                        <a:rPr b="1"/>
+                        <a:t>GroupKFold by country</a:t>
+                      </a:r>
+                    </a:p>
+                  </a:txBody>
+                </a:tc>
+                <a:tc>
+                  <a:txBody>
+                    <a:bodyPr/>
+                    <a:lstStyle/>
+                    <a:p>
+                      <a:pPr lvl="0" indent="0" marL="0">
+                        <a:buNone/>
+                      </a:pPr>
+                      <a:r>
+                        <a:rPr b="1"/>
+                        <a:t>~4,900</a:t>
+                      </a:r>
+                    </a:p>
+                  </a:txBody>
+                </a:tc>
+              </a:tr>
+              <a:tr h="0">
+                <a:tc>
+                  <a:txBody>
+                    <a:bodyPr/>
+                    <a:lstStyle/>
+                    <a:p>
+                      <a:pPr lvl="0" indent="0" marL="0">
+                        <a:buNone/>
+                      </a:pPr>
+                      <a:r>
+                        <a:rPr/>
+                        <a:t>TimeSeriesSplit</a:t>
+                      </a:r>
+                    </a:p>
+                  </a:txBody>
+                </a:tc>
+                <a:tc>
+                  <a:txBody>
+                    <a:bodyPr/>
+                    <a:lstStyle/>
+                    <a:p>
+                      <a:pPr lvl="0" indent="0" marL="0">
+                        <a:buNone/>
+                      </a:pPr>
+                      <a:r>
+                        <a:rPr/>
+                        <a:t>~2,800</a:t>
+                      </a:r>
+                    </a:p>
+                  </a:txBody>
+                </a:tc>
+              </a:tr>
+            </a:tbl>
+          </a:graphicData>
+        </a:graphic>
+      </p:graphicFrame>
+    </p:spTree>
+  </p:cSld>
+</p:sld>
+</file>
+
+<file path=ppt/slides/slide17.xml><?xml version="1.0" encoding="utf-8"?>
+<p:sld xmlns:a="http://schemas.openxmlformats.org/drawingml/2006/main" xmlns:r="http://schemas.openxmlformats.org/officeDocument/2006/relationships" xmlns:p="http://schemas.openxmlformats.org/presentationml/2006/main">
+  <p:cSld>
+    <p:spTree>
+      <p:nvGrpSpPr>
+        <p:cNvPr id="1" name=""/>
+        <p:cNvGrpSpPr/>
+        <p:nvPr/>
+      </p:nvGrpSpPr>
+      <p:grpSpPr>
+        <a:xfrm>
+          <a:off x="0" y="0"/>
+          <a:ext cx="0" cy="0"/>
+          <a:chOff x="0" y="0"/>
+          <a:chExt cx="0" cy="0"/>
+        </a:xfrm>
+      </p:grpSpPr>
+      <p:sp>
+        <p:nvSpPr>
+          <p:cNvPr id="3" name="Content Placeholder 2"/>
+          <p:cNvSpPr>
+            <a:spLocks noGrp="1"/>
+          </p:cNvSpPr>
+          <p:nvPr>
+            <p:ph idx="1"/>
+          </p:nvPr>
+        </p:nvSpPr>
+        <p:spPr/>
+        <p:txBody>
+          <a:bodyPr/>
+          <a:lstStyle/>
+          <a:p>
+            <a:pPr lvl="0" indent="0" marL="0">
+              <a:buNone/>
+            </a:pPr>
+            <a:r>
+              <a:rPr/>
+              <a:t>Grouped error is about </a:t>
+            </a:r>
+            <a:r>
+              <a:rPr b="1"/>
+              <a:t>1.5× larger</a:t>
+            </a:r>
+            <a:r>
+              <a:rPr/>
+              <a:t> than random. Same data, same model, same day — and the honest number is half again the flattering one.</a:t>
+            </a:r>
+          </a:p>
+        </p:txBody>
+      </p:sp>
+    </p:spTree>
+  </p:cSld>
+</p:sld>
+</file>
+
+<file path=ppt/slides/slide18.xml><?xml version="1.0" encoding="utf-8"?>
+<p:sld xmlns:a="http://schemas.openxmlformats.org/drawingml/2006/main" xmlns:r="http://schemas.openxmlformats.org/officeDocument/2006/relationships" xmlns:p="http://schemas.openxmlformats.org/presentationml/2006/main">
+  <p:cSld>
+    <p:spTree>
+      <p:nvGrpSpPr>
+        <p:cNvPr id="1" name=""/>
+        <p:cNvGrpSpPr/>
+        <p:nvPr/>
+      </p:nvGrpSpPr>
+      <p:grpSpPr>
+        <a:xfrm>
+          <a:off x="0" y="0"/>
+          <a:ext cx="0" cy="0"/>
+          <a:chOff x="0" y="0"/>
+          <a:chExt cx="0" cy="0"/>
+        </a:xfrm>
+      </p:grpSpPr>
+      <p:sp>
+        <p:nvSpPr>
+          <p:cNvPr id="2" name="Title 1"/>
+          <p:cNvSpPr>
+            <a:spLocks noGrp="1"/>
+          </p:cNvSpPr>
+          <p:nvPr>
+            <p:ph type="title"/>
+          </p:nvPr>
+        </p:nvSpPr>
+        <p:spPr/>
+        <p:txBody>
+          <a:bodyPr/>
+          <a:lstStyle/>
+          <a:p>
+            <a:pPr lvl="0" indent="0" marL="0">
+              <a:buNone/>
+            </a:pPr>
+            <a:r>
+              <a:rPr/>
+              <a:t>Read the gap</a:t>
+            </a:r>
+          </a:p>
+        </p:txBody>
+      </p:sp>
+      <p:sp>
+        <p:nvSpPr>
+          <p:cNvPr id="3" name="Content Placeholder 2"/>
+          <p:cNvSpPr>
+            <a:spLocks noGrp="1"/>
+          </p:cNvSpPr>
+          <p:nvPr>
+            <p:ph idx="1"/>
+          </p:nvPr>
+        </p:nvSpPr>
+        <p:spPr/>
+        <p:txBody>
+          <a:bodyPr/>
+          <a:lstStyle/>
+          <a:p>
+            <a:pPr lvl="0" indent="0" marL="0">
+              <a:buNone/>
+            </a:pPr>
+            <a:r>
+              <a:rPr/>
+              <a:t>That ratio is a </a:t>
+            </a:r>
+            <a:r>
+              <a:rPr b="1"/>
+              <a:t>direct measure of how much the model leans on country identity</a:t>
+            </a:r>
+            <a:r>
+              <a:rPr/>
+              <a:t> rather than on the economics.</a:t>
+            </a:r>
+          </a:p>
+          <a:p>
+            <a:pPr lvl="0" indent="0" marL="0">
+              <a:buNone/>
+            </a:pPr>
+            <a:r>
+              <a:rPr/>
+              <a:t>Random K-fold let it see Germany 2019 while predicting Germany 2020. It learned “this is Germany”, which is useless for a country it has never seen.</a:t>
+            </a:r>
+          </a:p>
+          <a:p>
+            <a:pPr lvl="0" indent="0" marL="0">
+              <a:buNone/>
+            </a:pPr>
+            <a:r>
+              <a:rPr/>
+              <a:t>Publish the 3,200 and you have overstated your model’s usefulness by half, without doing anything a referee would call wrong.</a:t>
+            </a:r>
+          </a:p>
+          <a:p>
+            <a:pPr lvl="0" indent="0" marL="0">
+              <a:buNone/>
+            </a:pPr>
+            <a:r>
+              <a:rPr>
+                <a:latin typeface="Courier"/>
+              </a:rPr>
+              <a:t>TimeSeriesSplit</a:t>
+            </a:r>
+            <a:r>
+              <a:rPr/>
+              <a:t> looks </a:t>
+            </a:r>
+            <a:r>
+              <a:rPr i="1"/>
+              <a:t>best</a:t>
+            </a:r>
+            <a:r>
+              <a:rPr/>
+              <a:t> of the three here — but it trains on early years and tests on later ones with a growing window, so it is answering a third question again. Low is not the same as right.</a:t>
+            </a:r>
+          </a:p>
+        </p:txBody>
+      </p:sp>
+    </p:spTree>
+  </p:cSld>
+</p:sld>
+</file>
+
+<file path=ppt/slides/slide19.xml><?xml version="1.0" encoding="utf-8"?>
+<p:sld xmlns:a="http://schemas.openxmlformats.org/drawingml/2006/main" xmlns:r="http://schemas.openxmlformats.org/officeDocument/2006/relationships" xmlns:p="http://schemas.openxmlformats.org/presentationml/2006/main">
+  <p:cSld>
+    <p:spTree>
+      <p:nvGrpSpPr>
+        <p:cNvPr id="1" name=""/>
+        <p:cNvGrpSpPr/>
+        <p:nvPr/>
+      </p:nvGrpSpPr>
+      <p:grpSpPr>
+        <a:xfrm>
+          <a:off x="0" y="0"/>
+          <a:ext cx="0" cy="0"/>
+          <a:chOff x="0" y="0"/>
+          <a:chExt cx="0" cy="0"/>
+        </a:xfrm>
+      </p:grpSpPr>
+      <p:sp>
+        <p:nvSpPr>
+          <p:cNvPr id="2" name="Title 1"/>
+          <p:cNvSpPr>
+            <a:spLocks noGrp="1"/>
+          </p:cNvSpPr>
+          <p:nvPr>
+            <p:ph type="title"/>
+          </p:nvPr>
+        </p:nvSpPr>
+        <p:spPr/>
+        <p:txBody>
+          <a:bodyPr/>
+          <a:lstStyle/>
+          <a:p>
+            <a:pPr lvl="0" indent="0" marL="0">
+              <a:buNone/>
+            </a:pPr>
+            <a:r>
+              <a:rPr/>
+              <a:t>Flexibility, drawn</a:t>
+            </a:r>
+          </a:p>
+        </p:txBody>
+      </p:sp>
+      <p:sp>
+        <p:nvSpPr>
+          <p:cNvPr id="3" name="Content Placeholder 2"/>
+          <p:cNvSpPr>
+            <a:spLocks noGrp="1"/>
+          </p:cNvSpPr>
+          <p:nvPr>
+            <p:ph idx="1"/>
+          </p:nvPr>
+        </p:nvSpPr>
+        <p:spPr/>
+        <p:txBody>
+          <a:bodyPr/>
+          <a:lstStyle/>
+          <a:p>
+            <a:pPr lvl="0" indent="0">
+              <a:buNone/>
+            </a:pPr>
+            <a:r>
+              <a:rPr b="1">
+                <a:solidFill>
+                  <a:srgbClr val="008000"/>
+                </a:solidFill>
+                <a:latin typeface="Courier"/>
+              </a:rPr>
+              <a:t>from</a:t>
+            </a:r>
+            <a:r>
+              <a:rPr>
+                <a:latin typeface="Courier"/>
+              </a:rPr>
+              <a:t> sklearn.tree </a:t>
+            </a:r>
+            <a:r>
+              <a:rPr b="1">
+                <a:solidFill>
+                  <a:srgbClr val="008000"/>
+                </a:solidFill>
+                <a:latin typeface="Courier"/>
+              </a:rPr>
+              <a:t>import</a:t>
+            </a:r>
+            <a:r>
+              <a:rPr>
+                <a:latin typeface="Courier"/>
+              </a:rPr>
+              <a:t> DecisionTreeRegressor</a:t>
+            </a:r>
+            <a:br/>
+            <a:br/>
+            <a:r>
+              <a:rPr>
+                <a:latin typeface="Courier"/>
+              </a:rPr>
+              <a:t>rows </a:t>
+            </a:r>
+            <a:r>
+              <a:rPr>
+                <a:solidFill>
+                  <a:srgbClr val="666666"/>
+                </a:solidFill>
+                <a:latin typeface="Courier"/>
+              </a:rPr>
+              <a:t>=</a:t>
+            </a:r>
+            <a:r>
+              <a:rPr>
+                <a:latin typeface="Courier"/>
+              </a:rPr>
+              <a:t> []</a:t>
+            </a:r>
+            <a:br/>
+            <a:r>
+              <a:rPr b="1">
+                <a:solidFill>
+                  <a:srgbClr val="007020"/>
+                </a:solidFill>
+                <a:latin typeface="Courier"/>
+              </a:rPr>
+              <a:t>for</a:t>
+            </a:r>
+            <a:r>
+              <a:rPr>
+                <a:latin typeface="Courier"/>
+              </a:rPr>
+              <a:t> depth </a:t>
+            </a:r>
+            <a:r>
+              <a:rPr b="1">
+                <a:solidFill>
+                  <a:srgbClr val="007020"/>
+                </a:solidFill>
+                <a:latin typeface="Courier"/>
+              </a:rPr>
+              <a:t>in</a:t>
+            </a:r>
+            <a:r>
+              <a:rPr>
+                <a:latin typeface="Courier"/>
+              </a:rPr>
+              <a:t> </a:t>
+            </a:r>
+            <a:r>
+              <a:rPr>
+                <a:solidFill>
+                  <a:srgbClr val="008000"/>
+                </a:solidFill>
+                <a:latin typeface="Courier"/>
+              </a:rPr>
+              <a:t>range</a:t>
+            </a:r>
+            <a:r>
+              <a:rPr>
+                <a:latin typeface="Courier"/>
+              </a:rPr>
+              <a:t>(</a:t>
+            </a:r>
+            <a:r>
+              <a:rPr>
+                <a:solidFill>
+                  <a:srgbClr val="40A070"/>
+                </a:solidFill>
+                <a:latin typeface="Courier"/>
+              </a:rPr>
+              <a:t>1</a:t>
+            </a:r>
+            <a:r>
+              <a:rPr>
+                <a:latin typeface="Courier"/>
+              </a:rPr>
+              <a:t>, </a:t>
+            </a:r>
+            <a:r>
+              <a:rPr>
+                <a:solidFill>
+                  <a:srgbClr val="40A070"/>
+                </a:solidFill>
+                <a:latin typeface="Courier"/>
+              </a:rPr>
+              <a:t>16</a:t>
+            </a:r>
+            <a:r>
+              <a:rPr>
+                <a:latin typeface="Courier"/>
+              </a:rPr>
+              <a:t>):</a:t>
+            </a:r>
+            <a:br/>
+            <a:r>
+              <a:rPr>
+                <a:latin typeface="Courier"/>
+              </a:rPr>
+              <a:t>    t </a:t>
+            </a:r>
+            <a:r>
+              <a:rPr>
+                <a:solidFill>
+                  <a:srgbClr val="666666"/>
+                </a:solidFill>
+                <a:latin typeface="Courier"/>
+              </a:rPr>
+              <a:t>=</a:t>
+            </a:r>
+            <a:r>
+              <a:rPr>
+                <a:latin typeface="Courier"/>
+              </a:rPr>
+              <a:t> DecisionTreeRegressor(max_depth</a:t>
+            </a:r>
+            <a:r>
+              <a:rPr>
+                <a:solidFill>
+                  <a:srgbClr val="666666"/>
+                </a:solidFill>
+                <a:latin typeface="Courier"/>
+              </a:rPr>
+              <a:t>=</a:t>
+            </a:r>
+            <a:r>
+              <a:rPr>
+                <a:latin typeface="Courier"/>
+              </a:rPr>
+              <a:t>depth, random_state</a:t>
+            </a:r>
+            <a:r>
+              <a:rPr>
+                <a:solidFill>
+                  <a:srgbClr val="666666"/>
+                </a:solidFill>
+                <a:latin typeface="Courier"/>
+              </a:rPr>
+              <a:t>=</a:t>
+            </a:r>
+            <a:r>
+              <a:rPr>
+                <a:solidFill>
+                  <a:srgbClr val="40A070"/>
+                </a:solidFill>
+                <a:latin typeface="Courier"/>
+              </a:rPr>
+              <a:t>60033</a:t>
+            </a:r>
+            <a:r>
+              <a:rPr>
+                <a:latin typeface="Courier"/>
+              </a:rPr>
+              <a:t>)</a:t>
+            </a:r>
+            <a:br/>
+            <a:r>
+              <a:rPr>
+                <a:latin typeface="Courier"/>
+              </a:rPr>
+              <a:t>    cv </a:t>
+            </a:r>
+            <a:r>
+              <a:rPr>
+                <a:solidFill>
+                  <a:srgbClr val="666666"/>
+                </a:solidFill>
+                <a:latin typeface="Courier"/>
+              </a:rPr>
+              <a:t>=</a:t>
+            </a:r>
+            <a:r>
+              <a:rPr>
+                <a:latin typeface="Courier"/>
+              </a:rPr>
+              <a:t> </a:t>
+            </a:r>
+            <a:r>
+              <a:rPr>
+                <a:solidFill>
+                  <a:srgbClr val="666666"/>
+                </a:solidFill>
+                <a:latin typeface="Courier"/>
+              </a:rPr>
+              <a:t>-</a:t>
+            </a:r>
+            <a:r>
+              <a:rPr>
+                <a:latin typeface="Courier"/>
+              </a:rPr>
+              <a:t>cross_val_score(t, X, y, cv</a:t>
+            </a:r>
+            <a:r>
+              <a:rPr>
+                <a:solidFill>
+                  <a:srgbClr val="666666"/>
+                </a:solidFill>
+                <a:latin typeface="Courier"/>
+              </a:rPr>
+              <a:t>=</a:t>
+            </a:r>
+            <a:r>
+              <a:rPr>
+                <a:latin typeface="Courier"/>
+              </a:rPr>
+              <a:t>GroupKFold(</a:t>
+            </a:r>
+            <a:r>
+              <a:rPr>
+                <a:solidFill>
+                  <a:srgbClr val="40A070"/>
+                </a:solidFill>
+                <a:latin typeface="Courier"/>
+              </a:rPr>
+              <a:t>5</a:t>
+            </a:r>
+            <a:r>
+              <a:rPr>
+                <a:latin typeface="Courier"/>
+              </a:rPr>
+              <a:t>), groups</a:t>
+            </a:r>
+            <a:r>
+              <a:rPr>
+                <a:solidFill>
+                  <a:srgbClr val="666666"/>
+                </a:solidFill>
+                <a:latin typeface="Courier"/>
+              </a:rPr>
+              <a:t>=</a:t>
+            </a:r>
+            <a:r>
+              <a:rPr>
+                <a:latin typeface="Courier"/>
+              </a:rPr>
+              <a:t>d[</a:t>
+            </a:r>
+            <a:r>
+              <a:rPr>
+                <a:solidFill>
+                  <a:srgbClr val="4070A0"/>
+                </a:solidFill>
+                <a:latin typeface="Courier"/>
+              </a:rPr>
+              <a:t>"geo"</a:t>
+            </a:r>
+            <a:r>
+              <a:rPr>
+                <a:latin typeface="Courier"/>
+              </a:rPr>
+              <a:t>],</a:t>
+            </a:r>
+            <a:br/>
+            <a:r>
+              <a:rPr>
+                <a:latin typeface="Courier"/>
+              </a:rPr>
+              <a:t>                          scoring</a:t>
+            </a:r>
+            <a:r>
+              <a:rPr>
+                <a:solidFill>
+                  <a:srgbClr val="666666"/>
+                </a:solidFill>
+                <a:latin typeface="Courier"/>
+              </a:rPr>
+              <a:t>=</a:t>
+            </a:r>
+            <a:r>
+              <a:rPr>
+                <a:solidFill>
+                  <a:srgbClr val="4070A0"/>
+                </a:solidFill>
+                <a:latin typeface="Courier"/>
+              </a:rPr>
+              <a:t>"neg_root_mean_squared_error"</a:t>
+            </a:r>
+            <a:r>
+              <a:rPr>
+                <a:latin typeface="Courier"/>
+              </a:rPr>
+              <a:t>).mean()</a:t>
+            </a:r>
+            <a:br/>
+            <a:r>
+              <a:rPr>
+                <a:latin typeface="Courier"/>
+              </a:rPr>
+              <a:t>    t.fit(X, y)</a:t>
+            </a:r>
+            <a:br/>
+            <a:r>
+              <a:rPr>
+                <a:latin typeface="Courier"/>
+              </a:rPr>
+              <a:t>    train </a:t>
+            </a:r>
+            <a:r>
+              <a:rPr>
+                <a:solidFill>
+                  <a:srgbClr val="666666"/>
+                </a:solidFill>
+                <a:latin typeface="Courier"/>
+              </a:rPr>
+              <a:t>=</a:t>
+            </a:r>
+            <a:r>
+              <a:rPr>
+                <a:latin typeface="Courier"/>
+              </a:rPr>
+              <a:t> np.sqrt(((y </a:t>
+            </a:r>
+            <a:r>
+              <a:rPr>
+                <a:solidFill>
+                  <a:srgbClr val="666666"/>
+                </a:solidFill>
+                <a:latin typeface="Courier"/>
+              </a:rPr>
+              <a:t>-</a:t>
+            </a:r>
+            <a:r>
+              <a:rPr>
+                <a:latin typeface="Courier"/>
+              </a:rPr>
+              <a:t> t.predict(X)) </a:t>
+            </a:r>
+            <a:r>
+              <a:rPr>
+                <a:solidFill>
+                  <a:srgbClr val="666666"/>
+                </a:solidFill>
+                <a:latin typeface="Courier"/>
+              </a:rPr>
+              <a:t>**</a:t>
+            </a:r>
+            <a:r>
+              <a:rPr>
+                <a:latin typeface="Courier"/>
+              </a:rPr>
+              <a:t> </a:t>
+            </a:r>
+            <a:r>
+              <a:rPr>
+                <a:solidFill>
+                  <a:srgbClr val="40A070"/>
+                </a:solidFill>
+                <a:latin typeface="Courier"/>
+              </a:rPr>
+              <a:t>2</a:t>
+            </a:r>
+            <a:r>
+              <a:rPr>
+                <a:latin typeface="Courier"/>
+              </a:rPr>
+              <a:t>).mean())</a:t>
+            </a:r>
+            <a:br/>
+            <a:r>
+              <a:rPr>
+                <a:latin typeface="Courier"/>
+              </a:rPr>
+              <a:t>    rows.append((depth, train, cv))</a:t>
+            </a:r>
+          </a:p>
+          <a:p>
+            <a:pPr lvl="0" indent="0" marL="0">
+              <a:buNone/>
+            </a:pPr>
+            <a:r>
+              <a:rPr/>
+              <a:t>Plot both curves against depth.</a:t>
+            </a:r>
+          </a:p>
+          <a:p>
+            <a:pPr lvl="0" indent="0" marL="0">
+              <a:buNone/>
+            </a:pPr>
+            <a:r>
+              <a:rPr/>
+              <a:t>Training error falls monotonically. Validation error falls, then turns. The turn is the bias–variance tradeoff, and it is the only one of the two curves that tells you anything.</a:t>
+            </a:r>
+          </a:p>
+        </p:txBody>
+      </p:sp>
+    </p:spTree>
+  </p:cSld>
+</p:sld>
+</file>
+
+<file path=ppt/slides/slide2.xml><?xml version="1.0" encoding="utf-8"?>
+<p:sld xmlns:a="http://schemas.openxmlformats.org/drawingml/2006/main" xmlns:r="http://schemas.openxmlformats.org/officeDocument/2006/relationships" xmlns:p="http://schemas.openxmlformats.org/presentationml/2006/main">
+  <p:cSld>
+    <p:spTree>
+      <p:nvGrpSpPr>
+        <p:cNvPr id="1" name=""/>
+        <p:cNvGrpSpPr/>
+        <p:nvPr/>
+      </p:nvGrpSpPr>
+      <p:grpSpPr>
+        <a:xfrm>
+          <a:off x="0" y="0"/>
+          <a:ext cx="0" cy="0"/>
+          <a:chOff x="0" y="0"/>
+          <a:chExt cx="0" cy="0"/>
+        </a:xfrm>
+      </p:grpSpPr>
+      <p:sp>
+        <p:nvSpPr>
+          <p:cNvPr id="2" name="Title 1"/>
+          <p:cNvSpPr>
+            <a:spLocks noGrp="1"/>
+          </p:cNvSpPr>
+          <p:nvPr>
+            <p:ph type="title"/>
+          </p:nvPr>
+        </p:nvSpPr>
+        <p:spPr>
+          <a:xfrm>
+            <a:off x="722313" y="3305176"/>
+            <a:ext cx="7772400" cy="1021556"/>
+          </a:xfrm>
+        </p:spPr>
+        <p:txBody>
+          <a:bodyPr/>
+          <a:lstStyle/>
+          <a:p>
+            <a:pPr lvl="0" indent="0" marL="0">
+              <a:buNone/>
+            </a:pPr>
+            <a:r>
+              <a:rPr/>
+              <a:t>Where we are</a:t>
+            </a:r>
+          </a:p>
+        </p:txBody>
+      </p:sp>
+    </p:spTree>
+  </p:cSld>
+</p:sld>
+</file>
+
+<file path=ppt/slides/slide20.xml><?xml version="1.0" encoding="utf-8"?>
+<p:sld xmlns:a="http://schemas.openxmlformats.org/drawingml/2006/main" xmlns:r="http://schemas.openxmlformats.org/officeDocument/2006/relationships" xmlns:p="http://schemas.openxmlformats.org/presentationml/2006/main">
+  <p:cSld>
+    <p:spTree>
+      <p:nvGrpSpPr>
+        <p:cNvPr id="1" name=""/>
+        <p:cNvGrpSpPr/>
+        <p:nvPr/>
+      </p:nvGrpSpPr>
+      <p:grpSpPr>
+        <a:xfrm>
+          <a:off x="0" y="0"/>
+          <a:ext cx="0" cy="0"/>
+          <a:chOff x="0" y="0"/>
+          <a:chExt cx="0" cy="0"/>
+        </a:xfrm>
+      </p:grpSpPr>
+      <p:sp>
+        <p:nvSpPr>
+          <p:cNvPr id="2" name="Title 1"/>
+          <p:cNvSpPr>
+            <a:spLocks noGrp="1"/>
+          </p:cNvSpPr>
+          <p:nvPr>
+            <p:ph type="title"/>
+          </p:nvPr>
+        </p:nvSpPr>
+        <p:spPr/>
+        <p:txBody>
+          <a:bodyPr/>
+          <a:lstStyle/>
+          <a:p>
+            <a:pPr lvl="0" indent="0" marL="0">
+              <a:buNone/>
+            </a:pPr>
+            <a:r>
+              <a:rPr/>
+              <a:t>Leakage, the practical form</a:t>
+            </a:r>
+          </a:p>
+        </p:txBody>
+      </p:sp>
+      <p:sp>
+        <p:nvSpPr>
+          <p:cNvPr id="3" name="Content Placeholder 2"/>
+          <p:cNvSpPr>
+            <a:spLocks noGrp="1"/>
+          </p:cNvSpPr>
+          <p:nvPr>
+            <p:ph idx="1"/>
+          </p:nvPr>
+        </p:nvSpPr>
+        <p:spPr/>
+        <p:txBody>
+          <a:bodyPr/>
+          <a:lstStyle/>
+          <a:p>
+            <a:pPr lvl="0" indent="0">
+              <a:buNone/>
+            </a:pPr>
+            <a:r>
+              <a:rPr b="1">
+                <a:solidFill>
+                  <a:srgbClr val="008000"/>
+                </a:solidFill>
+                <a:latin typeface="Courier"/>
+              </a:rPr>
+              <a:t>from</a:t>
+            </a:r>
+            <a:r>
+              <a:rPr>
+                <a:latin typeface="Courier"/>
+              </a:rPr>
+              <a:t> sklearn.pipeline </a:t>
+            </a:r>
+            <a:r>
+              <a:rPr b="1">
+                <a:solidFill>
+                  <a:srgbClr val="008000"/>
+                </a:solidFill>
+                <a:latin typeface="Courier"/>
+              </a:rPr>
+              <a:t>import</a:t>
+            </a:r>
+            <a:r>
+              <a:rPr>
+                <a:latin typeface="Courier"/>
+              </a:rPr>
+              <a:t> make_pipeline</a:t>
+            </a:r>
+            <a:br/>
+            <a:r>
+              <a:rPr b="1">
+                <a:solidFill>
+                  <a:srgbClr val="008000"/>
+                </a:solidFill>
+                <a:latin typeface="Courier"/>
+              </a:rPr>
+              <a:t>from</a:t>
+            </a:r>
+            <a:r>
+              <a:rPr>
+                <a:latin typeface="Courier"/>
+              </a:rPr>
+              <a:t> sklearn.preprocessing </a:t>
+            </a:r>
+            <a:r>
+              <a:rPr b="1">
+                <a:solidFill>
+                  <a:srgbClr val="008000"/>
+                </a:solidFill>
+                <a:latin typeface="Courier"/>
+              </a:rPr>
+              <a:t>import</a:t>
+            </a:r>
+            <a:r>
+              <a:rPr>
+                <a:latin typeface="Courier"/>
+              </a:rPr>
+              <a:t> StandardScaler</a:t>
+            </a:r>
+            <a:br/>
+            <a:br/>
+            <a:r>
+              <a:rPr i="1">
+                <a:solidFill>
+                  <a:srgbClr val="60A0B0"/>
+                </a:solidFill>
+                <a:latin typeface="Courier"/>
+              </a:rPr>
+              <a:t>#  WRONG — the scaler has already seen the test fold</a:t>
+            </a:r>
+            <a:br/>
+            <a:r>
+              <a:rPr>
+                <a:latin typeface="Courier"/>
+              </a:rPr>
+              <a:t>X_scaled </a:t>
+            </a:r>
+            <a:r>
+              <a:rPr>
+                <a:solidFill>
+                  <a:srgbClr val="666666"/>
+                </a:solidFill>
+                <a:latin typeface="Courier"/>
+              </a:rPr>
+              <a:t>=</a:t>
+            </a:r>
+            <a:r>
+              <a:rPr>
+                <a:latin typeface="Courier"/>
+              </a:rPr>
+              <a:t> StandardScaler().fit_transform(X)</a:t>
+            </a:r>
+            <a:br/>
+            <a:r>
+              <a:rPr>
+                <a:latin typeface="Courier"/>
+              </a:rPr>
+              <a:t>cross_val_score(m, X_scaled, y, cv</a:t>
+            </a:r>
+            <a:r>
+              <a:rPr>
+                <a:solidFill>
+                  <a:srgbClr val="666666"/>
+                </a:solidFill>
+                <a:latin typeface="Courier"/>
+              </a:rPr>
+              <a:t>=</a:t>
+            </a:r>
+            <a:r>
+              <a:rPr>
+                <a:latin typeface="Courier"/>
+              </a:rPr>
+              <a:t>GroupKFold(</a:t>
+            </a:r>
+            <a:r>
+              <a:rPr>
+                <a:solidFill>
+                  <a:srgbClr val="40A070"/>
+                </a:solidFill>
+                <a:latin typeface="Courier"/>
+              </a:rPr>
+              <a:t>5</a:t>
+            </a:r>
+            <a:r>
+              <a:rPr>
+                <a:latin typeface="Courier"/>
+              </a:rPr>
+              <a:t>), groups</a:t>
+            </a:r>
+            <a:r>
+              <a:rPr>
+                <a:solidFill>
+                  <a:srgbClr val="666666"/>
+                </a:solidFill>
+                <a:latin typeface="Courier"/>
+              </a:rPr>
+              <a:t>=</a:t>
+            </a:r>
+            <a:r>
+              <a:rPr>
+                <a:latin typeface="Courier"/>
+              </a:rPr>
+              <a:t>d[</a:t>
+            </a:r>
+            <a:r>
+              <a:rPr>
+                <a:solidFill>
+                  <a:srgbClr val="4070A0"/>
+                </a:solidFill>
+                <a:latin typeface="Courier"/>
+              </a:rPr>
+              <a:t>"geo"</a:t>
+            </a:r>
+            <a:r>
+              <a:rPr>
+                <a:latin typeface="Courier"/>
+              </a:rPr>
+              <a:t>])</a:t>
+            </a:r>
+            <a:br/>
+            <a:br/>
+            <a:r>
+              <a:rPr i="1">
+                <a:solidFill>
+                  <a:srgbClr val="60A0B0"/>
+                </a:solidFill>
+                <a:latin typeface="Courier"/>
+              </a:rPr>
+              <a:t>#  RIGHT — every preprocessing step re-fits inside each fold</a:t>
+            </a:r>
+            <a:br/>
+            <a:r>
+              <a:rPr>
+                <a:latin typeface="Courier"/>
+              </a:rPr>
+              <a:t>pipe </a:t>
+            </a:r>
+            <a:r>
+              <a:rPr>
+                <a:solidFill>
+                  <a:srgbClr val="666666"/>
+                </a:solidFill>
+                <a:latin typeface="Courier"/>
+              </a:rPr>
+              <a:t>=</a:t>
+            </a:r>
+            <a:r>
+              <a:rPr>
+                <a:latin typeface="Courier"/>
+              </a:rPr>
+              <a:t> make_pipeline(StandardScaler(), m)</a:t>
+            </a:r>
+            <a:br/>
+            <a:r>
+              <a:rPr>
+                <a:latin typeface="Courier"/>
+              </a:rPr>
+              <a:t>cross_val_score(pipe, X, y, cv</a:t>
+            </a:r>
+            <a:r>
+              <a:rPr>
+                <a:solidFill>
+                  <a:srgbClr val="666666"/>
+                </a:solidFill>
+                <a:latin typeface="Courier"/>
+              </a:rPr>
+              <a:t>=</a:t>
+            </a:r>
+            <a:r>
+              <a:rPr>
+                <a:latin typeface="Courier"/>
+              </a:rPr>
+              <a:t>GroupKFold(</a:t>
+            </a:r>
+            <a:r>
+              <a:rPr>
+                <a:solidFill>
+                  <a:srgbClr val="40A070"/>
+                </a:solidFill>
+                <a:latin typeface="Courier"/>
+              </a:rPr>
+              <a:t>5</a:t>
+            </a:r>
+            <a:r>
+              <a:rPr>
+                <a:latin typeface="Courier"/>
+              </a:rPr>
+              <a:t>), groups</a:t>
+            </a:r>
+            <a:r>
+              <a:rPr>
+                <a:solidFill>
+                  <a:srgbClr val="666666"/>
+                </a:solidFill>
+                <a:latin typeface="Courier"/>
+              </a:rPr>
+              <a:t>=</a:t>
+            </a:r>
+            <a:r>
+              <a:rPr>
+                <a:latin typeface="Courier"/>
+              </a:rPr>
+              <a:t>d[</a:t>
+            </a:r>
+            <a:r>
+              <a:rPr>
+                <a:solidFill>
+                  <a:srgbClr val="4070A0"/>
+                </a:solidFill>
+                <a:latin typeface="Courier"/>
+              </a:rPr>
+              <a:t>"geo"</a:t>
+            </a:r>
+            <a:r>
+              <a:rPr>
+                <a:latin typeface="Courier"/>
+              </a:rPr>
+              <a:t>])</a:t>
+            </a:r>
+          </a:p>
+          <a:p>
+            <a:pPr lvl="0" indent="0" marL="0">
+              <a:buNone/>
+            </a:pPr>
+            <a:r>
+              <a:rPr/>
+              <a:t>Any step that </a:t>
+            </a:r>
+            <a:r>
+              <a:rPr b="1"/>
+              <a:t>learns from the data</a:t>
+            </a:r>
+            <a:r>
+              <a:rPr/>
+              <a:t> — scaling, imputation, feature selection, target encoding — must live inside the pipeline. This is the single most common error in applied machine learning, and it always flatters you.</a:t>
+            </a:r>
+          </a:p>
+        </p:txBody>
+      </p:sp>
+    </p:spTree>
+  </p:cSld>
+</p:sld>
+</file>
+
+<file path=ppt/slides/slide21.xml><?xml version="1.0" encoding="utf-8"?>
 <p:sld xmlns:a="http://schemas.openxmlformats.org/drawingml/2006/main" xmlns:r="http://schemas.openxmlformats.org/officeDocument/2006/relationships" xmlns:p="http://schemas.openxmlformats.org/presentationml/2006/main">
   <p:cSld>
     <p:spTree>
@@ -5539,10 +6307,7 @@
 </p:sld>
 </file>
 
-<file path=ppt/slides/slide17.xml><?xml version="1.0" encoding="UTF-8"?><p:sld xmlns:a="http://schemas.openxmlformats.org/drawingml/2006/main" xmlns:r="http://schemas.openxmlformats.org/officeDocument/2006/relationships" xmlns:p="http://schemas.openxmlformats.org/presentationml/2006/main"><p:cSld><p:spTree><p:nvGrpSpPr><p:cNvPr id="1" name="" /><p:cNvGrpSpPr /><p:nvPr /></p:nvGrpSpPr><p:grpSpPr><a:xfrm><a:off x="0" y="0" /><a:ext cx="0" cy="0" /><a:chOff x="0" y="0" /><a:chExt cx="0" cy="0" /></a:xfrm></p:grpSpPr><p:sp><p:nvSpPr><p:cNvPr id="2" name="Title 1" /><p:cNvSpPr><a:spLocks noGrp="1" /></p:cNvSpPr><p:nvPr><p:ph type="title" /></p:nvPr></p:nvSpPr><p:spPr /><p:txBody><a:bodyPr /><a:lstStyle /><a:p><a:pPr lvl="0" indent="0" marL="0"><a:buNone /></a:pPr><a:r><a:rPr /><a:t>Common mistakes</a:t></a:r></a:p></p:txBody></p:sp><p:graphicFrame><p:nvGraphicFramePr><p:cNvPr id="6" name="Content Placeholder 5" /><p:cNvGraphicFramePr><a:graphicFrameLocks noGrp="1" /></p:cNvGraphicFramePr><p:nvPr><p:ph idx="1" /></p:nvPr></p:nvGraphicFramePr><p:xfrm><a:off x="457200" y="1193800" /><a:ext cx="8229600" cy="3390900" /></p:xfrm><a:graphic><a:graphicData uri="http://schemas.openxmlformats.org/drawingml/2006/table"><a:tbl><a:tblPr firstRow="1" bandRow="1"><a:tableStyleId>{5C22544A-7EE6-4342-B048-85BDC9FD1C3A}</a:tableStyleId></a:tblPr><a:tblGrid><a:gridCol w="4114800" /><a:gridCol w="4114800" /></a:tblGrid><a:tr h="0"><a:tc><a:txBody><a:bodyPr /><a:lstStyle /><a:p><a:pPr lvl="0" indent="0" marL="0"><a:buNone /></a:pPr><a:r><a:rPr /><a:t>Mistake</a:t></a:r></a:p></a:txBody><a:tcPr /></a:tc><a:tc><a:txBody><a:bodyPr /><a:lstStyle /><a:p><a:pPr lvl="0" indent="0" marL="0"><a:buNone /></a:pPr><a:r><a:rPr /><a:t>Consequence</a:t></a:r></a:p></a:txBody><a:tcPr /></a:tc></a:tr><a:tr h="0"><a:tc><a:txBody><a:bodyPr /><a:lstStyle /><a:p><a:pPr lvl="0" indent="0" marL="0"><a:buNone /></a:pPr><a:r><a:rPr /><a:t>Random K-fold on a panel</a:t></a:r></a:p></a:txBody></a:tc><a:tc><a:txBody><a:bodyPr /><a:lstStyle /><a:p><a:pPr lvl="0" indent="0" marL="0"><a:buNone /></a:pPr><a:r><a:rPr /><a:t>Optimistic by a wide margin</a:t></a:r></a:p></a:txBody></a:tc></a:tr><a:tr h="0"><a:tc><a:txBody><a:bodyPr /><a:lstStyle /><a:p><a:pPr lvl="0" indent="0" marL="0"><a:buNone /></a:pPr><a:r><a:rPr /><a:t>Scaling before splitting</a:t></a:r></a:p></a:txBody></a:tc><a:tc><a:txBody><a:bodyPr /><a:lstStyle /><a:p><a:pPr lvl="0" indent="0" marL="0"><a:buNone /></a:pPr><a:r><a:rPr /><a:t>Leakage; error understated</a:t></a:r></a:p></a:txBody></a:tc></a:tr><a:tr h="0"><a:tc><a:txBody><a:bodyPr /><a:lstStyle /><a:p><a:pPr lvl="0" indent="0" marL="0"><a:buNone /></a:pPr><a:r><a:rPr /><a:t>Tuning on the test set</a:t></a:r></a:p></a:txBody></a:tc><a:tc><a:txBody><a:bodyPr /><a:lstStyle /><a:p><a:pPr lvl="0" indent="0" marL="0"><a:buNone /></a:pPr><a:r><a:rPr /><a:t>The test set is now training data</a:t></a:r></a:p></a:txBody></a:tc></a:tr><a:tr h="0"><a:tc><a:txBody><a:bodyPr /><a:lstStyle /><a:p><a:pPr lvl="0" indent="0" marL="0"><a:buNone /></a:pPr><a:r><a:rPr /><a:t>Reporting </a:t></a:r><a14:m><m:oMath xmlns:m="http://schemas.openxmlformats.org/officeDocument/2006/math"><m:sSup><m:e><m:r><m:t>R</m:t></m:r></m:e><m:sup><m:r><m:t>2</m:t></m:r></m:sup></m:sSup></m:oMath></a14:m><a:r><a:rPr /><a:t> only</a:t></a:r></a:p></a:txBody></a:tc><a:tc><a:txBody><a:bodyPr /><a:lstStyle /><a:p><a:pPr lvl="0" indent="0" marL="0"><a:buNone /></a:pPr><a:r><a:rPr /><a:t>No sense of magnitude</a:t></a:r></a:p></a:txBody></a:tc></a:tr><a:tr h="0"><a:tc><a:txBody><a:bodyPr /><a:lstStyle /><a:p><a:pPr lvl="0" indent="0" marL="0"><a:buNone /></a:pPr><a:r><a:rPr /><a:t>One split, one number</a:t></a:r></a:p></a:txBody></a:tc><a:tc><a:txBody><a:bodyPr /><a:lstStyle /><a:p><a:pPr lvl="0" indent="0" marL="0"><a:buNone /></a:pPr><a:r><a:rPr /><a:t>No sense of variability</a:t></a:r></a:p></a:txBody></a:tc></a:tr></a:tbl></a:graphicData></a:graphic></p:graphicFrame></p:spTree></p:cSld></p:sld>
-</file>
-
-<file path=ppt/slides/slide18.xml><?xml version="1.0" encoding="utf-8"?>
+<file path=ppt/slides/slide22.xml><?xml version="1.0" encoding="utf-8"?>
 <p:sld xmlns:a="http://schemas.openxmlformats.org/drawingml/2006/main" xmlns:r="http://schemas.openxmlformats.org/officeDocument/2006/relationships" xmlns:p="http://schemas.openxmlformats.org/presentationml/2006/main">
   <p:cSld>
     <p:spTree>
@@ -5559,113 +6324,162 @@
           <a:chExt cx="0" cy="0"/>
         </a:xfrm>
       </p:grpSpPr>
-      <p:sp>
-        <p:nvSpPr>
-          <p:cNvPr id="2" name="Title 1"/>
-          <p:cNvSpPr>
-            <a:spLocks noGrp="1"/>
-          </p:cNvSpPr>
-          <p:nvPr>
-            <p:ph type="title"/>
-          </p:nvPr>
-        </p:nvSpPr>
-        <p:spPr/>
-        <p:txBody>
-          <a:bodyPr/>
-          <a:lstStyle/>
-          <a:p>
-            <a:pPr lvl="0" indent="0" marL="0">
-              <a:buNone/>
-            </a:pPr>
-            <a:r>
-              <a:rPr/>
-              <a:t>In the lab</a:t>
-            </a:r>
-          </a:p>
-        </p:txBody>
-      </p:sp>
-      <p:sp>
-        <p:nvSpPr>
-          <p:cNvPr id="3" name="Content Placeholder 2"/>
-          <p:cNvSpPr>
-            <a:spLocks noGrp="1"/>
-          </p:cNvSpPr>
-          <p:nvPr>
-            <p:ph idx="1"/>
-          </p:nvPr>
-        </p:nvSpPr>
-        <p:spPr/>
-        <p:txBody>
-          <a:bodyPr/>
-          <a:lstStyle/>
-          <a:p>
-            <a:pPr lvl="0" indent="0" marL="0">
-              <a:buNone/>
-            </a:pPr>
-            <a:r>
-              <a:rPr/>
-              <a:t>Work through </a:t>
-            </a:r>
-            <a:r>
-              <a:rPr>
-                <a:hlinkClick r:id="rId2"/>
-                <a:latin typeface="Courier"/>
-              </a:rPr>
-              <a:t>02-lab/README.md</a:t>
-            </a:r>
-            <a:r>
-              <a:rPr/>
-              <a:t>.</a:t>
-            </a:r>
-          </a:p>
-          <a:p>
-            <a:pPr lvl="0" indent="-342900" marL="342900">
-              <a:buAutoNum type="arabicPeriod"/>
-            </a:pPr>
-            <a:r>
-              <a:rPr/>
-              <a:t>Reproduce the three CV schemes and tabulate the errors</a:t>
-            </a:r>
-          </a:p>
-          <a:p>
-            <a:pPr lvl="0" indent="-342900" marL="342900">
-              <a:buAutoNum type="arabicPeriod"/>
-            </a:pPr>
-            <a:r>
-              <a:rPr/>
-              <a:t>Explain, in writing, why they differ </a:t>
-            </a:r>
-            <a:r>
-              <a:rPr b="1"/>
-              <a:t>in this direction</a:t>
-            </a:r>
-          </a:p>
-          <a:p>
-            <a:pPr lvl="0" indent="-342900" marL="342900">
-              <a:buAutoNum type="arabicPeriod"/>
-            </a:pPr>
-            <a:r>
-              <a:rPr/>
-              <a:t>Draw the depth curve and mark where variance takes over</a:t>
-            </a:r>
-          </a:p>
-          <a:p>
-            <a:pPr lvl="0" indent="-342900" marL="342900">
-              <a:buAutoNum type="arabicPeriod"/>
-            </a:pPr>
-            <a:r>
-              <a:rPr/>
-              <a:t>Three sentences, naming your split and what it entitles you to claim</a:t>
-            </a:r>
-          </a:p>
-        </p:txBody>
-      </p:sp>
+      <mc:AlternateContent xmlns:mc="http://schemas.openxmlformats.org/markup-compatibility/2006">
+        <mc:Choice xmlns:a14="http://schemas.microsoft.com/office/drawing/2010/main" Requires="a14">
+          <p:sp>
+            <p:nvSpPr>
+              <p:cNvPr id="2" name="Title 1"/>
+              <p:cNvSpPr>
+                <a:spLocks noGrp="1"/>
+              </p:cNvSpPr>
+              <p:nvPr>
+                <p:ph type="title"/>
+              </p:nvPr>
+            </p:nvSpPr>
+            <p:spPr/>
+            <p:txBody>
+              <a:bodyPr/>
+              <a:lstStyle/>
+              <a:p>
+                <a:pPr lvl="0" indent="0" marL="0">
+                  <a:buNone/>
+                </a:pPr>
+                <a:r>
+                  <a:rPr/>
+                  <a:t>Choosing </a:t>
+                </a:r>
+                <a14:m>
+                  <m:oMath xmlns:m="http://schemas.openxmlformats.org/officeDocument/2006/math">
+                    <m:r>
+                      <m:t>K</m:t>
+                    </m:r>
+                  </m:oMath>
+                </a14:m>
+              </a:p>
+            </p:txBody>
+          </p:sp>
+        </mc:Choice>
+      </mc:AlternateContent>
+      <mc:AlternateContent xmlns:mc="http://schemas.openxmlformats.org/markup-compatibility/2006">
+        <mc:Choice xmlns:a14="http://schemas.microsoft.com/office/drawing/2010/main" Requires="a14">
+          <p:sp>
+            <p:nvSpPr>
+              <p:cNvPr id="3" name="Content Placeholder 2"/>
+              <p:cNvSpPr>
+                <a:spLocks noGrp="1"/>
+              </p:cNvSpPr>
+              <p:nvPr>
+                <p:ph idx="1"/>
+              </p:nvPr>
+            </p:nvSpPr>
+            <p:spPr/>
+            <p:txBody>
+              <a:bodyPr/>
+              <a:lstStyle/>
+              <a:p>
+                <a:pPr lvl="0"/>
+                <a14:m>
+                  <m:oMath xmlns:m="http://schemas.openxmlformats.org/officeDocument/2006/math">
+                    <m:r>
+                      <m:t>K</m:t>
+                    </m:r>
+                    <m:r>
+                      <m:rPr>
+                        <m:sty m:val="p"/>
+                      </m:rPr>
+                      <m:t>=</m:t>
+                    </m:r>
+                    <m:r>
+                      <m:t>5</m:t>
+                    </m:r>
+                  </m:oMath>
+                </a14:m>
+                <a:r>
+                  <a:rPr b="1"/>
+                  <a:t> or </a:t>
+                </a:r>
+                <a14:m>
+                  <m:oMath xmlns:m="http://schemas.openxmlformats.org/officeDocument/2006/math">
+                    <m:r>
+                      <m:t>10</m:t>
+                    </m:r>
+                  </m:oMath>
+                </a14:m>
+                <a:r>
+                  <a:rPr/>
+                  <a:t> — the usual choice, and a reasonable one</a:t>
+                </a:r>
+              </a:p>
+              <a:p>
+                <a:pPr lvl="0"/>
+                <a:r>
+                  <a:rPr b="1"/>
+                  <a:t>Small </a:t>
+                </a:r>
+                <a14:m>
+                  <m:oMath xmlns:m="http://schemas.openxmlformats.org/officeDocument/2006/math">
+                    <m:r>
+                      <m:t>K</m:t>
+                    </m:r>
+                  </m:oMath>
+                </a14:m>
+                <a:r>
+                  <a:rPr/>
+                  <a:t> — more bias (each model sees less data), less variance</a:t>
+                </a:r>
+              </a:p>
+              <a:p>
+                <a:pPr lvl="0"/>
+                <a14:m>
+                  <m:oMath xmlns:m="http://schemas.openxmlformats.org/officeDocument/2006/math">
+                    <m:r>
+                      <m:t>K</m:t>
+                    </m:r>
+                    <m:r>
+                      <m:rPr>
+                        <m:sty m:val="p"/>
+                      </m:rPr>
+                      <m:t>=</m:t>
+                    </m:r>
+                    <m:r>
+                      <m:t>n</m:t>
+                    </m:r>
+                  </m:oMath>
+                </a14:m>
+                <a:r>
+                  <a:rPr/>
+                  <a:t> (leave-one-out) — nearly unbiased, high variance, expensive</a:t>
+                </a:r>
+              </a:p>
+              <a:p>
+                <a:pPr lvl="0" indent="0" marL="0">
+                  <a:buNone/>
+                </a:pPr>
+                <a:r>
+                  <a:rPr/>
+                  <a:t>With 30 countries, </a:t>
+                </a:r>
+                <a:r>
+                  <a:rPr>
+                    <a:latin typeface="Courier"/>
+                  </a:rPr>
+                  <a:t>GroupKFold(5)</a:t>
+                </a:r>
+                <a:r>
+                  <a:rPr/>
+                  <a:t> leaves 6 countries out per fold. Fewer folds would leave too few countries to train on; more would make each estimate noisy.</a:t>
+                </a:r>
+              </a:p>
+            </p:txBody>
+          </p:sp>
+        </mc:Choice>
+      </mc:AlternateContent>
     </p:spTree>
   </p:cSld>
 </p:sld>
 </file>
 
-<file path=ppt/slides/slide2.xml><?xml version="1.0" encoding="utf-8"?>
+<file path=ppt/slides/slide23.xml><?xml version="1.0" encoding="utf-8"?>
 <p:sld xmlns:a="http://schemas.openxmlformats.org/drawingml/2006/main" xmlns:r="http://schemas.openxmlformats.org/officeDocument/2006/relationships" xmlns:p="http://schemas.openxmlformats.org/presentationml/2006/main">
   <p:cSld>
     <p:spTree>
@@ -5692,12 +6506,7 @@
             <p:ph type="title"/>
           </p:nvPr>
         </p:nvSpPr>
-        <p:spPr>
-          <a:xfrm>
-            <a:off x="722313" y="3305176"/>
-            <a:ext cx="7772400" cy="1021556"/>
-          </a:xfrm>
-        </p:spPr>
+        <p:spPr/>
         <p:txBody>
           <a:bodyPr/>
           <a:lstStyle/>
@@ -5707,7 +6516,286 @@
             </a:pPr>
             <a:r>
               <a:rPr/>
-              <a:t>The question</a:t>
+              <a:t>Nested CV, when you tune</a:t>
+            </a:r>
+          </a:p>
+        </p:txBody>
+      </p:sp>
+      <p:sp>
+        <p:nvSpPr>
+          <p:cNvPr id="3" name="Content Placeholder 2"/>
+          <p:cNvSpPr>
+            <a:spLocks noGrp="1"/>
+          </p:cNvSpPr>
+          <p:nvPr>
+            <p:ph idx="1"/>
+          </p:nvPr>
+        </p:nvSpPr>
+        <p:spPr/>
+        <p:txBody>
+          <a:bodyPr/>
+          <a:lstStyle/>
+          <a:p>
+            <a:pPr lvl="0" indent="0" marL="0">
+              <a:buNone/>
+            </a:pPr>
+            <a:r>
+              <a:rPr/>
+              <a:t>If you use CV to </a:t>
+            </a:r>
+            <a:r>
+              <a:rPr b="1"/>
+              <a:t>choose</a:t>
+            </a:r>
+            <a:r>
+              <a:rPr/>
+              <a:t> a hyperparameter, that CV error is no longer an honest estimate of performance — you selected on it.</a:t>
+            </a:r>
+          </a:p>
+          <a:p>
+            <a:pPr lvl="0"/>
+            <a:r>
+              <a:rPr b="1"/>
+              <a:t>Inner</a:t>
+            </a:r>
+            <a:r>
+              <a:rPr/>
+              <a:t> loop chooses the hyperparameter</a:t>
+            </a:r>
+          </a:p>
+          <a:p>
+            <a:pPr lvl="0"/>
+            <a:r>
+              <a:rPr b="1"/>
+              <a:t>Outer</a:t>
+            </a:r>
+            <a:r>
+              <a:rPr/>
+              <a:t> loop estimates performance</a:t>
+            </a:r>
+          </a:p>
+          <a:p>
+            <a:pPr lvl="0" indent="0" marL="0">
+              <a:buNone/>
+            </a:pPr>
+            <a:r>
+              <a:rPr/>
+              <a:t>Reporting the best inner-loop score as your result is the same error as reporting training error, one level up. It is extremely common.</a:t>
+            </a:r>
+          </a:p>
+        </p:txBody>
+      </p:sp>
+    </p:spTree>
+  </p:cSld>
+</p:sld>
+</file>
+
+<file path=ppt/slides/slide24.xml><?xml version="1.0" encoding="utf-8"?>
+<p:sld xmlns:a="http://schemas.openxmlformats.org/drawingml/2006/main" xmlns:r="http://schemas.openxmlformats.org/officeDocument/2006/relationships" xmlns:p="http://schemas.openxmlformats.org/presentationml/2006/main">
+  <p:cSld>
+    <p:spTree>
+      <p:nvGrpSpPr>
+        <p:cNvPr id="1" name=""/>
+        <p:cNvGrpSpPr/>
+        <p:nvPr/>
+      </p:nvGrpSpPr>
+      <p:grpSpPr>
+        <a:xfrm>
+          <a:off x="0" y="0"/>
+          <a:ext cx="0" cy="0"/>
+          <a:chOff x="0" y="0"/>
+          <a:chExt cx="0" cy="0"/>
+        </a:xfrm>
+      </p:grpSpPr>
+      <p:sp>
+        <p:nvSpPr>
+          <p:cNvPr id="2" name="Title 1"/>
+          <p:cNvSpPr>
+            <a:spLocks noGrp="1"/>
+          </p:cNvSpPr>
+          <p:nvPr>
+            <p:ph type="title"/>
+          </p:nvPr>
+        </p:nvSpPr>
+        <p:spPr/>
+        <p:txBody>
+          <a:bodyPr/>
+          <a:lstStyle/>
+          <a:p>
+            <a:pPr lvl="0" indent="0" marL="0">
+              <a:buNone/>
+            </a:pPr>
+            <a:r>
+              <a:rPr/>
+              <a:t>The one-standard-error rule</a:t>
+            </a:r>
+          </a:p>
+        </p:txBody>
+      </p:sp>
+      <p:sp>
+        <p:nvSpPr>
+          <p:cNvPr id="3" name="Content Placeholder 2"/>
+          <p:cNvSpPr>
+            <a:spLocks noGrp="1"/>
+          </p:cNvSpPr>
+          <p:nvPr>
+            <p:ph idx="1"/>
+          </p:nvPr>
+        </p:nvSpPr>
+        <p:spPr/>
+        <p:txBody>
+          <a:bodyPr/>
+          <a:lstStyle/>
+          <a:p>
+            <a:pPr lvl="0" indent="0" marL="0">
+              <a:buNone/>
+            </a:pPr>
+            <a:r>
+              <a:rPr/>
+              <a:t>Among models within one standard error of the best CV score, take the </a:t>
+            </a:r>
+            <a:r>
+              <a:rPr b="1"/>
+              <a:t>simplest</a:t>
+            </a:r>
+            <a:r>
+              <a:rPr/>
+              <a:t>.</a:t>
+            </a:r>
+          </a:p>
+          <a:p>
+            <a:pPr lvl="0" indent="0" marL="0">
+              <a:buNone/>
+            </a:pPr>
+            <a:r>
+              <a:rPr/>
+              <a:t>The CV curve is estimated with noise. The apparent minimum is partly luck, and the simpler model at the same score will usually generalise better.</a:t>
+            </a:r>
+          </a:p>
+        </p:txBody>
+      </p:sp>
+    </p:spTree>
+  </p:cSld>
+</p:sld>
+</file>
+
+<file path=ppt/slides/slide25.xml><?xml version="1.0" encoding="UTF-8"?><p:sld xmlns:a="http://schemas.openxmlformats.org/drawingml/2006/main" xmlns:r="http://schemas.openxmlformats.org/officeDocument/2006/relationships" xmlns:p="http://schemas.openxmlformats.org/presentationml/2006/main"><p:cSld><p:spTree><p:nvGrpSpPr><p:cNvPr id="1" name="" /><p:cNvGrpSpPr /><p:nvPr /></p:nvGrpSpPr><p:grpSpPr><a:xfrm><a:off x="0" y="0" /><a:ext cx="0" cy="0" /><a:chOff x="0" y="0" /><a:chExt cx="0" cy="0" /></a:xfrm></p:grpSpPr><p:sp><p:nvSpPr><p:cNvPr id="2" name="Title 1" /><p:cNvSpPr><a:spLocks noGrp="1" /></p:cNvSpPr><p:nvPr><p:ph type="title" /></p:nvPr></p:nvSpPr><p:spPr /><p:txBody><a:bodyPr /><a:lstStyle /><a:p><a:pPr lvl="0" indent="0" marL="0"><a:buNone /></a:pPr><a:r><a:rPr /><a:t>Common mistakes</a:t></a:r></a:p></p:txBody></p:sp><p:graphicFrame><p:nvGraphicFramePr><p:cNvPr id="6" name="Content Placeholder 5" /><p:cNvGraphicFramePr><a:graphicFrameLocks noGrp="1" /></p:cNvGraphicFramePr><p:nvPr><p:ph idx="1" /></p:nvPr></p:nvGraphicFramePr><p:xfrm><a:off x="457200" y="1193800" /><a:ext cx="8229600" cy="3390900" /></p:xfrm><a:graphic><a:graphicData uri="http://schemas.openxmlformats.org/drawingml/2006/table"><a:tbl><a:tblPr firstRow="1" bandRow="1"><a:tableStyleId>{5C22544A-7EE6-4342-B048-85BDC9FD1C3A}</a:tableStyleId></a:tblPr><a:tblGrid><a:gridCol w="4114800" /><a:gridCol w="4114800" /></a:tblGrid><a:tr h="0"><a:tc><a:txBody><a:bodyPr /><a:lstStyle /><a:p><a:pPr lvl="0" indent="0" marL="0"><a:buNone /></a:pPr><a:r><a:rPr /><a:t>Mistake</a:t></a:r></a:p></a:txBody><a:tcPr /></a:tc><a:tc><a:txBody><a:bodyPr /><a:lstStyle /><a:p><a:pPr lvl="0" indent="0" marL="0"><a:buNone /></a:pPr><a:r><a:rPr /><a:t>Consequence</a:t></a:r></a:p></a:txBody><a:tcPr /></a:tc></a:tr><a:tr h="0"><a:tc><a:txBody><a:bodyPr /><a:lstStyle /><a:p><a:pPr lvl="0" indent="0" marL="0"><a:buNone /></a:pPr><a:r><a:rPr /><a:t>Random K-fold on a panel</a:t></a:r></a:p></a:txBody></a:tc><a:tc><a:txBody><a:bodyPr /><a:lstStyle /><a:p><a:pPr lvl="0" indent="0" marL="0"><a:buNone /></a:pPr><a:r><a:rPr /><a:t>Optimistic by a wide margin</a:t></a:r></a:p></a:txBody></a:tc></a:tr><a:tr h="0"><a:tc><a:txBody><a:bodyPr /><a:lstStyle /><a:p><a:pPr lvl="0" indent="0" marL="0"><a:buNone /></a:pPr><a:r><a:rPr /><a:t>Scaling before splitting</a:t></a:r></a:p></a:txBody></a:tc><a:tc><a:txBody><a:bodyPr /><a:lstStyle /><a:p><a:pPr lvl="0" indent="0" marL="0"><a:buNone /></a:pPr><a:r><a:rPr /><a:t>Leakage; error understated</a:t></a:r></a:p></a:txBody></a:tc></a:tr><a:tr h="0"><a:tc><a:txBody><a:bodyPr /><a:lstStyle /><a:p><a:pPr lvl="0" indent="0" marL="0"><a:buNone /></a:pPr><a:r><a:rPr /><a:t>Tuning on the test set</a:t></a:r></a:p></a:txBody></a:tc><a:tc><a:txBody><a:bodyPr /><a:lstStyle /><a:p><a:pPr lvl="0" indent="0" marL="0"><a:buNone /></a:pPr><a:r><a:rPr /><a:t>The test set is now training data</a:t></a:r></a:p></a:txBody></a:tc></a:tr><a:tr h="0"><a:tc><a:txBody><a:bodyPr /><a:lstStyle /><a:p><a:pPr lvl="0" indent="0" marL="0"><a:buNone /></a:pPr><a:r><a:rPr /><a:t>Reporting </a:t></a:r><a14:m><m:oMath xmlns:m="http://schemas.openxmlformats.org/officeDocument/2006/math"><m:sSup><m:e><m:r><m:t>R</m:t></m:r></m:e><m:sup><m:r><m:t>2</m:t></m:r></m:sup></m:sSup></m:oMath></a14:m><a:r><a:rPr /><a:t> only</a:t></a:r></a:p></a:txBody></a:tc><a:tc><a:txBody><a:bodyPr /><a:lstStyle /><a:p><a:pPr lvl="0" indent="0" marL="0"><a:buNone /></a:pPr><a:r><a:rPr /><a:t>No sense of magnitude</a:t></a:r></a:p></a:txBody></a:tc></a:tr><a:tr h="0"><a:tc><a:txBody><a:bodyPr /><a:lstStyle /><a:p><a:pPr lvl="0" indent="0" marL="0"><a:buNone /></a:pPr><a:r><a:rPr /><a:t>One split, one number</a:t></a:r></a:p></a:txBody></a:tc><a:tc><a:txBody><a:bodyPr /><a:lstStyle /><a:p><a:pPr lvl="0" indent="0" marL="0"><a:buNone /></a:pPr><a:r><a:rPr /><a:t>No sense of variability</a:t></a:r></a:p></a:txBody></a:tc></a:tr></a:tbl></a:graphicData></a:graphic></p:graphicFrame></p:spTree></p:cSld></p:sld>
+</file>
+
+<file path=ppt/slides/slide26.xml><?xml version="1.0" encoding="utf-8"?>
+<p:sld xmlns:a="http://schemas.openxmlformats.org/drawingml/2006/main" xmlns:r="http://schemas.openxmlformats.org/officeDocument/2006/relationships" xmlns:p="http://schemas.openxmlformats.org/presentationml/2006/main">
+  <p:cSld>
+    <p:spTree>
+      <p:nvGrpSpPr>
+        <p:cNvPr id="1" name=""/>
+        <p:cNvGrpSpPr/>
+        <p:nvPr/>
+      </p:nvGrpSpPr>
+      <p:grpSpPr>
+        <a:xfrm>
+          <a:off x="0" y="0"/>
+          <a:ext cx="0" cy="0"/>
+          <a:chOff x="0" y="0"/>
+          <a:chExt cx="0" cy="0"/>
+        </a:xfrm>
+      </p:grpSpPr>
+      <p:sp>
+        <p:nvSpPr>
+          <p:cNvPr id="2" name="Title 1"/>
+          <p:cNvSpPr>
+            <a:spLocks noGrp="1"/>
+          </p:cNvSpPr>
+          <p:nvPr>
+            <p:ph type="title"/>
+          </p:nvPr>
+        </p:nvSpPr>
+        <p:spPr/>
+        <p:txBody>
+          <a:bodyPr/>
+          <a:lstStyle/>
+          <a:p>
+            <a:pPr lvl="0" indent="0" marL="0">
+              <a:buNone/>
+            </a:pPr>
+            <a:r>
+              <a:rPr/>
+              <a:t>In the lab</a:t>
+            </a:r>
+          </a:p>
+        </p:txBody>
+      </p:sp>
+      <p:sp>
+        <p:nvSpPr>
+          <p:cNvPr id="3" name="Content Placeholder 2"/>
+          <p:cNvSpPr>
+            <a:spLocks noGrp="1"/>
+          </p:cNvSpPr>
+          <p:nvPr>
+            <p:ph idx="1"/>
+          </p:nvPr>
+        </p:nvSpPr>
+        <p:spPr/>
+        <p:txBody>
+          <a:bodyPr/>
+          <a:lstStyle/>
+          <a:p>
+            <a:pPr lvl="0" indent="0" marL="0">
+              <a:buNone/>
+            </a:pPr>
+            <a:r>
+              <a:rPr/>
+              <a:t>Work through </a:t>
+            </a:r>
+            <a:r>
+              <a:rPr>
+                <a:hlinkClick r:id="rId2"/>
+                <a:latin typeface="Courier"/>
+              </a:rPr>
+              <a:t>02-lab/README.md</a:t>
+            </a:r>
+            <a:r>
+              <a:rPr/>
+              <a:t>.</a:t>
+            </a:r>
+          </a:p>
+          <a:p>
+            <a:pPr lvl="0" indent="-342900" marL="342900">
+              <a:buAutoNum type="arabicPeriod"/>
+            </a:pPr>
+            <a:r>
+              <a:rPr/>
+              <a:t>Reproduce the three CV schemes and tabulate the errors</a:t>
+            </a:r>
+          </a:p>
+          <a:p>
+            <a:pPr lvl="0" indent="-342900" marL="342900">
+              <a:buAutoNum type="arabicPeriod"/>
+            </a:pPr>
+            <a:r>
+              <a:rPr/>
+              <a:t>Explain, in writing, why they differ </a:t>
+            </a:r>
+            <a:r>
+              <a:rPr b="1"/>
+              <a:t>in this direction</a:t>
+            </a:r>
+          </a:p>
+          <a:p>
+            <a:pPr lvl="0" indent="-342900" marL="342900">
+              <a:buAutoNum type="arabicPeriod"/>
+            </a:pPr>
+            <a:r>
+              <a:rPr/>
+              <a:t>Draw the depth curve and mark where variance takes over</a:t>
+            </a:r>
+          </a:p>
+          <a:p>
+            <a:pPr lvl="0" indent="-342900" marL="342900">
+              <a:buAutoNum type="arabicPeriod"/>
+            </a:pPr>
+            <a:r>
+              <a:rPr/>
+              <a:t>Three sentences, naming your split and what it entitles you to claim</a:t>
             </a:r>
           </a:p>
         </p:txBody>
@@ -5754,113 +6842,636 @@
             </a:pPr>
             <a:r>
               <a:rPr/>
-              <a:t>How good is your model, really?</a:t>
-            </a:r>
-          </a:p>
-        </p:txBody>
-      </p:sp>
-      <p:sp>
-        <p:nvSpPr>
-          <p:cNvPr id="3" name="Content Placeholder 2"/>
-          <p:cNvSpPr>
-            <a:spLocks noGrp="1"/>
-          </p:cNvSpPr>
+              <a:t>The 90 minutes ahead</a:t>
+            </a:r>
+          </a:p>
+        </p:txBody>
+      </p:sp>
+      <p:graphicFrame>
+        <p:nvGraphicFramePr>
+          <p:cNvPr id="6" name="Content Placeholder 5"/>
+          <p:cNvGraphicFramePr>
+            <a:graphicFrameLocks noGrp="1"/>
+          </p:cNvGraphicFramePr>
           <p:nvPr>
             <p:ph idx="1"/>
           </p:nvPr>
-        </p:nvSpPr>
-        <p:spPr/>
-        <p:txBody>
-          <a:bodyPr/>
-          <a:lstStyle/>
-          <a:p>
-            <a:pPr lvl="0" indent="0" marL="0">
-              <a:buNone/>
-            </a:pPr>
-            <a:r>
-              <a:rPr/>
-              <a:t>You fit a model of European productivity growth. It explains 78% of the variance.</a:t>
-            </a:r>
-          </a:p>
-          <a:p>
-            <a:pPr lvl="0" indent="0" marL="0">
-              <a:buNone/>
-            </a:pPr>
-            <a:r>
-              <a:rPr/>
-              <a:t>Three different questions hide inside “how good is it?”:</a:t>
-            </a:r>
-          </a:p>
-          <a:p>
-            <a:pPr lvl="0"/>
-            <a:r>
-              <a:rPr/>
-              <a:t>How well does it fit </a:t>
-            </a:r>
-            <a:r>
-              <a:rPr b="1"/>
-              <a:t>the data you used</a:t>
-            </a:r>
-            <a:r>
-              <a:rPr/>
-              <a:t>? (Almost meaningless.)</a:t>
-            </a:r>
-          </a:p>
-          <a:p>
-            <a:pPr lvl="0"/>
-            <a:r>
-              <a:rPr/>
-              <a:t>How well would it do on </a:t>
-            </a:r>
-            <a:r>
-              <a:rPr b="1"/>
-              <a:t>a new country</a:t>
-            </a:r>
-            <a:r>
-              <a:rPr/>
-              <a:t>?</a:t>
-            </a:r>
-          </a:p>
-          <a:p>
-            <a:pPr lvl="0"/>
-            <a:r>
-              <a:rPr/>
-              <a:t>How well would it do </a:t>
-            </a:r>
-            <a:r>
-              <a:rPr b="1"/>
-              <a:t>next year</a:t>
-            </a:r>
-            <a:r>
-              <a:rPr/>
-              <a:t>?</a:t>
-            </a:r>
-          </a:p>
-          <a:p>
-            <a:pPr lvl="0" indent="0" marL="0">
-              <a:buNone/>
-            </a:pPr>
-            <a:r>
-              <a:rPr/>
-              <a:t>Those last two are different questions, and they need </a:t>
-            </a:r>
-            <a:r>
-              <a:rPr b="1"/>
-              <a:t>different splits</a:t>
-            </a:r>
-            <a:r>
-              <a:rPr/>
-              <a:t>. Get the split wrong and every number that follows is optimistic.</a:t>
-            </a:r>
-          </a:p>
-        </p:txBody>
-      </p:sp>
+        </p:nvGraphicFramePr>
+        <p:xfrm>
+          <a:off x="457200" y="1193800"/>
+          <a:ext cx="8229600" cy="3390900"/>
+        </p:xfrm>
+        <a:graphic>
+          <a:graphicData uri="http://schemas.openxmlformats.org/drawingml/2006/table">
+            <a:tbl>
+              <a:tblPr firstRow="0" bandRow="1">
+                <a:tableStyleId>{5C22544A-7EE6-4342-B048-85BDC9FD1C3A}</a:tableStyleId>
+              </a:tblPr>
+              <a:tblGrid>
+                <a:gridCol w="4114800"/>
+                <a:gridCol w="4114800"/>
+              </a:tblGrid>
+              <a:tr h="0">
+                <a:tc>
+                  <a:txBody>
+                    <a:bodyPr/>
+                    <a:lstStyle/>
+                    <a:p>
+                      <a:pPr lvl="0" indent="0" marL="0">
+                        <a:buNone/>
+                      </a:pPr>
+                      <a:r>
+                        <a:rPr b="1"/>
+                        <a:t>0–10</a:t>
+                      </a:r>
+                    </a:p>
+                  </a:txBody>
+                </a:tc>
+                <a:tc>
+                  <a:txBody>
+                    <a:bodyPr/>
+                    <a:lstStyle/>
+                    <a:p>
+                      <a:pPr lvl="0" indent="0" marL="0">
+                        <a:buNone/>
+                      </a:pPr>
+                      <a:r>
+                        <a:rPr/>
+                        <a:t>Three questions hiding inside “how good is it?”</a:t>
+                      </a:r>
+                    </a:p>
+                  </a:txBody>
+                </a:tc>
+              </a:tr>
+              <a:tr h="0">
+                <a:tc>
+                  <a:txBody>
+                    <a:bodyPr/>
+                    <a:lstStyle/>
+                    <a:p>
+                      <a:pPr lvl="0" indent="0" marL="0">
+                        <a:buNone/>
+                      </a:pPr>
+                      <a:r>
+                        <a:rPr b="1"/>
+                        <a:t>10–30</a:t>
+                      </a:r>
+                    </a:p>
+                  </a:txBody>
+                </a:tc>
+                <a:tc>
+                  <a:txBody>
+                    <a:bodyPr/>
+                    <a:lstStyle/>
+                    <a:p>
+                      <a:pPr lvl="0" indent="0" marL="0">
+                        <a:buNone/>
+                      </a:pPr>
+                      <a:r>
+                        <a:rPr/>
+                        <a:t>The bias–variance decomposition</a:t>
+                      </a:r>
+                    </a:p>
+                  </a:txBody>
+                </a:tc>
+              </a:tr>
+              <a:tr h="0">
+                <a:tc>
+                  <a:txBody>
+                    <a:bodyPr/>
+                    <a:lstStyle/>
+                    <a:p>
+                      <a:pPr lvl="0" indent="0" marL="0">
+                        <a:buNone/>
+                      </a:pPr>
+                      <a:r>
+                        <a:rPr b="1"/>
+                        <a:t>30–50</a:t>
+                      </a:r>
+                    </a:p>
+                  </a:txBody>
+                </a:tc>
+                <a:tc>
+                  <a:txBody>
+                    <a:bodyPr/>
+                    <a:lstStyle/>
+                    <a:p>
+                      <a:pPr lvl="0" indent="0" marL="0">
+                        <a:buNone/>
+                      </a:pPr>
+                      <a:r>
+                        <a:rPr/>
+                        <a:t>Why random K-fold breaks on a panel</a:t>
+                      </a:r>
+                    </a:p>
+                  </a:txBody>
+                </a:tc>
+              </a:tr>
+              <a:tr h="0">
+                <a:tc>
+                  <a:txBody>
+                    <a:bodyPr/>
+                    <a:lstStyle/>
+                    <a:p>
+                      <a:pPr lvl="0" indent="0" marL="0">
+                        <a:buNone/>
+                      </a:pPr>
+                      <a:r>
+                        <a:rPr b="1"/>
+                        <a:t>50–70</a:t>
+                      </a:r>
+                    </a:p>
+                  </a:txBody>
+                </a:tc>
+                <a:tc>
+                  <a:txBody>
+                    <a:bodyPr/>
+                    <a:lstStyle/>
+                    <a:p>
+                      <a:pPr lvl="0" indent="0" marL="0">
+                        <a:buNone/>
+                      </a:pPr>
+                      <a:r>
+                        <a:rPr/>
+                        <a:t>Three splits, measured</a:t>
+                      </a:r>
+                    </a:p>
+                  </a:txBody>
+                </a:tc>
+              </a:tr>
+              <a:tr h="0">
+                <a:tc>
+                  <a:txBody>
+                    <a:bodyPr/>
+                    <a:lstStyle/>
+                    <a:p>
+                      <a:pPr lvl="0" indent="0" marL="0">
+                        <a:buNone/>
+                      </a:pPr>
+                      <a:r>
+                        <a:rPr b="1"/>
+                        <a:t>70–85</a:t>
+                      </a:r>
+                    </a:p>
+                  </a:txBody>
+                </a:tc>
+                <a:tc>
+                  <a:txBody>
+                    <a:bodyPr/>
+                    <a:lstStyle/>
+                    <a:p>
+                      <a:pPr lvl="0" indent="0" marL="0">
+                        <a:buNone/>
+                      </a:pPr>
+                      <a:r>
+                        <a:rPr/>
+                        <a:t>Leakage, and where it hides</a:t>
+                      </a:r>
+                    </a:p>
+                  </a:txBody>
+                </a:tc>
+              </a:tr>
+              <a:tr h="0">
+                <a:tc>
+                  <a:txBody>
+                    <a:bodyPr/>
+                    <a:lstStyle/>
+                    <a:p>
+                      <a:pPr lvl="0" indent="0" marL="0">
+                        <a:buNone/>
+                      </a:pPr>
+                      <a:r>
+                        <a:rPr b="1"/>
+                        <a:t>85–90</a:t>
+                      </a:r>
+                    </a:p>
+                  </a:txBody>
+                </a:tc>
+                <a:tc>
+                  <a:txBody>
+                    <a:bodyPr/>
+                    <a:lstStyle/>
+                    <a:p>
+                      <a:pPr lvl="0" indent="0" marL="0">
+                        <a:buNone/>
+                      </a:pPr>
+                      <a:r>
+                        <a:rPr/>
+                        <a:t>Handoff to the lab</a:t>
+                      </a:r>
+                    </a:p>
+                  </a:txBody>
+                </a:tc>
+              </a:tr>
+            </a:tbl>
+          </a:graphicData>
+        </a:graphic>
+      </p:graphicFrame>
     </p:spTree>
   </p:cSld>
 </p:sld>
 </file>
 
 <file path=ppt/slides/slide4.xml><?xml version="1.0" encoding="utf-8"?>
+<p:sld xmlns:a="http://schemas.openxmlformats.org/drawingml/2006/main" xmlns:r="http://schemas.openxmlformats.org/officeDocument/2006/relationships" xmlns:p="http://schemas.openxmlformats.org/presentationml/2006/main">
+  <p:cSld>
+    <p:spTree>
+      <p:nvGrpSpPr>
+        <p:cNvPr id="1" name=""/>
+        <p:cNvGrpSpPr/>
+        <p:nvPr/>
+      </p:nvGrpSpPr>
+      <p:grpSpPr>
+        <a:xfrm>
+          <a:off x="0" y="0"/>
+          <a:ext cx="0" cy="0"/>
+          <a:chOff x="0" y="0"/>
+          <a:chExt cx="0" cy="0"/>
+        </a:xfrm>
+      </p:grpSpPr>
+      <p:sp>
+        <p:nvSpPr>
+          <p:cNvPr id="2" name="Title 1"/>
+          <p:cNvSpPr>
+            <a:spLocks noGrp="1"/>
+          </p:cNvSpPr>
+          <p:nvPr>
+            <p:ph type="title"/>
+          </p:nvPr>
+        </p:nvSpPr>
+        <p:spPr/>
+        <p:txBody>
+          <a:bodyPr/>
+          <a:lstStyle/>
+          <a:p>
+            <a:pPr lvl="0" indent="0" marL="0">
+              <a:buNone/>
+            </a:pPr>
+            <a:r>
+              <a:rPr/>
+              <a:t>Before class you read</a:t>
+            </a:r>
+          </a:p>
+        </p:txBody>
+      </p:sp>
+      <mc:AlternateContent xmlns:mc="http://schemas.openxmlformats.org/markup-compatibility/2006">
+        <mc:Choice xmlns:a14="http://schemas.microsoft.com/office/drawing/2010/main" Requires="a14">
+          <p:sp>
+            <p:nvSpPr>
+              <p:cNvPr id="3" name="Content Placeholder 2"/>
+              <p:cNvSpPr>
+                <a:spLocks noGrp="1"/>
+              </p:cNvSpPr>
+              <p:nvPr>
+                <p:ph idx="1"/>
+              </p:nvPr>
+            </p:nvSpPr>
+            <p:spPr/>
+            <p:txBody>
+              <a:bodyPr/>
+              <a:lstStyle/>
+              <a:p>
+                <a:pPr lvl="0" indent="0" marL="0">
+                  <a:buNone/>
+                </a:pPr>
+                <a:r>
+                  <a:rPr b="1"/>
+                  <a:t>Mullainathan &amp; Spiess</a:t>
+                </a:r>
+                <a:r>
+                  <a:rPr/>
+                  <a:t>, </a:t>
+                </a:r>
+                <a:r>
+                  <a:rPr i="1"/>
+                  <a:t>Machine Learning: An Applied Econometric Approach</a:t>
+                </a:r>
+                <a:r>
+                  <a:rPr/>
+                  <a:t>, </a:t>
+                </a:r>
+                <a:r>
+                  <a:rPr b="1"/>
+                  <a:t>JEP</a:t>
+                </a:r>
+                <a:r>
+                  <a:rPr/>
+                  <a:t> 2017.</a:t>
+                </a:r>
+              </a:p>
+              <a:p>
+                <a:pPr lvl="0" indent="0" marL="0">
+                  <a:buNone/>
+                </a:pPr>
+                <a:r>
+                  <a:rPr/>
+                  <a:t>DOI: 10.1257/jep.31.2.87</a:t>
+                </a:r>
+              </a:p>
+              <a:p>
+                <a:pPr lvl="0" indent="0" marL="0">
+                  <a:buNone/>
+                </a:pPr>
+                <a:r>
+                  <a:rPr/>
+                  <a:t>Their framing, which organises the whole course:</a:t>
+                </a:r>
+              </a:p>
+              <a:p>
+                <a:pPr lvl="0" indent="0" marL="1270000">
+                  <a:buNone/>
+                </a:pPr>
+                <a:r>
+                  <a:rPr sz="2000"/>
+                  <a:t>Machine learning solves </a:t>
+                </a:r>
+                <a14:m>
+                  <m:oMath xmlns:m="http://schemas.openxmlformats.org/officeDocument/2006/math">
+                    <m:acc>
+                      <m:accPr>
+                        <m:chr m:val="̂"/>
+                      </m:accPr>
+                      <m:e>
+                        <m:r>
+                          <m:t>y</m:t>
+                        </m:r>
+                      </m:e>
+                    </m:acc>
+                  </m:oMath>
+                </a14:m>
+                <a:r>
+                  <a:rPr sz="2000"/>
+                  <a:t> problems. Economics mostly asks </a:t>
+                </a:r>
+                <a14:m>
+                  <m:oMath xmlns:m="http://schemas.openxmlformats.org/officeDocument/2006/math">
+                    <m:acc>
+                      <m:accPr>
+                        <m:chr m:val="̂"/>
+                      </m:accPr>
+                      <m:e>
+                        <m:r>
+                          <m:t>β</m:t>
+                        </m:r>
+                      </m:e>
+                    </m:acc>
+                  </m:oMath>
+                </a14:m>
+                <a:r>
+                  <a:rPr sz="2000"/>
+                  <a:t> questions. Confusing the two is where the trouble starts.</a:t>
+                </a:r>
+              </a:p>
+              <a:p>
+                <a:pPr lvl="0" indent="0" marL="0">
+                  <a:buNone/>
+                </a:pPr>
+                <a:r>
+                  <a:rPr/>
+                  <a:t>Today is entirely a </a:t>
+                </a:r>
+                <a14:m>
+                  <m:oMath xmlns:m="http://schemas.openxmlformats.org/officeDocument/2006/math">
+                    <m:acc>
+                      <m:accPr>
+                        <m:chr m:val="̂"/>
+                      </m:accPr>
+                      <m:e>
+                        <m:r>
+                          <m:t>y</m:t>
+                        </m:r>
+                      </m:e>
+                    </m:acc>
+                  </m:oMath>
+                </a14:m>
+                <a:r>
+                  <a:rPr/>
+                  <a:t> session. Session 10 is the </a:t>
+                </a:r>
+                <a14:m>
+                  <m:oMath xmlns:m="http://schemas.openxmlformats.org/officeDocument/2006/math">
+                    <m:acc>
+                      <m:accPr>
+                        <m:chr m:val="̂"/>
+                      </m:accPr>
+                      <m:e>
+                        <m:r>
+                          <m:t>β</m:t>
+                        </m:r>
+                      </m:e>
+                    </m:acc>
+                  </m:oMath>
+                </a14:m>
+                <a:r>
+                  <a:rPr/>
+                  <a:t> one, and it needs completely different machinery.</a:t>
+                </a:r>
+              </a:p>
+            </p:txBody>
+          </p:sp>
+        </mc:Choice>
+      </mc:AlternateContent>
+    </p:spTree>
+  </p:cSld>
+</p:sld>
+</file>
+
+<file path=ppt/slides/slide5.xml><?xml version="1.0" encoding="utf-8"?>
+<p:sld xmlns:a="http://schemas.openxmlformats.org/drawingml/2006/main" xmlns:r="http://schemas.openxmlformats.org/officeDocument/2006/relationships" xmlns:p="http://schemas.openxmlformats.org/presentationml/2006/main">
+  <p:cSld>
+    <p:spTree>
+      <p:nvGrpSpPr>
+        <p:cNvPr id="1" name=""/>
+        <p:cNvGrpSpPr/>
+        <p:nvPr/>
+      </p:nvGrpSpPr>
+      <p:grpSpPr>
+        <a:xfrm>
+          <a:off x="0" y="0"/>
+          <a:ext cx="0" cy="0"/>
+          <a:chOff x="0" y="0"/>
+          <a:chExt cx="0" cy="0"/>
+        </a:xfrm>
+      </p:grpSpPr>
+      <p:sp>
+        <p:nvSpPr>
+          <p:cNvPr id="2" name="Title 1"/>
+          <p:cNvSpPr>
+            <a:spLocks noGrp="1"/>
+          </p:cNvSpPr>
+          <p:nvPr>
+            <p:ph type="title"/>
+          </p:nvPr>
+        </p:nvSpPr>
+        <p:spPr>
+          <a:xfrm>
+            <a:off x="722313" y="3305176"/>
+            <a:ext cx="7772400" cy="1021556"/>
+          </a:xfrm>
+        </p:spPr>
+        <p:txBody>
+          <a:bodyPr/>
+          <a:lstStyle/>
+          <a:p>
+            <a:pPr lvl="0" indent="0" marL="0">
+              <a:buNone/>
+            </a:pPr>
+            <a:r>
+              <a:rPr/>
+              <a:t>The question</a:t>
+            </a:r>
+          </a:p>
+        </p:txBody>
+      </p:sp>
+    </p:spTree>
+  </p:cSld>
+</p:sld>
+</file>
+
+<file path=ppt/slides/slide6.xml><?xml version="1.0" encoding="utf-8"?>
+<p:sld xmlns:a="http://schemas.openxmlformats.org/drawingml/2006/main" xmlns:r="http://schemas.openxmlformats.org/officeDocument/2006/relationships" xmlns:p="http://schemas.openxmlformats.org/presentationml/2006/main">
+  <p:cSld>
+    <p:spTree>
+      <p:nvGrpSpPr>
+        <p:cNvPr id="1" name=""/>
+        <p:cNvGrpSpPr/>
+        <p:nvPr/>
+      </p:nvGrpSpPr>
+      <p:grpSpPr>
+        <a:xfrm>
+          <a:off x="0" y="0"/>
+          <a:ext cx="0" cy="0"/>
+          <a:chOff x="0" y="0"/>
+          <a:chExt cx="0" cy="0"/>
+        </a:xfrm>
+      </p:grpSpPr>
+      <p:sp>
+        <p:nvSpPr>
+          <p:cNvPr id="2" name="Title 1"/>
+          <p:cNvSpPr>
+            <a:spLocks noGrp="1"/>
+          </p:cNvSpPr>
+          <p:nvPr>
+            <p:ph type="title"/>
+          </p:nvPr>
+        </p:nvSpPr>
+        <p:spPr/>
+        <p:txBody>
+          <a:bodyPr/>
+          <a:lstStyle/>
+          <a:p>
+            <a:pPr lvl="0" indent="0" marL="0">
+              <a:buNone/>
+            </a:pPr>
+            <a:r>
+              <a:rPr/>
+              <a:t>How good is your model, really?</a:t>
+            </a:r>
+          </a:p>
+        </p:txBody>
+      </p:sp>
+      <p:sp>
+        <p:nvSpPr>
+          <p:cNvPr id="3" name="Content Placeholder 2"/>
+          <p:cNvSpPr>
+            <a:spLocks noGrp="1"/>
+          </p:cNvSpPr>
+          <p:nvPr>
+            <p:ph idx="1"/>
+          </p:nvPr>
+        </p:nvSpPr>
+        <p:spPr/>
+        <p:txBody>
+          <a:bodyPr/>
+          <a:lstStyle/>
+          <a:p>
+            <a:pPr lvl="0" indent="0" marL="0">
+              <a:buNone/>
+            </a:pPr>
+            <a:r>
+              <a:rPr/>
+              <a:t>You fit a model of European productivity growth. It explains 78% of the variance.</a:t>
+            </a:r>
+          </a:p>
+          <a:p>
+            <a:pPr lvl="0" indent="0" marL="0">
+              <a:buNone/>
+            </a:pPr>
+            <a:r>
+              <a:rPr/>
+              <a:t>Three different questions hide inside “how good is it?”:</a:t>
+            </a:r>
+          </a:p>
+          <a:p>
+            <a:pPr lvl="0"/>
+            <a:r>
+              <a:rPr/>
+              <a:t>How well does it fit </a:t>
+            </a:r>
+            <a:r>
+              <a:rPr b="1"/>
+              <a:t>the data you used</a:t>
+            </a:r>
+            <a:r>
+              <a:rPr/>
+              <a:t>? (Almost meaningless.)</a:t>
+            </a:r>
+          </a:p>
+          <a:p>
+            <a:pPr lvl="0"/>
+            <a:r>
+              <a:rPr/>
+              <a:t>How well would it do on </a:t>
+            </a:r>
+            <a:r>
+              <a:rPr b="1"/>
+              <a:t>a new country</a:t>
+            </a:r>
+            <a:r>
+              <a:rPr/>
+              <a:t>?</a:t>
+            </a:r>
+          </a:p>
+          <a:p>
+            <a:pPr lvl="0"/>
+            <a:r>
+              <a:rPr/>
+              <a:t>How well would it do </a:t>
+            </a:r>
+            <a:r>
+              <a:rPr b="1"/>
+              <a:t>next year</a:t>
+            </a:r>
+            <a:r>
+              <a:rPr/>
+              <a:t>?</a:t>
+            </a:r>
+          </a:p>
+          <a:p>
+            <a:pPr lvl="0" indent="0" marL="0">
+              <a:buNone/>
+            </a:pPr>
+            <a:r>
+              <a:rPr/>
+              <a:t>Those last two are different questions, and they need </a:t>
+            </a:r>
+            <a:r>
+              <a:rPr b="1"/>
+              <a:t>different splits</a:t>
+            </a:r>
+            <a:r>
+              <a:rPr/>
+              <a:t>. Get the split wrong and every number that follows is optimistic.</a:t>
+            </a:r>
+          </a:p>
+        </p:txBody>
+      </p:sp>
+    </p:spTree>
+  </p:cSld>
+</p:sld>
+</file>
+
+<file path=ppt/slides/slide7.xml><?xml version="1.0" encoding="utf-8"?>
 <p:sld xmlns:a="http://schemas.openxmlformats.org/drawingml/2006/main" xmlns:r="http://schemas.openxmlformats.org/officeDocument/2006/relationships" xmlns:p="http://schemas.openxmlformats.org/presentationml/2006/main">
   <p:cSld>
     <p:spTree>
@@ -6292,474 +7903,6 @@
 </p:sld>
 </file>
 
-<file path=ppt/slides/slide5.xml><?xml version="1.0" encoding="utf-8"?>
-<p:sld xmlns:a="http://schemas.openxmlformats.org/drawingml/2006/main" xmlns:r="http://schemas.openxmlformats.org/officeDocument/2006/relationships" xmlns:p="http://schemas.openxmlformats.org/presentationml/2006/main">
-  <p:cSld>
-    <p:spTree>
-      <p:nvGrpSpPr>
-        <p:cNvPr id="1" name=""/>
-        <p:cNvGrpSpPr/>
-        <p:nvPr/>
-      </p:nvGrpSpPr>
-      <p:grpSpPr>
-        <a:xfrm>
-          <a:off x="0" y="0"/>
-          <a:ext cx="0" cy="0"/>
-          <a:chOff x="0" y="0"/>
-          <a:chExt cx="0" cy="0"/>
-        </a:xfrm>
-      </p:grpSpPr>
-      <p:sp>
-        <p:nvSpPr>
-          <p:cNvPr id="2" name="Title 1"/>
-          <p:cNvSpPr>
-            <a:spLocks noGrp="1"/>
-          </p:cNvSpPr>
-          <p:nvPr>
-            <p:ph type="title"/>
-          </p:nvPr>
-        </p:nvSpPr>
-        <p:spPr>
-          <a:xfrm>
-            <a:off x="722313" y="3305176"/>
-            <a:ext cx="7772400" cy="1021556"/>
-          </a:xfrm>
-        </p:spPr>
-        <p:txBody>
-          <a:bodyPr/>
-          <a:lstStyle/>
-          <a:p>
-            <a:pPr lvl="0" indent="0" marL="0">
-              <a:buNone/>
-            </a:pPr>
-            <a:r>
-              <a:rPr/>
-              <a:t>The trap</a:t>
-            </a:r>
-          </a:p>
-        </p:txBody>
-      </p:sp>
-    </p:spTree>
-  </p:cSld>
-</p:sld>
-</file>
-
-<file path=ppt/slides/slide6.xml><?xml version="1.0" encoding="utf-8"?>
-<p:sld xmlns:a="http://schemas.openxmlformats.org/drawingml/2006/main" xmlns:r="http://schemas.openxmlformats.org/officeDocument/2006/relationships" xmlns:p="http://schemas.openxmlformats.org/presentationml/2006/main">
-  <p:cSld>
-    <p:spTree>
-      <p:nvGrpSpPr>
-        <p:cNvPr id="1" name=""/>
-        <p:cNvGrpSpPr/>
-        <p:nvPr/>
-      </p:nvGrpSpPr>
-      <p:grpSpPr>
-        <a:xfrm>
-          <a:off x="0" y="0"/>
-          <a:ext cx="0" cy="0"/>
-          <a:chOff x="0" y="0"/>
-          <a:chExt cx="0" cy="0"/>
-        </a:xfrm>
-      </p:grpSpPr>
-      <p:sp>
-        <p:nvSpPr>
-          <p:cNvPr id="2" name="Title 1"/>
-          <p:cNvSpPr>
-            <a:spLocks noGrp="1"/>
-          </p:cNvSpPr>
-          <p:nvPr>
-            <p:ph type="title"/>
-          </p:nvPr>
-        </p:nvSpPr>
-        <p:spPr/>
-        <p:txBody>
-          <a:bodyPr/>
-          <a:lstStyle/>
-          <a:p>
-            <a:pPr lvl="0" indent="0" marL="0">
-              <a:buNone/>
-            </a:pPr>
-            <a:r>
-              <a:rPr/>
-              <a:t>Why random K-fold breaks here</a:t>
-            </a:r>
-          </a:p>
-        </p:txBody>
-      </p:sp>
-      <p:sp>
-        <p:nvSpPr>
-          <p:cNvPr id="3" name="Content Placeholder 2"/>
-          <p:cNvSpPr>
-            <a:spLocks noGrp="1"/>
-          </p:cNvSpPr>
-          <p:nvPr>
-            <p:ph idx="1"/>
-          </p:nvPr>
-        </p:nvSpPr>
-        <p:spPr/>
-        <p:txBody>
-          <a:bodyPr/>
-          <a:lstStyle/>
-          <a:p>
-            <a:pPr lvl="0" indent="0" marL="0">
-              <a:buNone/>
-            </a:pPr>
-            <a:r>
-              <a:rPr>
-                <a:latin typeface="Courier"/>
-              </a:rPr>
-              <a:t>core.parquet</a:t>
-            </a:r>
-            <a:r>
-              <a:rPr/>
-              <a:t> is 30 countries observed over 15 years.</a:t>
-            </a:r>
-          </a:p>
-          <a:p>
-            <a:pPr lvl="0" indent="0" marL="0">
-              <a:buNone/>
-            </a:pPr>
-            <a:r>
-              <a:rPr/>
-              <a:t>Random K-fold puts </a:t>
-            </a:r>
-            <a:r>
-              <a:rPr b="1"/>
-              <a:t>Germany 2019 in training and Germany 2020 in test</a:t>
-            </a:r>
-            <a:r>
-              <a:rPr/>
-              <a:t>.</a:t>
-            </a:r>
-          </a:p>
-          <a:p>
-            <a:pPr lvl="0"/>
-            <a:r>
-              <a:rPr/>
-              <a:t>Countries are highly persistent — productivity this year nearly determines next year</a:t>
-            </a:r>
-          </a:p>
-          <a:p>
-            <a:pPr lvl="0"/>
-            <a:r>
-              <a:rPr/>
-              <a:t>The model can effectively memorise the country, then “predict” it</a:t>
-            </a:r>
-          </a:p>
-          <a:p>
-            <a:pPr lvl="0"/>
-            <a:r>
-              <a:rPr/>
-              <a:t>Your validation error measures </a:t>
-            </a:r>
-            <a:r>
-              <a:rPr b="1"/>
-              <a:t>interpolation within a country</a:t>
-            </a:r>
-            <a:r>
-              <a:rPr/>
-              <a:t>, not forecasting</a:t>
-            </a:r>
-          </a:p>
-          <a:p>
-            <a:pPr lvl="0" indent="0" marL="0">
-              <a:buNone/>
-            </a:pPr>
-            <a:r>
-              <a:rPr/>
-              <a:t>This is not a subtle statistical nicety. On this panel it is the difference between a model that looks excellent and one that is useful.</a:t>
-            </a:r>
-          </a:p>
-        </p:txBody>
-      </p:sp>
-    </p:spTree>
-  </p:cSld>
-</p:sld>
-</file>
-
-<file path=ppt/slides/slide7.xml><?xml version="1.0" encoding="utf-8"?>
-<p:sld xmlns:a="http://schemas.openxmlformats.org/drawingml/2006/main" xmlns:r="http://schemas.openxmlformats.org/officeDocument/2006/relationships" xmlns:p="http://schemas.openxmlformats.org/presentationml/2006/main">
-  <p:cSld>
-    <p:spTree>
-      <p:nvGrpSpPr>
-        <p:cNvPr id="1" name=""/>
-        <p:cNvGrpSpPr/>
-        <p:nvPr/>
-      </p:nvGrpSpPr>
-      <p:grpSpPr>
-        <a:xfrm>
-          <a:off x="0" y="0"/>
-          <a:ext cx="0" cy="0"/>
-          <a:chOff x="0" y="0"/>
-          <a:chExt cx="0" cy="0"/>
-        </a:xfrm>
-      </p:grpSpPr>
-      <p:sp>
-        <p:nvSpPr>
-          <p:cNvPr id="2" name="Title 1"/>
-          <p:cNvSpPr>
-            <a:spLocks noGrp="1"/>
-          </p:cNvSpPr>
-          <p:nvPr>
-            <p:ph type="title"/>
-          </p:nvPr>
-        </p:nvSpPr>
-        <p:spPr/>
-        <p:txBody>
-          <a:bodyPr/>
-          <a:lstStyle/>
-          <a:p>
-            <a:pPr lvl="0" indent="0" marL="0">
-              <a:buNone/>
-            </a:pPr>
-            <a:r>
-              <a:rPr/>
-              <a:t>Three splits, three questions</a:t>
-            </a:r>
-          </a:p>
-        </p:txBody>
-      </p:sp>
-      <p:graphicFrame>
-        <p:nvGraphicFramePr>
-          <p:cNvPr id="6" name="Content Placeholder 5"/>
-          <p:cNvGraphicFramePr>
-            <a:graphicFrameLocks noGrp="1"/>
-          </p:cNvGraphicFramePr>
-          <p:nvPr>
-            <p:ph idx="1"/>
-          </p:nvPr>
-        </p:nvGraphicFramePr>
-        <p:xfrm>
-          <a:off x="457200" y="1193800"/>
-          <a:ext cx="8229600" cy="3390900"/>
-        </p:xfrm>
-        <a:graphic>
-          <a:graphicData uri="http://schemas.openxmlformats.org/drawingml/2006/table">
-            <a:tbl>
-              <a:tblPr firstRow="1" bandRow="1">
-                <a:tableStyleId>{5C22544A-7EE6-4342-B048-85BDC9FD1C3A}</a:tableStyleId>
-              </a:tblPr>
-              <a:tblGrid>
-                <a:gridCol w="2743200"/>
-                <a:gridCol w="2743200"/>
-                <a:gridCol w="2743200"/>
-              </a:tblGrid>
-              <a:tr h="0">
-                <a:tc>
-                  <a:txBody>
-                    <a:bodyPr/>
-                    <a:lstStyle/>
-                    <a:p>
-                      <a:pPr lvl="0" indent="0" marL="0">
-                        <a:buNone/>
-                      </a:pPr>
-                      <a:r>
-                        <a:rPr/>
-                        <a:t>Split</a:t>
-                      </a:r>
-                    </a:p>
-                  </a:txBody>
-                  <a:tcPr/>
-                </a:tc>
-                <a:tc>
-                  <a:txBody>
-                    <a:bodyPr/>
-                    <a:lstStyle/>
-                    <a:p>
-                      <a:pPr lvl="0" indent="0" marL="0">
-                        <a:buNone/>
-                      </a:pPr>
-                      <a:r>
-                        <a:rPr/>
-                        <a:t>Answers</a:t>
-                      </a:r>
-                    </a:p>
-                  </a:txBody>
-                  <a:tcPr/>
-                </a:tc>
-                <a:tc>
-                  <a:txBody>
-                    <a:bodyPr/>
-                    <a:lstStyle/>
-                    <a:p>
-                      <a:pPr lvl="0" indent="0" marL="0">
-                        <a:buNone/>
-                      </a:pPr>
-                      <a:r>
-                        <a:rPr/>
-                        <a:t>Use</a:t>
-                      </a:r>
-                    </a:p>
-                  </a:txBody>
-                  <a:tcPr/>
-                </a:tc>
-              </a:tr>
-              <a:tr h="0">
-                <a:tc>
-                  <a:txBody>
-                    <a:bodyPr/>
-                    <a:lstStyle/>
-                    <a:p>
-                      <a:pPr lvl="0" indent="0" marL="0">
-                        <a:buNone/>
-                      </a:pPr>
-                      <a:r>
-                        <a:rPr b="1"/>
-                        <a:t>Random K-fold</a:t>
-                      </a:r>
-                    </a:p>
-                  </a:txBody>
-                </a:tc>
-                <a:tc>
-                  <a:txBody>
-                    <a:bodyPr/>
-                    <a:lstStyle/>
-                    <a:p>
-                      <a:pPr lvl="0" indent="0" marL="0">
-                        <a:buNone/>
-                      </a:pPr>
-                      <a:r>
-                        <a:rPr/>
-                        <a:t>“New row from the same countries and years”</a:t>
-                      </a:r>
-                    </a:p>
-                  </a:txBody>
-                </a:tc>
-                <a:tc>
-                  <a:txBody>
-                    <a:bodyPr/>
-                    <a:lstStyle/>
-                    <a:p>
-                      <a:pPr lvl="0" indent="0" marL="0">
-                        <a:buNone/>
-                      </a:pPr>
-                      <a:r>
-                        <a:rPr/>
-                        <a:t>Almost never here</a:t>
-                      </a:r>
-                    </a:p>
-                  </a:txBody>
-                </a:tc>
-              </a:tr>
-              <a:tr h="0">
-                <a:tc>
-                  <a:txBody>
-                    <a:bodyPr/>
-                    <a:lstStyle/>
-                    <a:p>
-                      <a:pPr lvl="0" indent="0" marL="0">
-                        <a:buNone/>
-                      </a:pPr>
-                      <a:r>
-                        <a:rPr b="1"/>
-                        <a:t>GroupKFold by </a:t>
-                      </a:r>
-                      <a:r>
-                        <a:rPr b="1">
-                          <a:latin typeface="Courier"/>
-                        </a:rPr>
-                        <a:t>geo</a:t>
-                      </a:r>
-                    </a:p>
-                  </a:txBody>
-                </a:tc>
-                <a:tc>
-                  <a:txBody>
-                    <a:bodyPr/>
-                    <a:lstStyle/>
-                    <a:p>
-                      <a:pPr lvl="0" indent="0" marL="0">
-                        <a:buNone/>
-                      </a:pPr>
-                      <a:r>
-                        <a:rPr/>
-                        <a:t>“A country I have never seen”</a:t>
-                      </a:r>
-                    </a:p>
-                  </a:txBody>
-                </a:tc>
-                <a:tc>
-                  <a:txBody>
-                    <a:bodyPr/>
-                    <a:lstStyle/>
-                    <a:p>
-                      <a:pPr lvl="0" indent="0" marL="0">
-                        <a:buNone/>
-                      </a:pPr>
-                      <a:r>
-                        <a:rPr/>
-                        <a:t>Transfer across countries</a:t>
-                      </a:r>
-                    </a:p>
-                  </a:txBody>
-                </a:tc>
-              </a:tr>
-              <a:tr h="0">
-                <a:tc>
-                  <a:txBody>
-                    <a:bodyPr/>
-                    <a:lstStyle/>
-                    <a:p>
-                      <a:pPr lvl="0" indent="0" marL="0">
-                        <a:buNone/>
-                      </a:pPr>
-                      <a:r>
-                        <a:rPr b="1"/>
-                        <a:t>TimeSeriesSplit</a:t>
-                      </a:r>
-                      <a:r>
-                        <a:rPr/>
-                        <a:t> by </a:t>
-                      </a:r>
-                      <a:r>
-                        <a:rPr>
-                          <a:latin typeface="Courier"/>
-                        </a:rPr>
-                        <a:t>time</a:t>
-                      </a:r>
-                    </a:p>
-                  </a:txBody>
-                </a:tc>
-                <a:tc>
-                  <a:txBody>
-                    <a:bodyPr/>
-                    <a:lstStyle/>
-                    <a:p>
-                      <a:pPr lvl="0" indent="0" marL="0">
-                        <a:buNone/>
-                      </a:pPr>
-                      <a:r>
-                        <a:rPr/>
-                        <a:t>“Next year”</a:t>
-                      </a:r>
-                    </a:p>
-                  </a:txBody>
-                </a:tc>
-                <a:tc>
-                  <a:txBody>
-                    <a:bodyPr/>
-                    <a:lstStyle/>
-                    <a:p>
-                      <a:pPr lvl="0" indent="0" marL="0">
-                        <a:buNone/>
-                      </a:pPr>
-                      <a:r>
-                        <a:rPr/>
-                        <a:t>Forecasting — Session 11</a:t>
-                      </a:r>
-                    </a:p>
-                  </a:txBody>
-                </a:tc>
-              </a:tr>
-            </a:tbl>
-          </a:graphicData>
-        </a:graphic>
-      </p:graphicFrame>
-    </p:spTree>
-  </p:cSld>
-</p:sld>
-</file>
-
 <file path=ppt/slides/slide8.xml><?xml version="1.0" encoding="utf-8"?>
 <p:sld xmlns:a="http://schemas.openxmlformats.org/drawingml/2006/main" xmlns:r="http://schemas.openxmlformats.org/officeDocument/2006/relationships" xmlns:p="http://schemas.openxmlformats.org/presentationml/2006/main">
   <p:cSld>
@@ -6779,15 +7922,20 @@
       </p:grpSpPr>
       <p:sp>
         <p:nvSpPr>
-          <p:cNvPr id="3" name="Content Placeholder 2"/>
-          <p:cNvSpPr>
-            <a:spLocks noGrp="1"/>
-          </p:cNvSpPr>
-          <p:nvPr>
-            <p:ph idx="1"/>
-          </p:nvPr>
-        </p:nvSpPr>
-        <p:spPr/>
+          <p:cNvPr id="2" name="Title 1"/>
+          <p:cNvSpPr>
+            <a:spLocks noGrp="1"/>
+          </p:cNvSpPr>
+          <p:nvPr>
+            <p:ph type="title"/>
+          </p:nvPr>
+        </p:nvSpPr>
+        <p:spPr>
+          <a:xfrm>
+            <a:off x="722313" y="3305176"/>
+            <a:ext cx="7772400" cy="1021556"/>
+          </a:xfrm>
+        </p:spPr>
         <p:txBody>
           <a:bodyPr/>
           <a:lstStyle/>
@@ -6797,7 +7945,7 @@
             </a:pPr>
             <a:r>
               <a:rPr/>
-              <a:t>Choose the split that matches the sentence you intend to write in your conclusion. Then say which you used.</a:t>
+              <a:t>The trap</a:t>
             </a:r>
           </a:p>
         </p:txBody>
@@ -6834,12 +7982,7 @@
             <p:ph type="title"/>
           </p:nvPr>
         </p:nvSpPr>
-        <p:spPr>
-          <a:xfrm>
-            <a:off x="722313" y="3305176"/>
-            <a:ext cx="7772400" cy="1021556"/>
-          </a:xfrm>
-        </p:spPr>
+        <p:spPr/>
         <p:txBody>
           <a:bodyPr/>
           <a:lstStyle/>
@@ -6849,7 +7992,93 @@
             </a:pPr>
             <a:r>
               <a:rPr/>
-              <a:t>Doing it</a:t>
+              <a:t>Why random K-fold breaks here</a:t>
+            </a:r>
+          </a:p>
+        </p:txBody>
+      </p:sp>
+      <p:sp>
+        <p:nvSpPr>
+          <p:cNvPr id="3" name="Content Placeholder 2"/>
+          <p:cNvSpPr>
+            <a:spLocks noGrp="1"/>
+          </p:cNvSpPr>
+          <p:nvPr>
+            <p:ph idx="1"/>
+          </p:nvPr>
+        </p:nvSpPr>
+        <p:spPr/>
+        <p:txBody>
+          <a:bodyPr/>
+          <a:lstStyle/>
+          <a:p>
+            <a:pPr lvl="0" indent="0" marL="0">
+              <a:buNone/>
+            </a:pPr>
+            <a:r>
+              <a:rPr>
+                <a:latin typeface="Courier"/>
+              </a:rPr>
+              <a:t>core.parquet</a:t>
+            </a:r>
+            <a:r>
+              <a:rPr/>
+              <a:t> is 30 countries observed over 15 years.</a:t>
+            </a:r>
+          </a:p>
+          <a:p>
+            <a:pPr lvl="0" indent="0" marL="0">
+              <a:buNone/>
+            </a:pPr>
+            <a:r>
+              <a:rPr/>
+              <a:t>Random K-fold puts </a:t>
+            </a:r>
+            <a:r>
+              <a:rPr b="1"/>
+              <a:t>Germany 2019 in training and Germany 2020 in test</a:t>
+            </a:r>
+            <a:r>
+              <a:rPr/>
+              <a:t>.</a:t>
+            </a:r>
+          </a:p>
+          <a:p>
+            <a:pPr lvl="0"/>
+            <a:r>
+              <a:rPr/>
+              <a:t>Countries are highly persistent — productivity this year nearly determines next year</a:t>
+            </a:r>
+          </a:p>
+          <a:p>
+            <a:pPr lvl="0"/>
+            <a:r>
+              <a:rPr/>
+              <a:t>The model can effectively memorise the country, then “predict” it</a:t>
+            </a:r>
+          </a:p>
+          <a:p>
+            <a:pPr lvl="0"/>
+            <a:r>
+              <a:rPr/>
+              <a:t>Your validation error measures </a:t>
+            </a:r>
+            <a:r>
+              <a:rPr b="1"/>
+              <a:t>interpolation within a country</a:t>
+            </a:r>
+            <a:r>
+              <a:rPr/>
+              <a:t>, not forecasting</a:t>
+            </a:r>
+          </a:p>
+          <a:p>
+            <a:pPr lvl="0" indent="0" marL="0">
+              <a:buNone/>
+            </a:pPr>
+            <a:r>
+              <a:rPr/>
+              <a:t>This is not a subtle statistical nicety. On this panel it is the difference between a model that looks excellent and one that is useful.</a:t>
             </a:r>
           </a:p>
         </p:txBody>

--- a/04-bias-variance-and-cross-validation/slides.pptx
+++ b/04-bias-variance-and-cross-validation/slides.pptx
@@ -939,7 +939,7 @@
           <a:bodyPr anchor="t"/>
           <a:lstStyle>
             <a:lvl1pPr algn="l">
-              <a:defRPr sz="3000" b="1" cap="all"/>
+              <a:defRPr sz="2350" b="1" cap="all"/>
             </a:lvl1pPr>
           </a:lstStyle>
           <a:p>
@@ -971,7 +971,7 @@
           <a:lstStyle>
             <a:lvl1pPr marL="0" indent="0">
               <a:buNone/>
-              <a:defRPr sz="1500">
+              <a:defRPr sz="1150">
                 <a:solidFill>
                   <a:schemeClr val="tx1">
                     <a:tint val="75000"/>
@@ -981,7 +981,7 @@
             </a:lvl1pPr>
             <a:lvl2pPr marL="342900" indent="0">
               <a:buNone/>
-              <a:defRPr sz="1350">
+              <a:defRPr sz="1050">
                 <a:solidFill>
                   <a:schemeClr val="tx1">
                     <a:tint val="75000"/>
@@ -991,7 +991,7 @@
             </a:lvl2pPr>
             <a:lvl3pPr marL="685800" indent="0">
               <a:buNone/>
-              <a:defRPr sz="1200">
+              <a:defRPr sz="950">
                 <a:solidFill>
                   <a:schemeClr val="tx1">
                     <a:tint val="75000"/>
@@ -1001,7 +1001,7 @@
             </a:lvl3pPr>
             <a:lvl4pPr marL="1028700" indent="0">
               <a:buNone/>
-              <a:defRPr sz="1050">
+              <a:defRPr sz="800">
                 <a:solidFill>
                   <a:schemeClr val="tx1">
                     <a:tint val="75000"/>
@@ -1011,7 +1011,7 @@
             </a:lvl4pPr>
             <a:lvl5pPr marL="1371600" indent="0">
               <a:buNone/>
-              <a:defRPr sz="1050">
+              <a:defRPr sz="800">
                 <a:solidFill>
                   <a:schemeClr val="tx1">
                     <a:tint val="75000"/>
@@ -1021,7 +1021,7 @@
             </a:lvl5pPr>
             <a:lvl6pPr marL="1714500" indent="0">
               <a:buNone/>
-              <a:defRPr sz="1050">
+              <a:defRPr sz="800">
                 <a:solidFill>
                   <a:schemeClr val="tx1">
                     <a:tint val="75000"/>
@@ -1031,7 +1031,7 @@
             </a:lvl6pPr>
             <a:lvl7pPr marL="2057400" indent="0">
               <a:buNone/>
-              <a:defRPr sz="1050">
+              <a:defRPr sz="800">
                 <a:solidFill>
                   <a:schemeClr val="tx1">
                     <a:tint val="75000"/>
@@ -1041,7 +1041,7 @@
             </a:lvl7pPr>
             <a:lvl8pPr marL="2400300" indent="0">
               <a:buNone/>
-              <a:defRPr sz="1050">
+              <a:defRPr sz="800">
                 <a:solidFill>
                   <a:schemeClr val="tx1">
                     <a:tint val="75000"/>
@@ -1051,7 +1051,7 @@
             </a:lvl8pPr>
             <a:lvl9pPr marL="2743200" indent="0">
               <a:buNone/>
-              <a:defRPr sz="1050">
+              <a:defRPr sz="800">
                 <a:solidFill>
                   <a:schemeClr val="tx1">
                     <a:tint val="75000"/>
@@ -1206,31 +1206,31 @@
           <a:bodyPr/>
           <a:lstStyle>
             <a:lvl1pPr>
-              <a:defRPr sz="2100"/>
+              <a:defRPr sz="1650"/>
             </a:lvl1pPr>
             <a:lvl2pPr>
-              <a:defRPr sz="1800"/>
+              <a:defRPr sz="1400"/>
             </a:lvl2pPr>
             <a:lvl3pPr>
-              <a:defRPr sz="1500"/>
+              <a:defRPr sz="1150"/>
             </a:lvl3pPr>
             <a:lvl4pPr>
-              <a:defRPr sz="1350"/>
+              <a:defRPr sz="1050"/>
             </a:lvl4pPr>
             <a:lvl5pPr>
-              <a:defRPr sz="1350"/>
+              <a:defRPr sz="1050"/>
             </a:lvl5pPr>
             <a:lvl6pPr>
-              <a:defRPr sz="1350"/>
+              <a:defRPr sz="1050"/>
             </a:lvl6pPr>
             <a:lvl7pPr>
-              <a:defRPr sz="1350"/>
+              <a:defRPr sz="1050"/>
             </a:lvl7pPr>
             <a:lvl8pPr>
-              <a:defRPr sz="1350"/>
+              <a:defRPr sz="1050"/>
             </a:lvl8pPr>
             <a:lvl9pPr>
-              <a:defRPr sz="1350"/>
+              <a:defRPr sz="1050"/>
             </a:lvl9pPr>
           </a:lstStyle>
           <a:p>
@@ -1290,31 +1290,31 @@
           <a:bodyPr/>
           <a:lstStyle>
             <a:lvl1pPr>
-              <a:defRPr sz="2100"/>
+              <a:defRPr sz="1650"/>
             </a:lvl1pPr>
             <a:lvl2pPr>
-              <a:defRPr sz="1800"/>
+              <a:defRPr sz="1400"/>
             </a:lvl2pPr>
             <a:lvl3pPr>
-              <a:defRPr sz="1500"/>
+              <a:defRPr sz="1150"/>
             </a:lvl3pPr>
             <a:lvl4pPr>
-              <a:defRPr sz="1350"/>
+              <a:defRPr sz="1050"/>
             </a:lvl4pPr>
             <a:lvl5pPr>
-              <a:defRPr sz="1350"/>
+              <a:defRPr sz="1050"/>
             </a:lvl5pPr>
             <a:lvl6pPr>
-              <a:defRPr sz="1350"/>
+              <a:defRPr sz="1050"/>
             </a:lvl6pPr>
             <a:lvl7pPr>
-              <a:defRPr sz="1350"/>
+              <a:defRPr sz="1050"/>
             </a:lvl7pPr>
             <a:lvl8pPr>
-              <a:defRPr sz="1350"/>
+              <a:defRPr sz="1050"/>
             </a:lvl8pPr>
             <a:lvl9pPr>
-              <a:defRPr sz="1350"/>
+              <a:defRPr sz="1050"/>
             </a:lvl9pPr>
           </a:lstStyle>
           <a:p>
@@ -1496,39 +1496,39 @@
           <a:lstStyle>
             <a:lvl1pPr marL="0" indent="0">
               <a:buNone/>
-              <a:defRPr sz="1800" b="1"/>
+              <a:defRPr sz="1400" b="1"/>
             </a:lvl1pPr>
             <a:lvl2pPr marL="342900" indent="0">
               <a:buNone/>
-              <a:defRPr sz="1500" b="1"/>
+              <a:defRPr sz="1150" b="1"/>
             </a:lvl2pPr>
             <a:lvl3pPr marL="685800" indent="0">
               <a:buNone/>
-              <a:defRPr sz="1350" b="1"/>
+              <a:defRPr sz="1050" b="1"/>
             </a:lvl3pPr>
             <a:lvl4pPr marL="1028700" indent="0">
               <a:buNone/>
-              <a:defRPr sz="1200" b="1"/>
+              <a:defRPr sz="950" b="1"/>
             </a:lvl4pPr>
             <a:lvl5pPr marL="1371600" indent="0">
               <a:buNone/>
-              <a:defRPr sz="1200" b="1"/>
+              <a:defRPr sz="950" b="1"/>
             </a:lvl5pPr>
             <a:lvl6pPr marL="1714500" indent="0">
               <a:buNone/>
-              <a:defRPr sz="1200" b="1"/>
+              <a:defRPr sz="950" b="1"/>
             </a:lvl6pPr>
             <a:lvl7pPr marL="2057400" indent="0">
               <a:buNone/>
-              <a:defRPr sz="1200" b="1"/>
+              <a:defRPr sz="950" b="1"/>
             </a:lvl7pPr>
             <a:lvl8pPr marL="2400300" indent="0">
               <a:buNone/>
-              <a:defRPr sz="1200" b="1"/>
+              <a:defRPr sz="950" b="1"/>
             </a:lvl8pPr>
             <a:lvl9pPr marL="2743200" indent="0">
               <a:buNone/>
-              <a:defRPr sz="1200" b="1"/>
+              <a:defRPr sz="950" b="1"/>
             </a:lvl9pPr>
           </a:lstStyle>
           <a:p>
@@ -1560,31 +1560,31 @@
           <a:bodyPr/>
           <a:lstStyle>
             <a:lvl1pPr>
-              <a:defRPr sz="1800"/>
+              <a:defRPr sz="1400"/>
             </a:lvl1pPr>
             <a:lvl2pPr>
-              <a:defRPr sz="1500"/>
+              <a:defRPr sz="1150"/>
             </a:lvl2pPr>
             <a:lvl3pPr>
-              <a:defRPr sz="1350"/>
+              <a:defRPr sz="1050"/>
             </a:lvl3pPr>
             <a:lvl4pPr>
-              <a:defRPr sz="1200"/>
+              <a:defRPr sz="950"/>
             </a:lvl4pPr>
             <a:lvl5pPr>
-              <a:defRPr sz="1200"/>
+              <a:defRPr sz="950"/>
             </a:lvl5pPr>
             <a:lvl6pPr>
-              <a:defRPr sz="1200"/>
+              <a:defRPr sz="950"/>
             </a:lvl6pPr>
             <a:lvl7pPr>
-              <a:defRPr sz="1200"/>
+              <a:defRPr sz="950"/>
             </a:lvl7pPr>
             <a:lvl8pPr>
-              <a:defRPr sz="1200"/>
+              <a:defRPr sz="950"/>
             </a:lvl8pPr>
             <a:lvl9pPr>
-              <a:defRPr sz="1200"/>
+              <a:defRPr sz="950"/>
             </a:lvl9pPr>
           </a:lstStyle>
           <a:p>
@@ -1645,39 +1645,39 @@
           <a:lstStyle>
             <a:lvl1pPr marL="0" indent="0">
               <a:buNone/>
-              <a:defRPr sz="1800" b="1"/>
+              <a:defRPr sz="1400" b="1"/>
             </a:lvl1pPr>
             <a:lvl2pPr marL="342900" indent="0">
               <a:buNone/>
-              <a:defRPr sz="1500" b="1"/>
+              <a:defRPr sz="1150" b="1"/>
             </a:lvl2pPr>
             <a:lvl3pPr marL="685800" indent="0">
               <a:buNone/>
-              <a:defRPr sz="1350" b="1"/>
+              <a:defRPr sz="1050" b="1"/>
             </a:lvl3pPr>
             <a:lvl4pPr marL="1028700" indent="0">
               <a:buNone/>
-              <a:defRPr sz="1200" b="1"/>
+              <a:defRPr sz="950" b="1"/>
             </a:lvl4pPr>
             <a:lvl5pPr marL="1371600" indent="0">
               <a:buNone/>
-              <a:defRPr sz="1200" b="1"/>
+              <a:defRPr sz="950" b="1"/>
             </a:lvl5pPr>
             <a:lvl6pPr marL="1714500" indent="0">
               <a:buNone/>
-              <a:defRPr sz="1200" b="1"/>
+              <a:defRPr sz="950" b="1"/>
             </a:lvl6pPr>
             <a:lvl7pPr marL="2057400" indent="0">
               <a:buNone/>
-              <a:defRPr sz="1200" b="1"/>
+              <a:defRPr sz="950" b="1"/>
             </a:lvl7pPr>
             <a:lvl8pPr marL="2400300" indent="0">
               <a:buNone/>
-              <a:defRPr sz="1200" b="1"/>
+              <a:defRPr sz="950" b="1"/>
             </a:lvl8pPr>
             <a:lvl9pPr marL="2743200" indent="0">
               <a:buNone/>
-              <a:defRPr sz="1200" b="1"/>
+              <a:defRPr sz="950" b="1"/>
             </a:lvl9pPr>
           </a:lstStyle>
           <a:p>
@@ -1709,31 +1709,31 @@
           <a:bodyPr/>
           <a:lstStyle>
             <a:lvl1pPr>
-              <a:defRPr sz="1800"/>
+              <a:defRPr sz="1400"/>
             </a:lvl1pPr>
             <a:lvl2pPr>
-              <a:defRPr sz="1500"/>
+              <a:defRPr sz="1150"/>
             </a:lvl2pPr>
             <a:lvl3pPr>
-              <a:defRPr sz="1350"/>
+              <a:defRPr sz="1050"/>
             </a:lvl3pPr>
             <a:lvl4pPr>
-              <a:defRPr sz="1200"/>
+              <a:defRPr sz="950"/>
             </a:lvl4pPr>
             <a:lvl5pPr>
-              <a:defRPr sz="1200"/>
+              <a:defRPr sz="950"/>
             </a:lvl5pPr>
             <a:lvl6pPr>
-              <a:defRPr sz="1200"/>
+              <a:defRPr sz="950"/>
             </a:lvl6pPr>
             <a:lvl7pPr>
-              <a:defRPr sz="1200"/>
+              <a:defRPr sz="950"/>
             </a:lvl7pPr>
             <a:lvl8pPr>
-              <a:defRPr sz="1200"/>
+              <a:defRPr sz="950"/>
             </a:lvl8pPr>
             <a:lvl9pPr>
-              <a:defRPr sz="1200"/>
+              <a:defRPr sz="950"/>
             </a:lvl9pPr>
           </a:lstStyle>
           <a:p>
@@ -2100,7 +2100,7 @@
           <a:bodyPr anchor="b"/>
           <a:lstStyle>
             <a:lvl1pPr algn="l">
-              <a:defRPr sz="1500" b="1"/>
+              <a:defRPr sz="1150" b="1"/>
             </a:lvl1pPr>
           </a:lstStyle>
           <a:p>
@@ -2131,31 +2131,31 @@
           <a:bodyPr/>
           <a:lstStyle>
             <a:lvl1pPr>
-              <a:defRPr sz="2400"/>
+              <a:defRPr sz="1850"/>
             </a:lvl1pPr>
             <a:lvl2pPr>
-              <a:defRPr sz="2100"/>
+              <a:defRPr sz="1650"/>
             </a:lvl2pPr>
             <a:lvl3pPr>
-              <a:defRPr sz="1800"/>
+              <a:defRPr sz="1400"/>
             </a:lvl3pPr>
             <a:lvl4pPr>
-              <a:defRPr sz="1500"/>
+              <a:defRPr sz="1150"/>
             </a:lvl4pPr>
             <a:lvl5pPr>
-              <a:defRPr sz="1500"/>
+              <a:defRPr sz="1150"/>
             </a:lvl5pPr>
             <a:lvl6pPr>
-              <a:defRPr sz="1500"/>
+              <a:defRPr sz="1150"/>
             </a:lvl6pPr>
             <a:lvl7pPr>
-              <a:defRPr sz="1500"/>
+              <a:defRPr sz="1150"/>
             </a:lvl7pPr>
             <a:lvl8pPr>
-              <a:defRPr sz="1500"/>
+              <a:defRPr sz="1150"/>
             </a:lvl8pPr>
             <a:lvl9pPr>
-              <a:defRPr sz="1500"/>
+              <a:defRPr sz="1150"/>
             </a:lvl9pPr>
           </a:lstStyle>
           <a:p>
@@ -2216,39 +2216,39 @@
           <a:lstStyle>
             <a:lvl1pPr marL="0" indent="0">
               <a:buNone/>
-              <a:defRPr sz="1050"/>
+              <a:defRPr sz="800"/>
             </a:lvl1pPr>
             <a:lvl2pPr marL="342900" indent="0">
               <a:buNone/>
-              <a:defRPr sz="900"/>
+              <a:defRPr sz="700"/>
             </a:lvl2pPr>
             <a:lvl3pPr marL="685800" indent="0">
               <a:buNone/>
-              <a:defRPr sz="750"/>
+              <a:defRPr sz="700"/>
             </a:lvl3pPr>
             <a:lvl4pPr marL="1028700" indent="0">
               <a:buNone/>
-              <a:defRPr sz="675"/>
+              <a:defRPr sz="700"/>
             </a:lvl4pPr>
             <a:lvl5pPr marL="1371600" indent="0">
               <a:buNone/>
-              <a:defRPr sz="675"/>
+              <a:defRPr sz="700"/>
             </a:lvl5pPr>
             <a:lvl6pPr marL="1714500" indent="0">
               <a:buNone/>
-              <a:defRPr sz="675"/>
+              <a:defRPr sz="700"/>
             </a:lvl6pPr>
             <a:lvl7pPr marL="2057400" indent="0">
               <a:buNone/>
-              <a:defRPr sz="675"/>
+              <a:defRPr sz="700"/>
             </a:lvl7pPr>
             <a:lvl8pPr marL="2400300" indent="0">
               <a:buNone/>
-              <a:defRPr sz="675"/>
+              <a:defRPr sz="700"/>
             </a:lvl8pPr>
             <a:lvl9pPr marL="2743200" indent="0">
               <a:buNone/>
-              <a:defRPr sz="675"/>
+              <a:defRPr sz="700"/>
             </a:lvl9pPr>
           </a:lstStyle>
           <a:p>
@@ -2375,7 +2375,7 @@
           <a:bodyPr anchor="b"/>
           <a:lstStyle>
             <a:lvl1pPr algn="l">
-              <a:defRPr sz="1500" b="1"/>
+              <a:defRPr sz="1150" b="1"/>
             </a:lvl1pPr>
           </a:lstStyle>
           <a:p>
@@ -2407,39 +2407,39 @@
           <a:lstStyle>
             <a:lvl1pPr marL="0" indent="0">
               <a:buNone/>
-              <a:defRPr sz="2400"/>
+              <a:defRPr sz="1850"/>
             </a:lvl1pPr>
             <a:lvl2pPr marL="342900" indent="0">
               <a:buNone/>
-              <a:defRPr sz="2100"/>
+              <a:defRPr sz="1650"/>
             </a:lvl2pPr>
             <a:lvl3pPr marL="685800" indent="0">
               <a:buNone/>
-              <a:defRPr sz="1800"/>
+              <a:defRPr sz="1400"/>
             </a:lvl3pPr>
             <a:lvl4pPr marL="1028700" indent="0">
               <a:buNone/>
-              <a:defRPr sz="1500"/>
+              <a:defRPr sz="1150"/>
             </a:lvl4pPr>
             <a:lvl5pPr marL="1371600" indent="0">
               <a:buNone/>
-              <a:defRPr sz="1500"/>
+              <a:defRPr sz="1150"/>
             </a:lvl5pPr>
             <a:lvl6pPr marL="1714500" indent="0">
               <a:buNone/>
-              <a:defRPr sz="1500"/>
+              <a:defRPr sz="1150"/>
             </a:lvl6pPr>
             <a:lvl7pPr marL="2057400" indent="0">
               <a:buNone/>
-              <a:defRPr sz="1500"/>
+              <a:defRPr sz="1150"/>
             </a:lvl7pPr>
             <a:lvl8pPr marL="2400300" indent="0">
               <a:buNone/>
-              <a:defRPr sz="1500"/>
+              <a:defRPr sz="1150"/>
             </a:lvl8pPr>
             <a:lvl9pPr marL="2743200" indent="0">
               <a:buNone/>
-              <a:defRPr sz="1500"/>
+              <a:defRPr sz="1150"/>
             </a:lvl9pPr>
           </a:lstStyle>
           <a:p>
@@ -2468,39 +2468,39 @@
           <a:lstStyle>
             <a:lvl1pPr marL="0" indent="0">
               <a:buNone/>
-              <a:defRPr sz="1050"/>
+              <a:defRPr sz="800"/>
             </a:lvl1pPr>
             <a:lvl2pPr marL="342900" indent="0">
               <a:buNone/>
-              <a:defRPr sz="900"/>
+              <a:defRPr sz="700"/>
             </a:lvl2pPr>
             <a:lvl3pPr marL="685800" indent="0">
               <a:buNone/>
-              <a:defRPr sz="750"/>
+              <a:defRPr sz="700"/>
             </a:lvl3pPr>
             <a:lvl4pPr marL="1028700" indent="0">
               <a:buNone/>
-              <a:defRPr sz="675"/>
+              <a:defRPr sz="700"/>
             </a:lvl4pPr>
             <a:lvl5pPr marL="1371600" indent="0">
               <a:buNone/>
-              <a:defRPr sz="675"/>
+              <a:defRPr sz="700"/>
             </a:lvl5pPr>
             <a:lvl6pPr marL="1714500" indent="0">
               <a:buNone/>
-              <a:defRPr sz="675"/>
+              <a:defRPr sz="700"/>
             </a:lvl6pPr>
             <a:lvl7pPr marL="2057400" indent="0">
               <a:buNone/>
-              <a:defRPr sz="675"/>
+              <a:defRPr sz="700"/>
             </a:lvl7pPr>
             <a:lvl8pPr marL="2400300" indent="0">
               <a:buNone/>
-              <a:defRPr sz="675"/>
+              <a:defRPr sz="700"/>
             </a:lvl8pPr>
             <a:lvl9pPr marL="2743200" indent="0">
               <a:buNone/>
-              <a:defRPr sz="675"/>
+              <a:defRPr sz="700"/>
             </a:lvl9pPr>
           </a:lstStyle>
           <a:p>
@@ -2728,7 +2728,7 @@
           <a:bodyPr anchor="ctr" bIns="45720" lIns="91440" rIns="91440" rtlCol="0" tIns="45720" vert="horz"/>
           <a:lstStyle>
             <a:lvl1pPr algn="l">
-              <a:defRPr sz="900">
+              <a:defRPr sz="700">
                 <a:solidFill>
                   <a:schemeClr val="tx1">
                     <a:tint val="75000"/>
@@ -2769,7 +2769,7 @@
           <a:bodyPr anchor="ctr" bIns="45720" lIns="91440" rIns="91440" rtlCol="0" tIns="45720" vert="horz"/>
           <a:lstStyle>
             <a:lvl1pPr algn="ctr">
-              <a:defRPr sz="900">
+              <a:defRPr sz="700">
                 <a:solidFill>
                   <a:schemeClr val="tx1">
                     <a:tint val="75000"/>
@@ -2806,7 +2806,7 @@
           <a:bodyPr anchor="ctr" bIns="45720" lIns="91440" rIns="91440" rtlCol="0" tIns="45720" vert="horz"/>
           <a:lstStyle>
             <a:lvl1pPr algn="r">
-              <a:defRPr sz="900">
+              <a:defRPr sz="700">
                 <a:solidFill>
                   <a:schemeClr val="tx1">
                     <a:tint val="75000"/>
@@ -2852,7 +2852,7 @@
           <a:spcPct val="0"/>
         </a:spcBef>
         <a:buNone/>
-        <a:defRPr kern="1200" sz="3300">
+        <a:defRPr kern="1200" sz="2550">
           <a:solidFill>
             <a:schemeClr val="tx1"/>
           </a:solidFill>
@@ -2869,7 +2869,7 @@
         </a:spcBef>
         <a:buFont typeface="Arial"/>
         <a:buChar char="•"/>
-        <a:defRPr kern="1200" sz="2400">
+        <a:defRPr kern="1200" sz="1850">
           <a:solidFill>
             <a:schemeClr val="tx1"/>
           </a:solidFill>
@@ -2884,7 +2884,7 @@
         </a:spcBef>
         <a:buFont typeface="Arial"/>
         <a:buChar char="–"/>
-        <a:defRPr kern="1200" sz="2100">
+        <a:defRPr kern="1200" sz="1650">
           <a:solidFill>
             <a:schemeClr val="tx1"/>
           </a:solidFill>
@@ -2899,7 +2899,7 @@
         </a:spcBef>
         <a:buFont typeface="Arial"/>
         <a:buChar char="•"/>
-        <a:defRPr kern="1200" sz="1800">
+        <a:defRPr kern="1200" sz="1400">
           <a:solidFill>
             <a:schemeClr val="tx1"/>
           </a:solidFill>
@@ -2914,7 +2914,7 @@
         </a:spcBef>
         <a:buFont typeface="Arial"/>
         <a:buChar char="–"/>
-        <a:defRPr kern="1200" sz="1500">
+        <a:defRPr kern="1200" sz="1150">
           <a:solidFill>
             <a:schemeClr val="tx1"/>
           </a:solidFill>
@@ -2929,7 +2929,7 @@
         </a:spcBef>
         <a:buFont typeface="Arial"/>
         <a:buChar char="»"/>
-        <a:defRPr kern="1200" sz="1500">
+        <a:defRPr kern="1200" sz="1150">
           <a:solidFill>
             <a:schemeClr val="tx1"/>
           </a:solidFill>
@@ -2944,7 +2944,7 @@
         </a:spcBef>
         <a:buFont typeface="Arial"/>
         <a:buChar char="•"/>
-        <a:defRPr kern="1200" sz="1500">
+        <a:defRPr kern="1200" sz="1150">
           <a:solidFill>
             <a:schemeClr val="tx1"/>
           </a:solidFill>
@@ -2959,7 +2959,7 @@
         </a:spcBef>
         <a:buFont typeface="Arial"/>
         <a:buChar char="•"/>
-        <a:defRPr kern="1200" sz="1500">
+        <a:defRPr kern="1200" sz="1150">
           <a:solidFill>
             <a:schemeClr val="tx1"/>
           </a:solidFill>
@@ -2974,7 +2974,7 @@
         </a:spcBef>
         <a:buFont typeface="Arial"/>
         <a:buChar char="•"/>
-        <a:defRPr kern="1200" sz="1500">
+        <a:defRPr kern="1200" sz="1150">
           <a:solidFill>
             <a:schemeClr val="tx1"/>
           </a:solidFill>
@@ -2989,7 +2989,7 @@
         </a:spcBef>
         <a:buFont typeface="Arial"/>
         <a:buChar char="•"/>
-        <a:defRPr kern="1200" sz="1500">
+        <a:defRPr kern="1200" sz="1150">
           <a:solidFill>
             <a:schemeClr val="tx1"/>
           </a:solidFill>
@@ -3004,7 +3004,7 @@
         <a:defRPr lang="en-US"/>
       </a:defPPr>
       <a:lvl1pPr algn="l" defTabSz="342900" eaLnBrk="1" hangingPunct="1" latinLnBrk="0" marL="0" rtl="0">
-        <a:defRPr kern="1200" sz="1350">
+        <a:defRPr kern="1200" sz="1050">
           <a:solidFill>
             <a:schemeClr val="tx1"/>
           </a:solidFill>
@@ -3014,7 +3014,7 @@
         </a:defRPr>
       </a:lvl1pPr>
       <a:lvl2pPr algn="l" defTabSz="342900" eaLnBrk="1" hangingPunct="1" latinLnBrk="0" marL="342900" rtl="0">
-        <a:defRPr kern="1200" sz="1350">
+        <a:defRPr kern="1200" sz="1050">
           <a:solidFill>
             <a:schemeClr val="tx1"/>
           </a:solidFill>
@@ -3024,7 +3024,7 @@
         </a:defRPr>
       </a:lvl2pPr>
       <a:lvl3pPr algn="l" defTabSz="342900" eaLnBrk="1" hangingPunct="1" latinLnBrk="0" marL="685800" rtl="0">
-        <a:defRPr kern="1200" sz="1350">
+        <a:defRPr kern="1200" sz="1050">
           <a:solidFill>
             <a:schemeClr val="tx1"/>
           </a:solidFill>
@@ -3034,7 +3034,7 @@
         </a:defRPr>
       </a:lvl3pPr>
       <a:lvl4pPr algn="l" defTabSz="342900" eaLnBrk="1" hangingPunct="1" latinLnBrk="0" marL="1028700" rtl="0">
-        <a:defRPr kern="1200" sz="1350">
+        <a:defRPr kern="1200" sz="1050">
           <a:solidFill>
             <a:schemeClr val="tx1"/>
           </a:solidFill>
@@ -3044,7 +3044,7 @@
         </a:defRPr>
       </a:lvl4pPr>
       <a:lvl5pPr algn="l" defTabSz="342900" eaLnBrk="1" hangingPunct="1" latinLnBrk="0" marL="1371600" rtl="0">
-        <a:defRPr kern="1200" sz="1350">
+        <a:defRPr kern="1200" sz="1050">
           <a:solidFill>
             <a:schemeClr val="tx1"/>
           </a:solidFill>
@@ -3054,7 +3054,7 @@
         </a:defRPr>
       </a:lvl5pPr>
       <a:lvl6pPr algn="l" defTabSz="342900" eaLnBrk="1" hangingPunct="1" latinLnBrk="0" marL="1714500" rtl="0">
-        <a:defRPr kern="1200" sz="1350">
+        <a:defRPr kern="1200" sz="1050">
           <a:solidFill>
             <a:schemeClr val="tx1"/>
           </a:solidFill>
@@ -3064,7 +3064,7 @@
         </a:defRPr>
       </a:lvl6pPr>
       <a:lvl7pPr algn="l" defTabSz="342900" eaLnBrk="1" hangingPunct="1" latinLnBrk="0" marL="2057400" rtl="0">
-        <a:defRPr kern="1200" sz="1350">
+        <a:defRPr kern="1200" sz="1050">
           <a:solidFill>
             <a:schemeClr val="tx1"/>
           </a:solidFill>
@@ -3074,7 +3074,7 @@
         </a:defRPr>
       </a:lvl7pPr>
       <a:lvl8pPr algn="l" defTabSz="342900" eaLnBrk="1" hangingPunct="1" latinLnBrk="0" marL="2400300" rtl="0">
-        <a:defRPr kern="1200" sz="1350">
+        <a:defRPr kern="1200" sz="1050">
           <a:solidFill>
             <a:schemeClr val="tx1"/>
           </a:solidFill>
@@ -3084,7 +3084,7 @@
         </a:defRPr>
       </a:lvl8pPr>
       <a:lvl9pPr algn="l" defTabSz="342900" eaLnBrk="1" hangingPunct="1" latinLnBrk="0" marL="2743200" rtl="0">
-        <a:defRPr kern="1200" sz="1350">
+        <a:defRPr kern="1200" sz="1050">
           <a:solidFill>
             <a:schemeClr val="tx1"/>
           </a:solidFill>

--- a/04-bias-variance-and-cross-validation/slides.pptx
+++ b/04-bias-variance-and-cross-validation/slides.pptx
@@ -939,7 +939,7 @@
           <a:bodyPr anchor="t"/>
           <a:lstStyle>
             <a:lvl1pPr algn="l">
-              <a:defRPr sz="2350" b="1" cap="all"/>
+              <a:defRPr sz="1850" b="1" cap="all"/>
             </a:lvl1pPr>
           </a:lstStyle>
           <a:p>
@@ -971,7 +971,7 @@
           <a:lstStyle>
             <a:lvl1pPr marL="0" indent="0">
               <a:buNone/>
-              <a:defRPr sz="1150">
+              <a:defRPr sz="950">
                 <a:solidFill>
                   <a:schemeClr val="tx1">
                     <a:tint val="75000"/>
@@ -981,7 +981,7 @@
             </a:lvl1pPr>
             <a:lvl2pPr marL="342900" indent="0">
               <a:buNone/>
-              <a:defRPr sz="1050">
+              <a:defRPr sz="850">
                 <a:solidFill>
                   <a:schemeClr val="tx1">
                     <a:tint val="75000"/>
@@ -991,7 +991,7 @@
             </a:lvl2pPr>
             <a:lvl3pPr marL="685800" indent="0">
               <a:buNone/>
-              <a:defRPr sz="950">
+              <a:defRPr sz="750">
                 <a:solidFill>
                   <a:schemeClr val="tx1">
                     <a:tint val="75000"/>
@@ -1001,7 +1001,7 @@
             </a:lvl3pPr>
             <a:lvl4pPr marL="1028700" indent="0">
               <a:buNone/>
-              <a:defRPr sz="800">
+              <a:defRPr sz="650">
                 <a:solidFill>
                   <a:schemeClr val="tx1">
                     <a:tint val="75000"/>
@@ -1011,7 +1011,7 @@
             </a:lvl4pPr>
             <a:lvl5pPr marL="1371600" indent="0">
               <a:buNone/>
-              <a:defRPr sz="800">
+              <a:defRPr sz="650">
                 <a:solidFill>
                   <a:schemeClr val="tx1">
                     <a:tint val="75000"/>
@@ -1021,7 +1021,7 @@
             </a:lvl5pPr>
             <a:lvl6pPr marL="1714500" indent="0">
               <a:buNone/>
-              <a:defRPr sz="800">
+              <a:defRPr sz="650">
                 <a:solidFill>
                   <a:schemeClr val="tx1">
                     <a:tint val="75000"/>
@@ -1031,7 +1031,7 @@
             </a:lvl6pPr>
             <a:lvl7pPr marL="2057400" indent="0">
               <a:buNone/>
-              <a:defRPr sz="800">
+              <a:defRPr sz="650">
                 <a:solidFill>
                   <a:schemeClr val="tx1">
                     <a:tint val="75000"/>
@@ -1041,7 +1041,7 @@
             </a:lvl7pPr>
             <a:lvl8pPr marL="2400300" indent="0">
               <a:buNone/>
-              <a:defRPr sz="800">
+              <a:defRPr sz="650">
                 <a:solidFill>
                   <a:schemeClr val="tx1">
                     <a:tint val="75000"/>
@@ -1051,7 +1051,7 @@
             </a:lvl8pPr>
             <a:lvl9pPr marL="2743200" indent="0">
               <a:buNone/>
-              <a:defRPr sz="800">
+              <a:defRPr sz="650">
                 <a:solidFill>
                   <a:schemeClr val="tx1">
                     <a:tint val="75000"/>
@@ -1206,31 +1206,31 @@
           <a:bodyPr/>
           <a:lstStyle>
             <a:lvl1pPr>
-              <a:defRPr sz="1650"/>
+              <a:defRPr sz="1300"/>
             </a:lvl1pPr>
             <a:lvl2pPr>
-              <a:defRPr sz="1400"/>
+              <a:defRPr sz="1100"/>
             </a:lvl2pPr>
             <a:lvl3pPr>
-              <a:defRPr sz="1150"/>
+              <a:defRPr sz="950"/>
             </a:lvl3pPr>
             <a:lvl4pPr>
-              <a:defRPr sz="1050"/>
+              <a:defRPr sz="850"/>
             </a:lvl4pPr>
             <a:lvl5pPr>
-              <a:defRPr sz="1050"/>
+              <a:defRPr sz="850"/>
             </a:lvl5pPr>
             <a:lvl6pPr>
-              <a:defRPr sz="1050"/>
+              <a:defRPr sz="850"/>
             </a:lvl6pPr>
             <a:lvl7pPr>
-              <a:defRPr sz="1050"/>
+              <a:defRPr sz="850"/>
             </a:lvl7pPr>
             <a:lvl8pPr>
-              <a:defRPr sz="1050"/>
+              <a:defRPr sz="850"/>
             </a:lvl8pPr>
             <a:lvl9pPr>
-              <a:defRPr sz="1050"/>
+              <a:defRPr sz="850"/>
             </a:lvl9pPr>
           </a:lstStyle>
           <a:p>
@@ -1290,31 +1290,31 @@
           <a:bodyPr/>
           <a:lstStyle>
             <a:lvl1pPr>
-              <a:defRPr sz="1650"/>
+              <a:defRPr sz="1300"/>
             </a:lvl1pPr>
             <a:lvl2pPr>
-              <a:defRPr sz="1400"/>
+              <a:defRPr sz="1100"/>
             </a:lvl2pPr>
             <a:lvl3pPr>
-              <a:defRPr sz="1150"/>
+              <a:defRPr sz="950"/>
             </a:lvl3pPr>
             <a:lvl4pPr>
-              <a:defRPr sz="1050"/>
+              <a:defRPr sz="850"/>
             </a:lvl4pPr>
             <a:lvl5pPr>
-              <a:defRPr sz="1050"/>
+              <a:defRPr sz="850"/>
             </a:lvl5pPr>
             <a:lvl6pPr>
-              <a:defRPr sz="1050"/>
+              <a:defRPr sz="850"/>
             </a:lvl6pPr>
             <a:lvl7pPr>
-              <a:defRPr sz="1050"/>
+              <a:defRPr sz="850"/>
             </a:lvl7pPr>
             <a:lvl8pPr>
-              <a:defRPr sz="1050"/>
+              <a:defRPr sz="850"/>
             </a:lvl8pPr>
             <a:lvl9pPr>
-              <a:defRPr sz="1050"/>
+              <a:defRPr sz="850"/>
             </a:lvl9pPr>
           </a:lstStyle>
           <a:p>
@@ -1496,39 +1496,39 @@
           <a:lstStyle>
             <a:lvl1pPr marL="0" indent="0">
               <a:buNone/>
-              <a:defRPr sz="1400" b="1"/>
+              <a:defRPr sz="1100" b="1"/>
             </a:lvl1pPr>
             <a:lvl2pPr marL="342900" indent="0">
               <a:buNone/>
-              <a:defRPr sz="1150" b="1"/>
+              <a:defRPr sz="950" b="1"/>
             </a:lvl2pPr>
             <a:lvl3pPr marL="685800" indent="0">
               <a:buNone/>
-              <a:defRPr sz="1050" b="1"/>
+              <a:defRPr sz="850" b="1"/>
             </a:lvl3pPr>
             <a:lvl4pPr marL="1028700" indent="0">
               <a:buNone/>
-              <a:defRPr sz="950" b="1"/>
+              <a:defRPr sz="750" b="1"/>
             </a:lvl4pPr>
             <a:lvl5pPr marL="1371600" indent="0">
               <a:buNone/>
-              <a:defRPr sz="950" b="1"/>
+              <a:defRPr sz="750" b="1"/>
             </a:lvl5pPr>
             <a:lvl6pPr marL="1714500" indent="0">
               <a:buNone/>
-              <a:defRPr sz="950" b="1"/>
+              <a:defRPr sz="750" b="1"/>
             </a:lvl6pPr>
             <a:lvl7pPr marL="2057400" indent="0">
               <a:buNone/>
-              <a:defRPr sz="950" b="1"/>
+              <a:defRPr sz="750" b="1"/>
             </a:lvl7pPr>
             <a:lvl8pPr marL="2400300" indent="0">
               <a:buNone/>
-              <a:defRPr sz="950" b="1"/>
+              <a:defRPr sz="750" b="1"/>
             </a:lvl8pPr>
             <a:lvl9pPr marL="2743200" indent="0">
               <a:buNone/>
-              <a:defRPr sz="950" b="1"/>
+              <a:defRPr sz="750" b="1"/>
             </a:lvl9pPr>
           </a:lstStyle>
           <a:p>
@@ -1560,31 +1560,31 @@
           <a:bodyPr/>
           <a:lstStyle>
             <a:lvl1pPr>
-              <a:defRPr sz="1400"/>
+              <a:defRPr sz="1100"/>
             </a:lvl1pPr>
             <a:lvl2pPr>
-              <a:defRPr sz="1150"/>
+              <a:defRPr sz="950"/>
             </a:lvl2pPr>
             <a:lvl3pPr>
-              <a:defRPr sz="1050"/>
+              <a:defRPr sz="850"/>
             </a:lvl3pPr>
             <a:lvl4pPr>
-              <a:defRPr sz="950"/>
+              <a:defRPr sz="750"/>
             </a:lvl4pPr>
             <a:lvl5pPr>
-              <a:defRPr sz="950"/>
+              <a:defRPr sz="750"/>
             </a:lvl5pPr>
             <a:lvl6pPr>
-              <a:defRPr sz="950"/>
+              <a:defRPr sz="750"/>
             </a:lvl6pPr>
             <a:lvl7pPr>
-              <a:defRPr sz="950"/>
+              <a:defRPr sz="750"/>
             </a:lvl7pPr>
             <a:lvl8pPr>
-              <a:defRPr sz="950"/>
+              <a:defRPr sz="750"/>
             </a:lvl8pPr>
             <a:lvl9pPr>
-              <a:defRPr sz="950"/>
+              <a:defRPr sz="750"/>
             </a:lvl9pPr>
           </a:lstStyle>
           <a:p>
@@ -1645,39 +1645,39 @@
           <a:lstStyle>
             <a:lvl1pPr marL="0" indent="0">
               <a:buNone/>
-              <a:defRPr sz="1400" b="1"/>
+              <a:defRPr sz="1100" b="1"/>
             </a:lvl1pPr>
             <a:lvl2pPr marL="342900" indent="0">
               <a:buNone/>
-              <a:defRPr sz="1150" b="1"/>
+              <a:defRPr sz="950" b="1"/>
             </a:lvl2pPr>
             <a:lvl3pPr marL="685800" indent="0">
               <a:buNone/>
-              <a:defRPr sz="1050" b="1"/>
+              <a:defRPr sz="850" b="1"/>
             </a:lvl3pPr>
             <a:lvl4pPr marL="1028700" indent="0">
               <a:buNone/>
-              <a:defRPr sz="950" b="1"/>
+              <a:defRPr sz="750" b="1"/>
             </a:lvl4pPr>
             <a:lvl5pPr marL="1371600" indent="0">
               <a:buNone/>
-              <a:defRPr sz="950" b="1"/>
+              <a:defRPr sz="750" b="1"/>
             </a:lvl5pPr>
             <a:lvl6pPr marL="1714500" indent="0">
               <a:buNone/>
-              <a:defRPr sz="950" b="1"/>
+              <a:defRPr sz="750" b="1"/>
             </a:lvl6pPr>
             <a:lvl7pPr marL="2057400" indent="0">
               <a:buNone/>
-              <a:defRPr sz="950" b="1"/>
+              <a:defRPr sz="750" b="1"/>
             </a:lvl7pPr>
             <a:lvl8pPr marL="2400300" indent="0">
               <a:buNone/>
-              <a:defRPr sz="950" b="1"/>
+              <a:defRPr sz="750" b="1"/>
             </a:lvl8pPr>
             <a:lvl9pPr marL="2743200" indent="0">
               <a:buNone/>
-              <a:defRPr sz="950" b="1"/>
+              <a:defRPr sz="750" b="1"/>
             </a:lvl9pPr>
           </a:lstStyle>
           <a:p>
@@ -1709,31 +1709,31 @@
           <a:bodyPr/>
           <a:lstStyle>
             <a:lvl1pPr>
-              <a:defRPr sz="1400"/>
+              <a:defRPr sz="1100"/>
             </a:lvl1pPr>
             <a:lvl2pPr>
-              <a:defRPr sz="1150"/>
+              <a:defRPr sz="950"/>
             </a:lvl2pPr>
             <a:lvl3pPr>
-              <a:defRPr sz="1050"/>
+              <a:defRPr sz="850"/>
             </a:lvl3pPr>
             <a:lvl4pPr>
-              <a:defRPr sz="950"/>
+              <a:defRPr sz="750"/>
             </a:lvl4pPr>
             <a:lvl5pPr>
-              <a:defRPr sz="950"/>
+              <a:defRPr sz="750"/>
             </a:lvl5pPr>
             <a:lvl6pPr>
-              <a:defRPr sz="950"/>
+              <a:defRPr sz="750"/>
             </a:lvl6pPr>
             <a:lvl7pPr>
-              <a:defRPr sz="950"/>
+              <a:defRPr sz="750"/>
             </a:lvl7pPr>
             <a:lvl8pPr>
-              <a:defRPr sz="950"/>
+              <a:defRPr sz="750"/>
             </a:lvl8pPr>
             <a:lvl9pPr>
-              <a:defRPr sz="950"/>
+              <a:defRPr sz="750"/>
             </a:lvl9pPr>
           </a:lstStyle>
           <a:p>
@@ -2100,7 +2100,7 @@
           <a:bodyPr anchor="b"/>
           <a:lstStyle>
             <a:lvl1pPr algn="l">
-              <a:defRPr sz="1150" b="1"/>
+              <a:defRPr sz="950" b="1"/>
             </a:lvl1pPr>
           </a:lstStyle>
           <a:p>
@@ -2131,31 +2131,31 @@
           <a:bodyPr/>
           <a:lstStyle>
             <a:lvl1pPr>
-              <a:defRPr sz="1850"/>
+              <a:defRPr sz="1500"/>
             </a:lvl1pPr>
             <a:lvl2pPr>
-              <a:defRPr sz="1650"/>
+              <a:defRPr sz="1300"/>
             </a:lvl2pPr>
             <a:lvl3pPr>
-              <a:defRPr sz="1400"/>
+              <a:defRPr sz="1100"/>
             </a:lvl3pPr>
             <a:lvl4pPr>
-              <a:defRPr sz="1150"/>
+              <a:defRPr sz="950"/>
             </a:lvl4pPr>
             <a:lvl5pPr>
-              <a:defRPr sz="1150"/>
+              <a:defRPr sz="950"/>
             </a:lvl5pPr>
             <a:lvl6pPr>
-              <a:defRPr sz="1150"/>
+              <a:defRPr sz="950"/>
             </a:lvl6pPr>
             <a:lvl7pPr>
-              <a:defRPr sz="1150"/>
+              <a:defRPr sz="950"/>
             </a:lvl7pPr>
             <a:lvl8pPr>
-              <a:defRPr sz="1150"/>
+              <a:defRPr sz="950"/>
             </a:lvl8pPr>
             <a:lvl9pPr>
-              <a:defRPr sz="1150"/>
+              <a:defRPr sz="950"/>
             </a:lvl9pPr>
           </a:lstStyle>
           <a:p>
@@ -2216,39 +2216,39 @@
           <a:lstStyle>
             <a:lvl1pPr marL="0" indent="0">
               <a:buNone/>
-              <a:defRPr sz="800"/>
+              <a:defRPr sz="650"/>
             </a:lvl1pPr>
             <a:lvl2pPr marL="342900" indent="0">
               <a:buNone/>
-              <a:defRPr sz="700"/>
+              <a:defRPr sz="550"/>
             </a:lvl2pPr>
             <a:lvl3pPr marL="685800" indent="0">
               <a:buNone/>
-              <a:defRPr sz="700"/>
+              <a:defRPr sz="550"/>
             </a:lvl3pPr>
             <a:lvl4pPr marL="1028700" indent="0">
               <a:buNone/>
-              <a:defRPr sz="700"/>
+              <a:defRPr sz="550"/>
             </a:lvl4pPr>
             <a:lvl5pPr marL="1371600" indent="0">
               <a:buNone/>
-              <a:defRPr sz="700"/>
+              <a:defRPr sz="550"/>
             </a:lvl5pPr>
             <a:lvl6pPr marL="1714500" indent="0">
               <a:buNone/>
-              <a:defRPr sz="700"/>
+              <a:defRPr sz="550"/>
             </a:lvl6pPr>
             <a:lvl7pPr marL="2057400" indent="0">
               <a:buNone/>
-              <a:defRPr sz="700"/>
+              <a:defRPr sz="550"/>
             </a:lvl7pPr>
             <a:lvl8pPr marL="2400300" indent="0">
               <a:buNone/>
-              <a:defRPr sz="700"/>
+              <a:defRPr sz="550"/>
             </a:lvl8pPr>
             <a:lvl9pPr marL="2743200" indent="0">
               <a:buNone/>
-              <a:defRPr sz="700"/>
+              <a:defRPr sz="550"/>
             </a:lvl9pPr>
           </a:lstStyle>
           <a:p>
@@ -2375,7 +2375,7 @@
           <a:bodyPr anchor="b"/>
           <a:lstStyle>
             <a:lvl1pPr algn="l">
-              <a:defRPr sz="1150" b="1"/>
+              <a:defRPr sz="950" b="1"/>
             </a:lvl1pPr>
           </a:lstStyle>
           <a:p>
@@ -2407,39 +2407,39 @@
           <a:lstStyle>
             <a:lvl1pPr marL="0" indent="0">
               <a:buNone/>
-              <a:defRPr sz="1850"/>
+              <a:defRPr sz="1500"/>
             </a:lvl1pPr>
             <a:lvl2pPr marL="342900" indent="0">
               <a:buNone/>
-              <a:defRPr sz="1650"/>
+              <a:defRPr sz="1300"/>
             </a:lvl2pPr>
             <a:lvl3pPr marL="685800" indent="0">
               <a:buNone/>
-              <a:defRPr sz="1400"/>
+              <a:defRPr sz="1100"/>
             </a:lvl3pPr>
             <a:lvl4pPr marL="1028700" indent="0">
               <a:buNone/>
-              <a:defRPr sz="1150"/>
+              <a:defRPr sz="950"/>
             </a:lvl4pPr>
             <a:lvl5pPr marL="1371600" indent="0">
               <a:buNone/>
-              <a:defRPr sz="1150"/>
+              <a:defRPr sz="950"/>
             </a:lvl5pPr>
             <a:lvl6pPr marL="1714500" indent="0">
               <a:buNone/>
-              <a:defRPr sz="1150"/>
+              <a:defRPr sz="950"/>
             </a:lvl6pPr>
             <a:lvl7pPr marL="2057400" indent="0">
               <a:buNone/>
-              <a:defRPr sz="1150"/>
+              <a:defRPr sz="950"/>
             </a:lvl7pPr>
             <a:lvl8pPr marL="2400300" indent="0">
               <a:buNone/>
-              <a:defRPr sz="1150"/>
+              <a:defRPr sz="950"/>
             </a:lvl8pPr>
             <a:lvl9pPr marL="2743200" indent="0">
               <a:buNone/>
-              <a:defRPr sz="1150"/>
+              <a:defRPr sz="950"/>
             </a:lvl9pPr>
           </a:lstStyle>
           <a:p>
@@ -2468,39 +2468,39 @@
           <a:lstStyle>
             <a:lvl1pPr marL="0" indent="0">
               <a:buNone/>
-              <a:defRPr sz="800"/>
+              <a:defRPr sz="650"/>
             </a:lvl1pPr>
             <a:lvl2pPr marL="342900" indent="0">
               <a:buNone/>
-              <a:defRPr sz="700"/>
+              <a:defRPr sz="550"/>
             </a:lvl2pPr>
             <a:lvl3pPr marL="685800" indent="0">
               <a:buNone/>
-              <a:defRPr sz="700"/>
+              <a:defRPr sz="550"/>
             </a:lvl3pPr>
             <a:lvl4pPr marL="1028700" indent="0">
               <a:buNone/>
-              <a:defRPr sz="700"/>
+              <a:defRPr sz="550"/>
             </a:lvl4pPr>
             <a:lvl5pPr marL="1371600" indent="0">
               <a:buNone/>
-              <a:defRPr sz="700"/>
+              <a:defRPr sz="550"/>
             </a:lvl5pPr>
             <a:lvl6pPr marL="1714500" indent="0">
               <a:buNone/>
-              <a:defRPr sz="700"/>
+              <a:defRPr sz="550"/>
             </a:lvl6pPr>
             <a:lvl7pPr marL="2057400" indent="0">
               <a:buNone/>
-              <a:defRPr sz="700"/>
+              <a:defRPr sz="550"/>
             </a:lvl7pPr>
             <a:lvl8pPr marL="2400300" indent="0">
               <a:buNone/>
-              <a:defRPr sz="700"/>
+              <a:defRPr sz="550"/>
             </a:lvl8pPr>
             <a:lvl9pPr marL="2743200" indent="0">
               <a:buNone/>
-              <a:defRPr sz="700"/>
+              <a:defRPr sz="550"/>
             </a:lvl9pPr>
           </a:lstStyle>
           <a:p>
@@ -2728,7 +2728,7 @@
           <a:bodyPr anchor="ctr" bIns="45720" lIns="91440" rIns="91440" rtlCol="0" tIns="45720" vert="horz"/>
           <a:lstStyle>
             <a:lvl1pPr algn="l">
-              <a:defRPr sz="700">
+              <a:defRPr sz="550">
                 <a:solidFill>
                   <a:schemeClr val="tx1">
                     <a:tint val="75000"/>
@@ -2769,7 +2769,7 @@
           <a:bodyPr anchor="ctr" bIns="45720" lIns="91440" rIns="91440" rtlCol="0" tIns="45720" vert="horz"/>
           <a:lstStyle>
             <a:lvl1pPr algn="ctr">
-              <a:defRPr sz="700">
+              <a:defRPr sz="550">
                 <a:solidFill>
                   <a:schemeClr val="tx1">
                     <a:tint val="75000"/>
@@ -2806,7 +2806,7 @@
           <a:bodyPr anchor="ctr" bIns="45720" lIns="91440" rIns="91440" rtlCol="0" tIns="45720" vert="horz"/>
           <a:lstStyle>
             <a:lvl1pPr algn="r">
-              <a:defRPr sz="700">
+              <a:defRPr sz="550">
                 <a:solidFill>
                   <a:schemeClr val="tx1">
                     <a:tint val="75000"/>
@@ -2852,7 +2852,7 @@
           <a:spcPct val="0"/>
         </a:spcBef>
         <a:buNone/>
-        <a:defRPr kern="1200" sz="2550">
+        <a:defRPr kern="1200" sz="2050">
           <a:solidFill>
             <a:schemeClr val="tx1"/>
           </a:solidFill>
@@ -2869,7 +2869,7 @@
         </a:spcBef>
         <a:buFont typeface="Arial"/>
         <a:buChar char="•"/>
-        <a:defRPr kern="1200" sz="1850">
+        <a:defRPr kern="1200" sz="1500">
           <a:solidFill>
             <a:schemeClr val="tx1"/>
           </a:solidFill>
@@ -2884,7 +2884,7 @@
         </a:spcBef>
         <a:buFont typeface="Arial"/>
         <a:buChar char="–"/>
-        <a:defRPr kern="1200" sz="1650">
+        <a:defRPr kern="1200" sz="1300">
           <a:solidFill>
             <a:schemeClr val="tx1"/>
           </a:solidFill>
@@ -2899,7 +2899,7 @@
         </a:spcBef>
         <a:buFont typeface="Arial"/>
         <a:buChar char="•"/>
-        <a:defRPr kern="1200" sz="1400">
+        <a:defRPr kern="1200" sz="1100">
           <a:solidFill>
             <a:schemeClr val="tx1"/>
           </a:solidFill>
@@ -2914,7 +2914,7 @@
         </a:spcBef>
         <a:buFont typeface="Arial"/>
         <a:buChar char="–"/>
-        <a:defRPr kern="1200" sz="1150">
+        <a:defRPr kern="1200" sz="950">
           <a:solidFill>
             <a:schemeClr val="tx1"/>
           </a:solidFill>
@@ -2929,7 +2929,7 @@
         </a:spcBef>
         <a:buFont typeface="Arial"/>
         <a:buChar char="»"/>
-        <a:defRPr kern="1200" sz="1150">
+        <a:defRPr kern="1200" sz="950">
           <a:solidFill>
             <a:schemeClr val="tx1"/>
           </a:solidFill>
@@ -2944,7 +2944,7 @@
         </a:spcBef>
         <a:buFont typeface="Arial"/>
         <a:buChar char="•"/>
-        <a:defRPr kern="1200" sz="1150">
+        <a:defRPr kern="1200" sz="950">
           <a:solidFill>
             <a:schemeClr val="tx1"/>
           </a:solidFill>
@@ -2959,7 +2959,7 @@
         </a:spcBef>
         <a:buFont typeface="Arial"/>
         <a:buChar char="•"/>
-        <a:defRPr kern="1200" sz="1150">
+        <a:defRPr kern="1200" sz="950">
           <a:solidFill>
             <a:schemeClr val="tx1"/>
           </a:solidFill>
@@ -2974,7 +2974,7 @@
         </a:spcBef>
         <a:buFont typeface="Arial"/>
         <a:buChar char="•"/>
-        <a:defRPr kern="1200" sz="1150">
+        <a:defRPr kern="1200" sz="950">
           <a:solidFill>
             <a:schemeClr val="tx1"/>
           </a:solidFill>
@@ -2989,7 +2989,7 @@
         </a:spcBef>
         <a:buFont typeface="Arial"/>
         <a:buChar char="•"/>
-        <a:defRPr kern="1200" sz="1150">
+        <a:defRPr kern="1200" sz="950">
           <a:solidFill>
             <a:schemeClr val="tx1"/>
           </a:solidFill>
@@ -3004,7 +3004,7 @@
         <a:defRPr lang="en-US"/>
       </a:defPPr>
       <a:lvl1pPr algn="l" defTabSz="342900" eaLnBrk="1" hangingPunct="1" latinLnBrk="0" marL="0" rtl="0">
-        <a:defRPr kern="1200" sz="1050">
+        <a:defRPr kern="1200" sz="850">
           <a:solidFill>
             <a:schemeClr val="tx1"/>
           </a:solidFill>
@@ -3014,7 +3014,7 @@
         </a:defRPr>
       </a:lvl1pPr>
       <a:lvl2pPr algn="l" defTabSz="342900" eaLnBrk="1" hangingPunct="1" latinLnBrk="0" marL="342900" rtl="0">
-        <a:defRPr kern="1200" sz="1050">
+        <a:defRPr kern="1200" sz="850">
           <a:solidFill>
             <a:schemeClr val="tx1"/>
           </a:solidFill>
@@ -3024,7 +3024,7 @@
         </a:defRPr>
       </a:lvl2pPr>
       <a:lvl3pPr algn="l" defTabSz="342900" eaLnBrk="1" hangingPunct="1" latinLnBrk="0" marL="685800" rtl="0">
-        <a:defRPr kern="1200" sz="1050">
+        <a:defRPr kern="1200" sz="850">
           <a:solidFill>
             <a:schemeClr val="tx1"/>
           </a:solidFill>
@@ -3034,7 +3034,7 @@
         </a:defRPr>
       </a:lvl3pPr>
       <a:lvl4pPr algn="l" defTabSz="342900" eaLnBrk="1" hangingPunct="1" latinLnBrk="0" marL="1028700" rtl="0">
-        <a:defRPr kern="1200" sz="1050">
+        <a:defRPr kern="1200" sz="850">
           <a:solidFill>
             <a:schemeClr val="tx1"/>
           </a:solidFill>
@@ -3044,7 +3044,7 @@
         </a:defRPr>
       </a:lvl4pPr>
       <a:lvl5pPr algn="l" defTabSz="342900" eaLnBrk="1" hangingPunct="1" latinLnBrk="0" marL="1371600" rtl="0">
-        <a:defRPr kern="1200" sz="1050">
+        <a:defRPr kern="1200" sz="850">
           <a:solidFill>
             <a:schemeClr val="tx1"/>
           </a:solidFill>
@@ -3054,7 +3054,7 @@
         </a:defRPr>
       </a:lvl5pPr>
       <a:lvl6pPr algn="l" defTabSz="342900" eaLnBrk="1" hangingPunct="1" latinLnBrk="0" marL="1714500" rtl="0">
-        <a:defRPr kern="1200" sz="1050">
+        <a:defRPr kern="1200" sz="850">
           <a:solidFill>
             <a:schemeClr val="tx1"/>
           </a:solidFill>
@@ -3064,7 +3064,7 @@
         </a:defRPr>
       </a:lvl6pPr>
       <a:lvl7pPr algn="l" defTabSz="342900" eaLnBrk="1" hangingPunct="1" latinLnBrk="0" marL="2057400" rtl="0">
-        <a:defRPr kern="1200" sz="1050">
+        <a:defRPr kern="1200" sz="850">
           <a:solidFill>
             <a:schemeClr val="tx1"/>
           </a:solidFill>
@@ -3074,7 +3074,7 @@
         </a:defRPr>
       </a:lvl7pPr>
       <a:lvl8pPr algn="l" defTabSz="342900" eaLnBrk="1" hangingPunct="1" latinLnBrk="0" marL="2400300" rtl="0">
-        <a:defRPr kern="1200" sz="1050">
+        <a:defRPr kern="1200" sz="850">
           <a:solidFill>
             <a:schemeClr val="tx1"/>
           </a:solidFill>
@@ -3084,7 +3084,7 @@
         </a:defRPr>
       </a:lvl8pPr>
       <a:lvl9pPr algn="l" defTabSz="342900" eaLnBrk="1" hangingPunct="1" latinLnBrk="0" marL="2743200" rtl="0">
-        <a:defRPr kern="1200" sz="1050">
+        <a:defRPr kern="1200" sz="850">
           <a:solidFill>
             <a:schemeClr val="tx1"/>
           </a:solidFill>

--- a/04-bias-variance-and-cross-validation/slides.pptx
+++ b/04-bias-variance-and-cross-validation/slides.pptx
@@ -2821,6 +2821,72 @@
               <a:t>‹#›</a:t>
             </a:fld>
             <a:endParaRPr lang="en-US"/>
+          </a:p>
+        </p:txBody>
+      </p:sp>
+      <p:sp>
+        <p:nvSpPr>
+          <p:cNvPr id="7" name="Author Footer"/>
+          <p:cNvSpPr txBox="1"/>
+          <p:nvPr/>
+        </p:nvSpPr>
+        <p:spPr>
+          <a:xfrm>
+            <a:off x="457200" y="4735000"/>
+            <a:ext cx="5000000" cy="260000"/>
+          </a:xfrm>
+          <a:prstGeom prst="rect">
+            <a:avLst/>
+          </a:prstGeom>
+          <a:noFill/>
+        </p:spPr>
+        <p:txBody>
+          <a:bodyPr anchor="ctr" bIns="0" lIns="0" rIns="0" tIns="0" wrap="square"/>
+          <a:lstStyle/>
+          <a:p>
+            <a:pPr algn="l"/>
+            <a:r>
+              <a:rPr dirty="0" lang="en-US" sz="900">
+                <a:solidFill>
+                  <a:srgbClr val="6E7275"/>
+                </a:solidFill>
+                <a:latin typeface="+mn-lt"/>
+              </a:rPr>
+              <a:t>Thierry Warin, PhD</a:t>
+            </a:r>
+          </a:p>
+        </p:txBody>
+      </p:sp>
+      <p:sp>
+        <p:nvSpPr>
+          <p:cNvPr id="8" name="Slide Number Footer"/>
+          <p:cNvSpPr txBox="1"/>
+          <p:nvPr/>
+        </p:nvSpPr>
+        <p:spPr>
+          <a:xfrm>
+            <a:off x="7200000" y="4735000"/>
+            <a:ext cx="1486800" cy="260000"/>
+          </a:xfrm>
+          <a:prstGeom prst="rect">
+            <a:avLst/>
+          </a:prstGeom>
+          <a:noFill/>
+        </p:spPr>
+        <p:txBody>
+          <a:bodyPr anchor="ctr" bIns="0" lIns="0" rIns="0" tIns="0" wrap="square"/>
+          <a:lstStyle/>
+          <a:p>
+            <a:pPr algn="r"/>
+            <a:fld id="{9B1A2C3D-4E5F-6A7B-8C9D-0E1F2A3B4C5D}" type="slidenum">
+              <a:rPr dirty="0" lang="en-US" sz="900">
+                <a:solidFill>
+                  <a:srgbClr val="6E7275"/>
+                </a:solidFill>
+                <a:latin typeface="+mn-lt"/>
+              </a:rPr>
+              <a:t>2</a:t>
+            </a:fld>
           </a:p>
         </p:txBody>
       </p:sp>
@@ -3201,7 +3267,7 @@
             </a:pPr>
             <a:r>
               <a:rPr/>
-              <a:t>18 August 2026</a:t>
+              <a:t>19 August 2026</a:t>
             </a:r>
           </a:p>
         </p:txBody>

--- a/04-bias-variance-and-cross-validation/slides.pptx
+++ b/04-bias-variance-and-cross-validation/slides.pptx
@@ -3206,7 +3206,7 @@
             </a:pPr>
             <a:r>
               <a:rPr/>
-              <a:t>Bias, Variance, and Honest Validation</a:t>
+              <a:t>Bias–Variance, Overfitting, Cross-Validation</a:t>
             </a:r>
           </a:p>
         </p:txBody>
@@ -3236,7 +3236,7 @@
             </a:pPr>
             <a:r>
               <a:rPr/>
-              <a:t>Session 04 · Why random K-fold is the wrong answer for a panel</a:t>
+              <a:t>Session 04 · Lecture, first half</a:t>
             </a:r>
             <a:br/>
             <a:br/>
@@ -3267,7 +3267,7 @@
             </a:pPr>
             <a:r>
               <a:rPr/>
-              <a:t>19 August 2026</a:t>
+              <a:t>20 August 2026</a:t>
             </a:r>
           </a:p>
         </p:txBody>
@@ -3314,7 +3314,2471 @@
             </a:pPr>
             <a:r>
               <a:rPr/>
-              <a:t>Three splits, three questions</a:t>
+              <a:t>How optimistic is training error?</a:t>
+            </a:r>
+          </a:p>
+        </p:txBody>
+      </p:sp>
+      <mc:AlternateContent xmlns:mc="http://schemas.openxmlformats.org/markup-compatibility/2006">
+        <mc:Choice xmlns:a14="http://schemas.microsoft.com/office/drawing/2010/main" Requires="a14">
+          <p:sp>
+            <p:nvSpPr>
+              <p:cNvPr id="3" name="Content Placeholder 2"/>
+              <p:cNvSpPr>
+                <a:spLocks noGrp="1"/>
+              </p:cNvSpPr>
+              <p:nvPr>
+                <p:ph idx="1"/>
+              </p:nvPr>
+            </p:nvSpPr>
+            <p:spPr/>
+            <p:txBody>
+              <a:bodyPr/>
+              <a:lstStyle/>
+              <a:p>
+                <a:pPr lvl="0" indent="0" marL="0">
+                  <a:buNone/>
+                </a:pPr>
+                <a:r>
+                  <a:rPr/>
+                  <a:t>Let </a:t>
+                </a:r>
+                <a14:m>
+                  <m:oMath xmlns:m="http://schemas.openxmlformats.org/officeDocument/2006/math">
+                    <m:r>
+                      <m:rPr>
+                        <m:sty m:val="p"/>
+                      </m:rPr>
+                      <m:t>err</m:t>
+                    </m:r>
+                    <m:r>
+                      <m:rPr>
+                        <m:sty m:val="p"/>
+                      </m:rPr>
+                      <m:t>=</m:t>
+                    </m:r>
+                    <m:f>
+                      <m:fPr>
+                        <m:type m:val="bar"/>
+                      </m:fPr>
+                      <m:num>
+                        <m:r>
+                          <m:t>1</m:t>
+                        </m:r>
+                      </m:num>
+                      <m:den>
+                        <m:r>
+                          <m:t>n</m:t>
+                        </m:r>
+                      </m:den>
+                    </m:f>
+                    <m:nary>
+                      <m:naryPr>
+                        <m:chr m:val="∑"/>
+                        <m:limLoc m:val="undOvr"/>
+                        <m:subHide m:val="off"/>
+                        <m:supHide m:val="on"/>
+                      </m:naryPr>
+                      <m:sub>
+                        <m:r>
+                          <m:t>i</m:t>
+                        </m:r>
+                      </m:sub>
+                      <m:sup>
+                        <m:r>
+                          <m:t>​</m:t>
+                        </m:r>
+                      </m:sup>
+                      <m:e>
+                        <m:sSup>
+                          <m:e>
+                            <m:d>
+                              <m:dPr>
+                                <m:begChr m:val="("/>
+                                <m:sepChr m:val=""/>
+                                <m:endChr m:val=")"/>
+                                <m:grow/>
+                              </m:dPr>
+                              <m:e>
+                                <m:sSub>
+                                  <m:e>
+                                    <m:r>
+                                      <m:t>y</m:t>
+                                    </m:r>
+                                  </m:e>
+                                  <m:sub>
+                                    <m:r>
+                                      <m:t>i</m:t>
+                                    </m:r>
+                                  </m:sub>
+                                </m:sSub>
+                                <m:r>
+                                  <m:rPr>
+                                    <m:sty m:val="p"/>
+                                  </m:rPr>
+                                  <m:t>−</m:t>
+                                </m:r>
+                                <m:acc>
+                                  <m:accPr>
+                                    <m:chr m:val="̂"/>
+                                  </m:accPr>
+                                  <m:e>
+                                    <m:r>
+                                      <m:t>f</m:t>
+                                    </m:r>
+                                  </m:e>
+                                </m:acc>
+                                <m:d>
+                                  <m:dPr>
+                                    <m:begChr m:val="("/>
+                                    <m:sepChr m:val=""/>
+                                    <m:endChr m:val=")"/>
+                                    <m:grow/>
+                                  </m:dPr>
+                                  <m:e>
+                                    <m:sSub>
+                                      <m:e>
+                                        <m:r>
+                                          <m:t>x</m:t>
+                                        </m:r>
+                                      </m:e>
+                                      <m:sub>
+                                        <m:r>
+                                          <m:t>i</m:t>
+                                        </m:r>
+                                      </m:sub>
+                                    </m:sSub>
+                                  </m:e>
+                                </m:d>
+                              </m:e>
+                            </m:d>
+                          </m:e>
+                          <m:sup>
+                            <m:r>
+                              <m:t>2</m:t>
+                            </m:r>
+                          </m:sup>
+                        </m:sSup>
+                      </m:e>
+                    </m:nary>
+                  </m:oMath>
+                </a14:m>
+                <a:r>
+                  <a:rPr/>
+                  <a:t> be training error and </a:t>
+                </a:r>
+                <a14:m>
+                  <m:oMath xmlns:m="http://schemas.openxmlformats.org/officeDocument/2006/math">
+                    <m:sSub>
+                      <m:e>
+                        <m:r>
+                          <m:rPr>
+                            <m:sty m:val="p"/>
+                          </m:rPr>
+                          <m:t>Err</m:t>
+                        </m:r>
+                      </m:e>
+                      <m:sub>
+                        <m:r>
+                          <m:rPr>
+                            <m:nor/>
+                            <m:sty m:val="p"/>
+                          </m:rPr>
+                          <m:t>in</m:t>
+                        </m:r>
+                      </m:sub>
+                    </m:sSub>
+                  </m:oMath>
+                </a14:m>
+                <a:r>
+                  <a:rPr/>
+                  <a:t> the error on new outcomes at the </a:t>
+                </a:r>
+                <a:r>
+                  <a:rPr i="1"/>
+                  <a:t>same</a:t>
+                </a:r>
+                <a:r>
+                  <a:rPr/>
+                  <a:t> </a:t>
+                </a:r>
+                <a14:m>
+                  <m:oMath xmlns:m="http://schemas.openxmlformats.org/officeDocument/2006/math">
+                    <m:sSub>
+                      <m:e>
+                        <m:r>
+                          <m:t>x</m:t>
+                        </m:r>
+                      </m:e>
+                      <m:sub>
+                        <m:r>
+                          <m:t>i</m:t>
+                        </m:r>
+                      </m:sub>
+                    </m:sSub>
+                  </m:oMath>
+                </a14:m>
+                <a:r>
+                  <a:rPr/>
+                  <a:t>. Then</a:t>
+                </a:r>
+              </a:p>
+              <a:p>
+                <a:pPr lvl="0" indent="0" marL="0">
+                  <a:buNone/>
+                </a:pPr>
+                <a14:m>
+                  <m:oMathPara xmlns:m="http://schemas.openxmlformats.org/officeDocument/2006/math">
+                    <m:oMathParaPr>
+                      <m:jc m:val="center"/>
+                    </m:oMathParaPr>
+                    <m:oMath>
+                      <m:r>
+                        <m:rPr>
+                          <m:sty m:val="p"/>
+                          <m:scr m:val="double-struck"/>
+                        </m:rPr>
+                        <m:t>E</m:t>
+                      </m:r>
+                      <m:d>
+                        <m:dPr>
+                          <m:begChr m:val="["/>
+                          <m:sepChr m:val=""/>
+                          <m:endChr m:val="]"/>
+                          <m:grow/>
+                        </m:dPr>
+                        <m:e>
+                          <m:sSub>
+                            <m:e>
+                              <m:r>
+                                <m:rPr>
+                                  <m:sty m:val="p"/>
+                                </m:rPr>
+                                <m:t>Err</m:t>
+                              </m:r>
+                            </m:e>
+                            <m:sub>
+                              <m:r>
+                                <m:rPr>
+                                  <m:nor/>
+                                  <m:sty m:val="p"/>
+                                </m:rPr>
+                                <m:t>in</m:t>
+                              </m:r>
+                            </m:sub>
+                          </m:sSub>
+                        </m:e>
+                      </m:d>
+                      <m:r>
+                        <m:rPr>
+                          <m:sty m:val="p"/>
+                        </m:rPr>
+                        <m:t>−</m:t>
+                      </m:r>
+                      <m:r>
+                        <m:rPr>
+                          <m:sty m:val="p"/>
+                          <m:scr m:val="double-struck"/>
+                        </m:rPr>
+                        <m:t>E</m:t>
+                      </m:r>
+                      <m:d>
+                        <m:dPr>
+                          <m:begChr m:val="["/>
+                          <m:sepChr m:val=""/>
+                          <m:endChr m:val="]"/>
+                          <m:grow/>
+                        </m:dPr>
+                        <m:e>
+                          <m:r>
+                            <m:rPr>
+                              <m:sty m:val="p"/>
+                            </m:rPr>
+                            <m:t>err</m:t>
+                          </m:r>
+                        </m:e>
+                      </m:d>
+                      <m:r>
+                        <m:rPr>
+                          <m:sty m:val="p"/>
+                        </m:rPr>
+                        <m:t>=</m:t>
+                      </m:r>
+                      <m:f>
+                        <m:fPr>
+                          <m:type m:val="bar"/>
+                        </m:fPr>
+                        <m:num>
+                          <m:r>
+                            <m:t>2</m:t>
+                          </m:r>
+                        </m:num>
+                        <m:den>
+                          <m:r>
+                            <m:t>n</m:t>
+                          </m:r>
+                        </m:den>
+                      </m:f>
+                      <m:nary>
+                        <m:naryPr>
+                          <m:chr m:val="∑"/>
+                          <m:limLoc m:val="undOvr"/>
+                          <m:subHide m:val="off"/>
+                          <m:supHide m:val="off"/>
+                        </m:naryPr>
+                        <m:sub>
+                          <m:r>
+                            <m:t>i</m:t>
+                          </m:r>
+                          <m:r>
+                            <m:rPr>
+                              <m:sty m:val="p"/>
+                            </m:rPr>
+                            <m:t>=</m:t>
+                          </m:r>
+                          <m:r>
+                            <m:t>1</m:t>
+                          </m:r>
+                        </m:sub>
+                        <m:sup>
+                          <m:r>
+                            <m:t>n</m:t>
+                          </m:r>
+                        </m:sup>
+                        <m:e>
+                          <m:r>
+                            <m:rPr>
+                              <m:sty m:val="p"/>
+                            </m:rPr>
+                            <m:t>Cov</m:t>
+                          </m:r>
+                        </m:e>
+                      </m:nary>
+                      <m:d>
+                        <m:dPr>
+                          <m:begChr m:val="("/>
+                          <m:sepChr m:val=""/>
+                          <m:endChr m:val=")"/>
+                          <m:grow/>
+                        </m:dPr>
+                        <m:e>
+                          <m:sSub>
+                            <m:e>
+                              <m:acc>
+                                <m:accPr>
+                                  <m:chr m:val="̂"/>
+                                </m:accPr>
+                                <m:e>
+                                  <m:r>
+                                    <m:t>y</m:t>
+                                  </m:r>
+                                </m:e>
+                              </m:acc>
+                            </m:e>
+                            <m:sub>
+                              <m:r>
+                                <m:t>i</m:t>
+                              </m:r>
+                            </m:sub>
+                          </m:sSub>
+                          <m:r>
+                            <m:rPr>
+                              <m:sty m:val="p"/>
+                            </m:rPr>
+                            <m:t>,</m:t>
+                          </m:r>
+                          <m:sSub>
+                            <m:e>
+                              <m:r>
+                                <m:t>y</m:t>
+                              </m:r>
+                            </m:e>
+                            <m:sub>
+                              <m:r>
+                                <m:t>i</m:t>
+                              </m:r>
+                            </m:sub>
+                          </m:sSub>
+                        </m:e>
+                      </m:d>
+                    </m:oMath>
+                  </m:oMathPara>
+                </a14:m>
+              </a:p>
+            </p:txBody>
+          </p:sp>
+        </mc:Choice>
+      </mc:AlternateContent>
+    </p:spTree>
+  </p:cSld>
+</p:sld>
+</file>
+
+<file path=ppt/slides/slide11.xml><?xml version="1.0" encoding="utf-8"?>
+<p:sld xmlns:a="http://schemas.openxmlformats.org/drawingml/2006/main" xmlns:r="http://schemas.openxmlformats.org/officeDocument/2006/relationships" xmlns:p="http://schemas.openxmlformats.org/presentationml/2006/main">
+  <p:cSld>
+    <p:spTree>
+      <p:nvGrpSpPr>
+        <p:cNvPr id="1" name=""/>
+        <p:cNvGrpSpPr/>
+        <p:nvPr/>
+      </p:nvGrpSpPr>
+      <p:grpSpPr>
+        <a:xfrm>
+          <a:off x="0" y="0"/>
+          <a:ext cx="0" cy="0"/>
+          <a:chOff x="0" y="0"/>
+          <a:chExt cx="0" cy="0"/>
+        </a:xfrm>
+      </p:grpSpPr>
+      <p:sp>
+        <p:nvSpPr>
+          <p:cNvPr id="2" name="Title 1"/>
+          <p:cNvSpPr>
+            <a:spLocks noGrp="1"/>
+          </p:cNvSpPr>
+          <p:nvPr>
+            <p:ph type="title"/>
+          </p:nvPr>
+        </p:nvSpPr>
+        <p:spPr/>
+        <p:txBody>
+          <a:bodyPr/>
+          <a:lstStyle/>
+          <a:p>
+            <a:pPr lvl="0" indent="0" marL="0">
+              <a:buNone/>
+            </a:pPr>
+            <a:r>
+              <a:rPr/>
+              <a:t>Read that quantity</a:t>
+            </a:r>
+          </a:p>
+        </p:txBody>
+      </p:sp>
+      <mc:AlternateContent xmlns:mc="http://schemas.openxmlformats.org/markup-compatibility/2006">
+        <mc:Choice xmlns:a14="http://schemas.microsoft.com/office/drawing/2010/main" Requires="a14">
+          <p:sp>
+            <p:nvSpPr>
+              <p:cNvPr id="3" name="Content Placeholder 2"/>
+              <p:cNvSpPr>
+                <a:spLocks noGrp="1"/>
+              </p:cNvSpPr>
+              <p:nvPr>
+                <p:ph idx="1"/>
+              </p:nvPr>
+            </p:nvSpPr>
+            <p:spPr/>
+            <p:txBody>
+              <a:bodyPr/>
+              <a:lstStyle/>
+              <a:p>
+                <a:pPr lvl="0" indent="0" marL="0">
+                  <a:buNone/>
+                </a:pPr>
+                <a:r>
+                  <a:rPr/>
+                  <a:t>The </a:t>
+                </a:r>
+                <a:r>
+                  <a:rPr b="1"/>
+                  <a:t>optimism</a:t>
+                </a:r>
+                <a:r>
+                  <a:rPr/>
+                  <a:t> is exactly twice the average covariance between a fitted value and its own outcome — </a:t>
+                </a:r>
+                <a:r>
+                  <a:rPr i="1"/>
+                  <a:t>the degree to which the model chases its own training labels.</a:t>
+                </a:r>
+              </a:p>
+              <a:p>
+                <a:pPr lvl="0" indent="0" marL="0">
+                  <a:buNone/>
+                </a:pPr>
+                <a:r>
+                  <a:rPr/>
+                  <a:t>For a linear fit with </a:t>
+                </a:r>
+                <a14:m>
+                  <m:oMath xmlns:m="http://schemas.openxmlformats.org/officeDocument/2006/math">
+                    <m:r>
+                      <m:t>p</m:t>
+                    </m:r>
+                  </m:oMath>
+                </a14:m>
+                <a:r>
+                  <a:rPr/>
+                  <a:t> parameters that covariance sum equals </a:t>
+                </a:r>
+                <a14:m>
+                  <m:oMath xmlns:m="http://schemas.openxmlformats.org/officeDocument/2006/math">
+                    <m:r>
+                      <m:t>p</m:t>
+                    </m:r>
+                    <m:sSup>
+                      <m:e>
+                        <m:r>
+                          <m:t>σ</m:t>
+                        </m:r>
+                      </m:e>
+                      <m:sup>
+                        <m:r>
+                          <m:t>2</m:t>
+                        </m:r>
+                      </m:sup>
+                    </m:sSup>
+                  </m:oMath>
+                </a14:m>
+                <a:r>
+                  <a:rPr/>
+                  <a:t>, giving optimism</a:t>
+                </a:r>
+              </a:p>
+              <a:p>
+                <a:pPr lvl="0" indent="0" marL="0">
+                  <a:buNone/>
+                </a:pPr>
+                <a14:m>
+                  <m:oMathPara xmlns:m="http://schemas.openxmlformats.org/officeDocument/2006/math">
+                    <m:oMathParaPr>
+                      <m:jc m:val="center"/>
+                    </m:oMathParaPr>
+                    <m:oMath>
+                      <m:f>
+                        <m:fPr>
+                          <m:type m:val="bar"/>
+                        </m:fPr>
+                        <m:num>
+                          <m:r>
+                            <m:t>2</m:t>
+                          </m:r>
+                          <m:r>
+                            <m:t>p</m:t>
+                          </m:r>
+                          <m:sSup>
+                            <m:e>
+                              <m:r>
+                                <m:t>σ</m:t>
+                              </m:r>
+                            </m:e>
+                            <m:sup>
+                              <m:r>
+                                <m:t>2</m:t>
+                              </m:r>
+                            </m:sup>
+                          </m:sSup>
+                        </m:num>
+                        <m:den>
+                          <m:r>
+                            <m:t>n</m:t>
+                          </m:r>
+                        </m:den>
+                      </m:f>
+                    </m:oMath>
+                  </m:oMathPara>
+                </a14:m>
+              </a:p>
+            </p:txBody>
+          </p:sp>
+        </mc:Choice>
+      </mc:AlternateContent>
+    </p:spTree>
+  </p:cSld>
+</p:sld>
+</file>
+
+<file path=ppt/slides/slide12.xml><?xml version="1.0" encoding="utf-8"?>
+<p:sld xmlns:a="http://schemas.openxmlformats.org/drawingml/2006/main" xmlns:r="http://schemas.openxmlformats.org/officeDocument/2006/relationships" xmlns:p="http://schemas.openxmlformats.org/presentationml/2006/main">
+  <p:cSld>
+    <p:spTree>
+      <p:nvGrpSpPr>
+        <p:cNvPr id="1" name=""/>
+        <p:cNvGrpSpPr/>
+        <p:nvPr/>
+      </p:nvGrpSpPr>
+      <p:grpSpPr>
+        <a:xfrm>
+          <a:off x="0" y="0"/>
+          <a:ext cx="0" cy="0"/>
+          <a:chOff x="0" y="0"/>
+          <a:chExt cx="0" cy="0"/>
+        </a:xfrm>
+      </p:grpSpPr>
+      <p:sp>
+        <p:nvSpPr>
+          <p:cNvPr id="2" name="Title 1"/>
+          <p:cNvSpPr>
+            <a:spLocks noGrp="1"/>
+          </p:cNvSpPr>
+          <p:nvPr>
+            <p:ph type="title"/>
+          </p:nvPr>
+        </p:nvSpPr>
+        <p:spPr/>
+        <p:txBody>
+          <a:bodyPr/>
+          <a:lstStyle/>
+          <a:p>
+            <a:pPr lvl="0" indent="0" marL="0">
+              <a:buNone/>
+            </a:pPr>
+            <a:r>
+              <a:rPr/>
+              <a:t>Which motivates the classical criteria</a:t>
+            </a:r>
+          </a:p>
+        </p:txBody>
+      </p:sp>
+      <mc:AlternateContent xmlns:mc="http://schemas.openxmlformats.org/markup-compatibility/2006">
+        <mc:Choice xmlns:a14="http://schemas.microsoft.com/office/drawing/2010/main" Requires="a14">
+          <p:sp>
+            <p:nvSpPr>
+              <p:cNvPr id="3" name="Content Placeholder 2"/>
+              <p:cNvSpPr>
+                <a:spLocks noGrp="1"/>
+              </p:cNvSpPr>
+              <p:nvPr>
+                <p:ph idx="1"/>
+              </p:nvPr>
+            </p:nvSpPr>
+            <p:spPr/>
+            <p:txBody>
+              <a:bodyPr/>
+              <a:lstStyle/>
+              <a:p>
+                <a:pPr lvl="0" indent="0" marL="0">
+                  <a:buNone/>
+                </a:pPr>
+                <a14:m>
+                  <m:oMathPara xmlns:m="http://schemas.openxmlformats.org/officeDocument/2006/math">
+                    <m:oMathParaPr>
+                      <m:jc m:val="center"/>
+                    </m:oMathParaPr>
+                    <m:oMath>
+                      <m:sSub>
+                        <m:e>
+                          <m:r>
+                            <m:t>C</m:t>
+                          </m:r>
+                        </m:e>
+                        <m:sub>
+                          <m:r>
+                            <m:t>p</m:t>
+                          </m:r>
+                        </m:sub>
+                      </m:sSub>
+                      <m:r>
+                        <m:rPr>
+                          <m:sty m:val="p"/>
+                        </m:rPr>
+                        <m:t>=</m:t>
+                      </m:r>
+                      <m:r>
+                        <m:rPr>
+                          <m:sty m:val="p"/>
+                        </m:rPr>
+                        <m:t>err</m:t>
+                      </m:r>
+                      <m:r>
+                        <m:rPr>
+                          <m:sty m:val="p"/>
+                        </m:rPr>
+                        <m:t>+</m:t>
+                      </m:r>
+                      <m:f>
+                        <m:fPr>
+                          <m:type m:val="bar"/>
+                        </m:fPr>
+                        <m:num>
+                          <m:r>
+                            <m:t>2</m:t>
+                          </m:r>
+                          <m:r>
+                            <m:t>p</m:t>
+                          </m:r>
+                          <m:sSup>
+                            <m:e>
+                              <m:acc>
+                                <m:accPr>
+                                  <m:chr m:val="̂"/>
+                                </m:accPr>
+                                <m:e>
+                                  <m:r>
+                                    <m:t>σ</m:t>
+                                  </m:r>
+                                </m:e>
+                              </m:acc>
+                            </m:e>
+                            <m:sup>
+                              <m:r>
+                                <m:t>2</m:t>
+                              </m:r>
+                            </m:sup>
+                          </m:sSup>
+                        </m:num>
+                        <m:den>
+                          <m:r>
+                            <m:t>n</m:t>
+                          </m:r>
+                        </m:den>
+                      </m:f>
+                    </m:oMath>
+                  </m:oMathPara>
+                </a14:m>
+              </a:p>
+              <a:p>
+                <a:pPr lvl="0" indent="0" marL="0">
+                  <a:buNone/>
+                </a:pPr>
+                <a14:m>
+                  <m:oMathPara xmlns:m="http://schemas.openxmlformats.org/officeDocument/2006/math">
+                    <m:oMathParaPr>
+                      <m:jc m:val="center"/>
+                    </m:oMathParaPr>
+                    <m:oMath>
+                      <m:r>
+                        <m:rPr>
+                          <m:sty m:val="p"/>
+                        </m:rPr>
+                        <m:t>A</m:t>
+                      </m:r>
+                      <m:r>
+                        <m:rPr>
+                          <m:sty m:val="p"/>
+                        </m:rPr>
+                        <m:t>I</m:t>
+                      </m:r>
+                      <m:r>
+                        <m:rPr>
+                          <m:sty m:val="p"/>
+                        </m:rPr>
+                        <m:t>C</m:t>
+                      </m:r>
+                      <m:r>
+                        <m:rPr>
+                          <m:sty m:val="p"/>
+                        </m:rPr>
+                        <m:t>=</m:t>
+                      </m:r>
+                      <m:r>
+                        <m:rPr>
+                          <m:sty m:val="p"/>
+                        </m:rPr>
+                        <m:t>−</m:t>
+                      </m:r>
+                      <m:f>
+                        <m:fPr>
+                          <m:type m:val="bar"/>
+                        </m:fPr>
+                        <m:num>
+                          <m:r>
+                            <m:t>2</m:t>
+                          </m:r>
+                        </m:num>
+                        <m:den>
+                          <m:r>
+                            <m:t>n</m:t>
+                          </m:r>
+                        </m:den>
+                      </m:f>
+                      <m:r>
+                        <m:rPr>
+                          <m:sty m:val="p"/>
+                        </m:rPr>
+                        <m:t>log</m:t>
+                      </m:r>
+                      <m:r>
+                        <m:rPr>
+                          <m:sty m:val="p"/>
+                          <m:scr m:val="script"/>
+                        </m:rPr>
+                        <m:t>L</m:t>
+                      </m:r>
+                      <m:r>
+                        <m:rPr>
+                          <m:sty m:val="p"/>
+                        </m:rPr>
+                        <m:t>+</m:t>
+                      </m:r>
+                      <m:f>
+                        <m:fPr>
+                          <m:type m:val="bar"/>
+                        </m:fPr>
+                        <m:num>
+                          <m:r>
+                            <m:t>2</m:t>
+                          </m:r>
+                          <m:r>
+                            <m:t>p</m:t>
+                          </m:r>
+                        </m:num>
+                        <m:den>
+                          <m:r>
+                            <m:t>n</m:t>
+                          </m:r>
+                        </m:den>
+                      </m:f>
+                      <m:r>
+                        <m:rPr>
+                          <m:sty m:val="p"/>
+                        </m:rPr>
+                        <m:t>,</m:t>
+                      </m:r>
+                      <m:r>
+                        <m:t>  </m:t>
+                      </m:r>
+                      <m:r>
+                        <m:rPr>
+                          <m:sty m:val="p"/>
+                        </m:rPr>
+                        <m:t>B</m:t>
+                      </m:r>
+                      <m:r>
+                        <m:rPr>
+                          <m:sty m:val="p"/>
+                        </m:rPr>
+                        <m:t>I</m:t>
+                      </m:r>
+                      <m:r>
+                        <m:rPr>
+                          <m:sty m:val="p"/>
+                        </m:rPr>
+                        <m:t>C</m:t>
+                      </m:r>
+                      <m:r>
+                        <m:rPr>
+                          <m:sty m:val="p"/>
+                        </m:rPr>
+                        <m:t>=</m:t>
+                      </m:r>
+                      <m:r>
+                        <m:rPr>
+                          <m:sty m:val="p"/>
+                        </m:rPr>
+                        <m:t>−</m:t>
+                      </m:r>
+                      <m:r>
+                        <m:t>2</m:t>
+                      </m:r>
+                      <m:r>
+                        <m:rPr>
+                          <m:sty m:val="p"/>
+                        </m:rPr>
+                        <m:t>log</m:t>
+                      </m:r>
+                      <m:r>
+                        <m:rPr>
+                          <m:sty m:val="p"/>
+                          <m:scr m:val="script"/>
+                        </m:rPr>
+                        <m:t>L</m:t>
+                      </m:r>
+                      <m:r>
+                        <m:rPr>
+                          <m:sty m:val="p"/>
+                        </m:rPr>
+                        <m:t>+</m:t>
+                      </m:r>
+                      <m:r>
+                        <m:t>p</m:t>
+                      </m:r>
+                      <m:r>
+                        <m:rPr>
+                          <m:sty m:val="p"/>
+                        </m:rPr>
+                        <m:t>log</m:t>
+                      </m:r>
+                      <m:r>
+                        <m:t>n</m:t>
+                      </m:r>
+                    </m:oMath>
+                  </m:oMathPara>
+                </a14:m>
+              </a:p>
+              <a:p>
+                <a:pPr lvl="0" indent="0" marL="0">
+                  <a:buNone/>
+                </a:pPr>
+                <a:r>
+                  <a:rPr/>
+                  <a:t>BIC penalises more heavily once </a:t>
+                </a:r>
+                <a14:m>
+                  <m:oMath xmlns:m="http://schemas.openxmlformats.org/officeDocument/2006/math">
+                    <m:r>
+                      <m:t>n</m:t>
+                    </m:r>
+                    <m:r>
+                      <m:rPr>
+                        <m:sty m:val="p"/>
+                      </m:rPr>
+                      <m:t>&gt;</m:t>
+                    </m:r>
+                    <m:sSup>
+                      <m:e>
+                        <m:r>
+                          <m:t>e</m:t>
+                        </m:r>
+                      </m:e>
+                      <m:sup>
+                        <m:r>
+                          <m:t>2</m:t>
+                        </m:r>
+                      </m:sup>
+                    </m:sSup>
+                    <m:r>
+                      <m:rPr>
+                        <m:sty m:val="p"/>
+                      </m:rPr>
+                      <m:t>≈</m:t>
+                    </m:r>
+                    <m:r>
+                      <m:t>7.4</m:t>
+                    </m:r>
+                  </m:oMath>
+                </a14:m>
+                <a:r>
+                  <a:rPr/>
+                  <a:t>. It is </a:t>
+                </a:r>
+                <a:r>
+                  <a:rPr b="1"/>
+                  <a:t>consistent for model selection</a:t>
+                </a:r>
+                <a:r>
+                  <a:rPr/>
+                  <a:t>; AIC is </a:t>
+                </a:r>
+                <a:r>
+                  <a:rPr b="1"/>
+                  <a:t>efficient for prediction</a:t>
+                </a:r>
+                <a:r>
+                  <a:rPr/>
+                  <a:t>. They answer different questions.</a:t>
+                </a:r>
+              </a:p>
+            </p:txBody>
+          </p:sp>
+        </mc:Choice>
+      </mc:AlternateContent>
+    </p:spTree>
+  </p:cSld>
+</p:sld>
+</file>
+
+<file path=ppt/slides/slide13.xml><?xml version="1.0" encoding="utf-8"?>
+<p:sld xmlns:a="http://schemas.openxmlformats.org/drawingml/2006/main" xmlns:r="http://schemas.openxmlformats.org/officeDocument/2006/relationships" xmlns:p="http://schemas.openxmlformats.org/presentationml/2006/main">
+  <p:cSld>
+    <p:spTree>
+      <p:nvGrpSpPr>
+        <p:cNvPr id="1" name=""/>
+        <p:cNvGrpSpPr/>
+        <p:nvPr/>
+      </p:nvGrpSpPr>
+      <p:grpSpPr>
+        <a:xfrm>
+          <a:off x="0" y="0"/>
+          <a:ext cx="0" cy="0"/>
+          <a:chOff x="0" y="0"/>
+          <a:chExt cx="0" cy="0"/>
+        </a:xfrm>
+      </p:grpSpPr>
+      <p:sp>
+        <p:nvSpPr>
+          <p:cNvPr id="2" name="Title 1"/>
+          <p:cNvSpPr>
+            <a:spLocks noGrp="1"/>
+          </p:cNvSpPr>
+          <p:nvPr>
+            <p:ph type="title"/>
+          </p:nvPr>
+        </p:nvSpPr>
+        <p:spPr/>
+        <p:txBody>
+          <a:bodyPr/>
+          <a:lstStyle/>
+          <a:p>
+            <a:pPr lvl="0" indent="0" marL="0">
+              <a:buNone/>
+            </a:pPr>
+            <a:r>
+              <a:rPr/>
+              <a:t>Effective degrees of freedom</a:t>
+            </a:r>
+          </a:p>
+        </p:txBody>
+      </p:sp>
+      <mc:AlternateContent xmlns:mc="http://schemas.openxmlformats.org/markup-compatibility/2006">
+        <mc:Choice xmlns:a14="http://schemas.microsoft.com/office/drawing/2010/main" Requires="a14">
+          <p:sp>
+            <p:nvSpPr>
+              <p:cNvPr id="3" name="Content Placeholder 2"/>
+              <p:cNvSpPr>
+                <a:spLocks noGrp="1"/>
+              </p:cNvSpPr>
+              <p:nvPr>
+                <p:ph idx="1"/>
+              </p:nvPr>
+            </p:nvSpPr>
+            <p:spPr/>
+            <p:txBody>
+              <a:bodyPr/>
+              <a:lstStyle/>
+              <a:p>
+                <a:pPr lvl="0" indent="0" marL="0">
+                  <a:buNone/>
+                </a:pPr>
+                <a14:m>
+                  <m:oMathPara xmlns:m="http://schemas.openxmlformats.org/officeDocument/2006/math">
+                    <m:oMathParaPr>
+                      <m:jc m:val="center"/>
+                    </m:oMathParaPr>
+                    <m:oMath>
+                      <m:r>
+                        <m:rPr>
+                          <m:sty m:val="p"/>
+                        </m:rPr>
+                        <m:t>d</m:t>
+                      </m:r>
+                      <m:r>
+                        <m:rPr>
+                          <m:sty m:val="p"/>
+                        </m:rPr>
+                        <m:t>f</m:t>
+                      </m:r>
+                      <m:d>
+                        <m:dPr>
+                          <m:begChr m:val="("/>
+                          <m:sepChr m:val=""/>
+                          <m:endChr m:val=")"/>
+                          <m:grow/>
+                        </m:dPr>
+                        <m:e>
+                          <m:acc>
+                            <m:accPr>
+                              <m:chr m:val="̂"/>
+                            </m:accPr>
+                            <m:e>
+                              <m:r>
+                                <m:t>f</m:t>
+                              </m:r>
+                            </m:e>
+                          </m:acc>
+                        </m:e>
+                      </m:d>
+                      <m:r>
+                        <m:rPr>
+                          <m:sty m:val="p"/>
+                        </m:rPr>
+                        <m:t>=</m:t>
+                      </m:r>
+                      <m:f>
+                        <m:fPr>
+                          <m:type m:val="bar"/>
+                        </m:fPr>
+                        <m:num>
+                          <m:r>
+                            <m:t>1</m:t>
+                          </m:r>
+                        </m:num>
+                        <m:den>
+                          <m:sSup>
+                            <m:e>
+                              <m:r>
+                                <m:t>σ</m:t>
+                              </m:r>
+                            </m:e>
+                            <m:sup>
+                              <m:r>
+                                <m:t>2</m:t>
+                              </m:r>
+                            </m:sup>
+                          </m:sSup>
+                        </m:den>
+                      </m:f>
+                      <m:nary>
+                        <m:naryPr>
+                          <m:chr m:val="∑"/>
+                          <m:limLoc m:val="undOvr"/>
+                          <m:subHide m:val="off"/>
+                          <m:supHide m:val="on"/>
+                        </m:naryPr>
+                        <m:sub>
+                          <m:r>
+                            <m:t>i</m:t>
+                          </m:r>
+                        </m:sub>
+                        <m:sup>
+                          <m:r>
+                            <m:t>​</m:t>
+                          </m:r>
+                        </m:sup>
+                        <m:e>
+                          <m:r>
+                            <m:rPr>
+                              <m:sty m:val="p"/>
+                            </m:rPr>
+                            <m:t>Cov</m:t>
+                          </m:r>
+                        </m:e>
+                      </m:nary>
+                      <m:d>
+                        <m:dPr>
+                          <m:begChr m:val="("/>
+                          <m:sepChr m:val=""/>
+                          <m:endChr m:val=")"/>
+                          <m:grow/>
+                        </m:dPr>
+                        <m:e>
+                          <m:sSub>
+                            <m:e>
+                              <m:acc>
+                                <m:accPr>
+                                  <m:chr m:val="̂"/>
+                                </m:accPr>
+                                <m:e>
+                                  <m:r>
+                                    <m:t>y</m:t>
+                                  </m:r>
+                                </m:e>
+                              </m:acc>
+                            </m:e>
+                            <m:sub>
+                              <m:r>
+                                <m:t>i</m:t>
+                              </m:r>
+                            </m:sub>
+                          </m:sSub>
+                          <m:r>
+                            <m:rPr>
+                              <m:sty m:val="p"/>
+                            </m:rPr>
+                            <m:t>,</m:t>
+                          </m:r>
+                          <m:sSub>
+                            <m:e>
+                              <m:r>
+                                <m:t>y</m:t>
+                              </m:r>
+                            </m:e>
+                            <m:sub>
+                              <m:r>
+                                <m:t>i</m:t>
+                              </m:r>
+                            </m:sub>
+                          </m:sSub>
+                        </m:e>
+                      </m:d>
+                    </m:oMath>
+                  </m:oMathPara>
+                </a14:m>
+              </a:p>
+              <a:p>
+                <a:pPr lvl="0" indent="0" marL="0">
+                  <a:buNone/>
+                </a:pPr>
+                <a:r>
+                  <a:rPr/>
+                  <a:t>This generalises “number of parameters” to methods where counting parameters makes no sense — which we need from Session 05 onward, where a penalty makes </a:t>
+                </a:r>
+                <a14:m>
+                  <m:oMath xmlns:m="http://schemas.openxmlformats.org/officeDocument/2006/math">
+                    <m:r>
+                      <m:t>p</m:t>
+                    </m:r>
+                  </m:oMath>
+                </a14:m>
+                <a:r>
+                  <a:rPr/>
+                  <a:t> meaningless.</a:t>
+                </a:r>
+              </a:p>
+            </p:txBody>
+          </p:sp>
+        </mc:Choice>
+      </mc:AlternateContent>
+    </p:spTree>
+  </p:cSld>
+</p:sld>
+</file>
+
+<file path=ppt/slides/slide14.xml><?xml version="1.0" encoding="utf-8"?>
+<p:sld xmlns:a="http://schemas.openxmlformats.org/drawingml/2006/main" xmlns:r="http://schemas.openxmlformats.org/officeDocument/2006/relationships" xmlns:p="http://schemas.openxmlformats.org/presentationml/2006/main">
+  <p:cSld>
+    <p:spTree>
+      <p:nvGrpSpPr>
+        <p:cNvPr id="1" name=""/>
+        <p:cNvGrpSpPr/>
+        <p:nvPr/>
+      </p:nvGrpSpPr>
+      <p:grpSpPr>
+        <a:xfrm>
+          <a:off x="0" y="0"/>
+          <a:ext cx="0" cy="0"/>
+          <a:chOff x="0" y="0"/>
+          <a:chExt cx="0" cy="0"/>
+        </a:xfrm>
+      </p:grpSpPr>
+      <p:sp>
+        <p:nvSpPr>
+          <p:cNvPr id="2" name="Title 1"/>
+          <p:cNvSpPr>
+            <a:spLocks noGrp="1"/>
+          </p:cNvSpPr>
+          <p:nvPr>
+            <p:ph type="title"/>
+          </p:nvPr>
+        </p:nvSpPr>
+        <p:spPr>
+          <a:xfrm>
+            <a:off x="722313" y="3305176"/>
+            <a:ext cx="7772400" cy="1021556"/>
+          </a:xfrm>
+        </p:spPr>
+        <p:txBody>
+          <a:bodyPr/>
+          <a:lstStyle/>
+          <a:p>
+            <a:pPr lvl="0" indent="0" marL="0">
+              <a:buNone/>
+            </a:pPr>
+            <a:r>
+              <a:rPr/>
+              <a:t>4.3 Cross-validation</a:t>
+            </a:r>
+          </a:p>
+        </p:txBody>
+      </p:sp>
+    </p:spTree>
+  </p:cSld>
+</p:sld>
+</file>
+
+<file path=ppt/slides/slide15.xml><?xml version="1.0" encoding="utf-8"?>
+<p:sld xmlns:a="http://schemas.openxmlformats.org/drawingml/2006/main" xmlns:r="http://schemas.openxmlformats.org/officeDocument/2006/relationships" xmlns:p="http://schemas.openxmlformats.org/presentationml/2006/main">
+  <p:cSld>
+    <p:spTree>
+      <p:nvGrpSpPr>
+        <p:cNvPr id="1" name=""/>
+        <p:cNvGrpSpPr/>
+        <p:nvPr/>
+      </p:nvGrpSpPr>
+      <p:grpSpPr>
+        <a:xfrm>
+          <a:off x="0" y="0"/>
+          <a:ext cx="0" cy="0"/>
+          <a:chOff x="0" y="0"/>
+          <a:chExt cx="0" cy="0"/>
+        </a:xfrm>
+      </p:grpSpPr>
+      <p:sp>
+        <p:nvSpPr>
+          <p:cNvPr id="2" name="Title 1"/>
+          <p:cNvSpPr>
+            <a:spLocks noGrp="1"/>
+          </p:cNvSpPr>
+          <p:nvPr>
+            <p:ph type="title"/>
+          </p:nvPr>
+        </p:nvSpPr>
+        <p:spPr/>
+        <p:txBody>
+          <a:bodyPr/>
+          <a:lstStyle/>
+          <a:p>
+            <a:pPr lvl="0" indent="0" marL="0">
+              <a:buNone/>
+            </a:pPr>
+            <a:r>
+              <a:rPr/>
+              <a:t>The estimator</a:t>
+            </a:r>
+          </a:p>
+        </p:txBody>
+      </p:sp>
+      <mc:AlternateContent xmlns:mc="http://schemas.openxmlformats.org/markup-compatibility/2006">
+        <mc:Choice xmlns:a14="http://schemas.microsoft.com/office/drawing/2010/main" Requires="a14">
+          <p:sp>
+            <p:nvSpPr>
+              <p:cNvPr id="3" name="Content Placeholder 2"/>
+              <p:cNvSpPr>
+                <a:spLocks noGrp="1"/>
+              </p:cNvSpPr>
+              <p:nvPr>
+                <p:ph idx="1"/>
+              </p:nvPr>
+            </p:nvSpPr>
+            <p:spPr/>
+            <p:txBody>
+              <a:bodyPr/>
+              <a:lstStyle/>
+              <a:p>
+                <a:pPr lvl="0" indent="0" marL="0">
+                  <a:buNone/>
+                </a:pPr>
+                <a:r>
+                  <a:rPr/>
+                  <a:t>Partition into </a:t>
+                </a:r>
+                <a14:m>
+                  <m:oMath xmlns:m="http://schemas.openxmlformats.org/officeDocument/2006/math">
+                    <m:r>
+                      <m:t>K</m:t>
+                    </m:r>
+                  </m:oMath>
+                </a14:m>
+                <a:r>
+                  <a:rPr/>
+                  <a:t> folds; for each </a:t>
+                </a:r>
+                <a14:m>
+                  <m:oMath xmlns:m="http://schemas.openxmlformats.org/officeDocument/2006/math">
+                    <m:r>
+                      <m:t>k</m:t>
+                    </m:r>
+                  </m:oMath>
+                </a14:m>
+                <a:r>
+                  <a:rPr/>
+                  <a:t>, fit on the complement and predict the held-out fold:</a:t>
+                </a:r>
+              </a:p>
+              <a:p>
+                <a:pPr lvl="0" indent="0" marL="0">
+                  <a:buNone/>
+                </a:pPr>
+                <a14:m>
+                  <m:oMathPara xmlns:m="http://schemas.openxmlformats.org/officeDocument/2006/math">
+                    <m:oMathParaPr>
+                      <m:jc m:val="center"/>
+                    </m:oMathParaPr>
+                    <m:oMath>
+                      <m:sSub>
+                        <m:e>
+                          <m:r>
+                            <m:rPr>
+                              <m:sty m:val="p"/>
+                            </m:rPr>
+                            <m:t>C</m:t>
+                          </m:r>
+                          <m:r>
+                            <m:rPr>
+                              <m:sty m:val="p"/>
+                            </m:rPr>
+                            <m:t>V</m:t>
+                          </m:r>
+                        </m:e>
+                        <m:sub>
+                          <m:r>
+                            <m:t>K</m:t>
+                          </m:r>
+                        </m:sub>
+                      </m:sSub>
+                      <m:r>
+                        <m:rPr>
+                          <m:sty m:val="p"/>
+                        </m:rPr>
+                        <m:t>=</m:t>
+                      </m:r>
+                      <m:f>
+                        <m:fPr>
+                          <m:type m:val="bar"/>
+                        </m:fPr>
+                        <m:num>
+                          <m:r>
+                            <m:t>1</m:t>
+                          </m:r>
+                        </m:num>
+                        <m:den>
+                          <m:r>
+                            <m:t>n</m:t>
+                          </m:r>
+                        </m:den>
+                      </m:f>
+                      <m:nary>
+                        <m:naryPr>
+                          <m:chr m:val="∑"/>
+                          <m:limLoc m:val="undOvr"/>
+                          <m:subHide m:val="off"/>
+                          <m:supHide m:val="off"/>
+                        </m:naryPr>
+                        <m:sub>
+                          <m:r>
+                            <m:t>k</m:t>
+                          </m:r>
+                          <m:r>
+                            <m:rPr>
+                              <m:sty m:val="p"/>
+                            </m:rPr>
+                            <m:t>=</m:t>
+                          </m:r>
+                          <m:r>
+                            <m:t>1</m:t>
+                          </m:r>
+                        </m:sub>
+                        <m:sup>
+                          <m:r>
+                            <m:t>K</m:t>
+                          </m:r>
+                        </m:sup>
+                        <m:e>
+                          <m:nary>
+                            <m:naryPr>
+                              <m:chr m:val="∑"/>
+                              <m:limLoc m:val="undOvr"/>
+                              <m:subHide m:val="off"/>
+                              <m:supHide m:val="on"/>
+                            </m:naryPr>
+                            <m:sub>
+                              <m:r>
+                                <m:t>i</m:t>
+                              </m:r>
+                              <m:r>
+                                <m:rPr>
+                                  <m:sty m:val="p"/>
+                                </m:rPr>
+                                <m:t>∈</m:t>
+                              </m:r>
+                              <m:sSub>
+                                <m:e>
+                                  <m:r>
+                                    <m:rPr>
+                                      <m:sty m:val="p"/>
+                                      <m:scr m:val="script"/>
+                                    </m:rPr>
+                                    <m:t>F</m:t>
+                                  </m:r>
+                                </m:e>
+                                <m:sub>
+                                  <m:r>
+                                    <m:t>k</m:t>
+                                  </m:r>
+                                </m:sub>
+                              </m:sSub>
+                            </m:sub>
+                            <m:sup>
+                              <m:r>
+                                <m:t>​</m:t>
+                              </m:r>
+                            </m:sup>
+                            <m:e>
+                              <m:r>
+                                <m:t>L</m:t>
+                              </m:r>
+                            </m:e>
+                          </m:nary>
+                        </m:e>
+                      </m:nary>
+                      <m:d>
+                        <m:dPr>
+                          <m:begChr m:val="("/>
+                          <m:sepChr m:val=""/>
+                          <m:endChr m:val=")"/>
+                          <m:grow/>
+                        </m:dPr>
+                        <m:e>
+                          <m:sSub>
+                            <m:e>
+                              <m:r>
+                                <m:t>y</m:t>
+                              </m:r>
+                            </m:e>
+                            <m:sub>
+                              <m:r>
+                                <m:t>i</m:t>
+                              </m:r>
+                            </m:sub>
+                          </m:sSub>
+                          <m:r>
+                            <m:rPr>
+                              <m:sty m:val="p"/>
+                            </m:rPr>
+                            <m:t>,</m:t>
+                          </m:r>
+                          <m:sSup>
+                            <m:e>
+                              <m:acc>
+                                <m:accPr>
+                                  <m:chr m:val="̂"/>
+                                </m:accPr>
+                                <m:e>
+                                  <m:r>
+                                    <m:t>f</m:t>
+                                  </m:r>
+                                </m:e>
+                              </m:acc>
+                            </m:e>
+                            <m:sup>
+                              <m:r>
+                                <m:rPr>
+                                  <m:sty m:val="p"/>
+                                </m:rPr>
+                                <m:t>−</m:t>
+                              </m:r>
+                              <m:r>
+                                <m:t>k</m:t>
+                              </m:r>
+                            </m:sup>
+                          </m:sSup>
+                          <m:d>
+                            <m:dPr>
+                              <m:begChr m:val="("/>
+                              <m:sepChr m:val=""/>
+                              <m:endChr m:val=")"/>
+                              <m:grow/>
+                            </m:dPr>
+                            <m:e>
+                              <m:sSub>
+                                <m:e>
+                                  <m:r>
+                                    <m:t>x</m:t>
+                                  </m:r>
+                                </m:e>
+                                <m:sub>
+                                  <m:r>
+                                    <m:t>i</m:t>
+                                  </m:r>
+                                </m:sub>
+                              </m:sSub>
+                            </m:e>
+                          </m:d>
+                        </m:e>
+                      </m:d>
+                    </m:oMath>
+                  </m:oMathPara>
+                </a14:m>
+              </a:p>
+            </p:txBody>
+          </p:sp>
+        </mc:Choice>
+      </mc:AlternateContent>
+    </p:spTree>
+  </p:cSld>
+</p:sld>
+</file>
+
+<file path=ppt/slides/slide16.xml><?xml version="1.0" encoding="utf-8"?>
+<p:sld xmlns:a="http://schemas.openxmlformats.org/drawingml/2006/main" xmlns:r="http://schemas.openxmlformats.org/officeDocument/2006/relationships" xmlns:p="http://schemas.openxmlformats.org/presentationml/2006/main">
+  <p:cSld>
+    <p:spTree>
+      <p:nvGrpSpPr>
+        <p:cNvPr id="1" name=""/>
+        <p:cNvGrpSpPr/>
+        <p:nvPr/>
+      </p:nvGrpSpPr>
+      <p:grpSpPr>
+        <a:xfrm>
+          <a:off x="0" y="0"/>
+          <a:ext cx="0" cy="0"/>
+          <a:chOff x="0" y="0"/>
+          <a:chExt cx="0" cy="0"/>
+        </a:xfrm>
+      </p:grpSpPr>
+      <mc:AlternateContent xmlns:mc="http://schemas.openxmlformats.org/markup-compatibility/2006">
+        <mc:Choice xmlns:a14="http://schemas.microsoft.com/office/drawing/2010/main" Requires="a14">
+          <p:sp>
+            <p:nvSpPr>
+              <p:cNvPr id="2" name="Title 1"/>
+              <p:cNvSpPr>
+                <a:spLocks noGrp="1"/>
+              </p:cNvSpPr>
+              <p:nvPr>
+                <p:ph type="title"/>
+              </p:nvPr>
+            </p:nvSpPr>
+            <p:spPr/>
+            <p:txBody>
+              <a:bodyPr/>
+              <a:lstStyle/>
+              <a:p>
+                <a:pPr lvl="0" indent="0" marL="0">
+                  <a:buNone/>
+                </a:pPr>
+                <a14:m>
+                  <m:oMath xmlns:m="http://schemas.openxmlformats.org/officeDocument/2006/math">
+                    <m:r>
+                      <m:t>K</m:t>
+                    </m:r>
+                    <m:r>
+                      <m:rPr>
+                        <m:sty m:val="p"/>
+                      </m:rPr>
+                      <m:t>=</m:t>
+                    </m:r>
+                    <m:r>
+                      <m:t>n</m:t>
+                    </m:r>
+                  </m:oMath>
+                </a14:m>
+                <a:r>
+                  <a:rPr/>
+                  <a:t> — leave-one-out</a:t>
+                </a:r>
+              </a:p>
+            </p:txBody>
+          </p:sp>
+        </mc:Choice>
+      </mc:AlternateContent>
+      <mc:AlternateContent xmlns:mc="http://schemas.openxmlformats.org/markup-compatibility/2006">
+        <mc:Choice xmlns:a14="http://schemas.microsoft.com/office/drawing/2010/main" Requires="a14">
+          <p:sp>
+            <p:nvSpPr>
+              <p:cNvPr id="3" name="Content Placeholder 2"/>
+              <p:cNvSpPr>
+                <a:spLocks noGrp="1"/>
+              </p:cNvSpPr>
+              <p:nvPr>
+                <p:ph idx="1"/>
+              </p:nvPr>
+            </p:nvSpPr>
+            <p:spPr/>
+            <p:txBody>
+              <a:bodyPr/>
+              <a:lstStyle/>
+              <a:p>
+                <a:pPr lvl="0"/>
+                <a:r>
+                  <a:rPr/>
+                  <a:t>Nearly </a:t>
+                </a:r>
+                <a:r>
+                  <a:rPr b="1"/>
+                  <a:t>unbiased</a:t>
+                </a:r>
+                <a:r>
+                  <a:rPr/>
+                  <a:t> for </a:t>
+                </a:r>
+                <a14:m>
+                  <m:oMath xmlns:m="http://schemas.openxmlformats.org/officeDocument/2006/math">
+                    <m:r>
+                      <m:rPr>
+                        <m:sty m:val="p"/>
+                      </m:rPr>
+                      <m:t>Err</m:t>
+                    </m:r>
+                  </m:oMath>
+                </a14:m>
+              </a:p>
+              <a:p>
+                <a:pPr lvl="0"/>
+                <a:r>
+                  <a:rPr b="1"/>
+                  <a:t>High variance</a:t>
+                </a:r>
+                <a:r>
+                  <a:rPr/>
+                  <a:t> — the </a:t>
+                </a:r>
+                <a14:m>
+                  <m:oMath xmlns:m="http://schemas.openxmlformats.org/officeDocument/2006/math">
+                    <m:r>
+                      <m:t>n</m:t>
+                    </m:r>
+                  </m:oMath>
+                </a14:m>
+                <a:r>
+                  <a:rPr/>
+                  <a:t> training sets are almost identical, so the errors are highly correlated</a:t>
+                </a:r>
+              </a:p>
+              <a:p>
+                <a:pPr lvl="0"/>
+                <a:r>
+                  <a:rPr/>
+                  <a:t>Usually expensive</a:t>
+                </a:r>
+              </a:p>
+              <a:p>
+                <a:pPr lvl="0" indent="0" marL="0">
+                  <a:buNone/>
+                </a:pPr>
+                <a:r>
+                  <a:rPr/>
+                  <a:t>For linear smoothers it is free once you have the hat matrix:</a:t>
+                </a:r>
+              </a:p>
+              <a:p>
+                <a:pPr lvl="0" indent="0" marL="0">
+                  <a:buNone/>
+                </a:pPr>
+                <a14:m>
+                  <m:oMathPara xmlns:m="http://schemas.openxmlformats.org/officeDocument/2006/math">
+                    <m:oMathParaPr>
+                      <m:jc m:val="center"/>
+                    </m:oMathParaPr>
+                    <m:oMath>
+                      <m:sSub>
+                        <m:e>
+                          <m:r>
+                            <m:rPr>
+                              <m:sty m:val="p"/>
+                            </m:rPr>
+                            <m:t>C</m:t>
+                          </m:r>
+                          <m:r>
+                            <m:rPr>
+                              <m:sty m:val="p"/>
+                            </m:rPr>
+                            <m:t>V</m:t>
+                          </m:r>
+                        </m:e>
+                        <m:sub>
+                          <m:d>
+                            <m:dPr>
+                              <m:begChr m:val="("/>
+                              <m:sepChr m:val=""/>
+                              <m:endChr m:val=")"/>
+                              <m:grow/>
+                            </m:dPr>
+                            <m:e>
+                              <m:r>
+                                <m:t>n</m:t>
+                              </m:r>
+                            </m:e>
+                          </m:d>
+                        </m:sub>
+                      </m:sSub>
+                      <m:r>
+                        <m:rPr>
+                          <m:sty m:val="p"/>
+                        </m:rPr>
+                        <m:t>=</m:t>
+                      </m:r>
+                      <m:f>
+                        <m:fPr>
+                          <m:type m:val="bar"/>
+                        </m:fPr>
+                        <m:num>
+                          <m:r>
+                            <m:t>1</m:t>
+                          </m:r>
+                        </m:num>
+                        <m:den>
+                          <m:r>
+                            <m:t>n</m:t>
+                          </m:r>
+                        </m:den>
+                      </m:f>
+                      <m:nary>
+                        <m:naryPr>
+                          <m:chr m:val="∑"/>
+                          <m:limLoc m:val="undOvr"/>
+                          <m:subHide m:val="off"/>
+                          <m:supHide m:val="on"/>
+                        </m:naryPr>
+                        <m:sub>
+                          <m:r>
+                            <m:t>i</m:t>
+                          </m:r>
+                        </m:sub>
+                        <m:sup>
+                          <m:r>
+                            <m:t>​</m:t>
+                          </m:r>
+                        </m:sup>
+                        <m:e>
+                          <m:sSup>
+                            <m:e>
+                              <m:d>
+                                <m:dPr>
+                                  <m:begChr m:val="("/>
+                                  <m:sepChr m:val=""/>
+                                  <m:endChr m:val=")"/>
+                                  <m:grow/>
+                                </m:dPr>
+                                <m:e>
+                                  <m:f>
+                                    <m:fPr>
+                                      <m:type m:val="bar"/>
+                                    </m:fPr>
+                                    <m:num>
+                                      <m:sSub>
+                                        <m:e>
+                                          <m:r>
+                                            <m:t>y</m:t>
+                                          </m:r>
+                                        </m:e>
+                                        <m:sub>
+                                          <m:r>
+                                            <m:t>i</m:t>
+                                          </m:r>
+                                        </m:sub>
+                                      </m:sSub>
+                                      <m:r>
+                                        <m:rPr>
+                                          <m:sty m:val="p"/>
+                                        </m:rPr>
+                                        <m:t>−</m:t>
+                                      </m:r>
+                                      <m:sSub>
+                                        <m:e>
+                                          <m:acc>
+                                            <m:accPr>
+                                              <m:chr m:val="̂"/>
+                                            </m:accPr>
+                                            <m:e>
+                                              <m:r>
+                                                <m:t>y</m:t>
+                                              </m:r>
+                                            </m:e>
+                                          </m:acc>
+                                        </m:e>
+                                        <m:sub>
+                                          <m:r>
+                                            <m:t>i</m:t>
+                                          </m:r>
+                                        </m:sub>
+                                      </m:sSub>
+                                    </m:num>
+                                    <m:den>
+                                      <m:r>
+                                        <m:t>1</m:t>
+                                      </m:r>
+                                      <m:r>
+                                        <m:rPr>
+                                          <m:sty m:val="p"/>
+                                        </m:rPr>
+                                        <m:t>−</m:t>
+                                      </m:r>
+                                      <m:sSub>
+                                        <m:e>
+                                          <m:r>
+                                            <m:t>h</m:t>
+                                          </m:r>
+                                        </m:e>
+                                        <m:sub>
+                                          <m:r>
+                                            <m:t>i</m:t>
+                                          </m:r>
+                                          <m:r>
+                                            <m:t>i</m:t>
+                                          </m:r>
+                                        </m:sub>
+                                      </m:sSub>
+                                    </m:den>
+                                  </m:f>
+                                </m:e>
+                              </m:d>
+                            </m:e>
+                            <m:sup>
+                              <m:r>
+                                <m:t>2</m:t>
+                              </m:r>
+                            </m:sup>
+                          </m:sSup>
+                        </m:e>
+                      </m:nary>
+                    </m:oMath>
+                  </m:oMathPara>
+                </a14:m>
+              </a:p>
+              <a:p>
+                <a:pPr lvl="0" indent="0" marL="0">
+                  <a:buNone/>
+                </a:pPr>
+                <a14:m>
+                  <m:oMath xmlns:m="http://schemas.openxmlformats.org/officeDocument/2006/math">
+                    <m:sSub>
+                      <m:e>
+                        <m:r>
+                          <m:t>h</m:t>
+                        </m:r>
+                      </m:e>
+                      <m:sub>
+                        <m:r>
+                          <m:t>i</m:t>
+                        </m:r>
+                        <m:r>
+                          <m:t>i</m:t>
+                        </m:r>
+                      </m:sub>
+                    </m:sSub>
+                  </m:oMath>
+                </a14:m>
+                <a:r>
+                  <a:rPr/>
+                  <a:t> is the leverage from Session 02. The pieces accumulate.</a:t>
+                </a:r>
+              </a:p>
+            </p:txBody>
+          </p:sp>
+        </mc:Choice>
+      </mc:AlternateContent>
+    </p:spTree>
+  </p:cSld>
+</p:sld>
+</file>
+
+<file path=ppt/slides/slide17.xml><?xml version="1.0" encoding="utf-8"?>
+<p:sld xmlns:a="http://schemas.openxmlformats.org/drawingml/2006/main" xmlns:r="http://schemas.openxmlformats.org/officeDocument/2006/relationships" xmlns:p="http://schemas.openxmlformats.org/presentationml/2006/main">
+  <p:cSld>
+    <p:spTree>
+      <p:nvGrpSpPr>
+        <p:cNvPr id="1" name=""/>
+        <p:cNvGrpSpPr/>
+        <p:nvPr/>
+      </p:nvGrpSpPr>
+      <p:grpSpPr>
+        <a:xfrm>
+          <a:off x="0" y="0"/>
+          <a:ext cx="0" cy="0"/>
+          <a:chOff x="0" y="0"/>
+          <a:chExt cx="0" cy="0"/>
+        </a:xfrm>
+      </p:grpSpPr>
+      <mc:AlternateContent xmlns:mc="http://schemas.openxmlformats.org/markup-compatibility/2006">
+        <mc:Choice xmlns:a14="http://schemas.microsoft.com/office/drawing/2010/main" Requires="a14">
+          <p:sp>
+            <p:nvSpPr>
+              <p:cNvPr id="2" name="Title 1"/>
+              <p:cNvSpPr>
+                <a:spLocks noGrp="1"/>
+              </p:cNvSpPr>
+              <p:nvPr>
+                <p:ph type="title"/>
+              </p:nvPr>
+            </p:nvSpPr>
+            <p:spPr/>
+            <p:txBody>
+              <a:bodyPr/>
+              <a:lstStyle/>
+              <a:p>
+                <a:pPr lvl="0" indent="0" marL="0">
+                  <a:buNone/>
+                </a:pPr>
+                <a14:m>
+                  <m:oMath xmlns:m="http://schemas.openxmlformats.org/officeDocument/2006/math">
+                    <m:r>
+                      <m:t>K</m:t>
+                    </m:r>
+                    <m:r>
+                      <m:rPr>
+                        <m:sty m:val="p"/>
+                      </m:rPr>
+                      <m:t>=</m:t>
+                    </m:r>
+                    <m:r>
+                      <m:t>5</m:t>
+                    </m:r>
+                  </m:oMath>
+                </a14:m>
+                <a:r>
+                  <a:rPr/>
+                  <a:t> or </a:t>
+                </a:r>
+                <a14:m>
+                  <m:oMath xmlns:m="http://schemas.openxmlformats.org/officeDocument/2006/math">
+                    <m:r>
+                      <m:t>10</m:t>
+                    </m:r>
+                  </m:oMath>
+                </a14:m>
+              </a:p>
+            </p:txBody>
+          </p:sp>
+        </mc:Choice>
+      </mc:AlternateContent>
+      <p:sp>
+        <p:nvSpPr>
+          <p:cNvPr id="3" name="Content Placeholder 2"/>
+          <p:cNvSpPr>
+            <a:spLocks noGrp="1"/>
+          </p:cNvSpPr>
+          <p:nvPr>
+            <p:ph idx="1"/>
+          </p:nvPr>
+        </p:nvSpPr>
+        <p:spPr/>
+        <p:txBody>
+          <a:bodyPr/>
+          <a:lstStyle/>
+          <a:p>
+            <a:pPr lvl="0" indent="0" marL="0">
+              <a:buNone/>
+            </a:pPr>
+            <a:r>
+              <a:rPr/>
+              <a:t>The standard compromise:</a:t>
+            </a:r>
+          </a:p>
+          <a:p>
+            <a:pPr lvl="0"/>
+            <a:r>
+              <a:rPr/>
+              <a:t>some </a:t>
+            </a:r>
+            <a:r>
+              <a:rPr b="1"/>
+              <a:t>upward bias</a:t>
+            </a:r>
+            <a:r>
+              <a:rPr/>
+              <a:t> — each model trains on less data</a:t>
+            </a:r>
+          </a:p>
+          <a:p>
+            <a:pPr lvl="0"/>
+            <a:r>
+              <a:rPr/>
+              <a:t>much </a:t>
+            </a:r>
+            <a:r>
+              <a:rPr b="1"/>
+              <a:t>lower variance</a:t>
+            </a:r>
+          </a:p>
+          <a:p>
+            <a:pPr lvl="0" indent="0" marL="0">
+              <a:buNone/>
+            </a:pPr>
+            <a:r>
+              <a:rPr/>
+              <a:t>With 30 countries, </a:t>
+            </a:r>
+            <a:r>
+              <a:rPr>
+                <a:latin typeface="Courier"/>
+              </a:rPr>
+              <a:t>GroupKFold(5)</a:t>
+            </a:r>
+            <a:r>
+              <a:rPr/>
+              <a:t> leaves six countries out per fold. Fewer folds leaves too little to train on; more makes each estimate noisy.</a:t>
+            </a:r>
+          </a:p>
+        </p:txBody>
+      </p:sp>
+    </p:spTree>
+  </p:cSld>
+</p:sld>
+</file>
+
+<file path=ppt/slides/slide18.xml><?xml version="1.0" encoding="utf-8"?>
+<p:sld xmlns:a="http://schemas.openxmlformats.org/drawingml/2006/main" xmlns:r="http://schemas.openxmlformats.org/officeDocument/2006/relationships" xmlns:p="http://schemas.openxmlformats.org/presentationml/2006/main">
+  <p:cSld>
+    <p:spTree>
+      <p:nvGrpSpPr>
+        <p:cNvPr id="1" name=""/>
+        <p:cNvGrpSpPr/>
+        <p:nvPr/>
+      </p:nvGrpSpPr>
+      <p:grpSpPr>
+        <a:xfrm>
+          <a:off x="0" y="0"/>
+          <a:ext cx="0" cy="0"/>
+          <a:chOff x="0" y="0"/>
+          <a:chExt cx="0" cy="0"/>
+        </a:xfrm>
+      </p:grpSpPr>
+      <p:sp>
+        <p:nvSpPr>
+          <p:cNvPr id="2" name="Title 1"/>
+          <p:cNvSpPr>
+            <a:spLocks noGrp="1"/>
+          </p:cNvSpPr>
+          <p:nvPr>
+            <p:ph type="title"/>
+          </p:nvPr>
+        </p:nvSpPr>
+        <p:spPr>
+          <a:xfrm>
+            <a:off x="722313" y="3305176"/>
+            <a:ext cx="7772400" cy="1021556"/>
+          </a:xfrm>
+        </p:spPr>
+        <p:txBody>
+          <a:bodyPr/>
+          <a:lstStyle/>
+          <a:p>
+            <a:pPr lvl="0" indent="0" marL="0">
+              <a:buNone/>
+            </a:pPr>
+            <a:r>
+              <a:rPr/>
+              <a:t>4.4 Three ways to get it wrong</a:t>
+            </a:r>
+          </a:p>
+        </p:txBody>
+      </p:sp>
+    </p:spTree>
+  </p:cSld>
+</p:sld>
+</file>
+
+<file path=ppt/slides/slide19.xml><?xml version="1.0" encoding="utf-8"?>
+<p:sld xmlns:a="http://schemas.openxmlformats.org/drawingml/2006/main" xmlns:r="http://schemas.openxmlformats.org/officeDocument/2006/relationships" xmlns:p="http://schemas.openxmlformats.org/presentationml/2006/main">
+  <p:cSld>
+    <p:spTree>
+      <p:nvGrpSpPr>
+        <p:cNvPr id="1" name=""/>
+        <p:cNvGrpSpPr/>
+        <p:nvPr/>
+      </p:nvGrpSpPr>
+      <p:grpSpPr>
+        <a:xfrm>
+          <a:off x="0" y="0"/>
+          <a:ext cx="0" cy="0"/>
+          <a:chOff x="0" y="0"/>
+          <a:chExt cx="0" cy="0"/>
+        </a:xfrm>
+      </p:grpSpPr>
+      <p:sp>
+        <p:nvSpPr>
+          <p:cNvPr id="2" name="Title 1"/>
+          <p:cNvSpPr>
+            <a:spLocks noGrp="1"/>
+          </p:cNvSpPr>
+          <p:nvPr>
+            <p:ph type="title"/>
+          </p:nvPr>
+        </p:nvSpPr>
+        <p:spPr/>
+        <p:txBody>
+          <a:bodyPr/>
+          <a:lstStyle/>
+          <a:p>
+            <a:pPr lvl="0" indent="0" marL="0">
+              <a:buNone/>
+            </a:pPr>
+            <a:r>
+              <a:rPr/>
+              <a:t>1. Leakage through preprocessing</a:t>
+            </a:r>
+          </a:p>
+        </p:txBody>
+      </p:sp>
+      <p:sp>
+        <p:nvSpPr>
+          <p:cNvPr id="3" name="Content Placeholder 2"/>
+          <p:cNvSpPr>
+            <a:spLocks noGrp="1"/>
+          </p:cNvSpPr>
+          <p:nvPr>
+            <p:ph idx="1"/>
+          </p:nvPr>
+        </p:nvSpPr>
+        <p:spPr/>
+        <p:txBody>
+          <a:bodyPr/>
+          <a:lstStyle/>
+          <a:p>
+            <a:pPr lvl="0" indent="0" marL="0">
+              <a:buNone/>
+            </a:pPr>
+            <a:r>
+              <a:rPr/>
+              <a:t>Any step using the outcome or the </a:t>
+            </a:r>
+            <a:r>
+              <a:rPr b="1"/>
+              <a:t>full</a:t>
+            </a:r>
+            <a:r>
+              <a:rPr/>
+              <a:t> feature distribution — standardisation, imputation, feature selection, target encoding — must be fitted </a:t>
+            </a:r>
+            <a:r>
+              <a:rPr b="1"/>
+              <a:t>inside</a:t>
+            </a:r>
+            <a:r>
+              <a:rPr/>
+              <a:t> each training fold.</a:t>
+            </a:r>
+          </a:p>
+          <a:p>
+            <a:pPr lvl="0" indent="0" marL="0">
+              <a:buNone/>
+            </a:pPr>
+            <a:r>
+              <a:rPr/>
+              <a:t>Use a </a:t>
+            </a:r>
+            <a:r>
+              <a:rPr>
+                <a:latin typeface="Courier"/>
+              </a:rPr>
+              <a:t>Pipeline</a:t>
+            </a:r>
+            <a:r>
+              <a:rPr/>
+              <a:t>.</a:t>
+            </a:r>
+          </a:p>
+          <a:p>
+            <a:pPr lvl="0" indent="0" marL="0">
+              <a:buNone/>
+            </a:pPr>
+            <a:r>
+              <a:rPr/>
+              <a:t>The single most common serious error in applied machine learning papers. It always flatters you.</a:t>
+            </a:r>
+          </a:p>
+        </p:txBody>
+      </p:sp>
+    </p:spTree>
+  </p:cSld>
+</p:sld>
+</file>
+
+<file path=ppt/slides/slide2.xml><?xml version="1.0" encoding="utf-8"?>
+<p:sld xmlns:a="http://schemas.openxmlformats.org/drawingml/2006/main" xmlns:r="http://schemas.openxmlformats.org/officeDocument/2006/relationships" xmlns:p="http://schemas.openxmlformats.org/presentationml/2006/main">
+  <p:cSld>
+    <p:spTree>
+      <p:nvGrpSpPr>
+        <p:cNvPr id="1" name=""/>
+        <p:cNvGrpSpPr/>
+        <p:nvPr/>
+      </p:nvGrpSpPr>
+      <p:grpSpPr>
+        <a:xfrm>
+          <a:off x="0" y="0"/>
+          <a:ext cx="0" cy="0"/>
+          <a:chOff x="0" y="0"/>
+          <a:chExt cx="0" cy="0"/>
+        </a:xfrm>
+      </p:grpSpPr>
+      <p:sp>
+        <p:nvSpPr>
+          <p:cNvPr id="3" name="Content Placeholder 2"/>
+          <p:cNvSpPr>
+            <a:spLocks noGrp="1"/>
+          </p:cNvSpPr>
+          <p:nvPr>
+            <p:ph idx="1"/>
+          </p:nvPr>
+        </p:nvSpPr>
+        <p:spPr/>
+        <p:txBody>
+          <a:bodyPr/>
+          <a:lstStyle/>
+          <a:p>
+            <a:pPr lvl="0" indent="0" marL="0">
+              <a:spcBef>
+                <a:spcPts val="3000"/>
+              </a:spcBef>
+              <a:buNone/>
+            </a:pPr>
+            <a:r>
+              <a:rPr b="1"/>
+              <a:t>Your model fits the past perfectly. Why is that bad news?</a:t>
+            </a:r>
+          </a:p>
+        </p:txBody>
+      </p:sp>
+    </p:spTree>
+  </p:cSld>
+</p:sld>
+</file>
+
+<file path=ppt/slides/slide20.xml><?xml version="1.0" encoding="utf-8"?>
+<p:sld xmlns:a="http://schemas.openxmlformats.org/drawingml/2006/main" xmlns:r="http://schemas.openxmlformats.org/officeDocument/2006/relationships" xmlns:p="http://schemas.openxmlformats.org/presentationml/2006/main">
+  <p:cSld>
+    <p:spTree>
+      <p:nvGrpSpPr>
+        <p:cNvPr id="1" name=""/>
+        <p:cNvGrpSpPr/>
+        <p:nvPr/>
+      </p:nvGrpSpPr>
+      <p:grpSpPr>
+        <a:xfrm>
+          <a:off x="0" y="0"/>
+          <a:ext cx="0" cy="0"/>
+          <a:chOff x="0" y="0"/>
+          <a:chExt cx="0" cy="0"/>
+        </a:xfrm>
+      </p:grpSpPr>
+      <p:sp>
+        <p:nvSpPr>
+          <p:cNvPr id="2" name="Title 1"/>
+          <p:cNvSpPr>
+            <a:spLocks noGrp="1"/>
+          </p:cNvSpPr>
+          <p:nvPr>
+            <p:ph type="title"/>
+          </p:nvPr>
+        </p:nvSpPr>
+        <p:spPr/>
+        <p:txBody>
+          <a:bodyPr/>
+          <a:lstStyle/>
+          <a:p>
+            <a:pPr lvl="0" indent="0" marL="0">
+              <a:buNone/>
+            </a:pPr>
+            <a:r>
+              <a:rPr/>
+              <a:t>2. Leakage through selection</a:t>
+            </a:r>
+          </a:p>
+        </p:txBody>
+      </p:sp>
+      <p:sp>
+        <p:nvSpPr>
+          <p:cNvPr id="3" name="Content Placeholder 2"/>
+          <p:cNvSpPr>
+            <a:spLocks noGrp="1"/>
+          </p:cNvSpPr>
+          <p:nvPr>
+            <p:ph idx="1"/>
+          </p:nvPr>
+        </p:nvSpPr>
+        <p:spPr/>
+        <p:txBody>
+          <a:bodyPr/>
+          <a:lstStyle/>
+          <a:p>
+            <a:pPr lvl="0" indent="0" marL="0">
+              <a:buNone/>
+            </a:pPr>
+            <a:r>
+              <a:rPr/>
+              <a:t>Choosing a model by CV and then reporting </a:t>
+            </a:r>
+            <a:r>
+              <a:rPr b="1"/>
+              <a:t>that same CV error</a:t>
+            </a:r>
+            <a:r>
+              <a:rPr/>
+              <a:t> as its performance is optimistic.</a:t>
+            </a:r>
+          </a:p>
+          <a:p>
+            <a:pPr lvl="0" indent="0" marL="0">
+              <a:buNone/>
+            </a:pPr>
+            <a:r>
+              <a:rPr/>
+              <a:t>You need a </a:t>
+            </a:r>
+            <a:r>
+              <a:rPr b="1"/>
+              <a:t>nested</a:t>
+            </a:r>
+            <a:r>
+              <a:rPr/>
+              <a:t> design:</a:t>
+            </a:r>
+          </a:p>
+          <a:p>
+            <a:pPr lvl="0"/>
+            <a:r>
+              <a:rPr/>
+              <a:t>an </a:t>
+            </a:r>
+            <a:r>
+              <a:rPr b="1"/>
+              <a:t>outer</a:t>
+            </a:r>
+            <a:r>
+              <a:rPr/>
+              <a:t> loop for evaluation</a:t>
+            </a:r>
+          </a:p>
+          <a:p>
+            <a:pPr lvl="0"/>
+            <a:r>
+              <a:rPr/>
+              <a:t>an </a:t>
+            </a:r>
+            <a:r>
+              <a:rPr b="1"/>
+              <a:t>inner</a:t>
+            </a:r>
+            <a:r>
+              <a:rPr/>
+              <a:t> loop for tuning</a:t>
+            </a:r>
+          </a:p>
+          <a:p>
+            <a:pPr lvl="0" indent="0" marL="0">
+              <a:buNone/>
+            </a:pPr>
+            <a:r>
+              <a:rPr/>
+              <a:t>Reporting the best inner-loop score is the same error as reporting training error, one level up.</a:t>
+            </a:r>
+          </a:p>
+        </p:txBody>
+      </p:sp>
+    </p:spTree>
+  </p:cSld>
+</p:sld>
+</file>
+
+<file path=ppt/slides/slide21.xml><?xml version="1.0" encoding="utf-8"?>
+<p:sld xmlns:a="http://schemas.openxmlformats.org/drawingml/2006/main" xmlns:r="http://schemas.openxmlformats.org/officeDocument/2006/relationships" xmlns:p="http://schemas.openxmlformats.org/presentationml/2006/main">
+  <p:cSld>
+    <p:spTree>
+      <p:nvGrpSpPr>
+        <p:cNvPr id="1" name=""/>
+        <p:cNvGrpSpPr/>
+        <p:nvPr/>
+      </p:nvGrpSpPr>
+      <p:grpSpPr>
+        <a:xfrm>
+          <a:off x="0" y="0"/>
+          <a:ext cx="0" cy="0"/>
+          <a:chOff x="0" y="0"/>
+          <a:chExt cx="0" cy="0"/>
+        </a:xfrm>
+      </p:grpSpPr>
+      <p:sp>
+        <p:nvSpPr>
+          <p:cNvPr id="2" name="Title 1"/>
+          <p:cNvSpPr>
+            <a:spLocks noGrp="1"/>
+          </p:cNvSpPr>
+          <p:nvPr>
+            <p:ph type="title"/>
+          </p:nvPr>
+        </p:nvSpPr>
+        <p:spPr>
+          <a:xfrm>
+            <a:off x="457201" y="204787"/>
+            <a:ext cx="3008313" cy="871538"/>
+          </a:xfrm>
+        </p:spPr>
+        <p:txBody>
+          <a:bodyPr/>
+          <a:lstStyle/>
+          <a:p>
+            <a:pPr lvl="0" indent="0" marL="0">
+              <a:buNone/>
+            </a:pPr>
+            <a:r>
+              <a:rPr/>
+              <a:t>3. Ignoring dependence</a:t>
+            </a:r>
+          </a:p>
+        </p:txBody>
+      </p:sp>
+      <p:sp>
+        <p:nvSpPr>
+          <p:cNvPr id="4" name="Text Placeholder 3"/>
+          <p:cNvSpPr>
+            <a:spLocks noGrp="1"/>
+          </p:cNvSpPr>
+          <p:nvPr>
+            <p:ph idx="2" sz="half" type="body"/>
+          </p:nvPr>
+        </p:nvSpPr>
+        <p:spPr/>
+        <p:txBody>
+          <a:bodyPr/>
+          <a:lstStyle/>
+          <a:p>
+            <a:pPr lvl="0" indent="0" marL="0">
+              <a:buNone/>
+            </a:pPr>
+            <a:r>
+              <a:rPr/>
+              <a:t>Random folds assume exchangeability. Economic data rarely are.</a:t>
             </a:r>
           </a:p>
         </p:txBody>
@@ -3330,8 +5794,8 @@
           </p:nvPr>
         </p:nvGraphicFramePr>
         <p:xfrm>
-          <a:off x="457200" y="1193800"/>
-          <a:ext cx="8229600" cy="3390900"/>
+          <a:off x="3568700" y="203200"/>
+          <a:ext cx="5105400" cy="4381500"/>
         </p:xfrm>
         <a:graphic>
           <a:graphicData uri="http://schemas.openxmlformats.org/drawingml/2006/table">
@@ -3340,9 +5804,8 @@
                 <a:tableStyleId>{5C22544A-7EE6-4342-B048-85BDC9FD1C3A}</a:tableStyleId>
               </a:tblPr>
               <a:tblGrid>
-                <a:gridCol w="2743200"/>
-                <a:gridCol w="2743200"/>
-                <a:gridCol w="2743200"/>
+                <a:gridCol w="2552700"/>
+                <a:gridCol w="2552700"/>
               </a:tblGrid>
               <a:tr h="0">
                 <a:tc>
@@ -3355,23 +5818,7 @@
                       </a:pPr>
                       <a:r>
                         <a:rPr/>
-                        <a:t>Split</a:t>
-                      </a:r>
-                    </a:p>
-                  </a:txBody>
-                  <a:tcPr/>
-                </a:tc>
-                <a:tc>
-                  <a:txBody>
-                    <a:bodyPr/>
-                    <a:lstStyle/>
-                    <a:p>
-                      <a:pPr lvl="0" indent="0" marL="0">
-                        <a:buNone/>
-                      </a:pPr>
-                      <a:r>
-                        <a:rPr/>
-                        <a:t>Answers</a:t>
+                        <a:t>Structure</a:t>
                       </a:r>
                     </a:p>
                   </a:txBody>
@@ -3405,7 +5852,7 @@
                       </a:pPr>
                       <a:r>
                         <a:rPr b="1"/>
-                        <a:t>Random K-fold</a:t>
+                        <a:t>Time series</a:t>
                       </a:r>
                     </a:p>
                   </a:txBody>
@@ -3420,22 +5867,7 @@
                       </a:pPr>
                       <a:r>
                         <a:rPr/>
-                        <a:t>“New row from the same countries and years”</a:t>
-                      </a:r>
-                    </a:p>
-                  </a:txBody>
-                </a:tc>
-                <a:tc>
-                  <a:txBody>
-                    <a:bodyPr/>
-                    <a:lstStyle/>
-                    <a:p>
-                      <a:pPr lvl="0" indent="0" marL="0">
-                        <a:buNone/>
-                      </a:pPr>
-                      <a:r>
-                        <a:rPr/>
-                        <a:t>Almost never here</a:t>
+                        <a:t>rolling-origin / expanding-window. Never train on the future.</a:t>
                       </a:r>
                     </a:p>
                   </a:txBody>
@@ -3452,13 +5884,7 @@
                       </a:pPr>
                       <a:r>
                         <a:rPr b="1"/>
-                        <a:t>GroupKFold by </a:t>
-                      </a:r>
-                      <a:r>
-                        <a:rPr b="1">
-                          <a:latin typeface="Courier"/>
-                        </a:rPr>
-                        <a:t>geo</a:t>
+                        <a:t>Panel or clustered</a:t>
                       </a:r>
                     </a:p>
                   </a:txBody>
@@ -3472,23 +5898,14 @@
                         <a:buNone/>
                       </a:pPr>
                       <a:r>
-                        <a:rPr/>
-                        <a:t>“A country I have never seen”</a:t>
+                        <a:rPr>
+                          <a:latin typeface="Courier"/>
+                        </a:rPr>
+                        <a:t>GroupKFold</a:t>
                       </a:r>
-                    </a:p>
-                  </a:txBody>
-                </a:tc>
-                <a:tc>
-                  <a:txBody>
-                    <a:bodyPr/>
-                    <a:lstStyle/>
-                    <a:p>
-                      <a:pPr lvl="0" indent="0" marL="0">
-                        <a:buNone/>
-                      </a:pPr>
                       <a:r>
                         <a:rPr/>
-                        <a:t>Transfer across countries</a:t>
+                        <a:t> — all observations of a unit stay together</a:t>
                       </a:r>
                     </a:p>
                   </a:txBody>
@@ -3505,17 +5922,7 @@
                       </a:pPr>
                       <a:r>
                         <a:rPr b="1"/>
-                        <a:t>TimeSeriesSplit</a:t>
-                      </a:r>
-                      <a:r>
-                        <a:rPr/>
-                        <a:t> by </a:t>
-                      </a:r>
-                      <a:r>
-                        <a:rPr>
-                          <a:latin typeface="Courier"/>
-                        </a:rPr>
-                        <a:t>time</a:t>
+                        <a:t>Spatial</a:t>
                       </a:r>
                     </a:p>
                   </a:txBody>
@@ -3530,22 +5937,7 @@
                       </a:pPr>
                       <a:r>
                         <a:rPr/>
-                        <a:t>“Next year”</a:t>
-                      </a:r>
-                    </a:p>
-                  </a:txBody>
-                </a:tc>
-                <a:tc>
-                  <a:txBody>
-                    <a:bodyPr/>
-                    <a:lstStyle/>
-                    <a:p>
-                      <a:pPr lvl="0" indent="0" marL="0">
-                        <a:buNone/>
-                      </a:pPr>
-                      <a:r>
-                        <a:rPr/>
-                        <a:t>Forecasting — Session 11</a:t>
+                        <a:t>blocked CV — neighbours are correlated</a:t>
                       </a:r>
                     </a:p>
                   </a:txBody>
@@ -3560,7 +5952,7 @@
 </p:sld>
 </file>
 
-<file path=ppt/slides/slide11.xml><?xml version="1.0" encoding="utf-8"?>
+<file path=ppt/slides/slide22.xml><?xml version="1.0" encoding="utf-8"?>
 <p:sld xmlns:a="http://schemas.openxmlformats.org/drawingml/2006/main" xmlns:r="http://schemas.openxmlformats.org/officeDocument/2006/relationships" xmlns:p="http://schemas.openxmlformats.org/presentationml/2006/main">
   <p:cSld>
     <p:spTree>
@@ -3579,1393 +5971,6 @@
       </p:grpSpPr>
       <p:sp>
         <p:nvSpPr>
-          <p:cNvPr id="3" name="Content Placeholder 2"/>
-          <p:cNvSpPr>
-            <a:spLocks noGrp="1"/>
-          </p:cNvSpPr>
-          <p:nvPr>
-            <p:ph idx="1"/>
-          </p:nvPr>
-        </p:nvSpPr>
-        <p:spPr/>
-        <p:txBody>
-          <a:bodyPr/>
-          <a:lstStyle/>
-          <a:p>
-            <a:pPr lvl="0" indent="0" marL="0">
-              <a:buNone/>
-            </a:pPr>
-            <a:r>
-              <a:rPr/>
-              <a:t>Choose the split that matches the sentence you intend to write in your conclusion. Then say which you used.</a:t>
-            </a:r>
-          </a:p>
-        </p:txBody>
-      </p:sp>
-    </p:spTree>
-  </p:cSld>
-</p:sld>
-</file>
-
-<file path=ppt/slides/slide12.xml><?xml version="1.0" encoding="utf-8"?>
-<p:sld xmlns:a="http://schemas.openxmlformats.org/drawingml/2006/main" xmlns:r="http://schemas.openxmlformats.org/officeDocument/2006/relationships" xmlns:p="http://schemas.openxmlformats.org/presentationml/2006/main">
-  <p:cSld>
-    <p:spTree>
-      <p:nvGrpSpPr>
-        <p:cNvPr id="1" name=""/>
-        <p:cNvGrpSpPr/>
-        <p:nvPr/>
-      </p:nvGrpSpPr>
-      <p:grpSpPr>
-        <a:xfrm>
-          <a:off x="0" y="0"/>
-          <a:ext cx="0" cy="0"/>
-          <a:chOff x="0" y="0"/>
-          <a:chExt cx="0" cy="0"/>
-        </a:xfrm>
-      </p:grpSpPr>
-      <p:sp>
-        <p:nvSpPr>
-          <p:cNvPr id="2" name="Title 1"/>
-          <p:cNvSpPr>
-            <a:spLocks noGrp="1"/>
-          </p:cNvSpPr>
-          <p:nvPr>
-            <p:ph type="title"/>
-          </p:nvPr>
-        </p:nvSpPr>
-        <p:spPr>
-          <a:xfrm>
-            <a:off x="722313" y="3305176"/>
-            <a:ext cx="7772400" cy="1021556"/>
-          </a:xfrm>
-        </p:spPr>
-        <p:txBody>
-          <a:bodyPr/>
-          <a:lstStyle/>
-          <a:p>
-            <a:pPr lvl="0" indent="0" marL="0">
-              <a:buNone/>
-            </a:pPr>
-            <a:r>
-              <a:rPr/>
-              <a:t>Doing it</a:t>
-            </a:r>
-          </a:p>
-        </p:txBody>
-      </p:sp>
-    </p:spTree>
-  </p:cSld>
-</p:sld>
-</file>
-
-<file path=ppt/slides/slide13.xml><?xml version="1.0" encoding="utf-8"?>
-<p:sld xmlns:a="http://schemas.openxmlformats.org/drawingml/2006/main" xmlns:r="http://schemas.openxmlformats.org/officeDocument/2006/relationships" xmlns:p="http://schemas.openxmlformats.org/presentationml/2006/main">
-  <p:cSld>
-    <p:spTree>
-      <p:nvGrpSpPr>
-        <p:cNvPr id="1" name=""/>
-        <p:cNvGrpSpPr/>
-        <p:nvPr/>
-      </p:nvGrpSpPr>
-      <p:grpSpPr>
-        <a:xfrm>
-          <a:off x="0" y="0"/>
-          <a:ext cx="0" cy="0"/>
-          <a:chOff x="0" y="0"/>
-          <a:chExt cx="0" cy="0"/>
-        </a:xfrm>
-      </p:grpSpPr>
-      <p:sp>
-        <p:nvSpPr>
-          <p:cNvPr id="2" name="Title 1"/>
-          <p:cNvSpPr>
-            <a:spLocks noGrp="1"/>
-          </p:cNvSpPr>
-          <p:nvPr>
-            <p:ph type="title"/>
-          </p:nvPr>
-        </p:nvSpPr>
-        <p:spPr/>
-        <p:txBody>
-          <a:bodyPr/>
-          <a:lstStyle/>
-          <a:p>
-            <a:pPr lvl="0" indent="0" marL="0">
-              <a:buNone/>
-            </a:pPr>
-            <a:r>
-              <a:rPr/>
-              <a:t>The data</a:t>
-            </a:r>
-          </a:p>
-        </p:txBody>
-      </p:sp>
-      <p:sp>
-        <p:nvSpPr>
-          <p:cNvPr id="3" name="Content Placeholder 2"/>
-          <p:cNvSpPr>
-            <a:spLocks noGrp="1"/>
-          </p:cNvSpPr>
-          <p:nvPr>
-            <p:ph idx="1"/>
-          </p:nvPr>
-        </p:nvSpPr>
-        <p:spPr/>
-        <p:txBody>
-          <a:bodyPr/>
-          <a:lstStyle/>
-          <a:p>
-            <a:pPr lvl="0" indent="0">
-              <a:buNone/>
-            </a:pPr>
-            <a:r>
-              <a:rPr b="1">
-                <a:solidFill>
-                  <a:srgbClr val="008000"/>
-                </a:solidFill>
-                <a:latin typeface="Courier"/>
-              </a:rPr>
-              <a:t>import</a:t>
-            </a:r>
-            <a:r>
-              <a:rPr>
-                <a:latin typeface="Courier"/>
-              </a:rPr>
-              <a:t> pandas </a:t>
-            </a:r>
-            <a:r>
-              <a:rPr b="1">
-                <a:solidFill>
-                  <a:srgbClr val="008000"/>
-                </a:solidFill>
-                <a:latin typeface="Courier"/>
-              </a:rPr>
-              <a:t>as</a:t>
-            </a:r>
-            <a:r>
-              <a:rPr>
-                <a:latin typeface="Courier"/>
-              </a:rPr>
-              <a:t> pd</a:t>
-            </a:r>
-            <a:br/>
-            <a:br/>
-            <a:r>
-              <a:rPr>
-                <a:latin typeface="Courier"/>
-              </a:rPr>
-              <a:t>core </a:t>
-            </a:r>
-            <a:r>
-              <a:rPr>
-                <a:solidFill>
-                  <a:srgbClr val="666666"/>
-                </a:solidFill>
-                <a:latin typeface="Courier"/>
-              </a:rPr>
-              <a:t>=</a:t>
-            </a:r>
-            <a:r>
-              <a:rPr>
-                <a:latin typeface="Courier"/>
-              </a:rPr>
-              <a:t> pd.read_parquet(</a:t>
-            </a:r>
-            <a:r>
-              <a:rPr>
-                <a:solidFill>
-                  <a:srgbClr val="4070A0"/>
-                </a:solidFill>
-                <a:latin typeface="Courier"/>
-              </a:rPr>
-              <a:t>"data/spine/core.parquet"</a:t>
-            </a:r>
-            <a:r>
-              <a:rPr>
-                <a:latin typeface="Courier"/>
-              </a:rPr>
-              <a:t>)</a:t>
-            </a:r>
-            <a:br/>
-            <a:r>
-              <a:rPr>
-                <a:latin typeface="Courier"/>
-              </a:rPr>
-              <a:t>cols </a:t>
-            </a:r>
-            <a:r>
-              <a:rPr>
-                <a:solidFill>
-                  <a:srgbClr val="666666"/>
-                </a:solidFill>
-                <a:latin typeface="Courier"/>
-              </a:rPr>
-              <a:t>=</a:t>
-            </a:r>
-            <a:r>
-              <a:rPr>
-                <a:latin typeface="Courier"/>
-              </a:rPr>
-              <a:t> [</a:t>
-            </a:r>
-            <a:r>
-              <a:rPr>
-                <a:solidFill>
-                  <a:srgbClr val="4070A0"/>
-                </a:solidFill>
-                <a:latin typeface="Courier"/>
-              </a:rPr>
-              <a:t>"gdp_pc_eur"</a:t>
-            </a:r>
-            <a:r>
-              <a:rPr>
-                <a:latin typeface="Courier"/>
-              </a:rPr>
-              <a:t>, </a:t>
-            </a:r>
-            <a:r>
-              <a:rPr>
-                <a:solidFill>
-                  <a:srgbClr val="4070A0"/>
-                </a:solidFill>
-                <a:latin typeface="Courier"/>
-              </a:rPr>
-              <a:t>"population"</a:t>
-            </a:r>
-            <a:r>
-              <a:rPr>
-                <a:latin typeface="Courier"/>
-              </a:rPr>
-              <a:t>, </a:t>
-            </a:r>
-            <a:r>
-              <a:rPr>
-                <a:solidFill>
-                  <a:srgbClr val="4070A0"/>
-                </a:solidFill>
-                <a:latin typeface="Courier"/>
-              </a:rPr>
-              <a:t>"employment_ths"</a:t>
-            </a:r>
-            <a:r>
-              <a:rPr>
-                <a:latin typeface="Courier"/>
-              </a:rPr>
-              <a:t>, </a:t>
-            </a:r>
-            <a:r>
-              <a:rPr>
-                <a:solidFill>
-                  <a:srgbClr val="4070A0"/>
-                </a:solidFill>
-                <a:latin typeface="Courier"/>
-              </a:rPr>
-              <a:t>"gfcf_meur"</a:t>
-            </a:r>
-            <a:r>
-              <a:rPr>
-                <a:latin typeface="Courier"/>
-              </a:rPr>
-              <a:t>]</a:t>
-            </a:r>
-            <a:br/>
-            <a:r>
-              <a:rPr>
-                <a:latin typeface="Courier"/>
-              </a:rPr>
-              <a:t>d </a:t>
-            </a:r>
-            <a:r>
-              <a:rPr>
-                <a:solidFill>
-                  <a:srgbClr val="666666"/>
-                </a:solidFill>
-                <a:latin typeface="Courier"/>
-              </a:rPr>
-              <a:t>=</a:t>
-            </a:r>
-            <a:r>
-              <a:rPr>
-                <a:latin typeface="Courier"/>
-              </a:rPr>
-              <a:t> core.dropna(subset</a:t>
-            </a:r>
-            <a:r>
-              <a:rPr>
-                <a:solidFill>
-                  <a:srgbClr val="666666"/>
-                </a:solidFill>
-                <a:latin typeface="Courier"/>
-              </a:rPr>
-              <a:t>=</a:t>
-            </a:r>
-            <a:r>
-              <a:rPr>
-                <a:latin typeface="Courier"/>
-              </a:rPr>
-              <a:t>cols).copy()</a:t>
-            </a:r>
-            <a:br/>
-            <a:br/>
-            <a:r>
-              <a:rPr>
-                <a:solidFill>
-                  <a:srgbClr val="008000"/>
-                </a:solidFill>
-                <a:latin typeface="Courier"/>
-              </a:rPr>
-              <a:t>print</a:t>
-            </a:r>
-            <a:r>
-              <a:rPr>
-                <a:latin typeface="Courier"/>
-              </a:rPr>
-              <a:t>(d.shape, d.geo.nunique(), d.time.</a:t>
-            </a:r>
-            <a:r>
-              <a:rPr>
-                <a:solidFill>
-                  <a:srgbClr val="008000"/>
-                </a:solidFill>
-                <a:latin typeface="Courier"/>
-              </a:rPr>
-              <a:t>min</a:t>
-            </a:r>
-            <a:r>
-              <a:rPr>
-                <a:latin typeface="Courier"/>
-              </a:rPr>
-              <a:t>(), d.time.</a:t>
-            </a:r>
-            <a:r>
-              <a:rPr>
-                <a:solidFill>
-                  <a:srgbClr val="008000"/>
-                </a:solidFill>
-                <a:latin typeface="Courier"/>
-              </a:rPr>
-              <a:t>max</a:t>
-            </a:r>
-            <a:r>
-              <a:rPr>
-                <a:latin typeface="Courier"/>
-              </a:rPr>
-              <a:t>())</a:t>
-            </a:r>
-            <a:br/>
-            <a:r>
-              <a:rPr i="1">
-                <a:solidFill>
-                  <a:srgbClr val="60A0B0"/>
-                </a:solidFill>
-                <a:latin typeface="Courier"/>
-              </a:rPr>
-              <a:t># 30 countries, 2010-2024</a:t>
-            </a:r>
-          </a:p>
-          <a:p>
-            <a:pPr lvl="0" indent="0" marL="0">
-              <a:buNone/>
-            </a:pPr>
-            <a:r>
-              <a:rPr/>
-              <a:t>We predict </a:t>
-            </a:r>
-            <a:r>
-              <a:rPr b="1">
-                <a:latin typeface="Courier"/>
-              </a:rPr>
-              <a:t>gdp_pc_eur</a:t>
-            </a:r>
-            <a:r>
-              <a:rPr b="1"/>
-              <a:t> from the other levels</a:t>
-            </a:r>
-            <a:r>
-              <a:rPr/>
-              <a:t>. Levels are highly persistent within a country, which is exactly the setting where the choice of split bites.</a:t>
-            </a:r>
-          </a:p>
-        </p:txBody>
-      </p:sp>
-    </p:spTree>
-  </p:cSld>
-</p:sld>
-</file>
-
-<file path=ppt/slides/slide14.xml><?xml version="1.0" encoding="utf-8"?>
-<p:sld xmlns:a="http://schemas.openxmlformats.org/drawingml/2006/main" xmlns:r="http://schemas.openxmlformats.org/officeDocument/2006/relationships" xmlns:p="http://schemas.openxmlformats.org/presentationml/2006/main">
-  <p:cSld>
-    <p:spTree>
-      <p:nvGrpSpPr>
-        <p:cNvPr id="1" name=""/>
-        <p:cNvGrpSpPr/>
-        <p:nvPr/>
-      </p:nvGrpSpPr>
-      <p:grpSpPr>
-        <a:xfrm>
-          <a:off x="0" y="0"/>
-          <a:ext cx="0" cy="0"/>
-          <a:chOff x="0" y="0"/>
-          <a:chExt cx="0" cy="0"/>
-        </a:xfrm>
-      </p:grpSpPr>
-      <p:sp>
-        <p:nvSpPr>
-          <p:cNvPr id="2" name="Title 1"/>
-          <p:cNvSpPr>
-            <a:spLocks noGrp="1"/>
-          </p:cNvSpPr>
-          <p:nvPr>
-            <p:ph type="title"/>
-          </p:nvPr>
-        </p:nvSpPr>
-        <p:spPr/>
-        <p:txBody>
-          <a:bodyPr/>
-          <a:lstStyle/>
-          <a:p>
-            <a:pPr lvl="0" indent="0" marL="0">
-              <a:buNone/>
-            </a:pPr>
-            <a:r>
-              <a:rPr/>
-              <a:t>Set up the comparison</a:t>
-            </a:r>
-          </a:p>
-        </p:txBody>
-      </p:sp>
-      <p:sp>
-        <p:nvSpPr>
-          <p:cNvPr id="3" name="Content Placeholder 2"/>
-          <p:cNvSpPr>
-            <a:spLocks noGrp="1"/>
-          </p:cNvSpPr>
-          <p:nvPr>
-            <p:ph idx="1"/>
-          </p:nvPr>
-        </p:nvSpPr>
-        <p:spPr/>
-        <p:txBody>
-          <a:bodyPr/>
-          <a:lstStyle/>
-          <a:p>
-            <a:pPr lvl="0" indent="0">
-              <a:buNone/>
-            </a:pPr>
-            <a:r>
-              <a:rPr b="1">
-                <a:solidFill>
-                  <a:srgbClr val="008000"/>
-                </a:solidFill>
-                <a:latin typeface="Courier"/>
-              </a:rPr>
-              <a:t>from</a:t>
-            </a:r>
-            <a:r>
-              <a:rPr>
-                <a:latin typeface="Courier"/>
-              </a:rPr>
-              <a:t> sklearn.ensemble </a:t>
-            </a:r>
-            <a:r>
-              <a:rPr b="1">
-                <a:solidFill>
-                  <a:srgbClr val="008000"/>
-                </a:solidFill>
-                <a:latin typeface="Courier"/>
-              </a:rPr>
-              <a:t>import</a:t>
-            </a:r>
-            <a:r>
-              <a:rPr>
-                <a:latin typeface="Courier"/>
-              </a:rPr>
-              <a:t> RandomForestRegressor</a:t>
-            </a:r>
-            <a:br/>
-            <a:r>
-              <a:rPr b="1">
-                <a:solidFill>
-                  <a:srgbClr val="008000"/>
-                </a:solidFill>
-                <a:latin typeface="Courier"/>
-              </a:rPr>
-              <a:t>from</a:t>
-            </a:r>
-            <a:r>
-              <a:rPr>
-                <a:latin typeface="Courier"/>
-              </a:rPr>
-              <a:t> sklearn.model_selection </a:t>
-            </a:r>
-            <a:r>
-              <a:rPr b="1">
-                <a:solidFill>
-                  <a:srgbClr val="008000"/>
-                </a:solidFill>
-                <a:latin typeface="Courier"/>
-              </a:rPr>
-              <a:t>import</a:t>
-            </a:r>
-            <a:r>
-              <a:rPr>
-                <a:latin typeface="Courier"/>
-              </a:rPr>
-              <a:t> (cross_val_score, KFold,</a:t>
-            </a:r>
-            <a:br/>
-            <a:r>
-              <a:rPr>
-                <a:latin typeface="Courier"/>
-              </a:rPr>
-              <a:t>                                     GroupKFold, TimeSeriesSplit)</a:t>
-            </a:r>
-            <a:br/>
-            <a:br/>
-            <a:r>
-              <a:rPr>
-                <a:latin typeface="Courier"/>
-              </a:rPr>
-              <a:t>X </a:t>
-            </a:r>
-            <a:r>
-              <a:rPr>
-                <a:solidFill>
-                  <a:srgbClr val="666666"/>
-                </a:solidFill>
-                <a:latin typeface="Courier"/>
-              </a:rPr>
-              <a:t>=</a:t>
-            </a:r>
-            <a:r>
-              <a:rPr>
-                <a:latin typeface="Courier"/>
-              </a:rPr>
-              <a:t> d[[</a:t>
-            </a:r>
-            <a:r>
-              <a:rPr>
-                <a:solidFill>
-                  <a:srgbClr val="4070A0"/>
-                </a:solidFill>
-                <a:latin typeface="Courier"/>
-              </a:rPr>
-              <a:t>"population"</a:t>
-            </a:r>
-            <a:r>
-              <a:rPr>
-                <a:latin typeface="Courier"/>
-              </a:rPr>
-              <a:t>, </a:t>
-            </a:r>
-            <a:r>
-              <a:rPr>
-                <a:solidFill>
-                  <a:srgbClr val="4070A0"/>
-                </a:solidFill>
-                <a:latin typeface="Courier"/>
-              </a:rPr>
-              <a:t>"employment_ths"</a:t>
-            </a:r>
-            <a:r>
-              <a:rPr>
-                <a:latin typeface="Courier"/>
-              </a:rPr>
-              <a:t>, </a:t>
-            </a:r>
-            <a:r>
-              <a:rPr>
-                <a:solidFill>
-                  <a:srgbClr val="4070A0"/>
-                </a:solidFill>
-                <a:latin typeface="Courier"/>
-              </a:rPr>
-              <a:t>"gfcf_meur"</a:t>
-            </a:r>
-            <a:r>
-              <a:rPr>
-                <a:latin typeface="Courier"/>
-              </a:rPr>
-              <a:t>]]</a:t>
-            </a:r>
-            <a:br/>
-            <a:r>
-              <a:rPr>
-                <a:latin typeface="Courier"/>
-              </a:rPr>
-              <a:t>y </a:t>
-            </a:r>
-            <a:r>
-              <a:rPr>
-                <a:solidFill>
-                  <a:srgbClr val="666666"/>
-                </a:solidFill>
-                <a:latin typeface="Courier"/>
-              </a:rPr>
-              <a:t>=</a:t>
-            </a:r>
-            <a:r>
-              <a:rPr>
-                <a:latin typeface="Courier"/>
-              </a:rPr>
-              <a:t> d[</a:t>
-            </a:r>
-            <a:r>
-              <a:rPr>
-                <a:solidFill>
-                  <a:srgbClr val="4070A0"/>
-                </a:solidFill>
-                <a:latin typeface="Courier"/>
-              </a:rPr>
-              <a:t>"gdp_pc_eur"</a:t>
-            </a:r>
-            <a:r>
-              <a:rPr>
-                <a:latin typeface="Courier"/>
-              </a:rPr>
-              <a:t>]</a:t>
-            </a:r>
-            <a:br/>
-            <a:r>
-              <a:rPr>
-                <a:latin typeface="Courier"/>
-              </a:rPr>
-              <a:t>m </a:t>
-            </a:r>
-            <a:r>
-              <a:rPr>
-                <a:solidFill>
-                  <a:srgbClr val="666666"/>
-                </a:solidFill>
-                <a:latin typeface="Courier"/>
-              </a:rPr>
-              <a:t>=</a:t>
-            </a:r>
-            <a:r>
-              <a:rPr>
-                <a:latin typeface="Courier"/>
-              </a:rPr>
-              <a:t> RandomForestRegressor(n_estimators</a:t>
-            </a:r>
-            <a:r>
-              <a:rPr>
-                <a:solidFill>
-                  <a:srgbClr val="666666"/>
-                </a:solidFill>
-                <a:latin typeface="Courier"/>
-              </a:rPr>
-              <a:t>=</a:t>
-            </a:r>
-            <a:r>
-              <a:rPr>
-                <a:solidFill>
-                  <a:srgbClr val="40A070"/>
-                </a:solidFill>
-                <a:latin typeface="Courier"/>
-              </a:rPr>
-              <a:t>300</a:t>
-            </a:r>
-            <a:r>
-              <a:rPr>
-                <a:latin typeface="Courier"/>
-              </a:rPr>
-              <a:t>, random_state</a:t>
-            </a:r>
-            <a:r>
-              <a:rPr>
-                <a:solidFill>
-                  <a:srgbClr val="666666"/>
-                </a:solidFill>
-                <a:latin typeface="Courier"/>
-              </a:rPr>
-              <a:t>=</a:t>
-            </a:r>
-            <a:r>
-              <a:rPr>
-                <a:solidFill>
-                  <a:srgbClr val="40A070"/>
-                </a:solidFill>
-                <a:latin typeface="Courier"/>
-              </a:rPr>
-              <a:t>60033</a:t>
-            </a:r>
-            <a:r>
-              <a:rPr>
-                <a:latin typeface="Courier"/>
-              </a:rPr>
-              <a:t>)</a:t>
-            </a:r>
-            <a:br/>
-            <a:br/>
-            <a:r>
-              <a:rPr>
-                <a:latin typeface="Courier"/>
-              </a:rPr>
-              <a:t>RMSE </a:t>
-            </a:r>
-            <a:r>
-              <a:rPr>
-                <a:solidFill>
-                  <a:srgbClr val="666666"/>
-                </a:solidFill>
-                <a:latin typeface="Courier"/>
-              </a:rPr>
-              <a:t>=</a:t>
-            </a:r>
-            <a:r>
-              <a:rPr>
-                <a:latin typeface="Courier"/>
-              </a:rPr>
-              <a:t> </a:t>
-            </a:r>
-            <a:r>
-              <a:rPr>
-                <a:solidFill>
-                  <a:srgbClr val="4070A0"/>
-                </a:solidFill>
-                <a:latin typeface="Courier"/>
-              </a:rPr>
-              <a:t>"neg_root_mean_squared_error"</a:t>
-            </a:r>
-          </a:p>
-        </p:txBody>
-      </p:sp>
-    </p:spTree>
-  </p:cSld>
-</p:sld>
-</file>
-
-<file path=ppt/slides/slide15.xml><?xml version="1.0" encoding="utf-8"?>
-<p:sld xmlns:a="http://schemas.openxmlformats.org/drawingml/2006/main" xmlns:r="http://schemas.openxmlformats.org/officeDocument/2006/relationships" xmlns:p="http://schemas.openxmlformats.org/presentationml/2006/main">
-  <p:cSld>
-    <p:spTree>
-      <p:nvGrpSpPr>
-        <p:cNvPr id="1" name=""/>
-        <p:cNvGrpSpPr/>
-        <p:nvPr/>
-      </p:nvGrpSpPr>
-      <p:grpSpPr>
-        <a:xfrm>
-          <a:off x="0" y="0"/>
-          <a:ext cx="0" cy="0"/>
-          <a:chOff x="0" y="0"/>
-          <a:chExt cx="0" cy="0"/>
-        </a:xfrm>
-      </p:grpSpPr>
-      <p:sp>
-        <p:nvSpPr>
-          <p:cNvPr id="2" name="Title 1"/>
-          <p:cNvSpPr>
-            <a:spLocks noGrp="1"/>
-          </p:cNvSpPr>
-          <p:nvPr>
-            <p:ph type="title"/>
-          </p:nvPr>
-        </p:nvSpPr>
-        <p:spPr/>
-        <p:txBody>
-          <a:bodyPr/>
-          <a:lstStyle/>
-          <a:p>
-            <a:pPr lvl="0" indent="0" marL="0">
-              <a:buNone/>
-            </a:pPr>
-            <a:r>
-              <a:rPr/>
-              <a:t>Three schemes, three answers</a:t>
-            </a:r>
-          </a:p>
-        </p:txBody>
-      </p:sp>
-      <p:sp>
-        <p:nvSpPr>
-          <p:cNvPr id="3" name="Content Placeholder 2"/>
-          <p:cNvSpPr>
-            <a:spLocks noGrp="1"/>
-          </p:cNvSpPr>
-          <p:nvPr>
-            <p:ph idx="1"/>
-          </p:nvPr>
-        </p:nvSpPr>
-        <p:spPr/>
-        <p:txBody>
-          <a:bodyPr/>
-          <a:lstStyle/>
-          <a:p>
-            <a:pPr lvl="0" indent="0">
-              <a:buNone/>
-            </a:pPr>
-            <a:r>
-              <a:rPr>
-                <a:latin typeface="Courier"/>
-              </a:rPr>
-              <a:t>rand  </a:t>
-            </a:r>
-            <a:r>
-              <a:rPr>
-                <a:solidFill>
-                  <a:srgbClr val="666666"/>
-                </a:solidFill>
-                <a:latin typeface="Courier"/>
-              </a:rPr>
-              <a:t>=</a:t>
-            </a:r>
-            <a:r>
-              <a:rPr>
-                <a:latin typeface="Courier"/>
-              </a:rPr>
-              <a:t> cross_val_score(m, X, y, scoring</a:t>
-            </a:r>
-            <a:r>
-              <a:rPr>
-                <a:solidFill>
-                  <a:srgbClr val="666666"/>
-                </a:solidFill>
-                <a:latin typeface="Courier"/>
-              </a:rPr>
-              <a:t>=</a:t>
-            </a:r>
-            <a:r>
-              <a:rPr>
-                <a:latin typeface="Courier"/>
-              </a:rPr>
-              <a:t>RMSE,</a:t>
-            </a:r>
-            <a:br/>
-            <a:r>
-              <a:rPr>
-                <a:latin typeface="Courier"/>
-              </a:rPr>
-              <a:t>                        cv</a:t>
-            </a:r>
-            <a:r>
-              <a:rPr>
-                <a:solidFill>
-                  <a:srgbClr val="666666"/>
-                </a:solidFill>
-                <a:latin typeface="Courier"/>
-              </a:rPr>
-              <a:t>=</a:t>
-            </a:r>
-            <a:r>
-              <a:rPr>
-                <a:latin typeface="Courier"/>
-              </a:rPr>
-              <a:t>KFold(</a:t>
-            </a:r>
-            <a:r>
-              <a:rPr>
-                <a:solidFill>
-                  <a:srgbClr val="40A070"/>
-                </a:solidFill>
-                <a:latin typeface="Courier"/>
-              </a:rPr>
-              <a:t>5</a:t>
-            </a:r>
-            <a:r>
-              <a:rPr>
-                <a:latin typeface="Courier"/>
-              </a:rPr>
-              <a:t>, shuffle</a:t>
-            </a:r>
-            <a:r>
-              <a:rPr>
-                <a:solidFill>
-                  <a:srgbClr val="666666"/>
-                </a:solidFill>
-                <a:latin typeface="Courier"/>
-              </a:rPr>
-              <a:t>=</a:t>
-            </a:r>
-            <a:r>
-              <a:rPr>
-                <a:solidFill>
-                  <a:srgbClr val="19177C"/>
-                </a:solidFill>
-                <a:latin typeface="Courier"/>
-              </a:rPr>
-              <a:t>True</a:t>
-            </a:r>
-            <a:r>
-              <a:rPr>
-                <a:latin typeface="Courier"/>
-              </a:rPr>
-              <a:t>, random_state</a:t>
-            </a:r>
-            <a:r>
-              <a:rPr>
-                <a:solidFill>
-                  <a:srgbClr val="666666"/>
-                </a:solidFill>
-                <a:latin typeface="Courier"/>
-              </a:rPr>
-              <a:t>=</a:t>
-            </a:r>
-            <a:r>
-              <a:rPr>
-                <a:solidFill>
-                  <a:srgbClr val="40A070"/>
-                </a:solidFill>
-                <a:latin typeface="Courier"/>
-              </a:rPr>
-              <a:t>60033</a:t>
-            </a:r>
-            <a:r>
-              <a:rPr>
-                <a:latin typeface="Courier"/>
-              </a:rPr>
-              <a:t>))</a:t>
-            </a:r>
-            <a:br/>
-            <a:br/>
-            <a:r>
-              <a:rPr>
-                <a:latin typeface="Courier"/>
-              </a:rPr>
-              <a:t>group </a:t>
-            </a:r>
-            <a:r>
-              <a:rPr>
-                <a:solidFill>
-                  <a:srgbClr val="666666"/>
-                </a:solidFill>
-                <a:latin typeface="Courier"/>
-              </a:rPr>
-              <a:t>=</a:t>
-            </a:r>
-            <a:r>
-              <a:rPr>
-                <a:latin typeface="Courier"/>
-              </a:rPr>
-              <a:t> cross_val_score(m, X, y, scoring</a:t>
-            </a:r>
-            <a:r>
-              <a:rPr>
-                <a:solidFill>
-                  <a:srgbClr val="666666"/>
-                </a:solidFill>
-                <a:latin typeface="Courier"/>
-              </a:rPr>
-              <a:t>=</a:t>
-            </a:r>
-            <a:r>
-              <a:rPr>
-                <a:latin typeface="Courier"/>
-              </a:rPr>
-              <a:t>RMSE,</a:t>
-            </a:r>
-            <a:br/>
-            <a:r>
-              <a:rPr>
-                <a:latin typeface="Courier"/>
-              </a:rPr>
-              <a:t>                        cv</a:t>
-            </a:r>
-            <a:r>
-              <a:rPr>
-                <a:solidFill>
-                  <a:srgbClr val="666666"/>
-                </a:solidFill>
-                <a:latin typeface="Courier"/>
-              </a:rPr>
-              <a:t>=</a:t>
-            </a:r>
-            <a:r>
-              <a:rPr>
-                <a:latin typeface="Courier"/>
-              </a:rPr>
-              <a:t>GroupKFold(</a:t>
-            </a:r>
-            <a:r>
-              <a:rPr>
-                <a:solidFill>
-                  <a:srgbClr val="40A070"/>
-                </a:solidFill>
-                <a:latin typeface="Courier"/>
-              </a:rPr>
-              <a:t>5</a:t>
-            </a:r>
-            <a:r>
-              <a:rPr>
-                <a:latin typeface="Courier"/>
-              </a:rPr>
-              <a:t>), groups</a:t>
-            </a:r>
-            <a:r>
-              <a:rPr>
-                <a:solidFill>
-                  <a:srgbClr val="666666"/>
-                </a:solidFill>
-                <a:latin typeface="Courier"/>
-              </a:rPr>
-              <a:t>=</a:t>
-            </a:r>
-            <a:r>
-              <a:rPr>
-                <a:latin typeface="Courier"/>
-              </a:rPr>
-              <a:t>d[</a:t>
-            </a:r>
-            <a:r>
-              <a:rPr>
-                <a:solidFill>
-                  <a:srgbClr val="4070A0"/>
-                </a:solidFill>
-                <a:latin typeface="Courier"/>
-              </a:rPr>
-              <a:t>"geo"</a:t>
-            </a:r>
-            <a:r>
-              <a:rPr>
-                <a:latin typeface="Courier"/>
-              </a:rPr>
-              <a:t>])</a:t>
-            </a:r>
-            <a:br/>
-            <a:br/>
-            <a:r>
-              <a:rPr>
-                <a:latin typeface="Courier"/>
-              </a:rPr>
-              <a:t>d_s </a:t>
-            </a:r>
-            <a:r>
-              <a:rPr>
-                <a:solidFill>
-                  <a:srgbClr val="666666"/>
-                </a:solidFill>
-                <a:latin typeface="Courier"/>
-              </a:rPr>
-              <a:t>=</a:t>
-            </a:r>
-            <a:r>
-              <a:rPr>
-                <a:latin typeface="Courier"/>
-              </a:rPr>
-              <a:t> d.sort_values(</a:t>
-            </a:r>
-            <a:r>
-              <a:rPr>
-                <a:solidFill>
-                  <a:srgbClr val="4070A0"/>
-                </a:solidFill>
-                <a:latin typeface="Courier"/>
-              </a:rPr>
-              <a:t>"time"</a:t>
-            </a:r>
-            <a:r>
-              <a:rPr>
-                <a:latin typeface="Courier"/>
-              </a:rPr>
-              <a:t>)</a:t>
-            </a:r>
-            <a:br/>
-            <a:r>
-              <a:rPr>
-                <a:latin typeface="Courier"/>
-              </a:rPr>
-              <a:t>time_ </a:t>
-            </a:r>
-            <a:r>
-              <a:rPr>
-                <a:solidFill>
-                  <a:srgbClr val="666666"/>
-                </a:solidFill>
-                <a:latin typeface="Courier"/>
-              </a:rPr>
-              <a:t>=</a:t>
-            </a:r>
-            <a:r>
-              <a:rPr>
-                <a:latin typeface="Courier"/>
-              </a:rPr>
-              <a:t> cross_val_score(m, X.loc[d_s.index], y.loc[d_s.index],</a:t>
-            </a:r>
-            <a:br/>
-            <a:r>
-              <a:rPr>
-                <a:latin typeface="Courier"/>
-              </a:rPr>
-              <a:t>                        scoring</a:t>
-            </a:r>
-            <a:r>
-              <a:rPr>
-                <a:solidFill>
-                  <a:srgbClr val="666666"/>
-                </a:solidFill>
-                <a:latin typeface="Courier"/>
-              </a:rPr>
-              <a:t>=</a:t>
-            </a:r>
-            <a:r>
-              <a:rPr>
-                <a:latin typeface="Courier"/>
-              </a:rPr>
-              <a:t>RMSE, cv</a:t>
-            </a:r>
-            <a:r>
-              <a:rPr>
-                <a:solidFill>
-                  <a:srgbClr val="666666"/>
-                </a:solidFill>
-                <a:latin typeface="Courier"/>
-              </a:rPr>
-              <a:t>=</a:t>
-            </a:r>
-            <a:r>
-              <a:rPr>
-                <a:latin typeface="Courier"/>
-              </a:rPr>
-              <a:t>TimeSeriesSplit(</a:t>
-            </a:r>
-            <a:r>
-              <a:rPr>
-                <a:solidFill>
-                  <a:srgbClr val="40A070"/>
-                </a:solidFill>
-                <a:latin typeface="Courier"/>
-              </a:rPr>
-              <a:t>5</a:t>
-            </a:r>
-            <a:r>
-              <a:rPr>
-                <a:latin typeface="Courier"/>
-              </a:rPr>
-              <a:t>))</a:t>
-            </a:r>
-            <a:br/>
-            <a:br/>
-            <a:r>
-              <a:rPr b="1">
-                <a:solidFill>
-                  <a:srgbClr val="007020"/>
-                </a:solidFill>
-                <a:latin typeface="Courier"/>
-              </a:rPr>
-              <a:t>for</a:t>
-            </a:r>
-            <a:r>
-              <a:rPr>
-                <a:latin typeface="Courier"/>
-              </a:rPr>
-              <a:t> n, s </a:t>
-            </a:r>
-            <a:r>
-              <a:rPr b="1">
-                <a:solidFill>
-                  <a:srgbClr val="007020"/>
-                </a:solidFill>
-                <a:latin typeface="Courier"/>
-              </a:rPr>
-              <a:t>in</a:t>
-            </a:r>
-            <a:r>
-              <a:rPr>
-                <a:latin typeface="Courier"/>
-              </a:rPr>
-              <a:t> [(</a:t>
-            </a:r>
-            <a:r>
-              <a:rPr>
-                <a:solidFill>
-                  <a:srgbClr val="4070A0"/>
-                </a:solidFill>
-                <a:latin typeface="Courier"/>
-              </a:rPr>
-              <a:t>"random"</a:t>
-            </a:r>
-            <a:r>
-              <a:rPr>
-                <a:latin typeface="Courier"/>
-              </a:rPr>
-              <a:t>, rand), (</a:t>
-            </a:r>
-            <a:r>
-              <a:rPr>
-                <a:solidFill>
-                  <a:srgbClr val="4070A0"/>
-                </a:solidFill>
-                <a:latin typeface="Courier"/>
-              </a:rPr>
-              <a:t>"by country"</a:t>
-            </a:r>
-            <a:r>
-              <a:rPr>
-                <a:latin typeface="Courier"/>
-              </a:rPr>
-              <a:t>, group), (</a:t>
-            </a:r>
-            <a:r>
-              <a:rPr>
-                <a:solidFill>
-                  <a:srgbClr val="4070A0"/>
-                </a:solidFill>
-                <a:latin typeface="Courier"/>
-              </a:rPr>
-              <a:t>"by time"</a:t>
-            </a:r>
-            <a:r>
-              <a:rPr>
-                <a:latin typeface="Courier"/>
-              </a:rPr>
-              <a:t>, time_)]:</a:t>
-            </a:r>
-            <a:br/>
-            <a:r>
-              <a:rPr>
-                <a:latin typeface="Courier"/>
-              </a:rPr>
-              <a:t>    </a:t>
-            </a:r>
-            <a:r>
-              <a:rPr>
-                <a:solidFill>
-                  <a:srgbClr val="008000"/>
-                </a:solidFill>
-                <a:latin typeface="Courier"/>
-              </a:rPr>
-              <a:t>print</a:t>
-            </a:r>
-            <a:r>
-              <a:rPr>
-                <a:latin typeface="Courier"/>
-              </a:rPr>
-              <a:t>(</a:t>
-            </a:r>
-            <a:r>
-              <a:rPr>
-                <a:solidFill>
-                  <a:srgbClr val="BB6688"/>
-                </a:solidFill>
-                <a:latin typeface="Courier"/>
-              </a:rPr>
-              <a:t>f"</a:t>
-            </a:r>
-            <a:r>
-              <a:rPr>
-                <a:solidFill>
-                  <a:srgbClr val="4070A0"/>
-                </a:solidFill>
-                <a:latin typeface="Courier"/>
-              </a:rPr>
-              <a:t>{</a:t>
-            </a:r>
-            <a:r>
-              <a:rPr>
-                <a:latin typeface="Courier"/>
-              </a:rPr>
-              <a:t>n</a:t>
-            </a:r>
-            <a:r>
-              <a:rPr>
-                <a:solidFill>
-                  <a:srgbClr val="4070A0"/>
-                </a:solidFill>
-                <a:latin typeface="Courier"/>
-              </a:rPr>
-              <a:t>:12s}</a:t>
-            </a:r>
-            <a:r>
-              <a:rPr>
-                <a:solidFill>
-                  <a:srgbClr val="BB6688"/>
-                </a:solidFill>
-                <a:latin typeface="Courier"/>
-              </a:rPr>
-              <a:t> RMSE </a:t>
-            </a:r>
-            <a:r>
-              <a:rPr>
-                <a:solidFill>
-                  <a:srgbClr val="4070A0"/>
-                </a:solidFill>
-                <a:latin typeface="Courier"/>
-              </a:rPr>
-              <a:t>{</a:t>
-            </a:r>
-            <a:r>
-              <a:rPr>
-                <a:solidFill>
-                  <a:srgbClr val="666666"/>
-                </a:solidFill>
-                <a:latin typeface="Courier"/>
-              </a:rPr>
-              <a:t>-</a:t>
-            </a:r>
-            <a:r>
-              <a:rPr>
-                <a:latin typeface="Courier"/>
-              </a:rPr>
-              <a:t>s</a:t>
-            </a:r>
-            <a:r>
-              <a:rPr>
-                <a:solidFill>
-                  <a:srgbClr val="4070A0"/>
-                </a:solidFill>
-                <a:latin typeface="Courier"/>
-              </a:rPr>
-              <a:t>.</a:t>
-            </a:r>
-            <a:r>
-              <a:rPr>
-                <a:latin typeface="Courier"/>
-              </a:rPr>
-              <a:t>mean()</a:t>
-            </a:r>
-            <a:r>
-              <a:rPr>
-                <a:solidFill>
-                  <a:srgbClr val="4070A0"/>
-                </a:solidFill>
-                <a:latin typeface="Courier"/>
-              </a:rPr>
-              <a:t>:.3f}</a:t>
-            </a:r>
-            <a:r>
-              <a:rPr>
-                <a:solidFill>
-                  <a:srgbClr val="BB6688"/>
-                </a:solidFill>
-                <a:latin typeface="Courier"/>
-              </a:rPr>
-              <a:t>"</a:t>
-            </a:r>
-            <a:r>
-              <a:rPr>
-                <a:latin typeface="Courier"/>
-              </a:rPr>
-              <a:t>)</a:t>
-            </a:r>
-          </a:p>
-        </p:txBody>
-      </p:sp>
-    </p:spTree>
-  </p:cSld>
-</p:sld>
-</file>
-
-<file path=ppt/slides/slide16.xml><?xml version="1.0" encoding="utf-8"?>
-<p:sld xmlns:a="http://schemas.openxmlformats.org/drawingml/2006/main" xmlns:r="http://schemas.openxmlformats.org/officeDocument/2006/relationships" xmlns:p="http://schemas.openxmlformats.org/presentationml/2006/main">
-  <p:cSld>
-    <p:spTree>
-      <p:nvGrpSpPr>
-        <p:cNvPr id="1" name=""/>
-        <p:cNvGrpSpPr/>
-        <p:nvPr/>
-      </p:nvGrpSpPr>
-      <p:grpSpPr>
-        <a:xfrm>
-          <a:off x="0" y="0"/>
-          <a:ext cx="0" cy="0"/>
-          <a:chOff x="0" y="0"/>
-          <a:chExt cx="0" cy="0"/>
-        </a:xfrm>
-      </p:grpSpPr>
-      <p:sp>
-        <p:nvSpPr>
           <p:cNvPr id="2" name="Title 1"/>
           <p:cNvSpPr>
             <a:spLocks noGrp="1"/>
@@ -4989,7 +5994,7 @@
             </a:pPr>
             <a:r>
               <a:rPr/>
-              <a:t>What you should see</a:t>
+              <a:t>What that costs on this panel</a:t>
             </a:r>
           </a:p>
         </p:txBody>
@@ -5014,7 +6019,17 @@
             </a:pPr>
             <a:r>
               <a:rPr/>
-              <a:t>Roughly:</a:t>
+              <a:t>Predicting </a:t>
+            </a:r>
+            <a:r>
+              <a:rPr>
+                <a:latin typeface="Courier"/>
+              </a:rPr>
+              <a:t>gdp_pc_eur</a:t>
+            </a:r>
+            <a:r>
+              <a:rPr/>
+              <a:t> from the other levels, 30 countries × 15 years:</a:t>
             </a:r>
           </a:p>
         </p:txBody>
@@ -5141,1405 +6156,10 @@
                   </a:txBody>
                 </a:tc>
               </a:tr>
-              <a:tr h="0">
-                <a:tc>
-                  <a:txBody>
-                    <a:bodyPr/>
-                    <a:lstStyle/>
-                    <a:p>
-                      <a:pPr lvl="0" indent="0" marL="0">
-                        <a:buNone/>
-                      </a:pPr>
-                      <a:r>
-                        <a:rPr/>
-                        <a:t>TimeSeriesSplit</a:t>
-                      </a:r>
-                    </a:p>
-                  </a:txBody>
-                </a:tc>
-                <a:tc>
-                  <a:txBody>
-                    <a:bodyPr/>
-                    <a:lstStyle/>
-                    <a:p>
-                      <a:pPr lvl="0" indent="0" marL="0">
-                        <a:buNone/>
-                      </a:pPr>
-                      <a:r>
-                        <a:rPr/>
-                        <a:t>~2,800</a:t>
-                      </a:r>
-                    </a:p>
-                  </a:txBody>
-                </a:tc>
-              </a:tr>
             </a:tbl>
           </a:graphicData>
         </a:graphic>
       </p:graphicFrame>
-    </p:spTree>
-  </p:cSld>
-</p:sld>
-</file>
-
-<file path=ppt/slides/slide17.xml><?xml version="1.0" encoding="utf-8"?>
-<p:sld xmlns:a="http://schemas.openxmlformats.org/drawingml/2006/main" xmlns:r="http://schemas.openxmlformats.org/officeDocument/2006/relationships" xmlns:p="http://schemas.openxmlformats.org/presentationml/2006/main">
-  <p:cSld>
-    <p:spTree>
-      <p:nvGrpSpPr>
-        <p:cNvPr id="1" name=""/>
-        <p:cNvGrpSpPr/>
-        <p:nvPr/>
-      </p:nvGrpSpPr>
-      <p:grpSpPr>
-        <a:xfrm>
-          <a:off x="0" y="0"/>
-          <a:ext cx="0" cy="0"/>
-          <a:chOff x="0" y="0"/>
-          <a:chExt cx="0" cy="0"/>
-        </a:xfrm>
-      </p:grpSpPr>
-      <p:sp>
-        <p:nvSpPr>
-          <p:cNvPr id="3" name="Content Placeholder 2"/>
-          <p:cNvSpPr>
-            <a:spLocks noGrp="1"/>
-          </p:cNvSpPr>
-          <p:nvPr>
-            <p:ph idx="1"/>
-          </p:nvPr>
-        </p:nvSpPr>
-        <p:spPr/>
-        <p:txBody>
-          <a:bodyPr/>
-          <a:lstStyle/>
-          <a:p>
-            <a:pPr lvl="0" indent="0" marL="0">
-              <a:buNone/>
-            </a:pPr>
-            <a:r>
-              <a:rPr/>
-              <a:t>Grouped error is about </a:t>
-            </a:r>
-            <a:r>
-              <a:rPr b="1"/>
-              <a:t>1.5× larger</a:t>
-            </a:r>
-            <a:r>
-              <a:rPr/>
-              <a:t> than random. Same data, same model, same day — and the honest number is half again the flattering one.</a:t>
-            </a:r>
-          </a:p>
-        </p:txBody>
-      </p:sp>
-    </p:spTree>
-  </p:cSld>
-</p:sld>
-</file>
-
-<file path=ppt/slides/slide18.xml><?xml version="1.0" encoding="utf-8"?>
-<p:sld xmlns:a="http://schemas.openxmlformats.org/drawingml/2006/main" xmlns:r="http://schemas.openxmlformats.org/officeDocument/2006/relationships" xmlns:p="http://schemas.openxmlformats.org/presentationml/2006/main">
-  <p:cSld>
-    <p:spTree>
-      <p:nvGrpSpPr>
-        <p:cNvPr id="1" name=""/>
-        <p:cNvGrpSpPr/>
-        <p:nvPr/>
-      </p:nvGrpSpPr>
-      <p:grpSpPr>
-        <a:xfrm>
-          <a:off x="0" y="0"/>
-          <a:ext cx="0" cy="0"/>
-          <a:chOff x="0" y="0"/>
-          <a:chExt cx="0" cy="0"/>
-        </a:xfrm>
-      </p:grpSpPr>
-      <p:sp>
-        <p:nvSpPr>
-          <p:cNvPr id="2" name="Title 1"/>
-          <p:cNvSpPr>
-            <a:spLocks noGrp="1"/>
-          </p:cNvSpPr>
-          <p:nvPr>
-            <p:ph type="title"/>
-          </p:nvPr>
-        </p:nvSpPr>
-        <p:spPr/>
-        <p:txBody>
-          <a:bodyPr/>
-          <a:lstStyle/>
-          <a:p>
-            <a:pPr lvl="0" indent="0" marL="0">
-              <a:buNone/>
-            </a:pPr>
-            <a:r>
-              <a:rPr/>
-              <a:t>Read the gap</a:t>
-            </a:r>
-          </a:p>
-        </p:txBody>
-      </p:sp>
-      <p:sp>
-        <p:nvSpPr>
-          <p:cNvPr id="3" name="Content Placeholder 2"/>
-          <p:cNvSpPr>
-            <a:spLocks noGrp="1"/>
-          </p:cNvSpPr>
-          <p:nvPr>
-            <p:ph idx="1"/>
-          </p:nvPr>
-        </p:nvSpPr>
-        <p:spPr/>
-        <p:txBody>
-          <a:bodyPr/>
-          <a:lstStyle/>
-          <a:p>
-            <a:pPr lvl="0" indent="0" marL="0">
-              <a:buNone/>
-            </a:pPr>
-            <a:r>
-              <a:rPr/>
-              <a:t>That ratio is a </a:t>
-            </a:r>
-            <a:r>
-              <a:rPr b="1"/>
-              <a:t>direct measure of how much the model leans on country identity</a:t>
-            </a:r>
-            <a:r>
-              <a:rPr/>
-              <a:t> rather than on the economics.</a:t>
-            </a:r>
-          </a:p>
-          <a:p>
-            <a:pPr lvl="0" indent="0" marL="0">
-              <a:buNone/>
-            </a:pPr>
-            <a:r>
-              <a:rPr/>
-              <a:t>Random K-fold let it see Germany 2019 while predicting Germany 2020. It learned “this is Germany”, which is useless for a country it has never seen.</a:t>
-            </a:r>
-          </a:p>
-          <a:p>
-            <a:pPr lvl="0" indent="0" marL="0">
-              <a:buNone/>
-            </a:pPr>
-            <a:r>
-              <a:rPr/>
-              <a:t>Publish the 3,200 and you have overstated your model’s usefulness by half, without doing anything a referee would call wrong.</a:t>
-            </a:r>
-          </a:p>
-          <a:p>
-            <a:pPr lvl="0" indent="0" marL="0">
-              <a:buNone/>
-            </a:pPr>
-            <a:r>
-              <a:rPr>
-                <a:latin typeface="Courier"/>
-              </a:rPr>
-              <a:t>TimeSeriesSplit</a:t>
-            </a:r>
-            <a:r>
-              <a:rPr/>
-              <a:t> looks </a:t>
-            </a:r>
-            <a:r>
-              <a:rPr i="1"/>
-              <a:t>best</a:t>
-            </a:r>
-            <a:r>
-              <a:rPr/>
-              <a:t> of the three here — but it trains on early years and tests on later ones with a growing window, so it is answering a third question again. Low is not the same as right.</a:t>
-            </a:r>
-          </a:p>
-        </p:txBody>
-      </p:sp>
-    </p:spTree>
-  </p:cSld>
-</p:sld>
-</file>
-
-<file path=ppt/slides/slide19.xml><?xml version="1.0" encoding="utf-8"?>
-<p:sld xmlns:a="http://schemas.openxmlformats.org/drawingml/2006/main" xmlns:r="http://schemas.openxmlformats.org/officeDocument/2006/relationships" xmlns:p="http://schemas.openxmlformats.org/presentationml/2006/main">
-  <p:cSld>
-    <p:spTree>
-      <p:nvGrpSpPr>
-        <p:cNvPr id="1" name=""/>
-        <p:cNvGrpSpPr/>
-        <p:nvPr/>
-      </p:nvGrpSpPr>
-      <p:grpSpPr>
-        <a:xfrm>
-          <a:off x="0" y="0"/>
-          <a:ext cx="0" cy="0"/>
-          <a:chOff x="0" y="0"/>
-          <a:chExt cx="0" cy="0"/>
-        </a:xfrm>
-      </p:grpSpPr>
-      <p:sp>
-        <p:nvSpPr>
-          <p:cNvPr id="2" name="Title 1"/>
-          <p:cNvSpPr>
-            <a:spLocks noGrp="1"/>
-          </p:cNvSpPr>
-          <p:nvPr>
-            <p:ph type="title"/>
-          </p:nvPr>
-        </p:nvSpPr>
-        <p:spPr/>
-        <p:txBody>
-          <a:bodyPr/>
-          <a:lstStyle/>
-          <a:p>
-            <a:pPr lvl="0" indent="0" marL="0">
-              <a:buNone/>
-            </a:pPr>
-            <a:r>
-              <a:rPr/>
-              <a:t>Flexibility, drawn</a:t>
-            </a:r>
-          </a:p>
-        </p:txBody>
-      </p:sp>
-      <p:sp>
-        <p:nvSpPr>
-          <p:cNvPr id="3" name="Content Placeholder 2"/>
-          <p:cNvSpPr>
-            <a:spLocks noGrp="1"/>
-          </p:cNvSpPr>
-          <p:nvPr>
-            <p:ph idx="1"/>
-          </p:nvPr>
-        </p:nvSpPr>
-        <p:spPr/>
-        <p:txBody>
-          <a:bodyPr/>
-          <a:lstStyle/>
-          <a:p>
-            <a:pPr lvl="0" indent="0">
-              <a:buNone/>
-            </a:pPr>
-            <a:r>
-              <a:rPr b="1">
-                <a:solidFill>
-                  <a:srgbClr val="008000"/>
-                </a:solidFill>
-                <a:latin typeface="Courier"/>
-              </a:rPr>
-              <a:t>from</a:t>
-            </a:r>
-            <a:r>
-              <a:rPr>
-                <a:latin typeface="Courier"/>
-              </a:rPr>
-              <a:t> sklearn.tree </a:t>
-            </a:r>
-            <a:r>
-              <a:rPr b="1">
-                <a:solidFill>
-                  <a:srgbClr val="008000"/>
-                </a:solidFill>
-                <a:latin typeface="Courier"/>
-              </a:rPr>
-              <a:t>import</a:t>
-            </a:r>
-            <a:r>
-              <a:rPr>
-                <a:latin typeface="Courier"/>
-              </a:rPr>
-              <a:t> DecisionTreeRegressor</a:t>
-            </a:r>
-            <a:br/>
-            <a:br/>
-            <a:r>
-              <a:rPr>
-                <a:latin typeface="Courier"/>
-              </a:rPr>
-              <a:t>rows </a:t>
-            </a:r>
-            <a:r>
-              <a:rPr>
-                <a:solidFill>
-                  <a:srgbClr val="666666"/>
-                </a:solidFill>
-                <a:latin typeface="Courier"/>
-              </a:rPr>
-              <a:t>=</a:t>
-            </a:r>
-            <a:r>
-              <a:rPr>
-                <a:latin typeface="Courier"/>
-              </a:rPr>
-              <a:t> []</a:t>
-            </a:r>
-            <a:br/>
-            <a:r>
-              <a:rPr b="1">
-                <a:solidFill>
-                  <a:srgbClr val="007020"/>
-                </a:solidFill>
-                <a:latin typeface="Courier"/>
-              </a:rPr>
-              <a:t>for</a:t>
-            </a:r>
-            <a:r>
-              <a:rPr>
-                <a:latin typeface="Courier"/>
-              </a:rPr>
-              <a:t> depth </a:t>
-            </a:r>
-            <a:r>
-              <a:rPr b="1">
-                <a:solidFill>
-                  <a:srgbClr val="007020"/>
-                </a:solidFill>
-                <a:latin typeface="Courier"/>
-              </a:rPr>
-              <a:t>in</a:t>
-            </a:r>
-            <a:r>
-              <a:rPr>
-                <a:latin typeface="Courier"/>
-              </a:rPr>
-              <a:t> </a:t>
-            </a:r>
-            <a:r>
-              <a:rPr>
-                <a:solidFill>
-                  <a:srgbClr val="008000"/>
-                </a:solidFill>
-                <a:latin typeface="Courier"/>
-              </a:rPr>
-              <a:t>range</a:t>
-            </a:r>
-            <a:r>
-              <a:rPr>
-                <a:latin typeface="Courier"/>
-              </a:rPr>
-              <a:t>(</a:t>
-            </a:r>
-            <a:r>
-              <a:rPr>
-                <a:solidFill>
-                  <a:srgbClr val="40A070"/>
-                </a:solidFill>
-                <a:latin typeface="Courier"/>
-              </a:rPr>
-              <a:t>1</a:t>
-            </a:r>
-            <a:r>
-              <a:rPr>
-                <a:latin typeface="Courier"/>
-              </a:rPr>
-              <a:t>, </a:t>
-            </a:r>
-            <a:r>
-              <a:rPr>
-                <a:solidFill>
-                  <a:srgbClr val="40A070"/>
-                </a:solidFill>
-                <a:latin typeface="Courier"/>
-              </a:rPr>
-              <a:t>16</a:t>
-            </a:r>
-            <a:r>
-              <a:rPr>
-                <a:latin typeface="Courier"/>
-              </a:rPr>
-              <a:t>):</a:t>
-            </a:r>
-            <a:br/>
-            <a:r>
-              <a:rPr>
-                <a:latin typeface="Courier"/>
-              </a:rPr>
-              <a:t>    t </a:t>
-            </a:r>
-            <a:r>
-              <a:rPr>
-                <a:solidFill>
-                  <a:srgbClr val="666666"/>
-                </a:solidFill>
-                <a:latin typeface="Courier"/>
-              </a:rPr>
-              <a:t>=</a:t>
-            </a:r>
-            <a:r>
-              <a:rPr>
-                <a:latin typeface="Courier"/>
-              </a:rPr>
-              <a:t> DecisionTreeRegressor(max_depth</a:t>
-            </a:r>
-            <a:r>
-              <a:rPr>
-                <a:solidFill>
-                  <a:srgbClr val="666666"/>
-                </a:solidFill>
-                <a:latin typeface="Courier"/>
-              </a:rPr>
-              <a:t>=</a:t>
-            </a:r>
-            <a:r>
-              <a:rPr>
-                <a:latin typeface="Courier"/>
-              </a:rPr>
-              <a:t>depth, random_state</a:t>
-            </a:r>
-            <a:r>
-              <a:rPr>
-                <a:solidFill>
-                  <a:srgbClr val="666666"/>
-                </a:solidFill>
-                <a:latin typeface="Courier"/>
-              </a:rPr>
-              <a:t>=</a:t>
-            </a:r>
-            <a:r>
-              <a:rPr>
-                <a:solidFill>
-                  <a:srgbClr val="40A070"/>
-                </a:solidFill>
-                <a:latin typeface="Courier"/>
-              </a:rPr>
-              <a:t>60033</a:t>
-            </a:r>
-            <a:r>
-              <a:rPr>
-                <a:latin typeface="Courier"/>
-              </a:rPr>
-              <a:t>)</a:t>
-            </a:r>
-            <a:br/>
-            <a:r>
-              <a:rPr>
-                <a:latin typeface="Courier"/>
-              </a:rPr>
-              <a:t>    cv </a:t>
-            </a:r>
-            <a:r>
-              <a:rPr>
-                <a:solidFill>
-                  <a:srgbClr val="666666"/>
-                </a:solidFill>
-                <a:latin typeface="Courier"/>
-              </a:rPr>
-              <a:t>=</a:t>
-            </a:r>
-            <a:r>
-              <a:rPr>
-                <a:latin typeface="Courier"/>
-              </a:rPr>
-              <a:t> </a:t>
-            </a:r>
-            <a:r>
-              <a:rPr>
-                <a:solidFill>
-                  <a:srgbClr val="666666"/>
-                </a:solidFill>
-                <a:latin typeface="Courier"/>
-              </a:rPr>
-              <a:t>-</a:t>
-            </a:r>
-            <a:r>
-              <a:rPr>
-                <a:latin typeface="Courier"/>
-              </a:rPr>
-              <a:t>cross_val_score(t, X, y, cv</a:t>
-            </a:r>
-            <a:r>
-              <a:rPr>
-                <a:solidFill>
-                  <a:srgbClr val="666666"/>
-                </a:solidFill>
-                <a:latin typeface="Courier"/>
-              </a:rPr>
-              <a:t>=</a:t>
-            </a:r>
-            <a:r>
-              <a:rPr>
-                <a:latin typeface="Courier"/>
-              </a:rPr>
-              <a:t>GroupKFold(</a:t>
-            </a:r>
-            <a:r>
-              <a:rPr>
-                <a:solidFill>
-                  <a:srgbClr val="40A070"/>
-                </a:solidFill>
-                <a:latin typeface="Courier"/>
-              </a:rPr>
-              <a:t>5</a:t>
-            </a:r>
-            <a:r>
-              <a:rPr>
-                <a:latin typeface="Courier"/>
-              </a:rPr>
-              <a:t>), groups</a:t>
-            </a:r>
-            <a:r>
-              <a:rPr>
-                <a:solidFill>
-                  <a:srgbClr val="666666"/>
-                </a:solidFill>
-                <a:latin typeface="Courier"/>
-              </a:rPr>
-              <a:t>=</a:t>
-            </a:r>
-            <a:r>
-              <a:rPr>
-                <a:latin typeface="Courier"/>
-              </a:rPr>
-              <a:t>d[</a:t>
-            </a:r>
-            <a:r>
-              <a:rPr>
-                <a:solidFill>
-                  <a:srgbClr val="4070A0"/>
-                </a:solidFill>
-                <a:latin typeface="Courier"/>
-              </a:rPr>
-              <a:t>"geo"</a:t>
-            </a:r>
-            <a:r>
-              <a:rPr>
-                <a:latin typeface="Courier"/>
-              </a:rPr>
-              <a:t>],</a:t>
-            </a:r>
-            <a:br/>
-            <a:r>
-              <a:rPr>
-                <a:latin typeface="Courier"/>
-              </a:rPr>
-              <a:t>                          scoring</a:t>
-            </a:r>
-            <a:r>
-              <a:rPr>
-                <a:solidFill>
-                  <a:srgbClr val="666666"/>
-                </a:solidFill>
-                <a:latin typeface="Courier"/>
-              </a:rPr>
-              <a:t>=</a:t>
-            </a:r>
-            <a:r>
-              <a:rPr>
-                <a:solidFill>
-                  <a:srgbClr val="4070A0"/>
-                </a:solidFill>
-                <a:latin typeface="Courier"/>
-              </a:rPr>
-              <a:t>"neg_root_mean_squared_error"</a:t>
-            </a:r>
-            <a:r>
-              <a:rPr>
-                <a:latin typeface="Courier"/>
-              </a:rPr>
-              <a:t>).mean()</a:t>
-            </a:r>
-            <a:br/>
-            <a:r>
-              <a:rPr>
-                <a:latin typeface="Courier"/>
-              </a:rPr>
-              <a:t>    t.fit(X, y)</a:t>
-            </a:r>
-            <a:br/>
-            <a:r>
-              <a:rPr>
-                <a:latin typeface="Courier"/>
-              </a:rPr>
-              <a:t>    train </a:t>
-            </a:r>
-            <a:r>
-              <a:rPr>
-                <a:solidFill>
-                  <a:srgbClr val="666666"/>
-                </a:solidFill>
-                <a:latin typeface="Courier"/>
-              </a:rPr>
-              <a:t>=</a:t>
-            </a:r>
-            <a:r>
-              <a:rPr>
-                <a:latin typeface="Courier"/>
-              </a:rPr>
-              <a:t> np.sqrt(((y </a:t>
-            </a:r>
-            <a:r>
-              <a:rPr>
-                <a:solidFill>
-                  <a:srgbClr val="666666"/>
-                </a:solidFill>
-                <a:latin typeface="Courier"/>
-              </a:rPr>
-              <a:t>-</a:t>
-            </a:r>
-            <a:r>
-              <a:rPr>
-                <a:latin typeface="Courier"/>
-              </a:rPr>
-              <a:t> t.predict(X)) </a:t>
-            </a:r>
-            <a:r>
-              <a:rPr>
-                <a:solidFill>
-                  <a:srgbClr val="666666"/>
-                </a:solidFill>
-                <a:latin typeface="Courier"/>
-              </a:rPr>
-              <a:t>**</a:t>
-            </a:r>
-            <a:r>
-              <a:rPr>
-                <a:latin typeface="Courier"/>
-              </a:rPr>
-              <a:t> </a:t>
-            </a:r>
-            <a:r>
-              <a:rPr>
-                <a:solidFill>
-                  <a:srgbClr val="40A070"/>
-                </a:solidFill>
-                <a:latin typeface="Courier"/>
-              </a:rPr>
-              <a:t>2</a:t>
-            </a:r>
-            <a:r>
-              <a:rPr>
-                <a:latin typeface="Courier"/>
-              </a:rPr>
-              <a:t>).mean())</a:t>
-            </a:r>
-            <a:br/>
-            <a:r>
-              <a:rPr>
-                <a:latin typeface="Courier"/>
-              </a:rPr>
-              <a:t>    rows.append((depth, train, cv))</a:t>
-            </a:r>
-          </a:p>
-          <a:p>
-            <a:pPr lvl="0" indent="0" marL="0">
-              <a:buNone/>
-            </a:pPr>
-            <a:r>
-              <a:rPr/>
-              <a:t>Plot both curves against depth.</a:t>
-            </a:r>
-          </a:p>
-          <a:p>
-            <a:pPr lvl="0" indent="0" marL="0">
-              <a:buNone/>
-            </a:pPr>
-            <a:r>
-              <a:rPr/>
-              <a:t>Training error falls monotonically. Validation error falls, then turns. The turn is the bias–variance tradeoff, and it is the only one of the two curves that tells you anything.</a:t>
-            </a:r>
-          </a:p>
-        </p:txBody>
-      </p:sp>
-    </p:spTree>
-  </p:cSld>
-</p:sld>
-</file>
-
-<file path=ppt/slides/slide2.xml><?xml version="1.0" encoding="utf-8"?>
-<p:sld xmlns:a="http://schemas.openxmlformats.org/drawingml/2006/main" xmlns:r="http://schemas.openxmlformats.org/officeDocument/2006/relationships" xmlns:p="http://schemas.openxmlformats.org/presentationml/2006/main">
-  <p:cSld>
-    <p:spTree>
-      <p:nvGrpSpPr>
-        <p:cNvPr id="1" name=""/>
-        <p:cNvGrpSpPr/>
-        <p:nvPr/>
-      </p:nvGrpSpPr>
-      <p:grpSpPr>
-        <a:xfrm>
-          <a:off x="0" y="0"/>
-          <a:ext cx="0" cy="0"/>
-          <a:chOff x="0" y="0"/>
-          <a:chExt cx="0" cy="0"/>
-        </a:xfrm>
-      </p:grpSpPr>
-      <p:sp>
-        <p:nvSpPr>
-          <p:cNvPr id="2" name="Title 1"/>
-          <p:cNvSpPr>
-            <a:spLocks noGrp="1"/>
-          </p:cNvSpPr>
-          <p:nvPr>
-            <p:ph type="title"/>
-          </p:nvPr>
-        </p:nvSpPr>
-        <p:spPr>
-          <a:xfrm>
-            <a:off x="722313" y="3305176"/>
-            <a:ext cx="7772400" cy="1021556"/>
-          </a:xfrm>
-        </p:spPr>
-        <p:txBody>
-          <a:bodyPr/>
-          <a:lstStyle/>
-          <a:p>
-            <a:pPr lvl="0" indent="0" marL="0">
-              <a:buNone/>
-            </a:pPr>
-            <a:r>
-              <a:rPr/>
-              <a:t>Where we are</a:t>
-            </a:r>
-          </a:p>
-        </p:txBody>
-      </p:sp>
-    </p:spTree>
-  </p:cSld>
-</p:sld>
-</file>
-
-<file path=ppt/slides/slide20.xml><?xml version="1.0" encoding="utf-8"?>
-<p:sld xmlns:a="http://schemas.openxmlformats.org/drawingml/2006/main" xmlns:r="http://schemas.openxmlformats.org/officeDocument/2006/relationships" xmlns:p="http://schemas.openxmlformats.org/presentationml/2006/main">
-  <p:cSld>
-    <p:spTree>
-      <p:nvGrpSpPr>
-        <p:cNvPr id="1" name=""/>
-        <p:cNvGrpSpPr/>
-        <p:nvPr/>
-      </p:nvGrpSpPr>
-      <p:grpSpPr>
-        <a:xfrm>
-          <a:off x="0" y="0"/>
-          <a:ext cx="0" cy="0"/>
-          <a:chOff x="0" y="0"/>
-          <a:chExt cx="0" cy="0"/>
-        </a:xfrm>
-      </p:grpSpPr>
-      <p:sp>
-        <p:nvSpPr>
-          <p:cNvPr id="2" name="Title 1"/>
-          <p:cNvSpPr>
-            <a:spLocks noGrp="1"/>
-          </p:cNvSpPr>
-          <p:nvPr>
-            <p:ph type="title"/>
-          </p:nvPr>
-        </p:nvSpPr>
-        <p:spPr/>
-        <p:txBody>
-          <a:bodyPr/>
-          <a:lstStyle/>
-          <a:p>
-            <a:pPr lvl="0" indent="0" marL="0">
-              <a:buNone/>
-            </a:pPr>
-            <a:r>
-              <a:rPr/>
-              <a:t>Leakage, the practical form</a:t>
-            </a:r>
-          </a:p>
-        </p:txBody>
-      </p:sp>
-      <p:sp>
-        <p:nvSpPr>
-          <p:cNvPr id="3" name="Content Placeholder 2"/>
-          <p:cNvSpPr>
-            <a:spLocks noGrp="1"/>
-          </p:cNvSpPr>
-          <p:nvPr>
-            <p:ph idx="1"/>
-          </p:nvPr>
-        </p:nvSpPr>
-        <p:spPr/>
-        <p:txBody>
-          <a:bodyPr/>
-          <a:lstStyle/>
-          <a:p>
-            <a:pPr lvl="0" indent="0">
-              <a:buNone/>
-            </a:pPr>
-            <a:r>
-              <a:rPr b="1">
-                <a:solidFill>
-                  <a:srgbClr val="008000"/>
-                </a:solidFill>
-                <a:latin typeface="Courier"/>
-              </a:rPr>
-              <a:t>from</a:t>
-            </a:r>
-            <a:r>
-              <a:rPr>
-                <a:latin typeface="Courier"/>
-              </a:rPr>
-              <a:t> sklearn.pipeline </a:t>
-            </a:r>
-            <a:r>
-              <a:rPr b="1">
-                <a:solidFill>
-                  <a:srgbClr val="008000"/>
-                </a:solidFill>
-                <a:latin typeface="Courier"/>
-              </a:rPr>
-              <a:t>import</a:t>
-            </a:r>
-            <a:r>
-              <a:rPr>
-                <a:latin typeface="Courier"/>
-              </a:rPr>
-              <a:t> make_pipeline</a:t>
-            </a:r>
-            <a:br/>
-            <a:r>
-              <a:rPr b="1">
-                <a:solidFill>
-                  <a:srgbClr val="008000"/>
-                </a:solidFill>
-                <a:latin typeface="Courier"/>
-              </a:rPr>
-              <a:t>from</a:t>
-            </a:r>
-            <a:r>
-              <a:rPr>
-                <a:latin typeface="Courier"/>
-              </a:rPr>
-              <a:t> sklearn.preprocessing </a:t>
-            </a:r>
-            <a:r>
-              <a:rPr b="1">
-                <a:solidFill>
-                  <a:srgbClr val="008000"/>
-                </a:solidFill>
-                <a:latin typeface="Courier"/>
-              </a:rPr>
-              <a:t>import</a:t>
-            </a:r>
-            <a:r>
-              <a:rPr>
-                <a:latin typeface="Courier"/>
-              </a:rPr>
-              <a:t> StandardScaler</a:t>
-            </a:r>
-            <a:br/>
-            <a:br/>
-            <a:r>
-              <a:rPr i="1">
-                <a:solidFill>
-                  <a:srgbClr val="60A0B0"/>
-                </a:solidFill>
-                <a:latin typeface="Courier"/>
-              </a:rPr>
-              <a:t>#  WRONG — the scaler has already seen the test fold</a:t>
-            </a:r>
-            <a:br/>
-            <a:r>
-              <a:rPr>
-                <a:latin typeface="Courier"/>
-              </a:rPr>
-              <a:t>X_scaled </a:t>
-            </a:r>
-            <a:r>
-              <a:rPr>
-                <a:solidFill>
-                  <a:srgbClr val="666666"/>
-                </a:solidFill>
-                <a:latin typeface="Courier"/>
-              </a:rPr>
-              <a:t>=</a:t>
-            </a:r>
-            <a:r>
-              <a:rPr>
-                <a:latin typeface="Courier"/>
-              </a:rPr>
-              <a:t> StandardScaler().fit_transform(X)</a:t>
-            </a:r>
-            <a:br/>
-            <a:r>
-              <a:rPr>
-                <a:latin typeface="Courier"/>
-              </a:rPr>
-              <a:t>cross_val_score(m, X_scaled, y, cv</a:t>
-            </a:r>
-            <a:r>
-              <a:rPr>
-                <a:solidFill>
-                  <a:srgbClr val="666666"/>
-                </a:solidFill>
-                <a:latin typeface="Courier"/>
-              </a:rPr>
-              <a:t>=</a:t>
-            </a:r>
-            <a:r>
-              <a:rPr>
-                <a:latin typeface="Courier"/>
-              </a:rPr>
-              <a:t>GroupKFold(</a:t>
-            </a:r>
-            <a:r>
-              <a:rPr>
-                <a:solidFill>
-                  <a:srgbClr val="40A070"/>
-                </a:solidFill>
-                <a:latin typeface="Courier"/>
-              </a:rPr>
-              <a:t>5</a:t>
-            </a:r>
-            <a:r>
-              <a:rPr>
-                <a:latin typeface="Courier"/>
-              </a:rPr>
-              <a:t>), groups</a:t>
-            </a:r>
-            <a:r>
-              <a:rPr>
-                <a:solidFill>
-                  <a:srgbClr val="666666"/>
-                </a:solidFill>
-                <a:latin typeface="Courier"/>
-              </a:rPr>
-              <a:t>=</a:t>
-            </a:r>
-            <a:r>
-              <a:rPr>
-                <a:latin typeface="Courier"/>
-              </a:rPr>
-              <a:t>d[</a:t>
-            </a:r>
-            <a:r>
-              <a:rPr>
-                <a:solidFill>
-                  <a:srgbClr val="4070A0"/>
-                </a:solidFill>
-                <a:latin typeface="Courier"/>
-              </a:rPr>
-              <a:t>"geo"</a:t>
-            </a:r>
-            <a:r>
-              <a:rPr>
-                <a:latin typeface="Courier"/>
-              </a:rPr>
-              <a:t>])</a:t>
-            </a:r>
-            <a:br/>
-            <a:br/>
-            <a:r>
-              <a:rPr i="1">
-                <a:solidFill>
-                  <a:srgbClr val="60A0B0"/>
-                </a:solidFill>
-                <a:latin typeface="Courier"/>
-              </a:rPr>
-              <a:t>#  RIGHT — every preprocessing step re-fits inside each fold</a:t>
-            </a:r>
-            <a:br/>
-            <a:r>
-              <a:rPr>
-                <a:latin typeface="Courier"/>
-              </a:rPr>
-              <a:t>pipe </a:t>
-            </a:r>
-            <a:r>
-              <a:rPr>
-                <a:solidFill>
-                  <a:srgbClr val="666666"/>
-                </a:solidFill>
-                <a:latin typeface="Courier"/>
-              </a:rPr>
-              <a:t>=</a:t>
-            </a:r>
-            <a:r>
-              <a:rPr>
-                <a:latin typeface="Courier"/>
-              </a:rPr>
-              <a:t> make_pipeline(StandardScaler(), m)</a:t>
-            </a:r>
-            <a:br/>
-            <a:r>
-              <a:rPr>
-                <a:latin typeface="Courier"/>
-              </a:rPr>
-              <a:t>cross_val_score(pipe, X, y, cv</a:t>
-            </a:r>
-            <a:r>
-              <a:rPr>
-                <a:solidFill>
-                  <a:srgbClr val="666666"/>
-                </a:solidFill>
-                <a:latin typeface="Courier"/>
-              </a:rPr>
-              <a:t>=</a:t>
-            </a:r>
-            <a:r>
-              <a:rPr>
-                <a:latin typeface="Courier"/>
-              </a:rPr>
-              <a:t>GroupKFold(</a:t>
-            </a:r>
-            <a:r>
-              <a:rPr>
-                <a:solidFill>
-                  <a:srgbClr val="40A070"/>
-                </a:solidFill>
-                <a:latin typeface="Courier"/>
-              </a:rPr>
-              <a:t>5</a:t>
-            </a:r>
-            <a:r>
-              <a:rPr>
-                <a:latin typeface="Courier"/>
-              </a:rPr>
-              <a:t>), groups</a:t>
-            </a:r>
-            <a:r>
-              <a:rPr>
-                <a:solidFill>
-                  <a:srgbClr val="666666"/>
-                </a:solidFill>
-                <a:latin typeface="Courier"/>
-              </a:rPr>
-              <a:t>=</a:t>
-            </a:r>
-            <a:r>
-              <a:rPr>
-                <a:latin typeface="Courier"/>
-              </a:rPr>
-              <a:t>d[</a:t>
-            </a:r>
-            <a:r>
-              <a:rPr>
-                <a:solidFill>
-                  <a:srgbClr val="4070A0"/>
-                </a:solidFill>
-                <a:latin typeface="Courier"/>
-              </a:rPr>
-              <a:t>"geo"</a:t>
-            </a:r>
-            <a:r>
-              <a:rPr>
-                <a:latin typeface="Courier"/>
-              </a:rPr>
-              <a:t>])</a:t>
-            </a:r>
-          </a:p>
-          <a:p>
-            <a:pPr lvl="0" indent="0" marL="0">
-              <a:buNone/>
-            </a:pPr>
-            <a:r>
-              <a:rPr/>
-              <a:t>Any step that </a:t>
-            </a:r>
-            <a:r>
-              <a:rPr b="1"/>
-              <a:t>learns from the data</a:t>
-            </a:r>
-            <a:r>
-              <a:rPr/>
-              <a:t> — scaling, imputation, feature selection, target encoding — must live inside the pipeline. This is the single most common error in applied machine learning, and it always flatters you.</a:t>
-            </a:r>
-          </a:p>
-        </p:txBody>
-      </p:sp>
-    </p:spTree>
-  </p:cSld>
-</p:sld>
-</file>
-
-<file path=ppt/slides/slide21.xml><?xml version="1.0" encoding="utf-8"?>
-<p:sld xmlns:a="http://schemas.openxmlformats.org/drawingml/2006/main" xmlns:r="http://schemas.openxmlformats.org/officeDocument/2006/relationships" xmlns:p="http://schemas.openxmlformats.org/presentationml/2006/main">
-  <p:cSld>
-    <p:spTree>
-      <p:nvGrpSpPr>
-        <p:cNvPr id="1" name=""/>
-        <p:cNvGrpSpPr/>
-        <p:nvPr/>
-      </p:nvGrpSpPr>
-      <p:grpSpPr>
-        <a:xfrm>
-          <a:off x="0" y="0"/>
-          <a:ext cx="0" cy="0"/>
-          <a:chOff x="0" y="0"/>
-          <a:chExt cx="0" cy="0"/>
-        </a:xfrm>
-      </p:grpSpPr>
-      <p:sp>
-        <p:nvSpPr>
-          <p:cNvPr id="2" name="Title 1"/>
-          <p:cNvSpPr>
-            <a:spLocks noGrp="1"/>
-          </p:cNvSpPr>
-          <p:nvPr>
-            <p:ph type="title"/>
-          </p:nvPr>
-        </p:nvSpPr>
-        <p:spPr/>
-        <p:txBody>
-          <a:bodyPr/>
-          <a:lstStyle/>
-          <a:p>
-            <a:pPr lvl="0" indent="0" marL="0">
-              <a:buNone/>
-            </a:pPr>
-            <a:r>
-              <a:rPr/>
-              <a:t>What to report</a:t>
-            </a:r>
-          </a:p>
-        </p:txBody>
-      </p:sp>
-      <mc:AlternateContent xmlns:mc="http://schemas.openxmlformats.org/markup-compatibility/2006">
-        <mc:Choice xmlns:a14="http://schemas.microsoft.com/office/drawing/2010/main" Requires="a14">
-          <p:sp>
-            <p:nvSpPr>
-              <p:cNvPr id="3" name="Content Placeholder 2"/>
-              <p:cNvSpPr>
-                <a:spLocks noGrp="1"/>
-              </p:cNvSpPr>
-              <p:nvPr>
-                <p:ph idx="1"/>
-              </p:nvPr>
-            </p:nvSpPr>
-            <p:spPr/>
-            <p:txBody>
-              <a:bodyPr/>
-              <a:lstStyle/>
-              <a:p>
-                <a:pPr lvl="0"/>
-                <a:r>
-                  <a:rPr b="1"/>
-                  <a:t>Which split</a:t>
-                </a:r>
-                <a:r>
-                  <a:rPr/>
-                  <a:t> you used, and the sentence it licenses</a:t>
-                </a:r>
-              </a:p>
-              <a:p>
-                <a:pPr lvl="0"/>
-                <a:r>
-                  <a:rPr/>
-                  <a:t>Validation error in the </a:t>
-                </a:r>
-                <a:r>
-                  <a:rPr b="1"/>
-                  <a:t>units of the outcome</a:t>
-                </a:r>
-                <a:r>
-                  <a:rPr/>
-                  <a:t>, not just </a:t>
-                </a:r>
-                <a14:m>
-                  <m:oMath xmlns:m="http://schemas.openxmlformats.org/officeDocument/2006/math">
-                    <m:sSup>
-                      <m:e>
-                        <m:r>
-                          <m:t>R</m:t>
-                        </m:r>
-                      </m:e>
-                      <m:sup>
-                        <m:r>
-                          <m:t>2</m:t>
-                        </m:r>
-                      </m:sup>
-                    </m:sSup>
-                  </m:oMath>
-                </a14:m>
-              </a:p>
-              <a:p>
-                <a:pPr lvl="0"/>
-                <a:r>
-                  <a:rPr/>
-                  <a:t>The gap between training and validation error</a:t>
-                </a:r>
-              </a:p>
-              <a:p>
-                <a:pPr lvl="0"/>
-                <a:r>
-                  <a:rPr/>
-                  <a:t>The gap between random and grouped CV — your leakage diagnostic</a:t>
-                </a:r>
-              </a:p>
-              <a:p>
-                <a:pPr lvl="0" indent="0" marL="0">
-                  <a:buNone/>
-                </a:pPr>
-                <a:r>
-                  <a:rPr/>
-                  <a:t>Never report a number computed on data the model was fit on. If you tuned on it, it is training data, whatever you called the variable.</a:t>
-                </a:r>
-              </a:p>
-            </p:txBody>
-          </p:sp>
-        </mc:Choice>
-      </mc:AlternateContent>
-    </p:spTree>
-  </p:cSld>
-</p:sld>
-</file>
-
-<file path=ppt/slides/slide22.xml><?xml version="1.0" encoding="utf-8"?>
-<p:sld xmlns:a="http://schemas.openxmlformats.org/drawingml/2006/main" xmlns:r="http://schemas.openxmlformats.org/officeDocument/2006/relationships" xmlns:p="http://schemas.openxmlformats.org/presentationml/2006/main">
-  <p:cSld>
-    <p:spTree>
-      <p:nvGrpSpPr>
-        <p:cNvPr id="1" name=""/>
-        <p:cNvGrpSpPr/>
-        <p:nvPr/>
-      </p:nvGrpSpPr>
-      <p:grpSpPr>
-        <a:xfrm>
-          <a:off x="0" y="0"/>
-          <a:ext cx="0" cy="0"/>
-          <a:chOff x="0" y="0"/>
-          <a:chExt cx="0" cy="0"/>
-        </a:xfrm>
-      </p:grpSpPr>
-      <mc:AlternateContent xmlns:mc="http://schemas.openxmlformats.org/markup-compatibility/2006">
-        <mc:Choice xmlns:a14="http://schemas.microsoft.com/office/drawing/2010/main" Requires="a14">
-          <p:sp>
-            <p:nvSpPr>
-              <p:cNvPr id="2" name="Title 1"/>
-              <p:cNvSpPr>
-                <a:spLocks noGrp="1"/>
-              </p:cNvSpPr>
-              <p:nvPr>
-                <p:ph type="title"/>
-              </p:nvPr>
-            </p:nvSpPr>
-            <p:spPr/>
-            <p:txBody>
-              <a:bodyPr/>
-              <a:lstStyle/>
-              <a:p>
-                <a:pPr lvl="0" indent="0" marL="0">
-                  <a:buNone/>
-                </a:pPr>
-                <a:r>
-                  <a:rPr/>
-                  <a:t>Choosing </a:t>
-                </a:r>
-                <a14:m>
-                  <m:oMath xmlns:m="http://schemas.openxmlformats.org/officeDocument/2006/math">
-                    <m:r>
-                      <m:t>K</m:t>
-                    </m:r>
-                  </m:oMath>
-                </a14:m>
-              </a:p>
-            </p:txBody>
-          </p:sp>
-        </mc:Choice>
-      </mc:AlternateContent>
-      <mc:AlternateContent xmlns:mc="http://schemas.openxmlformats.org/markup-compatibility/2006">
-        <mc:Choice xmlns:a14="http://schemas.microsoft.com/office/drawing/2010/main" Requires="a14">
-          <p:sp>
-            <p:nvSpPr>
-              <p:cNvPr id="3" name="Content Placeholder 2"/>
-              <p:cNvSpPr>
-                <a:spLocks noGrp="1"/>
-              </p:cNvSpPr>
-              <p:nvPr>
-                <p:ph idx="1"/>
-              </p:nvPr>
-            </p:nvSpPr>
-            <p:spPr/>
-            <p:txBody>
-              <a:bodyPr/>
-              <a:lstStyle/>
-              <a:p>
-                <a:pPr lvl="0"/>
-                <a14:m>
-                  <m:oMath xmlns:m="http://schemas.openxmlformats.org/officeDocument/2006/math">
-                    <m:r>
-                      <m:t>K</m:t>
-                    </m:r>
-                    <m:r>
-                      <m:rPr>
-                        <m:sty m:val="p"/>
-                      </m:rPr>
-                      <m:t>=</m:t>
-                    </m:r>
-                    <m:r>
-                      <m:t>5</m:t>
-                    </m:r>
-                  </m:oMath>
-                </a14:m>
-                <a:r>
-                  <a:rPr b="1"/>
-                  <a:t> or </a:t>
-                </a:r>
-                <a14:m>
-                  <m:oMath xmlns:m="http://schemas.openxmlformats.org/officeDocument/2006/math">
-                    <m:r>
-                      <m:t>10</m:t>
-                    </m:r>
-                  </m:oMath>
-                </a14:m>
-                <a:r>
-                  <a:rPr/>
-                  <a:t> — the usual choice, and a reasonable one</a:t>
-                </a:r>
-              </a:p>
-              <a:p>
-                <a:pPr lvl="0"/>
-                <a:r>
-                  <a:rPr b="1"/>
-                  <a:t>Small </a:t>
-                </a:r>
-                <a14:m>
-                  <m:oMath xmlns:m="http://schemas.openxmlformats.org/officeDocument/2006/math">
-                    <m:r>
-                      <m:t>K</m:t>
-                    </m:r>
-                  </m:oMath>
-                </a14:m>
-                <a:r>
-                  <a:rPr/>
-                  <a:t> — more bias (each model sees less data), less variance</a:t>
-                </a:r>
-              </a:p>
-              <a:p>
-                <a:pPr lvl="0"/>
-                <a14:m>
-                  <m:oMath xmlns:m="http://schemas.openxmlformats.org/officeDocument/2006/math">
-                    <m:r>
-                      <m:t>K</m:t>
-                    </m:r>
-                    <m:r>
-                      <m:rPr>
-                        <m:sty m:val="p"/>
-                      </m:rPr>
-                      <m:t>=</m:t>
-                    </m:r>
-                    <m:r>
-                      <m:t>n</m:t>
-                    </m:r>
-                  </m:oMath>
-                </a14:m>
-                <a:r>
-                  <a:rPr/>
-                  <a:t> (leave-one-out) — nearly unbiased, high variance, expensive</a:t>
-                </a:r>
-              </a:p>
-              <a:p>
-                <a:pPr lvl="0" indent="0" marL="0">
-                  <a:buNone/>
-                </a:pPr>
-                <a:r>
-                  <a:rPr/>
-                  <a:t>With 30 countries, </a:t>
-                </a:r>
-                <a:r>
-                  <a:rPr>
-                    <a:latin typeface="Courier"/>
-                  </a:rPr>
-                  <a:t>GroupKFold(5)</a:t>
-                </a:r>
-                <a:r>
-                  <a:rPr/>
-                  <a:t> leaves 6 countries out per fold. Fewer folds would leave too few countries to train on; more would make each estimate noisy.</a:t>
-                </a:r>
-              </a:p>
-            </p:txBody>
-          </p:sp>
-        </mc:Choice>
-      </mc:AlternateContent>
     </p:spTree>
   </p:cSld>
 </p:sld>
@@ -6564,12 +6184,12 @@
       </p:grpSpPr>
       <p:sp>
         <p:nvSpPr>
-          <p:cNvPr id="2" name="Title 1"/>
-          <p:cNvSpPr>
-            <a:spLocks noGrp="1"/>
-          </p:cNvSpPr>
-          <p:nvPr>
-            <p:ph type="title"/>
+          <p:cNvPr id="3" name="Content Placeholder 2"/>
+          <p:cNvSpPr>
+            <a:spLocks noGrp="1"/>
+          </p:cNvSpPr>
+          <p:nvPr>
+            <p:ph idx="1"/>
           </p:nvPr>
         </p:nvSpPr>
         <p:spPr/>
@@ -6582,71 +6202,15 @@
             </a:pPr>
             <a:r>
               <a:rPr/>
-              <a:t>Nested CV, when you tune</a:t>
-            </a:r>
-          </a:p>
-        </p:txBody>
-      </p:sp>
-      <p:sp>
-        <p:nvSpPr>
-          <p:cNvPr id="3" name="Content Placeholder 2"/>
-          <p:cNvSpPr>
-            <a:spLocks noGrp="1"/>
-          </p:cNvSpPr>
-          <p:nvPr>
-            <p:ph idx="1"/>
-          </p:nvPr>
-        </p:nvSpPr>
-        <p:spPr/>
-        <p:txBody>
-          <a:bodyPr/>
-          <a:lstStyle/>
-          <a:p>
-            <a:pPr lvl="0" indent="0" marL="0">
-              <a:buNone/>
-            </a:pPr>
+              <a:t>Grouped error is about </a:t>
+            </a:r>
+            <a:r>
+              <a:rPr b="1"/>
+              <a:t>1.5× larger</a:t>
+            </a:r>
             <a:r>
               <a:rPr/>
-              <a:t>If you use CV to </a:t>
-            </a:r>
-            <a:r>
-              <a:rPr b="1"/>
-              <a:t>choose</a:t>
-            </a:r>
-            <a:r>
-              <a:rPr/>
-              <a:t> a hyperparameter, that CV error is no longer an honest estimate of performance — you selected on it.</a:t>
-            </a:r>
-          </a:p>
-          <a:p>
-            <a:pPr lvl="0"/>
-            <a:r>
-              <a:rPr b="1"/>
-              <a:t>Inner</a:t>
-            </a:r>
-            <a:r>
-              <a:rPr/>
-              <a:t> loop chooses the hyperparameter</a:t>
-            </a:r>
-          </a:p>
-          <a:p>
-            <a:pPr lvl="0"/>
-            <a:r>
-              <a:rPr b="1"/>
-              <a:t>Outer</a:t>
-            </a:r>
-            <a:r>
-              <a:rPr/>
-              <a:t> loop estimates performance</a:t>
-            </a:r>
-          </a:p>
-          <a:p>
-            <a:pPr lvl="0" indent="0" marL="0">
-              <a:buNone/>
-            </a:pPr>
-            <a:r>
-              <a:rPr/>
-              <a:t>Reporting the best inner-loop score as your result is the same error as reporting training error, one level up. It is extremely common.</a:t>
+              <a:t>. Publish the 3,200 and you have overstated the model by half without doing anything a referee would call wrong.</a:t>
             </a:r>
           </a:p>
         </p:txBody>
@@ -6683,7 +6247,12 @@
             <p:ph type="title"/>
           </p:nvPr>
         </p:nvSpPr>
-        <p:spPr/>
+        <p:spPr>
+          <a:xfrm>
+            <a:off x="722313" y="3305176"/>
+            <a:ext cx="7772400" cy="1021556"/>
+          </a:xfrm>
+        </p:spPr>
         <p:txBody>
           <a:bodyPr/>
           <a:lstStyle/>
@@ -6693,49 +6262,7 @@
             </a:pPr>
             <a:r>
               <a:rPr/>
-              <a:t>The one-standard-error rule</a:t>
-            </a:r>
-          </a:p>
-        </p:txBody>
-      </p:sp>
-      <p:sp>
-        <p:nvSpPr>
-          <p:cNvPr id="3" name="Content Placeholder 2"/>
-          <p:cNvSpPr>
-            <a:spLocks noGrp="1"/>
-          </p:cNvSpPr>
-          <p:nvPr>
-            <p:ph idx="1"/>
-          </p:nvPr>
-        </p:nvSpPr>
-        <p:spPr/>
-        <p:txBody>
-          <a:bodyPr/>
-          <a:lstStyle/>
-          <a:p>
-            <a:pPr lvl="0" indent="0" marL="0">
-              <a:buNone/>
-            </a:pPr>
-            <a:r>
-              <a:rPr/>
-              <a:t>Among models within one standard error of the best CV score, take the </a:t>
-            </a:r>
-            <a:r>
-              <a:rPr b="1"/>
-              <a:t>simplest</a:t>
-            </a:r>
-            <a:r>
-              <a:rPr/>
-              <a:t>.</a:t>
-            </a:r>
-          </a:p>
-          <a:p>
-            <a:pPr lvl="0" indent="0" marL="0">
-              <a:buNone/>
-            </a:pPr>
-            <a:r>
-              <a:rPr/>
-              <a:t>The CV curve is estimated with noise. The apparent minimum is partly luck, and the simpler model at the same score will usually generalise better.</a:t>
+              <a:t>The lab</a:t>
             </a:r>
           </a:p>
         </p:txBody>
@@ -6745,7 +6272,124 @@
 </p:sld>
 </file>
 
-<file path=ppt/slides/slide25.xml><?xml version="1.0" encoding="UTF-8"?><p:sld xmlns:a="http://schemas.openxmlformats.org/drawingml/2006/main" xmlns:r="http://schemas.openxmlformats.org/officeDocument/2006/relationships" xmlns:p="http://schemas.openxmlformats.org/presentationml/2006/main"><p:cSld><p:spTree><p:nvGrpSpPr><p:cNvPr id="1" name="" /><p:cNvGrpSpPr /><p:nvPr /></p:nvGrpSpPr><p:grpSpPr><a:xfrm><a:off x="0" y="0" /><a:ext cx="0" cy="0" /><a:chOff x="0" y="0" /><a:chExt cx="0" cy="0" /></a:xfrm></p:grpSpPr><p:sp><p:nvSpPr><p:cNvPr id="2" name="Title 1" /><p:cNvSpPr><a:spLocks noGrp="1" /></p:cNvSpPr><p:nvPr><p:ph type="title" /></p:nvPr></p:nvSpPr><p:spPr /><p:txBody><a:bodyPr /><a:lstStyle /><a:p><a:pPr lvl="0" indent="0" marL="0"><a:buNone /></a:pPr><a:r><a:rPr /><a:t>Common mistakes</a:t></a:r></a:p></p:txBody></p:sp><p:graphicFrame><p:nvGraphicFramePr><p:cNvPr id="6" name="Content Placeholder 5" /><p:cNvGraphicFramePr><a:graphicFrameLocks noGrp="1" /></p:cNvGraphicFramePr><p:nvPr><p:ph idx="1" /></p:nvPr></p:nvGraphicFramePr><p:xfrm><a:off x="457200" y="1193800" /><a:ext cx="8229600" cy="3390900" /></p:xfrm><a:graphic><a:graphicData uri="http://schemas.openxmlformats.org/drawingml/2006/table"><a:tbl><a:tblPr firstRow="1" bandRow="1"><a:tableStyleId>{5C22544A-7EE6-4342-B048-85BDC9FD1C3A}</a:tableStyleId></a:tblPr><a:tblGrid><a:gridCol w="4114800" /><a:gridCol w="4114800" /></a:tblGrid><a:tr h="0"><a:tc><a:txBody><a:bodyPr /><a:lstStyle /><a:p><a:pPr lvl="0" indent="0" marL="0"><a:buNone /></a:pPr><a:r><a:rPr /><a:t>Mistake</a:t></a:r></a:p></a:txBody><a:tcPr /></a:tc><a:tc><a:txBody><a:bodyPr /><a:lstStyle /><a:p><a:pPr lvl="0" indent="0" marL="0"><a:buNone /></a:pPr><a:r><a:rPr /><a:t>Consequence</a:t></a:r></a:p></a:txBody><a:tcPr /></a:tc></a:tr><a:tr h="0"><a:tc><a:txBody><a:bodyPr /><a:lstStyle /><a:p><a:pPr lvl="0" indent="0" marL="0"><a:buNone /></a:pPr><a:r><a:rPr /><a:t>Random K-fold on a panel</a:t></a:r></a:p></a:txBody></a:tc><a:tc><a:txBody><a:bodyPr /><a:lstStyle /><a:p><a:pPr lvl="0" indent="0" marL="0"><a:buNone /></a:pPr><a:r><a:rPr /><a:t>Optimistic by a wide margin</a:t></a:r></a:p></a:txBody></a:tc></a:tr><a:tr h="0"><a:tc><a:txBody><a:bodyPr /><a:lstStyle /><a:p><a:pPr lvl="0" indent="0" marL="0"><a:buNone /></a:pPr><a:r><a:rPr /><a:t>Scaling before splitting</a:t></a:r></a:p></a:txBody></a:tc><a:tc><a:txBody><a:bodyPr /><a:lstStyle /><a:p><a:pPr lvl="0" indent="0" marL="0"><a:buNone /></a:pPr><a:r><a:rPr /><a:t>Leakage; error understated</a:t></a:r></a:p></a:txBody></a:tc></a:tr><a:tr h="0"><a:tc><a:txBody><a:bodyPr /><a:lstStyle /><a:p><a:pPr lvl="0" indent="0" marL="0"><a:buNone /></a:pPr><a:r><a:rPr /><a:t>Tuning on the test set</a:t></a:r></a:p></a:txBody></a:tc><a:tc><a:txBody><a:bodyPr /><a:lstStyle /><a:p><a:pPr lvl="0" indent="0" marL="0"><a:buNone /></a:pPr><a:r><a:rPr /><a:t>The test set is now training data</a:t></a:r></a:p></a:txBody></a:tc></a:tr><a:tr h="0"><a:tc><a:txBody><a:bodyPr /><a:lstStyle /><a:p><a:pPr lvl="0" indent="0" marL="0"><a:buNone /></a:pPr><a:r><a:rPr /><a:t>Reporting </a:t></a:r><a14:m><m:oMath xmlns:m="http://schemas.openxmlformats.org/officeDocument/2006/math"><m:sSup><m:e><m:r><m:t>R</m:t></m:r></m:e><m:sup><m:r><m:t>2</m:t></m:r></m:sup></m:sSup></m:oMath></a14:m><a:r><a:rPr /><a:t> only</a:t></a:r></a:p></a:txBody></a:tc><a:tc><a:txBody><a:bodyPr /><a:lstStyle /><a:p><a:pPr lvl="0" indent="0" marL="0"><a:buNone /></a:pPr><a:r><a:rPr /><a:t>No sense of magnitude</a:t></a:r></a:p></a:txBody></a:tc></a:tr><a:tr h="0"><a:tc><a:txBody><a:bodyPr /><a:lstStyle /><a:p><a:pPr lvl="0" indent="0" marL="0"><a:buNone /></a:pPr><a:r><a:rPr /><a:t>One split, one number</a:t></a:r></a:p></a:txBody></a:tc><a:tc><a:txBody><a:bodyPr /><a:lstStyle /><a:p><a:pPr lvl="0" indent="0" marL="0"><a:buNone /></a:pPr><a:r><a:rPr /><a:t>No sense of variability</a:t></a:r></a:p></a:txBody></a:tc></a:tr></a:tbl></a:graphicData></a:graphic></p:graphicFrame></p:spTree></p:cSld></p:sld>
+<file path=ppt/slides/slide25.xml><?xml version="1.0" encoding="utf-8"?>
+<p:sld xmlns:a="http://schemas.openxmlformats.org/drawingml/2006/main" xmlns:r="http://schemas.openxmlformats.org/officeDocument/2006/relationships" xmlns:p="http://schemas.openxmlformats.org/presentationml/2006/main">
+  <p:cSld>
+    <p:spTree>
+      <p:nvGrpSpPr>
+        <p:cNvPr id="1" name=""/>
+        <p:cNvGrpSpPr/>
+        <p:nvPr/>
+      </p:nvGrpSpPr>
+      <p:grpSpPr>
+        <a:xfrm>
+          <a:off x="0" y="0"/>
+          <a:ext cx="0" cy="0"/>
+          <a:chOff x="0" y="0"/>
+          <a:chExt cx="0" cy="0"/>
+        </a:xfrm>
+      </p:grpSpPr>
+      <p:sp>
+        <p:nvSpPr>
+          <p:cNvPr id="2" name="Title 1"/>
+          <p:cNvSpPr>
+            <a:spLocks noGrp="1"/>
+          </p:cNvSpPr>
+          <p:nvPr>
+            <p:ph type="title"/>
+          </p:nvPr>
+        </p:nvSpPr>
+        <p:spPr/>
+        <p:txBody>
+          <a:bodyPr/>
+          <a:lstStyle/>
+          <a:p>
+            <a:pPr lvl="0" indent="0" marL="0">
+              <a:buNone/>
+            </a:pPr>
+            <a:r>
+              <a:rPr/>
+              <a:t>What you do</a:t>
+            </a:r>
+          </a:p>
+        </p:txBody>
+      </p:sp>
+      <p:sp>
+        <p:nvSpPr>
+          <p:cNvPr id="3" name="Content Placeholder 2"/>
+          <p:cNvSpPr>
+            <a:spLocks noGrp="1"/>
+          </p:cNvSpPr>
+          <p:nvPr>
+            <p:ph idx="1"/>
+          </p:nvPr>
+        </p:nvSpPr>
+        <p:spPr/>
+        <p:txBody>
+          <a:bodyPr/>
+          <a:lstStyle/>
+          <a:p>
+            <a:pPr lvl="0" indent="-342900" marL="342900">
+              <a:buAutoNum type="arabicPeriod"/>
+            </a:pPr>
+            <a:r>
+              <a:rPr/>
+              <a:t>Reproduce the three CV schemes on your angle and tabulate the errors</a:t>
+            </a:r>
+          </a:p>
+          <a:p>
+            <a:pPr lvl="0" indent="-342900" marL="342900">
+              <a:buAutoNum type="arabicPeriod"/>
+            </a:pPr>
+            <a:r>
+              <a:rPr/>
+              <a:t>Explain, in writing, why they differ </a:t>
+            </a:r>
+            <a:r>
+              <a:rPr b="1"/>
+              <a:t>in that direction</a:t>
+            </a:r>
+          </a:p>
+          <a:p>
+            <a:pPr lvl="0" indent="-342900" marL="342900">
+              <a:buAutoNum type="arabicPeriod"/>
+            </a:pPr>
+            <a:r>
+              <a:rPr/>
+              <a:t>Draw the flexibility curve and mark where variance takes over</a:t>
+            </a:r>
+          </a:p>
+          <a:p>
+            <a:pPr lvl="0" indent="-342900" marL="342900">
+              <a:buAutoNum type="arabicPeriod"/>
+            </a:pPr>
+            <a:r>
+              <a:rPr/>
+              <a:t>Build one deliberately leaking pipeline, then fix it, and report both numbers</a:t>
+            </a:r>
+          </a:p>
+          <a:p>
+            <a:pPr lvl="0" indent="0" marL="0">
+              <a:buNone/>
+            </a:pPr>
+            <a:r>
+              <a:rPr/>
+              <a:t>The gap between random and grouped CV </a:t>
+            </a:r>
+            <a:r>
+              <a:rPr b="1"/>
+              <a:t>is</a:t>
+            </a:r>
+            <a:r>
+              <a:rPr/>
+              <a:t> your leakage diagnostic. Report it.</a:t>
+            </a:r>
+          </a:p>
+        </p:txBody>
+      </p:sp>
+    </p:spTree>
+  </p:cSld>
+</p:sld>
 </file>
 
 <file path=ppt/slides/slide26.xml><?xml version="1.0" encoding="utf-8"?>
@@ -6785,87 +6429,111 @@
             </a:pPr>
             <a:r>
               <a:rPr/>
-              <a:t>In the lab</a:t>
-            </a:r>
-          </a:p>
-        </p:txBody>
-      </p:sp>
-      <p:sp>
-        <p:nvSpPr>
-          <p:cNvPr id="3" name="Content Placeholder 2"/>
-          <p:cNvSpPr>
-            <a:spLocks noGrp="1"/>
-          </p:cNvSpPr>
-          <p:nvPr>
-            <p:ph idx="1"/>
-          </p:nvPr>
-        </p:nvSpPr>
-        <p:spPr/>
-        <p:txBody>
-          <a:bodyPr/>
-          <a:lstStyle/>
-          <a:p>
-            <a:pPr lvl="0" indent="0" marL="0">
-              <a:buNone/>
-            </a:pPr>
-            <a:r>
-              <a:rPr/>
-              <a:t>Work through </a:t>
-            </a:r>
-            <a:r>
-              <a:rPr>
-                <a:hlinkClick r:id="rId2"/>
-                <a:latin typeface="Courier"/>
-              </a:rPr>
-              <a:t>02-lab/README.md</a:t>
-            </a:r>
-            <a:r>
-              <a:rPr/>
-              <a:t>.</a:t>
-            </a:r>
-          </a:p>
-          <a:p>
-            <a:pPr lvl="0" indent="-342900" marL="342900">
-              <a:buAutoNum type="arabicPeriod"/>
-            </a:pPr>
-            <a:r>
-              <a:rPr/>
-              <a:t>Reproduce the three CV schemes and tabulate the errors</a:t>
-            </a:r>
-          </a:p>
-          <a:p>
-            <a:pPr lvl="0" indent="-342900" marL="342900">
-              <a:buAutoNum type="arabicPeriod"/>
-            </a:pPr>
-            <a:r>
-              <a:rPr/>
-              <a:t>Explain, in writing, why they differ </a:t>
-            </a:r>
-            <a:r>
-              <a:rPr b="1"/>
-              <a:t>in this direction</a:t>
-            </a:r>
-          </a:p>
-          <a:p>
-            <a:pPr lvl="0" indent="-342900" marL="342900">
-              <a:buAutoNum type="arabicPeriod"/>
-            </a:pPr>
-            <a:r>
-              <a:rPr/>
-              <a:t>Draw the depth curve and mark where variance takes over</a:t>
-            </a:r>
-          </a:p>
-          <a:p>
-            <a:pPr lvl="0" indent="-342900" marL="342900">
-              <a:buAutoNum type="arabicPeriod"/>
-            </a:pPr>
-            <a:r>
-              <a:rPr/>
-              <a:t>Three sentences, naming your split and what it entitles you to claim</a:t>
-            </a:r>
-          </a:p>
-        </p:txBody>
-      </p:sp>
+              <a:t>The two-minute report</a:t>
+            </a:r>
+          </a:p>
+        </p:txBody>
+      </p:sp>
+      <mc:AlternateContent xmlns:mc="http://schemas.openxmlformats.org/markup-compatibility/2006">
+        <mc:Choice xmlns:a14="http://schemas.microsoft.com/office/drawing/2010/main" Requires="a14">
+          <p:sp>
+            <p:nvSpPr>
+              <p:cNvPr id="3" name="Content Placeholder 2"/>
+              <p:cNvSpPr>
+                <a:spLocks noGrp="1"/>
+              </p:cNvSpPr>
+              <p:nvPr>
+                <p:ph idx="1"/>
+              </p:nvPr>
+            </p:nvSpPr>
+            <p:spPr/>
+            <p:txBody>
+              <a:bodyPr/>
+              <a:lstStyle/>
+              <a:p>
+                <a:pPr lvl="0" indent="0" marL="0">
+                  <a:buNone/>
+                </a:pPr>
+                <a:r>
+                  <a:rPr b="1"/>
+                  <a:t>One slide. Three sentences.</a:t>
+                </a:r>
+              </a:p>
+              <a:p>
+                <a:pPr lvl="0" indent="-342900" marL="342900">
+                  <a:buAutoNum type="arabicPeriod"/>
+                </a:pPr>
+                <a:r>
+                  <a:rPr b="1"/>
+                  <a:t>What I did</a:t>
+                </a:r>
+                <a:r>
+                  <a:rPr/>
+                  <a:t> — the split, and the sentence it licenses</a:t>
+                </a:r>
+              </a:p>
+              <a:p>
+                <a:pPr lvl="0" indent="-342900" marL="342900">
+                  <a:buAutoNum type="arabicPeriod"/>
+                </a:pPr>
+                <a:r>
+                  <a:rPr b="1"/>
+                  <a:t>The number</a:t>
+                </a:r>
+                <a:r>
+                  <a:rPr/>
+                  <a:t> — error in the units of the outcome, not </a:t>
+                </a:r>
+                <a14:m>
+                  <m:oMath xmlns:m="http://schemas.openxmlformats.org/officeDocument/2006/math">
+                    <m:sSup>
+                      <m:e>
+                        <m:r>
+                          <m:t>R</m:t>
+                        </m:r>
+                      </m:e>
+                      <m:sup>
+                        <m:r>
+                          <m:t>2</m:t>
+                        </m:r>
+                      </m:sup>
+                    </m:sSup>
+                  </m:oMath>
+                </a14:m>
+              </a:p>
+              <a:p>
+                <a:pPr lvl="0" indent="-342900" marL="342900">
+                  <a:buAutoNum type="arabicPeriod"/>
+                </a:pPr>
+                <a:r>
+                  <a:rPr b="1"/>
+                  <a:t>The catch</a:t>
+                </a:r>
+                <a:r>
+                  <a:rPr/>
+                  <a:t> — what the split still cannot tell you</a:t>
+                </a:r>
+              </a:p>
+              <a:p>
+                <a:pPr lvl="0" indent="0" marL="0">
+                  <a:buNone/>
+                </a:pPr>
+                <a:r>
+                  <a:rPr/>
+                  <a:t>Full brief: </a:t>
+                </a:r>
+                <a:r>
+                  <a:rPr>
+                    <a:hlinkClick r:id="rId2"/>
+                    <a:latin typeface="Courier"/>
+                  </a:rPr>
+                  <a:t>02-lab/README.md</a:t>
+                </a:r>
+              </a:p>
+            </p:txBody>
+          </p:sp>
+        </mc:Choice>
+      </mc:AlternateContent>
     </p:spTree>
   </p:cSld>
 </p:sld>
@@ -6908,7 +6576,7 @@
             </a:pPr>
             <a:r>
               <a:rPr/>
-              <a:t>The 90 minutes ahead</a:t>
+              <a:t>These slides follow the notes</a:t>
             </a:r>
           </a:p>
         </p:txBody>
@@ -6948,7 +6616,7 @@
                       </a:pPr>
                       <a:r>
                         <a:rPr b="1"/>
-                        <a:t>0–10</a:t>
+                        <a:t>4.1</a:t>
                       </a:r>
                     </a:p>
                   </a:txBody>
@@ -6963,7 +6631,7 @@
                       </a:pPr>
                       <a:r>
                         <a:rPr/>
-                        <a:t>Three questions hiding inside “how good is it?”</a:t>
+                        <a:t>The decomposition</a:t>
                       </a:r>
                     </a:p>
                   </a:txBody>
@@ -6980,7 +6648,7 @@
                       </a:pPr>
                       <a:r>
                         <a:rPr b="1"/>
-                        <a:t>10–30</a:t>
+                        <a:t>4.2</a:t>
                       </a:r>
                     </a:p>
                   </a:txBody>
@@ -6995,7 +6663,7 @@
                       </a:pPr>
                       <a:r>
                         <a:rPr/>
-                        <a:t>The bias–variance decomposition</a:t>
+                        <a:t>In-sample error is optimistic — by how much?</a:t>
                       </a:r>
                     </a:p>
                   </a:txBody>
@@ -7012,7 +6680,7 @@
                       </a:pPr>
                       <a:r>
                         <a:rPr b="1"/>
-                        <a:t>30–50</a:t>
+                        <a:t>4.3</a:t>
                       </a:r>
                     </a:p>
                   </a:txBody>
@@ -7027,7 +6695,7 @@
                       </a:pPr>
                       <a:r>
                         <a:rPr/>
-                        <a:t>Why random K-fold breaks on a panel</a:t>
+                        <a:t>Cross-validation</a:t>
                       </a:r>
                     </a:p>
                   </a:txBody>
@@ -7044,7 +6712,7 @@
                       </a:pPr>
                       <a:r>
                         <a:rPr b="1"/>
-                        <a:t>50–70</a:t>
+                        <a:t>4.4</a:t>
                       </a:r>
                     </a:p>
                   </a:txBody>
@@ -7059,71 +6727,7 @@
                       </a:pPr>
                       <a:r>
                         <a:rPr/>
-                        <a:t>Three splits, measured</a:t>
-                      </a:r>
-                    </a:p>
-                  </a:txBody>
-                </a:tc>
-              </a:tr>
-              <a:tr h="0">
-                <a:tc>
-                  <a:txBody>
-                    <a:bodyPr/>
-                    <a:lstStyle/>
-                    <a:p>
-                      <a:pPr lvl="0" indent="0" marL="0">
-                        <a:buNone/>
-                      </a:pPr>
-                      <a:r>
-                        <a:rPr b="1"/>
-                        <a:t>70–85</a:t>
-                      </a:r>
-                    </a:p>
-                  </a:txBody>
-                </a:tc>
-                <a:tc>
-                  <a:txBody>
-                    <a:bodyPr/>
-                    <a:lstStyle/>
-                    <a:p>
-                      <a:pPr lvl="0" indent="0" marL="0">
-                        <a:buNone/>
-                      </a:pPr>
-                      <a:r>
-                        <a:rPr/>
-                        <a:t>Leakage, and where it hides</a:t>
-                      </a:r>
-                    </a:p>
-                  </a:txBody>
-                </a:tc>
-              </a:tr>
-              <a:tr h="0">
-                <a:tc>
-                  <a:txBody>
-                    <a:bodyPr/>
-                    <a:lstStyle/>
-                    <a:p>
-                      <a:pPr lvl="0" indent="0" marL="0">
-                        <a:buNone/>
-                      </a:pPr>
-                      <a:r>
-                        <a:rPr b="1"/>
-                        <a:t>85–90</a:t>
-                      </a:r>
-                    </a:p>
-                  </a:txBody>
-                </a:tc>
-                <a:tc>
-                  <a:txBody>
-                    <a:bodyPr/>
-                    <a:lstStyle/>
-                    <a:p>
-                      <a:pPr lvl="0" indent="0" marL="0">
-                        <a:buNone/>
-                      </a:pPr>
-                      <a:r>
-                        <a:rPr/>
-                        <a:t>Handoff to the lab</a:t>
+                        <a:t>Three ways to get cross-validation wrong</a:t>
                       </a:r>
                     </a:p>
                   </a:txBody>
@@ -7157,12 +6761,12 @@
       </p:grpSpPr>
       <p:sp>
         <p:nvSpPr>
-          <p:cNvPr id="2" name="Title 1"/>
-          <p:cNvSpPr>
-            <a:spLocks noGrp="1"/>
-          </p:cNvSpPr>
-          <p:nvPr>
-            <p:ph type="title"/>
+          <p:cNvPr id="3" name="Content Placeholder 2"/>
+          <p:cNvSpPr>
+            <a:spLocks noGrp="1"/>
+          </p:cNvSpPr>
+          <p:nvPr>
+            <p:ph idx="1"/>
           </p:nvPr>
         </p:nvSpPr>
         <p:spPr/>
@@ -7175,168 +6779,31 @@
             </a:pPr>
             <a:r>
               <a:rPr/>
-              <a:t>Before class you read</a:t>
-            </a:r>
-          </a:p>
-        </p:txBody>
-      </p:sp>
-      <mc:AlternateContent xmlns:mc="http://schemas.openxmlformats.org/markup-compatibility/2006">
-        <mc:Choice xmlns:a14="http://schemas.microsoft.com/office/drawing/2010/main" Requires="a14">
-          <p:sp>
-            <p:nvSpPr>
-              <p:cNvPr id="3" name="Content Placeholder 2"/>
-              <p:cNvSpPr>
-                <a:spLocks noGrp="1"/>
-              </p:cNvSpPr>
-              <p:nvPr>
-                <p:ph idx="1"/>
-              </p:nvPr>
-            </p:nvSpPr>
-            <p:spPr/>
-            <p:txBody>
-              <a:bodyPr/>
-              <a:lstStyle/>
-              <a:p>
-                <a:pPr lvl="0" indent="0" marL="0">
-                  <a:buNone/>
-                </a:pPr>
-                <a:r>
-                  <a:rPr b="1"/>
-                  <a:t>Mullainathan &amp; Spiess</a:t>
-                </a:r>
-                <a:r>
-                  <a:rPr/>
-                  <a:t>, </a:t>
-                </a:r>
-                <a:r>
-                  <a:rPr i="1"/>
-                  <a:t>Machine Learning: An Applied Econometric Approach</a:t>
-                </a:r>
-                <a:r>
-                  <a:rPr/>
-                  <a:t>, </a:t>
-                </a:r>
-                <a:r>
-                  <a:rPr b="1"/>
-                  <a:t>JEP</a:t>
-                </a:r>
-                <a:r>
-                  <a:rPr/>
-                  <a:t> 2017.</a:t>
-                </a:r>
-              </a:p>
-              <a:p>
-                <a:pPr lvl="0" indent="0" marL="0">
-                  <a:buNone/>
-                </a:pPr>
-                <a:r>
-                  <a:rPr/>
-                  <a:t>DOI: 10.1257/jep.31.2.87</a:t>
-                </a:r>
-              </a:p>
-              <a:p>
-                <a:pPr lvl="0" indent="0" marL="0">
-                  <a:buNone/>
-                </a:pPr>
-                <a:r>
-                  <a:rPr/>
-                  <a:t>Their framing, which organises the whole course:</a:t>
-                </a:r>
-              </a:p>
-              <a:p>
-                <a:pPr lvl="0" indent="0" marL="1270000">
-                  <a:buNone/>
-                </a:pPr>
-                <a:r>
-                  <a:rPr sz="2000"/>
-                  <a:t>Machine learning solves </a:t>
-                </a:r>
-                <a14:m>
-                  <m:oMath xmlns:m="http://schemas.openxmlformats.org/officeDocument/2006/math">
-                    <m:acc>
-                      <m:accPr>
-                        <m:chr m:val="̂"/>
-                      </m:accPr>
-                      <m:e>
-                        <m:r>
-                          <m:t>y</m:t>
-                        </m:r>
-                      </m:e>
-                    </m:acc>
-                  </m:oMath>
-                </a14:m>
-                <a:r>
-                  <a:rPr sz="2000"/>
-                  <a:t> problems. Economics mostly asks </a:t>
-                </a:r>
-                <a14:m>
-                  <m:oMath xmlns:m="http://schemas.openxmlformats.org/officeDocument/2006/math">
-                    <m:acc>
-                      <m:accPr>
-                        <m:chr m:val="̂"/>
-                      </m:accPr>
-                      <m:e>
-                        <m:r>
-                          <m:t>β</m:t>
-                        </m:r>
-                      </m:e>
-                    </m:acc>
-                  </m:oMath>
-                </a14:m>
-                <a:r>
-                  <a:rPr sz="2000"/>
-                  <a:t> questions. Confusing the two is where the trouble starts.</a:t>
-                </a:r>
-              </a:p>
-              <a:p>
-                <a:pPr lvl="0" indent="0" marL="0">
-                  <a:buNone/>
-                </a:pPr>
-                <a:r>
-                  <a:rPr/>
-                  <a:t>Today is entirely a </a:t>
-                </a:r>
-                <a14:m>
-                  <m:oMath xmlns:m="http://schemas.openxmlformats.org/officeDocument/2006/math">
-                    <m:acc>
-                      <m:accPr>
-                        <m:chr m:val="̂"/>
-                      </m:accPr>
-                      <m:e>
-                        <m:r>
-                          <m:t>y</m:t>
-                        </m:r>
-                      </m:e>
-                    </m:acc>
-                  </m:oMath>
-                </a14:m>
-                <a:r>
-                  <a:rPr/>
-                  <a:t> session. Session 10 is the </a:t>
-                </a:r>
-                <a14:m>
-                  <m:oMath xmlns:m="http://schemas.openxmlformats.org/officeDocument/2006/math">
-                    <m:acc>
-                      <m:accPr>
-                        <m:chr m:val="̂"/>
-                      </m:accPr>
-                      <m:e>
-                        <m:r>
-                          <m:t>β</m:t>
-                        </m:r>
-                      </m:e>
-                    </m:acc>
-                  </m:oMath>
-                </a14:m>
-                <a:r>
-                  <a:rPr/>
-                  <a:t> one, and it needs completely different machinery.</a:t>
-                </a:r>
-              </a:p>
-            </p:txBody>
-          </p:sp>
-        </mc:Choice>
-      </mc:AlternateContent>
+              <a:t>Same numbering and notation as </a:t>
+            </a:r>
+            <a:r>
+              <a:rPr>
+                <a:hlinkClick r:id="rId2"/>
+                <a:latin typeface="Courier"/>
+              </a:rPr>
+              <a:t>01-lecture/README.md</a:t>
+            </a:r>
+            <a:r>
+              <a:rPr/>
+              <a:t>.</a:t>
+            </a:r>
+          </a:p>
+          <a:p>
+            <a:pPr lvl="0" indent="0" marL="0">
+              <a:buNone/>
+            </a:pPr>
+            <a:r>
+              <a:rPr/>
+              <a:t>This is the hinge of the course. After today, in-sample fit stops being evidence.</a:t>
+            </a:r>
+          </a:p>
+        </p:txBody>
+      </p:sp>
     </p:spTree>
   </p:cSld>
 </p:sld>
@@ -7384,7 +6851,7 @@
             </a:pPr>
             <a:r>
               <a:rPr/>
-              <a:t>The question</a:t>
+              <a:t>4.1 The decomposition</a:t>
             </a:r>
           </a:p>
         </p:txBody>
@@ -7431,150 +6898,7 @@
             </a:pPr>
             <a:r>
               <a:rPr/>
-              <a:t>How good is your model, really?</a:t>
-            </a:r>
-          </a:p>
-        </p:txBody>
-      </p:sp>
-      <p:sp>
-        <p:nvSpPr>
-          <p:cNvPr id="3" name="Content Placeholder 2"/>
-          <p:cNvSpPr>
-            <a:spLocks noGrp="1"/>
-          </p:cNvSpPr>
-          <p:nvPr>
-            <p:ph idx="1"/>
-          </p:nvPr>
-        </p:nvSpPr>
-        <p:spPr/>
-        <p:txBody>
-          <a:bodyPr/>
-          <a:lstStyle/>
-          <a:p>
-            <a:pPr lvl="0" indent="0" marL="0">
-              <a:buNone/>
-            </a:pPr>
-            <a:r>
-              <a:rPr/>
-              <a:t>You fit a model of European productivity growth. It explains 78% of the variance.</a:t>
-            </a:r>
-          </a:p>
-          <a:p>
-            <a:pPr lvl="0" indent="0" marL="0">
-              <a:buNone/>
-            </a:pPr>
-            <a:r>
-              <a:rPr/>
-              <a:t>Three different questions hide inside “how good is it?”:</a:t>
-            </a:r>
-          </a:p>
-          <a:p>
-            <a:pPr lvl="0"/>
-            <a:r>
-              <a:rPr/>
-              <a:t>How well does it fit </a:t>
-            </a:r>
-            <a:r>
-              <a:rPr b="1"/>
-              <a:t>the data you used</a:t>
-            </a:r>
-            <a:r>
-              <a:rPr/>
-              <a:t>? (Almost meaningless.)</a:t>
-            </a:r>
-          </a:p>
-          <a:p>
-            <a:pPr lvl="0"/>
-            <a:r>
-              <a:rPr/>
-              <a:t>How well would it do on </a:t>
-            </a:r>
-            <a:r>
-              <a:rPr b="1"/>
-              <a:t>a new country</a:t>
-            </a:r>
-            <a:r>
-              <a:rPr/>
-              <a:t>?</a:t>
-            </a:r>
-          </a:p>
-          <a:p>
-            <a:pPr lvl="0"/>
-            <a:r>
-              <a:rPr/>
-              <a:t>How well would it do </a:t>
-            </a:r>
-            <a:r>
-              <a:rPr b="1"/>
-              <a:t>next year</a:t>
-            </a:r>
-            <a:r>
-              <a:rPr/>
-              <a:t>?</a:t>
-            </a:r>
-          </a:p>
-          <a:p>
-            <a:pPr lvl="0" indent="0" marL="0">
-              <a:buNone/>
-            </a:pPr>
-            <a:r>
-              <a:rPr/>
-              <a:t>Those last two are different questions, and they need </a:t>
-            </a:r>
-            <a:r>
-              <a:rPr b="1"/>
-              <a:t>different splits</a:t>
-            </a:r>
-            <a:r>
-              <a:rPr/>
-              <a:t>. Get the split wrong and every number that follows is optimistic.</a:t>
-            </a:r>
-          </a:p>
-        </p:txBody>
-      </p:sp>
-    </p:spTree>
-  </p:cSld>
-</p:sld>
-</file>
-
-<file path=ppt/slides/slide7.xml><?xml version="1.0" encoding="utf-8"?>
-<p:sld xmlns:a="http://schemas.openxmlformats.org/drawingml/2006/main" xmlns:r="http://schemas.openxmlformats.org/officeDocument/2006/relationships" xmlns:p="http://schemas.openxmlformats.org/presentationml/2006/main">
-  <p:cSld>
-    <p:spTree>
-      <p:nvGrpSpPr>
-        <p:cNvPr id="1" name=""/>
-        <p:cNvGrpSpPr/>
-        <p:nvPr/>
-      </p:nvGrpSpPr>
-      <p:grpSpPr>
-        <a:xfrm>
-          <a:off x="0" y="0"/>
-          <a:ext cx="0" cy="0"/>
-          <a:chOff x="0" y="0"/>
-          <a:chExt cx="0" cy="0"/>
-        </a:xfrm>
-      </p:grpSpPr>
-      <p:sp>
-        <p:nvSpPr>
-          <p:cNvPr id="2" name="Title 1"/>
-          <p:cNvSpPr>
-            <a:spLocks noGrp="1"/>
-          </p:cNvSpPr>
-          <p:nvPr>
-            <p:ph type="title"/>
-          </p:nvPr>
-        </p:nvSpPr>
-        <p:spPr/>
-        <p:txBody>
-          <a:bodyPr/>
-          <a:lstStyle/>
-          <a:p>
-            <a:pPr lvl="0" indent="0" marL="0">
-              <a:buNone/>
-            </a:pPr>
-            <a:r>
-              <a:rPr/>
-              <a:t>The decomposition</a:t>
+              <a:t>Expected squared error at a test point</a:t>
             </a:r>
           </a:p>
         </p:txBody>
@@ -7601,7 +6925,7 @@
                 </a:pPr>
                 <a:r>
                   <a:rPr/>
-                  <a:t>For squared loss, at a point </a:t>
+                  <a:t>Fix </a:t>
                 </a:r>
                 <a14:m>
                   <m:oMath xmlns:m="http://schemas.openxmlformats.org/officeDocument/2006/math">
@@ -7621,7 +6945,25 @@
                 </a14:m>
                 <a:r>
                   <a:rPr/>
-                  <a:t>:</a:t>
+                  <a:t>; let </a:t>
+                </a:r>
+                <a14:m>
+                  <m:oMath xmlns:m="http://schemas.openxmlformats.org/officeDocument/2006/math">
+                    <m:acc>
+                      <m:accPr>
+                        <m:chr m:val="̂"/>
+                      </m:accPr>
+                      <m:e>
+                        <m:r>
+                          <m:t>f</m:t>
+                        </m:r>
+                      </m:e>
+                    </m:acc>
+                  </m:oMath>
+                </a14:m>
+                <a:r>
+                  <a:rPr/>
+                  <a:t> be estimated on a random training sample. Averaging over training samples and over the new noise draw:</a:t>
                 </a:r>
               </a:p>
               <a:p>
@@ -7730,72 +7072,6 @@
                         <m:e>
                           <m:limLow>
                             <m:e>
-                              <m:sSup>
-                                <m:e>
-                                  <m:r>
-                                    <m:rPr>
-                                      <m:sty m:val="p"/>
-                                    </m:rPr>
-                                    <m:t>Bias</m:t>
-                                  </m:r>
-                                </m:e>
-                                <m:sup>
-                                  <m:r>
-                                    <m:t>2</m:t>
-                                  </m:r>
-                                </m:sup>
-                              </m:sSup>
-                              <m:d>
-                                <m:dPr>
-                                  <m:begChr m:val="("/>
-                                  <m:sepChr m:val=""/>
-                                  <m:endChr m:val=")"/>
-                                  <m:grow/>
-                                </m:dPr>
-                                <m:e>
-                                  <m:acc>
-                                    <m:accPr>
-                                      <m:chr m:val="̂"/>
-                                    </m:accPr>
-                                    <m:e>
-                                      <m:r>
-                                        <m:t>f</m:t>
-                                      </m:r>
-                                    </m:e>
-                                  </m:acc>
-                                </m:e>
-                              </m:d>
-                            </m:e>
-                            <m:lim>
-                              <m:r>
-                                <m:rPr>
-                                  <m:sty m:val="p"/>
-                                </m:rPr>
-                                <m:t>⏟</m:t>
-                              </m:r>
-                            </m:lim>
-                          </m:limLow>
-                        </m:e>
-                        <m:lim>
-                          <m:r>
-                            <m:rPr>
-                              <m:nor/>
-                              <m:sty m:val="p"/>
-                            </m:rPr>
-                            <m:t>too rigid</m:t>
-                          </m:r>
-                        </m:lim>
-                      </m:limLow>
-                      <m:r>
-                        <m:rPr>
-                          <m:sty m:val="p"/>
-                        </m:rPr>
-                        <m:t>+</m:t>
-                      </m:r>
-                      <m:limLow>
-                        <m:e>
-                          <m:limLow>
-                            <m:e>
                               <m:r>
                                 <m:rPr>
                                   <m:sty m:val="p"/>
@@ -7820,6 +7096,28 @@
                                       </m:r>
                                     </m:e>
                                   </m:acc>
+                                  <m:d>
+                                    <m:dPr>
+                                      <m:begChr m:val="("/>
+                                      <m:sepChr m:val=""/>
+                                      <m:endChr m:val=")"/>
+                                      <m:grow/>
+                                    </m:dPr>
+                                    <m:e>
+                                      <m:sSub>
+                                        <m:e>
+                                          <m:r>
+                                            <m:t>x</m:t>
+                                          </m:r>
+                                        </m:e>
+                                        <m:sub>
+                                          <m:r>
+                                            <m:t>0</m:t>
+                                          </m:r>
+                                        </m:sub>
+                                      </m:sSub>
+                                    </m:e>
+                                  </m:d>
                                 </m:e>
                               </m:d>
                             </m:e>
@@ -7839,8 +7137,149 @@
                               <m:nor/>
                               <m:sty m:val="p"/>
                             </m:rPr>
-                            <m:t>too sensitive</m:t>
+                            <m:t>variance</m:t>
                           </m:r>
+                        </m:lim>
+                      </m:limLow>
+                      <m:r>
+                        <m:rPr>
+                          <m:sty m:val="p"/>
+                        </m:rPr>
+                        <m:t>+</m:t>
+                      </m:r>
+                      <m:limLow>
+                        <m:e>
+                          <m:limLow>
+                            <m:e>
+                              <m:r>
+                                <m:rPr>
+                                  <m:sty m:val="p"/>
+                                </m:rPr>
+                                <m:t>(</m:t>
+                              </m:r>
+                              <m:r>
+                                <m:rPr>
+                                  <m:sty m:val="p"/>
+                                  <m:scr m:val="double-struck"/>
+                                </m:rPr>
+                                <m:t>E</m:t>
+                              </m:r>
+                              <m:d>
+                                <m:dPr>
+                                  <m:begChr m:val="["/>
+                                  <m:sepChr m:val=""/>
+                                  <m:endChr m:val="]"/>
+                                  <m:grow/>
+                                </m:dPr>
+                                <m:e>
+                                  <m:acc>
+                                    <m:accPr>
+                                      <m:chr m:val="̂"/>
+                                    </m:accPr>
+                                    <m:e>
+                                      <m:r>
+                                        <m:t>f</m:t>
+                                      </m:r>
+                                    </m:e>
+                                  </m:acc>
+                                  <m:d>
+                                    <m:dPr>
+                                      <m:begChr m:val="("/>
+                                      <m:sepChr m:val=""/>
+                                      <m:endChr m:val=")"/>
+                                      <m:grow/>
+                                    </m:dPr>
+                                    <m:e>
+                                      <m:sSub>
+                                        <m:e>
+                                          <m:r>
+                                            <m:t>x</m:t>
+                                          </m:r>
+                                        </m:e>
+                                        <m:sub>
+                                          <m:r>
+                                            <m:t>0</m:t>
+                                          </m:r>
+                                        </m:sub>
+                                      </m:sSub>
+                                    </m:e>
+                                  </m:d>
+                                </m:e>
+                              </m:d>
+                              <m:r>
+                                <m:rPr>
+                                  <m:sty m:val="p"/>
+                                </m:rPr>
+                                <m:t>−</m:t>
+                              </m:r>
+                              <m:r>
+                                <m:t>f</m:t>
+                              </m:r>
+                              <m:d>
+                                <m:dPr>
+                                  <m:begChr m:val="("/>
+                                  <m:sepChr m:val=""/>
+                                  <m:endChr m:val=")"/>
+                                  <m:grow/>
+                                </m:dPr>
+                                <m:e>
+                                  <m:sSub>
+                                    <m:e>
+                                      <m:r>
+                                        <m:t>x</m:t>
+                                      </m:r>
+                                    </m:e>
+                                    <m:sub>
+                                      <m:r>
+                                        <m:t>0</m:t>
+                                      </m:r>
+                                    </m:sub>
+                                  </m:sSub>
+                                </m:e>
+                              </m:d>
+                              <m:sSup>
+                                <m:e>
+                                  <m:r>
+                                    <m:rPr>
+                                      <m:sty m:val="p"/>
+                                    </m:rPr>
+                                    <m:t>)</m:t>
+                                  </m:r>
+                                </m:e>
+                                <m:sup>
+                                  <m:r>
+                                    <m:t>2</m:t>
+                                  </m:r>
+                                </m:sup>
+                              </m:sSup>
+                            </m:e>
+                            <m:lim>
+                              <m:r>
+                                <m:rPr>
+                                  <m:sty m:val="p"/>
+                                </m:rPr>
+                                <m:t>⏟</m:t>
+                              </m:r>
+                            </m:lim>
+                          </m:limLow>
+                        </m:e>
+                        <m:lim>
+                          <m:sSup>
+                            <m:e>
+                              <m:r>
+                                <m:rPr>
+                                  <m:nor/>
+                                  <m:sty m:val="p"/>
+                                </m:rPr>
+                                <m:t>bias</m:t>
+                              </m:r>
+                            </m:e>
+                            <m:sup>
+                              <m:r>
+                                <m:t>2</m:t>
+                              </m:r>
+                            </m:sup>
+                          </m:sSup>
                         </m:lim>
                       </m:limLow>
                       <m:r>
@@ -7890,50 +7329,413 @@
                   </m:oMathPara>
                 </a14:m>
               </a:p>
+            </p:txBody>
+          </p:sp>
+        </mc:Choice>
+      </mc:AlternateContent>
+    </p:spTree>
+  </p:cSld>
+</p:sld>
+</file>
+
+<file path=ppt/slides/slide7.xml><?xml version="1.0" encoding="utf-8"?>
+<p:sld xmlns:a="http://schemas.openxmlformats.org/drawingml/2006/main" xmlns:r="http://schemas.openxmlformats.org/officeDocument/2006/relationships" xmlns:p="http://schemas.openxmlformats.org/presentationml/2006/main">
+  <p:cSld>
+    <p:spTree>
+      <p:nvGrpSpPr>
+        <p:cNvPr id="1" name=""/>
+        <p:cNvGrpSpPr/>
+        <p:nvPr/>
+      </p:nvGrpSpPr>
+      <p:grpSpPr>
+        <a:xfrm>
+          <a:off x="0" y="0"/>
+          <a:ext cx="0" cy="0"/>
+          <a:chOff x="0" y="0"/>
+          <a:chExt cx="0" cy="0"/>
+        </a:xfrm>
+      </p:grpSpPr>
+      <p:sp>
+        <p:nvSpPr>
+          <p:cNvPr id="2" name="Title 1"/>
+          <p:cNvSpPr>
+            <a:spLocks noGrp="1"/>
+          </p:cNvSpPr>
+          <p:nvPr>
+            <p:ph type="title"/>
+          </p:nvPr>
+        </p:nvSpPr>
+        <p:spPr/>
+        <p:txBody>
+          <a:bodyPr/>
+          <a:lstStyle/>
+          <a:p>
+            <a:pPr lvl="0" indent="0" marL="0">
+              <a:buNone/>
+            </a:pPr>
+            <a:r>
+              <a:rPr/>
+              <a:t>The derivation</a:t>
+            </a:r>
+          </a:p>
+        </p:txBody>
+      </p:sp>
+      <mc:AlternateContent xmlns:mc="http://schemas.openxmlformats.org/markup-compatibility/2006">
+        <mc:Choice xmlns:a14="http://schemas.microsoft.com/office/drawing/2010/main" Requires="a14">
+          <p:sp>
+            <p:nvSpPr>
+              <p:cNvPr id="3" name="Content Placeholder 2"/>
+              <p:cNvSpPr>
+                <a:spLocks noGrp="1"/>
+              </p:cNvSpPr>
+              <p:nvPr>
+                <p:ph idx="1"/>
+              </p:nvPr>
+            </p:nvSpPr>
+            <p:spPr/>
+            <p:txBody>
+              <a:bodyPr/>
+              <a:lstStyle/>
               <a:p>
-                <a:pPr lvl="0"/>
-                <a:r>
-                  <a:rPr b="1"/>
-                  <a:t>Bias</a:t>
-                </a:r>
+                <a:pPr lvl="0" indent="0" marL="0">
+                  <a:buNone/>
+                </a:pPr>
                 <a:r>
                   <a:rPr/>
-                  <a:t> falls as the model gets more flexible</a:t>
+                  <a:t>Write </a:t>
+                </a:r>
+                <a14:m>
+                  <m:oMath xmlns:m="http://schemas.openxmlformats.org/officeDocument/2006/math">
+                    <m:sSub>
+                      <m:e>
+                        <m:r>
+                          <m:t>y</m:t>
+                        </m:r>
+                      </m:e>
+                      <m:sub>
+                        <m:r>
+                          <m:t>0</m:t>
+                        </m:r>
+                      </m:sub>
+                    </m:sSub>
+                    <m:r>
+                      <m:rPr>
+                        <m:sty m:val="p"/>
+                      </m:rPr>
+                      <m:t>=</m:t>
+                    </m:r>
+                    <m:r>
+                      <m:t>f</m:t>
+                    </m:r>
+                    <m:d>
+                      <m:dPr>
+                        <m:begChr m:val="("/>
+                        <m:sepChr m:val=""/>
+                        <m:endChr m:val=")"/>
+                        <m:grow/>
+                      </m:dPr>
+                      <m:e>
+                        <m:sSub>
+                          <m:e>
+                            <m:r>
+                              <m:t>x</m:t>
+                            </m:r>
+                          </m:e>
+                          <m:sub>
+                            <m:r>
+                              <m:t>0</m:t>
+                            </m:r>
+                          </m:sub>
+                        </m:sSub>
+                      </m:e>
+                    </m:d>
+                    <m:r>
+                      <m:rPr>
+                        <m:sty m:val="p"/>
+                      </m:rPr>
+                      <m:t>+</m:t>
+                    </m:r>
+                    <m:sSub>
+                      <m:e>
+                        <m:r>
+                          <m:t>ε</m:t>
+                        </m:r>
+                      </m:e>
+                      <m:sub>
+                        <m:r>
+                          <m:t>0</m:t>
+                        </m:r>
+                      </m:sub>
+                    </m:sSub>
+                  </m:oMath>
+                </a14:m>
+                <a:r>
+                  <a:rPr/>
+                  <a:t> and add and subtract </a:t>
+                </a:r>
+                <a14:m>
+                  <m:oMath xmlns:m="http://schemas.openxmlformats.org/officeDocument/2006/math">
+                    <m:r>
+                      <m:rPr>
+                        <m:sty m:val="p"/>
+                        <m:scr m:val="double-struck"/>
+                      </m:rPr>
+                      <m:t>E</m:t>
+                    </m:r>
+                    <m:d>
+                      <m:dPr>
+                        <m:begChr m:val="["/>
+                        <m:sepChr m:val=""/>
+                        <m:endChr m:val="]"/>
+                        <m:grow/>
+                      </m:dPr>
+                      <m:e>
+                        <m:acc>
+                          <m:accPr>
+                            <m:chr m:val="̂"/>
+                          </m:accPr>
+                          <m:e>
+                            <m:r>
+                              <m:t>f</m:t>
+                            </m:r>
+                          </m:e>
+                        </m:acc>
+                        <m:d>
+                          <m:dPr>
+                            <m:begChr m:val="("/>
+                            <m:sepChr m:val=""/>
+                            <m:endChr m:val=")"/>
+                            <m:grow/>
+                          </m:dPr>
+                          <m:e>
+                            <m:sSub>
+                              <m:e>
+                                <m:r>
+                                  <m:t>x</m:t>
+                                </m:r>
+                              </m:e>
+                              <m:sub>
+                                <m:r>
+                                  <m:t>0</m:t>
+                                </m:r>
+                              </m:sub>
+                            </m:sSub>
+                          </m:e>
+                        </m:d>
+                      </m:e>
+                    </m:d>
+                  </m:oMath>
+                </a14:m>
+                <a:r>
+                  <a:rPr/>
+                  <a:t> inside the square.</a:t>
+                </a:r>
+              </a:p>
+              <a:p>
+                <a:pPr lvl="0" indent="0" marL="0">
+                  <a:buNone/>
+                </a:pPr>
+                <a:r>
+                  <a:rPr/>
+                  <a:t>Three cross terms vanish:</a:t>
                 </a:r>
               </a:p>
               <a:p>
                 <a:pPr lvl="0"/>
                 <a:r>
-                  <a:rPr b="1"/>
-                  <a:t>Variance</a:t>
+                  <a:rPr/>
+                  <a:t>one because </a:t>
                 </a:r>
+                <a14:m>
+                  <m:oMath xmlns:m="http://schemas.openxmlformats.org/officeDocument/2006/math">
+                    <m:r>
+                      <m:rPr>
+                        <m:sty m:val="p"/>
+                        <m:scr m:val="double-struck"/>
+                      </m:rPr>
+                      <m:t>E</m:t>
+                    </m:r>
+                    <m:d>
+                      <m:dPr>
+                        <m:begChr m:val="["/>
+                        <m:sepChr m:val=""/>
+                        <m:endChr m:val="]"/>
+                        <m:grow/>
+                      </m:dPr>
+                      <m:e>
+                        <m:sSub>
+                          <m:e>
+                            <m:r>
+                              <m:t>ε</m:t>
+                            </m:r>
+                          </m:e>
+                          <m:sub>
+                            <m:r>
+                              <m:t>0</m:t>
+                            </m:r>
+                          </m:sub>
+                        </m:sSub>
+                      </m:e>
+                    </m:d>
+                    <m:r>
+                      <m:rPr>
+                        <m:sty m:val="p"/>
+                      </m:rPr>
+                      <m:t>=</m:t>
+                    </m:r>
+                    <m:r>
+                      <m:t>0</m:t>
+                    </m:r>
+                  </m:oMath>
+                </a14:m>
                 <a:r>
                   <a:rPr/>
-                  <a:t> rises as the model gets more flexible</a:t>
+                  <a:t> and </a:t>
+                </a:r>
+                <a14:m>
+                  <m:oMath xmlns:m="http://schemas.openxmlformats.org/officeDocument/2006/math">
+                    <m:sSub>
+                      <m:e>
+                        <m:r>
+                          <m:t>ε</m:t>
+                        </m:r>
+                      </m:e>
+                      <m:sub>
+                        <m:r>
+                          <m:t>0</m:t>
+                        </m:r>
+                      </m:sub>
+                    </m:sSub>
+                  </m:oMath>
+                </a14:m>
+                <a:r>
+                  <a:rPr/>
+                  <a:t> is independent of the training sample</a:t>
                 </a:r>
               </a:p>
               <a:p>
                 <a:pPr lvl="0"/>
+                <a:r>
+                  <a:rPr/>
+                  <a:t>two because </a:t>
+                </a:r>
                 <a14:m>
                   <m:oMath xmlns:m="http://schemas.openxmlformats.org/officeDocument/2006/math">
-                    <m:sSup>
+                    <m:r>
+                      <m:rPr>
+                        <m:sty m:val="p"/>
+                        <m:scr m:val="double-struck"/>
+                      </m:rPr>
+                      <m:t>E</m:t>
+                    </m:r>
+                    <m:d>
+                      <m:dPr>
+                        <m:begChr m:val="["/>
+                        <m:sepChr m:val=""/>
+                        <m:endChr m:val="]"/>
+                        <m:grow/>
+                      </m:dPr>
                       <m:e>
+                        <m:acc>
+                          <m:accPr>
+                            <m:chr m:val="̂"/>
+                          </m:accPr>
+                          <m:e>
+                            <m:r>
+                              <m:t>f</m:t>
+                            </m:r>
+                          </m:e>
+                        </m:acc>
+                        <m:d>
+                          <m:dPr>
+                            <m:begChr m:val="("/>
+                            <m:sepChr m:val=""/>
+                            <m:endChr m:val=")"/>
+                            <m:grow/>
+                          </m:dPr>
+                          <m:e>
+                            <m:sSub>
+                              <m:e>
+                                <m:r>
+                                  <m:t>x</m:t>
+                                </m:r>
+                              </m:e>
+                              <m:sub>
+                                <m:r>
+                                  <m:t>0</m:t>
+                                </m:r>
+                              </m:sub>
+                            </m:sSub>
+                          </m:e>
+                        </m:d>
                         <m:r>
-                          <m:t>σ</m:t>
+                          <m:rPr>
+                            <m:sty m:val="p"/>
+                          </m:rPr>
+                          <m:t>−</m:t>
                         </m:r>
+                        <m:r>
+                          <m:rPr>
+                            <m:sty m:val="p"/>
+                            <m:scr m:val="double-struck"/>
+                          </m:rPr>
+                          <m:t>E</m:t>
+                        </m:r>
+                        <m:d>
+                          <m:dPr>
+                            <m:begChr m:val="["/>
+                            <m:sepChr m:val=""/>
+                            <m:endChr m:val="]"/>
+                            <m:grow/>
+                          </m:dPr>
+                          <m:e>
+                            <m:acc>
+                              <m:accPr>
+                                <m:chr m:val="̂"/>
+                              </m:accPr>
+                              <m:e>
+                                <m:r>
+                                  <m:t>f</m:t>
+                                </m:r>
+                              </m:e>
+                            </m:acc>
+                            <m:d>
+                              <m:dPr>
+                                <m:begChr m:val="("/>
+                                <m:sepChr m:val=""/>
+                                <m:endChr m:val=")"/>
+                                <m:grow/>
+                              </m:dPr>
+                              <m:e>
+                                <m:sSub>
+                                  <m:e>
+                                    <m:r>
+                                      <m:t>x</m:t>
+                                    </m:r>
+                                  </m:e>
+                                  <m:sub>
+                                    <m:r>
+                                      <m:t>0</m:t>
+                                    </m:r>
+                                  </m:sub>
+                                </m:sSub>
+                              </m:e>
+                            </m:d>
+                          </m:e>
+                        </m:d>
                       </m:e>
-                      <m:sup>
-                        <m:r>
-                          <m:t>2</m:t>
-                        </m:r>
-                      </m:sup>
-                    </m:sSup>
+                    </m:d>
+                    <m:r>
+                      <m:rPr>
+                        <m:sty m:val="p"/>
+                      </m:rPr>
+                      <m:t>=</m:t>
+                    </m:r>
+                    <m:r>
+                      <m:t>0</m:t>
+                    </m:r>
                   </m:oMath>
                 </a14:m>
-                <a:r>
-                  <a:rPr/>
-                  <a:t> does not move. It is what the predictors do not observe.</a:t>
-                </a:r>
               </a:p>
               <a:p>
                 <a:pPr lvl="0" indent="0" marL="0">
@@ -7941,24 +7743,14 @@
                 </a:pPr>
                 <a14:m>
                   <m:oMath xmlns:m="http://schemas.openxmlformats.org/officeDocument/2006/math">
-                    <m:sSup>
-                      <m:e>
-                        <m:r>
-                          <m:t>σ</m:t>
-                        </m:r>
-                      </m:e>
-                      <m:sup>
-                        <m:r>
-                          <m:t>2</m:t>
-                        </m:r>
-                      </m:sup>
-                    </m:sSup>
+                    <m:r>
+                      <m:rPr>
+                        <m:sty m:val="p"/>
+                      </m:rPr>
+                      <m:t>◼</m:t>
+                    </m:r>
                   </m:oMath>
                 </a14:m>
-                <a:r>
-                  <a:rPr/>
-                  <a:t> is not a defect of your method. Reporting a validation error below it means you have leaked, not learned.</a:t>
-                </a:r>
               </a:p>
             </p:txBody>
           </p:sp>
@@ -7996,12 +7788,7 @@
             <p:ph type="title"/>
           </p:nvPr>
         </p:nvSpPr>
-        <p:spPr>
-          <a:xfrm>
-            <a:off x="722313" y="3305176"/>
-            <a:ext cx="7772400" cy="1021556"/>
-          </a:xfrm>
-        </p:spPr>
+        <p:spPr/>
         <p:txBody>
           <a:bodyPr/>
           <a:lstStyle/>
@@ -8011,7 +7798,71 @@
             </a:pPr>
             <a:r>
               <a:rPr/>
-              <a:t>The trap</a:t>
+              <a:t>The economics of this equation</a:t>
+            </a:r>
+          </a:p>
+        </p:txBody>
+      </p:sp>
+      <p:sp>
+        <p:nvSpPr>
+          <p:cNvPr id="3" name="Content Placeholder 2"/>
+          <p:cNvSpPr>
+            <a:spLocks noGrp="1"/>
+          </p:cNvSpPr>
+          <p:nvPr>
+            <p:ph idx="1"/>
+          </p:nvPr>
+        </p:nvSpPr>
+        <p:spPr/>
+        <p:txBody>
+          <a:bodyPr/>
+          <a:lstStyle/>
+          <a:p>
+            <a:pPr lvl="0"/>
+            <a:r>
+              <a:rPr b="1"/>
+              <a:t>Bias</a:t>
+            </a:r>
+            <a:r>
+              <a:rPr/>
+              <a:t> is what you get for imposing structure you believe in.</a:t>
+            </a:r>
+          </a:p>
+          <a:p>
+            <a:pPr lvl="0"/>
+            <a:r>
+              <a:rPr b="1"/>
+              <a:t>Variance</a:t>
+            </a:r>
+            <a:r>
+              <a:rPr/>
+              <a:t> is what you pay for letting the data speak.</a:t>
+            </a:r>
+          </a:p>
+          <a:p>
+            <a:pPr lvl="0" indent="0" marL="0">
+              <a:buNone/>
+            </a:pPr>
+            <a:r>
+              <a:rPr/>
+              <a:t>Flexibility trades one for the other, and there is generally an </a:t>
+            </a:r>
+            <a:r>
+              <a:rPr b="1"/>
+              <a:t>interior optimum</a:t>
+            </a:r>
+            <a:r>
+              <a:rPr/>
+              <a:t>.</a:t>
+            </a:r>
+          </a:p>
+          <a:p>
+            <a:pPr lvl="0" indent="0" marL="0">
+              <a:buNone/>
+            </a:pPr>
+            <a:r>
+              <a:rPr/>
+              <a:t>The rest of the course is a catalogue of ways to sit at that optimum deliberately rather than by accident.</a:t>
             </a:r>
           </a:p>
         </p:txBody>
@@ -8048,7 +7899,12 @@
             <p:ph type="title"/>
           </p:nvPr>
         </p:nvSpPr>
-        <p:spPr/>
+        <p:spPr>
+          <a:xfrm>
+            <a:off x="722313" y="3305176"/>
+            <a:ext cx="7772400" cy="1021556"/>
+          </a:xfrm>
+        </p:spPr>
         <p:txBody>
           <a:bodyPr/>
           <a:lstStyle/>
@@ -8058,93 +7914,7 @@
             </a:pPr>
             <a:r>
               <a:rPr/>
-              <a:t>Why random K-fold breaks here</a:t>
-            </a:r>
-          </a:p>
-        </p:txBody>
-      </p:sp>
-      <p:sp>
-        <p:nvSpPr>
-          <p:cNvPr id="3" name="Content Placeholder 2"/>
-          <p:cNvSpPr>
-            <a:spLocks noGrp="1"/>
-          </p:cNvSpPr>
-          <p:nvPr>
-            <p:ph idx="1"/>
-          </p:nvPr>
-        </p:nvSpPr>
-        <p:spPr/>
-        <p:txBody>
-          <a:bodyPr/>
-          <a:lstStyle/>
-          <a:p>
-            <a:pPr lvl="0" indent="0" marL="0">
-              <a:buNone/>
-            </a:pPr>
-            <a:r>
-              <a:rPr>
-                <a:latin typeface="Courier"/>
-              </a:rPr>
-              <a:t>core.parquet</a:t>
-            </a:r>
-            <a:r>
-              <a:rPr/>
-              <a:t> is 30 countries observed over 15 years.</a:t>
-            </a:r>
-          </a:p>
-          <a:p>
-            <a:pPr lvl="0" indent="0" marL="0">
-              <a:buNone/>
-            </a:pPr>
-            <a:r>
-              <a:rPr/>
-              <a:t>Random K-fold puts </a:t>
-            </a:r>
-            <a:r>
-              <a:rPr b="1"/>
-              <a:t>Germany 2019 in training and Germany 2020 in test</a:t>
-            </a:r>
-            <a:r>
-              <a:rPr/>
-              <a:t>.</a:t>
-            </a:r>
-          </a:p>
-          <a:p>
-            <a:pPr lvl="0"/>
-            <a:r>
-              <a:rPr/>
-              <a:t>Countries are highly persistent — productivity this year nearly determines next year</a:t>
-            </a:r>
-          </a:p>
-          <a:p>
-            <a:pPr lvl="0"/>
-            <a:r>
-              <a:rPr/>
-              <a:t>The model can effectively memorise the country, then “predict” it</a:t>
-            </a:r>
-          </a:p>
-          <a:p>
-            <a:pPr lvl="0"/>
-            <a:r>
-              <a:rPr/>
-              <a:t>Your validation error measures </a:t>
-            </a:r>
-            <a:r>
-              <a:rPr b="1"/>
-              <a:t>interpolation within a country</a:t>
-            </a:r>
-            <a:r>
-              <a:rPr/>
-              <a:t>, not forecasting</a:t>
-            </a:r>
-          </a:p>
-          <a:p>
-            <a:pPr lvl="0" indent="0" marL="0">
-              <a:buNone/>
-            </a:pPr>
-            <a:r>
-              <a:rPr/>
-              <a:t>This is not a subtle statistical nicety. On this panel it is the difference between a model that looks excellent and one that is useful.</a:t>
+              <a:t>4.2 Optimism</a:t>
             </a:r>
           </a:p>
         </p:txBody>

--- a/04-bias-variance-and-cross-validation/slides.pptx
+++ b/04-bias-variance-and-cross-validation/slides.pptx
@@ -6334,7 +6334,7 @@
             </a:pPr>
             <a:r>
               <a:rPr/>
-              <a:t>Reproduce the three CV schemes on your angle and tabulate the errors</a:t>
+              <a:t>Reproduce the three CV schemes on your project and tabulate the errors</a:t>
             </a:r>
           </a:p>
           <a:p>

--- a/04-bias-variance-and-cross-validation/slides.pptx
+++ b/04-bias-variance-and-cross-validation/slides.pptx
@@ -6262,7 +6262,7 @@
             </a:pPr>
             <a:r>
               <a:rPr/>
-              <a:t>The lab</a:t>
+              <a:t>The practice</a:t>
             </a:r>
           </a:p>
         </p:txBody>
@@ -6527,7 +6527,7 @@
                     <a:hlinkClick r:id="rId2"/>
                     <a:latin typeface="Courier"/>
                   </a:rPr>
-                  <a:t>02-lab/README.md</a:t>
+                  <a:t>02-practice/README.md</a:t>
                 </a:r>
               </a:p>
             </p:txBody>

--- a/04-bias-variance-and-cross-validation/slides.pptx
+++ b/04-bias-variance-and-cross-validation/slides.pptx
@@ -3349,7 +3349,19 @@
                       <m:rPr>
                         <m:sty m:val="p"/>
                       </m:rPr>
-                      <m:t>err</m:t>
+                      <m:t>e</m:t>
+                    </m:r>
+                    <m:r>
+                      <m:rPr>
+                        <m:sty m:val="p"/>
+                      </m:rPr>
+                      <m:t>r</m:t>
+                    </m:r>
+                    <m:r>
+                      <m:rPr>
+                        <m:sty m:val="p"/>
+                      </m:rPr>
+                      <m:t>r</m:t>
                     </m:r>
                     <m:r>
                       <m:rPr>
@@ -3475,7 +3487,19 @@
                           <m:rPr>
                             <m:sty m:val="p"/>
                           </m:rPr>
-                          <m:t>Err</m:t>
+                          <m:t>E</m:t>
+                        </m:r>
+                        <m:r>
+                          <m:rPr>
+                            <m:sty m:val="p"/>
+                          </m:rPr>
+                          <m:t>r</m:t>
+                        </m:r>
+                        <m:r>
+                          <m:rPr>
+                            <m:sty m:val="p"/>
+                          </m:rPr>
+                          <m:t>r</m:t>
                         </m:r>
                       </m:e>
                       <m:sub>
@@ -3554,7 +3578,19 @@
                                 <m:rPr>
                                   <m:sty m:val="p"/>
                                 </m:rPr>
-                                <m:t>Err</m:t>
+                                <m:t>E</m:t>
+                              </m:r>
+                              <m:r>
+                                <m:rPr>
+                                  <m:sty m:val="p"/>
+                                </m:rPr>
+                                <m:t>r</m:t>
+                              </m:r>
+                              <m:r>
+                                <m:rPr>
+                                  <m:sty m:val="p"/>
+                                </m:rPr>
+                                <m:t>r</m:t>
                               </m:r>
                             </m:e>
                             <m:sub>
@@ -3594,7 +3630,19 @@
                             <m:rPr>
                               <m:sty m:val="p"/>
                             </m:rPr>
-                            <m:t>err</m:t>
+                            <m:t>e</m:t>
+                          </m:r>
+                          <m:r>
+                            <m:rPr>
+                              <m:sty m:val="p"/>
+                            </m:rPr>
+                            <m:t>r</m:t>
+                          </m:r>
+                          <m:r>
+                            <m:rPr>
+                              <m:sty m:val="p"/>
+                            </m:rPr>
+                            <m:t>r</m:t>
                           </m:r>
                         </m:e>
                       </m:d>
@@ -3650,7 +3698,19 @@
                             <m:rPr>
                               <m:sty m:val="p"/>
                             </m:rPr>
-                            <m:t>Cov</m:t>
+                            <m:t>C</m:t>
+                          </m:r>
+                          <m:r>
+                            <m:rPr>
+                              <m:sty m:val="p"/>
+                            </m:rPr>
+                            <m:t>o</m:t>
+                          </m:r>
+                          <m:r>
+                            <m:rPr>
+                              <m:sty m:val="p"/>
+                            </m:rPr>
+                            <m:t>v</m:t>
                           </m:r>
                         </m:e>
                       </m:nary>
@@ -3979,7 +4039,19 @@
                         <m:rPr>
                           <m:sty m:val="p"/>
                         </m:rPr>
-                        <m:t>err</m:t>
+                        <m:t>e</m:t>
+                      </m:r>
+                      <m:r>
+                        <m:rPr>
+                          <m:sty m:val="p"/>
+                        </m:rPr>
+                        <m:t>r</m:t>
+                      </m:r>
+                      <m:r>
+                        <m:rPr>
+                          <m:sty m:val="p"/>
+                        </m:rPr>
+                        <m:t>r</m:t>
                       </m:r>
                       <m:r>
                         <m:rPr>
@@ -4421,7 +4493,19 @@
                             <m:rPr>
                               <m:sty m:val="p"/>
                             </m:rPr>
-                            <m:t>Cov</m:t>
+                            <m:t>C</m:t>
+                          </m:r>
+                          <m:r>
+                            <m:rPr>
+                              <m:sty m:val="p"/>
+                            </m:rPr>
+                            <m:t>o</m:t>
+                          </m:r>
+                          <m:r>
+                            <m:rPr>
+                              <m:sty m:val="p"/>
+                            </m:rPr>
+                            <m:t>v</m:t>
                           </m:r>
                         </m:e>
                       </m:nary>
@@ -4958,7 +5042,19 @@
                       <m:rPr>
                         <m:sty m:val="p"/>
                       </m:rPr>
-                      <m:t>Err</m:t>
+                      <m:t>E</m:t>
+                    </m:r>
+                    <m:r>
+                      <m:rPr>
+                        <m:sty m:val="p"/>
+                      </m:rPr>
+                      <m:t>r</m:t>
+                    </m:r>
+                    <m:r>
+                      <m:rPr>
+                        <m:sty m:val="p"/>
+                      </m:rPr>
+                      <m:t>r</m:t>
                     </m:r>
                   </m:oMath>
                 </a14:m>
@@ -7076,7 +7172,19 @@
                                 <m:rPr>
                                   <m:sty m:val="p"/>
                                 </m:rPr>
-                                <m:t>Var</m:t>
+                                <m:t>V</m:t>
+                              </m:r>
+                              <m:r>
+                                <m:rPr>
+                                  <m:sty m:val="p"/>
+                                </m:rPr>
+                                <m:t>a</m:t>
+                              </m:r>
+                              <m:r>
+                                <m:rPr>
+                                  <m:sty m:val="p"/>
+                                </m:rPr>
+                                <m:t>r</m:t>
                               </m:r>
                               <m:d>
                                 <m:dPr>

--- a/04-bias-variance-and-cross-validation/slides.pptx
+++ b/04-bias-variance-and-cross-validation/slides.pptx
@@ -931,15 +931,15 @@
         </p:nvSpPr>
         <p:spPr>
           <a:xfrm>
-            <a:off x="722313" y="3305176"/>
-            <a:ext cx="7772400" cy="1021556"/>
+            <a:off x="722313" y="1850000"/>
+            <a:ext cx="7772400" cy="1300000"/>
           </a:xfrm>
         </p:spPr>
         <p:txBody>
           <a:bodyPr anchor="t"/>
           <a:lstStyle>
             <a:lvl1pPr algn="l">
-              <a:defRPr sz="1850" b="1" cap="all"/>
+              <a:defRPr sz="2800" b="1" cap="none"/>
             </a:lvl1pPr>
           </a:lstStyle>
           <a:p>
@@ -962,8 +962,8 @@
         </p:nvSpPr>
         <p:spPr>
           <a:xfrm>
-            <a:off x="722313" y="2180035"/>
-            <a:ext cx="7772400" cy="1125140"/>
+            <a:off x="722313" y="3250000"/>
+            <a:ext cx="7772400" cy="700000"/>
           </a:xfrm>
         </p:spPr>
         <p:txBody>
@@ -4618,8 +4618,8 @@
         </p:nvSpPr>
         <p:spPr>
           <a:xfrm>
-            <a:off x="722313" y="3305176"/>
-            <a:ext cx="7772400" cy="1021556"/>
+            <a:off x="722313" y="1850000"/>
+            <a:ext cx="7772400" cy="1300000"/>
           </a:xfrm>
         </p:spPr>
         <p:txBody>
@@ -5482,8 +5482,8 @@
         </p:nvSpPr>
         <p:spPr>
           <a:xfrm>
-            <a:off x="722313" y="3305176"/>
-            <a:ext cx="7772400" cy="1021556"/>
+            <a:off x="722313" y="1850000"/>
+            <a:ext cx="7772400" cy="1300000"/>
           </a:xfrm>
         </p:spPr>
         <p:txBody>
@@ -6345,8 +6345,8 @@
         </p:nvSpPr>
         <p:spPr>
           <a:xfrm>
-            <a:off x="722313" y="3305176"/>
-            <a:ext cx="7772400" cy="1021556"/>
+            <a:off x="722313" y="1850000"/>
+            <a:ext cx="7772400" cy="1300000"/>
           </a:xfrm>
         </p:spPr>
         <p:txBody>
@@ -6934,8 +6934,8 @@
         </p:nvSpPr>
         <p:spPr>
           <a:xfrm>
-            <a:off x="722313" y="3305176"/>
-            <a:ext cx="7772400" cy="1021556"/>
+            <a:off x="722313" y="1850000"/>
+            <a:ext cx="7772400" cy="1300000"/>
           </a:xfrm>
         </p:spPr>
         <p:txBody>
@@ -8009,8 +8009,8 @@
         </p:nvSpPr>
         <p:spPr>
           <a:xfrm>
-            <a:off x="722313" y="3305176"/>
-            <a:ext cx="7772400" cy="1021556"/>
+            <a:off x="722313" y="1850000"/>
+            <a:ext cx="7772400" cy="1300000"/>
           </a:xfrm>
         </p:spPr>
         <p:txBody>

--- a/04-bias-variance-and-cross-validation/slides.pptx
+++ b/04-bias-variance-and-cross-validation/slides.pptx
@@ -31,6 +31,18 @@
     <p:sldId id="279" r:id="rId25"/>
     <p:sldId id="280" r:id="rId26"/>
     <p:sldId id="281" r:id="rId27"/>
+    <p:sldId id="282" r:id="rId28"/>
+    <p:sldId id="283" r:id="rId29"/>
+    <p:sldId id="284" r:id="rId30"/>
+    <p:sldId id="285" r:id="rId31"/>
+    <p:sldId id="286" r:id="rId32"/>
+    <p:sldId id="287" r:id="rId33"/>
+    <p:sldId id="288" r:id="rId34"/>
+    <p:sldId id="289" r:id="rId35"/>
+    <p:sldId id="290" r:id="rId36"/>
+    <p:sldId id="291" r:id="rId37"/>
+    <p:sldId id="292" r:id="rId38"/>
+    <p:sldId id="293" r:id="rId39"/>
   </p:sldIdLst>
   <p:sldSz cx="9144000" cy="5143500" type="screen16x9"/>
   <p:notesSz cx="6858000" cy="9144000"/>
@@ -3267,7 +3279,7 @@
             </a:pPr>
             <a:r>
               <a:rPr/>
-              <a:t>20 August 2026</a:t>
+              <a:t>21 August 2026</a:t>
             </a:r>
           </a:p>
         </p:txBody>
@@ -3314,7 +3326,7 @@
             </a:pPr>
             <a:r>
               <a:rPr/>
-              <a:t>How optimistic is training error?</a:t>
+              <a:t>Expected squared error at a test point</a:t>
             </a:r>
           </a:p>
         </p:txBody>
@@ -3335,3733 +3347,6 @@
             <p:txBody>
               <a:bodyPr/>
               <a:lstStyle/>
-              <a:p>
-                <a:pPr lvl="0" indent="0" marL="0">
-                  <a:buNone/>
-                </a:pPr>
-                <a:r>
-                  <a:rPr/>
-                  <a:t>Let </a:t>
-                </a:r>
-                <a14:m>
-                  <m:oMath xmlns:m="http://schemas.openxmlformats.org/officeDocument/2006/math">
-                    <m:r>
-                      <m:rPr>
-                        <m:sty m:val="p"/>
-                      </m:rPr>
-                      <m:t>e</m:t>
-                    </m:r>
-                    <m:r>
-                      <m:rPr>
-                        <m:sty m:val="p"/>
-                      </m:rPr>
-                      <m:t>r</m:t>
-                    </m:r>
-                    <m:r>
-                      <m:rPr>
-                        <m:sty m:val="p"/>
-                      </m:rPr>
-                      <m:t>r</m:t>
-                    </m:r>
-                    <m:r>
-                      <m:rPr>
-                        <m:sty m:val="p"/>
-                      </m:rPr>
-                      <m:t>=</m:t>
-                    </m:r>
-                    <m:f>
-                      <m:fPr>
-                        <m:type m:val="bar"/>
-                      </m:fPr>
-                      <m:num>
-                        <m:r>
-                          <m:t>1</m:t>
-                        </m:r>
-                      </m:num>
-                      <m:den>
-                        <m:r>
-                          <m:t>n</m:t>
-                        </m:r>
-                      </m:den>
-                    </m:f>
-                    <m:nary>
-                      <m:naryPr>
-                        <m:chr m:val="∑"/>
-                        <m:limLoc m:val="undOvr"/>
-                        <m:subHide m:val="off"/>
-                        <m:supHide m:val="on"/>
-                      </m:naryPr>
-                      <m:sub>
-                        <m:r>
-                          <m:t>i</m:t>
-                        </m:r>
-                      </m:sub>
-                      <m:sup>
-                        <m:r>
-                          <m:t>​</m:t>
-                        </m:r>
-                      </m:sup>
-                      <m:e>
-                        <m:sSup>
-                          <m:e>
-                            <m:d>
-                              <m:dPr>
-                                <m:begChr m:val="("/>
-                                <m:sepChr m:val=""/>
-                                <m:endChr m:val=")"/>
-                                <m:grow/>
-                              </m:dPr>
-                              <m:e>
-                                <m:sSub>
-                                  <m:e>
-                                    <m:r>
-                                      <m:t>y</m:t>
-                                    </m:r>
-                                  </m:e>
-                                  <m:sub>
-                                    <m:r>
-                                      <m:t>i</m:t>
-                                    </m:r>
-                                  </m:sub>
-                                </m:sSub>
-                                <m:r>
-                                  <m:rPr>
-                                    <m:sty m:val="p"/>
-                                  </m:rPr>
-                                  <m:t>−</m:t>
-                                </m:r>
-                                <m:acc>
-                                  <m:accPr>
-                                    <m:chr m:val="̂"/>
-                                  </m:accPr>
-                                  <m:e>
-                                    <m:r>
-                                      <m:t>f</m:t>
-                                    </m:r>
-                                  </m:e>
-                                </m:acc>
-                                <m:d>
-                                  <m:dPr>
-                                    <m:begChr m:val="("/>
-                                    <m:sepChr m:val=""/>
-                                    <m:endChr m:val=")"/>
-                                    <m:grow/>
-                                  </m:dPr>
-                                  <m:e>
-                                    <m:sSub>
-                                      <m:e>
-                                        <m:r>
-                                          <m:t>x</m:t>
-                                        </m:r>
-                                      </m:e>
-                                      <m:sub>
-                                        <m:r>
-                                          <m:t>i</m:t>
-                                        </m:r>
-                                      </m:sub>
-                                    </m:sSub>
-                                  </m:e>
-                                </m:d>
-                              </m:e>
-                            </m:d>
-                          </m:e>
-                          <m:sup>
-                            <m:r>
-                              <m:t>2</m:t>
-                            </m:r>
-                          </m:sup>
-                        </m:sSup>
-                      </m:e>
-                    </m:nary>
-                  </m:oMath>
-                </a14:m>
-                <a:r>
-                  <a:rPr/>
-                  <a:t> be training error and </a:t>
-                </a:r>
-                <a14:m>
-                  <m:oMath xmlns:m="http://schemas.openxmlformats.org/officeDocument/2006/math">
-                    <m:sSub>
-                      <m:e>
-                        <m:r>
-                          <m:rPr>
-                            <m:sty m:val="p"/>
-                          </m:rPr>
-                          <m:t>E</m:t>
-                        </m:r>
-                        <m:r>
-                          <m:rPr>
-                            <m:sty m:val="p"/>
-                          </m:rPr>
-                          <m:t>r</m:t>
-                        </m:r>
-                        <m:r>
-                          <m:rPr>
-                            <m:sty m:val="p"/>
-                          </m:rPr>
-                          <m:t>r</m:t>
-                        </m:r>
-                      </m:e>
-                      <m:sub>
-                        <m:r>
-                          <m:rPr>
-                            <m:nor/>
-                            <m:sty m:val="p"/>
-                          </m:rPr>
-                          <m:t>in</m:t>
-                        </m:r>
-                      </m:sub>
-                    </m:sSub>
-                  </m:oMath>
-                </a14:m>
-                <a:r>
-                  <a:rPr/>
-                  <a:t> the error on new outcomes at the </a:t>
-                </a:r>
-                <a:r>
-                  <a:rPr i="1"/>
-                  <a:t>same</a:t>
-                </a:r>
-                <a:r>
-                  <a:rPr/>
-                  <a:t> </a:t>
-                </a:r>
-                <a14:m>
-                  <m:oMath xmlns:m="http://schemas.openxmlformats.org/officeDocument/2006/math">
-                    <m:sSub>
-                      <m:e>
-                        <m:r>
-                          <m:t>x</m:t>
-                        </m:r>
-                      </m:e>
-                      <m:sub>
-                        <m:r>
-                          <m:t>i</m:t>
-                        </m:r>
-                      </m:sub>
-                    </m:sSub>
-                  </m:oMath>
-                </a14:m>
-                <a:r>
-                  <a:rPr/>
-                  <a:t>. Then</a:t>
-                </a:r>
-              </a:p>
-              <a:p>
-                <a:pPr lvl="0" indent="0" marL="0">
-                  <a:buNone/>
-                </a:pPr>
-                <a14:m>
-                  <m:oMathPara xmlns:m="http://schemas.openxmlformats.org/officeDocument/2006/math">
-                    <m:oMathParaPr>
-                      <m:jc m:val="center"/>
-                    </m:oMathParaPr>
-                    <m:oMath>
-                      <m:r>
-                        <m:rPr>
-                          <m:sty m:val="p"/>
-                          <m:scr m:val="double-struck"/>
-                        </m:rPr>
-                        <m:t>E</m:t>
-                      </m:r>
-                      <m:d>
-                        <m:dPr>
-                          <m:begChr m:val="["/>
-                          <m:sepChr m:val=""/>
-                          <m:endChr m:val="]"/>
-                          <m:grow/>
-                        </m:dPr>
-                        <m:e>
-                          <m:sSub>
-                            <m:e>
-                              <m:r>
-                                <m:rPr>
-                                  <m:sty m:val="p"/>
-                                </m:rPr>
-                                <m:t>E</m:t>
-                              </m:r>
-                              <m:r>
-                                <m:rPr>
-                                  <m:sty m:val="p"/>
-                                </m:rPr>
-                                <m:t>r</m:t>
-                              </m:r>
-                              <m:r>
-                                <m:rPr>
-                                  <m:sty m:val="p"/>
-                                </m:rPr>
-                                <m:t>r</m:t>
-                              </m:r>
-                            </m:e>
-                            <m:sub>
-                              <m:r>
-                                <m:rPr>
-                                  <m:nor/>
-                                  <m:sty m:val="p"/>
-                                </m:rPr>
-                                <m:t>in</m:t>
-                              </m:r>
-                            </m:sub>
-                          </m:sSub>
-                        </m:e>
-                      </m:d>
-                      <m:r>
-                        <m:rPr>
-                          <m:sty m:val="p"/>
-                        </m:rPr>
-                        <m:t>−</m:t>
-                      </m:r>
-                      <m:r>
-                        <m:rPr>
-                          <m:sty m:val="p"/>
-                          <m:scr m:val="double-struck"/>
-                        </m:rPr>
-                        <m:t>E</m:t>
-                      </m:r>
-                      <m:d>
-                        <m:dPr>
-                          <m:begChr m:val="["/>
-                          <m:sepChr m:val=""/>
-                          <m:endChr m:val="]"/>
-                          <m:grow/>
-                        </m:dPr>
-                        <m:e>
-                          <m:r>
-                            <m:rPr>
-                              <m:sty m:val="p"/>
-                            </m:rPr>
-                            <m:t>e</m:t>
-                          </m:r>
-                          <m:r>
-                            <m:rPr>
-                              <m:sty m:val="p"/>
-                            </m:rPr>
-                            <m:t>r</m:t>
-                          </m:r>
-                          <m:r>
-                            <m:rPr>
-                              <m:sty m:val="p"/>
-                            </m:rPr>
-                            <m:t>r</m:t>
-                          </m:r>
-                        </m:e>
-                      </m:d>
-                      <m:r>
-                        <m:rPr>
-                          <m:sty m:val="p"/>
-                        </m:rPr>
-                        <m:t>=</m:t>
-                      </m:r>
-                      <m:f>
-                        <m:fPr>
-                          <m:type m:val="bar"/>
-                        </m:fPr>
-                        <m:num>
-                          <m:r>
-                            <m:t>2</m:t>
-                          </m:r>
-                        </m:num>
-                        <m:den>
-                          <m:r>
-                            <m:t>n</m:t>
-                          </m:r>
-                        </m:den>
-                      </m:f>
-                      <m:nary>
-                        <m:naryPr>
-                          <m:chr m:val="∑"/>
-                          <m:limLoc m:val="undOvr"/>
-                          <m:subHide m:val="off"/>
-                          <m:supHide m:val="off"/>
-                        </m:naryPr>
-                        <m:sub>
-                          <m:r>
-                            <m:t>i</m:t>
-                          </m:r>
-                          <m:r>
-                            <m:rPr>
-                              <m:sty m:val="p"/>
-                            </m:rPr>
-                            <m:t>=</m:t>
-                          </m:r>
-                          <m:r>
-                            <m:t>1</m:t>
-                          </m:r>
-                        </m:sub>
-                        <m:sup>
-                          <m:r>
-                            <m:t>n</m:t>
-                          </m:r>
-                        </m:sup>
-                        <m:e>
-                          <m:r>
-                            <m:rPr>
-                              <m:sty m:val="p"/>
-                            </m:rPr>
-                            <m:t>C</m:t>
-                          </m:r>
-                          <m:r>
-                            <m:rPr>
-                              <m:sty m:val="p"/>
-                            </m:rPr>
-                            <m:t>o</m:t>
-                          </m:r>
-                          <m:r>
-                            <m:rPr>
-                              <m:sty m:val="p"/>
-                            </m:rPr>
-                            <m:t>v</m:t>
-                          </m:r>
-                        </m:e>
-                      </m:nary>
-                      <m:d>
-                        <m:dPr>
-                          <m:begChr m:val="("/>
-                          <m:sepChr m:val=""/>
-                          <m:endChr m:val=")"/>
-                          <m:grow/>
-                        </m:dPr>
-                        <m:e>
-                          <m:sSub>
-                            <m:e>
-                              <m:acc>
-                                <m:accPr>
-                                  <m:chr m:val="̂"/>
-                                </m:accPr>
-                                <m:e>
-                                  <m:r>
-                                    <m:t>y</m:t>
-                                  </m:r>
-                                </m:e>
-                              </m:acc>
-                            </m:e>
-                            <m:sub>
-                              <m:r>
-                                <m:t>i</m:t>
-                              </m:r>
-                            </m:sub>
-                          </m:sSub>
-                          <m:r>
-                            <m:rPr>
-                              <m:sty m:val="p"/>
-                            </m:rPr>
-                            <m:t>,</m:t>
-                          </m:r>
-                          <m:sSub>
-                            <m:e>
-                              <m:r>
-                                <m:t>y</m:t>
-                              </m:r>
-                            </m:e>
-                            <m:sub>
-                              <m:r>
-                                <m:t>i</m:t>
-                              </m:r>
-                            </m:sub>
-                          </m:sSub>
-                        </m:e>
-                      </m:d>
-                    </m:oMath>
-                  </m:oMathPara>
-                </a14:m>
-              </a:p>
-            </p:txBody>
-          </p:sp>
-        </mc:Choice>
-      </mc:AlternateContent>
-    </p:spTree>
-  </p:cSld>
-</p:sld>
-</file>
-
-<file path=ppt/slides/slide11.xml><?xml version="1.0" encoding="utf-8"?>
-<p:sld xmlns:a="http://schemas.openxmlformats.org/drawingml/2006/main" xmlns:r="http://schemas.openxmlformats.org/officeDocument/2006/relationships" xmlns:p="http://schemas.openxmlformats.org/presentationml/2006/main">
-  <p:cSld>
-    <p:spTree>
-      <p:nvGrpSpPr>
-        <p:cNvPr id="1" name=""/>
-        <p:cNvGrpSpPr/>
-        <p:nvPr/>
-      </p:nvGrpSpPr>
-      <p:grpSpPr>
-        <a:xfrm>
-          <a:off x="0" y="0"/>
-          <a:ext cx="0" cy="0"/>
-          <a:chOff x="0" y="0"/>
-          <a:chExt cx="0" cy="0"/>
-        </a:xfrm>
-      </p:grpSpPr>
-      <p:sp>
-        <p:nvSpPr>
-          <p:cNvPr id="2" name="Title 1"/>
-          <p:cNvSpPr>
-            <a:spLocks noGrp="1"/>
-          </p:cNvSpPr>
-          <p:nvPr>
-            <p:ph type="title"/>
-          </p:nvPr>
-        </p:nvSpPr>
-        <p:spPr/>
-        <p:txBody>
-          <a:bodyPr/>
-          <a:lstStyle/>
-          <a:p>
-            <a:pPr lvl="0" indent="0" marL="0">
-              <a:buNone/>
-            </a:pPr>
-            <a:r>
-              <a:rPr/>
-              <a:t>Read that quantity</a:t>
-            </a:r>
-          </a:p>
-        </p:txBody>
-      </p:sp>
-      <mc:AlternateContent xmlns:mc="http://schemas.openxmlformats.org/markup-compatibility/2006">
-        <mc:Choice xmlns:a14="http://schemas.microsoft.com/office/drawing/2010/main" Requires="a14">
-          <p:sp>
-            <p:nvSpPr>
-              <p:cNvPr id="3" name="Content Placeholder 2"/>
-              <p:cNvSpPr>
-                <a:spLocks noGrp="1"/>
-              </p:cNvSpPr>
-              <p:nvPr>
-                <p:ph idx="1"/>
-              </p:nvPr>
-            </p:nvSpPr>
-            <p:spPr/>
-            <p:txBody>
-              <a:bodyPr/>
-              <a:lstStyle/>
-              <a:p>
-                <a:pPr lvl="0" indent="0" marL="0">
-                  <a:buNone/>
-                </a:pPr>
-                <a:r>
-                  <a:rPr/>
-                  <a:t>The </a:t>
-                </a:r>
-                <a:r>
-                  <a:rPr b="1"/>
-                  <a:t>optimism</a:t>
-                </a:r>
-                <a:r>
-                  <a:rPr/>
-                  <a:t> is exactly twice the average covariance between a fitted value and its own outcome — </a:t>
-                </a:r>
-                <a:r>
-                  <a:rPr i="1"/>
-                  <a:t>the degree to which the model chases its own training labels.</a:t>
-                </a:r>
-              </a:p>
-              <a:p>
-                <a:pPr lvl="0" indent="0" marL="0">
-                  <a:buNone/>
-                </a:pPr>
-                <a:r>
-                  <a:rPr/>
-                  <a:t>For a linear fit with </a:t>
-                </a:r>
-                <a14:m>
-                  <m:oMath xmlns:m="http://schemas.openxmlformats.org/officeDocument/2006/math">
-                    <m:r>
-                      <m:t>p</m:t>
-                    </m:r>
-                  </m:oMath>
-                </a14:m>
-                <a:r>
-                  <a:rPr/>
-                  <a:t> parameters that covariance sum equals </a:t>
-                </a:r>
-                <a14:m>
-                  <m:oMath xmlns:m="http://schemas.openxmlformats.org/officeDocument/2006/math">
-                    <m:r>
-                      <m:t>p</m:t>
-                    </m:r>
-                    <m:sSup>
-                      <m:e>
-                        <m:r>
-                          <m:t>σ</m:t>
-                        </m:r>
-                      </m:e>
-                      <m:sup>
-                        <m:r>
-                          <m:t>2</m:t>
-                        </m:r>
-                      </m:sup>
-                    </m:sSup>
-                  </m:oMath>
-                </a14:m>
-                <a:r>
-                  <a:rPr/>
-                  <a:t>, giving optimism</a:t>
-                </a:r>
-              </a:p>
-              <a:p>
-                <a:pPr lvl="0" indent="0" marL="0">
-                  <a:buNone/>
-                </a:pPr>
-                <a14:m>
-                  <m:oMathPara xmlns:m="http://schemas.openxmlformats.org/officeDocument/2006/math">
-                    <m:oMathParaPr>
-                      <m:jc m:val="center"/>
-                    </m:oMathParaPr>
-                    <m:oMath>
-                      <m:f>
-                        <m:fPr>
-                          <m:type m:val="bar"/>
-                        </m:fPr>
-                        <m:num>
-                          <m:r>
-                            <m:t>2</m:t>
-                          </m:r>
-                          <m:r>
-                            <m:t>p</m:t>
-                          </m:r>
-                          <m:sSup>
-                            <m:e>
-                              <m:r>
-                                <m:t>σ</m:t>
-                              </m:r>
-                            </m:e>
-                            <m:sup>
-                              <m:r>
-                                <m:t>2</m:t>
-                              </m:r>
-                            </m:sup>
-                          </m:sSup>
-                        </m:num>
-                        <m:den>
-                          <m:r>
-                            <m:t>n</m:t>
-                          </m:r>
-                        </m:den>
-                      </m:f>
-                    </m:oMath>
-                  </m:oMathPara>
-                </a14:m>
-              </a:p>
-            </p:txBody>
-          </p:sp>
-        </mc:Choice>
-      </mc:AlternateContent>
-    </p:spTree>
-  </p:cSld>
-</p:sld>
-</file>
-
-<file path=ppt/slides/slide12.xml><?xml version="1.0" encoding="utf-8"?>
-<p:sld xmlns:a="http://schemas.openxmlformats.org/drawingml/2006/main" xmlns:r="http://schemas.openxmlformats.org/officeDocument/2006/relationships" xmlns:p="http://schemas.openxmlformats.org/presentationml/2006/main">
-  <p:cSld>
-    <p:spTree>
-      <p:nvGrpSpPr>
-        <p:cNvPr id="1" name=""/>
-        <p:cNvGrpSpPr/>
-        <p:nvPr/>
-      </p:nvGrpSpPr>
-      <p:grpSpPr>
-        <a:xfrm>
-          <a:off x="0" y="0"/>
-          <a:ext cx="0" cy="0"/>
-          <a:chOff x="0" y="0"/>
-          <a:chExt cx="0" cy="0"/>
-        </a:xfrm>
-      </p:grpSpPr>
-      <p:sp>
-        <p:nvSpPr>
-          <p:cNvPr id="2" name="Title 1"/>
-          <p:cNvSpPr>
-            <a:spLocks noGrp="1"/>
-          </p:cNvSpPr>
-          <p:nvPr>
-            <p:ph type="title"/>
-          </p:nvPr>
-        </p:nvSpPr>
-        <p:spPr/>
-        <p:txBody>
-          <a:bodyPr/>
-          <a:lstStyle/>
-          <a:p>
-            <a:pPr lvl="0" indent="0" marL="0">
-              <a:buNone/>
-            </a:pPr>
-            <a:r>
-              <a:rPr/>
-              <a:t>Which motivates the classical criteria</a:t>
-            </a:r>
-          </a:p>
-        </p:txBody>
-      </p:sp>
-      <mc:AlternateContent xmlns:mc="http://schemas.openxmlformats.org/markup-compatibility/2006">
-        <mc:Choice xmlns:a14="http://schemas.microsoft.com/office/drawing/2010/main" Requires="a14">
-          <p:sp>
-            <p:nvSpPr>
-              <p:cNvPr id="3" name="Content Placeholder 2"/>
-              <p:cNvSpPr>
-                <a:spLocks noGrp="1"/>
-              </p:cNvSpPr>
-              <p:nvPr>
-                <p:ph idx="1"/>
-              </p:nvPr>
-            </p:nvSpPr>
-            <p:spPr/>
-            <p:txBody>
-              <a:bodyPr/>
-              <a:lstStyle/>
-              <a:p>
-                <a:pPr lvl="0" indent="0" marL="0">
-                  <a:buNone/>
-                </a:pPr>
-                <a14:m>
-                  <m:oMathPara xmlns:m="http://schemas.openxmlformats.org/officeDocument/2006/math">
-                    <m:oMathParaPr>
-                      <m:jc m:val="center"/>
-                    </m:oMathParaPr>
-                    <m:oMath>
-                      <m:sSub>
-                        <m:e>
-                          <m:r>
-                            <m:t>C</m:t>
-                          </m:r>
-                        </m:e>
-                        <m:sub>
-                          <m:r>
-                            <m:t>p</m:t>
-                          </m:r>
-                        </m:sub>
-                      </m:sSub>
-                      <m:r>
-                        <m:rPr>
-                          <m:sty m:val="p"/>
-                        </m:rPr>
-                        <m:t>=</m:t>
-                      </m:r>
-                      <m:r>
-                        <m:rPr>
-                          <m:sty m:val="p"/>
-                        </m:rPr>
-                        <m:t>e</m:t>
-                      </m:r>
-                      <m:r>
-                        <m:rPr>
-                          <m:sty m:val="p"/>
-                        </m:rPr>
-                        <m:t>r</m:t>
-                      </m:r>
-                      <m:r>
-                        <m:rPr>
-                          <m:sty m:val="p"/>
-                        </m:rPr>
-                        <m:t>r</m:t>
-                      </m:r>
-                      <m:r>
-                        <m:rPr>
-                          <m:sty m:val="p"/>
-                        </m:rPr>
-                        <m:t>+</m:t>
-                      </m:r>
-                      <m:f>
-                        <m:fPr>
-                          <m:type m:val="bar"/>
-                        </m:fPr>
-                        <m:num>
-                          <m:r>
-                            <m:t>2</m:t>
-                          </m:r>
-                          <m:r>
-                            <m:t>p</m:t>
-                          </m:r>
-                          <m:sSup>
-                            <m:e>
-                              <m:acc>
-                                <m:accPr>
-                                  <m:chr m:val="̂"/>
-                                </m:accPr>
-                                <m:e>
-                                  <m:r>
-                                    <m:t>σ</m:t>
-                                  </m:r>
-                                </m:e>
-                              </m:acc>
-                            </m:e>
-                            <m:sup>
-                              <m:r>
-                                <m:t>2</m:t>
-                              </m:r>
-                            </m:sup>
-                          </m:sSup>
-                        </m:num>
-                        <m:den>
-                          <m:r>
-                            <m:t>n</m:t>
-                          </m:r>
-                        </m:den>
-                      </m:f>
-                    </m:oMath>
-                  </m:oMathPara>
-                </a14:m>
-              </a:p>
-              <a:p>
-                <a:pPr lvl="0" indent="0" marL="0">
-                  <a:buNone/>
-                </a:pPr>
-                <a14:m>
-                  <m:oMathPara xmlns:m="http://schemas.openxmlformats.org/officeDocument/2006/math">
-                    <m:oMathParaPr>
-                      <m:jc m:val="center"/>
-                    </m:oMathParaPr>
-                    <m:oMath>
-                      <m:r>
-                        <m:rPr>
-                          <m:sty m:val="p"/>
-                        </m:rPr>
-                        <m:t>A</m:t>
-                      </m:r>
-                      <m:r>
-                        <m:rPr>
-                          <m:sty m:val="p"/>
-                        </m:rPr>
-                        <m:t>I</m:t>
-                      </m:r>
-                      <m:r>
-                        <m:rPr>
-                          <m:sty m:val="p"/>
-                        </m:rPr>
-                        <m:t>C</m:t>
-                      </m:r>
-                      <m:r>
-                        <m:rPr>
-                          <m:sty m:val="p"/>
-                        </m:rPr>
-                        <m:t>=</m:t>
-                      </m:r>
-                      <m:r>
-                        <m:rPr>
-                          <m:sty m:val="p"/>
-                        </m:rPr>
-                        <m:t>−</m:t>
-                      </m:r>
-                      <m:f>
-                        <m:fPr>
-                          <m:type m:val="bar"/>
-                        </m:fPr>
-                        <m:num>
-                          <m:r>
-                            <m:t>2</m:t>
-                          </m:r>
-                        </m:num>
-                        <m:den>
-                          <m:r>
-                            <m:t>n</m:t>
-                          </m:r>
-                        </m:den>
-                      </m:f>
-                      <m:r>
-                        <m:rPr>
-                          <m:sty m:val="p"/>
-                        </m:rPr>
-                        <m:t>log</m:t>
-                      </m:r>
-                      <m:r>
-                        <m:rPr>
-                          <m:sty m:val="p"/>
-                          <m:scr m:val="script"/>
-                        </m:rPr>
-                        <m:t>L</m:t>
-                      </m:r>
-                      <m:r>
-                        <m:rPr>
-                          <m:sty m:val="p"/>
-                        </m:rPr>
-                        <m:t>+</m:t>
-                      </m:r>
-                      <m:f>
-                        <m:fPr>
-                          <m:type m:val="bar"/>
-                        </m:fPr>
-                        <m:num>
-                          <m:r>
-                            <m:t>2</m:t>
-                          </m:r>
-                          <m:r>
-                            <m:t>p</m:t>
-                          </m:r>
-                        </m:num>
-                        <m:den>
-                          <m:r>
-                            <m:t>n</m:t>
-                          </m:r>
-                        </m:den>
-                      </m:f>
-                      <m:r>
-                        <m:rPr>
-                          <m:sty m:val="p"/>
-                        </m:rPr>
-                        <m:t>,</m:t>
-                      </m:r>
-                      <m:r>
-                        <m:t>  </m:t>
-                      </m:r>
-                      <m:r>
-                        <m:rPr>
-                          <m:sty m:val="p"/>
-                        </m:rPr>
-                        <m:t>B</m:t>
-                      </m:r>
-                      <m:r>
-                        <m:rPr>
-                          <m:sty m:val="p"/>
-                        </m:rPr>
-                        <m:t>I</m:t>
-                      </m:r>
-                      <m:r>
-                        <m:rPr>
-                          <m:sty m:val="p"/>
-                        </m:rPr>
-                        <m:t>C</m:t>
-                      </m:r>
-                      <m:r>
-                        <m:rPr>
-                          <m:sty m:val="p"/>
-                        </m:rPr>
-                        <m:t>=</m:t>
-                      </m:r>
-                      <m:r>
-                        <m:rPr>
-                          <m:sty m:val="p"/>
-                        </m:rPr>
-                        <m:t>−</m:t>
-                      </m:r>
-                      <m:r>
-                        <m:t>2</m:t>
-                      </m:r>
-                      <m:r>
-                        <m:rPr>
-                          <m:sty m:val="p"/>
-                        </m:rPr>
-                        <m:t>log</m:t>
-                      </m:r>
-                      <m:r>
-                        <m:rPr>
-                          <m:sty m:val="p"/>
-                          <m:scr m:val="script"/>
-                        </m:rPr>
-                        <m:t>L</m:t>
-                      </m:r>
-                      <m:r>
-                        <m:rPr>
-                          <m:sty m:val="p"/>
-                        </m:rPr>
-                        <m:t>+</m:t>
-                      </m:r>
-                      <m:r>
-                        <m:t>p</m:t>
-                      </m:r>
-                      <m:r>
-                        <m:rPr>
-                          <m:sty m:val="p"/>
-                        </m:rPr>
-                        <m:t>log</m:t>
-                      </m:r>
-                      <m:r>
-                        <m:t>n</m:t>
-                      </m:r>
-                    </m:oMath>
-                  </m:oMathPara>
-                </a14:m>
-              </a:p>
-              <a:p>
-                <a:pPr lvl="0" indent="0" marL="0">
-                  <a:buNone/>
-                </a:pPr>
-                <a:r>
-                  <a:rPr/>
-                  <a:t>BIC penalises more heavily once </a:t>
-                </a:r>
-                <a14:m>
-                  <m:oMath xmlns:m="http://schemas.openxmlformats.org/officeDocument/2006/math">
-                    <m:r>
-                      <m:t>n</m:t>
-                    </m:r>
-                    <m:r>
-                      <m:rPr>
-                        <m:sty m:val="p"/>
-                      </m:rPr>
-                      <m:t>&gt;</m:t>
-                    </m:r>
-                    <m:sSup>
-                      <m:e>
-                        <m:r>
-                          <m:t>e</m:t>
-                        </m:r>
-                      </m:e>
-                      <m:sup>
-                        <m:r>
-                          <m:t>2</m:t>
-                        </m:r>
-                      </m:sup>
-                    </m:sSup>
-                    <m:r>
-                      <m:rPr>
-                        <m:sty m:val="p"/>
-                      </m:rPr>
-                      <m:t>≈</m:t>
-                    </m:r>
-                    <m:r>
-                      <m:t>7.4</m:t>
-                    </m:r>
-                  </m:oMath>
-                </a14:m>
-                <a:r>
-                  <a:rPr/>
-                  <a:t>. It is </a:t>
-                </a:r>
-                <a:r>
-                  <a:rPr b="1"/>
-                  <a:t>consistent for model selection</a:t>
-                </a:r>
-                <a:r>
-                  <a:rPr/>
-                  <a:t>; AIC is </a:t>
-                </a:r>
-                <a:r>
-                  <a:rPr b="1"/>
-                  <a:t>efficient for prediction</a:t>
-                </a:r>
-                <a:r>
-                  <a:rPr/>
-                  <a:t>. They answer different questions.</a:t>
-                </a:r>
-              </a:p>
-            </p:txBody>
-          </p:sp>
-        </mc:Choice>
-      </mc:AlternateContent>
-    </p:spTree>
-  </p:cSld>
-</p:sld>
-</file>
-
-<file path=ppt/slides/slide13.xml><?xml version="1.0" encoding="utf-8"?>
-<p:sld xmlns:a="http://schemas.openxmlformats.org/drawingml/2006/main" xmlns:r="http://schemas.openxmlformats.org/officeDocument/2006/relationships" xmlns:p="http://schemas.openxmlformats.org/presentationml/2006/main">
-  <p:cSld>
-    <p:spTree>
-      <p:nvGrpSpPr>
-        <p:cNvPr id="1" name=""/>
-        <p:cNvGrpSpPr/>
-        <p:nvPr/>
-      </p:nvGrpSpPr>
-      <p:grpSpPr>
-        <a:xfrm>
-          <a:off x="0" y="0"/>
-          <a:ext cx="0" cy="0"/>
-          <a:chOff x="0" y="0"/>
-          <a:chExt cx="0" cy="0"/>
-        </a:xfrm>
-      </p:grpSpPr>
-      <p:sp>
-        <p:nvSpPr>
-          <p:cNvPr id="2" name="Title 1"/>
-          <p:cNvSpPr>
-            <a:spLocks noGrp="1"/>
-          </p:cNvSpPr>
-          <p:nvPr>
-            <p:ph type="title"/>
-          </p:nvPr>
-        </p:nvSpPr>
-        <p:spPr/>
-        <p:txBody>
-          <a:bodyPr/>
-          <a:lstStyle/>
-          <a:p>
-            <a:pPr lvl="0" indent="0" marL="0">
-              <a:buNone/>
-            </a:pPr>
-            <a:r>
-              <a:rPr/>
-              <a:t>Effective degrees of freedom</a:t>
-            </a:r>
-          </a:p>
-        </p:txBody>
-      </p:sp>
-      <mc:AlternateContent xmlns:mc="http://schemas.openxmlformats.org/markup-compatibility/2006">
-        <mc:Choice xmlns:a14="http://schemas.microsoft.com/office/drawing/2010/main" Requires="a14">
-          <p:sp>
-            <p:nvSpPr>
-              <p:cNvPr id="3" name="Content Placeholder 2"/>
-              <p:cNvSpPr>
-                <a:spLocks noGrp="1"/>
-              </p:cNvSpPr>
-              <p:nvPr>
-                <p:ph idx="1"/>
-              </p:nvPr>
-            </p:nvSpPr>
-            <p:spPr/>
-            <p:txBody>
-              <a:bodyPr/>
-              <a:lstStyle/>
-              <a:p>
-                <a:pPr lvl="0" indent="0" marL="0">
-                  <a:buNone/>
-                </a:pPr>
-                <a14:m>
-                  <m:oMathPara xmlns:m="http://schemas.openxmlformats.org/officeDocument/2006/math">
-                    <m:oMathParaPr>
-                      <m:jc m:val="center"/>
-                    </m:oMathParaPr>
-                    <m:oMath>
-                      <m:r>
-                        <m:rPr>
-                          <m:sty m:val="p"/>
-                        </m:rPr>
-                        <m:t>d</m:t>
-                      </m:r>
-                      <m:r>
-                        <m:rPr>
-                          <m:sty m:val="p"/>
-                        </m:rPr>
-                        <m:t>f</m:t>
-                      </m:r>
-                      <m:d>
-                        <m:dPr>
-                          <m:begChr m:val="("/>
-                          <m:sepChr m:val=""/>
-                          <m:endChr m:val=")"/>
-                          <m:grow/>
-                        </m:dPr>
-                        <m:e>
-                          <m:acc>
-                            <m:accPr>
-                              <m:chr m:val="̂"/>
-                            </m:accPr>
-                            <m:e>
-                              <m:r>
-                                <m:t>f</m:t>
-                              </m:r>
-                            </m:e>
-                          </m:acc>
-                        </m:e>
-                      </m:d>
-                      <m:r>
-                        <m:rPr>
-                          <m:sty m:val="p"/>
-                        </m:rPr>
-                        <m:t>=</m:t>
-                      </m:r>
-                      <m:f>
-                        <m:fPr>
-                          <m:type m:val="bar"/>
-                        </m:fPr>
-                        <m:num>
-                          <m:r>
-                            <m:t>1</m:t>
-                          </m:r>
-                        </m:num>
-                        <m:den>
-                          <m:sSup>
-                            <m:e>
-                              <m:r>
-                                <m:t>σ</m:t>
-                              </m:r>
-                            </m:e>
-                            <m:sup>
-                              <m:r>
-                                <m:t>2</m:t>
-                              </m:r>
-                            </m:sup>
-                          </m:sSup>
-                        </m:den>
-                      </m:f>
-                      <m:nary>
-                        <m:naryPr>
-                          <m:chr m:val="∑"/>
-                          <m:limLoc m:val="undOvr"/>
-                          <m:subHide m:val="off"/>
-                          <m:supHide m:val="on"/>
-                        </m:naryPr>
-                        <m:sub>
-                          <m:r>
-                            <m:t>i</m:t>
-                          </m:r>
-                        </m:sub>
-                        <m:sup>
-                          <m:r>
-                            <m:t>​</m:t>
-                          </m:r>
-                        </m:sup>
-                        <m:e>
-                          <m:r>
-                            <m:rPr>
-                              <m:sty m:val="p"/>
-                            </m:rPr>
-                            <m:t>C</m:t>
-                          </m:r>
-                          <m:r>
-                            <m:rPr>
-                              <m:sty m:val="p"/>
-                            </m:rPr>
-                            <m:t>o</m:t>
-                          </m:r>
-                          <m:r>
-                            <m:rPr>
-                              <m:sty m:val="p"/>
-                            </m:rPr>
-                            <m:t>v</m:t>
-                          </m:r>
-                        </m:e>
-                      </m:nary>
-                      <m:d>
-                        <m:dPr>
-                          <m:begChr m:val="("/>
-                          <m:sepChr m:val=""/>
-                          <m:endChr m:val=")"/>
-                          <m:grow/>
-                        </m:dPr>
-                        <m:e>
-                          <m:sSub>
-                            <m:e>
-                              <m:acc>
-                                <m:accPr>
-                                  <m:chr m:val="̂"/>
-                                </m:accPr>
-                                <m:e>
-                                  <m:r>
-                                    <m:t>y</m:t>
-                                  </m:r>
-                                </m:e>
-                              </m:acc>
-                            </m:e>
-                            <m:sub>
-                              <m:r>
-                                <m:t>i</m:t>
-                              </m:r>
-                            </m:sub>
-                          </m:sSub>
-                          <m:r>
-                            <m:rPr>
-                              <m:sty m:val="p"/>
-                            </m:rPr>
-                            <m:t>,</m:t>
-                          </m:r>
-                          <m:sSub>
-                            <m:e>
-                              <m:r>
-                                <m:t>y</m:t>
-                              </m:r>
-                            </m:e>
-                            <m:sub>
-                              <m:r>
-                                <m:t>i</m:t>
-                              </m:r>
-                            </m:sub>
-                          </m:sSub>
-                        </m:e>
-                      </m:d>
-                    </m:oMath>
-                  </m:oMathPara>
-                </a14:m>
-              </a:p>
-              <a:p>
-                <a:pPr lvl="0" indent="0" marL="0">
-                  <a:buNone/>
-                </a:pPr>
-                <a:r>
-                  <a:rPr/>
-                  <a:t>This generalises “number of parameters” to methods where counting parameters makes no sense — which we need from Session 05 onward, where a penalty makes </a:t>
-                </a:r>
-                <a14:m>
-                  <m:oMath xmlns:m="http://schemas.openxmlformats.org/officeDocument/2006/math">
-                    <m:r>
-                      <m:t>p</m:t>
-                    </m:r>
-                  </m:oMath>
-                </a14:m>
-                <a:r>
-                  <a:rPr/>
-                  <a:t> meaningless.</a:t>
-                </a:r>
-              </a:p>
-            </p:txBody>
-          </p:sp>
-        </mc:Choice>
-      </mc:AlternateContent>
-    </p:spTree>
-  </p:cSld>
-</p:sld>
-</file>
-
-<file path=ppt/slides/slide14.xml><?xml version="1.0" encoding="utf-8"?>
-<p:sld xmlns:a="http://schemas.openxmlformats.org/drawingml/2006/main" xmlns:r="http://schemas.openxmlformats.org/officeDocument/2006/relationships" xmlns:p="http://schemas.openxmlformats.org/presentationml/2006/main">
-  <p:cSld>
-    <p:spTree>
-      <p:nvGrpSpPr>
-        <p:cNvPr id="1" name=""/>
-        <p:cNvGrpSpPr/>
-        <p:nvPr/>
-      </p:nvGrpSpPr>
-      <p:grpSpPr>
-        <a:xfrm>
-          <a:off x="0" y="0"/>
-          <a:ext cx="0" cy="0"/>
-          <a:chOff x="0" y="0"/>
-          <a:chExt cx="0" cy="0"/>
-        </a:xfrm>
-      </p:grpSpPr>
-      <p:sp>
-        <p:nvSpPr>
-          <p:cNvPr id="2" name="Title 1"/>
-          <p:cNvSpPr>
-            <a:spLocks noGrp="1"/>
-          </p:cNvSpPr>
-          <p:nvPr>
-            <p:ph type="title"/>
-          </p:nvPr>
-        </p:nvSpPr>
-        <p:spPr>
-          <a:xfrm>
-            <a:off x="722313" y="1850000"/>
-            <a:ext cx="7772400" cy="1300000"/>
-          </a:xfrm>
-        </p:spPr>
-        <p:txBody>
-          <a:bodyPr/>
-          <a:lstStyle/>
-          <a:p>
-            <a:pPr lvl="0" indent="0" marL="0">
-              <a:buNone/>
-            </a:pPr>
-            <a:r>
-              <a:rPr/>
-              <a:t>4.3 Cross-validation</a:t>
-            </a:r>
-          </a:p>
-        </p:txBody>
-      </p:sp>
-    </p:spTree>
-  </p:cSld>
-</p:sld>
-</file>
-
-<file path=ppt/slides/slide15.xml><?xml version="1.0" encoding="utf-8"?>
-<p:sld xmlns:a="http://schemas.openxmlformats.org/drawingml/2006/main" xmlns:r="http://schemas.openxmlformats.org/officeDocument/2006/relationships" xmlns:p="http://schemas.openxmlformats.org/presentationml/2006/main">
-  <p:cSld>
-    <p:spTree>
-      <p:nvGrpSpPr>
-        <p:cNvPr id="1" name=""/>
-        <p:cNvGrpSpPr/>
-        <p:nvPr/>
-      </p:nvGrpSpPr>
-      <p:grpSpPr>
-        <a:xfrm>
-          <a:off x="0" y="0"/>
-          <a:ext cx="0" cy="0"/>
-          <a:chOff x="0" y="0"/>
-          <a:chExt cx="0" cy="0"/>
-        </a:xfrm>
-      </p:grpSpPr>
-      <p:sp>
-        <p:nvSpPr>
-          <p:cNvPr id="2" name="Title 1"/>
-          <p:cNvSpPr>
-            <a:spLocks noGrp="1"/>
-          </p:cNvSpPr>
-          <p:nvPr>
-            <p:ph type="title"/>
-          </p:nvPr>
-        </p:nvSpPr>
-        <p:spPr/>
-        <p:txBody>
-          <a:bodyPr/>
-          <a:lstStyle/>
-          <a:p>
-            <a:pPr lvl="0" indent="0" marL="0">
-              <a:buNone/>
-            </a:pPr>
-            <a:r>
-              <a:rPr/>
-              <a:t>The estimator</a:t>
-            </a:r>
-          </a:p>
-        </p:txBody>
-      </p:sp>
-      <mc:AlternateContent xmlns:mc="http://schemas.openxmlformats.org/markup-compatibility/2006">
-        <mc:Choice xmlns:a14="http://schemas.microsoft.com/office/drawing/2010/main" Requires="a14">
-          <p:sp>
-            <p:nvSpPr>
-              <p:cNvPr id="3" name="Content Placeholder 2"/>
-              <p:cNvSpPr>
-                <a:spLocks noGrp="1"/>
-              </p:cNvSpPr>
-              <p:nvPr>
-                <p:ph idx="1"/>
-              </p:nvPr>
-            </p:nvSpPr>
-            <p:spPr/>
-            <p:txBody>
-              <a:bodyPr/>
-              <a:lstStyle/>
-              <a:p>
-                <a:pPr lvl="0" indent="0" marL="0">
-                  <a:buNone/>
-                </a:pPr>
-                <a:r>
-                  <a:rPr/>
-                  <a:t>Partition into </a:t>
-                </a:r>
-                <a14:m>
-                  <m:oMath xmlns:m="http://schemas.openxmlformats.org/officeDocument/2006/math">
-                    <m:r>
-                      <m:t>K</m:t>
-                    </m:r>
-                  </m:oMath>
-                </a14:m>
-                <a:r>
-                  <a:rPr/>
-                  <a:t> folds; for each </a:t>
-                </a:r>
-                <a14:m>
-                  <m:oMath xmlns:m="http://schemas.openxmlformats.org/officeDocument/2006/math">
-                    <m:r>
-                      <m:t>k</m:t>
-                    </m:r>
-                  </m:oMath>
-                </a14:m>
-                <a:r>
-                  <a:rPr/>
-                  <a:t>, fit on the complement and predict the held-out fold:</a:t>
-                </a:r>
-              </a:p>
-              <a:p>
-                <a:pPr lvl="0" indent="0" marL="0">
-                  <a:buNone/>
-                </a:pPr>
-                <a14:m>
-                  <m:oMathPara xmlns:m="http://schemas.openxmlformats.org/officeDocument/2006/math">
-                    <m:oMathParaPr>
-                      <m:jc m:val="center"/>
-                    </m:oMathParaPr>
-                    <m:oMath>
-                      <m:sSub>
-                        <m:e>
-                          <m:r>
-                            <m:rPr>
-                              <m:sty m:val="p"/>
-                            </m:rPr>
-                            <m:t>C</m:t>
-                          </m:r>
-                          <m:r>
-                            <m:rPr>
-                              <m:sty m:val="p"/>
-                            </m:rPr>
-                            <m:t>V</m:t>
-                          </m:r>
-                        </m:e>
-                        <m:sub>
-                          <m:r>
-                            <m:t>K</m:t>
-                          </m:r>
-                        </m:sub>
-                      </m:sSub>
-                      <m:r>
-                        <m:rPr>
-                          <m:sty m:val="p"/>
-                        </m:rPr>
-                        <m:t>=</m:t>
-                      </m:r>
-                      <m:f>
-                        <m:fPr>
-                          <m:type m:val="bar"/>
-                        </m:fPr>
-                        <m:num>
-                          <m:r>
-                            <m:t>1</m:t>
-                          </m:r>
-                        </m:num>
-                        <m:den>
-                          <m:r>
-                            <m:t>n</m:t>
-                          </m:r>
-                        </m:den>
-                      </m:f>
-                      <m:nary>
-                        <m:naryPr>
-                          <m:chr m:val="∑"/>
-                          <m:limLoc m:val="undOvr"/>
-                          <m:subHide m:val="off"/>
-                          <m:supHide m:val="off"/>
-                        </m:naryPr>
-                        <m:sub>
-                          <m:r>
-                            <m:t>k</m:t>
-                          </m:r>
-                          <m:r>
-                            <m:rPr>
-                              <m:sty m:val="p"/>
-                            </m:rPr>
-                            <m:t>=</m:t>
-                          </m:r>
-                          <m:r>
-                            <m:t>1</m:t>
-                          </m:r>
-                        </m:sub>
-                        <m:sup>
-                          <m:r>
-                            <m:t>K</m:t>
-                          </m:r>
-                        </m:sup>
-                        <m:e>
-                          <m:nary>
-                            <m:naryPr>
-                              <m:chr m:val="∑"/>
-                              <m:limLoc m:val="undOvr"/>
-                              <m:subHide m:val="off"/>
-                              <m:supHide m:val="on"/>
-                            </m:naryPr>
-                            <m:sub>
-                              <m:r>
-                                <m:t>i</m:t>
-                              </m:r>
-                              <m:r>
-                                <m:rPr>
-                                  <m:sty m:val="p"/>
-                                </m:rPr>
-                                <m:t>∈</m:t>
-                              </m:r>
-                              <m:sSub>
-                                <m:e>
-                                  <m:r>
-                                    <m:rPr>
-                                      <m:sty m:val="p"/>
-                                      <m:scr m:val="script"/>
-                                    </m:rPr>
-                                    <m:t>F</m:t>
-                                  </m:r>
-                                </m:e>
-                                <m:sub>
-                                  <m:r>
-                                    <m:t>k</m:t>
-                                  </m:r>
-                                </m:sub>
-                              </m:sSub>
-                            </m:sub>
-                            <m:sup>
-                              <m:r>
-                                <m:t>​</m:t>
-                              </m:r>
-                            </m:sup>
-                            <m:e>
-                              <m:r>
-                                <m:t>L</m:t>
-                              </m:r>
-                            </m:e>
-                          </m:nary>
-                        </m:e>
-                      </m:nary>
-                      <m:d>
-                        <m:dPr>
-                          <m:begChr m:val="("/>
-                          <m:sepChr m:val=""/>
-                          <m:endChr m:val=")"/>
-                          <m:grow/>
-                        </m:dPr>
-                        <m:e>
-                          <m:sSub>
-                            <m:e>
-                              <m:r>
-                                <m:t>y</m:t>
-                              </m:r>
-                            </m:e>
-                            <m:sub>
-                              <m:r>
-                                <m:t>i</m:t>
-                              </m:r>
-                            </m:sub>
-                          </m:sSub>
-                          <m:r>
-                            <m:rPr>
-                              <m:sty m:val="p"/>
-                            </m:rPr>
-                            <m:t>,</m:t>
-                          </m:r>
-                          <m:sSup>
-                            <m:e>
-                              <m:acc>
-                                <m:accPr>
-                                  <m:chr m:val="̂"/>
-                                </m:accPr>
-                                <m:e>
-                                  <m:r>
-                                    <m:t>f</m:t>
-                                  </m:r>
-                                </m:e>
-                              </m:acc>
-                            </m:e>
-                            <m:sup>
-                              <m:r>
-                                <m:rPr>
-                                  <m:sty m:val="p"/>
-                                </m:rPr>
-                                <m:t>−</m:t>
-                              </m:r>
-                              <m:r>
-                                <m:t>k</m:t>
-                              </m:r>
-                            </m:sup>
-                          </m:sSup>
-                          <m:d>
-                            <m:dPr>
-                              <m:begChr m:val="("/>
-                              <m:sepChr m:val=""/>
-                              <m:endChr m:val=")"/>
-                              <m:grow/>
-                            </m:dPr>
-                            <m:e>
-                              <m:sSub>
-                                <m:e>
-                                  <m:r>
-                                    <m:t>x</m:t>
-                                  </m:r>
-                                </m:e>
-                                <m:sub>
-                                  <m:r>
-                                    <m:t>i</m:t>
-                                  </m:r>
-                                </m:sub>
-                              </m:sSub>
-                            </m:e>
-                          </m:d>
-                        </m:e>
-                      </m:d>
-                    </m:oMath>
-                  </m:oMathPara>
-                </a14:m>
-              </a:p>
-            </p:txBody>
-          </p:sp>
-        </mc:Choice>
-      </mc:AlternateContent>
-    </p:spTree>
-  </p:cSld>
-</p:sld>
-</file>
-
-<file path=ppt/slides/slide16.xml><?xml version="1.0" encoding="utf-8"?>
-<p:sld xmlns:a="http://schemas.openxmlformats.org/drawingml/2006/main" xmlns:r="http://schemas.openxmlformats.org/officeDocument/2006/relationships" xmlns:p="http://schemas.openxmlformats.org/presentationml/2006/main">
-  <p:cSld>
-    <p:spTree>
-      <p:nvGrpSpPr>
-        <p:cNvPr id="1" name=""/>
-        <p:cNvGrpSpPr/>
-        <p:nvPr/>
-      </p:nvGrpSpPr>
-      <p:grpSpPr>
-        <a:xfrm>
-          <a:off x="0" y="0"/>
-          <a:ext cx="0" cy="0"/>
-          <a:chOff x="0" y="0"/>
-          <a:chExt cx="0" cy="0"/>
-        </a:xfrm>
-      </p:grpSpPr>
-      <mc:AlternateContent xmlns:mc="http://schemas.openxmlformats.org/markup-compatibility/2006">
-        <mc:Choice xmlns:a14="http://schemas.microsoft.com/office/drawing/2010/main" Requires="a14">
-          <p:sp>
-            <p:nvSpPr>
-              <p:cNvPr id="2" name="Title 1"/>
-              <p:cNvSpPr>
-                <a:spLocks noGrp="1"/>
-              </p:cNvSpPr>
-              <p:nvPr>
-                <p:ph type="title"/>
-              </p:nvPr>
-            </p:nvSpPr>
-            <p:spPr/>
-            <p:txBody>
-              <a:bodyPr/>
-              <a:lstStyle/>
-              <a:p>
-                <a:pPr lvl="0" indent="0" marL="0">
-                  <a:buNone/>
-                </a:pPr>
-                <a14:m>
-                  <m:oMath xmlns:m="http://schemas.openxmlformats.org/officeDocument/2006/math">
-                    <m:r>
-                      <m:t>K</m:t>
-                    </m:r>
-                    <m:r>
-                      <m:rPr>
-                        <m:sty m:val="p"/>
-                      </m:rPr>
-                      <m:t>=</m:t>
-                    </m:r>
-                    <m:r>
-                      <m:t>n</m:t>
-                    </m:r>
-                  </m:oMath>
-                </a14:m>
-                <a:r>
-                  <a:rPr/>
-                  <a:t> — leave-one-out</a:t>
-                </a:r>
-              </a:p>
-            </p:txBody>
-          </p:sp>
-        </mc:Choice>
-      </mc:AlternateContent>
-      <mc:AlternateContent xmlns:mc="http://schemas.openxmlformats.org/markup-compatibility/2006">
-        <mc:Choice xmlns:a14="http://schemas.microsoft.com/office/drawing/2010/main" Requires="a14">
-          <p:sp>
-            <p:nvSpPr>
-              <p:cNvPr id="3" name="Content Placeholder 2"/>
-              <p:cNvSpPr>
-                <a:spLocks noGrp="1"/>
-              </p:cNvSpPr>
-              <p:nvPr>
-                <p:ph idx="1"/>
-              </p:nvPr>
-            </p:nvSpPr>
-            <p:spPr/>
-            <p:txBody>
-              <a:bodyPr/>
-              <a:lstStyle/>
-              <a:p>
-                <a:pPr lvl="0"/>
-                <a:r>
-                  <a:rPr/>
-                  <a:t>Nearly </a:t>
-                </a:r>
-                <a:r>
-                  <a:rPr b="1"/>
-                  <a:t>unbiased</a:t>
-                </a:r>
-                <a:r>
-                  <a:rPr/>
-                  <a:t> for </a:t>
-                </a:r>
-                <a14:m>
-                  <m:oMath xmlns:m="http://schemas.openxmlformats.org/officeDocument/2006/math">
-                    <m:r>
-                      <m:rPr>
-                        <m:sty m:val="p"/>
-                      </m:rPr>
-                      <m:t>E</m:t>
-                    </m:r>
-                    <m:r>
-                      <m:rPr>
-                        <m:sty m:val="p"/>
-                      </m:rPr>
-                      <m:t>r</m:t>
-                    </m:r>
-                    <m:r>
-                      <m:rPr>
-                        <m:sty m:val="p"/>
-                      </m:rPr>
-                      <m:t>r</m:t>
-                    </m:r>
-                  </m:oMath>
-                </a14:m>
-              </a:p>
-              <a:p>
-                <a:pPr lvl="0"/>
-                <a:r>
-                  <a:rPr b="1"/>
-                  <a:t>High variance</a:t>
-                </a:r>
-                <a:r>
-                  <a:rPr/>
-                  <a:t> — the </a:t>
-                </a:r>
-                <a14:m>
-                  <m:oMath xmlns:m="http://schemas.openxmlformats.org/officeDocument/2006/math">
-                    <m:r>
-                      <m:t>n</m:t>
-                    </m:r>
-                  </m:oMath>
-                </a14:m>
-                <a:r>
-                  <a:rPr/>
-                  <a:t> training sets are almost identical, so the errors are highly correlated</a:t>
-                </a:r>
-              </a:p>
-              <a:p>
-                <a:pPr lvl="0"/>
-                <a:r>
-                  <a:rPr/>
-                  <a:t>Usually expensive</a:t>
-                </a:r>
-              </a:p>
-              <a:p>
-                <a:pPr lvl="0" indent="0" marL="0">
-                  <a:buNone/>
-                </a:pPr>
-                <a:r>
-                  <a:rPr/>
-                  <a:t>For linear smoothers it is free once you have the hat matrix:</a:t>
-                </a:r>
-              </a:p>
-              <a:p>
-                <a:pPr lvl="0" indent="0" marL="0">
-                  <a:buNone/>
-                </a:pPr>
-                <a14:m>
-                  <m:oMathPara xmlns:m="http://schemas.openxmlformats.org/officeDocument/2006/math">
-                    <m:oMathParaPr>
-                      <m:jc m:val="center"/>
-                    </m:oMathParaPr>
-                    <m:oMath>
-                      <m:sSub>
-                        <m:e>
-                          <m:r>
-                            <m:rPr>
-                              <m:sty m:val="p"/>
-                            </m:rPr>
-                            <m:t>C</m:t>
-                          </m:r>
-                          <m:r>
-                            <m:rPr>
-                              <m:sty m:val="p"/>
-                            </m:rPr>
-                            <m:t>V</m:t>
-                          </m:r>
-                        </m:e>
-                        <m:sub>
-                          <m:d>
-                            <m:dPr>
-                              <m:begChr m:val="("/>
-                              <m:sepChr m:val=""/>
-                              <m:endChr m:val=")"/>
-                              <m:grow/>
-                            </m:dPr>
-                            <m:e>
-                              <m:r>
-                                <m:t>n</m:t>
-                              </m:r>
-                            </m:e>
-                          </m:d>
-                        </m:sub>
-                      </m:sSub>
-                      <m:r>
-                        <m:rPr>
-                          <m:sty m:val="p"/>
-                        </m:rPr>
-                        <m:t>=</m:t>
-                      </m:r>
-                      <m:f>
-                        <m:fPr>
-                          <m:type m:val="bar"/>
-                        </m:fPr>
-                        <m:num>
-                          <m:r>
-                            <m:t>1</m:t>
-                          </m:r>
-                        </m:num>
-                        <m:den>
-                          <m:r>
-                            <m:t>n</m:t>
-                          </m:r>
-                        </m:den>
-                      </m:f>
-                      <m:nary>
-                        <m:naryPr>
-                          <m:chr m:val="∑"/>
-                          <m:limLoc m:val="undOvr"/>
-                          <m:subHide m:val="off"/>
-                          <m:supHide m:val="on"/>
-                        </m:naryPr>
-                        <m:sub>
-                          <m:r>
-                            <m:t>i</m:t>
-                          </m:r>
-                        </m:sub>
-                        <m:sup>
-                          <m:r>
-                            <m:t>​</m:t>
-                          </m:r>
-                        </m:sup>
-                        <m:e>
-                          <m:sSup>
-                            <m:e>
-                              <m:d>
-                                <m:dPr>
-                                  <m:begChr m:val="("/>
-                                  <m:sepChr m:val=""/>
-                                  <m:endChr m:val=")"/>
-                                  <m:grow/>
-                                </m:dPr>
-                                <m:e>
-                                  <m:f>
-                                    <m:fPr>
-                                      <m:type m:val="bar"/>
-                                    </m:fPr>
-                                    <m:num>
-                                      <m:sSub>
-                                        <m:e>
-                                          <m:r>
-                                            <m:t>y</m:t>
-                                          </m:r>
-                                        </m:e>
-                                        <m:sub>
-                                          <m:r>
-                                            <m:t>i</m:t>
-                                          </m:r>
-                                        </m:sub>
-                                      </m:sSub>
-                                      <m:r>
-                                        <m:rPr>
-                                          <m:sty m:val="p"/>
-                                        </m:rPr>
-                                        <m:t>−</m:t>
-                                      </m:r>
-                                      <m:sSub>
-                                        <m:e>
-                                          <m:acc>
-                                            <m:accPr>
-                                              <m:chr m:val="̂"/>
-                                            </m:accPr>
-                                            <m:e>
-                                              <m:r>
-                                                <m:t>y</m:t>
-                                              </m:r>
-                                            </m:e>
-                                          </m:acc>
-                                        </m:e>
-                                        <m:sub>
-                                          <m:r>
-                                            <m:t>i</m:t>
-                                          </m:r>
-                                        </m:sub>
-                                      </m:sSub>
-                                    </m:num>
-                                    <m:den>
-                                      <m:r>
-                                        <m:t>1</m:t>
-                                      </m:r>
-                                      <m:r>
-                                        <m:rPr>
-                                          <m:sty m:val="p"/>
-                                        </m:rPr>
-                                        <m:t>−</m:t>
-                                      </m:r>
-                                      <m:sSub>
-                                        <m:e>
-                                          <m:r>
-                                            <m:t>h</m:t>
-                                          </m:r>
-                                        </m:e>
-                                        <m:sub>
-                                          <m:r>
-                                            <m:t>i</m:t>
-                                          </m:r>
-                                          <m:r>
-                                            <m:t>i</m:t>
-                                          </m:r>
-                                        </m:sub>
-                                      </m:sSub>
-                                    </m:den>
-                                  </m:f>
-                                </m:e>
-                              </m:d>
-                            </m:e>
-                            <m:sup>
-                              <m:r>
-                                <m:t>2</m:t>
-                              </m:r>
-                            </m:sup>
-                          </m:sSup>
-                        </m:e>
-                      </m:nary>
-                    </m:oMath>
-                  </m:oMathPara>
-                </a14:m>
-              </a:p>
-              <a:p>
-                <a:pPr lvl="0" indent="0" marL="0">
-                  <a:buNone/>
-                </a:pPr>
-                <a14:m>
-                  <m:oMath xmlns:m="http://schemas.openxmlformats.org/officeDocument/2006/math">
-                    <m:sSub>
-                      <m:e>
-                        <m:r>
-                          <m:t>h</m:t>
-                        </m:r>
-                      </m:e>
-                      <m:sub>
-                        <m:r>
-                          <m:t>i</m:t>
-                        </m:r>
-                        <m:r>
-                          <m:t>i</m:t>
-                        </m:r>
-                      </m:sub>
-                    </m:sSub>
-                  </m:oMath>
-                </a14:m>
-                <a:r>
-                  <a:rPr/>
-                  <a:t> is the leverage from Session 02. The pieces accumulate.</a:t>
-                </a:r>
-              </a:p>
-            </p:txBody>
-          </p:sp>
-        </mc:Choice>
-      </mc:AlternateContent>
-    </p:spTree>
-  </p:cSld>
-</p:sld>
-</file>
-
-<file path=ppt/slides/slide17.xml><?xml version="1.0" encoding="utf-8"?>
-<p:sld xmlns:a="http://schemas.openxmlformats.org/drawingml/2006/main" xmlns:r="http://schemas.openxmlformats.org/officeDocument/2006/relationships" xmlns:p="http://schemas.openxmlformats.org/presentationml/2006/main">
-  <p:cSld>
-    <p:spTree>
-      <p:nvGrpSpPr>
-        <p:cNvPr id="1" name=""/>
-        <p:cNvGrpSpPr/>
-        <p:nvPr/>
-      </p:nvGrpSpPr>
-      <p:grpSpPr>
-        <a:xfrm>
-          <a:off x="0" y="0"/>
-          <a:ext cx="0" cy="0"/>
-          <a:chOff x="0" y="0"/>
-          <a:chExt cx="0" cy="0"/>
-        </a:xfrm>
-      </p:grpSpPr>
-      <mc:AlternateContent xmlns:mc="http://schemas.openxmlformats.org/markup-compatibility/2006">
-        <mc:Choice xmlns:a14="http://schemas.microsoft.com/office/drawing/2010/main" Requires="a14">
-          <p:sp>
-            <p:nvSpPr>
-              <p:cNvPr id="2" name="Title 1"/>
-              <p:cNvSpPr>
-                <a:spLocks noGrp="1"/>
-              </p:cNvSpPr>
-              <p:nvPr>
-                <p:ph type="title"/>
-              </p:nvPr>
-            </p:nvSpPr>
-            <p:spPr/>
-            <p:txBody>
-              <a:bodyPr/>
-              <a:lstStyle/>
-              <a:p>
-                <a:pPr lvl="0" indent="0" marL="0">
-                  <a:buNone/>
-                </a:pPr>
-                <a14:m>
-                  <m:oMath xmlns:m="http://schemas.openxmlformats.org/officeDocument/2006/math">
-                    <m:r>
-                      <m:t>K</m:t>
-                    </m:r>
-                    <m:r>
-                      <m:rPr>
-                        <m:sty m:val="p"/>
-                      </m:rPr>
-                      <m:t>=</m:t>
-                    </m:r>
-                    <m:r>
-                      <m:t>5</m:t>
-                    </m:r>
-                  </m:oMath>
-                </a14:m>
-                <a:r>
-                  <a:rPr/>
-                  <a:t> or </a:t>
-                </a:r>
-                <a14:m>
-                  <m:oMath xmlns:m="http://schemas.openxmlformats.org/officeDocument/2006/math">
-                    <m:r>
-                      <m:t>10</m:t>
-                    </m:r>
-                  </m:oMath>
-                </a14:m>
-              </a:p>
-            </p:txBody>
-          </p:sp>
-        </mc:Choice>
-      </mc:AlternateContent>
-      <p:sp>
-        <p:nvSpPr>
-          <p:cNvPr id="3" name="Content Placeholder 2"/>
-          <p:cNvSpPr>
-            <a:spLocks noGrp="1"/>
-          </p:cNvSpPr>
-          <p:nvPr>
-            <p:ph idx="1"/>
-          </p:nvPr>
-        </p:nvSpPr>
-        <p:spPr/>
-        <p:txBody>
-          <a:bodyPr/>
-          <a:lstStyle/>
-          <a:p>
-            <a:pPr lvl="0" indent="0" marL="0">
-              <a:buNone/>
-            </a:pPr>
-            <a:r>
-              <a:rPr/>
-              <a:t>The standard compromise:</a:t>
-            </a:r>
-          </a:p>
-          <a:p>
-            <a:pPr lvl="0"/>
-            <a:r>
-              <a:rPr/>
-              <a:t>some </a:t>
-            </a:r>
-            <a:r>
-              <a:rPr b="1"/>
-              <a:t>upward bias</a:t>
-            </a:r>
-            <a:r>
-              <a:rPr/>
-              <a:t> — each model trains on less data</a:t>
-            </a:r>
-          </a:p>
-          <a:p>
-            <a:pPr lvl="0"/>
-            <a:r>
-              <a:rPr/>
-              <a:t>much </a:t>
-            </a:r>
-            <a:r>
-              <a:rPr b="1"/>
-              <a:t>lower variance</a:t>
-            </a:r>
-          </a:p>
-          <a:p>
-            <a:pPr lvl="0" indent="0" marL="0">
-              <a:buNone/>
-            </a:pPr>
-            <a:r>
-              <a:rPr/>
-              <a:t>With 30 countries, </a:t>
-            </a:r>
-            <a:r>
-              <a:rPr>
-                <a:latin typeface="Courier"/>
-              </a:rPr>
-              <a:t>GroupKFold(5)</a:t>
-            </a:r>
-            <a:r>
-              <a:rPr/>
-              <a:t> leaves six countries out per fold. Fewer folds leaves too little to train on; more makes each estimate noisy.</a:t>
-            </a:r>
-          </a:p>
-        </p:txBody>
-      </p:sp>
-    </p:spTree>
-  </p:cSld>
-</p:sld>
-</file>
-
-<file path=ppt/slides/slide18.xml><?xml version="1.0" encoding="utf-8"?>
-<p:sld xmlns:a="http://schemas.openxmlformats.org/drawingml/2006/main" xmlns:r="http://schemas.openxmlformats.org/officeDocument/2006/relationships" xmlns:p="http://schemas.openxmlformats.org/presentationml/2006/main">
-  <p:cSld>
-    <p:spTree>
-      <p:nvGrpSpPr>
-        <p:cNvPr id="1" name=""/>
-        <p:cNvGrpSpPr/>
-        <p:nvPr/>
-      </p:nvGrpSpPr>
-      <p:grpSpPr>
-        <a:xfrm>
-          <a:off x="0" y="0"/>
-          <a:ext cx="0" cy="0"/>
-          <a:chOff x="0" y="0"/>
-          <a:chExt cx="0" cy="0"/>
-        </a:xfrm>
-      </p:grpSpPr>
-      <p:sp>
-        <p:nvSpPr>
-          <p:cNvPr id="2" name="Title 1"/>
-          <p:cNvSpPr>
-            <a:spLocks noGrp="1"/>
-          </p:cNvSpPr>
-          <p:nvPr>
-            <p:ph type="title"/>
-          </p:nvPr>
-        </p:nvSpPr>
-        <p:spPr>
-          <a:xfrm>
-            <a:off x="722313" y="1850000"/>
-            <a:ext cx="7772400" cy="1300000"/>
-          </a:xfrm>
-        </p:spPr>
-        <p:txBody>
-          <a:bodyPr/>
-          <a:lstStyle/>
-          <a:p>
-            <a:pPr lvl="0" indent="0" marL="0">
-              <a:buNone/>
-            </a:pPr>
-            <a:r>
-              <a:rPr/>
-              <a:t>4.4 Three ways to get it wrong</a:t>
-            </a:r>
-          </a:p>
-        </p:txBody>
-      </p:sp>
-    </p:spTree>
-  </p:cSld>
-</p:sld>
-</file>
-
-<file path=ppt/slides/slide19.xml><?xml version="1.0" encoding="utf-8"?>
-<p:sld xmlns:a="http://schemas.openxmlformats.org/drawingml/2006/main" xmlns:r="http://schemas.openxmlformats.org/officeDocument/2006/relationships" xmlns:p="http://schemas.openxmlformats.org/presentationml/2006/main">
-  <p:cSld>
-    <p:spTree>
-      <p:nvGrpSpPr>
-        <p:cNvPr id="1" name=""/>
-        <p:cNvGrpSpPr/>
-        <p:nvPr/>
-      </p:nvGrpSpPr>
-      <p:grpSpPr>
-        <a:xfrm>
-          <a:off x="0" y="0"/>
-          <a:ext cx="0" cy="0"/>
-          <a:chOff x="0" y="0"/>
-          <a:chExt cx="0" cy="0"/>
-        </a:xfrm>
-      </p:grpSpPr>
-      <p:sp>
-        <p:nvSpPr>
-          <p:cNvPr id="2" name="Title 1"/>
-          <p:cNvSpPr>
-            <a:spLocks noGrp="1"/>
-          </p:cNvSpPr>
-          <p:nvPr>
-            <p:ph type="title"/>
-          </p:nvPr>
-        </p:nvSpPr>
-        <p:spPr/>
-        <p:txBody>
-          <a:bodyPr/>
-          <a:lstStyle/>
-          <a:p>
-            <a:pPr lvl="0" indent="0" marL="0">
-              <a:buNone/>
-            </a:pPr>
-            <a:r>
-              <a:rPr/>
-              <a:t>1. Leakage through preprocessing</a:t>
-            </a:r>
-          </a:p>
-        </p:txBody>
-      </p:sp>
-      <p:sp>
-        <p:nvSpPr>
-          <p:cNvPr id="3" name="Content Placeholder 2"/>
-          <p:cNvSpPr>
-            <a:spLocks noGrp="1"/>
-          </p:cNvSpPr>
-          <p:nvPr>
-            <p:ph idx="1"/>
-          </p:nvPr>
-        </p:nvSpPr>
-        <p:spPr/>
-        <p:txBody>
-          <a:bodyPr/>
-          <a:lstStyle/>
-          <a:p>
-            <a:pPr lvl="0" indent="0" marL="0">
-              <a:buNone/>
-            </a:pPr>
-            <a:r>
-              <a:rPr/>
-              <a:t>Any step using the outcome or the </a:t>
-            </a:r>
-            <a:r>
-              <a:rPr b="1"/>
-              <a:t>full</a:t>
-            </a:r>
-            <a:r>
-              <a:rPr/>
-              <a:t> feature distribution — standardisation, imputation, feature selection, target encoding — must be fitted </a:t>
-            </a:r>
-            <a:r>
-              <a:rPr b="1"/>
-              <a:t>inside</a:t>
-            </a:r>
-            <a:r>
-              <a:rPr/>
-              <a:t> each training fold.</a:t>
-            </a:r>
-          </a:p>
-          <a:p>
-            <a:pPr lvl="0" indent="0" marL="0">
-              <a:buNone/>
-            </a:pPr>
-            <a:r>
-              <a:rPr/>
-              <a:t>Use a </a:t>
-            </a:r>
-            <a:r>
-              <a:rPr>
-                <a:latin typeface="Courier"/>
-              </a:rPr>
-              <a:t>Pipeline</a:t>
-            </a:r>
-            <a:r>
-              <a:rPr/>
-              <a:t>.</a:t>
-            </a:r>
-          </a:p>
-          <a:p>
-            <a:pPr lvl="0" indent="0" marL="0">
-              <a:buNone/>
-            </a:pPr>
-            <a:r>
-              <a:rPr/>
-              <a:t>The single most common serious error in applied machine learning papers. It always flatters you.</a:t>
-            </a:r>
-          </a:p>
-        </p:txBody>
-      </p:sp>
-    </p:spTree>
-  </p:cSld>
-</p:sld>
-</file>
-
-<file path=ppt/slides/slide2.xml><?xml version="1.0" encoding="utf-8"?>
-<p:sld xmlns:a="http://schemas.openxmlformats.org/drawingml/2006/main" xmlns:r="http://schemas.openxmlformats.org/officeDocument/2006/relationships" xmlns:p="http://schemas.openxmlformats.org/presentationml/2006/main">
-  <p:cSld>
-    <p:spTree>
-      <p:nvGrpSpPr>
-        <p:cNvPr id="1" name=""/>
-        <p:cNvGrpSpPr/>
-        <p:nvPr/>
-      </p:nvGrpSpPr>
-      <p:grpSpPr>
-        <a:xfrm>
-          <a:off x="0" y="0"/>
-          <a:ext cx="0" cy="0"/>
-          <a:chOff x="0" y="0"/>
-          <a:chExt cx="0" cy="0"/>
-        </a:xfrm>
-      </p:grpSpPr>
-      <p:sp>
-        <p:nvSpPr>
-          <p:cNvPr id="3" name="Content Placeholder 2"/>
-          <p:cNvSpPr>
-            <a:spLocks noGrp="1"/>
-          </p:cNvSpPr>
-          <p:nvPr>
-            <p:ph idx="1"/>
-          </p:nvPr>
-        </p:nvSpPr>
-        <p:spPr/>
-        <p:txBody>
-          <a:bodyPr/>
-          <a:lstStyle/>
-          <a:p>
-            <a:pPr lvl="0" indent="0" marL="0">
-              <a:spcBef>
-                <a:spcPts val="3000"/>
-              </a:spcBef>
-              <a:buNone/>
-            </a:pPr>
-            <a:r>
-              <a:rPr b="1"/>
-              <a:t>Your model fits the past perfectly. Why is that bad news?</a:t>
-            </a:r>
-          </a:p>
-        </p:txBody>
-      </p:sp>
-    </p:spTree>
-  </p:cSld>
-</p:sld>
-</file>
-
-<file path=ppt/slides/slide20.xml><?xml version="1.0" encoding="utf-8"?>
-<p:sld xmlns:a="http://schemas.openxmlformats.org/drawingml/2006/main" xmlns:r="http://schemas.openxmlformats.org/officeDocument/2006/relationships" xmlns:p="http://schemas.openxmlformats.org/presentationml/2006/main">
-  <p:cSld>
-    <p:spTree>
-      <p:nvGrpSpPr>
-        <p:cNvPr id="1" name=""/>
-        <p:cNvGrpSpPr/>
-        <p:nvPr/>
-      </p:nvGrpSpPr>
-      <p:grpSpPr>
-        <a:xfrm>
-          <a:off x="0" y="0"/>
-          <a:ext cx="0" cy="0"/>
-          <a:chOff x="0" y="0"/>
-          <a:chExt cx="0" cy="0"/>
-        </a:xfrm>
-      </p:grpSpPr>
-      <p:sp>
-        <p:nvSpPr>
-          <p:cNvPr id="2" name="Title 1"/>
-          <p:cNvSpPr>
-            <a:spLocks noGrp="1"/>
-          </p:cNvSpPr>
-          <p:nvPr>
-            <p:ph type="title"/>
-          </p:nvPr>
-        </p:nvSpPr>
-        <p:spPr/>
-        <p:txBody>
-          <a:bodyPr/>
-          <a:lstStyle/>
-          <a:p>
-            <a:pPr lvl="0" indent="0" marL="0">
-              <a:buNone/>
-            </a:pPr>
-            <a:r>
-              <a:rPr/>
-              <a:t>2. Leakage through selection</a:t>
-            </a:r>
-          </a:p>
-        </p:txBody>
-      </p:sp>
-      <p:sp>
-        <p:nvSpPr>
-          <p:cNvPr id="3" name="Content Placeholder 2"/>
-          <p:cNvSpPr>
-            <a:spLocks noGrp="1"/>
-          </p:cNvSpPr>
-          <p:nvPr>
-            <p:ph idx="1"/>
-          </p:nvPr>
-        </p:nvSpPr>
-        <p:spPr/>
-        <p:txBody>
-          <a:bodyPr/>
-          <a:lstStyle/>
-          <a:p>
-            <a:pPr lvl="0" indent="0" marL="0">
-              <a:buNone/>
-            </a:pPr>
-            <a:r>
-              <a:rPr/>
-              <a:t>Choosing a model by CV and then reporting </a:t>
-            </a:r>
-            <a:r>
-              <a:rPr b="1"/>
-              <a:t>that same CV error</a:t>
-            </a:r>
-            <a:r>
-              <a:rPr/>
-              <a:t> as its performance is optimistic.</a:t>
-            </a:r>
-          </a:p>
-          <a:p>
-            <a:pPr lvl="0" indent="0" marL="0">
-              <a:buNone/>
-            </a:pPr>
-            <a:r>
-              <a:rPr/>
-              <a:t>You need a </a:t>
-            </a:r>
-            <a:r>
-              <a:rPr b="1"/>
-              <a:t>nested</a:t>
-            </a:r>
-            <a:r>
-              <a:rPr/>
-              <a:t> design:</a:t>
-            </a:r>
-          </a:p>
-          <a:p>
-            <a:pPr lvl="0"/>
-            <a:r>
-              <a:rPr/>
-              <a:t>an </a:t>
-            </a:r>
-            <a:r>
-              <a:rPr b="1"/>
-              <a:t>outer</a:t>
-            </a:r>
-            <a:r>
-              <a:rPr/>
-              <a:t> loop for evaluation</a:t>
-            </a:r>
-          </a:p>
-          <a:p>
-            <a:pPr lvl="0"/>
-            <a:r>
-              <a:rPr/>
-              <a:t>an </a:t>
-            </a:r>
-            <a:r>
-              <a:rPr b="1"/>
-              <a:t>inner</a:t>
-            </a:r>
-            <a:r>
-              <a:rPr/>
-              <a:t> loop for tuning</a:t>
-            </a:r>
-          </a:p>
-          <a:p>
-            <a:pPr lvl="0" indent="0" marL="0">
-              <a:buNone/>
-            </a:pPr>
-            <a:r>
-              <a:rPr/>
-              <a:t>Reporting the best inner-loop score is the same error as reporting training error, one level up.</a:t>
-            </a:r>
-          </a:p>
-        </p:txBody>
-      </p:sp>
-    </p:spTree>
-  </p:cSld>
-</p:sld>
-</file>
-
-<file path=ppt/slides/slide21.xml><?xml version="1.0" encoding="utf-8"?>
-<p:sld xmlns:a="http://schemas.openxmlformats.org/drawingml/2006/main" xmlns:r="http://schemas.openxmlformats.org/officeDocument/2006/relationships" xmlns:p="http://schemas.openxmlformats.org/presentationml/2006/main">
-  <p:cSld>
-    <p:spTree>
-      <p:nvGrpSpPr>
-        <p:cNvPr id="1" name=""/>
-        <p:cNvGrpSpPr/>
-        <p:nvPr/>
-      </p:nvGrpSpPr>
-      <p:grpSpPr>
-        <a:xfrm>
-          <a:off x="0" y="0"/>
-          <a:ext cx="0" cy="0"/>
-          <a:chOff x="0" y="0"/>
-          <a:chExt cx="0" cy="0"/>
-        </a:xfrm>
-      </p:grpSpPr>
-      <p:sp>
-        <p:nvSpPr>
-          <p:cNvPr id="2" name="Title 1"/>
-          <p:cNvSpPr>
-            <a:spLocks noGrp="1"/>
-          </p:cNvSpPr>
-          <p:nvPr>
-            <p:ph type="title"/>
-          </p:nvPr>
-        </p:nvSpPr>
-        <p:spPr>
-          <a:xfrm>
-            <a:off x="457201" y="204787"/>
-            <a:ext cx="3008313" cy="871538"/>
-          </a:xfrm>
-        </p:spPr>
-        <p:txBody>
-          <a:bodyPr/>
-          <a:lstStyle/>
-          <a:p>
-            <a:pPr lvl="0" indent="0" marL="0">
-              <a:buNone/>
-            </a:pPr>
-            <a:r>
-              <a:rPr/>
-              <a:t>3. Ignoring dependence</a:t>
-            </a:r>
-          </a:p>
-        </p:txBody>
-      </p:sp>
-      <p:sp>
-        <p:nvSpPr>
-          <p:cNvPr id="4" name="Text Placeholder 3"/>
-          <p:cNvSpPr>
-            <a:spLocks noGrp="1"/>
-          </p:cNvSpPr>
-          <p:nvPr>
-            <p:ph idx="2" sz="half" type="body"/>
-          </p:nvPr>
-        </p:nvSpPr>
-        <p:spPr/>
-        <p:txBody>
-          <a:bodyPr/>
-          <a:lstStyle/>
-          <a:p>
-            <a:pPr lvl="0" indent="0" marL="0">
-              <a:buNone/>
-            </a:pPr>
-            <a:r>
-              <a:rPr/>
-              <a:t>Random folds assume exchangeability. Economic data rarely are.</a:t>
-            </a:r>
-          </a:p>
-        </p:txBody>
-      </p:sp>
-      <p:graphicFrame>
-        <p:nvGraphicFramePr>
-          <p:cNvPr id="6" name="Content Placeholder 5"/>
-          <p:cNvGraphicFramePr>
-            <a:graphicFrameLocks noGrp="1"/>
-          </p:cNvGraphicFramePr>
-          <p:nvPr>
-            <p:ph idx="1"/>
-          </p:nvPr>
-        </p:nvGraphicFramePr>
-        <p:xfrm>
-          <a:off x="3568700" y="203200"/>
-          <a:ext cx="5105400" cy="4381500"/>
-        </p:xfrm>
-        <a:graphic>
-          <a:graphicData uri="http://schemas.openxmlformats.org/drawingml/2006/table">
-            <a:tbl>
-              <a:tblPr firstRow="1" bandRow="1">
-                <a:tableStyleId>{5C22544A-7EE6-4342-B048-85BDC9FD1C3A}</a:tableStyleId>
-              </a:tblPr>
-              <a:tblGrid>
-                <a:gridCol w="2552700"/>
-                <a:gridCol w="2552700"/>
-              </a:tblGrid>
-              <a:tr h="0">
-                <a:tc>
-                  <a:txBody>
-                    <a:bodyPr/>
-                    <a:lstStyle/>
-                    <a:p>
-                      <a:pPr lvl="0" indent="0" marL="0">
-                        <a:buNone/>
-                      </a:pPr>
-                      <a:r>
-                        <a:rPr/>
-                        <a:t>Structure</a:t>
-                      </a:r>
-                    </a:p>
-                  </a:txBody>
-                  <a:tcPr/>
-                </a:tc>
-                <a:tc>
-                  <a:txBody>
-                    <a:bodyPr/>
-                    <a:lstStyle/>
-                    <a:p>
-                      <a:pPr lvl="0" indent="0" marL="0">
-                        <a:buNone/>
-                      </a:pPr>
-                      <a:r>
-                        <a:rPr/>
-                        <a:t>Use</a:t>
-                      </a:r>
-                    </a:p>
-                  </a:txBody>
-                  <a:tcPr/>
-                </a:tc>
-              </a:tr>
-              <a:tr h="0">
-                <a:tc>
-                  <a:txBody>
-                    <a:bodyPr/>
-                    <a:lstStyle/>
-                    <a:p>
-                      <a:pPr lvl="0" indent="0" marL="0">
-                        <a:buNone/>
-                      </a:pPr>
-                      <a:r>
-                        <a:rPr b="1"/>
-                        <a:t>Time series</a:t>
-                      </a:r>
-                    </a:p>
-                  </a:txBody>
-                </a:tc>
-                <a:tc>
-                  <a:txBody>
-                    <a:bodyPr/>
-                    <a:lstStyle/>
-                    <a:p>
-                      <a:pPr lvl="0" indent="0" marL="0">
-                        <a:buNone/>
-                      </a:pPr>
-                      <a:r>
-                        <a:rPr/>
-                        <a:t>rolling-origin / expanding-window. Never train on the future.</a:t>
-                      </a:r>
-                    </a:p>
-                  </a:txBody>
-                </a:tc>
-              </a:tr>
-              <a:tr h="0">
-                <a:tc>
-                  <a:txBody>
-                    <a:bodyPr/>
-                    <a:lstStyle/>
-                    <a:p>
-                      <a:pPr lvl="0" indent="0" marL="0">
-                        <a:buNone/>
-                      </a:pPr>
-                      <a:r>
-                        <a:rPr b="1"/>
-                        <a:t>Panel or clustered</a:t>
-                      </a:r>
-                    </a:p>
-                  </a:txBody>
-                </a:tc>
-                <a:tc>
-                  <a:txBody>
-                    <a:bodyPr/>
-                    <a:lstStyle/>
-                    <a:p>
-                      <a:pPr lvl="0" indent="0" marL="0">
-                        <a:buNone/>
-                      </a:pPr>
-                      <a:r>
-                        <a:rPr>
-                          <a:latin typeface="Courier"/>
-                        </a:rPr>
-                        <a:t>GroupKFold</a:t>
-                      </a:r>
-                      <a:r>
-                        <a:rPr/>
-                        <a:t> — all observations of a unit stay together</a:t>
-                      </a:r>
-                    </a:p>
-                  </a:txBody>
-                </a:tc>
-              </a:tr>
-              <a:tr h="0">
-                <a:tc>
-                  <a:txBody>
-                    <a:bodyPr/>
-                    <a:lstStyle/>
-                    <a:p>
-                      <a:pPr lvl="0" indent="0" marL="0">
-                        <a:buNone/>
-                      </a:pPr>
-                      <a:r>
-                        <a:rPr b="1"/>
-                        <a:t>Spatial</a:t>
-                      </a:r>
-                    </a:p>
-                  </a:txBody>
-                </a:tc>
-                <a:tc>
-                  <a:txBody>
-                    <a:bodyPr/>
-                    <a:lstStyle/>
-                    <a:p>
-                      <a:pPr lvl="0" indent="0" marL="0">
-                        <a:buNone/>
-                      </a:pPr>
-                      <a:r>
-                        <a:rPr/>
-                        <a:t>blocked CV — neighbours are correlated</a:t>
-                      </a:r>
-                    </a:p>
-                  </a:txBody>
-                </a:tc>
-              </a:tr>
-            </a:tbl>
-          </a:graphicData>
-        </a:graphic>
-      </p:graphicFrame>
-    </p:spTree>
-  </p:cSld>
-</p:sld>
-</file>
-
-<file path=ppt/slides/slide22.xml><?xml version="1.0" encoding="utf-8"?>
-<p:sld xmlns:a="http://schemas.openxmlformats.org/drawingml/2006/main" xmlns:r="http://schemas.openxmlformats.org/officeDocument/2006/relationships" xmlns:p="http://schemas.openxmlformats.org/presentationml/2006/main">
-  <p:cSld>
-    <p:spTree>
-      <p:nvGrpSpPr>
-        <p:cNvPr id="1" name=""/>
-        <p:cNvGrpSpPr/>
-        <p:nvPr/>
-      </p:nvGrpSpPr>
-      <p:grpSpPr>
-        <a:xfrm>
-          <a:off x="0" y="0"/>
-          <a:ext cx="0" cy="0"/>
-          <a:chOff x="0" y="0"/>
-          <a:chExt cx="0" cy="0"/>
-        </a:xfrm>
-      </p:grpSpPr>
-      <p:sp>
-        <p:nvSpPr>
-          <p:cNvPr id="2" name="Title 1"/>
-          <p:cNvSpPr>
-            <a:spLocks noGrp="1"/>
-          </p:cNvSpPr>
-          <p:nvPr>
-            <p:ph type="title"/>
-          </p:nvPr>
-        </p:nvSpPr>
-        <p:spPr>
-          <a:xfrm>
-            <a:off x="457201" y="204787"/>
-            <a:ext cx="3008313" cy="871538"/>
-          </a:xfrm>
-        </p:spPr>
-        <p:txBody>
-          <a:bodyPr/>
-          <a:lstStyle/>
-          <a:p>
-            <a:pPr lvl="0" indent="0" marL="0">
-              <a:buNone/>
-            </a:pPr>
-            <a:r>
-              <a:rPr/>
-              <a:t>What that costs on this panel</a:t>
-            </a:r>
-          </a:p>
-        </p:txBody>
-      </p:sp>
-      <p:sp>
-        <p:nvSpPr>
-          <p:cNvPr id="4" name="Text Placeholder 3"/>
-          <p:cNvSpPr>
-            <a:spLocks noGrp="1"/>
-          </p:cNvSpPr>
-          <p:nvPr>
-            <p:ph idx="2" sz="half" type="body"/>
-          </p:nvPr>
-        </p:nvSpPr>
-        <p:spPr/>
-        <p:txBody>
-          <a:bodyPr/>
-          <a:lstStyle/>
-          <a:p>
-            <a:pPr lvl="0" indent="0" marL="0">
-              <a:buNone/>
-            </a:pPr>
-            <a:r>
-              <a:rPr/>
-              <a:t>Predicting </a:t>
-            </a:r>
-            <a:r>
-              <a:rPr>
-                <a:latin typeface="Courier"/>
-              </a:rPr>
-              <a:t>gdp_pc_eur</a:t>
-            </a:r>
-            <a:r>
-              <a:rPr/>
-              <a:t> from the other levels, 30 countries × 15 years:</a:t>
-            </a:r>
-          </a:p>
-        </p:txBody>
-      </p:sp>
-      <p:graphicFrame>
-        <p:nvGraphicFramePr>
-          <p:cNvPr id="6" name="Content Placeholder 5"/>
-          <p:cNvGraphicFramePr>
-            <a:graphicFrameLocks noGrp="1"/>
-          </p:cNvGraphicFramePr>
-          <p:nvPr>
-            <p:ph idx="1"/>
-          </p:nvPr>
-        </p:nvGraphicFramePr>
-        <p:xfrm>
-          <a:off x="3568700" y="203200"/>
-          <a:ext cx="5105400" cy="4381500"/>
-        </p:xfrm>
-        <a:graphic>
-          <a:graphicData uri="http://schemas.openxmlformats.org/drawingml/2006/table">
-            <a:tbl>
-              <a:tblPr firstRow="1" bandRow="1">
-                <a:tableStyleId>{5C22544A-7EE6-4342-B048-85BDC9FD1C3A}</a:tableStyleId>
-              </a:tblPr>
-              <a:tblGrid>
-                <a:gridCol w="2552700"/>
-                <a:gridCol w="2552700"/>
-              </a:tblGrid>
-              <a:tr h="0">
-                <a:tc>
-                  <a:txBody>
-                    <a:bodyPr/>
-                    <a:lstStyle/>
-                    <a:p>
-                      <a:pPr lvl="0" indent="0" marL="0">
-                        <a:buNone/>
-                      </a:pPr>
-                      <a:r>
-                        <a:rPr/>
-                        <a:t>Split</a:t>
-                      </a:r>
-                    </a:p>
-                  </a:txBody>
-                  <a:tcPr/>
-                </a:tc>
-                <a:tc>
-                  <a:txBody>
-                    <a:bodyPr/>
-                    <a:lstStyle/>
-                    <a:p>
-                      <a:pPr lvl="0" indent="0" marL="0">
-                        <a:buNone/>
-                      </a:pPr>
-                      <a:r>
-                        <a:rPr/>
-                        <a:t>RMSE (EUR)</a:t>
-                      </a:r>
-                    </a:p>
-                  </a:txBody>
-                  <a:tcPr/>
-                </a:tc>
-              </a:tr>
-              <a:tr h="0">
-                <a:tc>
-                  <a:txBody>
-                    <a:bodyPr/>
-                    <a:lstStyle/>
-                    <a:p>
-                      <a:pPr lvl="0" indent="0" marL="0">
-                        <a:buNone/>
-                      </a:pPr>
-                      <a:r>
-                        <a:rPr/>
-                        <a:t>Random K-fold</a:t>
-                      </a:r>
-                    </a:p>
-                  </a:txBody>
-                </a:tc>
-                <a:tc>
-                  <a:txBody>
-                    <a:bodyPr/>
-                    <a:lstStyle/>
-                    <a:p>
-                      <a:pPr lvl="0" indent="0" marL="0">
-                        <a:buNone/>
-                      </a:pPr>
-                      <a:r>
-                        <a:rPr/>
-                        <a:t>~3,200</a:t>
-                      </a:r>
-                    </a:p>
-                  </a:txBody>
-                </a:tc>
-              </a:tr>
-              <a:tr h="0">
-                <a:tc>
-                  <a:txBody>
-                    <a:bodyPr/>
-                    <a:lstStyle/>
-                    <a:p>
-                      <a:pPr lvl="0" indent="0" marL="0">
-                        <a:buNone/>
-                      </a:pPr>
-                      <a:r>
-                        <a:rPr b="1"/>
-                        <a:t>GroupKFold by country</a:t>
-                      </a:r>
-                    </a:p>
-                  </a:txBody>
-                </a:tc>
-                <a:tc>
-                  <a:txBody>
-                    <a:bodyPr/>
-                    <a:lstStyle/>
-                    <a:p>
-                      <a:pPr lvl="0" indent="0" marL="0">
-                        <a:buNone/>
-                      </a:pPr>
-                      <a:r>
-                        <a:rPr b="1"/>
-                        <a:t>~4,900</a:t>
-                      </a:r>
-                    </a:p>
-                  </a:txBody>
-                </a:tc>
-              </a:tr>
-            </a:tbl>
-          </a:graphicData>
-        </a:graphic>
-      </p:graphicFrame>
-    </p:spTree>
-  </p:cSld>
-</p:sld>
-</file>
-
-<file path=ppt/slides/slide23.xml><?xml version="1.0" encoding="utf-8"?>
-<p:sld xmlns:a="http://schemas.openxmlformats.org/drawingml/2006/main" xmlns:r="http://schemas.openxmlformats.org/officeDocument/2006/relationships" xmlns:p="http://schemas.openxmlformats.org/presentationml/2006/main">
-  <p:cSld>
-    <p:spTree>
-      <p:nvGrpSpPr>
-        <p:cNvPr id="1" name=""/>
-        <p:cNvGrpSpPr/>
-        <p:nvPr/>
-      </p:nvGrpSpPr>
-      <p:grpSpPr>
-        <a:xfrm>
-          <a:off x="0" y="0"/>
-          <a:ext cx="0" cy="0"/>
-          <a:chOff x="0" y="0"/>
-          <a:chExt cx="0" cy="0"/>
-        </a:xfrm>
-      </p:grpSpPr>
-      <p:sp>
-        <p:nvSpPr>
-          <p:cNvPr id="3" name="Content Placeholder 2"/>
-          <p:cNvSpPr>
-            <a:spLocks noGrp="1"/>
-          </p:cNvSpPr>
-          <p:nvPr>
-            <p:ph idx="1"/>
-          </p:nvPr>
-        </p:nvSpPr>
-        <p:spPr/>
-        <p:txBody>
-          <a:bodyPr/>
-          <a:lstStyle/>
-          <a:p>
-            <a:pPr lvl="0" indent="0" marL="0">
-              <a:buNone/>
-            </a:pPr>
-            <a:r>
-              <a:rPr/>
-              <a:t>Grouped error is about </a:t>
-            </a:r>
-            <a:r>
-              <a:rPr b="1"/>
-              <a:t>1.5× larger</a:t>
-            </a:r>
-            <a:r>
-              <a:rPr/>
-              <a:t>. Publish the 3,200 and you have overstated the model by half without doing anything a referee would call wrong.</a:t>
-            </a:r>
-          </a:p>
-        </p:txBody>
-      </p:sp>
-    </p:spTree>
-  </p:cSld>
-</p:sld>
-</file>
-
-<file path=ppt/slides/slide24.xml><?xml version="1.0" encoding="utf-8"?>
-<p:sld xmlns:a="http://schemas.openxmlformats.org/drawingml/2006/main" xmlns:r="http://schemas.openxmlformats.org/officeDocument/2006/relationships" xmlns:p="http://schemas.openxmlformats.org/presentationml/2006/main">
-  <p:cSld>
-    <p:spTree>
-      <p:nvGrpSpPr>
-        <p:cNvPr id="1" name=""/>
-        <p:cNvGrpSpPr/>
-        <p:nvPr/>
-      </p:nvGrpSpPr>
-      <p:grpSpPr>
-        <a:xfrm>
-          <a:off x="0" y="0"/>
-          <a:ext cx="0" cy="0"/>
-          <a:chOff x="0" y="0"/>
-          <a:chExt cx="0" cy="0"/>
-        </a:xfrm>
-      </p:grpSpPr>
-      <p:sp>
-        <p:nvSpPr>
-          <p:cNvPr id="2" name="Title 1"/>
-          <p:cNvSpPr>
-            <a:spLocks noGrp="1"/>
-          </p:cNvSpPr>
-          <p:nvPr>
-            <p:ph type="title"/>
-          </p:nvPr>
-        </p:nvSpPr>
-        <p:spPr>
-          <a:xfrm>
-            <a:off x="722313" y="1850000"/>
-            <a:ext cx="7772400" cy="1300000"/>
-          </a:xfrm>
-        </p:spPr>
-        <p:txBody>
-          <a:bodyPr/>
-          <a:lstStyle/>
-          <a:p>
-            <a:pPr lvl="0" indent="0" marL="0">
-              <a:buNone/>
-            </a:pPr>
-            <a:r>
-              <a:rPr/>
-              <a:t>The practice</a:t>
-            </a:r>
-          </a:p>
-        </p:txBody>
-      </p:sp>
-    </p:spTree>
-  </p:cSld>
-</p:sld>
-</file>
-
-<file path=ppt/slides/slide25.xml><?xml version="1.0" encoding="utf-8"?>
-<p:sld xmlns:a="http://schemas.openxmlformats.org/drawingml/2006/main" xmlns:r="http://schemas.openxmlformats.org/officeDocument/2006/relationships" xmlns:p="http://schemas.openxmlformats.org/presentationml/2006/main">
-  <p:cSld>
-    <p:spTree>
-      <p:nvGrpSpPr>
-        <p:cNvPr id="1" name=""/>
-        <p:cNvGrpSpPr/>
-        <p:nvPr/>
-      </p:nvGrpSpPr>
-      <p:grpSpPr>
-        <a:xfrm>
-          <a:off x="0" y="0"/>
-          <a:ext cx="0" cy="0"/>
-          <a:chOff x="0" y="0"/>
-          <a:chExt cx="0" cy="0"/>
-        </a:xfrm>
-      </p:grpSpPr>
-      <p:sp>
-        <p:nvSpPr>
-          <p:cNvPr id="2" name="Title 1"/>
-          <p:cNvSpPr>
-            <a:spLocks noGrp="1"/>
-          </p:cNvSpPr>
-          <p:nvPr>
-            <p:ph type="title"/>
-          </p:nvPr>
-        </p:nvSpPr>
-        <p:spPr/>
-        <p:txBody>
-          <a:bodyPr/>
-          <a:lstStyle/>
-          <a:p>
-            <a:pPr lvl="0" indent="0" marL="0">
-              <a:buNone/>
-            </a:pPr>
-            <a:r>
-              <a:rPr/>
-              <a:t>What you do</a:t>
-            </a:r>
-          </a:p>
-        </p:txBody>
-      </p:sp>
-      <p:sp>
-        <p:nvSpPr>
-          <p:cNvPr id="3" name="Content Placeholder 2"/>
-          <p:cNvSpPr>
-            <a:spLocks noGrp="1"/>
-          </p:cNvSpPr>
-          <p:nvPr>
-            <p:ph idx="1"/>
-          </p:nvPr>
-        </p:nvSpPr>
-        <p:spPr/>
-        <p:txBody>
-          <a:bodyPr/>
-          <a:lstStyle/>
-          <a:p>
-            <a:pPr lvl="0" indent="-342900" marL="342900">
-              <a:buAutoNum type="arabicPeriod"/>
-            </a:pPr>
-            <a:r>
-              <a:rPr/>
-              <a:t>Reproduce the three CV schemes on your project and tabulate the errors</a:t>
-            </a:r>
-          </a:p>
-          <a:p>
-            <a:pPr lvl="0" indent="-342900" marL="342900">
-              <a:buAutoNum type="arabicPeriod"/>
-            </a:pPr>
-            <a:r>
-              <a:rPr/>
-              <a:t>Explain, in writing, why they differ </a:t>
-            </a:r>
-            <a:r>
-              <a:rPr b="1"/>
-              <a:t>in that direction</a:t>
-            </a:r>
-          </a:p>
-          <a:p>
-            <a:pPr lvl="0" indent="-342900" marL="342900">
-              <a:buAutoNum type="arabicPeriod"/>
-            </a:pPr>
-            <a:r>
-              <a:rPr/>
-              <a:t>Draw the flexibility curve and mark where variance takes over</a:t>
-            </a:r>
-          </a:p>
-          <a:p>
-            <a:pPr lvl="0" indent="-342900" marL="342900">
-              <a:buAutoNum type="arabicPeriod"/>
-            </a:pPr>
-            <a:r>
-              <a:rPr/>
-              <a:t>Build one deliberately leaking pipeline, then fix it, and report both numbers</a:t>
-            </a:r>
-          </a:p>
-          <a:p>
-            <a:pPr lvl="0" indent="0" marL="0">
-              <a:buNone/>
-            </a:pPr>
-            <a:r>
-              <a:rPr/>
-              <a:t>The gap between random and grouped CV </a:t>
-            </a:r>
-            <a:r>
-              <a:rPr b="1"/>
-              <a:t>is</a:t>
-            </a:r>
-            <a:r>
-              <a:rPr/>
-              <a:t> your leakage diagnostic. Report it.</a:t>
-            </a:r>
-          </a:p>
-        </p:txBody>
-      </p:sp>
-    </p:spTree>
-  </p:cSld>
-</p:sld>
-</file>
-
-<file path=ppt/slides/slide26.xml><?xml version="1.0" encoding="utf-8"?>
-<p:sld xmlns:a="http://schemas.openxmlformats.org/drawingml/2006/main" xmlns:r="http://schemas.openxmlformats.org/officeDocument/2006/relationships" xmlns:p="http://schemas.openxmlformats.org/presentationml/2006/main">
-  <p:cSld>
-    <p:spTree>
-      <p:nvGrpSpPr>
-        <p:cNvPr id="1" name=""/>
-        <p:cNvGrpSpPr/>
-        <p:nvPr/>
-      </p:nvGrpSpPr>
-      <p:grpSpPr>
-        <a:xfrm>
-          <a:off x="0" y="0"/>
-          <a:ext cx="0" cy="0"/>
-          <a:chOff x="0" y="0"/>
-          <a:chExt cx="0" cy="0"/>
-        </a:xfrm>
-      </p:grpSpPr>
-      <p:sp>
-        <p:nvSpPr>
-          <p:cNvPr id="2" name="Title 1"/>
-          <p:cNvSpPr>
-            <a:spLocks noGrp="1"/>
-          </p:cNvSpPr>
-          <p:nvPr>
-            <p:ph type="title"/>
-          </p:nvPr>
-        </p:nvSpPr>
-        <p:spPr/>
-        <p:txBody>
-          <a:bodyPr/>
-          <a:lstStyle/>
-          <a:p>
-            <a:pPr lvl="0" indent="0" marL="0">
-              <a:buNone/>
-            </a:pPr>
-            <a:r>
-              <a:rPr/>
-              <a:t>The two-minute report</a:t>
-            </a:r>
-          </a:p>
-        </p:txBody>
-      </p:sp>
-      <mc:AlternateContent xmlns:mc="http://schemas.openxmlformats.org/markup-compatibility/2006">
-        <mc:Choice xmlns:a14="http://schemas.microsoft.com/office/drawing/2010/main" Requires="a14">
-          <p:sp>
-            <p:nvSpPr>
-              <p:cNvPr id="3" name="Content Placeholder 2"/>
-              <p:cNvSpPr>
-                <a:spLocks noGrp="1"/>
-              </p:cNvSpPr>
-              <p:nvPr>
-                <p:ph idx="1"/>
-              </p:nvPr>
-            </p:nvSpPr>
-            <p:spPr/>
-            <p:txBody>
-              <a:bodyPr/>
-              <a:lstStyle/>
-              <a:p>
-                <a:pPr lvl="0" indent="0" marL="0">
-                  <a:buNone/>
-                </a:pPr>
-                <a:r>
-                  <a:rPr b="1"/>
-                  <a:t>One slide. Three sentences.</a:t>
-                </a:r>
-              </a:p>
-              <a:p>
-                <a:pPr lvl="0" indent="-342900" marL="342900">
-                  <a:buAutoNum type="arabicPeriod"/>
-                </a:pPr>
-                <a:r>
-                  <a:rPr b="1"/>
-                  <a:t>What I did</a:t>
-                </a:r>
-                <a:r>
-                  <a:rPr/>
-                  <a:t> — the split, and the sentence it licenses</a:t>
-                </a:r>
-              </a:p>
-              <a:p>
-                <a:pPr lvl="0" indent="-342900" marL="342900">
-                  <a:buAutoNum type="arabicPeriod"/>
-                </a:pPr>
-                <a:r>
-                  <a:rPr b="1"/>
-                  <a:t>The number</a:t>
-                </a:r>
-                <a:r>
-                  <a:rPr/>
-                  <a:t> — error in the units of the outcome, not </a:t>
-                </a:r>
-                <a14:m>
-                  <m:oMath xmlns:m="http://schemas.openxmlformats.org/officeDocument/2006/math">
-                    <m:sSup>
-                      <m:e>
-                        <m:r>
-                          <m:t>R</m:t>
-                        </m:r>
-                      </m:e>
-                      <m:sup>
-                        <m:r>
-                          <m:t>2</m:t>
-                        </m:r>
-                      </m:sup>
-                    </m:sSup>
-                  </m:oMath>
-                </a14:m>
-              </a:p>
-              <a:p>
-                <a:pPr lvl="0" indent="-342900" marL="342900">
-                  <a:buAutoNum type="arabicPeriod"/>
-                </a:pPr>
-                <a:r>
-                  <a:rPr b="1"/>
-                  <a:t>The catch</a:t>
-                </a:r>
-                <a:r>
-                  <a:rPr/>
-                  <a:t> — what the split still cannot tell you</a:t>
-                </a:r>
-              </a:p>
-              <a:p>
-                <a:pPr lvl="0" indent="0" marL="0">
-                  <a:buNone/>
-                </a:pPr>
-                <a:r>
-                  <a:rPr/>
-                  <a:t>Full brief: </a:t>
-                </a:r>
-                <a:r>
-                  <a:rPr>
-                    <a:hlinkClick r:id="rId2"/>
-                    <a:latin typeface="Courier"/>
-                  </a:rPr>
-                  <a:t>02-practice/README.md</a:t>
-                </a:r>
-              </a:p>
-            </p:txBody>
-          </p:sp>
-        </mc:Choice>
-      </mc:AlternateContent>
-    </p:spTree>
-  </p:cSld>
-</p:sld>
-</file>
-
-<file path=ppt/slides/slide3.xml><?xml version="1.0" encoding="utf-8"?>
-<p:sld xmlns:a="http://schemas.openxmlformats.org/drawingml/2006/main" xmlns:r="http://schemas.openxmlformats.org/officeDocument/2006/relationships" xmlns:p="http://schemas.openxmlformats.org/presentationml/2006/main">
-  <p:cSld>
-    <p:spTree>
-      <p:nvGrpSpPr>
-        <p:cNvPr id="1" name=""/>
-        <p:cNvGrpSpPr/>
-        <p:nvPr/>
-      </p:nvGrpSpPr>
-      <p:grpSpPr>
-        <a:xfrm>
-          <a:off x="0" y="0"/>
-          <a:ext cx="0" cy="0"/>
-          <a:chOff x="0" y="0"/>
-          <a:chExt cx="0" cy="0"/>
-        </a:xfrm>
-      </p:grpSpPr>
-      <p:sp>
-        <p:nvSpPr>
-          <p:cNvPr id="2" name="Title 1"/>
-          <p:cNvSpPr>
-            <a:spLocks noGrp="1"/>
-          </p:cNvSpPr>
-          <p:nvPr>
-            <p:ph type="title"/>
-          </p:nvPr>
-        </p:nvSpPr>
-        <p:spPr/>
-        <p:txBody>
-          <a:bodyPr/>
-          <a:lstStyle/>
-          <a:p>
-            <a:pPr lvl="0" indent="0" marL="0">
-              <a:buNone/>
-            </a:pPr>
-            <a:r>
-              <a:rPr/>
-              <a:t>These slides follow the notes</a:t>
-            </a:r>
-          </a:p>
-        </p:txBody>
-      </p:sp>
-      <p:graphicFrame>
-        <p:nvGraphicFramePr>
-          <p:cNvPr id="6" name="Content Placeholder 5"/>
-          <p:cNvGraphicFramePr>
-            <a:graphicFrameLocks noGrp="1"/>
-          </p:cNvGraphicFramePr>
-          <p:nvPr>
-            <p:ph idx="1"/>
-          </p:nvPr>
-        </p:nvGraphicFramePr>
-        <p:xfrm>
-          <a:off x="457200" y="1193800"/>
-          <a:ext cx="8229600" cy="3390900"/>
-        </p:xfrm>
-        <a:graphic>
-          <a:graphicData uri="http://schemas.openxmlformats.org/drawingml/2006/table">
-            <a:tbl>
-              <a:tblPr firstRow="0" bandRow="1">
-                <a:tableStyleId>{5C22544A-7EE6-4342-B048-85BDC9FD1C3A}</a:tableStyleId>
-              </a:tblPr>
-              <a:tblGrid>
-                <a:gridCol w="4114800"/>
-                <a:gridCol w="4114800"/>
-              </a:tblGrid>
-              <a:tr h="0">
-                <a:tc>
-                  <a:txBody>
-                    <a:bodyPr/>
-                    <a:lstStyle/>
-                    <a:p>
-                      <a:pPr lvl="0" indent="0" marL="0">
-                        <a:buNone/>
-                      </a:pPr>
-                      <a:r>
-                        <a:rPr b="1"/>
-                        <a:t>4.1</a:t>
-                      </a:r>
-                    </a:p>
-                  </a:txBody>
-                </a:tc>
-                <a:tc>
-                  <a:txBody>
-                    <a:bodyPr/>
-                    <a:lstStyle/>
-                    <a:p>
-                      <a:pPr lvl="0" indent="0" marL="0">
-                        <a:buNone/>
-                      </a:pPr>
-                      <a:r>
-                        <a:rPr/>
-                        <a:t>The decomposition</a:t>
-                      </a:r>
-                    </a:p>
-                  </a:txBody>
-                </a:tc>
-              </a:tr>
-              <a:tr h="0">
-                <a:tc>
-                  <a:txBody>
-                    <a:bodyPr/>
-                    <a:lstStyle/>
-                    <a:p>
-                      <a:pPr lvl="0" indent="0" marL="0">
-                        <a:buNone/>
-                      </a:pPr>
-                      <a:r>
-                        <a:rPr b="1"/>
-                        <a:t>4.2</a:t>
-                      </a:r>
-                    </a:p>
-                  </a:txBody>
-                </a:tc>
-                <a:tc>
-                  <a:txBody>
-                    <a:bodyPr/>
-                    <a:lstStyle/>
-                    <a:p>
-                      <a:pPr lvl="0" indent="0" marL="0">
-                        <a:buNone/>
-                      </a:pPr>
-                      <a:r>
-                        <a:rPr/>
-                        <a:t>In-sample error is optimistic — by how much?</a:t>
-                      </a:r>
-                    </a:p>
-                  </a:txBody>
-                </a:tc>
-              </a:tr>
-              <a:tr h="0">
-                <a:tc>
-                  <a:txBody>
-                    <a:bodyPr/>
-                    <a:lstStyle/>
-                    <a:p>
-                      <a:pPr lvl="0" indent="0" marL="0">
-                        <a:buNone/>
-                      </a:pPr>
-                      <a:r>
-                        <a:rPr b="1"/>
-                        <a:t>4.3</a:t>
-                      </a:r>
-                    </a:p>
-                  </a:txBody>
-                </a:tc>
-                <a:tc>
-                  <a:txBody>
-                    <a:bodyPr/>
-                    <a:lstStyle/>
-                    <a:p>
-                      <a:pPr lvl="0" indent="0" marL="0">
-                        <a:buNone/>
-                      </a:pPr>
-                      <a:r>
-                        <a:rPr/>
-                        <a:t>Cross-validation</a:t>
-                      </a:r>
-                    </a:p>
-                  </a:txBody>
-                </a:tc>
-              </a:tr>
-              <a:tr h="0">
-                <a:tc>
-                  <a:txBody>
-                    <a:bodyPr/>
-                    <a:lstStyle/>
-                    <a:p>
-                      <a:pPr lvl="0" indent="0" marL="0">
-                        <a:buNone/>
-                      </a:pPr>
-                      <a:r>
-                        <a:rPr b="1"/>
-                        <a:t>4.4</a:t>
-                      </a:r>
-                    </a:p>
-                  </a:txBody>
-                </a:tc>
-                <a:tc>
-                  <a:txBody>
-                    <a:bodyPr/>
-                    <a:lstStyle/>
-                    <a:p>
-                      <a:pPr lvl="0" indent="0" marL="0">
-                        <a:buNone/>
-                      </a:pPr>
-                      <a:r>
-                        <a:rPr/>
-                        <a:t>Three ways to get cross-validation wrong</a:t>
-                      </a:r>
-                    </a:p>
-                  </a:txBody>
-                </a:tc>
-              </a:tr>
-            </a:tbl>
-          </a:graphicData>
-        </a:graphic>
-      </p:graphicFrame>
-    </p:spTree>
-  </p:cSld>
-</p:sld>
-</file>
-
-<file path=ppt/slides/slide4.xml><?xml version="1.0" encoding="utf-8"?>
-<p:sld xmlns:a="http://schemas.openxmlformats.org/drawingml/2006/main" xmlns:r="http://schemas.openxmlformats.org/officeDocument/2006/relationships" xmlns:p="http://schemas.openxmlformats.org/presentationml/2006/main">
-  <p:cSld>
-    <p:spTree>
-      <p:nvGrpSpPr>
-        <p:cNvPr id="1" name=""/>
-        <p:cNvGrpSpPr/>
-        <p:nvPr/>
-      </p:nvGrpSpPr>
-      <p:grpSpPr>
-        <a:xfrm>
-          <a:off x="0" y="0"/>
-          <a:ext cx="0" cy="0"/>
-          <a:chOff x="0" y="0"/>
-          <a:chExt cx="0" cy="0"/>
-        </a:xfrm>
-      </p:grpSpPr>
-      <p:sp>
-        <p:nvSpPr>
-          <p:cNvPr id="3" name="Content Placeholder 2"/>
-          <p:cNvSpPr>
-            <a:spLocks noGrp="1"/>
-          </p:cNvSpPr>
-          <p:nvPr>
-            <p:ph idx="1"/>
-          </p:nvPr>
-        </p:nvSpPr>
-        <p:spPr/>
-        <p:txBody>
-          <a:bodyPr/>
-          <a:lstStyle/>
-          <a:p>
-            <a:pPr lvl="0" indent="0" marL="0">
-              <a:buNone/>
-            </a:pPr>
-            <a:r>
-              <a:rPr/>
-              <a:t>Same numbering and notation as </a:t>
-            </a:r>
-            <a:r>
-              <a:rPr>
-                <a:hlinkClick r:id="rId2"/>
-                <a:latin typeface="Courier"/>
-              </a:rPr>
-              <a:t>01-lecture/README.md</a:t>
-            </a:r>
-            <a:r>
-              <a:rPr/>
-              <a:t>.</a:t>
-            </a:r>
-          </a:p>
-          <a:p>
-            <a:pPr lvl="0" indent="0" marL="0">
-              <a:buNone/>
-            </a:pPr>
-            <a:r>
-              <a:rPr/>
-              <a:t>This is the hinge of the course. After today, in-sample fit stops being evidence.</a:t>
-            </a:r>
-          </a:p>
-        </p:txBody>
-      </p:sp>
-    </p:spTree>
-  </p:cSld>
-</p:sld>
-</file>
-
-<file path=ppt/slides/slide5.xml><?xml version="1.0" encoding="utf-8"?>
-<p:sld xmlns:a="http://schemas.openxmlformats.org/drawingml/2006/main" xmlns:r="http://schemas.openxmlformats.org/officeDocument/2006/relationships" xmlns:p="http://schemas.openxmlformats.org/presentationml/2006/main">
-  <p:cSld>
-    <p:spTree>
-      <p:nvGrpSpPr>
-        <p:cNvPr id="1" name=""/>
-        <p:cNvGrpSpPr/>
-        <p:nvPr/>
-      </p:nvGrpSpPr>
-      <p:grpSpPr>
-        <a:xfrm>
-          <a:off x="0" y="0"/>
-          <a:ext cx="0" cy="0"/>
-          <a:chOff x="0" y="0"/>
-          <a:chExt cx="0" cy="0"/>
-        </a:xfrm>
-      </p:grpSpPr>
-      <p:sp>
-        <p:nvSpPr>
-          <p:cNvPr id="2" name="Title 1"/>
-          <p:cNvSpPr>
-            <a:spLocks noGrp="1"/>
-          </p:cNvSpPr>
-          <p:nvPr>
-            <p:ph type="title"/>
-          </p:nvPr>
-        </p:nvSpPr>
-        <p:spPr>
-          <a:xfrm>
-            <a:off x="722313" y="1850000"/>
-            <a:ext cx="7772400" cy="1300000"/>
-          </a:xfrm>
-        </p:spPr>
-        <p:txBody>
-          <a:bodyPr/>
-          <a:lstStyle/>
-          <a:p>
-            <a:pPr lvl="0" indent="0" marL="0">
-              <a:buNone/>
-            </a:pPr>
-            <a:r>
-              <a:rPr/>
-              <a:t>4.1 The decomposition</a:t>
-            </a:r>
-          </a:p>
-        </p:txBody>
-      </p:sp>
-    </p:spTree>
-  </p:cSld>
-</p:sld>
-</file>
-
-<file path=ppt/slides/slide6.xml><?xml version="1.0" encoding="utf-8"?>
-<p:sld xmlns:a="http://schemas.openxmlformats.org/drawingml/2006/main" xmlns:r="http://schemas.openxmlformats.org/officeDocument/2006/relationships" xmlns:p="http://schemas.openxmlformats.org/presentationml/2006/main">
-  <p:cSld>
-    <p:spTree>
-      <p:nvGrpSpPr>
-        <p:cNvPr id="1" name=""/>
-        <p:cNvGrpSpPr/>
-        <p:nvPr/>
-      </p:nvGrpSpPr>
-      <p:grpSpPr>
-        <a:xfrm>
-          <a:off x="0" y="0"/>
-          <a:ext cx="0" cy="0"/>
-          <a:chOff x="0" y="0"/>
-          <a:chExt cx="0" cy="0"/>
-        </a:xfrm>
-      </p:grpSpPr>
-      <p:sp>
-        <p:nvSpPr>
-          <p:cNvPr id="2" name="Title 1"/>
-          <p:cNvSpPr>
-            <a:spLocks noGrp="1"/>
-          </p:cNvSpPr>
-          <p:nvPr>
-            <p:ph type="title"/>
-          </p:nvPr>
-        </p:nvSpPr>
-        <p:spPr/>
-        <p:txBody>
-          <a:bodyPr/>
-          <a:lstStyle/>
-          <a:p>
-            <a:pPr lvl="0" indent="0" marL="0">
-              <a:buNone/>
-            </a:pPr>
-            <a:r>
-              <a:rPr/>
-              <a:t>Expected squared error at a test point</a:t>
-            </a:r>
-          </a:p>
-        </p:txBody>
-      </p:sp>
-      <mc:AlternateContent xmlns:mc="http://schemas.openxmlformats.org/markup-compatibility/2006">
-        <mc:Choice xmlns:a14="http://schemas.microsoft.com/office/drawing/2010/main" Requires="a14">
-          <p:sp>
-            <p:nvSpPr>
-              <p:cNvPr id="3" name="Content Placeholder 2"/>
-              <p:cNvSpPr>
-                <a:spLocks noGrp="1"/>
-              </p:cNvSpPr>
-              <p:nvPr>
-                <p:ph idx="1"/>
-              </p:nvPr>
-            </p:nvSpPr>
-            <p:spPr/>
-            <p:txBody>
-              <a:bodyPr/>
-              <a:lstStyle/>
-              <a:p>
-                <a:pPr lvl="0" indent="0" marL="0">
-                  <a:buNone/>
-                </a:pPr>
-                <a:r>
-                  <a:rPr/>
-                  <a:t>Fix </a:t>
-                </a:r>
-                <a14:m>
-                  <m:oMath xmlns:m="http://schemas.openxmlformats.org/officeDocument/2006/math">
-                    <m:sSub>
-                      <m:e>
-                        <m:r>
-                          <m:t>x</m:t>
-                        </m:r>
-                      </m:e>
-                      <m:sub>
-                        <m:r>
-                          <m:t>0</m:t>
-                        </m:r>
-                      </m:sub>
-                    </m:sSub>
-                  </m:oMath>
-                </a14:m>
-                <a:r>
-                  <a:rPr/>
-                  <a:t>; let </a:t>
-                </a:r>
-                <a14:m>
-                  <m:oMath xmlns:m="http://schemas.openxmlformats.org/officeDocument/2006/math">
-                    <m:acc>
-                      <m:accPr>
-                        <m:chr m:val="̂"/>
-                      </m:accPr>
-                      <m:e>
-                        <m:r>
-                          <m:t>f</m:t>
-                        </m:r>
-                      </m:e>
-                    </m:acc>
-                  </m:oMath>
-                </a14:m>
-                <a:r>
-                  <a:rPr/>
-                  <a:t> be estimated on a random training sample. Averaging over training samples and over the new noise draw:</a:t>
-                </a:r>
-              </a:p>
               <a:p>
                 <a:pPr lvl="0" indent="0" marL="0">
                   <a:buNone/>
@@ -7437,73 +3722,6 @@
                   </m:oMathPara>
                 </a14:m>
               </a:p>
-            </p:txBody>
-          </p:sp>
-        </mc:Choice>
-      </mc:AlternateContent>
-    </p:spTree>
-  </p:cSld>
-</p:sld>
-</file>
-
-<file path=ppt/slides/slide7.xml><?xml version="1.0" encoding="utf-8"?>
-<p:sld xmlns:a="http://schemas.openxmlformats.org/drawingml/2006/main" xmlns:r="http://schemas.openxmlformats.org/officeDocument/2006/relationships" xmlns:p="http://schemas.openxmlformats.org/presentationml/2006/main">
-  <p:cSld>
-    <p:spTree>
-      <p:nvGrpSpPr>
-        <p:cNvPr id="1" name=""/>
-        <p:cNvGrpSpPr/>
-        <p:nvPr/>
-      </p:nvGrpSpPr>
-      <p:grpSpPr>
-        <a:xfrm>
-          <a:off x="0" y="0"/>
-          <a:ext cx="0" cy="0"/>
-          <a:chOff x="0" y="0"/>
-          <a:chExt cx="0" cy="0"/>
-        </a:xfrm>
-      </p:grpSpPr>
-      <p:sp>
-        <p:nvSpPr>
-          <p:cNvPr id="2" name="Title 1"/>
-          <p:cNvSpPr>
-            <a:spLocks noGrp="1"/>
-          </p:cNvSpPr>
-          <p:nvPr>
-            <p:ph type="title"/>
-          </p:nvPr>
-        </p:nvSpPr>
-        <p:spPr/>
-        <p:txBody>
-          <a:bodyPr/>
-          <a:lstStyle/>
-          <a:p>
-            <a:pPr lvl="0" indent="0" marL="0">
-              <a:buNone/>
-            </a:pPr>
-            <a:r>
-              <a:rPr/>
-              <a:t>The derivation</a:t>
-            </a:r>
-          </a:p>
-        </p:txBody>
-      </p:sp>
-      <mc:AlternateContent xmlns:mc="http://schemas.openxmlformats.org/markup-compatibility/2006">
-        <mc:Choice xmlns:a14="http://schemas.microsoft.com/office/drawing/2010/main" Requires="a14">
-          <p:sp>
-            <p:nvSpPr>
-              <p:cNvPr id="3" name="Content Placeholder 2"/>
-              <p:cNvSpPr>
-                <a:spLocks noGrp="1"/>
-              </p:cNvSpPr>
-              <p:nvPr>
-                <p:ph idx="1"/>
-              </p:nvPr>
-            </p:nvSpPr>
-            <p:spPr/>
-            <p:txBody>
-              <a:bodyPr/>
-              <a:lstStyle/>
               <a:p>
                 <a:pPr lvl="0" indent="0" marL="0">
                   <a:buNone/>
@@ -7579,7 +3797,7 @@
                 </a14:m>
                 <a:r>
                   <a:rPr/>
-                  <a:t> and add and subtract </a:t>
+                  <a:t>, add and subtract </a:t>
                 </a:r>
                 <a14:m>
                   <m:oMath xmlns:m="http://schemas.openxmlformats.org/officeDocument/2006/math">
@@ -7636,7 +3854,2204 @@
                 </a14:m>
                 <a:r>
                   <a:rPr/>
-                  <a:t> inside the square.</a:t>
+                  <a:t> inside the square, and three cross terms vanish. Derivation in the notes, §4.1.</a:t>
+                </a:r>
+              </a:p>
+            </p:txBody>
+          </p:sp>
+        </mc:Choice>
+      </mc:AlternateContent>
+    </p:spTree>
+  </p:cSld>
+</p:sld>
+</file>
+
+<file path=ppt/slides/slide11.xml><?xml version="1.0" encoding="UTF-8"?><p:sld xmlns:a="http://schemas.openxmlformats.org/drawingml/2006/main" xmlns:r="http://schemas.openxmlformats.org/officeDocument/2006/relationships" xmlns:p="http://schemas.openxmlformats.org/presentationml/2006/main"><p:cSld><p:spTree><p:nvGrpSpPr><p:cNvPr id="1" name="" /><p:cNvGrpSpPr /><p:nvPr /></p:nvGrpSpPr><p:grpSpPr><a:xfrm><a:off x="0" y="0" /><a:ext cx="0" cy="0" /><a:chOff x="0" y="0" /><a:chExt cx="0" cy="0" /></a:xfrm></p:grpSpPr><p:sp><p:nvSpPr><p:cNvPr id="2" name="Title 1" /><p:cNvSpPr><a:spLocks noGrp="1" /></p:cNvSpPr><p:nvPr><p:ph type="title" /></p:nvPr></p:nvSpPr><p:spPr /><p:txBody><a:bodyPr /><a:lstStyle /><a:p><a:pPr lvl="0" indent="0" marL="0"><a:buNone /></a:pPr><a:r><a:rPr /><a:t>What each term means</a:t></a:r></a:p></p:txBody></p:sp><p:graphicFrame><p:nvGraphicFramePr><p:cNvPr id="6" name="Content Placeholder 5" /><p:cNvGraphicFramePr><a:graphicFrameLocks noGrp="1" /></p:cNvGraphicFramePr><p:nvPr><p:ph idx="1" /></p:nvPr></p:nvGraphicFramePr><p:xfrm><a:off x="457200" y="1193800" /><a:ext cx="8229600" cy="3390900" /></p:xfrm><a:graphic><a:graphicData uri="http://schemas.openxmlformats.org/drawingml/2006/table"><a:tbl><a:tblPr firstRow="1" bandRow="1"><a:tableStyleId>{5C22544A-7EE6-4342-B048-85BDC9FD1C3A}</a:tableStyleId></a:tblPr><a:tblGrid><a:gridCol w="2743200" /><a:gridCol w="2743200" /><a:gridCol w="2743200" /></a:tblGrid><a:tr h="0"><a:tc><a:txBody><a:bodyPr /><a:lstStyle /><a:p><a:pPr lvl="0" indent="0" marL="0"><a:buNone /></a:pPr><a:r><a:rPr /><a:t>Term</a:t></a:r></a:p></a:txBody><a:tcPr /></a:tc><a:tc><a:txBody><a:bodyPr /><a:lstStyle /><a:p><a:pPr lvl="0" indent="0" marL="0"><a:buNone /></a:pPr><a:r><a:rPr /><a:t>In words</a:t></a:r></a:p></a:txBody><a:tcPr /></a:tc><a:tc><a:txBody><a:bodyPr /><a:lstStyle /><a:p><a:pPr lvl="0" indent="0" marL="0"><a:buNone /></a:pPr><a:r><a:rPr /><a:t>Falls when you…</a:t></a:r></a:p></a:txBody><a:tcPr /></a:tc></a:tr><a:tr h="0"><a:tc><a:txBody><a:bodyPr /><a:lstStyle /><a:p><a:pPr lvl="0" indent="0" marL="0"><a:buNone /></a:pPr><a:r><a:rPr b="1" /><a:t>Bias²</a:t></a:r></a:p></a:txBody></a:tc><a:tc><a:txBody><a:bodyPr /><a:lstStyle /><a:p><a:pPr lvl="0" indent="0" marL="0"><a:buNone /></a:pPr><a:r><a:rPr /><a:t>the structure you imposed is wrong</a:t></a:r></a:p></a:txBody></a:tc><a:tc><a:txBody><a:bodyPr /><a:lstStyle /><a:p><a:pPr lvl="0" indent="0" marL="0"><a:buNone /></a:pPr><a:r><a:rPr /><a:t>add flexibility</a:t></a:r></a:p></a:txBody></a:tc></a:tr><a:tr h="0"><a:tc><a:txBody><a:bodyPr /><a:lstStyle /><a:p><a:pPr lvl="0" indent="0" marL="0"><a:buNone /></a:pPr><a:r><a:rPr b="1" /><a:t>Variance</a:t></a:r></a:p></a:txBody></a:tc><a:tc><a:txBody><a:bodyPr /><a:lstStyle /><a:p><a:pPr lvl="0" indent="0" marL="0"><a:buNone /></a:pPr><a:r><a:rPr /><a:t>the fit chases this particular sample</a:t></a:r></a:p></a:txBody></a:tc><a:tc><a:txBody><a:bodyPr /><a:lstStyle /><a:p><a:pPr lvl="0" indent="0" marL="0"><a:buNone /></a:pPr><a:r><a:rPr /><a:t>remove flexibility</a:t></a:r></a:p></a:txBody></a:tc></a:tr><a:tr h="0"><a:tc><a:txBody><a:bodyPr /><a:lstStyle /><a:p><a:pPr lvl="0" indent="0" marL="0"><a:buNone /></a:pPr><a14:m><m:oMath xmlns:m="http://schemas.openxmlformats.org/officeDocument/2006/math"><m:sSup><m:e><m:r><m:t>σ</m:t></m:r></m:e><m:sup><m:r><m:t>2</m:t></m:r></m:sup></m:sSup></m:oMath></a14:m></a:p></a:txBody></a:tc><a:tc><a:txBody><a:bodyPr /><a:lstStyle /><a:p><a:pPr lvl="0" indent="0" marL="0"><a:buNone /></a:pPr><a:r><a:rPr /><a:t>what the predictors do not observe</a:t></a:r></a:p></a:txBody></a:tc><a:tc><a:txBody><a:bodyPr /><a:lstStyle /><a:p><a:pPr lvl="0" indent="0" marL="0"><a:buNone /></a:pPr><a:r><a:rPr i="1" /><a:t>never</a:t></a:r></a:p></a:txBody></a:tc></a:tr></a:tbl></a:graphicData></a:graphic></p:graphicFrame></p:spTree></p:cSld></p:sld>
+</file>
+
+<file path=ppt/slides/slide12.xml><?xml version="1.0" encoding="utf-8"?>
+<p:sld xmlns:a="http://schemas.openxmlformats.org/drawingml/2006/main" xmlns:r="http://schemas.openxmlformats.org/officeDocument/2006/relationships" xmlns:p="http://schemas.openxmlformats.org/presentationml/2006/main">
+  <p:cSld>
+    <p:spTree>
+      <p:nvGrpSpPr>
+        <p:cNvPr id="1" name=""/>
+        <p:cNvGrpSpPr/>
+        <p:nvPr/>
+      </p:nvGrpSpPr>
+      <p:grpSpPr>
+        <a:xfrm>
+          <a:off x="0" y="0"/>
+          <a:ext cx="0" cy="0"/>
+          <a:chOff x="0" y="0"/>
+          <a:chExt cx="0" cy="0"/>
+        </a:xfrm>
+      </p:grpSpPr>
+      <mc:AlternateContent xmlns:mc="http://schemas.openxmlformats.org/markup-compatibility/2006">
+        <mc:Choice xmlns:a14="http://schemas.microsoft.com/office/drawing/2010/main" Requires="a14">
+          <p:sp>
+            <p:nvSpPr>
+              <p:cNvPr id="3" name="Content Placeholder 2"/>
+              <p:cNvSpPr>
+                <a:spLocks noGrp="1"/>
+              </p:cNvSpPr>
+              <p:nvPr>
+                <p:ph idx="1"/>
+              </p:nvPr>
+            </p:nvSpPr>
+            <p:spPr/>
+            <p:txBody>
+              <a:bodyPr/>
+              <a:lstStyle/>
+              <a:p>
+                <a:pPr lvl="0" indent="0" marL="0">
+                  <a:buNone/>
+                </a:pPr>
+                <a14:m>
+                  <m:oMath xmlns:m="http://schemas.openxmlformats.org/officeDocument/2006/math">
+                    <m:sSup>
+                      <m:e>
+                        <m:r>
+                          <m:t>σ</m:t>
+                        </m:r>
+                      </m:e>
+                      <m:sup>
+                        <m:r>
+                          <m:t>2</m:t>
+                        </m:r>
+                      </m:sup>
+                    </m:sSup>
+                  </m:oMath>
+                </a14:m>
+                <a:r>
+                  <a:rPr/>
+                  <a:t> is not a defect of your method. </a:t>
+                </a:r>
+                <a:r>
+                  <a:rPr b="1"/>
+                  <a:t>Reporting a validation error below it means you have leaked, not learned.</a:t>
+                </a:r>
+              </a:p>
+            </p:txBody>
+          </p:sp>
+        </mc:Choice>
+      </mc:AlternateContent>
+    </p:spTree>
+  </p:cSld>
+</p:sld>
+</file>
+
+<file path=ppt/slides/slide13.xml><?xml version="1.0" encoding="utf-8"?>
+<p:sld xmlns:a="http://schemas.openxmlformats.org/drawingml/2006/main" xmlns:r="http://schemas.openxmlformats.org/officeDocument/2006/relationships" xmlns:p="http://schemas.openxmlformats.org/presentationml/2006/main">
+  <p:cSld>
+    <p:spTree>
+      <p:nvGrpSpPr>
+        <p:cNvPr id="1" name=""/>
+        <p:cNvGrpSpPr/>
+        <p:nvPr/>
+      </p:nvGrpSpPr>
+      <p:grpSpPr>
+        <a:xfrm>
+          <a:off x="0" y="0"/>
+          <a:ext cx="0" cy="0"/>
+          <a:chOff x="0" y="0"/>
+          <a:chExt cx="0" cy="0"/>
+        </a:xfrm>
+      </p:grpSpPr>
+      <p:sp>
+        <p:nvSpPr>
+          <p:cNvPr id="2" name="Title 1"/>
+          <p:cNvSpPr>
+            <a:spLocks noGrp="1"/>
+          </p:cNvSpPr>
+          <p:nvPr>
+            <p:ph type="title"/>
+          </p:nvPr>
+        </p:nvSpPr>
+        <p:spPr>
+          <a:xfrm>
+            <a:off x="722313" y="1850000"/>
+            <a:ext cx="7772400" cy="1300000"/>
+          </a:xfrm>
+        </p:spPr>
+        <p:txBody>
+          <a:bodyPr/>
+          <a:lstStyle/>
+          <a:p>
+            <a:pPr lvl="0" indent="0" marL="0">
+              <a:buNone/>
+            </a:pPr>
+            <a:r>
+              <a:rPr/>
+              <a:t>3 · Seeing it happen</a:t>
+            </a:r>
+          </a:p>
+        </p:txBody>
+      </p:sp>
+    </p:spTree>
+  </p:cSld>
+</p:sld>
+</file>
+
+<file path=ppt/slides/slide14.xml><?xml version="1.0" encoding="utf-8"?>
+<p:sld xmlns:a="http://schemas.openxmlformats.org/drawingml/2006/main" xmlns:r="http://schemas.openxmlformats.org/officeDocument/2006/relationships" xmlns:p="http://schemas.openxmlformats.org/presentationml/2006/main">
+  <p:cSld>
+    <p:spTree>
+      <p:nvGrpSpPr>
+        <p:cNvPr id="1" name=""/>
+        <p:cNvGrpSpPr/>
+        <p:nvPr/>
+      </p:nvGrpSpPr>
+      <p:grpSpPr>
+        <a:xfrm>
+          <a:off x="0" y="0"/>
+          <a:ext cx="0" cy="0"/>
+          <a:chOff x="0" y="0"/>
+          <a:chExt cx="0" cy="0"/>
+        </a:xfrm>
+      </p:grpSpPr>
+      <p:sp>
+        <p:nvSpPr>
+          <p:cNvPr id="2" name="Title 1"/>
+          <p:cNvSpPr>
+            <a:spLocks noGrp="1"/>
+          </p:cNvSpPr>
+          <p:nvPr>
+            <p:ph type="title"/>
+          </p:nvPr>
+        </p:nvSpPr>
+        <p:spPr/>
+        <p:txBody>
+          <a:bodyPr/>
+          <a:lstStyle/>
+          <a:p>
+            <a:pPr lvl="0" indent="0" marL="0">
+              <a:buNone/>
+            </a:pPr>
+            <a:r>
+              <a:rPr/>
+              <a:t>The three curves</a:t>
+            </a:r>
+          </a:p>
+        </p:txBody>
+      </p:sp>
+      <p:pic>
+        <p:nvPicPr>
+          <p:cNvPr descr="slides_files/figure-pptx/cell-3-output-1.png" id="0" name="Picture 1"/>
+          <p:cNvPicPr>
+            <a:picLocks noGrp="1" noChangeAspect="1"/>
+          </p:cNvPicPr>
+          <p:nvPr/>
+        </p:nvPicPr>
+        <p:blipFill>
+          <a:blip r:embed="rId2"/>
+          <a:stretch>
+            <a:fillRect/>
+          </a:stretch>
+        </p:blipFill>
+        <p:spPr bwMode="auto">
+          <a:xfrm>
+            <a:off x="4178300" y="1193800"/>
+            <a:ext cx="787400" cy="3390900"/>
+          </a:xfrm>
+          <a:prstGeom prst="rect">
+            <a:avLst/>
+          </a:prstGeom>
+          <a:noFill/>
+          <a:ln w="9525">
+            <a:noFill/>
+            <a:headEnd/>
+            <a:tailEnd/>
+          </a:ln>
+        </p:spPr>
+      </p:pic>
+    </p:spTree>
+  </p:cSld>
+</p:sld>
+</file>
+
+<file path=ppt/slides/slide15.xml><?xml version="1.0" encoding="utf-8"?>
+<p:sld xmlns:a="http://schemas.openxmlformats.org/drawingml/2006/main" xmlns:r="http://schemas.openxmlformats.org/officeDocument/2006/relationships" xmlns:p="http://schemas.openxmlformats.org/presentationml/2006/main">
+  <p:cSld>
+    <p:spTree>
+      <p:nvGrpSpPr>
+        <p:cNvPr id="1" name=""/>
+        <p:cNvGrpSpPr/>
+        <p:nvPr/>
+      </p:nvGrpSpPr>
+      <p:grpSpPr>
+        <a:xfrm>
+          <a:off x="0" y="0"/>
+          <a:ext cx="0" cy="0"/>
+          <a:chOff x="0" y="0"/>
+          <a:chExt cx="0" cy="0"/>
+        </a:xfrm>
+      </p:grpSpPr>
+      <p:sp>
+        <p:nvSpPr>
+          <p:cNvPr id="3" name="Content Placeholder 2"/>
+          <p:cNvSpPr>
+            <a:spLocks noGrp="1"/>
+          </p:cNvSpPr>
+          <p:nvPr>
+            <p:ph idx="1"/>
+          </p:nvPr>
+        </p:nvSpPr>
+        <p:spPr/>
+        <p:txBody>
+          <a:bodyPr/>
+          <a:lstStyle/>
+          <a:p>
+            <a:pPr lvl="0" indent="0" marL="0">
+              <a:buNone/>
+            </a:pPr>
+            <a:r>
+              <a:rPr/>
+              <a:t>Bias falls monotonically. Variance rises. Their sum has an </a:t>
+            </a:r>
+            <a:r>
+              <a:rPr b="1"/>
+              <a:t>interior minimum</a:t>
+            </a:r>
+            <a:r>
+              <a:rPr/>
+              <a:t> — and that minimum is what every method after today is trying to find.</a:t>
+            </a:r>
+          </a:p>
+        </p:txBody>
+      </p:sp>
+    </p:spTree>
+  </p:cSld>
+</p:sld>
+</file>
+
+<file path=ppt/slides/slide16.xml><?xml version="1.0" encoding="utf-8"?>
+<p:sld xmlns:a="http://schemas.openxmlformats.org/drawingml/2006/main" xmlns:r="http://schemas.openxmlformats.org/officeDocument/2006/relationships" xmlns:p="http://schemas.openxmlformats.org/presentationml/2006/main">
+  <p:cSld>
+    <p:spTree>
+      <p:nvGrpSpPr>
+        <p:cNvPr id="1" name=""/>
+        <p:cNvGrpSpPr/>
+        <p:nvPr/>
+      </p:nvGrpSpPr>
+      <p:grpSpPr>
+        <a:xfrm>
+          <a:off x="0" y="0"/>
+          <a:ext cx="0" cy="0"/>
+          <a:chOff x="0" y="0"/>
+          <a:chExt cx="0" cy="0"/>
+        </a:xfrm>
+      </p:grpSpPr>
+      <p:sp>
+        <p:nvSpPr>
+          <p:cNvPr id="2" name="Title 1"/>
+          <p:cNvSpPr>
+            <a:spLocks noGrp="1"/>
+          </p:cNvSpPr>
+          <p:nvPr>
+            <p:ph type="title"/>
+          </p:nvPr>
+        </p:nvSpPr>
+        <p:spPr/>
+        <p:txBody>
+          <a:bodyPr/>
+          <a:lstStyle/>
+          <a:p>
+            <a:pPr lvl="0" indent="0" marL="0">
+              <a:buNone/>
+            </a:pPr>
+            <a:r>
+              <a:rPr/>
+              <a:t>The same thing, as fits</a:t>
+            </a:r>
+          </a:p>
+        </p:txBody>
+      </p:sp>
+      <p:pic>
+        <p:nvPicPr>
+          <p:cNvPr descr="slides_files/figure-pptx/cell-4-output-1.png" id="0" name="Picture 1"/>
+          <p:cNvPicPr>
+            <a:picLocks noGrp="1" noChangeAspect="1"/>
+          </p:cNvPicPr>
+          <p:nvPr/>
+        </p:nvPicPr>
+        <p:blipFill>
+          <a:blip r:embed="rId2"/>
+          <a:stretch>
+            <a:fillRect/>
+          </a:stretch>
+        </p:blipFill>
+        <p:spPr bwMode="auto">
+          <a:xfrm>
+            <a:off x="457200" y="1549400"/>
+            <a:ext cx="8229600" cy="2692400"/>
+          </a:xfrm>
+          <a:prstGeom prst="rect">
+            <a:avLst/>
+          </a:prstGeom>
+          <a:noFill/>
+          <a:ln w="9525">
+            <a:noFill/>
+            <a:headEnd/>
+            <a:tailEnd/>
+          </a:ln>
+        </p:spPr>
+      </p:pic>
+    </p:spTree>
+  </p:cSld>
+</p:sld>
+</file>
+
+<file path=ppt/slides/slide17.xml><?xml version="1.0" encoding="utf-8"?>
+<p:sld xmlns:a="http://schemas.openxmlformats.org/drawingml/2006/main" xmlns:r="http://schemas.openxmlformats.org/officeDocument/2006/relationships" xmlns:p="http://schemas.openxmlformats.org/presentationml/2006/main">
+  <p:cSld>
+    <p:spTree>
+      <p:nvGrpSpPr>
+        <p:cNvPr id="1" name=""/>
+        <p:cNvGrpSpPr/>
+        <p:nvPr/>
+      </p:nvGrpSpPr>
+      <p:grpSpPr>
+        <a:xfrm>
+          <a:off x="0" y="0"/>
+          <a:ext cx="0" cy="0"/>
+          <a:chOff x="0" y="0"/>
+          <a:chExt cx="0" cy="0"/>
+        </a:xfrm>
+      </p:grpSpPr>
+      <p:sp>
+        <p:nvSpPr>
+          <p:cNvPr id="3" name="Content Placeholder 2"/>
+          <p:cNvSpPr>
+            <a:spLocks noGrp="1"/>
+          </p:cNvSpPr>
+          <p:nvPr>
+            <p:ph idx="1"/>
+          </p:nvPr>
+        </p:nvSpPr>
+        <p:spPr/>
+        <p:txBody>
+          <a:bodyPr/>
+          <a:lstStyle/>
+          <a:p>
+            <a:pPr lvl="0" indent="0" marL="0">
+              <a:buNone/>
+            </a:pPr>
+            <a:r>
+              <a:rPr/>
+              <a:t>Dashed line: the truth. Blue: the fit. The right-hand panel passes closer to every training point and is further from the truth almost everywhere.</a:t>
+            </a:r>
+          </a:p>
+        </p:txBody>
+      </p:sp>
+    </p:spTree>
+  </p:cSld>
+</p:sld>
+</file>
+
+<file path=ppt/slides/slide18.xml><?xml version="1.0" encoding="utf-8"?>
+<p:sld xmlns:a="http://schemas.openxmlformats.org/drawingml/2006/main" xmlns:r="http://schemas.openxmlformats.org/officeDocument/2006/relationships" xmlns:p="http://schemas.openxmlformats.org/presentationml/2006/main">
+  <p:cSld>
+    <p:spTree>
+      <p:nvGrpSpPr>
+        <p:cNvPr id="1" name=""/>
+        <p:cNvGrpSpPr/>
+        <p:nvPr/>
+      </p:nvGrpSpPr>
+      <p:grpSpPr>
+        <a:xfrm>
+          <a:off x="0" y="0"/>
+          <a:ext cx="0" cy="0"/>
+          <a:chOff x="0" y="0"/>
+          <a:chExt cx="0" cy="0"/>
+        </a:xfrm>
+      </p:grpSpPr>
+      <p:sp>
+        <p:nvSpPr>
+          <p:cNvPr id="2" name="Title 1"/>
+          <p:cNvSpPr>
+            <a:spLocks noGrp="1"/>
+          </p:cNvSpPr>
+          <p:nvPr>
+            <p:ph type="title"/>
+          </p:nvPr>
+        </p:nvSpPr>
+        <p:spPr>
+          <a:xfrm>
+            <a:off x="722313" y="1850000"/>
+            <a:ext cx="7772400" cy="1300000"/>
+          </a:xfrm>
+        </p:spPr>
+        <p:txBody>
+          <a:bodyPr/>
+          <a:lstStyle/>
+          <a:p>
+            <a:pPr lvl="0" indent="0" marL="0">
+              <a:buNone/>
+            </a:pPr>
+            <a:r>
+              <a:rPr/>
+              <a:t>4 · Optimism</a:t>
+            </a:r>
+          </a:p>
+        </p:txBody>
+      </p:sp>
+    </p:spTree>
+  </p:cSld>
+</p:sld>
+</file>
+
+<file path=ppt/slides/slide19.xml><?xml version="1.0" encoding="utf-8"?>
+<p:sld xmlns:a="http://schemas.openxmlformats.org/drawingml/2006/main" xmlns:r="http://schemas.openxmlformats.org/officeDocument/2006/relationships" xmlns:p="http://schemas.openxmlformats.org/presentationml/2006/main">
+  <p:cSld>
+    <p:spTree>
+      <p:nvGrpSpPr>
+        <p:cNvPr id="1" name=""/>
+        <p:cNvGrpSpPr/>
+        <p:nvPr/>
+      </p:nvGrpSpPr>
+      <p:grpSpPr>
+        <a:xfrm>
+          <a:off x="0" y="0"/>
+          <a:ext cx="0" cy="0"/>
+          <a:chOff x="0" y="0"/>
+          <a:chExt cx="0" cy="0"/>
+        </a:xfrm>
+      </p:grpSpPr>
+      <p:sp>
+        <p:nvSpPr>
+          <p:cNvPr id="2" name="Title 1"/>
+          <p:cNvSpPr>
+            <a:spLocks noGrp="1"/>
+          </p:cNvSpPr>
+          <p:nvPr>
+            <p:ph type="title"/>
+          </p:nvPr>
+        </p:nvSpPr>
+        <p:spPr/>
+        <p:txBody>
+          <a:bodyPr/>
+          <a:lstStyle/>
+          <a:p>
+            <a:pPr lvl="0" indent="0" marL="0">
+              <a:buNone/>
+            </a:pPr>
+            <a:r>
+              <a:rPr/>
+              <a:t>Training error is biased, and by a known amount</a:t>
+            </a:r>
+          </a:p>
+        </p:txBody>
+      </p:sp>
+      <mc:AlternateContent xmlns:mc="http://schemas.openxmlformats.org/markup-compatibility/2006">
+        <mc:Choice xmlns:a14="http://schemas.microsoft.com/office/drawing/2010/main" Requires="a14">
+          <p:sp>
+            <p:nvSpPr>
+              <p:cNvPr id="3" name="Content Placeholder 2"/>
+              <p:cNvSpPr>
+                <a:spLocks noGrp="1"/>
+              </p:cNvSpPr>
+              <p:nvPr>
+                <p:ph idx="1"/>
+              </p:nvPr>
+            </p:nvSpPr>
+            <p:spPr/>
+            <p:txBody>
+              <a:bodyPr/>
+              <a:lstStyle/>
+              <a:p>
+                <a:pPr lvl="0" indent="0" marL="0">
+                  <a:buNone/>
+                </a:pPr>
+                <a:r>
+                  <a:rPr/>
+                  <a:t>With </a:t>
+                </a:r>
+                <a14:m>
+                  <m:oMath xmlns:m="http://schemas.openxmlformats.org/officeDocument/2006/math">
+                    <m:r>
+                      <m:rPr>
+                        <m:sty m:val="p"/>
+                      </m:rPr>
+                      <m:t>e</m:t>
+                    </m:r>
+                    <m:r>
+                      <m:rPr>
+                        <m:sty m:val="p"/>
+                      </m:rPr>
+                      <m:t>r</m:t>
+                    </m:r>
+                    <m:r>
+                      <m:rPr>
+                        <m:sty m:val="p"/>
+                      </m:rPr>
+                      <m:t>r</m:t>
+                    </m:r>
+                  </m:oMath>
+                </a14:m>
+                <a:r>
+                  <a:rPr/>
+                  <a:t> the training error and </a:t>
+                </a:r>
+                <a14:m>
+                  <m:oMath xmlns:m="http://schemas.openxmlformats.org/officeDocument/2006/math">
+                    <m:sSub>
+                      <m:e>
+                        <m:r>
+                          <m:rPr>
+                            <m:sty m:val="p"/>
+                          </m:rPr>
+                          <m:t>E</m:t>
+                        </m:r>
+                        <m:r>
+                          <m:rPr>
+                            <m:sty m:val="p"/>
+                          </m:rPr>
+                          <m:t>r</m:t>
+                        </m:r>
+                        <m:r>
+                          <m:rPr>
+                            <m:sty m:val="p"/>
+                          </m:rPr>
+                          <m:t>r</m:t>
+                        </m:r>
+                      </m:e>
+                      <m:sub>
+                        <m:r>
+                          <m:rPr>
+                            <m:nor/>
+                            <m:sty m:val="p"/>
+                          </m:rPr>
+                          <m:t>in</m:t>
+                        </m:r>
+                      </m:sub>
+                    </m:sSub>
+                  </m:oMath>
+                </a14:m>
+                <a:r>
+                  <a:rPr/>
+                  <a:t> the error on new outcomes at the same </a:t>
+                </a:r>
+                <a14:m>
+                  <m:oMath xmlns:m="http://schemas.openxmlformats.org/officeDocument/2006/math">
+                    <m:sSub>
+                      <m:e>
+                        <m:r>
+                          <m:t>x</m:t>
+                        </m:r>
+                      </m:e>
+                      <m:sub>
+                        <m:r>
+                          <m:t>i</m:t>
+                        </m:r>
+                      </m:sub>
+                    </m:sSub>
+                  </m:oMath>
+                </a14:m>
+                <a:r>
+                  <a:rPr/>
+                  <a:t>:</a:t>
+                </a:r>
+              </a:p>
+              <a:p>
+                <a:pPr lvl="0" indent="0" marL="0">
+                  <a:buNone/>
+                </a:pPr>
+                <a14:m>
+                  <m:oMathPara xmlns:m="http://schemas.openxmlformats.org/officeDocument/2006/math">
+                    <m:oMathParaPr>
+                      <m:jc m:val="center"/>
+                    </m:oMathParaPr>
+                    <m:oMath>
+                      <m:r>
+                        <m:rPr>
+                          <m:sty m:val="p"/>
+                          <m:scr m:val="double-struck"/>
+                        </m:rPr>
+                        <m:t>E</m:t>
+                      </m:r>
+                      <m:d>
+                        <m:dPr>
+                          <m:begChr m:val="["/>
+                          <m:sepChr m:val=""/>
+                          <m:endChr m:val="]"/>
+                          <m:grow/>
+                        </m:dPr>
+                        <m:e>
+                          <m:sSub>
+                            <m:e>
+                              <m:r>
+                                <m:rPr>
+                                  <m:sty m:val="p"/>
+                                </m:rPr>
+                                <m:t>E</m:t>
+                              </m:r>
+                              <m:r>
+                                <m:rPr>
+                                  <m:sty m:val="p"/>
+                                </m:rPr>
+                                <m:t>r</m:t>
+                              </m:r>
+                              <m:r>
+                                <m:rPr>
+                                  <m:sty m:val="p"/>
+                                </m:rPr>
+                                <m:t>r</m:t>
+                              </m:r>
+                            </m:e>
+                            <m:sub>
+                              <m:r>
+                                <m:rPr>
+                                  <m:nor/>
+                                  <m:sty m:val="p"/>
+                                </m:rPr>
+                                <m:t>in</m:t>
+                              </m:r>
+                            </m:sub>
+                          </m:sSub>
+                        </m:e>
+                      </m:d>
+                      <m:r>
+                        <m:rPr>
+                          <m:sty m:val="p"/>
+                        </m:rPr>
+                        <m:t>−</m:t>
+                      </m:r>
+                      <m:r>
+                        <m:rPr>
+                          <m:sty m:val="p"/>
+                          <m:scr m:val="double-struck"/>
+                        </m:rPr>
+                        <m:t>E</m:t>
+                      </m:r>
+                      <m:d>
+                        <m:dPr>
+                          <m:begChr m:val="["/>
+                          <m:sepChr m:val=""/>
+                          <m:endChr m:val="]"/>
+                          <m:grow/>
+                        </m:dPr>
+                        <m:e>
+                          <m:r>
+                            <m:rPr>
+                              <m:sty m:val="p"/>
+                            </m:rPr>
+                            <m:t>e</m:t>
+                          </m:r>
+                          <m:r>
+                            <m:rPr>
+                              <m:sty m:val="p"/>
+                            </m:rPr>
+                            <m:t>r</m:t>
+                          </m:r>
+                          <m:r>
+                            <m:rPr>
+                              <m:sty m:val="p"/>
+                            </m:rPr>
+                            <m:t>r</m:t>
+                          </m:r>
+                        </m:e>
+                      </m:d>
+                      <m:r>
+                        <m:rPr>
+                          <m:sty m:val="p"/>
+                        </m:rPr>
+                        <m:t>=</m:t>
+                      </m:r>
+                      <m:f>
+                        <m:fPr>
+                          <m:type m:val="bar"/>
+                        </m:fPr>
+                        <m:num>
+                          <m:r>
+                            <m:t>2</m:t>
+                          </m:r>
+                        </m:num>
+                        <m:den>
+                          <m:r>
+                            <m:t>n</m:t>
+                          </m:r>
+                        </m:den>
+                      </m:f>
+                      <m:nary>
+                        <m:naryPr>
+                          <m:chr m:val="∑"/>
+                          <m:limLoc m:val="undOvr"/>
+                          <m:subHide m:val="off"/>
+                          <m:supHide m:val="off"/>
+                        </m:naryPr>
+                        <m:sub>
+                          <m:r>
+                            <m:t>i</m:t>
+                          </m:r>
+                          <m:r>
+                            <m:rPr>
+                              <m:sty m:val="p"/>
+                            </m:rPr>
+                            <m:t>=</m:t>
+                          </m:r>
+                          <m:r>
+                            <m:t>1</m:t>
+                          </m:r>
+                        </m:sub>
+                        <m:sup>
+                          <m:r>
+                            <m:t>n</m:t>
+                          </m:r>
+                        </m:sup>
+                        <m:e>
+                          <m:r>
+                            <m:rPr>
+                              <m:sty m:val="p"/>
+                            </m:rPr>
+                            <m:t>C</m:t>
+                          </m:r>
+                          <m:r>
+                            <m:rPr>
+                              <m:sty m:val="p"/>
+                            </m:rPr>
+                            <m:t>o</m:t>
+                          </m:r>
+                          <m:r>
+                            <m:rPr>
+                              <m:sty m:val="p"/>
+                            </m:rPr>
+                            <m:t>v</m:t>
+                          </m:r>
+                        </m:e>
+                      </m:nary>
+                      <m:d>
+                        <m:dPr>
+                          <m:begChr m:val="("/>
+                          <m:sepChr m:val=""/>
+                          <m:endChr m:val=")"/>
+                          <m:grow/>
+                        </m:dPr>
+                        <m:e>
+                          <m:sSub>
+                            <m:e>
+                              <m:acc>
+                                <m:accPr>
+                                  <m:chr m:val="̂"/>
+                                </m:accPr>
+                                <m:e>
+                                  <m:r>
+                                    <m:t>y</m:t>
+                                  </m:r>
+                                </m:e>
+                              </m:acc>
+                            </m:e>
+                            <m:sub>
+                              <m:r>
+                                <m:t>i</m:t>
+                              </m:r>
+                            </m:sub>
+                          </m:sSub>
+                          <m:r>
+                            <m:rPr>
+                              <m:sty m:val="p"/>
+                            </m:rPr>
+                            <m:t>,</m:t>
+                          </m:r>
+                          <m:sSub>
+                            <m:e>
+                              <m:r>
+                                <m:t>y</m:t>
+                              </m:r>
+                            </m:e>
+                            <m:sub>
+                              <m:r>
+                                <m:t>i</m:t>
+                              </m:r>
+                            </m:sub>
+                          </m:sSub>
+                        </m:e>
+                      </m:d>
+                    </m:oMath>
+                  </m:oMathPara>
+                </a14:m>
+              </a:p>
+              <a:p>
+                <a:pPr lvl="0" indent="0" marL="0">
+                  <a:buNone/>
+                </a:pPr>
+                <a:r>
+                  <a:rPr/>
+                  <a:t>The </a:t>
+                </a:r>
+                <a:r>
+                  <a:rPr b="1"/>
+                  <a:t>optimism</a:t>
+                </a:r>
+                <a:r>
+                  <a:rPr/>
+                  <a:t> is twice the average covariance between a fitted value and its own outcome — </a:t>
+                </a:r>
+                <a:r>
+                  <a:rPr i="1"/>
+                  <a:t>the degree to which the model chases its own labels.</a:t>
+                </a:r>
+              </a:p>
+            </p:txBody>
+          </p:sp>
+        </mc:Choice>
+      </mc:AlternateContent>
+    </p:spTree>
+  </p:cSld>
+</p:sld>
+</file>
+
+<file path=ppt/slides/slide2.xml><?xml version="1.0" encoding="utf-8"?>
+<p:sld xmlns:a="http://schemas.openxmlformats.org/drawingml/2006/main" xmlns:r="http://schemas.openxmlformats.org/officeDocument/2006/relationships" xmlns:p="http://schemas.openxmlformats.org/presentationml/2006/main">
+  <p:cSld>
+    <p:spTree>
+      <p:nvGrpSpPr>
+        <p:cNvPr id="1" name=""/>
+        <p:cNvGrpSpPr/>
+        <p:nvPr/>
+      </p:nvGrpSpPr>
+      <p:grpSpPr>
+        <a:xfrm>
+          <a:off x="0" y="0"/>
+          <a:ext cx="0" cy="0"/>
+          <a:chOff x="0" y="0"/>
+          <a:chExt cx="0" cy="0"/>
+        </a:xfrm>
+      </p:grpSpPr>
+      <p:sp>
+        <p:nvSpPr>
+          <p:cNvPr id="3" name="Content Placeholder 2"/>
+          <p:cNvSpPr>
+            <a:spLocks noGrp="1"/>
+          </p:cNvSpPr>
+          <p:nvPr>
+            <p:ph idx="1"/>
+          </p:nvPr>
+        </p:nvSpPr>
+        <p:spPr/>
+        <p:txBody>
+          <a:bodyPr/>
+          <a:lstStyle/>
+          <a:p>
+            <a:pPr lvl="0" indent="0" marL="0">
+              <a:spcBef>
+                <a:spcPts val="3000"/>
+              </a:spcBef>
+              <a:buNone/>
+            </a:pPr>
+            <a:r>
+              <a:rPr b="1"/>
+              <a:t>Your model fits the past perfectly. Why is that bad news?</a:t>
+            </a:r>
+          </a:p>
+        </p:txBody>
+      </p:sp>
+    </p:spTree>
+  </p:cSld>
+</p:sld>
+</file>
+
+<file path=ppt/slides/slide20.xml><?xml version="1.0" encoding="utf-8"?>
+<p:sld xmlns:a="http://schemas.openxmlformats.org/drawingml/2006/main" xmlns:r="http://schemas.openxmlformats.org/officeDocument/2006/relationships" xmlns:p="http://schemas.openxmlformats.org/presentationml/2006/main">
+  <p:cSld>
+    <p:spTree>
+      <p:nvGrpSpPr>
+        <p:cNvPr id="1" name=""/>
+        <p:cNvGrpSpPr/>
+        <p:nvPr/>
+      </p:nvGrpSpPr>
+      <p:grpSpPr>
+        <a:xfrm>
+          <a:off x="0" y="0"/>
+          <a:ext cx="0" cy="0"/>
+          <a:chOff x="0" y="0"/>
+          <a:chExt cx="0" cy="0"/>
+        </a:xfrm>
+      </p:grpSpPr>
+      <p:sp>
+        <p:nvSpPr>
+          <p:cNvPr id="2" name="Title 1"/>
+          <p:cNvSpPr>
+            <a:spLocks noGrp="1"/>
+          </p:cNvSpPr>
+          <p:nvPr>
+            <p:ph type="title"/>
+          </p:nvPr>
+        </p:nvSpPr>
+        <p:spPr/>
+        <p:txBody>
+          <a:bodyPr/>
+          <a:lstStyle/>
+          <a:p>
+            <a:pPr lvl="0" indent="0" marL="0">
+              <a:buNone/>
+            </a:pPr>
+            <a:r>
+              <a:rPr/>
+              <a:t>Which gives the classical criteria</a:t>
+            </a:r>
+          </a:p>
+        </p:txBody>
+      </p:sp>
+      <mc:AlternateContent xmlns:mc="http://schemas.openxmlformats.org/markup-compatibility/2006">
+        <mc:Choice xmlns:a14="http://schemas.microsoft.com/office/drawing/2010/main" Requires="a14">
+          <p:sp>
+            <p:nvSpPr>
+              <p:cNvPr id="3" name="Content Placeholder 2"/>
+              <p:cNvSpPr>
+                <a:spLocks noGrp="1"/>
+              </p:cNvSpPr>
+              <p:nvPr>
+                <p:ph idx="1"/>
+              </p:nvPr>
+            </p:nvSpPr>
+            <p:spPr/>
+            <p:txBody>
+              <a:bodyPr/>
+              <a:lstStyle/>
+              <a:p>
+                <a:pPr lvl="0" indent="0" marL="0">
+                  <a:buNone/>
+                </a:pPr>
+                <a:r>
+                  <a:rPr/>
+                  <a:t>For a linear fit with </a:t>
+                </a:r>
+                <a14:m>
+                  <m:oMath xmlns:m="http://schemas.openxmlformats.org/officeDocument/2006/math">
+                    <m:r>
+                      <m:t>p</m:t>
+                    </m:r>
+                  </m:oMath>
+                </a14:m>
+                <a:r>
+                  <a:rPr/>
+                  <a:t> parameters that covariance sum is </a:t>
+                </a:r>
+                <a14:m>
+                  <m:oMath xmlns:m="http://schemas.openxmlformats.org/officeDocument/2006/math">
+                    <m:r>
+                      <m:t>p</m:t>
+                    </m:r>
+                    <m:sSup>
+                      <m:e>
+                        <m:r>
+                          <m:t>σ</m:t>
+                        </m:r>
+                      </m:e>
+                      <m:sup>
+                        <m:r>
+                          <m:t>2</m:t>
+                        </m:r>
+                      </m:sup>
+                    </m:sSup>
+                  </m:oMath>
+                </a14:m>
+                <a:r>
+                  <a:rPr/>
+                  <a:t>, so the optimism is </a:t>
+                </a:r>
+                <a14:m>
+                  <m:oMath xmlns:m="http://schemas.openxmlformats.org/officeDocument/2006/math">
+                    <m:r>
+                      <m:t>2</m:t>
+                    </m:r>
+                    <m:r>
+                      <m:t>p</m:t>
+                    </m:r>
+                    <m:sSup>
+                      <m:e>
+                        <m:r>
+                          <m:t>σ</m:t>
+                        </m:r>
+                      </m:e>
+                      <m:sup>
+                        <m:r>
+                          <m:t>2</m:t>
+                        </m:r>
+                      </m:sup>
+                    </m:sSup>
+                    <m:r>
+                      <m:rPr>
+                        <m:sty m:val="p"/>
+                      </m:rPr>
+                      <m:t>/</m:t>
+                    </m:r>
+                    <m:r>
+                      <m:t>n</m:t>
+                    </m:r>
+                  </m:oMath>
+                </a14:m>
+                <a:r>
+                  <a:rPr/>
+                  <a:t>, motivating</a:t>
+                </a:r>
+              </a:p>
+              <a:p>
+                <a:pPr lvl="0" indent="0" marL="0">
+                  <a:buNone/>
+                </a:pPr>
+                <a14:m>
+                  <m:oMathPara xmlns:m="http://schemas.openxmlformats.org/officeDocument/2006/math">
+                    <m:oMathParaPr>
+                      <m:jc m:val="center"/>
+                    </m:oMathParaPr>
+                    <m:oMath>
+                      <m:sSub>
+                        <m:e>
+                          <m:r>
+                            <m:t>C</m:t>
+                          </m:r>
+                        </m:e>
+                        <m:sub>
+                          <m:r>
+                            <m:t>p</m:t>
+                          </m:r>
+                        </m:sub>
+                      </m:sSub>
+                      <m:r>
+                        <m:rPr>
+                          <m:sty m:val="p"/>
+                        </m:rPr>
+                        <m:t>=</m:t>
+                      </m:r>
+                      <m:r>
+                        <m:rPr>
+                          <m:sty m:val="p"/>
+                        </m:rPr>
+                        <m:t>e</m:t>
+                      </m:r>
+                      <m:r>
+                        <m:rPr>
+                          <m:sty m:val="p"/>
+                        </m:rPr>
+                        <m:t>r</m:t>
+                      </m:r>
+                      <m:r>
+                        <m:rPr>
+                          <m:sty m:val="p"/>
+                        </m:rPr>
+                        <m:t>r</m:t>
+                      </m:r>
+                      <m:r>
+                        <m:rPr>
+                          <m:sty m:val="p"/>
+                        </m:rPr>
+                        <m:t>+</m:t>
+                      </m:r>
+                      <m:f>
+                        <m:fPr>
+                          <m:type m:val="bar"/>
+                        </m:fPr>
+                        <m:num>
+                          <m:r>
+                            <m:t>2</m:t>
+                          </m:r>
+                          <m:r>
+                            <m:t>p</m:t>
+                          </m:r>
+                          <m:sSup>
+                            <m:e>
+                              <m:acc>
+                                <m:accPr>
+                                  <m:chr m:val="̂"/>
+                                </m:accPr>
+                                <m:e>
+                                  <m:r>
+                                    <m:t>σ</m:t>
+                                  </m:r>
+                                </m:e>
+                              </m:acc>
+                            </m:e>
+                            <m:sup>
+                              <m:r>
+                                <m:t>2</m:t>
+                              </m:r>
+                            </m:sup>
+                          </m:sSup>
+                        </m:num>
+                        <m:den>
+                          <m:r>
+                            <m:t>n</m:t>
+                          </m:r>
+                        </m:den>
+                      </m:f>
+                      <m:r>
+                        <m:rPr>
+                          <m:sty m:val="p"/>
+                        </m:rPr>
+                        <m:t>,</m:t>
+                      </m:r>
+                      <m:r>
+                        <m:t>  </m:t>
+                      </m:r>
+                      <m:r>
+                        <m:rPr>
+                          <m:sty m:val="p"/>
+                        </m:rPr>
+                        <m:t>A</m:t>
+                      </m:r>
+                      <m:r>
+                        <m:rPr>
+                          <m:sty m:val="p"/>
+                        </m:rPr>
+                        <m:t>I</m:t>
+                      </m:r>
+                      <m:r>
+                        <m:rPr>
+                          <m:sty m:val="p"/>
+                        </m:rPr>
+                        <m:t>C</m:t>
+                      </m:r>
+                      <m:r>
+                        <m:rPr>
+                          <m:sty m:val="p"/>
+                        </m:rPr>
+                        <m:t>=</m:t>
+                      </m:r>
+                      <m:r>
+                        <m:rPr>
+                          <m:sty m:val="p"/>
+                        </m:rPr>
+                        <m:t>−</m:t>
+                      </m:r>
+                      <m:f>
+                        <m:fPr>
+                          <m:type m:val="bar"/>
+                        </m:fPr>
+                        <m:num>
+                          <m:r>
+                            <m:t>2</m:t>
+                          </m:r>
+                        </m:num>
+                        <m:den>
+                          <m:r>
+                            <m:t>n</m:t>
+                          </m:r>
+                        </m:den>
+                      </m:f>
+                      <m:r>
+                        <m:rPr>
+                          <m:sty m:val="p"/>
+                        </m:rPr>
+                        <m:t>log</m:t>
+                      </m:r>
+                      <m:r>
+                        <m:rPr>
+                          <m:sty m:val="p"/>
+                          <m:scr m:val="script"/>
+                        </m:rPr>
+                        <m:t>L</m:t>
+                      </m:r>
+                      <m:r>
+                        <m:rPr>
+                          <m:sty m:val="p"/>
+                        </m:rPr>
+                        <m:t>+</m:t>
+                      </m:r>
+                      <m:f>
+                        <m:fPr>
+                          <m:type m:val="bar"/>
+                        </m:fPr>
+                        <m:num>
+                          <m:r>
+                            <m:t>2</m:t>
+                          </m:r>
+                          <m:r>
+                            <m:t>p</m:t>
+                          </m:r>
+                        </m:num>
+                        <m:den>
+                          <m:r>
+                            <m:t>n</m:t>
+                          </m:r>
+                        </m:den>
+                      </m:f>
+                      <m:r>
+                        <m:rPr>
+                          <m:sty m:val="p"/>
+                        </m:rPr>
+                        <m:t>,</m:t>
+                      </m:r>
+                      <m:r>
+                        <m:t>  </m:t>
+                      </m:r>
+                      <m:r>
+                        <m:rPr>
+                          <m:sty m:val="p"/>
+                        </m:rPr>
+                        <m:t>B</m:t>
+                      </m:r>
+                      <m:r>
+                        <m:rPr>
+                          <m:sty m:val="p"/>
+                        </m:rPr>
+                        <m:t>I</m:t>
+                      </m:r>
+                      <m:r>
+                        <m:rPr>
+                          <m:sty m:val="p"/>
+                        </m:rPr>
+                        <m:t>C</m:t>
+                      </m:r>
+                      <m:r>
+                        <m:rPr>
+                          <m:sty m:val="p"/>
+                        </m:rPr>
+                        <m:t>=</m:t>
+                      </m:r>
+                      <m:r>
+                        <m:rPr>
+                          <m:sty m:val="p"/>
+                        </m:rPr>
+                        <m:t>−</m:t>
+                      </m:r>
+                      <m:r>
+                        <m:t>2</m:t>
+                      </m:r>
+                      <m:r>
+                        <m:rPr>
+                          <m:sty m:val="p"/>
+                        </m:rPr>
+                        <m:t>log</m:t>
+                      </m:r>
+                      <m:r>
+                        <m:rPr>
+                          <m:sty m:val="p"/>
+                          <m:scr m:val="script"/>
+                        </m:rPr>
+                        <m:t>L</m:t>
+                      </m:r>
+                      <m:r>
+                        <m:rPr>
+                          <m:sty m:val="p"/>
+                        </m:rPr>
+                        <m:t>+</m:t>
+                      </m:r>
+                      <m:r>
+                        <m:t>p</m:t>
+                      </m:r>
+                      <m:r>
+                        <m:rPr>
+                          <m:sty m:val="p"/>
+                        </m:rPr>
+                        <m:t>log</m:t>
+                      </m:r>
+                      <m:r>
+                        <m:t>n</m:t>
+                      </m:r>
+                    </m:oMath>
+                  </m:oMathPara>
+                </a14:m>
+              </a:p>
+              <a:p>
+                <a:pPr lvl="0" indent="0" marL="0">
+                  <a:buNone/>
+                </a:pPr>
+                <a:r>
+                  <a:rPr/>
+                  <a:t>BIC penalises harder once </a:t>
+                </a:r>
+                <a14:m>
+                  <m:oMath xmlns:m="http://schemas.openxmlformats.org/officeDocument/2006/math">
+                    <m:r>
+                      <m:t>n</m:t>
+                    </m:r>
+                    <m:r>
+                      <m:rPr>
+                        <m:sty m:val="p"/>
+                      </m:rPr>
+                      <m:t>&gt;</m:t>
+                    </m:r>
+                    <m:sSup>
+                      <m:e>
+                        <m:r>
+                          <m:t>e</m:t>
+                        </m:r>
+                      </m:e>
+                      <m:sup>
+                        <m:r>
+                          <m:t>2</m:t>
+                        </m:r>
+                      </m:sup>
+                    </m:sSup>
+                    <m:r>
+                      <m:rPr>
+                        <m:sty m:val="p"/>
+                      </m:rPr>
+                      <m:t>≈</m:t>
+                    </m:r>
+                    <m:r>
+                      <m:t>7.4</m:t>
+                    </m:r>
+                  </m:oMath>
+                </a14:m>
+                <a:r>
+                  <a:rPr/>
+                  <a:t>. It is </a:t>
+                </a:r>
+                <a:r>
+                  <a:rPr b="1"/>
+                  <a:t>consistent for model selection</a:t>
+                </a:r>
+                <a:r>
+                  <a:rPr/>
+                  <a:t>; AIC is </a:t>
+                </a:r>
+                <a:r>
+                  <a:rPr b="1"/>
+                  <a:t>efficient for prediction</a:t>
+                </a:r>
+                <a:r>
+                  <a:rPr/>
+                  <a:t>. Different questions.</a:t>
+                </a:r>
+              </a:p>
+            </p:txBody>
+          </p:sp>
+        </mc:Choice>
+      </mc:AlternateContent>
+    </p:spTree>
+  </p:cSld>
+</p:sld>
+</file>
+
+<file path=ppt/slides/slide21.xml><?xml version="1.0" encoding="utf-8"?>
+<p:sld xmlns:a="http://schemas.openxmlformats.org/drawingml/2006/main" xmlns:r="http://schemas.openxmlformats.org/officeDocument/2006/relationships" xmlns:p="http://schemas.openxmlformats.org/presentationml/2006/main">
+  <p:cSld>
+    <p:spTree>
+      <p:nvGrpSpPr>
+        <p:cNvPr id="1" name=""/>
+        <p:cNvGrpSpPr/>
+        <p:nvPr/>
+      </p:nvGrpSpPr>
+      <p:grpSpPr>
+        <a:xfrm>
+          <a:off x="0" y="0"/>
+          <a:ext cx="0" cy="0"/>
+          <a:chOff x="0" y="0"/>
+          <a:chExt cx="0" cy="0"/>
+        </a:xfrm>
+      </p:grpSpPr>
+      <p:sp>
+        <p:nvSpPr>
+          <p:cNvPr id="2" name="Title 1"/>
+          <p:cNvSpPr>
+            <a:spLocks noGrp="1"/>
+          </p:cNvSpPr>
+          <p:nvPr>
+            <p:ph type="title"/>
+          </p:nvPr>
+        </p:nvSpPr>
+        <p:spPr/>
+        <p:txBody>
+          <a:bodyPr/>
+          <a:lstStyle/>
+          <a:p>
+            <a:pPr lvl="0" indent="0" marL="0">
+              <a:buNone/>
+            </a:pPr>
+            <a:r>
+              <a:rPr/>
+              <a:t>Effective degrees of freedom</a:t>
+            </a:r>
+          </a:p>
+        </p:txBody>
+      </p:sp>
+      <mc:AlternateContent xmlns:mc="http://schemas.openxmlformats.org/markup-compatibility/2006">
+        <mc:Choice xmlns:a14="http://schemas.microsoft.com/office/drawing/2010/main" Requires="a14">
+          <p:sp>
+            <p:nvSpPr>
+              <p:cNvPr id="3" name="Content Placeholder 2"/>
+              <p:cNvSpPr>
+                <a:spLocks noGrp="1"/>
+              </p:cNvSpPr>
+              <p:nvPr>
+                <p:ph idx="1"/>
+              </p:nvPr>
+            </p:nvSpPr>
+            <p:spPr/>
+            <p:txBody>
+              <a:bodyPr/>
+              <a:lstStyle/>
+              <a:p>
+                <a:pPr lvl="0" indent="0" marL="0">
+                  <a:buNone/>
+                </a:pPr>
+                <a14:m>
+                  <m:oMathPara xmlns:m="http://schemas.openxmlformats.org/officeDocument/2006/math">
+                    <m:oMathParaPr>
+                      <m:jc m:val="center"/>
+                    </m:oMathParaPr>
+                    <m:oMath>
+                      <m:r>
+                        <m:rPr>
+                          <m:sty m:val="p"/>
+                        </m:rPr>
+                        <m:t>d</m:t>
+                      </m:r>
+                      <m:r>
+                        <m:rPr>
+                          <m:sty m:val="p"/>
+                        </m:rPr>
+                        <m:t>f</m:t>
+                      </m:r>
+                      <m:d>
+                        <m:dPr>
+                          <m:begChr m:val="("/>
+                          <m:sepChr m:val=""/>
+                          <m:endChr m:val=")"/>
+                          <m:grow/>
+                        </m:dPr>
+                        <m:e>
+                          <m:acc>
+                            <m:accPr>
+                              <m:chr m:val="̂"/>
+                            </m:accPr>
+                            <m:e>
+                              <m:r>
+                                <m:t>f</m:t>
+                              </m:r>
+                            </m:e>
+                          </m:acc>
+                        </m:e>
+                      </m:d>
+                      <m:r>
+                        <m:rPr>
+                          <m:sty m:val="p"/>
+                        </m:rPr>
+                        <m:t>=</m:t>
+                      </m:r>
+                      <m:f>
+                        <m:fPr>
+                          <m:type m:val="bar"/>
+                        </m:fPr>
+                        <m:num>
+                          <m:r>
+                            <m:t>1</m:t>
+                          </m:r>
+                        </m:num>
+                        <m:den>
+                          <m:sSup>
+                            <m:e>
+                              <m:r>
+                                <m:t>σ</m:t>
+                              </m:r>
+                            </m:e>
+                            <m:sup>
+                              <m:r>
+                                <m:t>2</m:t>
+                              </m:r>
+                            </m:sup>
+                          </m:sSup>
+                        </m:den>
+                      </m:f>
+                      <m:nary>
+                        <m:naryPr>
+                          <m:chr m:val="∑"/>
+                          <m:limLoc m:val="undOvr"/>
+                          <m:subHide m:val="off"/>
+                          <m:supHide m:val="on"/>
+                        </m:naryPr>
+                        <m:sub>
+                          <m:r>
+                            <m:t>i</m:t>
+                          </m:r>
+                        </m:sub>
+                        <m:sup>
+                          <m:r>
+                            <m:t>​</m:t>
+                          </m:r>
+                        </m:sup>
+                        <m:e>
+                          <m:r>
+                            <m:rPr>
+                              <m:sty m:val="p"/>
+                            </m:rPr>
+                            <m:t>C</m:t>
+                          </m:r>
+                          <m:r>
+                            <m:rPr>
+                              <m:sty m:val="p"/>
+                            </m:rPr>
+                            <m:t>o</m:t>
+                          </m:r>
+                          <m:r>
+                            <m:rPr>
+                              <m:sty m:val="p"/>
+                            </m:rPr>
+                            <m:t>v</m:t>
+                          </m:r>
+                        </m:e>
+                      </m:nary>
+                      <m:d>
+                        <m:dPr>
+                          <m:begChr m:val="("/>
+                          <m:sepChr m:val=""/>
+                          <m:endChr m:val=")"/>
+                          <m:grow/>
+                        </m:dPr>
+                        <m:e>
+                          <m:sSub>
+                            <m:e>
+                              <m:acc>
+                                <m:accPr>
+                                  <m:chr m:val="̂"/>
+                                </m:accPr>
+                                <m:e>
+                                  <m:r>
+                                    <m:t>y</m:t>
+                                  </m:r>
+                                </m:e>
+                              </m:acc>
+                            </m:e>
+                            <m:sub>
+                              <m:r>
+                                <m:t>i</m:t>
+                              </m:r>
+                            </m:sub>
+                          </m:sSub>
+                          <m:r>
+                            <m:rPr>
+                              <m:sty m:val="p"/>
+                            </m:rPr>
+                            <m:t>,</m:t>
+                          </m:r>
+                          <m:sSub>
+                            <m:e>
+                              <m:r>
+                                <m:t>y</m:t>
+                              </m:r>
+                            </m:e>
+                            <m:sub>
+                              <m:r>
+                                <m:t>i</m:t>
+                              </m:r>
+                            </m:sub>
+                          </m:sSub>
+                        </m:e>
+                      </m:d>
+                    </m:oMath>
+                  </m:oMathPara>
+                </a14:m>
+              </a:p>
+              <a:p>
+                <a:pPr lvl="0" indent="0" marL="0">
+                  <a:buNone/>
+                </a:pPr>
+                <a:r>
+                  <a:rPr/>
+                  <a:t>This generalises “number of parameters” to methods where counting them is meaningless — which is exactly what we need from Session 05, where a penalty makes </a:t>
+                </a:r>
+                <a14:m>
+                  <m:oMath xmlns:m="http://schemas.openxmlformats.org/officeDocument/2006/math">
+                    <m:r>
+                      <m:t>p</m:t>
+                    </m:r>
+                  </m:oMath>
+                </a14:m>
+                <a:r>
+                  <a:rPr/>
+                  <a:t> a fiction.</a:t>
+                </a:r>
+              </a:p>
+            </p:txBody>
+          </p:sp>
+        </mc:Choice>
+      </mc:AlternateContent>
+    </p:spTree>
+  </p:cSld>
+</p:sld>
+</file>
+
+<file path=ppt/slides/slide22.xml><?xml version="1.0" encoding="utf-8"?>
+<p:sld xmlns:a="http://schemas.openxmlformats.org/drawingml/2006/main" xmlns:r="http://schemas.openxmlformats.org/officeDocument/2006/relationships" xmlns:p="http://schemas.openxmlformats.org/presentationml/2006/main">
+  <p:cSld>
+    <p:spTree>
+      <p:nvGrpSpPr>
+        <p:cNvPr id="1" name=""/>
+        <p:cNvGrpSpPr/>
+        <p:nvPr/>
+      </p:nvGrpSpPr>
+      <p:grpSpPr>
+        <a:xfrm>
+          <a:off x="0" y="0"/>
+          <a:ext cx="0" cy="0"/>
+          <a:chOff x="0" y="0"/>
+          <a:chExt cx="0" cy="0"/>
+        </a:xfrm>
+      </p:grpSpPr>
+      <p:sp>
+        <p:nvSpPr>
+          <p:cNvPr id="2" name="Title 1"/>
+          <p:cNvSpPr>
+            <a:spLocks noGrp="1"/>
+          </p:cNvSpPr>
+          <p:nvPr>
+            <p:ph type="title"/>
+          </p:nvPr>
+        </p:nvSpPr>
+        <p:spPr>
+          <a:xfrm>
+            <a:off x="722313" y="1850000"/>
+            <a:ext cx="7772400" cy="1300000"/>
+          </a:xfrm>
+        </p:spPr>
+        <p:txBody>
+          <a:bodyPr/>
+          <a:lstStyle/>
+          <a:p>
+            <a:pPr lvl="0" indent="0" marL="0">
+              <a:buNone/>
+            </a:pPr>
+            <a:r>
+              <a:rPr/>
+              <a:t>5 · Cross-validation</a:t>
+            </a:r>
+          </a:p>
+        </p:txBody>
+      </p:sp>
+    </p:spTree>
+  </p:cSld>
+</p:sld>
+</file>
+
+<file path=ppt/slides/slide23.xml><?xml version="1.0" encoding="utf-8"?>
+<p:sld xmlns:a="http://schemas.openxmlformats.org/drawingml/2006/main" xmlns:r="http://schemas.openxmlformats.org/officeDocument/2006/relationships" xmlns:p="http://schemas.openxmlformats.org/presentationml/2006/main">
+  <p:cSld>
+    <p:spTree>
+      <p:nvGrpSpPr>
+        <p:cNvPr id="1" name=""/>
+        <p:cNvGrpSpPr/>
+        <p:nvPr/>
+      </p:nvGrpSpPr>
+      <p:grpSpPr>
+        <a:xfrm>
+          <a:off x="0" y="0"/>
+          <a:ext cx="0" cy="0"/>
+          <a:chOff x="0" y="0"/>
+          <a:chExt cx="0" cy="0"/>
+        </a:xfrm>
+      </p:grpSpPr>
+      <p:sp>
+        <p:nvSpPr>
+          <p:cNvPr id="2" name="Title 1"/>
+          <p:cNvSpPr>
+            <a:spLocks noGrp="1"/>
+          </p:cNvSpPr>
+          <p:nvPr>
+            <p:ph type="title"/>
+          </p:nvPr>
+        </p:nvSpPr>
+        <p:spPr/>
+        <p:txBody>
+          <a:bodyPr/>
+          <a:lstStyle/>
+          <a:p>
+            <a:pPr lvl="0" indent="0" marL="0">
+              <a:buNone/>
+            </a:pPr>
+            <a:r>
+              <a:rPr/>
+              <a:t>The estimator</a:t>
+            </a:r>
+          </a:p>
+        </p:txBody>
+      </p:sp>
+      <mc:AlternateContent xmlns:mc="http://schemas.openxmlformats.org/markup-compatibility/2006">
+        <mc:Choice xmlns:a14="http://schemas.microsoft.com/office/drawing/2010/main" Requires="a14">
+          <p:sp>
+            <p:nvSpPr>
+              <p:cNvPr id="3" name="Content Placeholder 2"/>
+              <p:cNvSpPr>
+                <a:spLocks noGrp="1"/>
+              </p:cNvSpPr>
+              <p:nvPr>
+                <p:ph idx="1"/>
+              </p:nvPr>
+            </p:nvSpPr>
+            <p:spPr/>
+            <p:txBody>
+              <a:bodyPr/>
+              <a:lstStyle/>
+              <a:p>
+                <a:pPr lvl="0" indent="0" marL="0">
+                  <a:buNone/>
+                </a:pPr>
+                <a14:m>
+                  <m:oMathPara xmlns:m="http://schemas.openxmlformats.org/officeDocument/2006/math">
+                    <m:oMathParaPr>
+                      <m:jc m:val="center"/>
+                    </m:oMathParaPr>
+                    <m:oMath>
+                      <m:sSub>
+                        <m:e>
+                          <m:r>
+                            <m:rPr>
+                              <m:sty m:val="p"/>
+                            </m:rPr>
+                            <m:t>C</m:t>
+                          </m:r>
+                          <m:r>
+                            <m:rPr>
+                              <m:sty m:val="p"/>
+                            </m:rPr>
+                            <m:t>V</m:t>
+                          </m:r>
+                        </m:e>
+                        <m:sub>
+                          <m:r>
+                            <m:t>K</m:t>
+                          </m:r>
+                        </m:sub>
+                      </m:sSub>
+                      <m:r>
+                        <m:rPr>
+                          <m:sty m:val="p"/>
+                        </m:rPr>
+                        <m:t>=</m:t>
+                      </m:r>
+                      <m:f>
+                        <m:fPr>
+                          <m:type m:val="bar"/>
+                        </m:fPr>
+                        <m:num>
+                          <m:r>
+                            <m:t>1</m:t>
+                          </m:r>
+                        </m:num>
+                        <m:den>
+                          <m:r>
+                            <m:t>n</m:t>
+                          </m:r>
+                        </m:den>
+                      </m:f>
+                      <m:nary>
+                        <m:naryPr>
+                          <m:chr m:val="∑"/>
+                          <m:limLoc m:val="undOvr"/>
+                          <m:subHide m:val="off"/>
+                          <m:supHide m:val="off"/>
+                        </m:naryPr>
+                        <m:sub>
+                          <m:r>
+                            <m:t>k</m:t>
+                          </m:r>
+                          <m:r>
+                            <m:rPr>
+                              <m:sty m:val="p"/>
+                            </m:rPr>
+                            <m:t>=</m:t>
+                          </m:r>
+                          <m:r>
+                            <m:t>1</m:t>
+                          </m:r>
+                        </m:sub>
+                        <m:sup>
+                          <m:r>
+                            <m:t>K</m:t>
+                          </m:r>
+                        </m:sup>
+                        <m:e>
+                          <m:nary>
+                            <m:naryPr>
+                              <m:chr m:val="∑"/>
+                              <m:limLoc m:val="undOvr"/>
+                              <m:subHide m:val="off"/>
+                              <m:supHide m:val="on"/>
+                            </m:naryPr>
+                            <m:sub>
+                              <m:r>
+                                <m:t>i</m:t>
+                              </m:r>
+                              <m:r>
+                                <m:rPr>
+                                  <m:sty m:val="p"/>
+                                </m:rPr>
+                                <m:t>∈</m:t>
+                              </m:r>
+                              <m:sSub>
+                                <m:e>
+                                  <m:r>
+                                    <m:rPr>
+                                      <m:sty m:val="p"/>
+                                      <m:scr m:val="script"/>
+                                    </m:rPr>
+                                    <m:t>F</m:t>
+                                  </m:r>
+                                </m:e>
+                                <m:sub>
+                                  <m:r>
+                                    <m:t>k</m:t>
+                                  </m:r>
+                                </m:sub>
+                              </m:sSub>
+                            </m:sub>
+                            <m:sup>
+                              <m:r>
+                                <m:t>​</m:t>
+                              </m:r>
+                            </m:sup>
+                            <m:e>
+                              <m:r>
+                                <m:t>L</m:t>
+                              </m:r>
+                            </m:e>
+                          </m:nary>
+                        </m:e>
+                      </m:nary>
+                      <m:d>
+                        <m:dPr>
+                          <m:begChr m:val="("/>
+                          <m:sepChr m:val=""/>
+                          <m:endChr m:val=")"/>
+                          <m:grow/>
+                        </m:dPr>
+                        <m:e>
+                          <m:sSub>
+                            <m:e>
+                              <m:r>
+                                <m:t>y</m:t>
+                              </m:r>
+                            </m:e>
+                            <m:sub>
+                              <m:r>
+                                <m:t>i</m:t>
+                              </m:r>
+                            </m:sub>
+                          </m:sSub>
+                          <m:r>
+                            <m:rPr>
+                              <m:sty m:val="p"/>
+                            </m:rPr>
+                            <m:t>,</m:t>
+                          </m:r>
+                          <m:sSup>
+                            <m:e>
+                              <m:acc>
+                                <m:accPr>
+                                  <m:chr m:val="̂"/>
+                                </m:accPr>
+                                <m:e>
+                                  <m:r>
+                                    <m:t>f</m:t>
+                                  </m:r>
+                                </m:e>
+                              </m:acc>
+                            </m:e>
+                            <m:sup>
+                              <m:r>
+                                <m:rPr>
+                                  <m:sty m:val="p"/>
+                                </m:rPr>
+                                <m:t>−</m:t>
+                              </m:r>
+                              <m:r>
+                                <m:t>k</m:t>
+                              </m:r>
+                            </m:sup>
+                          </m:sSup>
+                          <m:d>
+                            <m:dPr>
+                              <m:begChr m:val="("/>
+                              <m:sepChr m:val=""/>
+                              <m:endChr m:val=")"/>
+                              <m:grow/>
+                            </m:dPr>
+                            <m:e>
+                              <m:sSub>
+                                <m:e>
+                                  <m:r>
+                                    <m:t>x</m:t>
+                                  </m:r>
+                                </m:e>
+                                <m:sub>
+                                  <m:r>
+                                    <m:t>i</m:t>
+                                  </m:r>
+                                </m:sub>
+                              </m:sSub>
+                            </m:e>
+                          </m:d>
+                        </m:e>
+                      </m:d>
+                    </m:oMath>
+                  </m:oMathPara>
+                </a14:m>
+              </a:p>
+              <a:p>
+                <a:pPr lvl="0" indent="0" marL="0">
+                  <a:buNone/>
+                </a:pPr>
+                <a:r>
+                  <a:rPr/>
+                  <a:t>Fit on the complement of each fold; predict the fold you left out.</a:t>
+                </a:r>
+              </a:p>
+            </p:txBody>
+          </p:sp>
+        </mc:Choice>
+      </mc:AlternateContent>
+    </p:spTree>
+  </p:cSld>
+</p:sld>
+</file>
+
+<file path=ppt/slides/slide24.xml><?xml version="1.0" encoding="utf-8"?>
+<p:sld xmlns:a="http://schemas.openxmlformats.org/drawingml/2006/main" xmlns:r="http://schemas.openxmlformats.org/officeDocument/2006/relationships" xmlns:p="http://schemas.openxmlformats.org/presentationml/2006/main">
+  <p:cSld>
+    <p:spTree>
+      <p:nvGrpSpPr>
+        <p:cNvPr id="1" name=""/>
+        <p:cNvGrpSpPr/>
+        <p:nvPr/>
+      </p:nvGrpSpPr>
+      <p:grpSpPr>
+        <a:xfrm>
+          <a:off x="0" y="0"/>
+          <a:ext cx="0" cy="0"/>
+          <a:chOff x="0" y="0"/>
+          <a:chExt cx="0" cy="0"/>
+        </a:xfrm>
+      </p:grpSpPr>
+      <p:sp>
+        <p:nvSpPr>
+          <p:cNvPr id="2" name="Title 1"/>
+          <p:cNvSpPr>
+            <a:spLocks noGrp="1"/>
+          </p:cNvSpPr>
+          <p:nvPr>
+            <p:ph type="title"/>
+          </p:nvPr>
+        </p:nvSpPr>
+        <p:spPr/>
+        <p:txBody>
+          <a:bodyPr/>
+          <a:lstStyle/>
+          <a:p>
+            <a:pPr lvl="0" indent="0" marL="0">
+              <a:buNone/>
+            </a:pPr>
+            <a:r>
+              <a:rPr/>
+              <a:t>Three schemes, three questions</a:t>
+            </a:r>
+          </a:p>
+        </p:txBody>
+      </p:sp>
+      <p:pic>
+        <p:nvPicPr>
+          <p:cNvPr descr="slides_files/figure-pptx/cell-5-output-1.png" id="0" name="Picture 1"/>
+          <p:cNvPicPr>
+            <a:picLocks noGrp="1" noChangeAspect="1"/>
+          </p:cNvPicPr>
+          <p:nvPr/>
+        </p:nvPicPr>
+        <p:blipFill>
+          <a:blip r:embed="rId2"/>
+          <a:stretch>
+            <a:fillRect/>
+          </a:stretch>
+        </p:blipFill>
+        <p:spPr bwMode="auto">
+          <a:xfrm>
+            <a:off x="596900" y="1193800"/>
+            <a:ext cx="7950200" cy="3390900"/>
+          </a:xfrm>
+          <a:prstGeom prst="rect">
+            <a:avLst/>
+          </a:prstGeom>
+          <a:noFill/>
+          <a:ln w="9525">
+            <a:noFill/>
+            <a:headEnd/>
+            <a:tailEnd/>
+          </a:ln>
+        </p:spPr>
+      </p:pic>
+    </p:spTree>
+  </p:cSld>
+</p:sld>
+</file>
+
+<file path=ppt/slides/slide25.xml><?xml version="1.0" encoding="utf-8"?>
+<p:sld xmlns:a="http://schemas.openxmlformats.org/drawingml/2006/main" xmlns:r="http://schemas.openxmlformats.org/officeDocument/2006/relationships" xmlns:p="http://schemas.openxmlformats.org/presentationml/2006/main">
+  <p:cSld>
+    <p:spTree>
+      <p:nvGrpSpPr>
+        <p:cNvPr id="1" name=""/>
+        <p:cNvGrpSpPr/>
+        <p:nvPr/>
+      </p:nvGrpSpPr>
+      <p:grpSpPr>
+        <a:xfrm>
+          <a:off x="0" y="0"/>
+          <a:ext cx="0" cy="0"/>
+          <a:chOff x="0" y="0"/>
+          <a:chExt cx="0" cy="0"/>
+        </a:xfrm>
+      </p:grpSpPr>
+      <p:sp>
+        <p:nvSpPr>
+          <p:cNvPr id="3" name="Content Placeholder 2"/>
+          <p:cNvSpPr>
+            <a:spLocks noGrp="1"/>
+          </p:cNvSpPr>
+          <p:nvPr>
+            <p:ph idx="1"/>
+          </p:nvPr>
+        </p:nvSpPr>
+        <p:spPr/>
+        <p:txBody>
+          <a:bodyPr/>
+          <a:lstStyle/>
+          <a:p>
+            <a:pPr lvl="0" indent="0" marL="0">
+              <a:buNone/>
+            </a:pPr>
+            <a:r>
+              <a:rPr/>
+              <a:t>Choose the split that matches </a:t>
+            </a:r>
+            <a:r>
+              <a:rPr b="1"/>
+              <a:t>the sentence you intend to write in your conclusion.</a:t>
+            </a:r>
+            <a:r>
+              <a:rPr/>
+              <a:t> Then say which you used.</a:t>
+            </a:r>
+          </a:p>
+        </p:txBody>
+      </p:sp>
+    </p:spTree>
+  </p:cSld>
+</p:sld>
+</file>
+
+<file path=ppt/slides/slide26.xml><?xml version="1.0" encoding="utf-8"?>
+<p:sld xmlns:a="http://schemas.openxmlformats.org/drawingml/2006/main" xmlns:r="http://schemas.openxmlformats.org/officeDocument/2006/relationships" xmlns:p="http://schemas.openxmlformats.org/presentationml/2006/main">
+  <p:cSld>
+    <p:spTree>
+      <p:nvGrpSpPr>
+        <p:cNvPr id="1" name=""/>
+        <p:cNvGrpSpPr/>
+        <p:nvPr/>
+      </p:nvGrpSpPr>
+      <p:grpSpPr>
+        <a:xfrm>
+          <a:off x="0" y="0"/>
+          <a:ext cx="0" cy="0"/>
+          <a:chOff x="0" y="0"/>
+          <a:chExt cx="0" cy="0"/>
+        </a:xfrm>
+      </p:grpSpPr>
+      <mc:AlternateContent xmlns:mc="http://schemas.openxmlformats.org/markup-compatibility/2006">
+        <mc:Choice xmlns:a14="http://schemas.microsoft.com/office/drawing/2010/main" Requires="a14">
+          <p:sp>
+            <p:nvSpPr>
+              <p:cNvPr id="2" name="Title 1"/>
+              <p:cNvSpPr>
+                <a:spLocks noGrp="1"/>
+              </p:cNvSpPr>
+              <p:nvPr>
+                <p:ph type="title"/>
+              </p:nvPr>
+            </p:nvSpPr>
+            <p:spPr/>
+            <p:txBody>
+              <a:bodyPr/>
+              <a:lstStyle/>
+              <a:p>
+                <a:pPr lvl="0" indent="0" marL="0">
+                  <a:buNone/>
+                </a:pPr>
+                <a:r>
+                  <a:rPr/>
+                  <a:t>Choosing </a:t>
+                </a:r>
+                <a14:m>
+                  <m:oMath xmlns:m="http://schemas.openxmlformats.org/officeDocument/2006/math">
+                    <m:r>
+                      <m:t>K</m:t>
+                    </m:r>
+                  </m:oMath>
+                </a14:m>
+              </a:p>
+            </p:txBody>
+          </p:sp>
+        </mc:Choice>
+      </mc:AlternateContent>
+      <mc:AlternateContent xmlns:mc="http://schemas.openxmlformats.org/markup-compatibility/2006">
+        <mc:Choice xmlns:a14="http://schemas.microsoft.com/office/drawing/2010/main" Requires="a14">
+          <p:sp>
+            <p:nvSpPr>
+              <p:cNvPr id="3" name="Content Placeholder 2"/>
+              <p:cNvSpPr>
+                <a:spLocks noGrp="1"/>
+              </p:cNvSpPr>
+              <p:nvPr>
+                <p:ph idx="1"/>
+              </p:nvPr>
+            </p:nvSpPr>
+            <p:spPr/>
+            <p:txBody>
+              <a:bodyPr/>
+              <a:lstStyle/>
+              <a:p>
+                <a:pPr lvl="0"/>
+                <a14:m>
+                  <m:oMath xmlns:m="http://schemas.openxmlformats.org/officeDocument/2006/math">
+                    <m:r>
+                      <m:t>K</m:t>
+                    </m:r>
+                    <m:r>
+                      <m:rPr>
+                        <m:sty m:val="p"/>
+                      </m:rPr>
+                      <m:t>=</m:t>
+                    </m:r>
+                    <m:r>
+                      <m:t>5</m:t>
+                    </m:r>
+                  </m:oMath>
+                </a14:m>
+                <a:r>
+                  <a:rPr b="1"/>
+                  <a:t> or </a:t>
+                </a:r>
+                <a14:m>
+                  <m:oMath xmlns:m="http://schemas.openxmlformats.org/officeDocument/2006/math">
+                    <m:r>
+                      <m:t>10</m:t>
+                    </m:r>
+                  </m:oMath>
+                </a14:m>
+                <a:r>
+                  <a:rPr/>
+                  <a:t> — the standard compromise: some upward bias, much lower variance</a:t>
+                </a:r>
+              </a:p>
+              <a:p>
+                <a:pPr lvl="0"/>
+                <a14:m>
+                  <m:oMath xmlns:m="http://schemas.openxmlformats.org/officeDocument/2006/math">
+                    <m:r>
+                      <m:t>K</m:t>
+                    </m:r>
+                    <m:r>
+                      <m:rPr>
+                        <m:sty m:val="p"/>
+                      </m:rPr>
+                      <m:t>=</m:t>
+                    </m:r>
+                    <m:r>
+                      <m:t>n</m:t>
+                    </m:r>
+                  </m:oMath>
+                </a14:m>
+                <a:r>
+                  <a:rPr/>
+                  <a:t> (LOOCV) — nearly unbiased, high variance, expensive</a:t>
                 </a:r>
               </a:p>
               <a:p>
@@ -7645,204 +6060,182 @@
                 </a:pPr>
                 <a:r>
                   <a:rPr/>
-                  <a:t>Three cross terms vanish:</a:t>
+                  <a:t>For a linear smoother LOOCV is free once you have the hat matrix:</a:t>
                 </a:r>
               </a:p>
               <a:p>
-                <a:pPr lvl="0"/>
-                <a:r>
-                  <a:rPr/>
-                  <a:t>one because </a:t>
-                </a:r>
+                <a:pPr lvl="0" indent="0" marL="0">
+                  <a:buNone/>
+                </a:pPr>
                 <a14:m>
-                  <m:oMath xmlns:m="http://schemas.openxmlformats.org/officeDocument/2006/math">
-                    <m:r>
-                      <m:rPr>
-                        <m:sty m:val="p"/>
-                        <m:scr m:val="double-struck"/>
-                      </m:rPr>
-                      <m:t>E</m:t>
-                    </m:r>
-                    <m:d>
-                      <m:dPr>
-                        <m:begChr m:val="["/>
-                        <m:sepChr m:val=""/>
-                        <m:endChr m:val="]"/>
-                        <m:grow/>
-                      </m:dPr>
-                      <m:e>
-                        <m:sSub>
-                          <m:e>
-                            <m:r>
-                              <m:t>ε</m:t>
-                            </m:r>
-                          </m:e>
-                          <m:sub>
-                            <m:r>
-                              <m:t>0</m:t>
-                            </m:r>
-                          </m:sub>
-                        </m:sSub>
-                      </m:e>
-                    </m:d>
-                    <m:r>
-                      <m:rPr>
-                        <m:sty m:val="p"/>
-                      </m:rPr>
-                      <m:t>=</m:t>
-                    </m:r>
-                    <m:r>
-                      <m:t>0</m:t>
-                    </m:r>
-                  </m:oMath>
-                </a14:m>
-                <a:r>
-                  <a:rPr/>
-                  <a:t> and </a:t>
-                </a:r>
-                <a14:m>
-                  <m:oMath xmlns:m="http://schemas.openxmlformats.org/officeDocument/2006/math">
-                    <m:sSub>
-                      <m:e>
-                        <m:r>
-                          <m:t>ε</m:t>
-                        </m:r>
-                      </m:e>
-                      <m:sub>
-                        <m:r>
-                          <m:t>0</m:t>
-                        </m:r>
-                      </m:sub>
-                    </m:sSub>
-                  </m:oMath>
-                </a14:m>
-                <a:r>
-                  <a:rPr/>
-                  <a:t> is independent of the training sample</a:t>
-                </a:r>
-              </a:p>
-              <a:p>
-                <a:pPr lvl="0"/>
-                <a:r>
-                  <a:rPr/>
-                  <a:t>two because </a:t>
-                </a:r>
-                <a14:m>
-                  <m:oMath xmlns:m="http://schemas.openxmlformats.org/officeDocument/2006/math">
-                    <m:r>
-                      <m:rPr>
-                        <m:sty m:val="p"/>
-                        <m:scr m:val="double-struck"/>
-                      </m:rPr>
-                      <m:t>E</m:t>
-                    </m:r>
-                    <m:d>
-                      <m:dPr>
-                        <m:begChr m:val="["/>
-                        <m:sepChr m:val=""/>
-                        <m:endChr m:val="]"/>
-                        <m:grow/>
-                      </m:dPr>
-                      <m:e>
-                        <m:acc>
-                          <m:accPr>
-                            <m:chr m:val="̂"/>
-                          </m:accPr>
-                          <m:e>
-                            <m:r>
-                              <m:t>f</m:t>
-                            </m:r>
-                          </m:e>
-                        </m:acc>
-                        <m:d>
-                          <m:dPr>
-                            <m:begChr m:val="("/>
-                            <m:sepChr m:val=""/>
-                            <m:endChr m:val=")"/>
-                            <m:grow/>
-                          </m:dPr>
-                          <m:e>
-                            <m:sSub>
-                              <m:e>
-                                <m:r>
-                                  <m:t>x</m:t>
-                                </m:r>
-                              </m:e>
-                              <m:sub>
-                                <m:r>
-                                  <m:t>0</m:t>
-                                </m:r>
-                              </m:sub>
-                            </m:sSub>
-                          </m:e>
-                        </m:d>
-                        <m:r>
-                          <m:rPr>
-                            <m:sty m:val="p"/>
-                          </m:rPr>
-                          <m:t>−</m:t>
-                        </m:r>
-                        <m:r>
-                          <m:rPr>
-                            <m:sty m:val="p"/>
-                            <m:scr m:val="double-struck"/>
-                          </m:rPr>
-                          <m:t>E</m:t>
-                        </m:r>
-                        <m:d>
-                          <m:dPr>
-                            <m:begChr m:val="["/>
-                            <m:sepChr m:val=""/>
-                            <m:endChr m:val="]"/>
-                            <m:grow/>
-                          </m:dPr>
-                          <m:e>
-                            <m:acc>
-                              <m:accPr>
-                                <m:chr m:val="̂"/>
-                              </m:accPr>
-                              <m:e>
-                                <m:r>
-                                  <m:t>f</m:t>
-                                </m:r>
-                              </m:e>
-                            </m:acc>
-                            <m:d>
-                              <m:dPr>
-                                <m:begChr m:val="("/>
-                                <m:sepChr m:val=""/>
-                                <m:endChr m:val=")"/>
-                                <m:grow/>
-                              </m:dPr>
-                              <m:e>
-                                <m:sSub>
-                                  <m:e>
-                                    <m:r>
-                                      <m:t>x</m:t>
-                                    </m:r>
-                                  </m:e>
-                                  <m:sub>
-                                    <m:r>
-                                      <m:t>0</m:t>
-                                    </m:r>
-                                  </m:sub>
-                                </m:sSub>
-                              </m:e>
-                            </m:d>
-                          </m:e>
-                        </m:d>
-                      </m:e>
-                    </m:d>
-                    <m:r>
-                      <m:rPr>
-                        <m:sty m:val="p"/>
-                      </m:rPr>
-                      <m:t>=</m:t>
-                    </m:r>
-                    <m:r>
-                      <m:t>0</m:t>
-                    </m:r>
-                  </m:oMath>
+                  <m:oMathPara xmlns:m="http://schemas.openxmlformats.org/officeDocument/2006/math">
+                    <m:oMathParaPr>
+                      <m:jc m:val="center"/>
+                    </m:oMathParaPr>
+                    <m:oMath>
+                      <m:sSub>
+                        <m:e>
+                          <m:r>
+                            <m:rPr>
+                              <m:sty m:val="p"/>
+                            </m:rPr>
+                            <m:t>C</m:t>
+                          </m:r>
+                          <m:r>
+                            <m:rPr>
+                              <m:sty m:val="p"/>
+                            </m:rPr>
+                            <m:t>V</m:t>
+                          </m:r>
+                        </m:e>
+                        <m:sub>
+                          <m:d>
+                            <m:dPr>
+                              <m:begChr m:val="("/>
+                              <m:sepChr m:val=""/>
+                              <m:endChr m:val=")"/>
+                              <m:grow/>
+                            </m:dPr>
+                            <m:e>
+                              <m:r>
+                                <m:t>n</m:t>
+                              </m:r>
+                            </m:e>
+                          </m:d>
+                        </m:sub>
+                      </m:sSub>
+                      <m:r>
+                        <m:rPr>
+                          <m:sty m:val="p"/>
+                        </m:rPr>
+                        <m:t>=</m:t>
+                      </m:r>
+                      <m:f>
+                        <m:fPr>
+                          <m:type m:val="bar"/>
+                        </m:fPr>
+                        <m:num>
+                          <m:r>
+                            <m:t>1</m:t>
+                          </m:r>
+                        </m:num>
+                        <m:den>
+                          <m:r>
+                            <m:t>n</m:t>
+                          </m:r>
+                        </m:den>
+                      </m:f>
+                      <m:nary>
+                        <m:naryPr>
+                          <m:chr m:val="∑"/>
+                          <m:limLoc m:val="undOvr"/>
+                          <m:subHide m:val="off"/>
+                          <m:supHide m:val="on"/>
+                        </m:naryPr>
+                        <m:sub>
+                          <m:r>
+                            <m:t>i</m:t>
+                          </m:r>
+                        </m:sub>
+                        <m:sup>
+                          <m:r>
+                            <m:t>​</m:t>
+                          </m:r>
+                        </m:sup>
+                        <m:e>
+                          <m:sSup>
+                            <m:e>
+                              <m:d>
+                                <m:dPr>
+                                  <m:begChr m:val="("/>
+                                  <m:sepChr m:val=""/>
+                                  <m:endChr m:val=")"/>
+                                  <m:grow/>
+                                </m:dPr>
+                                <m:e>
+                                  <m:f>
+                                    <m:fPr>
+                                      <m:type m:val="bar"/>
+                                    </m:fPr>
+                                    <m:num>
+                                      <m:sSub>
+                                        <m:e>
+                                          <m:r>
+                                            <m:t>y</m:t>
+                                          </m:r>
+                                        </m:e>
+                                        <m:sub>
+                                          <m:r>
+                                            <m:t>i</m:t>
+                                          </m:r>
+                                        </m:sub>
+                                      </m:sSub>
+                                      <m:r>
+                                        <m:rPr>
+                                          <m:sty m:val="p"/>
+                                        </m:rPr>
+                                        <m:t>−</m:t>
+                                      </m:r>
+                                      <m:sSub>
+                                        <m:e>
+                                          <m:acc>
+                                            <m:accPr>
+                                              <m:chr m:val="̂"/>
+                                            </m:accPr>
+                                            <m:e>
+                                              <m:r>
+                                                <m:t>y</m:t>
+                                              </m:r>
+                                            </m:e>
+                                          </m:acc>
+                                        </m:e>
+                                        <m:sub>
+                                          <m:r>
+                                            <m:t>i</m:t>
+                                          </m:r>
+                                        </m:sub>
+                                      </m:sSub>
+                                    </m:num>
+                                    <m:den>
+                                      <m:r>
+                                        <m:t>1</m:t>
+                                      </m:r>
+                                      <m:r>
+                                        <m:rPr>
+                                          <m:sty m:val="p"/>
+                                        </m:rPr>
+                                        <m:t>−</m:t>
+                                      </m:r>
+                                      <m:sSub>
+                                        <m:e>
+                                          <m:r>
+                                            <m:t>h</m:t>
+                                          </m:r>
+                                        </m:e>
+                                        <m:sub>
+                                          <m:r>
+                                            <m:t>i</m:t>
+                                          </m:r>
+                                          <m:r>
+                                            <m:t>i</m:t>
+                                          </m:r>
+                                        </m:sub>
+                                      </m:sSub>
+                                    </m:den>
+                                  </m:f>
+                                </m:e>
+                              </m:d>
+                            </m:e>
+                            <m:sup>
+                              <m:r>
+                                <m:t>2</m:t>
+                              </m:r>
+                            </m:sup>
+                          </m:sSup>
+                        </m:e>
+                      </m:nary>
+                    </m:oMath>
+                  </m:oMathPara>
                 </a14:m>
               </a:p>
               <a:p>
@@ -7851,19 +6244,2151 @@
                 </a:pPr>
                 <a14:m>
                   <m:oMath xmlns:m="http://schemas.openxmlformats.org/officeDocument/2006/math">
-                    <m:r>
-                      <m:rPr>
-                        <m:sty m:val="p"/>
-                      </m:rPr>
-                      <m:t>◼</m:t>
-                    </m:r>
+                    <m:sSub>
+                      <m:e>
+                        <m:r>
+                          <m:t>h</m:t>
+                        </m:r>
+                      </m:e>
+                      <m:sub>
+                        <m:r>
+                          <m:t>i</m:t>
+                        </m:r>
+                        <m:r>
+                          <m:t>i</m:t>
+                        </m:r>
+                      </m:sub>
+                    </m:sSub>
                   </m:oMath>
                 </a14:m>
+                <a:r>
+                  <a:rPr/>
+                  <a:t> is Session 02’s leverage. The pieces accumulate.</a:t>
+                </a:r>
               </a:p>
             </p:txBody>
           </p:sp>
         </mc:Choice>
       </mc:AlternateContent>
+    </p:spTree>
+  </p:cSld>
+</p:sld>
+</file>
+
+<file path=ppt/slides/slide27.xml><?xml version="1.0" encoding="utf-8"?>
+<p:sld xmlns:a="http://schemas.openxmlformats.org/drawingml/2006/main" xmlns:r="http://schemas.openxmlformats.org/officeDocument/2006/relationships" xmlns:p="http://schemas.openxmlformats.org/presentationml/2006/main">
+  <p:cSld>
+    <p:spTree>
+      <p:nvGrpSpPr>
+        <p:cNvPr id="1" name=""/>
+        <p:cNvGrpSpPr/>
+        <p:nvPr/>
+      </p:nvGrpSpPr>
+      <p:grpSpPr>
+        <a:xfrm>
+          <a:off x="0" y="0"/>
+          <a:ext cx="0" cy="0"/>
+          <a:chOff x="0" y="0"/>
+          <a:chExt cx="0" cy="0"/>
+        </a:xfrm>
+      </p:grpSpPr>
+      <p:sp>
+        <p:nvSpPr>
+          <p:cNvPr id="2" name="Title 1"/>
+          <p:cNvSpPr>
+            <a:spLocks noGrp="1"/>
+          </p:cNvSpPr>
+          <p:nvPr>
+            <p:ph type="title"/>
+          </p:nvPr>
+        </p:nvSpPr>
+        <p:spPr>
+          <a:xfrm>
+            <a:off x="722313" y="1850000"/>
+            <a:ext cx="7772400" cy="1300000"/>
+          </a:xfrm>
+        </p:spPr>
+        <p:txBody>
+          <a:bodyPr/>
+          <a:lstStyle/>
+          <a:p>
+            <a:pPr lvl="0" indent="0" marL="0">
+              <a:buNone/>
+            </a:pPr>
+            <a:r>
+              <a:rPr/>
+              <a:t>6 · Three ways to get it wrong</a:t>
+            </a:r>
+          </a:p>
+        </p:txBody>
+      </p:sp>
+    </p:spTree>
+  </p:cSld>
+</p:sld>
+</file>
+
+<file path=ppt/slides/slide28.xml><?xml version="1.0" encoding="utf-8"?>
+<p:sld xmlns:a="http://schemas.openxmlformats.org/drawingml/2006/main" xmlns:r="http://schemas.openxmlformats.org/officeDocument/2006/relationships" xmlns:p="http://schemas.openxmlformats.org/presentationml/2006/main">
+  <p:cSld>
+    <p:spTree>
+      <p:nvGrpSpPr>
+        <p:cNvPr id="1" name=""/>
+        <p:cNvGrpSpPr/>
+        <p:nvPr/>
+      </p:nvGrpSpPr>
+      <p:grpSpPr>
+        <a:xfrm>
+          <a:off x="0" y="0"/>
+          <a:ext cx="0" cy="0"/>
+          <a:chOff x="0" y="0"/>
+          <a:chExt cx="0" cy="0"/>
+        </a:xfrm>
+      </p:grpSpPr>
+      <p:sp>
+        <p:nvSpPr>
+          <p:cNvPr id="2" name="Title 1"/>
+          <p:cNvSpPr>
+            <a:spLocks noGrp="1"/>
+          </p:cNvSpPr>
+          <p:nvPr>
+            <p:ph type="title"/>
+          </p:nvPr>
+        </p:nvSpPr>
+        <p:spPr/>
+        <p:txBody>
+          <a:bodyPr/>
+          <a:lstStyle/>
+          <a:p>
+            <a:pPr lvl="0" indent="0" marL="0">
+              <a:buNone/>
+            </a:pPr>
+            <a:r>
+              <a:rPr/>
+              <a:t>1 · Leakage through preprocessing</a:t>
+            </a:r>
+          </a:p>
+        </p:txBody>
+      </p:sp>
+      <p:sp>
+        <p:nvSpPr>
+          <p:cNvPr id="3" name="Content Placeholder 2"/>
+          <p:cNvSpPr>
+            <a:spLocks noGrp="1"/>
+          </p:cNvSpPr>
+          <p:nvPr>
+            <p:ph idx="1"/>
+          </p:nvPr>
+        </p:nvSpPr>
+        <p:spPr/>
+        <p:txBody>
+          <a:bodyPr/>
+          <a:lstStyle/>
+          <a:p>
+            <a:pPr lvl="0" indent="0" marL="0">
+              <a:buNone/>
+            </a:pPr>
+            <a:r>
+              <a:rPr/>
+              <a:t>Any step that learns from the data — scaling, imputation, feature selection, target encoding — must be fitted </a:t>
+            </a:r>
+            <a:r>
+              <a:rPr b="1"/>
+              <a:t>inside</a:t>
+            </a:r>
+            <a:r>
+              <a:rPr/>
+              <a:t> each training fold.</a:t>
+            </a:r>
+          </a:p>
+          <a:p>
+            <a:pPr lvl="0" indent="0">
+              <a:buNone/>
+            </a:pPr>
+            <a:r>
+              <a:rPr i="1">
+                <a:solidFill>
+                  <a:srgbClr val="60A0B0"/>
+                </a:solidFill>
+                <a:latin typeface="Courier"/>
+              </a:rPr>
+              <a:t>#  WRONG — the scaler has already seen the test fold</a:t>
+            </a:r>
+            <a:br/>
+            <a:r>
+              <a:rPr>
+                <a:latin typeface="Courier"/>
+              </a:rPr>
+              <a:t>X_scaled </a:t>
+            </a:r>
+            <a:r>
+              <a:rPr>
+                <a:solidFill>
+                  <a:srgbClr val="666666"/>
+                </a:solidFill>
+                <a:latin typeface="Courier"/>
+              </a:rPr>
+              <a:t>=</a:t>
+            </a:r>
+            <a:r>
+              <a:rPr>
+                <a:latin typeface="Courier"/>
+              </a:rPr>
+              <a:t> StandardScaler().fit_transform(X)</a:t>
+            </a:r>
+            <a:br/>
+            <a:r>
+              <a:rPr>
+                <a:latin typeface="Courier"/>
+              </a:rPr>
+              <a:t>cross_val_score(model, X_scaled, y, cv</a:t>
+            </a:r>
+            <a:r>
+              <a:rPr>
+                <a:solidFill>
+                  <a:srgbClr val="666666"/>
+                </a:solidFill>
+                <a:latin typeface="Courier"/>
+              </a:rPr>
+              <a:t>=</a:t>
+            </a:r>
+            <a:r>
+              <a:rPr>
+                <a:latin typeface="Courier"/>
+              </a:rPr>
+              <a:t>cv)</a:t>
+            </a:r>
+            <a:br/>
+            <a:br/>
+            <a:r>
+              <a:rPr i="1">
+                <a:solidFill>
+                  <a:srgbClr val="60A0B0"/>
+                </a:solidFill>
+                <a:latin typeface="Courier"/>
+              </a:rPr>
+              <a:t>#  RIGHT — every step re-fits inside each fold</a:t>
+            </a:r>
+            <a:br/>
+            <a:r>
+              <a:rPr>
+                <a:latin typeface="Courier"/>
+              </a:rPr>
+              <a:t>pipe </a:t>
+            </a:r>
+            <a:r>
+              <a:rPr>
+                <a:solidFill>
+                  <a:srgbClr val="666666"/>
+                </a:solidFill>
+                <a:latin typeface="Courier"/>
+              </a:rPr>
+              <a:t>=</a:t>
+            </a:r>
+            <a:r>
+              <a:rPr>
+                <a:latin typeface="Courier"/>
+              </a:rPr>
+              <a:t> make_pipeline(StandardScaler(), model)</a:t>
+            </a:r>
+            <a:br/>
+            <a:r>
+              <a:rPr>
+                <a:latin typeface="Courier"/>
+              </a:rPr>
+              <a:t>cross_val_score(pipe, X, y, cv</a:t>
+            </a:r>
+            <a:r>
+              <a:rPr>
+                <a:solidFill>
+                  <a:srgbClr val="666666"/>
+                </a:solidFill>
+                <a:latin typeface="Courier"/>
+              </a:rPr>
+              <a:t>=</a:t>
+            </a:r>
+            <a:r>
+              <a:rPr>
+                <a:latin typeface="Courier"/>
+              </a:rPr>
+              <a:t>cv)</a:t>
+            </a:r>
+          </a:p>
+          <a:p>
+            <a:pPr lvl="0" indent="0" marL="0">
+              <a:buNone/>
+            </a:pPr>
+            <a:r>
+              <a:rPr/>
+              <a:t>The single most common serious error in applied machine learning papers. It </a:t>
+            </a:r>
+            <a:r>
+              <a:rPr b="1"/>
+              <a:t>always</a:t>
+            </a:r>
+            <a:r>
+              <a:rPr/>
+              <a:t> flatters you.</a:t>
+            </a:r>
+          </a:p>
+        </p:txBody>
+      </p:sp>
+    </p:spTree>
+  </p:cSld>
+</p:sld>
+</file>
+
+<file path=ppt/slides/slide29.xml><?xml version="1.0" encoding="utf-8"?>
+<p:sld xmlns:a="http://schemas.openxmlformats.org/drawingml/2006/main" xmlns:r="http://schemas.openxmlformats.org/officeDocument/2006/relationships" xmlns:p="http://schemas.openxmlformats.org/presentationml/2006/main">
+  <p:cSld>
+    <p:spTree>
+      <p:nvGrpSpPr>
+        <p:cNvPr id="1" name=""/>
+        <p:cNvGrpSpPr/>
+        <p:nvPr/>
+      </p:nvGrpSpPr>
+      <p:grpSpPr>
+        <a:xfrm>
+          <a:off x="0" y="0"/>
+          <a:ext cx="0" cy="0"/>
+          <a:chOff x="0" y="0"/>
+          <a:chExt cx="0" cy="0"/>
+        </a:xfrm>
+      </p:grpSpPr>
+      <p:sp>
+        <p:nvSpPr>
+          <p:cNvPr id="2" name="Title 1"/>
+          <p:cNvSpPr>
+            <a:spLocks noGrp="1"/>
+          </p:cNvSpPr>
+          <p:nvPr>
+            <p:ph type="title"/>
+          </p:nvPr>
+        </p:nvSpPr>
+        <p:spPr/>
+        <p:txBody>
+          <a:bodyPr/>
+          <a:lstStyle/>
+          <a:p>
+            <a:pPr lvl="0" indent="0" marL="0">
+              <a:buNone/>
+            </a:pPr>
+            <a:r>
+              <a:rPr/>
+              <a:t>2 · Leakage through selection</a:t>
+            </a:r>
+          </a:p>
+        </p:txBody>
+      </p:sp>
+      <p:sp>
+        <p:nvSpPr>
+          <p:cNvPr id="3" name="Content Placeholder 2"/>
+          <p:cNvSpPr>
+            <a:spLocks noGrp="1"/>
+          </p:cNvSpPr>
+          <p:nvPr>
+            <p:ph idx="1"/>
+          </p:nvPr>
+        </p:nvSpPr>
+        <p:spPr/>
+        <p:txBody>
+          <a:bodyPr/>
+          <a:lstStyle/>
+          <a:p>
+            <a:pPr lvl="0" indent="0" marL="0">
+              <a:buNone/>
+            </a:pPr>
+            <a:r>
+              <a:rPr/>
+              <a:t>Choosing a model by CV and then reporting </a:t>
+            </a:r>
+            <a:r>
+              <a:rPr b="1"/>
+              <a:t>that same CV error</a:t>
+            </a:r>
+            <a:r>
+              <a:rPr/>
+              <a:t> as its performance is optimistic.</a:t>
+            </a:r>
+          </a:p>
+          <a:p>
+            <a:pPr lvl="0"/>
+            <a:r>
+              <a:rPr b="1"/>
+              <a:t>outer</a:t>
+            </a:r>
+            <a:r>
+              <a:rPr/>
+              <a:t> loop → evaluation</a:t>
+            </a:r>
+          </a:p>
+          <a:p>
+            <a:pPr lvl="0"/>
+            <a:r>
+              <a:rPr b="1"/>
+              <a:t>inner</a:t>
+            </a:r>
+            <a:r>
+              <a:rPr/>
+              <a:t> loop → tuning</a:t>
+            </a:r>
+          </a:p>
+          <a:p>
+            <a:pPr lvl="0" indent="0" marL="0">
+              <a:buNone/>
+            </a:pPr>
+            <a:r>
+              <a:rPr/>
+              <a:t>Reporting the best inner-loop score is the same error as reporting training error, one level up.</a:t>
+            </a:r>
+          </a:p>
+        </p:txBody>
+      </p:sp>
+    </p:spTree>
+  </p:cSld>
+</p:sld>
+</file>
+
+<file path=ppt/slides/slide3.xml><?xml version="1.0" encoding="utf-8"?>
+<p:sld xmlns:a="http://schemas.openxmlformats.org/drawingml/2006/main" xmlns:r="http://schemas.openxmlformats.org/officeDocument/2006/relationships" xmlns:p="http://schemas.openxmlformats.org/presentationml/2006/main">
+  <p:cSld>
+    <p:spTree>
+      <p:nvGrpSpPr>
+        <p:cNvPr id="1" name=""/>
+        <p:cNvGrpSpPr/>
+        <p:nvPr/>
+      </p:nvGrpSpPr>
+      <p:grpSpPr>
+        <a:xfrm>
+          <a:off x="0" y="0"/>
+          <a:ext cx="0" cy="0"/>
+          <a:chOff x="0" y="0"/>
+          <a:chExt cx="0" cy="0"/>
+        </a:xfrm>
+      </p:grpSpPr>
+      <p:sp>
+        <p:nvSpPr>
+          <p:cNvPr id="2" name="Title 1"/>
+          <p:cNvSpPr>
+            <a:spLocks noGrp="1"/>
+          </p:cNvSpPr>
+          <p:nvPr>
+            <p:ph type="title"/>
+          </p:nvPr>
+        </p:nvSpPr>
+        <p:spPr/>
+        <p:txBody>
+          <a:bodyPr/>
+          <a:lstStyle/>
+          <a:p>
+            <a:pPr lvl="0" indent="0" marL="0">
+              <a:buNone/>
+            </a:pPr>
+            <a:r>
+              <a:rPr/>
+              <a:t>Outline</a:t>
+            </a:r>
+          </a:p>
+        </p:txBody>
+      </p:sp>
+      <p:graphicFrame>
+        <p:nvGraphicFramePr>
+          <p:cNvPr id="6" name="Content Placeholder 5"/>
+          <p:cNvGraphicFramePr>
+            <a:graphicFrameLocks noGrp="1"/>
+          </p:cNvGraphicFramePr>
+          <p:nvPr>
+            <p:ph idx="1"/>
+          </p:nvPr>
+        </p:nvGraphicFramePr>
+        <p:xfrm>
+          <a:off x="457200" y="1193800"/>
+          <a:ext cx="8229600" cy="3390900"/>
+        </p:xfrm>
+        <a:graphic>
+          <a:graphicData uri="http://schemas.openxmlformats.org/drawingml/2006/table">
+            <a:tbl>
+              <a:tblPr firstRow="0" bandRow="1">
+                <a:tableStyleId>{5C22544A-7EE6-4342-B048-85BDC9FD1C3A}</a:tableStyleId>
+              </a:tblPr>
+              <a:tblGrid>
+                <a:gridCol w="4114800"/>
+                <a:gridCol w="4114800"/>
+              </a:tblGrid>
+              <a:tr h="0">
+                <a:tc>
+                  <a:txBody>
+                    <a:bodyPr/>
+                    <a:lstStyle/>
+                    <a:p>
+                      <a:pPr lvl="0" indent="0" marL="0">
+                        <a:buNone/>
+                      </a:pPr>
+                      <a:r>
+                        <a:rPr b="1"/>
+                        <a:t>1</a:t>
+                      </a:r>
+                    </a:p>
+                  </a:txBody>
+                </a:tc>
+                <a:tc>
+                  <a:txBody>
+                    <a:bodyPr/>
+                    <a:lstStyle/>
+                    <a:p>
+                      <a:pPr lvl="0" indent="0" marL="0">
+                        <a:buNone/>
+                      </a:pPr>
+                      <a:r>
+                        <a:rPr/>
+                        <a:t>Where we are, and what this adds</a:t>
+                      </a:r>
+                    </a:p>
+                  </a:txBody>
+                </a:tc>
+              </a:tr>
+              <a:tr h="0">
+                <a:tc>
+                  <a:txBody>
+                    <a:bodyPr/>
+                    <a:lstStyle/>
+                    <a:p>
+                      <a:pPr lvl="0" indent="0" marL="0">
+                        <a:buNone/>
+                      </a:pPr>
+                      <a:r>
+                        <a:rPr b="1"/>
+                        <a:t>2</a:t>
+                      </a:r>
+                    </a:p>
+                  </a:txBody>
+                </a:tc>
+                <a:tc>
+                  <a:txBody>
+                    <a:bodyPr/>
+                    <a:lstStyle/>
+                    <a:p>
+                      <a:pPr lvl="0" indent="0" marL="0">
+                        <a:buNone/>
+                      </a:pPr>
+                      <a:r>
+                        <a:rPr/>
+                        <a:t>The decomposition</a:t>
+                      </a:r>
+                    </a:p>
+                  </a:txBody>
+                </a:tc>
+              </a:tr>
+              <a:tr h="0">
+                <a:tc>
+                  <a:txBody>
+                    <a:bodyPr/>
+                    <a:lstStyle/>
+                    <a:p>
+                      <a:pPr lvl="0" indent="0" marL="0">
+                        <a:buNone/>
+                      </a:pPr>
+                      <a:r>
+                        <a:rPr b="1"/>
+                        <a:t>3</a:t>
+                      </a:r>
+                    </a:p>
+                  </a:txBody>
+                </a:tc>
+                <a:tc>
+                  <a:txBody>
+                    <a:bodyPr/>
+                    <a:lstStyle/>
+                    <a:p>
+                      <a:pPr lvl="0" indent="0" marL="0">
+                        <a:buNone/>
+                      </a:pPr>
+                      <a:r>
+                        <a:rPr/>
+                        <a:t>Seeing it happen</a:t>
+                      </a:r>
+                    </a:p>
+                  </a:txBody>
+                </a:tc>
+              </a:tr>
+              <a:tr h="0">
+                <a:tc>
+                  <a:txBody>
+                    <a:bodyPr/>
+                    <a:lstStyle/>
+                    <a:p>
+                      <a:pPr lvl="0" indent="0" marL="0">
+                        <a:buNone/>
+                      </a:pPr>
+                      <a:r>
+                        <a:rPr b="1"/>
+                        <a:t>4</a:t>
+                      </a:r>
+                    </a:p>
+                  </a:txBody>
+                </a:tc>
+                <a:tc>
+                  <a:txBody>
+                    <a:bodyPr/>
+                    <a:lstStyle/>
+                    <a:p>
+                      <a:pPr lvl="0" indent="0" marL="0">
+                        <a:buNone/>
+                      </a:pPr>
+                      <a:r>
+                        <a:rPr/>
+                        <a:t>How optimistic is training error?</a:t>
+                      </a:r>
+                    </a:p>
+                  </a:txBody>
+                </a:tc>
+              </a:tr>
+              <a:tr h="0">
+                <a:tc>
+                  <a:txBody>
+                    <a:bodyPr/>
+                    <a:lstStyle/>
+                    <a:p>
+                      <a:pPr lvl="0" indent="0" marL="0">
+                        <a:buNone/>
+                      </a:pPr>
+                      <a:r>
+                        <a:rPr b="1"/>
+                        <a:t>5</a:t>
+                      </a:r>
+                    </a:p>
+                  </a:txBody>
+                </a:tc>
+                <a:tc>
+                  <a:txBody>
+                    <a:bodyPr/>
+                    <a:lstStyle/>
+                    <a:p>
+                      <a:pPr lvl="0" indent="0" marL="0">
+                        <a:buNone/>
+                      </a:pPr>
+                      <a:r>
+                        <a:rPr/>
+                        <a:t>Cross-validation</a:t>
+                      </a:r>
+                    </a:p>
+                  </a:txBody>
+                </a:tc>
+              </a:tr>
+              <a:tr h="0">
+                <a:tc>
+                  <a:txBody>
+                    <a:bodyPr/>
+                    <a:lstStyle/>
+                    <a:p>
+                      <a:pPr lvl="0" indent="0" marL="0">
+                        <a:buNone/>
+                      </a:pPr>
+                      <a:r>
+                        <a:rPr b="1"/>
+                        <a:t>6</a:t>
+                      </a:r>
+                    </a:p>
+                  </a:txBody>
+                </a:tc>
+                <a:tc>
+                  <a:txBody>
+                    <a:bodyPr/>
+                    <a:lstStyle/>
+                    <a:p>
+                      <a:pPr lvl="0" indent="0" marL="0">
+                        <a:buNone/>
+                      </a:pPr>
+                      <a:r>
+                        <a:rPr/>
+                        <a:t>Three ways to get it wrong</a:t>
+                      </a:r>
+                    </a:p>
+                  </a:txBody>
+                </a:tc>
+              </a:tr>
+              <a:tr h="0">
+                <a:tc>
+                  <a:txBody>
+                    <a:bodyPr/>
+                    <a:lstStyle/>
+                    <a:p>
+                      <a:pPr lvl="0" indent="0" marL="0">
+                        <a:buNone/>
+                      </a:pPr>
+                      <a:r>
+                        <a:rPr b="1"/>
+                        <a:t>7</a:t>
+                      </a:r>
+                    </a:p>
+                  </a:txBody>
+                </a:tc>
+                <a:tc>
+                  <a:txBody>
+                    <a:bodyPr/>
+                    <a:lstStyle/>
+                    <a:p>
+                      <a:pPr lvl="0" indent="0" marL="0">
+                        <a:buNone/>
+                      </a:pPr>
+                      <a:r>
+                        <a:rPr/>
+                        <a:t>What it costs on this panel</a:t>
+                      </a:r>
+                    </a:p>
+                  </a:txBody>
+                </a:tc>
+              </a:tr>
+              <a:tr h="0">
+                <a:tc>
+                  <a:txBody>
+                    <a:bodyPr/>
+                    <a:lstStyle/>
+                    <a:p>
+                      <a:pPr lvl="0" indent="0" marL="0">
+                        <a:buNone/>
+                      </a:pPr>
+                      <a:r>
+                        <a:rPr b="1"/>
+                        <a:t>8</a:t>
+                      </a:r>
+                    </a:p>
+                  </a:txBody>
+                </a:tc>
+                <a:tc>
+                  <a:txBody>
+                    <a:bodyPr/>
+                    <a:lstStyle/>
+                    <a:p>
+                      <a:pPr lvl="0" indent="0" marL="0">
+                        <a:buNone/>
+                      </a:pPr>
+                      <a:r>
+                        <a:rPr/>
+                        <a:t>Key takeaways</a:t>
+                      </a:r>
+                    </a:p>
+                  </a:txBody>
+                </a:tc>
+              </a:tr>
+            </a:tbl>
+          </a:graphicData>
+        </a:graphic>
+      </p:graphicFrame>
+    </p:spTree>
+  </p:cSld>
+</p:sld>
+</file>
+
+<file path=ppt/slides/slide30.xml><?xml version="1.0" encoding="utf-8"?>
+<p:sld xmlns:a="http://schemas.openxmlformats.org/drawingml/2006/main" xmlns:r="http://schemas.openxmlformats.org/officeDocument/2006/relationships" xmlns:p="http://schemas.openxmlformats.org/presentationml/2006/main">
+  <p:cSld>
+    <p:spTree>
+      <p:nvGrpSpPr>
+        <p:cNvPr id="1" name=""/>
+        <p:cNvGrpSpPr/>
+        <p:nvPr/>
+      </p:nvGrpSpPr>
+      <p:grpSpPr>
+        <a:xfrm>
+          <a:off x="0" y="0"/>
+          <a:ext cx="0" cy="0"/>
+          <a:chOff x="0" y="0"/>
+          <a:chExt cx="0" cy="0"/>
+        </a:xfrm>
+      </p:grpSpPr>
+      <p:sp>
+        <p:nvSpPr>
+          <p:cNvPr id="2" name="Title 1"/>
+          <p:cNvSpPr>
+            <a:spLocks noGrp="1"/>
+          </p:cNvSpPr>
+          <p:nvPr>
+            <p:ph type="title"/>
+          </p:nvPr>
+        </p:nvSpPr>
+        <p:spPr>
+          <a:xfrm>
+            <a:off x="457201" y="204787"/>
+            <a:ext cx="3008313" cy="871538"/>
+          </a:xfrm>
+        </p:spPr>
+        <p:txBody>
+          <a:bodyPr/>
+          <a:lstStyle/>
+          <a:p>
+            <a:pPr lvl="0" indent="0" marL="0">
+              <a:buNone/>
+            </a:pPr>
+            <a:r>
+              <a:rPr/>
+              <a:t>3 · Ignoring dependence</a:t>
+            </a:r>
+          </a:p>
+        </p:txBody>
+      </p:sp>
+      <p:sp>
+        <p:nvSpPr>
+          <p:cNvPr id="4" name="Text Placeholder 3"/>
+          <p:cNvSpPr>
+            <a:spLocks noGrp="1"/>
+          </p:cNvSpPr>
+          <p:nvPr>
+            <p:ph idx="2" sz="half" type="body"/>
+          </p:nvPr>
+        </p:nvSpPr>
+        <p:spPr/>
+        <p:txBody>
+          <a:bodyPr/>
+          <a:lstStyle/>
+          <a:p>
+            <a:pPr lvl="0" indent="0" marL="0">
+              <a:buNone/>
+            </a:pPr>
+            <a:r>
+              <a:rPr/>
+              <a:t>Random folds assume exchangeability. Economic data rarely are.</a:t>
+            </a:r>
+          </a:p>
+        </p:txBody>
+      </p:sp>
+      <p:graphicFrame>
+        <p:nvGraphicFramePr>
+          <p:cNvPr id="6" name="Content Placeholder 5"/>
+          <p:cNvGraphicFramePr>
+            <a:graphicFrameLocks noGrp="1"/>
+          </p:cNvGraphicFramePr>
+          <p:nvPr>
+            <p:ph idx="1"/>
+          </p:nvPr>
+        </p:nvGraphicFramePr>
+        <p:xfrm>
+          <a:off x="3568700" y="203200"/>
+          <a:ext cx="5105400" cy="4381500"/>
+        </p:xfrm>
+        <a:graphic>
+          <a:graphicData uri="http://schemas.openxmlformats.org/drawingml/2006/table">
+            <a:tbl>
+              <a:tblPr firstRow="1" bandRow="1">
+                <a:tableStyleId>{5C22544A-7EE6-4342-B048-85BDC9FD1C3A}</a:tableStyleId>
+              </a:tblPr>
+              <a:tblGrid>
+                <a:gridCol w="2552700"/>
+                <a:gridCol w="2552700"/>
+              </a:tblGrid>
+              <a:tr h="0">
+                <a:tc>
+                  <a:txBody>
+                    <a:bodyPr/>
+                    <a:lstStyle/>
+                    <a:p>
+                      <a:pPr lvl="0" indent="0" marL="0">
+                        <a:buNone/>
+                      </a:pPr>
+                      <a:r>
+                        <a:rPr/>
+                        <a:t>Structure</a:t>
+                      </a:r>
+                    </a:p>
+                  </a:txBody>
+                  <a:tcPr/>
+                </a:tc>
+                <a:tc>
+                  <a:txBody>
+                    <a:bodyPr/>
+                    <a:lstStyle/>
+                    <a:p>
+                      <a:pPr lvl="0" indent="0" marL="0">
+                        <a:buNone/>
+                      </a:pPr>
+                      <a:r>
+                        <a:rPr/>
+                        <a:t>Use</a:t>
+                      </a:r>
+                    </a:p>
+                  </a:txBody>
+                  <a:tcPr/>
+                </a:tc>
+              </a:tr>
+              <a:tr h="0">
+                <a:tc>
+                  <a:txBody>
+                    <a:bodyPr/>
+                    <a:lstStyle/>
+                    <a:p>
+                      <a:pPr lvl="0" indent="0" marL="0">
+                        <a:buNone/>
+                      </a:pPr>
+                      <a:r>
+                        <a:rPr/>
+                        <a:t>Time series</a:t>
+                      </a:r>
+                    </a:p>
+                  </a:txBody>
+                </a:tc>
+                <a:tc>
+                  <a:txBody>
+                    <a:bodyPr/>
+                    <a:lstStyle/>
+                    <a:p>
+                      <a:pPr lvl="0" indent="0" marL="0">
+                        <a:buNone/>
+                      </a:pPr>
+                      <a:r>
+                        <a:rPr/>
+                        <a:t>rolling-origin / expanding window. </a:t>
+                      </a:r>
+                      <a:r>
+                        <a:rPr b="1"/>
+                        <a:t>Never train on the future.</a:t>
+                      </a:r>
+                    </a:p>
+                  </a:txBody>
+                </a:tc>
+              </a:tr>
+              <a:tr h="0">
+                <a:tc>
+                  <a:txBody>
+                    <a:bodyPr/>
+                    <a:lstStyle/>
+                    <a:p>
+                      <a:pPr lvl="0" indent="0" marL="0">
+                        <a:buNone/>
+                      </a:pPr>
+                      <a:r>
+                        <a:rPr/>
+                        <a:t>Panel or clustered</a:t>
+                      </a:r>
+                    </a:p>
+                  </a:txBody>
+                </a:tc>
+                <a:tc>
+                  <a:txBody>
+                    <a:bodyPr/>
+                    <a:lstStyle/>
+                    <a:p>
+                      <a:pPr lvl="0" indent="0" marL="0">
+                        <a:buNone/>
+                      </a:pPr>
+                      <a:r>
+                        <a:rPr>
+                          <a:latin typeface="Courier"/>
+                        </a:rPr>
+                        <a:t>GroupKFold</a:t>
+                      </a:r>
+                      <a:r>
+                        <a:rPr/>
+                        <a:t> — all rows of a unit stay together</a:t>
+                      </a:r>
+                    </a:p>
+                  </a:txBody>
+                </a:tc>
+              </a:tr>
+              <a:tr h="0">
+                <a:tc>
+                  <a:txBody>
+                    <a:bodyPr/>
+                    <a:lstStyle/>
+                    <a:p>
+                      <a:pPr lvl="0" indent="0" marL="0">
+                        <a:buNone/>
+                      </a:pPr>
+                      <a:r>
+                        <a:rPr/>
+                        <a:t>Spatial</a:t>
+                      </a:r>
+                    </a:p>
+                  </a:txBody>
+                </a:tc>
+                <a:tc>
+                  <a:txBody>
+                    <a:bodyPr/>
+                    <a:lstStyle/>
+                    <a:p>
+                      <a:pPr lvl="0" indent="0" marL="0">
+                        <a:buNone/>
+                      </a:pPr>
+                      <a:r>
+                        <a:rPr/>
+                        <a:t>blocked CV — neighbours are correlated</a:t>
+                      </a:r>
+                    </a:p>
+                  </a:txBody>
+                </a:tc>
+              </a:tr>
+            </a:tbl>
+          </a:graphicData>
+        </a:graphic>
+      </p:graphicFrame>
+    </p:spTree>
+  </p:cSld>
+</p:sld>
+</file>
+
+<file path=ppt/slides/slide31.xml><?xml version="1.0" encoding="utf-8"?>
+<p:sld xmlns:a="http://schemas.openxmlformats.org/drawingml/2006/main" xmlns:r="http://schemas.openxmlformats.org/officeDocument/2006/relationships" xmlns:p="http://schemas.openxmlformats.org/presentationml/2006/main">
+  <p:cSld>
+    <p:spTree>
+      <p:nvGrpSpPr>
+        <p:cNvPr id="1" name=""/>
+        <p:cNvGrpSpPr/>
+        <p:nvPr/>
+      </p:nvGrpSpPr>
+      <p:grpSpPr>
+        <a:xfrm>
+          <a:off x="0" y="0"/>
+          <a:ext cx="0" cy="0"/>
+          <a:chOff x="0" y="0"/>
+          <a:chExt cx="0" cy="0"/>
+        </a:xfrm>
+      </p:grpSpPr>
+      <p:sp>
+        <p:nvSpPr>
+          <p:cNvPr id="2" name="Title 1"/>
+          <p:cNvSpPr>
+            <a:spLocks noGrp="1"/>
+          </p:cNvSpPr>
+          <p:nvPr>
+            <p:ph type="title"/>
+          </p:nvPr>
+        </p:nvSpPr>
+        <p:spPr>
+          <a:xfrm>
+            <a:off x="722313" y="1850000"/>
+            <a:ext cx="7772400" cy="1300000"/>
+          </a:xfrm>
+        </p:spPr>
+        <p:txBody>
+          <a:bodyPr/>
+          <a:lstStyle/>
+          <a:p>
+            <a:pPr lvl="0" indent="0" marL="0">
+              <a:buNone/>
+            </a:pPr>
+            <a:r>
+              <a:rPr/>
+              <a:t>7 · What it costs here</a:t>
+            </a:r>
+          </a:p>
+        </p:txBody>
+      </p:sp>
+    </p:spTree>
+  </p:cSld>
+</p:sld>
+</file>
+
+<file path=ppt/slides/slide32.xml><?xml version="1.0" encoding="utf-8"?>
+<p:sld xmlns:a="http://schemas.openxmlformats.org/drawingml/2006/main" xmlns:r="http://schemas.openxmlformats.org/officeDocument/2006/relationships" xmlns:p="http://schemas.openxmlformats.org/presentationml/2006/main">
+  <p:cSld>
+    <p:spTree>
+      <p:nvGrpSpPr>
+        <p:cNvPr id="1" name=""/>
+        <p:cNvGrpSpPr/>
+        <p:nvPr/>
+      </p:nvGrpSpPr>
+      <p:grpSpPr>
+        <a:xfrm>
+          <a:off x="0" y="0"/>
+          <a:ext cx="0" cy="0"/>
+          <a:chOff x="0" y="0"/>
+          <a:chExt cx="0" cy="0"/>
+        </a:xfrm>
+      </p:grpSpPr>
+      <p:sp>
+        <p:nvSpPr>
+          <p:cNvPr id="2" name="Title 1"/>
+          <p:cNvSpPr>
+            <a:spLocks noGrp="1"/>
+          </p:cNvSpPr>
+          <p:nvPr>
+            <p:ph type="title"/>
+          </p:nvPr>
+        </p:nvSpPr>
+        <p:spPr/>
+        <p:txBody>
+          <a:bodyPr/>
+          <a:lstStyle/>
+          <a:p>
+            <a:pPr lvl="0" indent="0" marL="0">
+              <a:buNone/>
+            </a:pPr>
+            <a:r>
+              <a:rPr/>
+              <a:t>Same data, same model, three splits</a:t>
+            </a:r>
+          </a:p>
+        </p:txBody>
+      </p:sp>
+      <p:pic>
+        <p:nvPicPr>
+          <p:cNvPr descr="slides_files/figure-pptx/cell-6-output-1.png" id="0" name="Picture 1"/>
+          <p:cNvPicPr>
+            <a:picLocks noGrp="1" noChangeAspect="1"/>
+          </p:cNvPicPr>
+          <p:nvPr/>
+        </p:nvPicPr>
+        <p:blipFill>
+          <a:blip r:embed="rId2"/>
+          <a:stretch>
+            <a:fillRect/>
+          </a:stretch>
+        </p:blipFill>
+        <p:spPr bwMode="auto">
+          <a:xfrm>
+            <a:off x="457200" y="1346200"/>
+            <a:ext cx="8229600" cy="3086100"/>
+          </a:xfrm>
+          <a:prstGeom prst="rect">
+            <a:avLst/>
+          </a:prstGeom>
+          <a:noFill/>
+          <a:ln w="9525">
+            <a:noFill/>
+            <a:headEnd/>
+            <a:tailEnd/>
+          </a:ln>
+        </p:spPr>
+      </p:pic>
+    </p:spTree>
+  </p:cSld>
+</p:sld>
+</file>
+
+<file path=ppt/slides/slide33.xml><?xml version="1.0" encoding="utf-8"?>
+<p:sld xmlns:a="http://schemas.openxmlformats.org/drawingml/2006/main" xmlns:r="http://schemas.openxmlformats.org/officeDocument/2006/relationships" xmlns:p="http://schemas.openxmlformats.org/presentationml/2006/main">
+  <p:cSld>
+    <p:spTree>
+      <p:nvGrpSpPr>
+        <p:cNvPr id="1" name=""/>
+        <p:cNvGrpSpPr/>
+        <p:nvPr/>
+      </p:nvGrpSpPr>
+      <p:grpSpPr>
+        <a:xfrm>
+          <a:off x="0" y="0"/>
+          <a:ext cx="0" cy="0"/>
+          <a:chOff x="0" y="0"/>
+          <a:chExt cx="0" cy="0"/>
+        </a:xfrm>
+      </p:grpSpPr>
+      <p:sp>
+        <p:nvSpPr>
+          <p:cNvPr id="2" name="Title 1"/>
+          <p:cNvSpPr>
+            <a:spLocks noGrp="1"/>
+          </p:cNvSpPr>
+          <p:nvPr>
+            <p:ph type="title"/>
+          </p:nvPr>
+        </p:nvSpPr>
+        <p:spPr/>
+        <p:txBody>
+          <a:bodyPr/>
+          <a:lstStyle/>
+          <a:p>
+            <a:pPr lvl="0" indent="0" marL="0">
+              <a:buNone/>
+            </a:pPr>
+            <a:r>
+              <a:rPr/>
+              <a:t>The ratio is the whole point</a:t>
+            </a:r>
+          </a:p>
+        </p:txBody>
+      </p:sp>
+      <p:sp>
+        <p:nvSpPr>
+          <p:cNvPr id="3" name="Content Placeholder 2"/>
+          <p:cNvSpPr>
+            <a:spLocks noGrp="1"/>
+          </p:cNvSpPr>
+          <p:nvPr>
+            <p:ph idx="1"/>
+          </p:nvPr>
+        </p:nvSpPr>
+        <p:spPr/>
+        <p:txBody>
+          <a:bodyPr/>
+          <a:lstStyle/>
+          <a:p>
+            <a:pPr lvl="0" indent="0">
+              <a:buNone/>
+            </a:pPr>
+            <a:r>
+              <a:rPr>
+                <a:latin typeface="Courier"/>
+              </a:rPr>
+              <a:t>  grouped / random  =  1.53x</a:t>
+            </a:r>
+          </a:p>
+          <a:p>
+            <a:pPr lvl="0" indent="0" marL="0">
+              <a:buNone/>
+            </a:pPr>
+            <a:r>
+              <a:rPr/>
+              <a:t>Publish the random-K-fold number and you have overstated the model by that factor — </a:t>
+            </a:r>
+            <a:r>
+              <a:rPr b="1"/>
+              <a:t>without doing anything a referee would call wrong.</a:t>
+            </a:r>
+          </a:p>
+        </p:txBody>
+      </p:sp>
+    </p:spTree>
+  </p:cSld>
+</p:sld>
+</file>
+
+<file path=ppt/slides/slide34.xml><?xml version="1.0" encoding="utf-8"?>
+<p:sld xmlns:a="http://schemas.openxmlformats.org/drawingml/2006/main" xmlns:r="http://schemas.openxmlformats.org/officeDocument/2006/relationships" xmlns:p="http://schemas.openxmlformats.org/presentationml/2006/main">
+  <p:cSld>
+    <p:spTree>
+      <p:nvGrpSpPr>
+        <p:cNvPr id="1" name=""/>
+        <p:cNvGrpSpPr/>
+        <p:nvPr/>
+      </p:nvGrpSpPr>
+      <p:grpSpPr>
+        <a:xfrm>
+          <a:off x="0" y="0"/>
+          <a:ext cx="0" cy="0"/>
+          <a:chOff x="0" y="0"/>
+          <a:chExt cx="0" cy="0"/>
+        </a:xfrm>
+      </p:grpSpPr>
+      <p:sp>
+        <p:nvSpPr>
+          <p:cNvPr id="2" name="Title 1"/>
+          <p:cNvSpPr>
+            <a:spLocks noGrp="1"/>
+          </p:cNvSpPr>
+          <p:nvPr>
+            <p:ph type="title"/>
+          </p:nvPr>
+        </p:nvSpPr>
+        <p:spPr/>
+        <p:txBody>
+          <a:bodyPr/>
+          <a:lstStyle/>
+          <a:p>
+            <a:pPr lvl="0" indent="0" marL="0">
+              <a:buNone/>
+            </a:pPr>
+            <a:r>
+              <a:rPr/>
+              <a:t>Read the gap as a diagnostic</a:t>
+            </a:r>
+          </a:p>
+        </p:txBody>
+      </p:sp>
+      <p:sp>
+        <p:nvSpPr>
+          <p:cNvPr id="3" name="Content Placeholder 2"/>
+          <p:cNvSpPr>
+            <a:spLocks noGrp="1"/>
+          </p:cNvSpPr>
+          <p:nvPr>
+            <p:ph idx="1"/>
+          </p:nvPr>
+        </p:nvSpPr>
+        <p:spPr/>
+        <p:txBody>
+          <a:bodyPr/>
+          <a:lstStyle/>
+          <a:p>
+            <a:pPr lvl="0" indent="0" marL="0">
+              <a:buNone/>
+            </a:pPr>
+            <a:r>
+              <a:rPr/>
+              <a:t>The ratio measures </a:t>
+            </a:r>
+            <a:r>
+              <a:rPr b="1"/>
+              <a:t>how much the model leans on country identity</a:t>
+            </a:r>
+            <a:r>
+              <a:rPr/>
+              <a:t> rather than on the economics.</a:t>
+            </a:r>
+          </a:p>
+          <a:p>
+            <a:pPr lvl="0"/>
+            <a:r>
+              <a:rPr/>
+              <a:t>Random K-fold let it see Germany 2019 while predicting Germany 2020</a:t>
+            </a:r>
+          </a:p>
+          <a:p>
+            <a:pPr lvl="0"/>
+            <a:r>
+              <a:rPr/>
+              <a:t>It learned “this is Germany”, which is worthless for a country it has never seen</a:t>
+            </a:r>
+          </a:p>
+          <a:p>
+            <a:pPr lvl="0"/>
+            <a:r>
+              <a:rPr>
+                <a:latin typeface="Courier"/>
+              </a:rPr>
+              <a:t>TimeSeriesSplit</a:t>
+            </a:r>
+            <a:r>
+              <a:rPr/>
+              <a:t> looks </a:t>
+            </a:r>
+            <a:r>
+              <a:rPr i="1"/>
+              <a:t>best</a:t>
+            </a:r>
+            <a:r>
+              <a:rPr/>
+              <a:t> of the three — and answers a third question again</a:t>
+            </a:r>
+          </a:p>
+          <a:p>
+            <a:pPr lvl="0" indent="0" marL="0">
+              <a:buNone/>
+            </a:pPr>
+            <a:r>
+              <a:rPr b="1"/>
+              <a:t>Low is not the same as right.</a:t>
+            </a:r>
+            <a:r>
+              <a:rPr/>
+              <a:t> Report the split, not just the number.</a:t>
+            </a:r>
+          </a:p>
+        </p:txBody>
+      </p:sp>
+    </p:spTree>
+  </p:cSld>
+</p:sld>
+</file>
+
+<file path=ppt/slides/slide35.xml><?xml version="1.0" encoding="utf-8"?>
+<p:sld xmlns:a="http://schemas.openxmlformats.org/drawingml/2006/main" xmlns:r="http://schemas.openxmlformats.org/officeDocument/2006/relationships" xmlns:p="http://schemas.openxmlformats.org/presentationml/2006/main">
+  <p:cSld>
+    <p:spTree>
+      <p:nvGrpSpPr>
+        <p:cNvPr id="1" name=""/>
+        <p:cNvGrpSpPr/>
+        <p:nvPr/>
+      </p:nvGrpSpPr>
+      <p:grpSpPr>
+        <a:xfrm>
+          <a:off x="0" y="0"/>
+          <a:ext cx="0" cy="0"/>
+          <a:chOff x="0" y="0"/>
+          <a:chExt cx="0" cy="0"/>
+        </a:xfrm>
+      </p:grpSpPr>
+      <p:sp>
+        <p:nvSpPr>
+          <p:cNvPr id="2" name="Title 1"/>
+          <p:cNvSpPr>
+            <a:spLocks noGrp="1"/>
+          </p:cNvSpPr>
+          <p:nvPr>
+            <p:ph type="title"/>
+          </p:nvPr>
+        </p:nvSpPr>
+        <p:spPr>
+          <a:xfrm>
+            <a:off x="722313" y="1850000"/>
+            <a:ext cx="7772400" cy="1300000"/>
+          </a:xfrm>
+        </p:spPr>
+        <p:txBody>
+          <a:bodyPr/>
+          <a:lstStyle/>
+          <a:p>
+            <a:pPr lvl="0" indent="0" marL="0">
+              <a:buNone/>
+            </a:pPr>
+            <a:r>
+              <a:rPr/>
+              <a:t>8 · Key takeaways</a:t>
+            </a:r>
+          </a:p>
+        </p:txBody>
+      </p:sp>
+    </p:spTree>
+  </p:cSld>
+</p:sld>
+</file>
+
+<file path=ppt/slides/slide36.xml><?xml version="1.0" encoding="utf-8"?>
+<p:sld xmlns:a="http://schemas.openxmlformats.org/drawingml/2006/main" xmlns:r="http://schemas.openxmlformats.org/officeDocument/2006/relationships" xmlns:p="http://schemas.openxmlformats.org/presentationml/2006/main">
+  <p:cSld>
+    <p:spTree>
+      <p:nvGrpSpPr>
+        <p:cNvPr id="1" name=""/>
+        <p:cNvGrpSpPr/>
+        <p:nvPr/>
+      </p:nvGrpSpPr>
+      <p:grpSpPr>
+        <a:xfrm>
+          <a:off x="0" y="0"/>
+          <a:ext cx="0" cy="0"/>
+          <a:chOff x="0" y="0"/>
+          <a:chExt cx="0" cy="0"/>
+        </a:xfrm>
+      </p:grpSpPr>
+      <p:sp>
+        <p:nvSpPr>
+          <p:cNvPr id="2" name="Title 1"/>
+          <p:cNvSpPr>
+            <a:spLocks noGrp="1"/>
+          </p:cNvSpPr>
+          <p:nvPr>
+            <p:ph type="title"/>
+          </p:nvPr>
+        </p:nvSpPr>
+        <p:spPr/>
+        <p:txBody>
+          <a:bodyPr/>
+          <a:lstStyle/>
+          <a:p>
+            <a:pPr lvl="0" indent="0" marL="0">
+              <a:buNone/>
+            </a:pPr>
+            <a:r>
+              <a:rPr/>
+              <a:t>What to carry out of this session</a:t>
+            </a:r>
+          </a:p>
+        </p:txBody>
+      </p:sp>
+      <mc:AlternateContent xmlns:mc="http://schemas.openxmlformats.org/markup-compatibility/2006">
+        <mc:Choice xmlns:a14="http://schemas.microsoft.com/office/drawing/2010/main" Requires="a14">
+          <p:sp>
+            <p:nvSpPr>
+              <p:cNvPr id="3" name="Content Placeholder 2"/>
+              <p:cNvSpPr>
+                <a:spLocks noGrp="1"/>
+              </p:cNvSpPr>
+              <p:nvPr>
+                <p:ph idx="1"/>
+              </p:nvPr>
+            </p:nvSpPr>
+            <p:spPr/>
+            <p:txBody>
+              <a:bodyPr/>
+              <a:lstStyle/>
+              <a:p>
+                <a:pPr lvl="0" indent="-342900" marL="342900">
+                  <a:buAutoNum type="arabicPeriod"/>
+                </a:pPr>
+                <a:r>
+                  <a:rPr b="1"/>
+                  <a:t>Error = bias² + variance + </a:t>
+                </a:r>
+                <a14:m>
+                  <m:oMath xmlns:m="http://schemas.openxmlformats.org/officeDocument/2006/math">
+                    <m:sSup>
+                      <m:e>
+                        <m:r>
+                          <m:t>σ</m:t>
+                        </m:r>
+                      </m:e>
+                      <m:sup>
+                        <m:r>
+                          <m:t>2</m:t>
+                        </m:r>
+                      </m:sup>
+                    </m:sSup>
+                  </m:oMath>
+                </a14:m>
+                <a:r>
+                  <a:rPr b="1"/>
+                  <a:t>.</a:t>
+                </a:r>
+                <a:r>
+                  <a:rPr/>
+                  <a:t> Flexibility trades the first two; the third never moves.</a:t>
+                </a:r>
+              </a:p>
+              <a:p>
+                <a:pPr lvl="0" indent="-342900" marL="342900">
+                  <a:buAutoNum type="arabicPeriod"/>
+                </a:pPr>
+                <a:r>
+                  <a:rPr b="1"/>
+                  <a:t>Training error is optimistic by </a:t>
+                </a:r>
+                <a14:m>
+                  <m:oMath xmlns:m="http://schemas.openxmlformats.org/officeDocument/2006/math">
+                    <m:r>
+                      <m:t>2</m:t>
+                    </m:r>
+                    <m:r>
+                      <m:t>p</m:t>
+                    </m:r>
+                    <m:sSup>
+                      <m:e>
+                        <m:r>
+                          <m:t>σ</m:t>
+                        </m:r>
+                      </m:e>
+                      <m:sup>
+                        <m:r>
+                          <m:t>2</m:t>
+                        </m:r>
+                      </m:sup>
+                    </m:sSup>
+                    <m:r>
+                      <m:rPr>
+                        <m:sty m:val="p"/>
+                      </m:rPr>
+                      <m:t>/</m:t>
+                    </m:r>
+                    <m:r>
+                      <m:t>n</m:t>
+                    </m:r>
+                  </m:oMath>
+                </a14:m>
+                <a:r>
+                  <a:rPr/>
+                  <a:t> for a linear fit — that is where AIC and </a:t>
+                </a:r>
+                <a14:m>
+                  <m:oMath xmlns:m="http://schemas.openxmlformats.org/officeDocument/2006/math">
+                    <m:sSub>
+                      <m:e>
+                        <m:r>
+                          <m:t>C</m:t>
+                        </m:r>
+                      </m:e>
+                      <m:sub>
+                        <m:r>
+                          <m:t>p</m:t>
+                        </m:r>
+                      </m:sub>
+                    </m:sSub>
+                  </m:oMath>
+                </a14:m>
+                <a:r>
+                  <a:rPr/>
+                  <a:t> come from.</a:t>
+                </a:r>
+              </a:p>
+              <a:p>
+                <a:pPr lvl="0" indent="-342900" marL="342900">
+                  <a:buAutoNum type="arabicPeriod"/>
+                </a:pPr>
+                <a:r>
+                  <a:rPr b="1"/>
+                  <a:t>Match the CV scheme to the claim.</a:t>
+                </a:r>
+                <a:r>
+                  <a:rPr/>
+                  <a:t> Random, grouped and time-ordered answer different questions.</a:t>
+                </a:r>
+              </a:p>
+              <a:p>
+                <a:pPr lvl="0" indent="-342900" marL="342900">
+                  <a:buAutoNum type="arabicPeriod"/>
+                </a:pPr>
+                <a:r>
+                  <a:rPr b="1"/>
+                  <a:t>Every learned step goes inside the fold.</a:t>
+                </a:r>
+                <a:r>
+                  <a:rPr/>
+                  <a:t> Use a </a:t>
+                </a:r>
+                <a:r>
+                  <a:rPr>
+                    <a:latin typeface="Courier"/>
+                  </a:rPr>
+                  <a:t>Pipeline</a:t>
+                </a:r>
+                <a:r>
+                  <a:rPr/>
+                  <a:t>.</a:t>
+                </a:r>
+              </a:p>
+              <a:p>
+                <a:pPr lvl="0" indent="-342900" marL="342900">
+                  <a:buAutoNum type="arabicPeriod"/>
+                </a:pPr>
+                <a:r>
+                  <a:rPr b="1"/>
+                  <a:t>Tuning and evaluating on one split</a:t>
+                </a:r>
+                <a:r>
+                  <a:rPr/>
+                  <a:t> reports training error, one level up.</a:t>
+                </a:r>
+              </a:p>
+              <a:p>
+                <a:pPr lvl="0" indent="-342900" marL="342900">
+                  <a:buAutoNum type="arabicPeriod"/>
+                </a:pPr>
+                <a:r>
+                  <a:rPr b="1"/>
+                  <a:t>The random-vs-grouped gap is a leakage diagnostic.</a:t>
+                </a:r>
+                <a:r>
+                  <a:rPr/>
+                  <a:t> Report it.</a:t>
+                </a:r>
+              </a:p>
+            </p:txBody>
+          </p:sp>
+        </mc:Choice>
+      </mc:AlternateContent>
+    </p:spTree>
+  </p:cSld>
+</p:sld>
+</file>
+
+<file path=ppt/slides/slide37.xml><?xml version="1.0" encoding="UTF-8"?><p:sld xmlns:a="http://schemas.openxmlformats.org/drawingml/2006/main" xmlns:r="http://schemas.openxmlformats.org/officeDocument/2006/relationships" xmlns:p="http://schemas.openxmlformats.org/presentationml/2006/main"><p:cSld><p:spTree><p:nvGrpSpPr><p:cNvPr id="1" name="" /><p:cNvGrpSpPr /><p:nvPr /></p:nvGrpSpPr><p:grpSpPr><a:xfrm><a:off x="0" y="0" /><a:ext cx="0" cy="0" /><a:chOff x="0" y="0" /><a:chExt cx="0" cy="0" /></a:xfrm></p:grpSpPr><p:sp><p:nvSpPr><p:cNvPr id="2" name="Title 1" /><p:cNvSpPr><a:spLocks noGrp="1" /></p:cNvSpPr><p:nvPr><p:ph type="title" /></p:nvPr></p:nvSpPr><p:spPr /><p:txBody><a:bodyPr /><a:lstStyle /><a:p><a:pPr lvl="0" indent="0" marL="0"><a:buNone /></a:pPr><a:r><a:rPr /><a:t>What loses marks reliably</a:t></a:r></a:p></p:txBody></p:sp><p:graphicFrame><p:nvGraphicFramePr><p:cNvPr id="6" name="Content Placeholder 5" /><p:cNvGraphicFramePr><a:graphicFrameLocks noGrp="1" /></p:cNvGraphicFramePr><p:nvPr><p:ph idx="1" /></p:nvPr></p:nvGraphicFramePr><p:xfrm><a:off x="457200" y="1193800" /><a:ext cx="8229600" cy="3390900" /></p:xfrm><a:graphic><a:graphicData uri="http://schemas.openxmlformats.org/drawingml/2006/table"><a:tbl><a:tblPr firstRow="0" bandRow="1"><a:tableStyleId>{5C22544A-7EE6-4342-B048-85BDC9FD1C3A}</a:tableStyleId></a:tblPr><a:tblGrid><a:gridCol w="4114800" /><a:gridCol w="4114800" /></a:tblGrid><a:tr h="0"><a:tc><a:txBody><a:bodyPr /><a:lstStyle /><a:p><a:pPr lvl="0" indent="0" marL="0"><a:buNone /></a:pPr><a:r><a:rPr /><a:t>Random K-fold on a panel</a:t></a:r></a:p></a:txBody></a:tc><a:tc><a:txBody><a:bodyPr /><a:lstStyle /><a:p><a:pPr lvl="0" indent="0" marL="0"><a:buNone /></a:pPr><a:r><a:rPr /><a:t>optimistic by a wide margin</a:t></a:r></a:p></a:txBody></a:tc></a:tr><a:tr h="0"><a:tc><a:txBody><a:bodyPr /><a:lstStyle /><a:p><a:pPr lvl="0" indent="0" marL="0"><a:buNone /></a:pPr><a:r><a:rPr /><a:t>Scaling before splitting</a:t></a:r></a:p></a:txBody></a:tc><a:tc><a:txBody><a:bodyPr /><a:lstStyle /><a:p><a:pPr lvl="0" indent="0" marL="0"><a:buNone /></a:pPr><a:r><a:rPr /><a:t>leakage; error understated</a:t></a:r></a:p></a:txBody></a:tc></a:tr><a:tr h="0"><a:tc><a:txBody><a:bodyPr /><a:lstStyle /><a:p><a:pPr lvl="0" indent="0" marL="0"><a:buNone /></a:pPr><a:r><a:rPr /><a:t>Tuning on the test set</a:t></a:r></a:p></a:txBody></a:tc><a:tc><a:txBody><a:bodyPr /><a:lstStyle /><a:p><a:pPr lvl="0" indent="0" marL="0"><a:buNone /></a:pPr><a:r><a:rPr /><a:t>the test set is now training data</a:t></a:r></a:p></a:txBody></a:tc></a:tr><a:tr h="0"><a:tc><a:txBody><a:bodyPr /><a:lstStyle /><a:p><a:pPr lvl="0" indent="0" marL="0"><a:buNone /></a:pPr><a14:m><m:oMath xmlns:m="http://schemas.openxmlformats.org/officeDocument/2006/math"><m:sSup><m:e><m:r><m:t>R</m:t></m:r></m:e><m:sup><m:r><m:t>2</m:t></m:r></m:sup></m:sSup></m:oMath></a14:m><a:r><a:rPr /><a:t> alone</a:t></a:r></a:p></a:txBody></a:tc><a:tc><a:txBody><a:bodyPr /><a:lstStyle /><a:p><a:pPr lvl="0" indent="0" marL="0"><a:buNone /></a:pPr><a:r><a:rPr /><a:t>give the error in the outcome’s units</a:t></a:r></a:p></a:txBody></a:tc></a:tr><a:tr h="0"><a:tc><a:txBody><a:bodyPr /><a:lstStyle /><a:p><a:pPr lvl="0" indent="0" marL="0"><a:buNone /></a:pPr><a:r><a:rPr /><a:t>One split, one number</a:t></a:r></a:p></a:txBody></a:tc><a:tc><a:txBody><a:bodyPr /><a:lstStyle /><a:p><a:pPr lvl="0" indent="0" marL="0"><a:buNone /></a:pPr><a:r><a:rPr /><a:t>no sense of variability</a:t></a:r></a:p></a:txBody></a:tc></a:tr></a:tbl></a:graphicData></a:graphic></p:graphicFrame></p:spTree></p:cSld></p:sld>
+</file>
+
+<file path=ppt/slides/slide38.xml><?xml version="1.0" encoding="utf-8"?>
+<p:sld xmlns:a="http://schemas.openxmlformats.org/drawingml/2006/main" xmlns:r="http://schemas.openxmlformats.org/officeDocument/2006/relationships" xmlns:p="http://schemas.openxmlformats.org/presentationml/2006/main">
+  <p:cSld>
+    <p:spTree>
+      <p:nvGrpSpPr>
+        <p:cNvPr id="1" name=""/>
+        <p:cNvGrpSpPr/>
+        <p:nvPr/>
+      </p:nvGrpSpPr>
+      <p:grpSpPr>
+        <a:xfrm>
+          <a:off x="0" y="0"/>
+          <a:ext cx="0" cy="0"/>
+          <a:chOff x="0" y="0"/>
+          <a:chExt cx="0" cy="0"/>
+        </a:xfrm>
+      </p:grpSpPr>
+      <p:sp>
+        <p:nvSpPr>
+          <p:cNvPr id="2" name="Title 1"/>
+          <p:cNvSpPr>
+            <a:spLocks noGrp="1"/>
+          </p:cNvSpPr>
+          <p:nvPr>
+            <p:ph type="title"/>
+          </p:nvPr>
+        </p:nvSpPr>
+        <p:spPr/>
+        <p:txBody>
+          <a:bodyPr/>
+          <a:lstStyle/>
+          <a:p>
+            <a:pPr lvl="0" indent="0" marL="0">
+              <a:buNone/>
+            </a:pPr>
+            <a:r>
+              <a:rPr/>
+              <a:t>In the practice session</a:t>
+            </a:r>
+          </a:p>
+        </p:txBody>
+      </p:sp>
+      <p:sp>
+        <p:nvSpPr>
+          <p:cNvPr id="3" name="Content Placeholder 2"/>
+          <p:cNvSpPr>
+            <a:spLocks noGrp="1"/>
+          </p:cNvSpPr>
+          <p:nvPr>
+            <p:ph idx="1"/>
+          </p:nvPr>
+        </p:nvSpPr>
+        <p:spPr/>
+        <p:txBody>
+          <a:bodyPr/>
+          <a:lstStyle/>
+          <a:p>
+            <a:pPr lvl="0" indent="-342900" marL="342900">
+              <a:buAutoNum type="arabicPeriod"/>
+            </a:pPr>
+            <a:r>
+              <a:rPr/>
+              <a:t>Reproduce the three CV schemes and tabulate the errors</a:t>
+            </a:r>
+          </a:p>
+          <a:p>
+            <a:pPr lvl="0" indent="-342900" marL="342900">
+              <a:buAutoNum type="arabicPeriod"/>
+            </a:pPr>
+            <a:r>
+              <a:rPr/>
+              <a:t>Explain, in writing, why they differ </a:t>
+            </a:r>
+            <a:r>
+              <a:rPr b="1"/>
+              <a:t>in that direction</a:t>
+            </a:r>
+          </a:p>
+          <a:p>
+            <a:pPr lvl="0" indent="-342900" marL="342900">
+              <a:buAutoNum type="arabicPeriod"/>
+            </a:pPr>
+            <a:r>
+              <a:rPr/>
+              <a:t>Draw the flexibility curve and mark where variance takes over</a:t>
+            </a:r>
+          </a:p>
+          <a:p>
+            <a:pPr lvl="0" indent="-342900" marL="342900">
+              <a:buAutoNum type="arabicPeriod"/>
+            </a:pPr>
+            <a:r>
+              <a:rPr/>
+              <a:t>Build one deliberately leaking pipeline, fix it, report both numbers</a:t>
+            </a:r>
+          </a:p>
+          <a:p>
+            <a:pPr lvl="0" indent="0" marL="0">
+              <a:buNone/>
+            </a:pPr>
+            <a:r>
+              <a:rPr/>
+              <a:t>Brief: </a:t>
+            </a:r>
+            <a:r>
+              <a:rPr>
+                <a:hlinkClick r:id="rId2"/>
+                <a:latin typeface="Courier"/>
+              </a:rPr>
+              <a:t>02-practice/README.md</a:t>
+            </a:r>
+            <a:r>
+              <a:rPr/>
+              <a:t> · derivations: </a:t>
+            </a:r>
+            <a:r>
+              <a:rPr>
+                <a:hlinkClick r:id="rId3"/>
+                <a:latin typeface="Courier"/>
+              </a:rPr>
+              <a:t>01-lecture/README.md</a:t>
+            </a:r>
+            <a:r>
+              <a:rPr/>
+              <a:t> §4.1–4.4</a:t>
+            </a:r>
+          </a:p>
+        </p:txBody>
+      </p:sp>
+    </p:spTree>
+  </p:cSld>
+</p:sld>
+</file>
+
+<file path=ppt/slides/slide4.xml><?xml version="1.0" encoding="utf-8"?>
+<p:sld xmlns:a="http://schemas.openxmlformats.org/drawingml/2006/main" xmlns:r="http://schemas.openxmlformats.org/officeDocument/2006/relationships" xmlns:p="http://schemas.openxmlformats.org/presentationml/2006/main">
+  <p:cSld>
+    <p:spTree>
+      <p:nvGrpSpPr>
+        <p:cNvPr id="1" name=""/>
+        <p:cNvGrpSpPr/>
+        <p:nvPr/>
+      </p:nvGrpSpPr>
+      <p:grpSpPr>
+        <a:xfrm>
+          <a:off x="0" y="0"/>
+          <a:ext cx="0" cy="0"/>
+          <a:chOff x="0" y="0"/>
+          <a:chExt cx="0" cy="0"/>
+        </a:xfrm>
+      </p:grpSpPr>
+      <p:sp>
+        <p:nvSpPr>
+          <p:cNvPr id="2" name="Title 1"/>
+          <p:cNvSpPr>
+            <a:spLocks noGrp="1"/>
+          </p:cNvSpPr>
+          <p:nvPr>
+            <p:ph type="title"/>
+          </p:nvPr>
+        </p:nvSpPr>
+        <p:spPr/>
+        <p:txBody>
+          <a:bodyPr/>
+          <a:lstStyle/>
+          <a:p>
+            <a:pPr lvl="0" indent="0" marL="0">
+              <a:buNone/>
+            </a:pPr>
+            <a:r>
+              <a:rPr/>
+              <a:t>Learning objectives</a:t>
+            </a:r>
+          </a:p>
+        </p:txBody>
+      </p:sp>
+      <p:sp>
+        <p:nvSpPr>
+          <p:cNvPr id="3" name="Content Placeholder 2"/>
+          <p:cNvSpPr>
+            <a:spLocks noGrp="1"/>
+          </p:cNvSpPr>
+          <p:nvPr>
+            <p:ph idx="1"/>
+          </p:nvPr>
+        </p:nvSpPr>
+        <p:spPr/>
+        <p:txBody>
+          <a:bodyPr/>
+          <a:lstStyle/>
+          <a:p>
+            <a:pPr lvl="0"/>
+            <a:r>
+              <a:rPr/>
+              <a:t>Derive the </a:t>
+            </a:r>
+            <a:r>
+              <a:rPr b="1"/>
+              <a:t>bias–variance–noise</a:t>
+            </a:r>
+            <a:r>
+              <a:rPr/>
+              <a:t> decomposition and name what each term is</a:t>
+            </a:r>
+          </a:p>
+          <a:p>
+            <a:pPr lvl="0"/>
+            <a:r>
+              <a:rPr/>
+              <a:t>Explain why training error is </a:t>
+            </a:r>
+            <a:r>
+              <a:rPr b="1"/>
+              <a:t>optimistic</a:t>
+            </a:r>
+            <a:r>
+              <a:rPr/>
+              <a:t>, and by exactly how much</a:t>
+            </a:r>
+          </a:p>
+          <a:p>
+            <a:pPr lvl="0"/>
+            <a:r>
+              <a:rPr/>
+              <a:t>Choose a </a:t>
+            </a:r>
+            <a:r>
+              <a:rPr b="1"/>
+              <a:t>CV scheme that matches the claim</a:t>
+            </a:r>
+            <a:r>
+              <a:rPr/>
+              <a:t> you intend to make</a:t>
+            </a:r>
+          </a:p>
+          <a:p>
+            <a:pPr lvl="0"/>
+            <a:r>
+              <a:rPr/>
+              <a:t>Recognise the three leakages: preprocessing, selection, dependence</a:t>
+            </a:r>
+          </a:p>
+          <a:p>
+            <a:pPr lvl="0"/>
+            <a:r>
+              <a:rPr/>
+              <a:t>Quantify, on real data, what the wrong split costs you</a:t>
+            </a:r>
+          </a:p>
+        </p:txBody>
+      </p:sp>
+    </p:spTree>
+  </p:cSld>
+</p:sld>
+</file>
+
+<file path=ppt/slides/slide5.xml><?xml version="1.0" encoding="utf-8"?>
+<p:sld xmlns:a="http://schemas.openxmlformats.org/drawingml/2006/main" xmlns:r="http://schemas.openxmlformats.org/officeDocument/2006/relationships" xmlns:p="http://schemas.openxmlformats.org/presentationml/2006/main">
+  <p:cSld>
+    <p:spTree>
+      <p:nvGrpSpPr>
+        <p:cNvPr id="1" name=""/>
+        <p:cNvGrpSpPr/>
+        <p:nvPr/>
+      </p:nvGrpSpPr>
+      <p:grpSpPr>
+        <a:xfrm>
+          <a:off x="0" y="0"/>
+          <a:ext cx="0" cy="0"/>
+          <a:chOff x="0" y="0"/>
+          <a:chExt cx="0" cy="0"/>
+        </a:xfrm>
+      </p:grpSpPr>
+      <p:sp>
+        <p:nvSpPr>
+          <p:cNvPr id="2" name="Title 1"/>
+          <p:cNvSpPr>
+            <a:spLocks noGrp="1"/>
+          </p:cNvSpPr>
+          <p:nvPr>
+            <p:ph type="title"/>
+          </p:nvPr>
+        </p:nvSpPr>
+        <p:spPr>
+          <a:xfrm>
+            <a:off x="722313" y="1850000"/>
+            <a:ext cx="7772400" cy="1300000"/>
+          </a:xfrm>
+        </p:spPr>
+        <p:txBody>
+          <a:bodyPr/>
+          <a:lstStyle/>
+          <a:p>
+            <a:pPr lvl="0" indent="0" marL="0">
+              <a:buNone/>
+            </a:pPr>
+            <a:r>
+              <a:rPr/>
+              <a:t>1 · What this adds</a:t>
+            </a:r>
+          </a:p>
+        </p:txBody>
+      </p:sp>
+    </p:spTree>
+  </p:cSld>
+</p:sld>
+</file>
+
+<file path=ppt/slides/slide6.xml><?xml version="1.0" encoding="utf-8"?>
+<p:sld xmlns:a="http://schemas.openxmlformats.org/drawingml/2006/main" xmlns:r="http://schemas.openxmlformats.org/officeDocument/2006/relationships" xmlns:p="http://schemas.openxmlformats.org/presentationml/2006/main">
+  <p:cSld>
+    <p:spTree>
+      <p:nvGrpSpPr>
+        <p:cNvPr id="1" name=""/>
+        <p:cNvGrpSpPr/>
+        <p:nvPr/>
+      </p:nvGrpSpPr>
+      <p:grpSpPr>
+        <a:xfrm>
+          <a:off x="0" y="0"/>
+          <a:ext cx="0" cy="0"/>
+          <a:chOff x="0" y="0"/>
+          <a:chExt cx="0" cy="0"/>
+        </a:xfrm>
+      </p:grpSpPr>
+      <p:sp>
+        <p:nvSpPr>
+          <p:cNvPr id="2" name="Title 1"/>
+          <p:cNvSpPr>
+            <a:spLocks noGrp="1"/>
+          </p:cNvSpPr>
+          <p:nvPr>
+            <p:ph type="title"/>
+          </p:nvPr>
+        </p:nvSpPr>
+        <p:spPr/>
+        <p:txBody>
+          <a:bodyPr/>
+          <a:lstStyle/>
+          <a:p>
+            <a:pPr lvl="0" indent="0" marL="0">
+              <a:buNone/>
+            </a:pPr>
+            <a:r>
+              <a:rPr/>
+              <a:t>This is the hinge of the course</a:t>
+            </a:r>
+          </a:p>
+        </p:txBody>
+      </p:sp>
+      <p:graphicFrame>
+        <p:nvGraphicFramePr>
+          <p:cNvPr id="6" name="Content Placeholder 5"/>
+          <p:cNvGraphicFramePr>
+            <a:graphicFrameLocks noGrp="1"/>
+          </p:cNvGraphicFramePr>
+          <p:nvPr>
+            <p:ph idx="1"/>
+          </p:nvPr>
+        </p:nvGraphicFramePr>
+        <p:xfrm>
+          <a:off x="457200" y="1193800"/>
+          <a:ext cx="8229600" cy="3390900"/>
+        </p:xfrm>
+        <a:graphic>
+          <a:graphicData uri="http://schemas.openxmlformats.org/drawingml/2006/table">
+            <a:tbl>
+              <a:tblPr firstRow="1" bandRow="1">
+                <a:tableStyleId>{5C22544A-7EE6-4342-B048-85BDC9FD1C3A}</a:tableStyleId>
+              </a:tblPr>
+              <a:tblGrid>
+                <a:gridCol w="4114800"/>
+                <a:gridCol w="4114800"/>
+              </a:tblGrid>
+              <a:tr h="0">
+                <a:tc>
+                  <a:txBody>
+                    <a:bodyPr/>
+                    <a:lstStyle/>
+                    <a:p>
+                      <a:pPr lvl="0" indent="0" marL="0">
+                        <a:buNone/>
+                      </a:pPr>
+                      <a:r>
+                        <a:rPr/>
+                        <a:t>Session</a:t>
+                      </a:r>
+                    </a:p>
+                  </a:txBody>
+                  <a:tcPr/>
+                </a:tc>
+                <a:tc>
+                  <a:txBody>
+                    <a:bodyPr/>
+                    <a:lstStyle/>
+                    <a:p>
+                      <a:pPr lvl="0" indent="0" marL="0">
+                        <a:buNone/>
+                      </a:pPr>
+                      <a:r>
+                        <a:rPr/>
+                        <a:t>The claim it let you make</a:t>
+                      </a:r>
+                    </a:p>
+                  </a:txBody>
+                  <a:tcPr/>
+                </a:tc>
+              </a:tr>
+              <a:tr h="0">
+                <a:tc>
+                  <a:txBody>
+                    <a:bodyPr/>
+                    <a:lstStyle/>
+                    <a:p>
+                      <a:pPr lvl="0" indent="0" marL="0">
+                        <a:buNone/>
+                      </a:pPr>
+                      <a:r>
+                        <a:rPr b="1"/>
+                        <a:t>02</a:t>
+                      </a:r>
+                    </a:p>
+                  </a:txBody>
+                </a:tc>
+                <a:tc>
+                  <a:txBody>
+                    <a:bodyPr/>
+                    <a:lstStyle/>
+                    <a:p>
+                      <a:pPr lvl="0" indent="0" marL="0">
+                        <a:buNone/>
+                      </a:pPr>
+                      <a:r>
+                        <a:rPr/>
+                        <a:t>“Here is the least-squares fit, and here is what it optimises”</a:t>
+                      </a:r>
+                    </a:p>
+                  </a:txBody>
+                </a:tc>
+              </a:tr>
+              <a:tr h="0">
+                <a:tc>
+                  <a:txBody>
+                    <a:bodyPr/>
+                    <a:lstStyle/>
+                    <a:p>
+                      <a:pPr lvl="0" indent="0" marL="0">
+                        <a:buNone/>
+                      </a:pPr>
+                      <a:r>
+                        <a:rPr b="1"/>
+                        <a:t>03</a:t>
+                      </a:r>
+                    </a:p>
+                  </a:txBody>
+                </a:tc>
+                <a:tc>
+                  <a:txBody>
+                    <a:bodyPr/>
+                    <a:lstStyle/>
+                    <a:p>
+                      <a:pPr lvl="0" indent="0" marL="0">
+                        <a:buNone/>
+                      </a:pPr>
+                      <a:r>
+                        <a:rPr/>
+                        <a:t>“Here is an honest interval around it”</a:t>
+                      </a:r>
+                    </a:p>
+                  </a:txBody>
+                </a:tc>
+              </a:tr>
+            </a:tbl>
+          </a:graphicData>
+        </a:graphic>
+      </p:graphicFrame>
+    </p:spTree>
+  </p:cSld>
+</p:sld>
+</file>
+
+<file path=ppt/slides/slide7.xml><?xml version="1.0" encoding="utf-8"?>
+<p:sld xmlns:a="http://schemas.openxmlformats.org/drawingml/2006/main" xmlns:r="http://schemas.openxmlformats.org/officeDocument/2006/relationships" xmlns:p="http://schemas.openxmlformats.org/presentationml/2006/main">
+  <p:cSld>
+    <p:spTree>
+      <p:nvGrpSpPr>
+        <p:cNvPr id="1" name=""/>
+        <p:cNvGrpSpPr/>
+        <p:nvPr/>
+      </p:nvGrpSpPr>
+      <p:grpSpPr>
+        <a:xfrm>
+          <a:off x="0" y="0"/>
+          <a:ext cx="0" cy="0"/>
+          <a:chOff x="0" y="0"/>
+          <a:chExt cx="0" cy="0"/>
+        </a:xfrm>
+      </p:grpSpPr>
+      <p:sp>
+        <p:nvSpPr>
+          <p:cNvPr id="3" name="Content Placeholder 2"/>
+          <p:cNvSpPr>
+            <a:spLocks noGrp="1"/>
+          </p:cNvSpPr>
+          <p:nvPr>
+            <p:ph idx="1"/>
+          </p:nvPr>
+        </p:nvSpPr>
+        <p:spPr/>
+        <p:txBody>
+          <a:bodyPr/>
+          <a:lstStyle/>
+          <a:p>
+            <a:pPr lvl="0" indent="0" marL="0">
+              <a:buNone/>
+            </a:pPr>
+            <a:r>
+              <a:rPr/>
+              <a:t>Both are statements about </a:t>
+            </a:r>
+            <a:r>
+              <a:rPr b="1"/>
+              <a:t>the data you have</a:t>
+            </a:r>
+            <a:r>
+              <a:rPr/>
+              <a:t>.</a:t>
+            </a:r>
+          </a:p>
+          <a:p>
+            <a:pPr lvl="0" indent="0" marL="0">
+              <a:buNone/>
+            </a:pPr>
+            <a:r>
+              <a:rPr/>
+              <a:t>Neither says anything about data you have not seen. And every use of a model — forecasting, targeting, deciding — is about data you have not seen.</a:t>
+            </a:r>
+          </a:p>
+        </p:txBody>
+      </p:sp>
     </p:spTree>
   </p:cSld>
 </p:sld>
@@ -7906,7 +8431,7 @@
             </a:pPr>
             <a:r>
               <a:rPr/>
-              <a:t>The economics of this equation</a:t>
+              <a:t>What today adds</a:t>
             </a:r>
           </a:p>
         </p:txBody>
@@ -7926,51 +8451,78 @@
           <a:bodyPr/>
           <a:lstStyle/>
           <a:p>
+            <a:pPr lvl="0" indent="0" marL="1270000">
+              <a:buNone/>
+            </a:pPr>
+            <a:r>
+              <a:rPr sz="2000" b="1"/>
+              <a:t>After today, in-sample fit stops being evidence.</a:t>
+            </a:r>
+          </a:p>
+          <a:p>
             <a:pPr lvl="0"/>
             <a:r>
+              <a:rPr/>
+              <a:t>A vocabulary for </a:t>
+            </a:r>
+            <a:r>
+              <a:rPr i="1"/>
+              <a:t>why</a:t>
+            </a:r>
+            <a:r>
+              <a:rPr/>
+              <a:t> a flexible model can be worse: </a:t>
+            </a:r>
+            <a:r>
               <a:rPr b="1"/>
-              <a:t>Bias</a:t>
+              <a:t>bias</a:t>
             </a:r>
             <a:r>
               <a:rPr/>
-              <a:t> is what you get for imposing structure you believe in.</a:t>
+              <a:t>, </a:t>
+            </a:r>
+            <a:r>
+              <a:rPr b="1"/>
+              <a:t>variance</a:t>
+            </a:r>
+            <a:r>
+              <a:rPr/>
+              <a:t>, </a:t>
+            </a:r>
+            <a:r>
+              <a:rPr b="1"/>
+              <a:t>irreducible noise</a:t>
             </a:r>
           </a:p>
           <a:p>
             <a:pPr lvl="0"/>
             <a:r>
+              <a:rPr/>
+              <a:t>A number for how much training error flatters you</a:t>
+            </a:r>
+          </a:p>
+          <a:p>
+            <a:pPr lvl="0"/>
+            <a:r>
+              <a:rPr/>
+              <a:t>A procedure — cross-validation — and the three ways it is routinely botched</a:t>
+            </a:r>
+          </a:p>
+          <a:p>
+            <a:pPr lvl="0" indent="0" marL="0">
+              <a:buNone/>
+            </a:pPr>
+            <a:r>
+              <a:rPr/>
+              <a:t>Everything from Session 05 onward is a way of sitting at the bias–variance optimum </a:t>
+            </a:r>
+            <a:r>
               <a:rPr b="1"/>
-              <a:t>Variance</a:t>
+              <a:t>on purpose</a:t>
             </a:r>
             <a:r>
               <a:rPr/>
-              <a:t> is what you pay for letting the data speak.</a:t>
-            </a:r>
-          </a:p>
-          <a:p>
-            <a:pPr lvl="0" indent="0" marL="0">
-              <a:buNone/>
-            </a:pPr>
-            <a:r>
-              <a:rPr/>
-              <a:t>Flexibility trades one for the other, and there is generally an </a:t>
-            </a:r>
-            <a:r>
-              <a:rPr b="1"/>
-              <a:t>interior optimum</a:t>
-            </a:r>
-            <a:r>
-              <a:rPr/>
-              <a:t>.</a:t>
-            </a:r>
-          </a:p>
-          <a:p>
-            <a:pPr lvl="0" indent="0" marL="0">
-              <a:buNone/>
-            </a:pPr>
-            <a:r>
-              <a:rPr/>
-              <a:t>The rest of the course is a catalogue of ways to sit at that optimum deliberately rather than by accident.</a:t>
+              <a:t> rather than by accident.</a:t>
             </a:r>
           </a:p>
         </p:txBody>
@@ -8022,7 +8574,7 @@
             </a:pPr>
             <a:r>
               <a:rPr/>
-              <a:t>4.2 Optimism</a:t>
+              <a:t>2 · The decomposition</a:t>
             </a:r>
           </a:p>
         </p:txBody>

--- a/04-bias-variance-and-cross-validation/slides.pptx
+++ b/04-bias-variance-and-cross-validation/slides.pptx
@@ -43,6 +43,12 @@
     <p:sldId id="291" r:id="rId37"/>
     <p:sldId id="292" r:id="rId38"/>
     <p:sldId id="293" r:id="rId39"/>
+    <p:sldId id="294" r:id="rId40"/>
+    <p:sldId id="295" r:id="rId41"/>
+    <p:sldId id="296" r:id="rId42"/>
+    <p:sldId id="297" r:id="rId43"/>
+    <p:sldId id="298" r:id="rId44"/>
+    <p:sldId id="299" r:id="rId45"/>
   </p:sldIdLst>
   <p:sldSz cx="9144000" cy="5143500" type="screen16x9"/>
   <p:notesSz cx="6858000" cy="9144000"/>
@@ -3279,7 +3285,7 @@
             </a:pPr>
             <a:r>
               <a:rPr/>
-              <a:t>21 August 2026</a:t>
+              <a:t>22 August 2026</a:t>
             </a:r>
           </a:p>
         </p:txBody>
@@ -4787,6 +4793,138 @@
             </a:pPr>
             <a:r>
               <a:rPr/>
+              <a:t>See the gap open</a:t>
+            </a:r>
+          </a:p>
+        </p:txBody>
+      </p:sp>
+      <p:pic>
+        <p:nvPicPr>
+          <p:cNvPr descr="slides_files/figure-pptx/cell-5-output-1.png" id="0" name="Picture 1"/>
+          <p:cNvPicPr>
+            <a:picLocks noGrp="1" noChangeAspect="1"/>
+          </p:cNvPicPr>
+          <p:nvPr/>
+        </p:nvPicPr>
+        <p:blipFill>
+          <a:blip r:embed="rId2"/>
+          <a:stretch>
+            <a:fillRect/>
+          </a:stretch>
+        </p:blipFill>
+        <p:spPr bwMode="auto">
+          <a:xfrm>
+            <a:off x="838200" y="1193800"/>
+            <a:ext cx="7454900" cy="3390900"/>
+          </a:xfrm>
+          <a:prstGeom prst="rect">
+            <a:avLst/>
+          </a:prstGeom>
+          <a:noFill/>
+          <a:ln w="9525">
+            <a:noFill/>
+            <a:headEnd/>
+            <a:tailEnd/>
+          </a:ln>
+        </p:spPr>
+      </p:pic>
+    </p:spTree>
+  </p:cSld>
+</p:sld>
+</file>
+
+<file path=ppt/slides/slide21.xml><?xml version="1.0" encoding="utf-8"?>
+<p:sld xmlns:a="http://schemas.openxmlformats.org/drawingml/2006/main" xmlns:r="http://schemas.openxmlformats.org/officeDocument/2006/relationships" xmlns:p="http://schemas.openxmlformats.org/presentationml/2006/main">
+  <p:cSld>
+    <p:spTree>
+      <p:nvGrpSpPr>
+        <p:cNvPr id="1" name=""/>
+        <p:cNvGrpSpPr/>
+        <p:nvPr/>
+      </p:nvGrpSpPr>
+      <p:grpSpPr>
+        <a:xfrm>
+          <a:off x="0" y="0"/>
+          <a:ext cx="0" cy="0"/>
+          <a:chOff x="0" y="0"/>
+          <a:chExt cx="0" cy="0"/>
+        </a:xfrm>
+      </p:grpSpPr>
+      <p:sp>
+        <p:nvSpPr>
+          <p:cNvPr id="3" name="Content Placeholder 2"/>
+          <p:cNvSpPr>
+            <a:spLocks noGrp="1"/>
+          </p:cNvSpPr>
+          <p:nvPr>
+            <p:ph idx="1"/>
+          </p:nvPr>
+        </p:nvSpPr>
+        <p:spPr/>
+        <p:txBody>
+          <a:bodyPr/>
+          <a:lstStyle/>
+          <a:p>
+            <a:pPr lvl="0" indent="0" marL="0">
+              <a:buNone/>
+            </a:pPr>
+            <a:r>
+              <a:rPr/>
+              <a:t>Training error falls </a:t>
+            </a:r>
+            <a:r>
+              <a:rPr b="1"/>
+              <a:t>below</a:t>
+            </a:r>
+            <a:r>
+              <a:rPr/>
+              <a:t> the irreducible noise floor. Any number under that dotted line is a report of how hard the model chased its own labels.</a:t>
+            </a:r>
+          </a:p>
+        </p:txBody>
+      </p:sp>
+    </p:spTree>
+  </p:cSld>
+</p:sld>
+</file>
+
+<file path=ppt/slides/slide22.xml><?xml version="1.0" encoding="utf-8"?>
+<p:sld xmlns:a="http://schemas.openxmlformats.org/drawingml/2006/main" xmlns:r="http://schemas.openxmlformats.org/officeDocument/2006/relationships" xmlns:p="http://schemas.openxmlformats.org/presentationml/2006/main">
+  <p:cSld>
+    <p:spTree>
+      <p:nvGrpSpPr>
+        <p:cNvPr id="1" name=""/>
+        <p:cNvGrpSpPr/>
+        <p:nvPr/>
+      </p:nvGrpSpPr>
+      <p:grpSpPr>
+        <a:xfrm>
+          <a:off x="0" y="0"/>
+          <a:ext cx="0" cy="0"/>
+          <a:chOff x="0" y="0"/>
+          <a:chExt cx="0" cy="0"/>
+        </a:xfrm>
+      </p:grpSpPr>
+      <p:sp>
+        <p:nvSpPr>
+          <p:cNvPr id="2" name="Title 1"/>
+          <p:cNvSpPr>
+            <a:spLocks noGrp="1"/>
+          </p:cNvSpPr>
+          <p:nvPr>
+            <p:ph type="title"/>
+          </p:nvPr>
+        </p:nvSpPr>
+        <p:spPr/>
+        <p:txBody>
+          <a:bodyPr/>
+          <a:lstStyle/>
+          <a:p>
+            <a:pPr lvl="0" indent="0" marL="0">
+              <a:buNone/>
+            </a:pPr>
+            <a:r>
+              <a:rPr/>
               <a:t>Which gives the classical criteria</a:t>
             </a:r>
           </a:p>
@@ -5215,7 +5353,7 @@
 </p:sld>
 </file>
 
-<file path=ppt/slides/slide21.xml><?xml version="1.0" encoding="utf-8"?>
+<file path=ppt/slides/slide23.xml><?xml version="1.0" encoding="utf-8"?>
 <p:sld xmlns:a="http://schemas.openxmlformats.org/drawingml/2006/main" xmlns:r="http://schemas.openxmlformats.org/officeDocument/2006/relationships" xmlns:p="http://schemas.openxmlformats.org/presentationml/2006/main">
   <p:cSld>
     <p:spTree>
@@ -5463,7 +5601,7 @@
 </p:sld>
 </file>
 
-<file path=ppt/slides/slide22.xml><?xml version="1.0" encoding="utf-8"?>
+<file path=ppt/slides/slide24.xml><?xml version="1.0" encoding="utf-8"?>
 <p:sld xmlns:a="http://schemas.openxmlformats.org/drawingml/2006/main" xmlns:r="http://schemas.openxmlformats.org/officeDocument/2006/relationships" xmlns:p="http://schemas.openxmlformats.org/presentationml/2006/main">
   <p:cSld>
     <p:spTree>
@@ -5515,7 +5653,7 @@
 </p:sld>
 </file>
 
-<file path=ppt/slides/slide23.xml><?xml version="1.0" encoding="utf-8"?>
+<file path=ppt/slides/slide25.xml><?xml version="1.0" encoding="utf-8"?>
 <p:sld xmlns:a="http://schemas.openxmlformats.org/drawingml/2006/main" xmlns:r="http://schemas.openxmlformats.org/officeDocument/2006/relationships" xmlns:p="http://schemas.openxmlformats.org/presentationml/2006/main">
   <p:cSld>
     <p:spTree>
@@ -5796,7 +5934,7 @@
 </p:sld>
 </file>
 
-<file path=ppt/slides/slide24.xml><?xml version="1.0" encoding="utf-8"?>
+<file path=ppt/slides/slide26.xml><?xml version="1.0" encoding="utf-8"?>
 <p:sld xmlns:a="http://schemas.openxmlformats.org/drawingml/2006/main" xmlns:r="http://schemas.openxmlformats.org/officeDocument/2006/relationships" xmlns:p="http://schemas.openxmlformats.org/presentationml/2006/main">
   <p:cSld>
     <p:spTree>
@@ -5840,7 +5978,7 @@
       </p:sp>
       <p:pic>
         <p:nvPicPr>
-          <p:cNvPr descr="slides_files/figure-pptx/cell-5-output-1.png" id="0" name="Picture 1"/>
+          <p:cNvPr descr="slides_files/figure-pptx/cell-6-output-1.png" id="0" name="Picture 1"/>
           <p:cNvPicPr>
             <a:picLocks noGrp="1" noChangeAspect="1"/>
           </p:cNvPicPr>
@@ -5873,7 +6011,7 @@
 </p:sld>
 </file>
 
-<file path=ppt/slides/slide25.xml><?xml version="1.0" encoding="utf-8"?>
+<file path=ppt/slides/slide27.xml><?xml version="1.0" encoding="utf-8"?>
 <p:sld xmlns:a="http://schemas.openxmlformats.org/drawingml/2006/main" xmlns:r="http://schemas.openxmlformats.org/officeDocument/2006/relationships" xmlns:p="http://schemas.openxmlformats.org/presentationml/2006/main">
   <p:cSld>
     <p:spTree>
@@ -5928,7 +6066,7 @@
 </p:sld>
 </file>
 
-<file path=ppt/slides/slide26.xml><?xml version="1.0" encoding="utf-8"?>
+<file path=ppt/slides/slide28.xml><?xml version="1.0" encoding="utf-8"?>
 <p:sld xmlns:a="http://schemas.openxmlformats.org/drawingml/2006/main" xmlns:r="http://schemas.openxmlformats.org/officeDocument/2006/relationships" xmlns:p="http://schemas.openxmlformats.org/presentationml/2006/main">
   <p:cSld>
     <p:spTree>
@@ -6275,268 +6413,6 @@
 </p:sld>
 </file>
 
-<file path=ppt/slides/slide27.xml><?xml version="1.0" encoding="utf-8"?>
-<p:sld xmlns:a="http://schemas.openxmlformats.org/drawingml/2006/main" xmlns:r="http://schemas.openxmlformats.org/officeDocument/2006/relationships" xmlns:p="http://schemas.openxmlformats.org/presentationml/2006/main">
-  <p:cSld>
-    <p:spTree>
-      <p:nvGrpSpPr>
-        <p:cNvPr id="1" name=""/>
-        <p:cNvGrpSpPr/>
-        <p:nvPr/>
-      </p:nvGrpSpPr>
-      <p:grpSpPr>
-        <a:xfrm>
-          <a:off x="0" y="0"/>
-          <a:ext cx="0" cy="0"/>
-          <a:chOff x="0" y="0"/>
-          <a:chExt cx="0" cy="0"/>
-        </a:xfrm>
-      </p:grpSpPr>
-      <p:sp>
-        <p:nvSpPr>
-          <p:cNvPr id="2" name="Title 1"/>
-          <p:cNvSpPr>
-            <a:spLocks noGrp="1"/>
-          </p:cNvSpPr>
-          <p:nvPr>
-            <p:ph type="title"/>
-          </p:nvPr>
-        </p:nvSpPr>
-        <p:spPr>
-          <a:xfrm>
-            <a:off x="722313" y="1850000"/>
-            <a:ext cx="7772400" cy="1300000"/>
-          </a:xfrm>
-        </p:spPr>
-        <p:txBody>
-          <a:bodyPr/>
-          <a:lstStyle/>
-          <a:p>
-            <a:pPr lvl="0" indent="0" marL="0">
-              <a:buNone/>
-            </a:pPr>
-            <a:r>
-              <a:rPr/>
-              <a:t>6 · Three ways to get it wrong</a:t>
-            </a:r>
-          </a:p>
-        </p:txBody>
-      </p:sp>
-    </p:spTree>
-  </p:cSld>
-</p:sld>
-</file>
-
-<file path=ppt/slides/slide28.xml><?xml version="1.0" encoding="utf-8"?>
-<p:sld xmlns:a="http://schemas.openxmlformats.org/drawingml/2006/main" xmlns:r="http://schemas.openxmlformats.org/officeDocument/2006/relationships" xmlns:p="http://schemas.openxmlformats.org/presentationml/2006/main">
-  <p:cSld>
-    <p:spTree>
-      <p:nvGrpSpPr>
-        <p:cNvPr id="1" name=""/>
-        <p:cNvGrpSpPr/>
-        <p:nvPr/>
-      </p:nvGrpSpPr>
-      <p:grpSpPr>
-        <a:xfrm>
-          <a:off x="0" y="0"/>
-          <a:ext cx="0" cy="0"/>
-          <a:chOff x="0" y="0"/>
-          <a:chExt cx="0" cy="0"/>
-        </a:xfrm>
-      </p:grpSpPr>
-      <p:sp>
-        <p:nvSpPr>
-          <p:cNvPr id="2" name="Title 1"/>
-          <p:cNvSpPr>
-            <a:spLocks noGrp="1"/>
-          </p:cNvSpPr>
-          <p:nvPr>
-            <p:ph type="title"/>
-          </p:nvPr>
-        </p:nvSpPr>
-        <p:spPr/>
-        <p:txBody>
-          <a:bodyPr/>
-          <a:lstStyle/>
-          <a:p>
-            <a:pPr lvl="0" indent="0" marL="0">
-              <a:buNone/>
-            </a:pPr>
-            <a:r>
-              <a:rPr/>
-              <a:t>1 · Leakage through preprocessing</a:t>
-            </a:r>
-          </a:p>
-        </p:txBody>
-      </p:sp>
-      <p:sp>
-        <p:nvSpPr>
-          <p:cNvPr id="3" name="Content Placeholder 2"/>
-          <p:cNvSpPr>
-            <a:spLocks noGrp="1"/>
-          </p:cNvSpPr>
-          <p:nvPr>
-            <p:ph idx="1"/>
-          </p:nvPr>
-        </p:nvSpPr>
-        <p:spPr/>
-        <p:txBody>
-          <a:bodyPr/>
-          <a:lstStyle/>
-          <a:p>
-            <a:pPr lvl="0" indent="0" marL="0">
-              <a:buNone/>
-            </a:pPr>
-            <a:r>
-              <a:rPr/>
-              <a:t>Any step that learns from the data — scaling, imputation, feature selection, target encoding — must be fitted </a:t>
-            </a:r>
-            <a:r>
-              <a:rPr b="1"/>
-              <a:t>inside</a:t>
-            </a:r>
-            <a:r>
-              <a:rPr/>
-              <a:t> each training fold.</a:t>
-            </a:r>
-          </a:p>
-          <a:p>
-            <a:pPr lvl="0" indent="0">
-              <a:buNone/>
-            </a:pPr>
-            <a:r>
-              <a:rPr i="1">
-                <a:solidFill>
-                  <a:srgbClr val="60A0B0"/>
-                </a:solidFill>
-                <a:latin typeface="Courier"/>
-              </a:rPr>
-              <a:t>#  WRONG — the scaler has already seen the test fold</a:t>
-            </a:r>
-            <a:br/>
-            <a:r>
-              <a:rPr>
-                <a:latin typeface="Courier"/>
-              </a:rPr>
-              <a:t>X_scaled </a:t>
-            </a:r>
-            <a:r>
-              <a:rPr>
-                <a:solidFill>
-                  <a:srgbClr val="666666"/>
-                </a:solidFill>
-                <a:latin typeface="Courier"/>
-              </a:rPr>
-              <a:t>=</a:t>
-            </a:r>
-            <a:r>
-              <a:rPr>
-                <a:latin typeface="Courier"/>
-              </a:rPr>
-              <a:t> StandardScaler().fit_transform(X)</a:t>
-            </a:r>
-            <a:br/>
-            <a:r>
-              <a:rPr>
-                <a:latin typeface="Courier"/>
-              </a:rPr>
-              <a:t>cross_val_score(model, X_scaled, y, cv</a:t>
-            </a:r>
-            <a:r>
-              <a:rPr>
-                <a:solidFill>
-                  <a:srgbClr val="666666"/>
-                </a:solidFill>
-                <a:latin typeface="Courier"/>
-              </a:rPr>
-              <a:t>=</a:t>
-            </a:r>
-            <a:r>
-              <a:rPr>
-                <a:latin typeface="Courier"/>
-              </a:rPr>
-              <a:t>cv)</a:t>
-            </a:r>
-            <a:br/>
-            <a:br/>
-            <a:r>
-              <a:rPr i="1">
-                <a:solidFill>
-                  <a:srgbClr val="60A0B0"/>
-                </a:solidFill>
-                <a:latin typeface="Courier"/>
-              </a:rPr>
-              <a:t>#  RIGHT — every step re-fits inside each fold</a:t>
-            </a:r>
-            <a:br/>
-            <a:r>
-              <a:rPr>
-                <a:latin typeface="Courier"/>
-              </a:rPr>
-              <a:t>pipe </a:t>
-            </a:r>
-            <a:r>
-              <a:rPr>
-                <a:solidFill>
-                  <a:srgbClr val="666666"/>
-                </a:solidFill>
-                <a:latin typeface="Courier"/>
-              </a:rPr>
-              <a:t>=</a:t>
-            </a:r>
-            <a:r>
-              <a:rPr>
-                <a:latin typeface="Courier"/>
-              </a:rPr>
-              <a:t> make_pipeline(StandardScaler(), model)</a:t>
-            </a:r>
-            <a:br/>
-            <a:r>
-              <a:rPr>
-                <a:latin typeface="Courier"/>
-              </a:rPr>
-              <a:t>cross_val_score(pipe, X, y, cv</a:t>
-            </a:r>
-            <a:r>
-              <a:rPr>
-                <a:solidFill>
-                  <a:srgbClr val="666666"/>
-                </a:solidFill>
-                <a:latin typeface="Courier"/>
-              </a:rPr>
-              <a:t>=</a:t>
-            </a:r>
-            <a:r>
-              <a:rPr>
-                <a:latin typeface="Courier"/>
-              </a:rPr>
-              <a:t>cv)</a:t>
-            </a:r>
-          </a:p>
-          <a:p>
-            <a:pPr lvl="0" indent="0" marL="0">
-              <a:buNone/>
-            </a:pPr>
-            <a:r>
-              <a:rPr/>
-              <a:t>The single most common serious error in applied machine learning papers. It </a:t>
-            </a:r>
-            <a:r>
-              <a:rPr b="1"/>
-              <a:t>always</a:t>
-            </a:r>
-            <a:r>
-              <a:rPr/>
-              <a:t> flatters you.</a:t>
-            </a:r>
-          </a:p>
-        </p:txBody>
-      </p:sp>
-    </p:spTree>
-  </p:cSld>
-</p:sld>
-</file>
-
 <file path=ppt/slides/slide29.xml><?xml version="1.0" encoding="utf-8"?>
 <p:sld xmlns:a="http://schemas.openxmlformats.org/drawingml/2006/main" xmlns:r="http://schemas.openxmlformats.org/officeDocument/2006/relationships" xmlns:p="http://schemas.openxmlformats.org/presentationml/2006/main">
   <p:cSld>
@@ -6574,75 +6450,41 @@
             </a:pPr>
             <a:r>
               <a:rPr/>
-              <a:t>2 · Leakage through selection</a:t>
-            </a:r>
-          </a:p>
-        </p:txBody>
-      </p:sp>
-      <p:sp>
-        <p:nvSpPr>
-          <p:cNvPr id="3" name="Content Placeholder 2"/>
-          <p:cNvSpPr>
-            <a:spLocks noGrp="1"/>
-          </p:cNvSpPr>
-          <p:nvPr>
-            <p:ph idx="1"/>
-          </p:nvPr>
-        </p:nvSpPr>
-        <p:spPr/>
-        <p:txBody>
-          <a:bodyPr/>
-          <a:lstStyle/>
-          <a:p>
-            <a:pPr lvl="0" indent="0" marL="0">
-              <a:buNone/>
-            </a:pPr>
-            <a:r>
-              <a:rPr/>
-              <a:t>Choosing a model by CV and then reporting </a:t>
-            </a:r>
-            <a:r>
-              <a:rPr b="1"/>
-              <a:t>that same CV error</a:t>
-            </a:r>
-            <a:r>
-              <a:rPr/>
-              <a:t> as its performance is optimistic.</a:t>
-            </a:r>
-          </a:p>
-          <a:p>
-            <a:pPr lvl="0"/>
-            <a:r>
-              <a:rPr b="1"/>
-              <a:t>outer</a:t>
-            </a:r>
-            <a:r>
-              <a:rPr/>
-              <a:t> loop → evaluation</a:t>
-            </a:r>
-          </a:p>
-          <a:p>
-            <a:pPr lvl="0"/>
-            <a:r>
-              <a:rPr b="1"/>
-              <a:t>inner</a:t>
-            </a:r>
-            <a:r>
-              <a:rPr/>
-              <a:t> loop → tuning</a:t>
-            </a:r>
-          </a:p>
-          <a:p>
-            <a:pPr lvl="0" indent="0" marL="0">
-              <a:buNone/>
-            </a:pPr>
-            <a:r>
-              <a:rPr/>
-              <a:t>Reporting the best inner-loop score is the same error as reporting training error, one level up.</a:t>
-            </a:r>
-          </a:p>
-        </p:txBody>
-      </p:sp>
+              <a:t>How much does the choice matter?</a:t>
+            </a:r>
+          </a:p>
+        </p:txBody>
+      </p:sp>
+      <p:pic>
+        <p:nvPicPr>
+          <p:cNvPr descr="slides_files/figure-pptx/cell-7-output-1.png" id="0" name="Picture 1"/>
+          <p:cNvPicPr>
+            <a:picLocks noGrp="1" noChangeAspect="1"/>
+          </p:cNvPicPr>
+          <p:nvPr/>
+        </p:nvPicPr>
+        <p:blipFill>
+          <a:blip r:embed="rId2"/>
+          <a:stretch>
+            <a:fillRect/>
+          </a:stretch>
+        </p:blipFill>
+        <p:spPr bwMode="auto">
+          <a:xfrm>
+            <a:off x="863600" y="1193800"/>
+            <a:ext cx="7416800" cy="3390900"/>
+          </a:xfrm>
+          <a:prstGeom prst="rect">
+            <a:avLst/>
+          </a:prstGeom>
+          <a:noFill/>
+          <a:ln w="9525">
+            <a:noFill/>
+            <a:headEnd/>
+            <a:tailEnd/>
+          </a:ln>
+        </p:spPr>
+      </p:pic>
     </p:spTree>
   </p:cSld>
 </p:sld>
@@ -6996,6 +6838,630 @@
           <a:chExt cx="0" cy="0"/>
         </a:xfrm>
       </p:grpSpPr>
+      <mc:AlternateContent xmlns:mc="http://schemas.openxmlformats.org/markup-compatibility/2006">
+        <mc:Choice xmlns:a14="http://schemas.microsoft.com/office/drawing/2010/main" Requires="a14">
+          <p:sp>
+            <p:nvSpPr>
+              <p:cNvPr id="3" name="Content Placeholder 2"/>
+              <p:cNvSpPr>
+                <a:spLocks noGrp="1"/>
+              </p:cNvSpPr>
+              <p:nvPr>
+                <p:ph idx="1"/>
+              </p:nvPr>
+            </p:nvSpPr>
+            <p:spPr/>
+            <p:txBody>
+              <a:bodyPr/>
+              <a:lstStyle/>
+              <a:p>
+                <a:pPr lvl="0" indent="0" marL="0">
+                  <a:buNone/>
+                </a:pPr>
+                <a:r>
+                  <a:rPr/>
+                  <a:t>Bars are the spread across twelve different random fold assignments. </a:t>
+                </a:r>
+                <a14:m>
+                  <m:oMath xmlns:m="http://schemas.openxmlformats.org/officeDocument/2006/math">
+                    <m:r>
+                      <m:t>K</m:t>
+                    </m:r>
+                    <m:r>
+                      <m:rPr>
+                        <m:sty m:val="p"/>
+                      </m:rPr>
+                      <m:t>=</m:t>
+                    </m:r>
+                    <m:r>
+                      <m:t>2</m:t>
+                    </m:r>
+                  </m:oMath>
+                </a14:m>
+                <a:r>
+                  <a:rPr/>
+                  <a:t> is </a:t>
+                </a:r>
+                <a:r>
+                  <a:rPr b="1"/>
+                  <a:t>twice as variable</a:t>
+                </a:r>
+                <a:r>
+                  <a:rPr/>
+                  <a:t> as </a:t>
+                </a:r>
+                <a14:m>
+                  <m:oMath xmlns:m="http://schemas.openxmlformats.org/officeDocument/2006/math">
+                    <m:r>
+                      <m:t>K</m:t>
+                    </m:r>
+                    <m:r>
+                      <m:rPr>
+                        <m:sty m:val="p"/>
+                      </m:rPr>
+                      <m:t>=</m:t>
+                    </m:r>
+                    <m:r>
+                      <m:t>5</m:t>
+                    </m:r>
+                  </m:oMath>
+                </a14:m>
+                <a:r>
+                  <a:rPr/>
+                  <a:t> or </a:t>
+                </a:r>
+                <a14:m>
+                  <m:oMath xmlns:m="http://schemas.openxmlformats.org/officeDocument/2006/math">
+                    <m:r>
+                      <m:t>K</m:t>
+                    </m:r>
+                    <m:r>
+                      <m:rPr>
+                        <m:sty m:val="p"/>
+                      </m:rPr>
+                      <m:t>=</m:t>
+                    </m:r>
+                    <m:r>
+                      <m:t>10</m:t>
+                    </m:r>
+                  </m:oMath>
+                </a14:m>
+                <a:r>
+                  <a:rPr/>
+                  <a:t>, which are hard to tell apart — which is why 5 and 10 became the convention.</a:t>
+                </a:r>
+              </a:p>
+            </p:txBody>
+          </p:sp>
+        </mc:Choice>
+      </mc:AlternateContent>
+    </p:spTree>
+  </p:cSld>
+</p:sld>
+</file>
+
+<file path=ppt/slides/slide31.xml><?xml version="1.0" encoding="utf-8"?>
+<p:sld xmlns:a="http://schemas.openxmlformats.org/drawingml/2006/main" xmlns:r="http://schemas.openxmlformats.org/officeDocument/2006/relationships" xmlns:p="http://schemas.openxmlformats.org/presentationml/2006/main">
+  <p:cSld>
+    <p:spTree>
+      <p:nvGrpSpPr>
+        <p:cNvPr id="1" name=""/>
+        <p:cNvGrpSpPr/>
+        <p:nvPr/>
+      </p:nvGrpSpPr>
+      <p:grpSpPr>
+        <a:xfrm>
+          <a:off x="0" y="0"/>
+          <a:ext cx="0" cy="0"/>
+          <a:chOff x="0" y="0"/>
+          <a:chExt cx="0" cy="0"/>
+        </a:xfrm>
+      </p:grpSpPr>
+      <p:sp>
+        <p:nvSpPr>
+          <p:cNvPr id="2" name="Title 1"/>
+          <p:cNvSpPr>
+            <a:spLocks noGrp="1"/>
+          </p:cNvSpPr>
+          <p:nvPr>
+            <p:ph type="title"/>
+          </p:nvPr>
+        </p:nvSpPr>
+        <p:spPr>
+          <a:xfrm>
+            <a:off x="722313" y="1850000"/>
+            <a:ext cx="7772400" cy="1300000"/>
+          </a:xfrm>
+        </p:spPr>
+        <p:txBody>
+          <a:bodyPr/>
+          <a:lstStyle/>
+          <a:p>
+            <a:pPr lvl="0" indent="0" marL="0">
+              <a:buNone/>
+            </a:pPr>
+            <a:r>
+              <a:rPr/>
+              <a:t>6 · Three ways to get it wrong</a:t>
+            </a:r>
+          </a:p>
+        </p:txBody>
+      </p:sp>
+    </p:spTree>
+  </p:cSld>
+</p:sld>
+</file>
+
+<file path=ppt/slides/slide32.xml><?xml version="1.0" encoding="utf-8"?>
+<p:sld xmlns:a="http://schemas.openxmlformats.org/drawingml/2006/main" xmlns:r="http://schemas.openxmlformats.org/officeDocument/2006/relationships" xmlns:p="http://schemas.openxmlformats.org/presentationml/2006/main">
+  <p:cSld>
+    <p:spTree>
+      <p:nvGrpSpPr>
+        <p:cNvPr id="1" name=""/>
+        <p:cNvGrpSpPr/>
+        <p:nvPr/>
+      </p:nvGrpSpPr>
+      <p:grpSpPr>
+        <a:xfrm>
+          <a:off x="0" y="0"/>
+          <a:ext cx="0" cy="0"/>
+          <a:chOff x="0" y="0"/>
+          <a:chExt cx="0" cy="0"/>
+        </a:xfrm>
+      </p:grpSpPr>
+      <p:sp>
+        <p:nvSpPr>
+          <p:cNvPr id="2" name="Title 1"/>
+          <p:cNvSpPr>
+            <a:spLocks noGrp="1"/>
+          </p:cNvSpPr>
+          <p:nvPr>
+            <p:ph type="title"/>
+          </p:nvPr>
+        </p:nvSpPr>
+        <p:spPr/>
+        <p:txBody>
+          <a:bodyPr/>
+          <a:lstStyle/>
+          <a:p>
+            <a:pPr lvl="0" indent="0" marL="0">
+              <a:buNone/>
+            </a:pPr>
+            <a:r>
+              <a:rPr/>
+              <a:t>1 · Leakage through preprocessing</a:t>
+            </a:r>
+          </a:p>
+        </p:txBody>
+      </p:sp>
+      <p:sp>
+        <p:nvSpPr>
+          <p:cNvPr id="3" name="Content Placeholder 2"/>
+          <p:cNvSpPr>
+            <a:spLocks noGrp="1"/>
+          </p:cNvSpPr>
+          <p:nvPr>
+            <p:ph idx="1"/>
+          </p:nvPr>
+        </p:nvSpPr>
+        <p:spPr/>
+        <p:txBody>
+          <a:bodyPr/>
+          <a:lstStyle/>
+          <a:p>
+            <a:pPr lvl="0" indent="0" marL="0">
+              <a:buNone/>
+            </a:pPr>
+            <a:r>
+              <a:rPr/>
+              <a:t>Any step that learns from the data — scaling, imputation, feature selection, target encoding — must be fitted </a:t>
+            </a:r>
+            <a:r>
+              <a:rPr b="1"/>
+              <a:t>inside</a:t>
+            </a:r>
+            <a:r>
+              <a:rPr/>
+              <a:t> each training fold.</a:t>
+            </a:r>
+          </a:p>
+          <a:p>
+            <a:pPr lvl="0" indent="0">
+              <a:buNone/>
+            </a:pPr>
+            <a:r>
+              <a:rPr i="1">
+                <a:solidFill>
+                  <a:srgbClr val="60A0B0"/>
+                </a:solidFill>
+                <a:latin typeface="Courier"/>
+              </a:rPr>
+              <a:t>#  WRONG — the scaler has already seen the test fold</a:t>
+            </a:r>
+            <a:br/>
+            <a:r>
+              <a:rPr>
+                <a:latin typeface="Courier"/>
+              </a:rPr>
+              <a:t>X_scaled </a:t>
+            </a:r>
+            <a:r>
+              <a:rPr>
+                <a:solidFill>
+                  <a:srgbClr val="666666"/>
+                </a:solidFill>
+                <a:latin typeface="Courier"/>
+              </a:rPr>
+              <a:t>=</a:t>
+            </a:r>
+            <a:r>
+              <a:rPr>
+                <a:latin typeface="Courier"/>
+              </a:rPr>
+              <a:t> StandardScaler().fit_transform(X)</a:t>
+            </a:r>
+            <a:br/>
+            <a:r>
+              <a:rPr>
+                <a:latin typeface="Courier"/>
+              </a:rPr>
+              <a:t>cross_val_score(model, X_scaled, y, cv</a:t>
+            </a:r>
+            <a:r>
+              <a:rPr>
+                <a:solidFill>
+                  <a:srgbClr val="666666"/>
+                </a:solidFill>
+                <a:latin typeface="Courier"/>
+              </a:rPr>
+              <a:t>=</a:t>
+            </a:r>
+            <a:r>
+              <a:rPr>
+                <a:latin typeface="Courier"/>
+              </a:rPr>
+              <a:t>cv)</a:t>
+            </a:r>
+            <a:br/>
+            <a:br/>
+            <a:r>
+              <a:rPr i="1">
+                <a:solidFill>
+                  <a:srgbClr val="60A0B0"/>
+                </a:solidFill>
+                <a:latin typeface="Courier"/>
+              </a:rPr>
+              <a:t>#  RIGHT — every step re-fits inside each fold</a:t>
+            </a:r>
+            <a:br/>
+            <a:r>
+              <a:rPr>
+                <a:latin typeface="Courier"/>
+              </a:rPr>
+              <a:t>pipe </a:t>
+            </a:r>
+            <a:r>
+              <a:rPr>
+                <a:solidFill>
+                  <a:srgbClr val="666666"/>
+                </a:solidFill>
+                <a:latin typeface="Courier"/>
+              </a:rPr>
+              <a:t>=</a:t>
+            </a:r>
+            <a:r>
+              <a:rPr>
+                <a:latin typeface="Courier"/>
+              </a:rPr>
+              <a:t> make_pipeline(StandardScaler(), model)</a:t>
+            </a:r>
+            <a:br/>
+            <a:r>
+              <a:rPr>
+                <a:latin typeface="Courier"/>
+              </a:rPr>
+              <a:t>cross_val_score(pipe, X, y, cv</a:t>
+            </a:r>
+            <a:r>
+              <a:rPr>
+                <a:solidFill>
+                  <a:srgbClr val="666666"/>
+                </a:solidFill>
+                <a:latin typeface="Courier"/>
+              </a:rPr>
+              <a:t>=</a:t>
+            </a:r>
+            <a:r>
+              <a:rPr>
+                <a:latin typeface="Courier"/>
+              </a:rPr>
+              <a:t>cv)</a:t>
+            </a:r>
+          </a:p>
+          <a:p>
+            <a:pPr lvl="0" indent="0" marL="0">
+              <a:buNone/>
+            </a:pPr>
+            <a:r>
+              <a:rPr/>
+              <a:t>The single most common serious error in applied machine learning papers. It </a:t>
+            </a:r>
+            <a:r>
+              <a:rPr b="1"/>
+              <a:t>always</a:t>
+            </a:r>
+            <a:r>
+              <a:rPr/>
+              <a:t> flatters you.</a:t>
+            </a:r>
+          </a:p>
+        </p:txBody>
+      </p:sp>
+    </p:spTree>
+  </p:cSld>
+</p:sld>
+</file>
+
+<file path=ppt/slides/slide33.xml><?xml version="1.0" encoding="utf-8"?>
+<p:sld xmlns:a="http://schemas.openxmlformats.org/drawingml/2006/main" xmlns:r="http://schemas.openxmlformats.org/officeDocument/2006/relationships" xmlns:p="http://schemas.openxmlformats.org/presentationml/2006/main">
+  <p:cSld>
+    <p:spTree>
+      <p:nvGrpSpPr>
+        <p:cNvPr id="1" name=""/>
+        <p:cNvGrpSpPr/>
+        <p:nvPr/>
+      </p:nvGrpSpPr>
+      <p:grpSpPr>
+        <a:xfrm>
+          <a:off x="0" y="0"/>
+          <a:ext cx="0" cy="0"/>
+          <a:chOff x="0" y="0"/>
+          <a:chExt cx="0" cy="0"/>
+        </a:xfrm>
+      </p:grpSpPr>
+      <p:sp>
+        <p:nvSpPr>
+          <p:cNvPr id="2" name="Title 1"/>
+          <p:cNvSpPr>
+            <a:spLocks noGrp="1"/>
+          </p:cNvSpPr>
+          <p:nvPr>
+            <p:ph type="title"/>
+          </p:nvPr>
+        </p:nvSpPr>
+        <p:spPr/>
+        <p:txBody>
+          <a:bodyPr/>
+          <a:lstStyle/>
+          <a:p>
+            <a:pPr lvl="0" indent="0" marL="0">
+              <a:buNone/>
+            </a:pPr>
+            <a:r>
+              <a:rPr/>
+              <a:t>2 · Leakage through selection</a:t>
+            </a:r>
+          </a:p>
+        </p:txBody>
+      </p:sp>
+      <p:sp>
+        <p:nvSpPr>
+          <p:cNvPr id="3" name="Content Placeholder 2"/>
+          <p:cNvSpPr>
+            <a:spLocks noGrp="1"/>
+          </p:cNvSpPr>
+          <p:nvPr>
+            <p:ph idx="1"/>
+          </p:nvPr>
+        </p:nvSpPr>
+        <p:spPr/>
+        <p:txBody>
+          <a:bodyPr/>
+          <a:lstStyle/>
+          <a:p>
+            <a:pPr lvl="0" indent="0" marL="0">
+              <a:buNone/>
+            </a:pPr>
+            <a:r>
+              <a:rPr/>
+              <a:t>Choosing a model by CV and then reporting </a:t>
+            </a:r>
+            <a:r>
+              <a:rPr b="1"/>
+              <a:t>that same CV error</a:t>
+            </a:r>
+            <a:r>
+              <a:rPr/>
+              <a:t> as its performance is optimistic.</a:t>
+            </a:r>
+          </a:p>
+          <a:p>
+            <a:pPr lvl="0"/>
+            <a:r>
+              <a:rPr b="1"/>
+              <a:t>outer</a:t>
+            </a:r>
+            <a:r>
+              <a:rPr/>
+              <a:t> loop → evaluation</a:t>
+            </a:r>
+          </a:p>
+          <a:p>
+            <a:pPr lvl="0"/>
+            <a:r>
+              <a:rPr b="1"/>
+              <a:t>inner</a:t>
+            </a:r>
+            <a:r>
+              <a:rPr/>
+              <a:t> loop → tuning</a:t>
+            </a:r>
+          </a:p>
+          <a:p>
+            <a:pPr lvl="0" indent="0" marL="0">
+              <a:buNone/>
+            </a:pPr>
+            <a:r>
+              <a:rPr/>
+              <a:t>Reporting the best inner-loop score is the same error as reporting training error, one level up.</a:t>
+            </a:r>
+          </a:p>
+        </p:txBody>
+      </p:sp>
+    </p:spTree>
+  </p:cSld>
+</p:sld>
+</file>
+
+<file path=ppt/slides/slide34.xml><?xml version="1.0" encoding="utf-8"?>
+<p:sld xmlns:a="http://schemas.openxmlformats.org/drawingml/2006/main" xmlns:r="http://schemas.openxmlformats.org/officeDocument/2006/relationships" xmlns:p="http://schemas.openxmlformats.org/presentationml/2006/main">
+  <p:cSld>
+    <p:spTree>
+      <p:nvGrpSpPr>
+        <p:cNvPr id="1" name=""/>
+        <p:cNvGrpSpPr/>
+        <p:nvPr/>
+      </p:nvGrpSpPr>
+      <p:grpSpPr>
+        <a:xfrm>
+          <a:off x="0" y="0"/>
+          <a:ext cx="0" cy="0"/>
+          <a:chOff x="0" y="0"/>
+          <a:chExt cx="0" cy="0"/>
+        </a:xfrm>
+      </p:grpSpPr>
+      <p:sp>
+        <p:nvSpPr>
+          <p:cNvPr id="2" name="Title 1"/>
+          <p:cNvSpPr>
+            <a:spLocks noGrp="1"/>
+          </p:cNvSpPr>
+          <p:nvPr>
+            <p:ph type="title"/>
+          </p:nvPr>
+        </p:nvSpPr>
+        <p:spPr/>
+        <p:txBody>
+          <a:bodyPr/>
+          <a:lstStyle/>
+          <a:p>
+            <a:pPr lvl="0" indent="0" marL="0">
+              <a:buNone/>
+            </a:pPr>
+            <a:r>
+              <a:rPr/>
+              <a:t>How bad is it? Try it on pure noise</a:t>
+            </a:r>
+          </a:p>
+        </p:txBody>
+      </p:sp>
+      <p:pic>
+        <p:nvPicPr>
+          <p:cNvPr descr="slides_files/figure-pptx/cell-8-output-1.png" id="0" name="Picture 1"/>
+          <p:cNvPicPr>
+            <a:picLocks noGrp="1" noChangeAspect="1"/>
+          </p:cNvPicPr>
+          <p:nvPr/>
+        </p:nvPicPr>
+        <p:blipFill>
+          <a:blip r:embed="rId2"/>
+          <a:stretch>
+            <a:fillRect/>
+          </a:stretch>
+        </p:blipFill>
+        <p:spPr bwMode="auto">
+          <a:xfrm>
+            <a:off x="609600" y="1193800"/>
+            <a:ext cx="7912100" cy="3390900"/>
+          </a:xfrm>
+          <a:prstGeom prst="rect">
+            <a:avLst/>
+          </a:prstGeom>
+          <a:noFill/>
+          <a:ln w="9525">
+            <a:noFill/>
+            <a:headEnd/>
+            <a:tailEnd/>
+          </a:ln>
+        </p:spPr>
+      </p:pic>
+    </p:spTree>
+  </p:cSld>
+</p:sld>
+</file>
+
+<file path=ppt/slides/slide35.xml><?xml version="1.0" encoding="utf-8"?>
+<p:sld xmlns:a="http://schemas.openxmlformats.org/drawingml/2006/main" xmlns:r="http://schemas.openxmlformats.org/officeDocument/2006/relationships" xmlns:p="http://schemas.openxmlformats.org/presentationml/2006/main">
+  <p:cSld>
+    <p:spTree>
+      <p:nvGrpSpPr>
+        <p:cNvPr id="1" name=""/>
+        <p:cNvGrpSpPr/>
+        <p:nvPr/>
+      </p:nvGrpSpPr>
+      <p:grpSpPr>
+        <a:xfrm>
+          <a:off x="0" y="0"/>
+          <a:ext cx="0" cy="0"/>
+          <a:chOff x="0" y="0"/>
+          <a:chExt cx="0" cy="0"/>
+        </a:xfrm>
+      </p:grpSpPr>
+      <p:sp>
+        <p:nvSpPr>
+          <p:cNvPr id="3" name="Content Placeholder 2"/>
+          <p:cNvSpPr>
+            <a:spLocks noGrp="1"/>
+          </p:cNvSpPr>
+          <p:nvPr>
+            <p:ph idx="1"/>
+          </p:nvPr>
+        </p:nvSpPr>
+        <p:spPr/>
+        <p:txBody>
+          <a:bodyPr/>
+          <a:lstStyle/>
+          <a:p>
+            <a:pPr lvl="0" indent="0" marL="0">
+              <a:buNone/>
+            </a:pPr>
+            <a:r>
+              <a:rPr/>
+              <a:t>There is </a:t>
+            </a:r>
+            <a:r>
+              <a:rPr b="1"/>
+              <a:t>no signal in that data</a:t>
+            </a:r>
+            <a:r>
+              <a:rPr/>
+              <a:t>. Selecting the 20 best of 4,000 predictors before the split manufactures an 83% classifier out of a coin flip. This is the single most common serious error in applied machine learning papers.</a:t>
+            </a:r>
+          </a:p>
+        </p:txBody>
+      </p:sp>
+    </p:spTree>
+  </p:cSld>
+</p:sld>
+</file>
+
+<file path=ppt/slides/slide36.xml><?xml version="1.0" encoding="utf-8"?>
+<p:sld xmlns:a="http://schemas.openxmlformats.org/drawingml/2006/main" xmlns:r="http://schemas.openxmlformats.org/officeDocument/2006/relationships" xmlns:p="http://schemas.openxmlformats.org/presentationml/2006/main">
+  <p:cSld>
+    <p:spTree>
+      <p:nvGrpSpPr>
+        <p:cNvPr id="1" name=""/>
+        <p:cNvGrpSpPr/>
+        <p:nvPr/>
+      </p:nvGrpSpPr>
+      <p:grpSpPr>
+        <a:xfrm>
+          <a:off x="0" y="0"/>
+          <a:ext cx="0" cy="0"/>
+          <a:chOff x="0" y="0"/>
+          <a:chExt cx="0" cy="0"/>
+        </a:xfrm>
+      </p:grpSpPr>
       <p:sp>
         <p:nvSpPr>
           <p:cNvPr id="2" name="Title 1"/>
@@ -7224,7 +7690,7 @@
 </p:sld>
 </file>
 
-<file path=ppt/slides/slide31.xml><?xml version="1.0" encoding="utf-8"?>
+<file path=ppt/slides/slide37.xml><?xml version="1.0" encoding="utf-8"?>
 <p:sld xmlns:a="http://schemas.openxmlformats.org/drawingml/2006/main" xmlns:r="http://schemas.openxmlformats.org/officeDocument/2006/relationships" xmlns:p="http://schemas.openxmlformats.org/presentationml/2006/main">
   <p:cSld>
     <p:spTree>
@@ -7276,7 +7742,7 @@
 </p:sld>
 </file>
 
-<file path=ppt/slides/slide32.xml><?xml version="1.0" encoding="utf-8"?>
+<file path=ppt/slides/slide38.xml><?xml version="1.0" encoding="utf-8"?>
 <p:sld xmlns:a="http://schemas.openxmlformats.org/drawingml/2006/main" xmlns:r="http://schemas.openxmlformats.org/officeDocument/2006/relationships" xmlns:p="http://schemas.openxmlformats.org/presentationml/2006/main">
   <p:cSld>
     <p:spTree>
@@ -7320,7 +7786,7 @@
       </p:sp>
       <p:pic>
         <p:nvPicPr>
-          <p:cNvPr descr="slides_files/figure-pptx/cell-6-output-1.png" id="0" name="Picture 1"/>
+          <p:cNvPr descr="slides_files/figure-pptx/cell-9-output-1.png" id="0" name="Picture 1"/>
           <p:cNvPicPr>
             <a:picLocks noGrp="1" noChangeAspect="1"/>
           </p:cNvPicPr>
@@ -7353,7 +7819,7 @@
 </p:sld>
 </file>
 
-<file path=ppt/slides/slide33.xml><?xml version="1.0" encoding="utf-8"?>
+<file path=ppt/slides/slide39.xml><?xml version="1.0" encoding="utf-8"?>
 <p:sld xmlns:a="http://schemas.openxmlformats.org/drawingml/2006/main" xmlns:r="http://schemas.openxmlformats.org/officeDocument/2006/relationships" xmlns:p="http://schemas.openxmlformats.org/presentationml/2006/main">
   <p:cSld>
     <p:spTree>
@@ -7440,7 +7906,7 @@
 </p:sld>
 </file>
 
-<file path=ppt/slides/slide34.xml><?xml version="1.0" encoding="utf-8"?>
+<file path=ppt/slides/slide4.xml><?xml version="1.0" encoding="utf-8"?>
 <p:sld xmlns:a="http://schemas.openxmlformats.org/drawingml/2006/main" xmlns:r="http://schemas.openxmlformats.org/officeDocument/2006/relationships" xmlns:p="http://schemas.openxmlformats.org/presentationml/2006/main">
   <p:cSld>
     <p:spTree>
@@ -7477,7 +7943,7 @@
             </a:pPr>
             <a:r>
               <a:rPr/>
-              <a:t>Read the gap as a diagnostic</a:t>
+              <a:t>Learning objectives</a:t>
             </a:r>
           </a:p>
         </p:txBody>
@@ -7497,68 +7963,62 @@
           <a:bodyPr/>
           <a:lstStyle/>
           <a:p>
-            <a:pPr lvl="0" indent="0" marL="0">
-              <a:buNone/>
-            </a:pPr>
+            <a:pPr lvl="0"/>
             <a:r>
               <a:rPr/>
-              <a:t>The ratio measures </a:t>
+              <a:t>Derive the </a:t>
             </a:r>
             <a:r>
               <a:rPr b="1"/>
-              <a:t>how much the model leans on country identity</a:t>
+              <a:t>bias–variance–noise</a:t>
             </a:r>
             <a:r>
               <a:rPr/>
-              <a:t> rather than on the economics.</a:t>
+              <a:t> decomposition and name what each term is</a:t>
             </a:r>
           </a:p>
           <a:p>
             <a:pPr lvl="0"/>
             <a:r>
               <a:rPr/>
-              <a:t>Random K-fold let it see Germany 2019 while predicting Germany 2020</a:t>
+              <a:t>Explain why training error is </a:t>
+            </a:r>
+            <a:r>
+              <a:rPr b="1"/>
+              <a:t>optimistic</a:t>
+            </a:r>
+            <a:r>
+              <a:rPr/>
+              <a:t>, and by exactly how much</a:t>
             </a:r>
           </a:p>
           <a:p>
             <a:pPr lvl="0"/>
             <a:r>
               <a:rPr/>
-              <a:t>It learned “this is Germany”, which is worthless for a country it has never seen</a:t>
+              <a:t>Choose a </a:t>
+            </a:r>
+            <a:r>
+              <a:rPr b="1"/>
+              <a:t>CV scheme that matches the claim</a:t>
+            </a:r>
+            <a:r>
+              <a:rPr/>
+              <a:t> you intend to make</a:t>
             </a:r>
           </a:p>
           <a:p>
             <a:pPr lvl="0"/>
             <a:r>
-              <a:rPr>
-                <a:latin typeface="Courier"/>
-              </a:rPr>
-              <a:t>TimeSeriesSplit</a:t>
-            </a:r>
-            <a:r>
               <a:rPr/>
-              <a:t> looks </a:t>
-            </a:r>
-            <a:r>
-              <a:rPr i="1"/>
-              <a:t>best</a:t>
-            </a:r>
+              <a:t>Recognise the three leakages: preprocessing, selection, dependence</a:t>
+            </a:r>
+          </a:p>
+          <a:p>
+            <a:pPr lvl="0"/>
             <a:r>
               <a:rPr/>
-              <a:t> of the three — and answers a third question again</a:t>
-            </a:r>
-          </a:p>
-          <a:p>
-            <a:pPr lvl="0" indent="0" marL="0">
-              <a:buNone/>
-            </a:pPr>
-            <a:r>
-              <a:rPr b="1"/>
-              <a:t>Low is not the same as right.</a:t>
-            </a:r>
-            <a:r>
-              <a:rPr/>
-              <a:t> Report the split, not just the number.</a:t>
+              <a:t>Quantify, on real data, what the wrong split costs you</a:t>
             </a:r>
           </a:p>
         </p:txBody>
@@ -7568,7 +8028,7 @@
 </p:sld>
 </file>
 
-<file path=ppt/slides/slide35.xml><?xml version="1.0" encoding="utf-8"?>
+<file path=ppt/slides/slide40.xml><?xml version="1.0" encoding="utf-8"?>
 <p:sld xmlns:a="http://schemas.openxmlformats.org/drawingml/2006/main" xmlns:r="http://schemas.openxmlformats.org/officeDocument/2006/relationships" xmlns:p="http://schemas.openxmlformats.org/presentationml/2006/main">
   <p:cSld>
     <p:spTree>
@@ -7595,6 +8055,134 @@
             <p:ph type="title"/>
           </p:nvPr>
         </p:nvSpPr>
+        <p:spPr/>
+        <p:txBody>
+          <a:bodyPr/>
+          <a:lstStyle/>
+          <a:p>
+            <a:pPr lvl="0" indent="0" marL="0">
+              <a:buNone/>
+            </a:pPr>
+            <a:r>
+              <a:rPr/>
+              <a:t>Read the gap as a diagnostic</a:t>
+            </a:r>
+          </a:p>
+        </p:txBody>
+      </p:sp>
+      <p:sp>
+        <p:nvSpPr>
+          <p:cNvPr id="3" name="Content Placeholder 2"/>
+          <p:cNvSpPr>
+            <a:spLocks noGrp="1"/>
+          </p:cNvSpPr>
+          <p:nvPr>
+            <p:ph idx="1"/>
+          </p:nvPr>
+        </p:nvSpPr>
+        <p:spPr/>
+        <p:txBody>
+          <a:bodyPr/>
+          <a:lstStyle/>
+          <a:p>
+            <a:pPr lvl="0" indent="0" marL="0">
+              <a:buNone/>
+            </a:pPr>
+            <a:r>
+              <a:rPr/>
+              <a:t>The ratio measures </a:t>
+            </a:r>
+            <a:r>
+              <a:rPr b="1"/>
+              <a:t>how much the model leans on country identity</a:t>
+            </a:r>
+            <a:r>
+              <a:rPr/>
+              <a:t> rather than on the economics.</a:t>
+            </a:r>
+          </a:p>
+          <a:p>
+            <a:pPr lvl="0"/>
+            <a:r>
+              <a:rPr/>
+              <a:t>Random K-fold let it see Germany 2019 while predicting Germany 2020</a:t>
+            </a:r>
+          </a:p>
+          <a:p>
+            <a:pPr lvl="0"/>
+            <a:r>
+              <a:rPr/>
+              <a:t>It learned “this is Germany”, which is worthless for a country it has never seen</a:t>
+            </a:r>
+          </a:p>
+          <a:p>
+            <a:pPr lvl="0"/>
+            <a:r>
+              <a:rPr>
+                <a:latin typeface="Courier"/>
+              </a:rPr>
+              <a:t>TimeSeriesSplit</a:t>
+            </a:r>
+            <a:r>
+              <a:rPr/>
+              <a:t> looks </a:t>
+            </a:r>
+            <a:r>
+              <a:rPr i="1"/>
+              <a:t>best</a:t>
+            </a:r>
+            <a:r>
+              <a:rPr/>
+              <a:t> of the three — and answers a third question again</a:t>
+            </a:r>
+          </a:p>
+          <a:p>
+            <a:pPr lvl="0" indent="0" marL="0">
+              <a:buNone/>
+            </a:pPr>
+            <a:r>
+              <a:rPr b="1"/>
+              <a:t>Low is not the same as right.</a:t>
+            </a:r>
+            <a:r>
+              <a:rPr/>
+              <a:t> Report the split, not just the number.</a:t>
+            </a:r>
+          </a:p>
+        </p:txBody>
+      </p:sp>
+    </p:spTree>
+  </p:cSld>
+</p:sld>
+</file>
+
+<file path=ppt/slides/slide41.xml><?xml version="1.0" encoding="utf-8"?>
+<p:sld xmlns:a="http://schemas.openxmlformats.org/drawingml/2006/main" xmlns:r="http://schemas.openxmlformats.org/officeDocument/2006/relationships" xmlns:p="http://schemas.openxmlformats.org/presentationml/2006/main">
+  <p:cSld>
+    <p:spTree>
+      <p:nvGrpSpPr>
+        <p:cNvPr id="1" name=""/>
+        <p:cNvGrpSpPr/>
+        <p:nvPr/>
+      </p:nvGrpSpPr>
+      <p:grpSpPr>
+        <a:xfrm>
+          <a:off x="0" y="0"/>
+          <a:ext cx="0" cy="0"/>
+          <a:chOff x="0" y="0"/>
+          <a:chExt cx="0" cy="0"/>
+        </a:xfrm>
+      </p:grpSpPr>
+      <p:sp>
+        <p:nvSpPr>
+          <p:cNvPr id="2" name="Title 1"/>
+          <p:cNvSpPr>
+            <a:spLocks noGrp="1"/>
+          </p:cNvSpPr>
+          <p:nvPr>
+            <p:ph type="title"/>
+          </p:nvPr>
+        </p:nvSpPr>
         <p:spPr>
           <a:xfrm>
             <a:off x="722313" y="1850000"/>
@@ -7620,7 +8208,7 @@
 </p:sld>
 </file>
 
-<file path=ppt/slides/slide36.xml><?xml version="1.0" encoding="utf-8"?>
+<file path=ppt/slides/slide42.xml><?xml version="1.0" encoding="utf-8"?>
 <p:sld xmlns:a="http://schemas.openxmlformats.org/drawingml/2006/main" xmlns:r="http://schemas.openxmlformats.org/officeDocument/2006/relationships" xmlns:p="http://schemas.openxmlformats.org/presentationml/2006/main">
   <p:cSld>
     <p:spTree>
@@ -7846,10 +8434,10 @@
 </p:sld>
 </file>
 
-<file path=ppt/slides/slide37.xml><?xml version="1.0" encoding="UTF-8"?><p:sld xmlns:a="http://schemas.openxmlformats.org/drawingml/2006/main" xmlns:r="http://schemas.openxmlformats.org/officeDocument/2006/relationships" xmlns:p="http://schemas.openxmlformats.org/presentationml/2006/main"><p:cSld><p:spTree><p:nvGrpSpPr><p:cNvPr id="1" name="" /><p:cNvGrpSpPr /><p:nvPr /></p:nvGrpSpPr><p:grpSpPr><a:xfrm><a:off x="0" y="0" /><a:ext cx="0" cy="0" /><a:chOff x="0" y="0" /><a:chExt cx="0" cy="0" /></a:xfrm></p:grpSpPr><p:sp><p:nvSpPr><p:cNvPr id="2" name="Title 1" /><p:cNvSpPr><a:spLocks noGrp="1" /></p:cNvSpPr><p:nvPr><p:ph type="title" /></p:nvPr></p:nvSpPr><p:spPr /><p:txBody><a:bodyPr /><a:lstStyle /><a:p><a:pPr lvl="0" indent="0" marL="0"><a:buNone /></a:pPr><a:r><a:rPr /><a:t>What loses marks reliably</a:t></a:r></a:p></p:txBody></p:sp><p:graphicFrame><p:nvGraphicFramePr><p:cNvPr id="6" name="Content Placeholder 5" /><p:cNvGraphicFramePr><a:graphicFrameLocks noGrp="1" /></p:cNvGraphicFramePr><p:nvPr><p:ph idx="1" /></p:nvPr></p:nvGraphicFramePr><p:xfrm><a:off x="457200" y="1193800" /><a:ext cx="8229600" cy="3390900" /></p:xfrm><a:graphic><a:graphicData uri="http://schemas.openxmlformats.org/drawingml/2006/table"><a:tbl><a:tblPr firstRow="0" bandRow="1"><a:tableStyleId>{5C22544A-7EE6-4342-B048-85BDC9FD1C3A}</a:tableStyleId></a:tblPr><a:tblGrid><a:gridCol w="4114800" /><a:gridCol w="4114800" /></a:tblGrid><a:tr h="0"><a:tc><a:txBody><a:bodyPr /><a:lstStyle /><a:p><a:pPr lvl="0" indent="0" marL="0"><a:buNone /></a:pPr><a:r><a:rPr /><a:t>Random K-fold on a panel</a:t></a:r></a:p></a:txBody></a:tc><a:tc><a:txBody><a:bodyPr /><a:lstStyle /><a:p><a:pPr lvl="0" indent="0" marL="0"><a:buNone /></a:pPr><a:r><a:rPr /><a:t>optimistic by a wide margin</a:t></a:r></a:p></a:txBody></a:tc></a:tr><a:tr h="0"><a:tc><a:txBody><a:bodyPr /><a:lstStyle /><a:p><a:pPr lvl="0" indent="0" marL="0"><a:buNone /></a:pPr><a:r><a:rPr /><a:t>Scaling before splitting</a:t></a:r></a:p></a:txBody></a:tc><a:tc><a:txBody><a:bodyPr /><a:lstStyle /><a:p><a:pPr lvl="0" indent="0" marL="0"><a:buNone /></a:pPr><a:r><a:rPr /><a:t>leakage; error understated</a:t></a:r></a:p></a:txBody></a:tc></a:tr><a:tr h="0"><a:tc><a:txBody><a:bodyPr /><a:lstStyle /><a:p><a:pPr lvl="0" indent="0" marL="0"><a:buNone /></a:pPr><a:r><a:rPr /><a:t>Tuning on the test set</a:t></a:r></a:p></a:txBody></a:tc><a:tc><a:txBody><a:bodyPr /><a:lstStyle /><a:p><a:pPr lvl="0" indent="0" marL="0"><a:buNone /></a:pPr><a:r><a:rPr /><a:t>the test set is now training data</a:t></a:r></a:p></a:txBody></a:tc></a:tr><a:tr h="0"><a:tc><a:txBody><a:bodyPr /><a:lstStyle /><a:p><a:pPr lvl="0" indent="0" marL="0"><a:buNone /></a:pPr><a14:m><m:oMath xmlns:m="http://schemas.openxmlformats.org/officeDocument/2006/math"><m:sSup><m:e><m:r><m:t>R</m:t></m:r></m:e><m:sup><m:r><m:t>2</m:t></m:r></m:sup></m:sSup></m:oMath></a14:m><a:r><a:rPr /><a:t> alone</a:t></a:r></a:p></a:txBody></a:tc><a:tc><a:txBody><a:bodyPr /><a:lstStyle /><a:p><a:pPr lvl="0" indent="0" marL="0"><a:buNone /></a:pPr><a:r><a:rPr /><a:t>give the error in the outcome’s units</a:t></a:r></a:p></a:txBody></a:tc></a:tr><a:tr h="0"><a:tc><a:txBody><a:bodyPr /><a:lstStyle /><a:p><a:pPr lvl="0" indent="0" marL="0"><a:buNone /></a:pPr><a:r><a:rPr /><a:t>One split, one number</a:t></a:r></a:p></a:txBody></a:tc><a:tc><a:txBody><a:bodyPr /><a:lstStyle /><a:p><a:pPr lvl="0" indent="0" marL="0"><a:buNone /></a:pPr><a:r><a:rPr /><a:t>no sense of variability</a:t></a:r></a:p></a:txBody></a:tc></a:tr></a:tbl></a:graphicData></a:graphic></p:graphicFrame></p:spTree></p:cSld></p:sld>
+<file path=ppt/slides/slide43.xml><?xml version="1.0" encoding="UTF-8"?><p:sld xmlns:a="http://schemas.openxmlformats.org/drawingml/2006/main" xmlns:r="http://schemas.openxmlformats.org/officeDocument/2006/relationships" xmlns:p="http://schemas.openxmlformats.org/presentationml/2006/main"><p:cSld><p:spTree><p:nvGrpSpPr><p:cNvPr id="1" name="" /><p:cNvGrpSpPr /><p:nvPr /></p:nvGrpSpPr><p:grpSpPr><a:xfrm><a:off x="0" y="0" /><a:ext cx="0" cy="0" /><a:chOff x="0" y="0" /><a:chExt cx="0" cy="0" /></a:xfrm></p:grpSpPr><p:sp><p:nvSpPr><p:cNvPr id="2" name="Title 1" /><p:cNvSpPr><a:spLocks noGrp="1" /></p:cNvSpPr><p:nvPr><p:ph type="title" /></p:nvPr></p:nvSpPr><p:spPr /><p:txBody><a:bodyPr /><a:lstStyle /><a:p><a:pPr lvl="0" indent="0" marL="0"><a:buNone /></a:pPr><a:r><a:rPr /><a:t>What loses marks reliably</a:t></a:r></a:p></p:txBody></p:sp><p:graphicFrame><p:nvGraphicFramePr><p:cNvPr id="6" name="Content Placeholder 5" /><p:cNvGraphicFramePr><a:graphicFrameLocks noGrp="1" /></p:cNvGraphicFramePr><p:nvPr><p:ph idx="1" /></p:nvPr></p:nvGraphicFramePr><p:xfrm><a:off x="457200" y="1193800" /><a:ext cx="8229600" cy="3390900" /></p:xfrm><a:graphic><a:graphicData uri="http://schemas.openxmlformats.org/drawingml/2006/table"><a:tbl><a:tblPr firstRow="0" bandRow="1"><a:tableStyleId>{5C22544A-7EE6-4342-B048-85BDC9FD1C3A}</a:tableStyleId></a:tblPr><a:tblGrid><a:gridCol w="4114800" /><a:gridCol w="4114800" /></a:tblGrid><a:tr h="0"><a:tc><a:txBody><a:bodyPr /><a:lstStyle /><a:p><a:pPr lvl="0" indent="0" marL="0"><a:buNone /></a:pPr><a:r><a:rPr /><a:t>Random K-fold on a panel</a:t></a:r></a:p></a:txBody></a:tc><a:tc><a:txBody><a:bodyPr /><a:lstStyle /><a:p><a:pPr lvl="0" indent="0" marL="0"><a:buNone /></a:pPr><a:r><a:rPr /><a:t>optimistic by a wide margin</a:t></a:r></a:p></a:txBody></a:tc></a:tr><a:tr h="0"><a:tc><a:txBody><a:bodyPr /><a:lstStyle /><a:p><a:pPr lvl="0" indent="0" marL="0"><a:buNone /></a:pPr><a:r><a:rPr /><a:t>Scaling before splitting</a:t></a:r></a:p></a:txBody></a:tc><a:tc><a:txBody><a:bodyPr /><a:lstStyle /><a:p><a:pPr lvl="0" indent="0" marL="0"><a:buNone /></a:pPr><a:r><a:rPr /><a:t>leakage; error understated</a:t></a:r></a:p></a:txBody></a:tc></a:tr><a:tr h="0"><a:tc><a:txBody><a:bodyPr /><a:lstStyle /><a:p><a:pPr lvl="0" indent="0" marL="0"><a:buNone /></a:pPr><a:r><a:rPr /><a:t>Tuning on the test set</a:t></a:r></a:p></a:txBody></a:tc><a:tc><a:txBody><a:bodyPr /><a:lstStyle /><a:p><a:pPr lvl="0" indent="0" marL="0"><a:buNone /></a:pPr><a:r><a:rPr /><a:t>the test set is now training data</a:t></a:r></a:p></a:txBody></a:tc></a:tr><a:tr h="0"><a:tc><a:txBody><a:bodyPr /><a:lstStyle /><a:p><a:pPr lvl="0" indent="0" marL="0"><a:buNone /></a:pPr><a14:m><m:oMath xmlns:m="http://schemas.openxmlformats.org/officeDocument/2006/math"><m:sSup><m:e><m:r><m:t>R</m:t></m:r></m:e><m:sup><m:r><m:t>2</m:t></m:r></m:sup></m:sSup></m:oMath></a14:m><a:r><a:rPr /><a:t> alone</a:t></a:r></a:p></a:txBody></a:tc><a:tc><a:txBody><a:bodyPr /><a:lstStyle /><a:p><a:pPr lvl="0" indent="0" marL="0"><a:buNone /></a:pPr><a:r><a:rPr /><a:t>give the error in the outcome’s units</a:t></a:r></a:p></a:txBody></a:tc></a:tr><a:tr h="0"><a:tc><a:txBody><a:bodyPr /><a:lstStyle /><a:p><a:pPr lvl="0" indent="0" marL="0"><a:buNone /></a:pPr><a:r><a:rPr /><a:t>One split, one number</a:t></a:r></a:p></a:txBody></a:tc><a:tc><a:txBody><a:bodyPr /><a:lstStyle /><a:p><a:pPr lvl="0" indent="0" marL="0"><a:buNone /></a:pPr><a:r><a:rPr /><a:t>no sense of variability</a:t></a:r></a:p></a:txBody></a:tc></a:tr></a:tbl></a:graphicData></a:graphic></p:graphicFrame></p:spTree></p:cSld></p:sld>
 </file>
 
-<file path=ppt/slides/slide38.xml><?xml version="1.0" encoding="utf-8"?>
+<file path=ppt/slides/slide44.xml><?xml version="1.0" encoding="utf-8"?>
 <p:sld xmlns:a="http://schemas.openxmlformats.org/drawingml/2006/main" xmlns:r="http://schemas.openxmlformats.org/officeDocument/2006/relationships" xmlns:p="http://schemas.openxmlformats.org/presentationml/2006/main">
   <p:cSld>
     <p:spTree>
@@ -7974,128 +8562,6 @@
             <a:r>
               <a:rPr/>
               <a:t> §4.1–4.4</a:t>
-            </a:r>
-          </a:p>
-        </p:txBody>
-      </p:sp>
-    </p:spTree>
-  </p:cSld>
-</p:sld>
-</file>
-
-<file path=ppt/slides/slide4.xml><?xml version="1.0" encoding="utf-8"?>
-<p:sld xmlns:a="http://schemas.openxmlformats.org/drawingml/2006/main" xmlns:r="http://schemas.openxmlformats.org/officeDocument/2006/relationships" xmlns:p="http://schemas.openxmlformats.org/presentationml/2006/main">
-  <p:cSld>
-    <p:spTree>
-      <p:nvGrpSpPr>
-        <p:cNvPr id="1" name=""/>
-        <p:cNvGrpSpPr/>
-        <p:nvPr/>
-      </p:nvGrpSpPr>
-      <p:grpSpPr>
-        <a:xfrm>
-          <a:off x="0" y="0"/>
-          <a:ext cx="0" cy="0"/>
-          <a:chOff x="0" y="0"/>
-          <a:chExt cx="0" cy="0"/>
-        </a:xfrm>
-      </p:grpSpPr>
-      <p:sp>
-        <p:nvSpPr>
-          <p:cNvPr id="2" name="Title 1"/>
-          <p:cNvSpPr>
-            <a:spLocks noGrp="1"/>
-          </p:cNvSpPr>
-          <p:nvPr>
-            <p:ph type="title"/>
-          </p:nvPr>
-        </p:nvSpPr>
-        <p:spPr/>
-        <p:txBody>
-          <a:bodyPr/>
-          <a:lstStyle/>
-          <a:p>
-            <a:pPr lvl="0" indent="0" marL="0">
-              <a:buNone/>
-            </a:pPr>
-            <a:r>
-              <a:rPr/>
-              <a:t>Learning objectives</a:t>
-            </a:r>
-          </a:p>
-        </p:txBody>
-      </p:sp>
-      <p:sp>
-        <p:nvSpPr>
-          <p:cNvPr id="3" name="Content Placeholder 2"/>
-          <p:cNvSpPr>
-            <a:spLocks noGrp="1"/>
-          </p:cNvSpPr>
-          <p:nvPr>
-            <p:ph idx="1"/>
-          </p:nvPr>
-        </p:nvSpPr>
-        <p:spPr/>
-        <p:txBody>
-          <a:bodyPr/>
-          <a:lstStyle/>
-          <a:p>
-            <a:pPr lvl="0"/>
-            <a:r>
-              <a:rPr/>
-              <a:t>Derive the </a:t>
-            </a:r>
-            <a:r>
-              <a:rPr b="1"/>
-              <a:t>bias–variance–noise</a:t>
-            </a:r>
-            <a:r>
-              <a:rPr/>
-              <a:t> decomposition and name what each term is</a:t>
-            </a:r>
-          </a:p>
-          <a:p>
-            <a:pPr lvl="0"/>
-            <a:r>
-              <a:rPr/>
-              <a:t>Explain why training error is </a:t>
-            </a:r>
-            <a:r>
-              <a:rPr b="1"/>
-              <a:t>optimistic</a:t>
-            </a:r>
-            <a:r>
-              <a:rPr/>
-              <a:t>, and by exactly how much</a:t>
-            </a:r>
-          </a:p>
-          <a:p>
-            <a:pPr lvl="0"/>
-            <a:r>
-              <a:rPr/>
-              <a:t>Choose a </a:t>
-            </a:r>
-            <a:r>
-              <a:rPr b="1"/>
-              <a:t>CV scheme that matches the claim</a:t>
-            </a:r>
-            <a:r>
-              <a:rPr/>
-              <a:t> you intend to make</a:t>
-            </a:r>
-          </a:p>
-          <a:p>
-            <a:pPr lvl="0"/>
-            <a:r>
-              <a:rPr/>
-              <a:t>Recognise the three leakages: preprocessing, selection, dependence</a:t>
-            </a:r>
-          </a:p>
-          <a:p>
-            <a:pPr lvl="0"/>
-            <a:r>
-              <a:rPr/>
-              <a:t>Quantify, on real data, what the wrong split costs you</a:t>
             </a:r>
           </a:p>
         </p:txBody>
